--- a/CNN/Object detection_YOLO.pptx
+++ b/CNN/Object detection_YOLO.pptx
@@ -5,10 +5,10 @@
     <p:sldMasterId id="2147483660" r:id="rId1"/>
   </p:sldMasterIdLst>
   <p:notesMasterIdLst>
-    <p:notesMasterId r:id="rId14"/>
+    <p:notesMasterId r:id="rId15"/>
   </p:notesMasterIdLst>
   <p:handoutMasterIdLst>
-    <p:handoutMasterId r:id="rId15"/>
+    <p:handoutMasterId r:id="rId16"/>
   </p:handoutMasterIdLst>
   <p:sldIdLst>
     <p:sldId id="256" r:id="rId2"/>
@@ -20,9 +20,10 @@
     <p:sldId id="1130" r:id="rId8"/>
     <p:sldId id="1127" r:id="rId9"/>
     <p:sldId id="1121" r:id="rId10"/>
-    <p:sldId id="1132" r:id="rId11"/>
-    <p:sldId id="1122" r:id="rId12"/>
-    <p:sldId id="1123" r:id="rId13"/>
+    <p:sldId id="1133" r:id="rId11"/>
+    <p:sldId id="1132" r:id="rId12"/>
+    <p:sldId id="1122" r:id="rId13"/>
+    <p:sldId id="1123" r:id="rId14"/>
   </p:sldIdLst>
   <p:sldSz cx="12192000" cy="6858000"/>
   <p:notesSz cx="6858000" cy="9144000"/>
@@ -142,6 +143,7 @@
             <p14:sldId id="1130"/>
             <p14:sldId id="1127"/>
             <p14:sldId id="1121"/>
+            <p14:sldId id="1133"/>
             <p14:sldId id="1132"/>
             <p14:sldId id="1122"/>
             <p14:sldId id="1123"/>
@@ -3282,6 +3284,1515 @@
         <p:cNvPr id="1" name="">
           <a:extLst>
             <a:ext uri="{FF2B5EF4-FFF2-40B4-BE49-F238E27FC236}">
+              <a16:creationId xmlns:a16="http://schemas.microsoft.com/office/drawing/2014/main" id="{ED508830-D819-D25F-AB4C-FBB5ACD20A8A}"/>
+            </a:ext>
+          </a:extLst>
+        </p:cNvPr>
+        <p:cNvGrpSpPr/>
+        <p:nvPr/>
+      </p:nvGrpSpPr>
+      <p:grpSpPr>
+        <a:xfrm>
+          <a:off x="0" y="0"/>
+          <a:ext cx="0" cy="0"/>
+          <a:chOff x="0" y="0"/>
+          <a:chExt cx="0" cy="0"/>
+        </a:xfrm>
+      </p:grpSpPr>
+      <p:sp>
+        <p:nvSpPr>
+          <p:cNvPr id="4" name="슬라이드 번호 개체 틀 3">
+            <a:extLst>
+              <a:ext uri="{FF2B5EF4-FFF2-40B4-BE49-F238E27FC236}">
+                <a16:creationId xmlns:a16="http://schemas.microsoft.com/office/drawing/2014/main" id="{8DC1CEE3-0649-145F-2638-11E923B7FC3E}"/>
+              </a:ext>
+            </a:extLst>
+          </p:cNvPr>
+          <p:cNvSpPr>
+            <a:spLocks noGrp="1"/>
+          </p:cNvSpPr>
+          <p:nvPr>
+            <p:ph type="sldNum" sz="quarter" idx="12"/>
+          </p:nvPr>
+        </p:nvSpPr>
+        <p:spPr>
+          <a:xfrm>
+            <a:off x="10514011" y="6036261"/>
+            <a:ext cx="753545" cy="365125"/>
+          </a:xfrm>
+        </p:spPr>
+        <p:txBody>
+          <a:bodyPr/>
+          <a:lstStyle/>
+          <a:p>
+            <a:fld id="{D57F1E4F-1CFF-5643-939E-217C01CDF565}" type="slidenum">
+              <a:rPr lang="en-US" smtClean="0"/>
+              <a:pPr/>
+              <a:t>10</a:t>
+            </a:fld>
+            <a:endParaRPr lang="en-US" dirty="0"/>
+          </a:p>
+        </p:txBody>
+      </p:sp>
+      <p:sp>
+        <p:nvSpPr>
+          <p:cNvPr id="3" name="제목 1">
+            <a:extLst>
+              <a:ext uri="{FF2B5EF4-FFF2-40B4-BE49-F238E27FC236}">
+                <a16:creationId xmlns:a16="http://schemas.microsoft.com/office/drawing/2014/main" id="{612D1010-6371-3BEA-32BD-CD0BB50827CC}"/>
+              </a:ext>
+            </a:extLst>
+          </p:cNvPr>
+          <p:cNvSpPr txBox="1">
+            <a:spLocks/>
+          </p:cNvSpPr>
+          <p:nvPr/>
+        </p:nvSpPr>
+        <p:spPr>
+          <a:xfrm>
+            <a:off x="475645" y="481983"/>
+            <a:ext cx="10353762" cy="766439"/>
+          </a:xfrm>
+          <a:prstGeom prst="rect">
+            <a:avLst/>
+          </a:prstGeom>
+        </p:spPr>
+        <p:txBody>
+          <a:bodyPr vert="horz" lIns="91440" tIns="45720" rIns="91440" bIns="45720" rtlCol="0" anchor="ctr">
+            <a:normAutofit/>
+          </a:bodyPr>
+          <a:lstStyle>
+            <a:lvl1pPr algn="ctr" defTabSz="914400" rtl="0" eaLnBrk="1" latinLnBrk="1" hangingPunct="1">
+              <a:lnSpc>
+                <a:spcPct val="90000"/>
+              </a:lnSpc>
+              <a:spcBef>
+                <a:spcPct val="0"/>
+              </a:spcBef>
+              <a:buNone/>
+              <a:defRPr sz="3200" kern="1200" cap="all" baseline="0">
+                <a:solidFill>
+                  <a:schemeClr val="tx1"/>
+                </a:solidFill>
+                <a:effectLst/>
+                <a:latin typeface="Batang" panose="02030600000101010101" pitchFamily="18" charset="-127"/>
+                <a:ea typeface="Batang" panose="02030600000101010101" pitchFamily="18" charset="-127"/>
+                <a:cs typeface="+mj-cs"/>
+              </a:defRPr>
+            </a:lvl1pPr>
+          </a:lstStyle>
+          <a:p>
+            <a:pPr algn="l"/>
+            <a:r>
+              <a:rPr lang="en-US" altLang="ko-KR" sz="2800" cap="none" dirty="0">
+                <a:latin typeface="D2Coding" panose="020B0609020101020101" pitchFamily="49" charset="-127"/>
+                <a:ea typeface="D2Coding" panose="020B0609020101020101" pitchFamily="49" charset="-127"/>
+                <a:cs typeface="Segoe UI Light" panose="020B0502040204020203" pitchFamily="34" charset="0"/>
+              </a:rPr>
+              <a:t>YOLO: </a:t>
+            </a:r>
+            <a:r>
+              <a:rPr lang="en-US" altLang="ko-KR" sz="2800" cap="none" dirty="0">
+                <a:latin typeface="D2Coding" panose="020B0609020101020101" pitchFamily="49" charset="-127"/>
+                <a:ea typeface="D2Coding" panose="020B0609020101020101" pitchFamily="49" charset="-127"/>
+                <a:cs typeface="Segoe UI Light" panose="020B0502040204020203" pitchFamily="34" charset="0"/>
+                <a:hlinkClick r:id="rId2">
+                  <a:extLst>
+                    <a:ext uri="{A12FA001-AC4F-418D-AE19-62706E023703}">
+                      <ahyp:hlinkClr xmlns:ahyp="http://schemas.microsoft.com/office/drawing/2018/hyperlinkcolor" val="tx"/>
+                    </a:ext>
+                  </a:extLst>
+                </a:hlinkClick>
+              </a:rPr>
+              <a:t>YOLO Object Detection</a:t>
+            </a:r>
+            <a:endParaRPr lang="ko-KR" altLang="en-US" sz="2800" cap="none" dirty="0">
+              <a:latin typeface="D2Coding" panose="020B0609020101020101" pitchFamily="49" charset="-127"/>
+              <a:ea typeface="D2Coding" panose="020B0609020101020101" pitchFamily="49" charset="-127"/>
+              <a:cs typeface="Segoe UI Light" panose="020B0502040204020203" pitchFamily="34" charset="0"/>
+            </a:endParaRPr>
+          </a:p>
+        </p:txBody>
+      </p:sp>
+      <p:sp>
+        <p:nvSpPr>
+          <p:cNvPr id="5" name="TextBox 4">
+            <a:extLst>
+              <a:ext uri="{FF2B5EF4-FFF2-40B4-BE49-F238E27FC236}">
+                <a16:creationId xmlns:a16="http://schemas.microsoft.com/office/drawing/2014/main" id="{EFAA0612-FCB5-F296-ABEE-CFFF8EE4E96C}"/>
+              </a:ext>
+            </a:extLst>
+          </p:cNvPr>
+          <p:cNvSpPr txBox="1"/>
+          <p:nvPr/>
+        </p:nvSpPr>
+        <p:spPr>
+          <a:xfrm>
+            <a:off x="553752" y="1264398"/>
+            <a:ext cx="11409648" cy="1162498"/>
+          </a:xfrm>
+          <a:prstGeom prst="rect">
+            <a:avLst/>
+          </a:prstGeom>
+          <a:noFill/>
+        </p:spPr>
+        <p:txBody>
+          <a:bodyPr wrap="square">
+            <a:spAutoFit/>
+          </a:bodyPr>
+          <a:lstStyle/>
+          <a:p>
+            <a:pPr>
+              <a:lnSpc>
+                <a:spcPct val="150000"/>
+              </a:lnSpc>
+            </a:pPr>
+            <a:r>
+              <a:rPr lang="en-US" altLang="ko-KR" sz="1600" dirty="0">
+                <a:solidFill>
+                  <a:srgbClr val="1F1F1F"/>
+                </a:solidFill>
+                <a:latin typeface="D2Coding" panose="020B0609020101020101" pitchFamily="49" charset="-127"/>
+                <a:ea typeface="D2Coding" panose="020B0609020101020101" pitchFamily="49" charset="-127"/>
+              </a:rPr>
+              <a:t>Bounding Box</a:t>
+            </a:r>
+            <a:r>
+              <a:rPr lang="ko-KR" altLang="en-US" sz="1600" dirty="0">
+                <a:solidFill>
+                  <a:srgbClr val="1F1F1F"/>
+                </a:solidFill>
+                <a:latin typeface="D2Coding" panose="020B0609020101020101" pitchFamily="49" charset="-127"/>
+                <a:ea typeface="D2Coding" panose="020B0609020101020101" pitchFamily="49" charset="-127"/>
+              </a:rPr>
+              <a:t>를 </a:t>
+            </a:r>
+            <a:r>
+              <a:rPr lang="ko-KR" altLang="en-US" sz="1600" i="0" dirty="0">
+                <a:solidFill>
+                  <a:srgbClr val="1F1F1F"/>
+                </a:solidFill>
+                <a:effectLst/>
+                <a:latin typeface="D2Coding" panose="020B0609020101020101" pitchFamily="49" charset="-127"/>
+                <a:ea typeface="D2Coding" panose="020B0609020101020101" pitchFamily="49" charset="-127"/>
+              </a:rPr>
+              <a:t>그리는 과정은 나의 체형에 가장 잘 맞는 </a:t>
+            </a:r>
+            <a:r>
+              <a:rPr lang="ko-KR" altLang="en-US" sz="1600" dirty="0">
+                <a:solidFill>
+                  <a:srgbClr val="1F1F1F"/>
+                </a:solidFill>
+                <a:latin typeface="D2Coding" panose="020B0609020101020101" pitchFamily="49" charset="-127"/>
+                <a:ea typeface="D2Coding" panose="020B0609020101020101" pitchFamily="49" charset="-127"/>
+              </a:rPr>
+              <a:t>기성복 사이즈</a:t>
+            </a:r>
+            <a:r>
+              <a:rPr lang="en-US" altLang="ko-KR" sz="1600" dirty="0">
+                <a:solidFill>
+                  <a:srgbClr val="1F1F1F"/>
+                </a:solidFill>
+                <a:latin typeface="D2Coding" panose="020B0609020101020101" pitchFamily="49" charset="-127"/>
+                <a:ea typeface="D2Coding" panose="020B0609020101020101" pitchFamily="49" charset="-127"/>
+              </a:rPr>
+              <a:t>(Anchor Box)</a:t>
+            </a:r>
+            <a:r>
+              <a:rPr lang="ko-KR" altLang="en-US" sz="1600" dirty="0">
+                <a:solidFill>
+                  <a:srgbClr val="1F1F1F"/>
+                </a:solidFill>
+                <a:latin typeface="D2Coding" panose="020B0609020101020101" pitchFamily="49" charset="-127"/>
+                <a:ea typeface="D2Coding" panose="020B0609020101020101" pitchFamily="49" charset="-127"/>
+              </a:rPr>
+              <a:t>을</a:t>
+            </a:r>
+            <a:r>
+              <a:rPr lang="en-US" altLang="ko-KR" sz="1600" dirty="0">
+                <a:solidFill>
+                  <a:srgbClr val="1F1F1F"/>
+                </a:solidFill>
+                <a:latin typeface="D2Coding" panose="020B0609020101020101" pitchFamily="49" charset="-127"/>
+                <a:ea typeface="D2Coding" panose="020B0609020101020101" pitchFamily="49" charset="-127"/>
+              </a:rPr>
+              <a:t> </a:t>
+            </a:r>
+            <a:r>
+              <a:rPr lang="ko-KR" altLang="en-US" sz="1600" i="0" dirty="0">
+                <a:solidFill>
+                  <a:srgbClr val="1F1F1F"/>
+                </a:solidFill>
+                <a:effectLst/>
+                <a:latin typeface="D2Coding" panose="020B0609020101020101" pitchFamily="49" charset="-127"/>
+                <a:ea typeface="D2Coding" panose="020B0609020101020101" pitchFamily="49" charset="-127"/>
+              </a:rPr>
+              <a:t>고른 뒤</a:t>
+            </a:r>
+            <a:r>
+              <a:rPr lang="en-US" altLang="ko-KR" sz="1600" i="0" dirty="0">
+                <a:solidFill>
+                  <a:srgbClr val="1F1F1F"/>
+                </a:solidFill>
+                <a:effectLst/>
+                <a:latin typeface="D2Coding" panose="020B0609020101020101" pitchFamily="49" charset="-127"/>
+                <a:ea typeface="D2Coding" panose="020B0609020101020101" pitchFamily="49" charset="-127"/>
+              </a:rPr>
+              <a:t>, </a:t>
+            </a:r>
+            <a:r>
+              <a:rPr lang="ko-KR" altLang="en-US" sz="1600" i="0" dirty="0">
+                <a:solidFill>
+                  <a:srgbClr val="1F1F1F"/>
+                </a:solidFill>
+                <a:effectLst/>
+                <a:latin typeface="D2Coding" panose="020B0609020101020101" pitchFamily="49" charset="-127"/>
+                <a:ea typeface="D2Coding" panose="020B0609020101020101" pitchFamily="49" charset="-127"/>
+              </a:rPr>
+              <a:t>팔 길이나 품을 미세하게 수선해서</a:t>
+            </a:r>
+            <a:r>
+              <a:rPr lang="en-US" altLang="ko-KR" sz="1600" dirty="0">
+                <a:solidFill>
+                  <a:srgbClr val="1F1F1F"/>
+                </a:solidFill>
+                <a:latin typeface="D2Coding" panose="020B0609020101020101" pitchFamily="49" charset="-127"/>
+                <a:ea typeface="D2Coding" panose="020B0609020101020101" pitchFamily="49" charset="-127"/>
+              </a:rPr>
+              <a:t>(gradient descent)</a:t>
+            </a:r>
+            <a:r>
+              <a:rPr lang="ko-KR" altLang="en-US" sz="1600" i="0" dirty="0">
+                <a:solidFill>
+                  <a:srgbClr val="1F1F1F"/>
+                </a:solidFill>
+                <a:effectLst/>
+                <a:latin typeface="D2Coding" panose="020B0609020101020101" pitchFamily="49" charset="-127"/>
+                <a:ea typeface="D2Coding" panose="020B0609020101020101" pitchFamily="49" charset="-127"/>
+              </a:rPr>
+              <a:t> 몸에 딱 맞게</a:t>
+            </a:r>
+            <a:r>
+              <a:rPr lang="en-US" altLang="ko-KR" sz="1600" i="0" dirty="0">
+                <a:solidFill>
+                  <a:srgbClr val="1F1F1F"/>
+                </a:solidFill>
+                <a:effectLst/>
+                <a:latin typeface="D2Coding" panose="020B0609020101020101" pitchFamily="49" charset="-127"/>
+                <a:ea typeface="D2Coding" panose="020B0609020101020101" pitchFamily="49" charset="-127"/>
+              </a:rPr>
+              <a:t>(</a:t>
+            </a:r>
+            <a:r>
+              <a:rPr lang="ko-KR" altLang="en-US" sz="1600" i="0" dirty="0">
+                <a:solidFill>
+                  <a:srgbClr val="1F1F1F"/>
+                </a:solidFill>
+                <a:effectLst/>
+                <a:latin typeface="D2Coding" panose="020B0609020101020101" pitchFamily="49" charset="-127"/>
+                <a:ea typeface="D2Coding" panose="020B0609020101020101" pitchFamily="49" charset="-127"/>
+              </a:rPr>
+              <a:t>신뢰도가 최대가 되게 </a:t>
+            </a:r>
+            <a:r>
+              <a:rPr lang="en-US" altLang="ko-KR" sz="1600" i="0" dirty="0">
+                <a:solidFill>
+                  <a:srgbClr val="1F1F1F"/>
+                </a:solidFill>
+                <a:effectLst/>
+                <a:latin typeface="D2Coding" panose="020B0609020101020101" pitchFamily="49" charset="-127"/>
+                <a:ea typeface="D2Coding" panose="020B0609020101020101" pitchFamily="49" charset="-127"/>
+              </a:rPr>
+              <a:t>0.88</a:t>
+            </a:r>
+            <a:r>
+              <a:rPr lang="ko-KR" altLang="en-US" sz="1600" i="0" dirty="0">
+                <a:solidFill>
+                  <a:srgbClr val="1F1F1F"/>
+                </a:solidFill>
+                <a:effectLst/>
+                <a:latin typeface="D2Coding" panose="020B0609020101020101" pitchFamily="49" charset="-127"/>
+                <a:ea typeface="D2Coding" panose="020B0609020101020101" pitchFamily="49" charset="-127"/>
+              </a:rPr>
+              <a:t>에서</a:t>
+            </a:r>
+            <a:r>
+              <a:rPr lang="en-US" altLang="ko-KR" sz="1600" i="0" dirty="0">
+                <a:solidFill>
+                  <a:srgbClr val="1F1F1F"/>
+                </a:solidFill>
+                <a:effectLst/>
+                <a:latin typeface="D2Coding" panose="020B0609020101020101" pitchFamily="49" charset="-127"/>
+                <a:ea typeface="D2Coding" panose="020B0609020101020101" pitchFamily="49" charset="-127"/>
+              </a:rPr>
+              <a:t> 1.00</a:t>
+            </a:r>
+            <a:r>
+              <a:rPr lang="ko-KR" altLang="en-US" sz="1600" i="0" dirty="0">
+                <a:solidFill>
+                  <a:srgbClr val="1F1F1F"/>
+                </a:solidFill>
+                <a:effectLst/>
+                <a:latin typeface="D2Coding" panose="020B0609020101020101" pitchFamily="49" charset="-127"/>
+                <a:ea typeface="D2Coding" panose="020B0609020101020101" pitchFamily="49" charset="-127"/>
+              </a:rPr>
+              <a:t>까지</a:t>
+            </a:r>
+            <a:r>
+              <a:rPr lang="en-US" altLang="ko-KR" sz="1600" i="0" dirty="0">
+                <a:solidFill>
+                  <a:srgbClr val="1F1F1F"/>
+                </a:solidFill>
+                <a:effectLst/>
+                <a:latin typeface="D2Coding" panose="020B0609020101020101" pitchFamily="49" charset="-127"/>
+                <a:ea typeface="D2Coding" panose="020B0609020101020101" pitchFamily="49" charset="-127"/>
+              </a:rPr>
+              <a:t>)</a:t>
+            </a:r>
+            <a:r>
+              <a:rPr lang="ko-KR" altLang="en-US" sz="1600" i="0" dirty="0">
+                <a:solidFill>
+                  <a:srgbClr val="1F1F1F"/>
+                </a:solidFill>
+                <a:effectLst/>
+                <a:latin typeface="D2Coding" panose="020B0609020101020101" pitchFamily="49" charset="-127"/>
+                <a:ea typeface="D2Coding" panose="020B0609020101020101" pitchFamily="49" charset="-127"/>
+              </a:rPr>
+              <a:t> </a:t>
+            </a:r>
+            <a:r>
+              <a:rPr lang="en-US" altLang="ko-KR" sz="1600" dirty="0">
+                <a:solidFill>
+                  <a:srgbClr val="1F1F1F"/>
+                </a:solidFill>
+                <a:latin typeface="D2Coding" panose="020B0609020101020101" pitchFamily="49" charset="-127"/>
+                <a:ea typeface="D2Coding" panose="020B0609020101020101" pitchFamily="49" charset="-127"/>
+              </a:rPr>
+              <a:t>Regression </a:t>
+            </a:r>
+            <a:r>
+              <a:rPr lang="ko-KR" altLang="en-US" sz="1600" dirty="0">
+                <a:solidFill>
+                  <a:srgbClr val="1F1F1F"/>
+                </a:solidFill>
+                <a:latin typeface="D2Coding" panose="020B0609020101020101" pitchFamily="49" charset="-127"/>
+                <a:ea typeface="D2Coding" panose="020B0609020101020101" pitchFamily="49" charset="-127"/>
+              </a:rPr>
+              <a:t>손실함수를 최소로 하는 최종 맞춤복</a:t>
+            </a:r>
+            <a:r>
+              <a:rPr lang="en-US" altLang="ko-KR" sz="1600" dirty="0">
+                <a:solidFill>
+                  <a:srgbClr val="1F1F1F"/>
+                </a:solidFill>
+                <a:latin typeface="D2Coding" panose="020B0609020101020101" pitchFamily="49" charset="-127"/>
+                <a:ea typeface="D2Coding" panose="020B0609020101020101" pitchFamily="49" charset="-127"/>
+              </a:rPr>
+              <a:t>(Bounding Box)</a:t>
+            </a:r>
+            <a:r>
+              <a:rPr lang="ko-KR" altLang="en-US" sz="1600" dirty="0">
+                <a:solidFill>
+                  <a:srgbClr val="1F1F1F"/>
+                </a:solidFill>
+                <a:latin typeface="D2Coding" panose="020B0609020101020101" pitchFamily="49" charset="-127"/>
+                <a:ea typeface="D2Coding" panose="020B0609020101020101" pitchFamily="49" charset="-127"/>
+              </a:rPr>
+              <a:t>을 구하는 것에 비유</a:t>
+            </a:r>
+            <a:endParaRPr lang="en-US" altLang="ko-KR" sz="1600" i="0" dirty="0">
+              <a:solidFill>
+                <a:srgbClr val="1F1F1F"/>
+              </a:solidFill>
+              <a:effectLst/>
+              <a:latin typeface="D2Coding" panose="020B0609020101020101" pitchFamily="49" charset="-127"/>
+              <a:ea typeface="D2Coding" panose="020B0609020101020101" pitchFamily="49" charset="-127"/>
+            </a:endParaRPr>
+          </a:p>
+        </p:txBody>
+      </p:sp>
+      <p:grpSp>
+        <p:nvGrpSpPr>
+          <p:cNvPr id="17" name="그룹 16">
+            <a:extLst>
+              <a:ext uri="{FF2B5EF4-FFF2-40B4-BE49-F238E27FC236}">
+                <a16:creationId xmlns:a16="http://schemas.microsoft.com/office/drawing/2014/main" id="{7F2303C9-E1C8-DDD5-4BB5-662B9A16C74D}"/>
+              </a:ext>
+            </a:extLst>
+          </p:cNvPr>
+          <p:cNvGrpSpPr/>
+          <p:nvPr/>
+        </p:nvGrpSpPr>
+        <p:grpSpPr>
+          <a:xfrm>
+            <a:off x="695325" y="5386833"/>
+            <a:ext cx="6385803" cy="624922"/>
+            <a:chOff x="705033" y="3681004"/>
+            <a:chExt cx="6463832" cy="632558"/>
+          </a:xfrm>
+        </p:grpSpPr>
+        <p:pic>
+          <p:nvPicPr>
+            <p:cNvPr id="7" name="그림 6">
+              <a:extLst>
+                <a:ext uri="{FF2B5EF4-FFF2-40B4-BE49-F238E27FC236}">
+                  <a16:creationId xmlns:a16="http://schemas.microsoft.com/office/drawing/2014/main" id="{DD39FDEA-C717-CF9F-E35C-B639C84D822D}"/>
+                </a:ext>
+              </a:extLst>
+            </p:cNvPr>
+            <p:cNvPicPr>
+              <a:picLocks noChangeAspect="1"/>
+            </p:cNvPicPr>
+            <p:nvPr/>
+          </p:nvPicPr>
+          <p:blipFill>
+            <a:blip r:embed="rId3"/>
+            <a:stretch>
+              <a:fillRect/>
+            </a:stretch>
+          </p:blipFill>
+          <p:spPr>
+            <a:xfrm>
+              <a:off x="705033" y="3700054"/>
+              <a:ext cx="5563287" cy="609761"/>
+            </a:xfrm>
+            <a:prstGeom prst="rect">
+              <a:avLst/>
+            </a:prstGeom>
+          </p:spPr>
+        </p:pic>
+        <p:pic>
+          <p:nvPicPr>
+            <p:cNvPr id="8" name="그림 7">
+              <a:extLst>
+                <a:ext uri="{FF2B5EF4-FFF2-40B4-BE49-F238E27FC236}">
+                  <a16:creationId xmlns:a16="http://schemas.microsoft.com/office/drawing/2014/main" id="{3A97F7EA-3D02-822C-F03A-4C0F1B07D694}"/>
+                </a:ext>
+              </a:extLst>
+            </p:cNvPr>
+            <p:cNvPicPr>
+              <a:picLocks noChangeAspect="1"/>
+            </p:cNvPicPr>
+            <p:nvPr/>
+          </p:nvPicPr>
+          <p:blipFill>
+            <a:blip r:embed="rId4"/>
+            <a:stretch>
+              <a:fillRect/>
+            </a:stretch>
+          </p:blipFill>
+          <p:spPr>
+            <a:xfrm>
+              <a:off x="6257236" y="3681004"/>
+              <a:ext cx="911629" cy="632558"/>
+            </a:xfrm>
+            <a:prstGeom prst="rect">
+              <a:avLst/>
+            </a:prstGeom>
+          </p:spPr>
+        </p:pic>
+      </p:grpSp>
+      <p:grpSp>
+        <p:nvGrpSpPr>
+          <p:cNvPr id="18" name="그룹 17">
+            <a:extLst>
+              <a:ext uri="{FF2B5EF4-FFF2-40B4-BE49-F238E27FC236}">
+                <a16:creationId xmlns:a16="http://schemas.microsoft.com/office/drawing/2014/main" id="{B92D002C-45C1-44AD-CD55-B683ECC4F301}"/>
+              </a:ext>
+            </a:extLst>
+          </p:cNvPr>
+          <p:cNvGrpSpPr/>
+          <p:nvPr/>
+        </p:nvGrpSpPr>
+        <p:grpSpPr>
+          <a:xfrm>
+            <a:off x="620270" y="3342136"/>
+            <a:ext cx="2883229" cy="1341080"/>
+            <a:chOff x="1060059" y="3447380"/>
+            <a:chExt cx="4391735" cy="2042732"/>
+          </a:xfrm>
+        </p:grpSpPr>
+        <p:pic>
+          <p:nvPicPr>
+            <p:cNvPr id="9" name="그래픽 8" descr="자동차">
+              <a:extLst>
+                <a:ext uri="{FF2B5EF4-FFF2-40B4-BE49-F238E27FC236}">
+                  <a16:creationId xmlns:a16="http://schemas.microsoft.com/office/drawing/2014/main" id="{87023EC9-73D2-EE4F-FA69-97F617997B7F}"/>
+                </a:ext>
+              </a:extLst>
+            </p:cNvPr>
+            <p:cNvPicPr>
+              <a:picLocks noChangeAspect="1"/>
+            </p:cNvPicPr>
+            <p:nvPr/>
+          </p:nvPicPr>
+          <p:blipFill>
+            <a:blip r:embed="rId5">
+              <a:extLst>
+                <a:ext uri="{96DAC541-7B7A-43D3-8B79-37D633B846F1}">
+                  <asvg:svgBlip xmlns:asvg="http://schemas.microsoft.com/office/drawing/2016/SVG/main" r:embed="rId6"/>
+                </a:ext>
+              </a:extLst>
+            </a:blip>
+            <a:stretch>
+              <a:fillRect/>
+            </a:stretch>
+          </p:blipFill>
+          <p:spPr>
+            <a:xfrm>
+              <a:off x="1261944" y="3482595"/>
+              <a:ext cx="1527992" cy="1527992"/>
+            </a:xfrm>
+            <a:prstGeom prst="rect">
+              <a:avLst/>
+            </a:prstGeom>
+          </p:spPr>
+        </p:pic>
+        <mc:AlternateContent xmlns:mc="http://schemas.openxmlformats.org/markup-compatibility/2006">
+          <mc:Choice xmlns:a14="http://schemas.microsoft.com/office/drawing/2010/main" Requires="a14">
+            <p:sp>
+              <p:nvSpPr>
+                <p:cNvPr id="10" name="TextBox 9">
+                  <a:extLst>
+                    <a:ext uri="{FF2B5EF4-FFF2-40B4-BE49-F238E27FC236}">
+                      <a16:creationId xmlns:a16="http://schemas.microsoft.com/office/drawing/2014/main" id="{AADF4AEB-33E8-64BB-60C6-068B2AAB030B}"/>
+                    </a:ext>
+                  </a:extLst>
+                </p:cNvPr>
+                <p:cNvSpPr txBox="1"/>
+                <p:nvPr/>
+              </p:nvSpPr>
+              <p:spPr>
+                <a:xfrm>
+                  <a:off x="1133611" y="4937215"/>
+                  <a:ext cx="4318183" cy="552897"/>
+                </a:xfrm>
+                <a:prstGeom prst="rect">
+                  <a:avLst/>
+                </a:prstGeom>
+                <a:noFill/>
+              </p:spPr>
+              <p:txBody>
+                <a:bodyPr wrap="square">
+                  <a:spAutoFit/>
+                </a:bodyPr>
+                <a:lstStyle/>
+                <a:p>
+                  <a14:m>
+                    <m:oMath xmlns:m="http://schemas.openxmlformats.org/officeDocument/2006/math">
+                      <m:sSub>
+                        <m:sSubPr>
+                          <m:ctrlPr>
+                            <a:rPr lang="ko-KR" altLang="en-US" smtClean="0">
+                              <a:latin typeface="Cambria Math" panose="02040503050406030204" pitchFamily="18" charset="0"/>
+                            </a:rPr>
+                          </m:ctrlPr>
+                        </m:sSubPr>
+                        <m:e>
+                          <m:r>
+                            <a:rPr lang="ko-KR" altLang="en-US" i="1" smtClean="0">
+                              <a:latin typeface="Cambria Math" panose="02040503050406030204" pitchFamily="18" charset="0"/>
+                            </a:rPr>
+                            <m:t>𝑦</m:t>
+                          </m:r>
+                        </m:e>
+                        <m:sub>
+                          <m:r>
+                            <a:rPr lang="ko-KR" altLang="en-US" i="0" smtClean="0">
+                              <a:latin typeface="Cambria Math" panose="02040503050406030204" pitchFamily="18" charset="0"/>
+                            </a:rPr>
+                            <m:t>1</m:t>
+                          </m:r>
+                        </m:sub>
+                      </m:sSub>
+                    </m:oMath>
+                  </a14:m>
+                  <a:r>
+                    <a:rPr lang="ko-KR" altLang="en-US" sz="1600" dirty="0"/>
+                    <a:t> </a:t>
+                  </a:r>
+                  <a:r>
+                    <a:rPr lang="en-US" altLang="ko-KR" sz="1600" dirty="0"/>
+                    <a:t>=</a:t>
+                  </a:r>
+                  <a:r>
+                    <a:rPr lang="ko-KR" altLang="en-US" sz="1600" dirty="0"/>
+                    <a:t> </a:t>
+                  </a:r>
+                  <a:r>
+                    <a:rPr lang="en-US" altLang="ko-KR" sz="1600" dirty="0"/>
+                    <a:t>[1,</a:t>
+                  </a:r>
+                  <a:r>
+                    <a:rPr lang="ko-KR" altLang="en-US" sz="1600" dirty="0"/>
+                    <a:t>  0.5</a:t>
+                  </a:r>
+                  <a:r>
+                    <a:rPr lang="en-US" altLang="ko-KR" sz="1600" dirty="0"/>
+                    <a:t>,</a:t>
+                  </a:r>
+                  <a:r>
+                    <a:rPr lang="ko-KR" altLang="en-US" sz="1600" dirty="0"/>
+                    <a:t> 0.5</a:t>
+                  </a:r>
+                  <a:r>
+                    <a:rPr lang="en-US" altLang="ko-KR" sz="1600" dirty="0"/>
+                    <a:t>,</a:t>
+                  </a:r>
+                  <a:r>
+                    <a:rPr lang="ko-KR" altLang="en-US" sz="1600" dirty="0"/>
+                    <a:t> 0.64</a:t>
+                  </a:r>
+                  <a:r>
+                    <a:rPr lang="en-US" altLang="ko-KR" sz="1600" dirty="0"/>
+                    <a:t>,</a:t>
+                  </a:r>
+                  <a:r>
+                    <a:rPr lang="ko-KR" altLang="en-US" sz="1600" dirty="0"/>
+                    <a:t> 0.42</a:t>
+                  </a:r>
+                  <a:r>
+                    <a:rPr lang="en-US" altLang="ko-KR" sz="1600" dirty="0"/>
+                    <a:t>]</a:t>
+                  </a:r>
+                  <a:endParaRPr lang="ko-KR" altLang="en-US" sz="1600" dirty="0"/>
+                </a:p>
+              </p:txBody>
+            </p:sp>
+          </mc:Choice>
+          <mc:Fallback>
+            <p:sp>
+              <p:nvSpPr>
+                <p:cNvPr id="10" name="TextBox 9">
+                  <a:extLst>
+                    <a:ext uri="{FF2B5EF4-FFF2-40B4-BE49-F238E27FC236}">
+                      <a16:creationId xmlns:a16="http://schemas.microsoft.com/office/drawing/2014/main" id="{AADF4AEB-33E8-64BB-60C6-068B2AAB030B}"/>
+                    </a:ext>
+                  </a:extLst>
+                </p:cNvPr>
+                <p:cNvSpPr txBox="1">
+                  <a:spLocks noRot="1" noChangeAspect="1" noMove="1" noResize="1" noEditPoints="1" noAdjustHandles="1" noChangeArrowheads="1" noChangeShapeType="1" noTextEdit="1"/>
+                </p:cNvSpPr>
+                <p:nvPr/>
+              </p:nvSpPr>
+              <p:spPr>
+                <a:xfrm>
+                  <a:off x="1133611" y="4937215"/>
+                  <a:ext cx="4318183" cy="552897"/>
+                </a:xfrm>
+                <a:prstGeom prst="rect">
+                  <a:avLst/>
+                </a:prstGeom>
+                <a:blipFill>
+                  <a:blip r:embed="rId7"/>
+                  <a:stretch>
+                    <a:fillRect b="-20339"/>
+                  </a:stretch>
+                </a:blipFill>
+              </p:spPr>
+              <p:txBody>
+                <a:bodyPr/>
+                <a:lstStyle/>
+                <a:p>
+                  <a:r>
+                    <a:rPr lang="ko-KR" altLang="en-US">
+                      <a:noFill/>
+                    </a:rPr>
+                    <a:t> </a:t>
+                  </a:r>
+                </a:p>
+              </p:txBody>
+            </p:sp>
+          </mc:Fallback>
+        </mc:AlternateContent>
+        <p:sp>
+          <p:nvSpPr>
+            <p:cNvPr id="11" name="직사각형 10">
+              <a:extLst>
+                <a:ext uri="{FF2B5EF4-FFF2-40B4-BE49-F238E27FC236}">
+                  <a16:creationId xmlns:a16="http://schemas.microsoft.com/office/drawing/2014/main" id="{DA6ED7E8-1330-13E7-3D47-9D20214DD6A9}"/>
+                </a:ext>
+              </a:extLst>
+            </p:cNvPr>
+            <p:cNvSpPr/>
+            <p:nvPr/>
+          </p:nvSpPr>
+          <p:spPr>
+            <a:xfrm>
+              <a:off x="1060059" y="3447380"/>
+              <a:ext cx="1729877" cy="1374301"/>
+            </a:xfrm>
+            <a:prstGeom prst="rect">
+              <a:avLst/>
+            </a:prstGeom>
+            <a:noFill/>
+            <a:ln w="19050">
+              <a:solidFill>
+                <a:srgbClr val="404040"/>
+              </a:solidFill>
+            </a:ln>
+          </p:spPr>
+          <p:style>
+            <a:lnRef idx="2">
+              <a:schemeClr val="accent1">
+                <a:shade val="15000"/>
+              </a:schemeClr>
+            </a:lnRef>
+            <a:fillRef idx="1">
+              <a:schemeClr val="accent1"/>
+            </a:fillRef>
+            <a:effectRef idx="0">
+              <a:schemeClr val="accent1"/>
+            </a:effectRef>
+            <a:fontRef idx="minor">
+              <a:schemeClr val="lt1"/>
+            </a:fontRef>
+          </p:style>
+          <p:txBody>
+            <a:bodyPr rtlCol="0" anchor="ctr"/>
+            <a:lstStyle/>
+            <a:p>
+              <a:pPr algn="ctr"/>
+              <a:endParaRPr lang="ko-KR" altLang="en-US" dirty="0"/>
+            </a:p>
+          </p:txBody>
+        </p:sp>
+        <p:sp>
+          <p:nvSpPr>
+            <p:cNvPr id="14" name="곱하기 기호 13">
+              <a:extLst>
+                <a:ext uri="{FF2B5EF4-FFF2-40B4-BE49-F238E27FC236}">
+                  <a16:creationId xmlns:a16="http://schemas.microsoft.com/office/drawing/2014/main" id="{B77C880E-312C-4A17-8819-0AFD934BFD4D}"/>
+                </a:ext>
+              </a:extLst>
+            </p:cNvPr>
+            <p:cNvSpPr/>
+            <p:nvPr/>
+          </p:nvSpPr>
+          <p:spPr>
+            <a:xfrm>
+              <a:off x="1906725" y="4211494"/>
+              <a:ext cx="238429" cy="238125"/>
+            </a:xfrm>
+            <a:prstGeom prst="mathMultiply">
+              <a:avLst/>
+            </a:prstGeom>
+            <a:solidFill>
+              <a:srgbClr val="FF0000"/>
+            </a:solidFill>
+          </p:spPr>
+          <p:style>
+            <a:lnRef idx="2">
+              <a:schemeClr val="accent1">
+                <a:shade val="15000"/>
+              </a:schemeClr>
+            </a:lnRef>
+            <a:fillRef idx="1">
+              <a:schemeClr val="accent1"/>
+            </a:fillRef>
+            <a:effectRef idx="0">
+              <a:schemeClr val="accent1"/>
+            </a:effectRef>
+            <a:fontRef idx="minor">
+              <a:schemeClr val="lt1"/>
+            </a:fontRef>
+          </p:style>
+          <p:txBody>
+            <a:bodyPr rtlCol="0" anchor="ctr"/>
+            <a:lstStyle/>
+            <a:p>
+              <a:pPr algn="ctr"/>
+              <a:endParaRPr lang="ko-KR" altLang="en-US"/>
+            </a:p>
+          </p:txBody>
+        </p:sp>
+      </p:grpSp>
+      <mc:AlternateContent xmlns:mc="http://schemas.openxmlformats.org/markup-compatibility/2006">
+        <mc:Choice xmlns:a14="http://schemas.microsoft.com/office/drawing/2010/main" Requires="a14">
+          <p:sp>
+            <p:nvSpPr>
+              <p:cNvPr id="20" name="TextBox 19">
+                <a:extLst>
+                  <a:ext uri="{FF2B5EF4-FFF2-40B4-BE49-F238E27FC236}">
+                    <a16:creationId xmlns:a16="http://schemas.microsoft.com/office/drawing/2014/main" id="{AA8D5C15-3FC1-E032-7C77-1ABCBD17ADF4}"/>
+                  </a:ext>
+                </a:extLst>
+              </p:cNvPr>
+              <p:cNvSpPr txBox="1"/>
+              <p:nvPr/>
+            </p:nvSpPr>
+            <p:spPr>
+              <a:xfrm>
+                <a:off x="620270" y="2830702"/>
+                <a:ext cx="1977800" cy="338554"/>
+              </a:xfrm>
+              <a:prstGeom prst="rect">
+                <a:avLst/>
+              </a:prstGeom>
+              <a:noFill/>
+              <a:ln>
+                <a:solidFill>
+                  <a:schemeClr val="tx1"/>
+                </a:solidFill>
+              </a:ln>
+            </p:spPr>
+            <p:txBody>
+              <a:bodyPr wrap="square">
+                <a:spAutoFit/>
+              </a:bodyPr>
+              <a:lstStyle/>
+              <a:p>
+                <a:r>
+                  <a:rPr lang="en-US" altLang="ko-KR" sz="1600" i="0" dirty="0">
+                    <a:solidFill>
+                      <a:srgbClr val="1F1F1F"/>
+                    </a:solidFill>
+                    <a:effectLst/>
+                    <a:latin typeface="D2Coding" panose="020B0609020101020101" pitchFamily="49" charset="-127"/>
+                    <a:ea typeface="D2Coding" panose="020B0609020101020101" pitchFamily="49" charset="-127"/>
+                  </a:rPr>
+                  <a:t>Ground Truth (</a:t>
+                </a:r>
+                <a14:m>
+                  <m:oMath xmlns:m="http://schemas.openxmlformats.org/officeDocument/2006/math">
+                    <m:r>
+                      <a:rPr lang="ko-KR" altLang="en-US" sz="1600" i="1" dirty="0" smtClean="0">
+                        <a:latin typeface="Cambria Math" panose="02040503050406030204" pitchFamily="18" charset="0"/>
+                      </a:rPr>
+                      <m:t>𝑦</m:t>
+                    </m:r>
+                  </m:oMath>
+                </a14:m>
+                <a:r>
+                  <a:rPr lang="en-US" altLang="ko-KR" sz="1600" dirty="0"/>
+                  <a:t>)</a:t>
+                </a:r>
+                <a:endParaRPr lang="ko-KR" altLang="en-US" sz="1600" dirty="0"/>
+              </a:p>
+            </p:txBody>
+          </p:sp>
+        </mc:Choice>
+        <mc:Fallback>
+          <p:sp>
+            <p:nvSpPr>
+              <p:cNvPr id="20" name="TextBox 19">
+                <a:extLst>
+                  <a:ext uri="{FF2B5EF4-FFF2-40B4-BE49-F238E27FC236}">
+                    <a16:creationId xmlns:a16="http://schemas.microsoft.com/office/drawing/2014/main" id="{AA8D5C15-3FC1-E032-7C77-1ABCBD17ADF4}"/>
+                  </a:ext>
+                </a:extLst>
+              </p:cNvPr>
+              <p:cNvSpPr txBox="1">
+                <a:spLocks noRot="1" noChangeAspect="1" noMove="1" noResize="1" noEditPoints="1" noAdjustHandles="1" noChangeArrowheads="1" noChangeShapeType="1" noTextEdit="1"/>
+              </p:cNvSpPr>
+              <p:nvPr/>
+            </p:nvSpPr>
+            <p:spPr>
+              <a:xfrm>
+                <a:off x="620270" y="2830702"/>
+                <a:ext cx="1977800" cy="338554"/>
+              </a:xfrm>
+              <a:prstGeom prst="rect">
+                <a:avLst/>
+              </a:prstGeom>
+              <a:blipFill>
+                <a:blip r:embed="rId8"/>
+                <a:stretch>
+                  <a:fillRect l="-1534" t="-6897" b="-17241"/>
+                </a:stretch>
+              </a:blipFill>
+              <a:ln>
+                <a:solidFill>
+                  <a:schemeClr val="tx1"/>
+                </a:solidFill>
+              </a:ln>
+            </p:spPr>
+            <p:txBody>
+              <a:bodyPr/>
+              <a:lstStyle/>
+              <a:p>
+                <a:r>
+                  <a:rPr lang="ko-KR" altLang="en-US">
+                    <a:noFill/>
+                  </a:rPr>
+                  <a:t> </a:t>
+                </a:r>
+              </a:p>
+            </p:txBody>
+          </p:sp>
+        </mc:Fallback>
+      </mc:AlternateContent>
+      <mc:AlternateContent xmlns:mc="http://schemas.openxmlformats.org/markup-compatibility/2006">
+        <mc:Choice xmlns:a14="http://schemas.microsoft.com/office/drawing/2010/main" Requires="a14">
+          <p:sp>
+            <p:nvSpPr>
+              <p:cNvPr id="21" name="TextBox 20">
+                <a:extLst>
+                  <a:ext uri="{FF2B5EF4-FFF2-40B4-BE49-F238E27FC236}">
+                    <a16:creationId xmlns:a16="http://schemas.microsoft.com/office/drawing/2014/main" id="{51E43FF6-D02F-A36E-D393-85800054E9F3}"/>
+                  </a:ext>
+                </a:extLst>
+              </p:cNvPr>
+              <p:cNvSpPr txBox="1"/>
+              <p:nvPr/>
+            </p:nvSpPr>
+            <p:spPr>
+              <a:xfrm>
+                <a:off x="620270" y="4947898"/>
+                <a:ext cx="1977800" cy="338554"/>
+              </a:xfrm>
+              <a:prstGeom prst="rect">
+                <a:avLst/>
+              </a:prstGeom>
+              <a:noFill/>
+              <a:ln>
+                <a:solidFill>
+                  <a:schemeClr val="tx1"/>
+                </a:solidFill>
+              </a:ln>
+            </p:spPr>
+            <p:txBody>
+              <a:bodyPr wrap="square">
+                <a:spAutoFit/>
+              </a:bodyPr>
+              <a:lstStyle/>
+              <a:p>
+                <a:r>
+                  <a:rPr lang="ko-KR" altLang="en-US" sz="1600" dirty="0">
+                    <a:solidFill>
+                      <a:srgbClr val="1F1F1F"/>
+                    </a:solidFill>
+                    <a:latin typeface="D2Coding" panose="020B0609020101020101" pitchFamily="49" charset="-127"/>
+                    <a:ea typeface="D2Coding" panose="020B0609020101020101" pitchFamily="49" charset="-127"/>
+                  </a:rPr>
+                  <a:t>예측 </a:t>
+                </a:r>
+                <a:r>
+                  <a:rPr lang="en-US" altLang="ko-KR" sz="1600" dirty="0">
+                    <a:solidFill>
+                      <a:srgbClr val="1F1F1F"/>
+                    </a:solidFill>
+                    <a:latin typeface="D2Coding" panose="020B0609020101020101" pitchFamily="49" charset="-127"/>
+                    <a:ea typeface="D2Coding" panose="020B0609020101020101" pitchFamily="49" charset="-127"/>
+                  </a:rPr>
+                  <a:t>tensor (</a:t>
+                </a:r>
+                <a14:m>
+                  <m:oMath xmlns:m="http://schemas.openxmlformats.org/officeDocument/2006/math">
+                    <m:acc>
+                      <m:accPr>
+                        <m:chr m:val="̂"/>
+                        <m:ctrlPr>
+                          <a:rPr lang="ko-KR" altLang="en-US" sz="1600" i="1" dirty="0">
+                            <a:latin typeface="Cambria Math" panose="02040503050406030204" pitchFamily="18" charset="0"/>
+                          </a:rPr>
+                        </m:ctrlPr>
+                      </m:accPr>
+                      <m:e>
+                        <m:r>
+                          <a:rPr lang="ko-KR" altLang="en-US" sz="1600" i="1" dirty="0">
+                            <a:latin typeface="Cambria Math" panose="02040503050406030204" pitchFamily="18" charset="0"/>
+                          </a:rPr>
+                          <m:t>𝑦</m:t>
+                        </m:r>
+                      </m:e>
+                    </m:acc>
+                  </m:oMath>
+                </a14:m>
+                <a:r>
+                  <a:rPr lang="en-US" altLang="ko-KR" sz="1600" dirty="0"/>
+                  <a:t>)</a:t>
+                </a:r>
+                <a:endParaRPr lang="ko-KR" altLang="en-US" sz="1600" dirty="0"/>
+              </a:p>
+            </p:txBody>
+          </p:sp>
+        </mc:Choice>
+        <mc:Fallback>
+          <p:sp>
+            <p:nvSpPr>
+              <p:cNvPr id="21" name="TextBox 20">
+                <a:extLst>
+                  <a:ext uri="{FF2B5EF4-FFF2-40B4-BE49-F238E27FC236}">
+                    <a16:creationId xmlns:a16="http://schemas.microsoft.com/office/drawing/2014/main" id="{51E43FF6-D02F-A36E-D393-85800054E9F3}"/>
+                  </a:ext>
+                </a:extLst>
+              </p:cNvPr>
+              <p:cNvSpPr txBox="1">
+                <a:spLocks noRot="1" noChangeAspect="1" noMove="1" noResize="1" noEditPoints="1" noAdjustHandles="1" noChangeArrowheads="1" noChangeShapeType="1" noTextEdit="1"/>
+              </p:cNvSpPr>
+              <p:nvPr/>
+            </p:nvSpPr>
+            <p:spPr>
+              <a:xfrm>
+                <a:off x="620270" y="4947898"/>
+                <a:ext cx="1977800" cy="338554"/>
+              </a:xfrm>
+              <a:prstGeom prst="rect">
+                <a:avLst/>
+              </a:prstGeom>
+              <a:blipFill>
+                <a:blip r:embed="rId9"/>
+                <a:stretch>
+                  <a:fillRect l="-1534" t="-7018" b="-19298"/>
+                </a:stretch>
+              </a:blipFill>
+              <a:ln>
+                <a:solidFill>
+                  <a:schemeClr val="tx1"/>
+                </a:solidFill>
+              </a:ln>
+            </p:spPr>
+            <p:txBody>
+              <a:bodyPr/>
+              <a:lstStyle/>
+              <a:p>
+                <a:r>
+                  <a:rPr lang="ko-KR" altLang="en-US">
+                    <a:noFill/>
+                  </a:rPr>
+                  <a:t> </a:t>
+                </a:r>
+              </a:p>
+            </p:txBody>
+          </p:sp>
+        </mc:Fallback>
+      </mc:AlternateContent>
+      <p:pic>
+        <p:nvPicPr>
+          <p:cNvPr id="24" name="그림 23">
+            <a:extLst>
+              <a:ext uri="{FF2B5EF4-FFF2-40B4-BE49-F238E27FC236}">
+                <a16:creationId xmlns:a16="http://schemas.microsoft.com/office/drawing/2014/main" id="{12449356-9BDC-36E8-AB8C-77C85169F8CB}"/>
+              </a:ext>
+            </a:extLst>
+          </p:cNvPr>
+          <p:cNvPicPr>
+            <a:picLocks noChangeAspect="1"/>
+          </p:cNvPicPr>
+          <p:nvPr/>
+        </p:nvPicPr>
+        <p:blipFill>
+          <a:blip r:embed="rId10"/>
+          <a:stretch>
+            <a:fillRect/>
+          </a:stretch>
+        </p:blipFill>
+        <p:spPr>
+          <a:xfrm>
+            <a:off x="5235609" y="3457480"/>
+            <a:ext cx="6370020" cy="1324069"/>
+          </a:xfrm>
+          <a:prstGeom prst="rect">
+            <a:avLst/>
+          </a:prstGeom>
+          <a:ln>
+            <a:solidFill>
+              <a:srgbClr val="FF0000"/>
+            </a:solidFill>
+          </a:ln>
+        </p:spPr>
+      </p:pic>
+      <mc:AlternateContent xmlns:mc="http://schemas.openxmlformats.org/markup-compatibility/2006">
+        <mc:Choice xmlns:a14="http://schemas.microsoft.com/office/drawing/2010/main" Requires="a14">
+          <p:sp>
+            <p:nvSpPr>
+              <p:cNvPr id="25" name="TextBox 24">
+                <a:extLst>
+                  <a:ext uri="{FF2B5EF4-FFF2-40B4-BE49-F238E27FC236}">
+                    <a16:creationId xmlns:a16="http://schemas.microsoft.com/office/drawing/2014/main" id="{6D2012E5-1C3F-5EC9-868A-D0A43A6AECC2}"/>
+                  </a:ext>
+                </a:extLst>
+              </p:cNvPr>
+              <p:cNvSpPr txBox="1"/>
+              <p:nvPr/>
+            </p:nvSpPr>
+            <p:spPr>
+              <a:xfrm>
+                <a:off x="5238954" y="3004392"/>
+                <a:ext cx="3076371" cy="369332"/>
+              </a:xfrm>
+              <a:prstGeom prst="rect">
+                <a:avLst/>
+              </a:prstGeom>
+              <a:noFill/>
+              <a:ln>
+                <a:solidFill>
+                  <a:schemeClr val="tx1"/>
+                </a:solidFill>
+              </a:ln>
+            </p:spPr>
+            <p:txBody>
+              <a:bodyPr wrap="square">
+                <a:spAutoFit/>
+              </a:bodyPr>
+              <a:lstStyle/>
+              <a:p>
+                <a:r>
+                  <a:rPr lang="en-US" altLang="ko-KR" dirty="0">
+                    <a:solidFill>
+                      <a:srgbClr val="1F1F1F"/>
+                    </a:solidFill>
+                    <a:latin typeface="D2Coding" panose="020B0609020101020101" pitchFamily="49" charset="-127"/>
+                    <a:ea typeface="D2Coding" panose="020B0609020101020101" pitchFamily="49" charset="-127"/>
+                  </a:rPr>
+                  <a:t>Loss Function = </a:t>
+                </a:r>
+                <a14:m>
+                  <m:oMath xmlns:m="http://schemas.openxmlformats.org/officeDocument/2006/math">
+                    <m:sSup>
+                      <m:sSupPr>
+                        <m:ctrlPr>
+                          <a:rPr lang="en-US" altLang="ko-KR" smtClean="0">
+                            <a:solidFill>
+                              <a:srgbClr val="1F1F1F"/>
+                            </a:solidFill>
+                            <a:latin typeface="Cambria Math" panose="02040503050406030204" pitchFamily="18" charset="0"/>
+                          </a:rPr>
+                        </m:ctrlPr>
+                      </m:sSupPr>
+                      <m:e>
+                        <m:d>
+                          <m:dPr>
+                            <m:ctrlPr>
+                              <a:rPr lang="en-US" altLang="ko-KR" smtClean="0">
+                                <a:solidFill>
+                                  <a:srgbClr val="1F1F1F"/>
+                                </a:solidFill>
+                                <a:latin typeface="Cambria Math" panose="02040503050406030204" pitchFamily="18" charset="0"/>
+                              </a:rPr>
+                            </m:ctrlPr>
+                          </m:dPr>
+                          <m:e>
+                            <m:r>
+                              <a:rPr lang="en-US" altLang="ko-KR" i="1" smtClean="0">
+                                <a:solidFill>
+                                  <a:srgbClr val="1F1F1F"/>
+                                </a:solidFill>
+                                <a:latin typeface="Cambria Math" panose="02040503050406030204" pitchFamily="18" charset="0"/>
+                              </a:rPr>
+                              <m:t>𝑦</m:t>
+                            </m:r>
+                            <m:r>
+                              <a:rPr lang="en-US" altLang="ko-KR" i="0" smtClean="0">
+                                <a:solidFill>
+                                  <a:srgbClr val="1F1F1F"/>
+                                </a:solidFill>
+                                <a:latin typeface="Cambria Math" panose="02040503050406030204" pitchFamily="18" charset="0"/>
+                              </a:rPr>
+                              <m:t>−</m:t>
+                            </m:r>
+                            <m:acc>
+                              <m:accPr>
+                                <m:chr m:val="̂"/>
+                                <m:ctrlPr>
+                                  <a:rPr lang="en-US" altLang="ko-KR" i="1" smtClean="0">
+                                    <a:solidFill>
+                                      <a:srgbClr val="1F1F1F"/>
+                                    </a:solidFill>
+                                    <a:latin typeface="Cambria Math" panose="02040503050406030204" pitchFamily="18" charset="0"/>
+                                  </a:rPr>
+                                </m:ctrlPr>
+                              </m:accPr>
+                              <m:e>
+                                <m:r>
+                                  <a:rPr lang="en-US" altLang="ko-KR" i="1" smtClean="0">
+                                    <a:solidFill>
+                                      <a:srgbClr val="1F1F1F"/>
+                                    </a:solidFill>
+                                    <a:latin typeface="Cambria Math" panose="02040503050406030204" pitchFamily="18" charset="0"/>
+                                  </a:rPr>
+                                  <m:t>𝑦</m:t>
+                                </m:r>
+                              </m:e>
+                            </m:acc>
+                          </m:e>
+                        </m:d>
+                      </m:e>
+                      <m:sup>
+                        <m:r>
+                          <a:rPr lang="en-US" altLang="ko-KR" i="0" smtClean="0">
+                            <a:solidFill>
+                              <a:srgbClr val="1F1F1F"/>
+                            </a:solidFill>
+                            <a:latin typeface="Cambria Math" panose="02040503050406030204" pitchFamily="18" charset="0"/>
+                          </a:rPr>
+                          <m:t>2</m:t>
+                        </m:r>
+                      </m:sup>
+                    </m:sSup>
+                  </m:oMath>
+                </a14:m>
+                <a:endParaRPr lang="ko-KR" altLang="en-US" dirty="0"/>
+              </a:p>
+            </p:txBody>
+          </p:sp>
+        </mc:Choice>
+        <mc:Fallback>
+          <p:sp>
+            <p:nvSpPr>
+              <p:cNvPr id="25" name="TextBox 24">
+                <a:extLst>
+                  <a:ext uri="{FF2B5EF4-FFF2-40B4-BE49-F238E27FC236}">
+                    <a16:creationId xmlns:a16="http://schemas.microsoft.com/office/drawing/2014/main" id="{6D2012E5-1C3F-5EC9-868A-D0A43A6AECC2}"/>
+                  </a:ext>
+                </a:extLst>
+              </p:cNvPr>
+              <p:cNvSpPr txBox="1">
+                <a:spLocks noRot="1" noChangeAspect="1" noMove="1" noResize="1" noEditPoints="1" noAdjustHandles="1" noChangeArrowheads="1" noChangeShapeType="1" noTextEdit="1"/>
+              </p:cNvSpPr>
+              <p:nvPr/>
+            </p:nvSpPr>
+            <p:spPr>
+              <a:xfrm>
+                <a:off x="5238954" y="3004392"/>
+                <a:ext cx="3076371" cy="369332"/>
+              </a:xfrm>
+              <a:prstGeom prst="rect">
+                <a:avLst/>
+              </a:prstGeom>
+              <a:blipFill>
+                <a:blip r:embed="rId11"/>
+                <a:stretch>
+                  <a:fillRect l="-1381" t="-8065" b="-24194"/>
+                </a:stretch>
+              </a:blipFill>
+              <a:ln>
+                <a:solidFill>
+                  <a:schemeClr val="tx1"/>
+                </a:solidFill>
+              </a:ln>
+            </p:spPr>
+            <p:txBody>
+              <a:bodyPr/>
+              <a:lstStyle/>
+              <a:p>
+                <a:r>
+                  <a:rPr lang="ko-KR" altLang="en-US">
+                    <a:noFill/>
+                  </a:rPr>
+                  <a:t> </a:t>
+                </a:r>
+              </a:p>
+            </p:txBody>
+          </p:sp>
+        </mc:Fallback>
+      </mc:AlternateContent>
+      <p:sp>
+        <p:nvSpPr>
+          <p:cNvPr id="26" name="직사각형 25">
+            <a:extLst>
+              <a:ext uri="{FF2B5EF4-FFF2-40B4-BE49-F238E27FC236}">
+                <a16:creationId xmlns:a16="http://schemas.microsoft.com/office/drawing/2014/main" id="{32A6BF45-0E70-4B14-07C9-DF50968D1BC2}"/>
+              </a:ext>
+            </a:extLst>
+          </p:cNvPr>
+          <p:cNvSpPr/>
+          <p:nvPr/>
+        </p:nvSpPr>
+        <p:spPr>
+          <a:xfrm>
+            <a:off x="1510597" y="4351515"/>
+            <a:ext cx="1718378" cy="306765"/>
+          </a:xfrm>
+          <a:prstGeom prst="rect">
+            <a:avLst/>
+          </a:prstGeom>
+          <a:noFill/>
+          <a:ln w="19050">
+            <a:solidFill>
+              <a:schemeClr val="accent5"/>
+            </a:solidFill>
+            <a:prstDash val="sysDot"/>
+          </a:ln>
+        </p:spPr>
+        <p:style>
+          <a:lnRef idx="2">
+            <a:schemeClr val="accent1">
+              <a:shade val="15000"/>
+            </a:schemeClr>
+          </a:lnRef>
+          <a:fillRef idx="1">
+            <a:schemeClr val="accent1"/>
+          </a:fillRef>
+          <a:effectRef idx="0">
+            <a:schemeClr val="accent1"/>
+          </a:effectRef>
+          <a:fontRef idx="minor">
+            <a:schemeClr val="lt1"/>
+          </a:fontRef>
+        </p:style>
+        <p:txBody>
+          <a:bodyPr rtlCol="0" anchor="ctr"/>
+          <a:lstStyle/>
+          <a:p>
+            <a:pPr algn="ctr"/>
+            <a:endParaRPr lang="ko-KR" altLang="en-US"/>
+          </a:p>
+        </p:txBody>
+      </p:sp>
+      <p:sp>
+        <p:nvSpPr>
+          <p:cNvPr id="27" name="직사각형 26">
+            <a:extLst>
+              <a:ext uri="{FF2B5EF4-FFF2-40B4-BE49-F238E27FC236}">
+                <a16:creationId xmlns:a16="http://schemas.microsoft.com/office/drawing/2014/main" id="{7A59B06B-68F6-D3BE-4D12-F49FE015F6B4}"/>
+              </a:ext>
+            </a:extLst>
+          </p:cNvPr>
+          <p:cNvSpPr/>
+          <p:nvPr/>
+        </p:nvSpPr>
+        <p:spPr>
+          <a:xfrm>
+            <a:off x="2195459" y="5359428"/>
+            <a:ext cx="1472011" cy="338555"/>
+          </a:xfrm>
+          <a:prstGeom prst="rect">
+            <a:avLst/>
+          </a:prstGeom>
+          <a:noFill/>
+          <a:ln w="19050">
+            <a:solidFill>
+              <a:srgbClr val="FF0000"/>
+            </a:solidFill>
+            <a:prstDash val="sysDot"/>
+          </a:ln>
+        </p:spPr>
+        <p:style>
+          <a:lnRef idx="2">
+            <a:schemeClr val="accent1">
+              <a:shade val="15000"/>
+            </a:schemeClr>
+          </a:lnRef>
+          <a:fillRef idx="1">
+            <a:schemeClr val="accent1"/>
+          </a:fillRef>
+          <a:effectRef idx="0">
+            <a:schemeClr val="accent1"/>
+          </a:effectRef>
+          <a:fontRef idx="minor">
+            <a:schemeClr val="lt1"/>
+          </a:fontRef>
+        </p:style>
+        <p:txBody>
+          <a:bodyPr rtlCol="0" anchor="ctr"/>
+          <a:lstStyle/>
+          <a:p>
+            <a:pPr algn="ctr"/>
+            <a:endParaRPr lang="ko-KR" altLang="en-US"/>
+          </a:p>
+        </p:txBody>
+      </p:sp>
+      <p:cxnSp>
+        <p:nvCxnSpPr>
+          <p:cNvPr id="31" name="연결선: 꺾임 30">
+            <a:extLst>
+              <a:ext uri="{FF2B5EF4-FFF2-40B4-BE49-F238E27FC236}">
+                <a16:creationId xmlns:a16="http://schemas.microsoft.com/office/drawing/2014/main" id="{1A366F8C-36AF-693B-BA7F-521090A07468}"/>
+              </a:ext>
+            </a:extLst>
+          </p:cNvPr>
+          <p:cNvCxnSpPr>
+            <a:cxnSpLocks/>
+            <a:stCxn id="20" idx="3"/>
+            <a:endCxn id="21" idx="3"/>
+          </p:cNvCxnSpPr>
+          <p:nvPr/>
+        </p:nvCxnSpPr>
+        <p:spPr>
+          <a:xfrm>
+            <a:off x="2598070" y="2999979"/>
+            <a:ext cx="12700" cy="2117196"/>
+          </a:xfrm>
+          <a:prstGeom prst="bentConnector3">
+            <a:avLst>
+              <a:gd name="adj1" fmla="val 11625000"/>
+            </a:avLst>
+          </a:prstGeom>
+          <a:ln>
+            <a:headEnd type="triangle"/>
+            <a:tailEnd type="triangle"/>
+          </a:ln>
+        </p:spPr>
+        <p:style>
+          <a:lnRef idx="1">
+            <a:schemeClr val="dk1"/>
+          </a:lnRef>
+          <a:fillRef idx="0">
+            <a:schemeClr val="dk1"/>
+          </a:fillRef>
+          <a:effectRef idx="0">
+            <a:schemeClr val="dk1"/>
+          </a:effectRef>
+          <a:fontRef idx="minor">
+            <a:schemeClr val="tx1"/>
+          </a:fontRef>
+        </p:style>
+      </p:cxnSp>
+      <p:cxnSp>
+        <p:nvCxnSpPr>
+          <p:cNvPr id="37" name="연결선: 꺾임 36">
+            <a:extLst>
+              <a:ext uri="{FF2B5EF4-FFF2-40B4-BE49-F238E27FC236}">
+                <a16:creationId xmlns:a16="http://schemas.microsoft.com/office/drawing/2014/main" id="{D58D26AC-4854-FFD3-6F0A-F9CB3E060E3D}"/>
+              </a:ext>
+            </a:extLst>
+          </p:cNvPr>
+          <p:cNvCxnSpPr>
+            <a:stCxn id="25" idx="1"/>
+          </p:cNvCxnSpPr>
+          <p:nvPr/>
+        </p:nvCxnSpPr>
+        <p:spPr>
+          <a:xfrm rot="10800000" flipV="1">
+            <a:off x="4076700" y="3189057"/>
+            <a:ext cx="1162254" cy="811061"/>
+          </a:xfrm>
+          <a:prstGeom prst="bentConnector3">
+            <a:avLst/>
+          </a:prstGeom>
+          <a:ln>
+            <a:headEnd type="arrow" w="med" len="med"/>
+            <a:tailEnd type="none" w="med" len="med"/>
+          </a:ln>
+        </p:spPr>
+        <p:style>
+          <a:lnRef idx="1">
+            <a:schemeClr val="dk1"/>
+          </a:lnRef>
+          <a:fillRef idx="0">
+            <a:schemeClr val="dk1"/>
+          </a:fillRef>
+          <a:effectRef idx="0">
+            <a:schemeClr val="dk1"/>
+          </a:effectRef>
+          <a:fontRef idx="minor">
+            <a:schemeClr val="tx1"/>
+          </a:fontRef>
+        </p:style>
+      </p:cxnSp>
+    </p:spTree>
+    <p:extLst>
+      <p:ext uri="{BB962C8B-B14F-4D97-AF65-F5344CB8AC3E}">
+        <p14:creationId xmlns:p14="http://schemas.microsoft.com/office/powerpoint/2010/main" val="3665992622"/>
+      </p:ext>
+    </p:extLst>
+  </p:cSld>
+  <p:clrMapOvr>
+    <a:masterClrMapping/>
+  </p:clrMapOvr>
+</p:sld>
+</file>
+
+<file path=ppt/slides/slide11.xml><?xml version="1.0" encoding="utf-8"?>
+<p:sld xmlns:a="http://schemas.openxmlformats.org/drawingml/2006/main" xmlns:r="http://schemas.openxmlformats.org/officeDocument/2006/relationships" xmlns:p="http://schemas.openxmlformats.org/presentationml/2006/main">
+  <p:cSld>
+    <p:spTree>
+      <p:nvGrpSpPr>
+        <p:cNvPr id="1" name="">
+          <a:extLst>
+            <a:ext uri="{FF2B5EF4-FFF2-40B4-BE49-F238E27FC236}">
               <a16:creationId xmlns:a16="http://schemas.microsoft.com/office/drawing/2014/main" id="{8D67D301-B114-F827-4260-924D7C208916}"/>
             </a:ext>
           </a:extLst>
@@ -3326,7 +4837,7 @@
             <a:fld id="{D57F1E4F-1CFF-5643-939E-217C01CDF565}" type="slidenum">
               <a:rPr lang="en-US" smtClean="0"/>
               <a:pPr/>
-              <a:t>10</a:t>
+              <a:t>11</a:t>
             </a:fld>
             <a:endParaRPr lang="en-US" dirty="0"/>
           </a:p>
@@ -3559,7 +5070,7 @@
 </p:sld>
 </file>
 
-<file path=ppt/slides/slide11.xml><?xml version="1.0" encoding="utf-8"?>
+<file path=ppt/slides/slide12.xml><?xml version="1.0" encoding="utf-8"?>
 <p:sld xmlns:a="http://schemas.openxmlformats.org/drawingml/2006/main" xmlns:r="http://schemas.openxmlformats.org/officeDocument/2006/relationships" xmlns:p="http://schemas.openxmlformats.org/presentationml/2006/main">
   <p:cSld>
     <p:spTree>
@@ -3611,7 +5122,7 @@
             <a:fld id="{D57F1E4F-1CFF-5643-939E-217C01CDF565}" type="slidenum">
               <a:rPr lang="en-US" smtClean="0"/>
               <a:pPr/>
-              <a:t>11</a:t>
+              <a:t>12</a:t>
             </a:fld>
             <a:endParaRPr lang="en-US" dirty="0"/>
           </a:p>
@@ -3740,7 +5251,7 @@
 </p:sld>
 </file>
 
-<file path=ppt/slides/slide12.xml><?xml version="1.0" encoding="utf-8"?>
+<file path=ppt/slides/slide13.xml><?xml version="1.0" encoding="utf-8"?>
 <p:sld xmlns:a="http://schemas.openxmlformats.org/drawingml/2006/main" xmlns:r="http://schemas.openxmlformats.org/officeDocument/2006/relationships" xmlns:p="http://schemas.openxmlformats.org/presentationml/2006/main">
   <p:cSld>
     <p:spTree>
@@ -3792,7 +5303,7 @@
             <a:fld id="{D57F1E4F-1CFF-5643-939E-217C01CDF565}" type="slidenum">
               <a:rPr lang="en-US" smtClean="0"/>
               <a:pPr/>
-              <a:t>12</a:t>
+              <a:t>13</a:t>
             </a:fld>
             <a:endParaRPr lang="en-US" dirty="0"/>
           </a:p>
@@ -4239,35 +5750,35 @@
                 <a:latin typeface="D2Coding" panose="020B0609020101020101" pitchFamily="49" charset="-127"/>
                 <a:ea typeface="D2Coding" panose="020B0609020101020101" pitchFamily="49" charset="-127"/>
               </a:rPr>
+              <a:t>1</a:t>
+            </a:r>
+            <a:r>
+              <a:rPr lang="ko-KR" altLang="en-US" sz="1600" dirty="0">
+                <a:latin typeface="D2Coding" panose="020B0609020101020101" pitchFamily="49" charset="-127"/>
+                <a:ea typeface="D2Coding" panose="020B0609020101020101" pitchFamily="49" charset="-127"/>
+              </a:rPr>
+              <a:t>, </a:t>
+            </a:r>
+            <a:r>
+              <a:rPr lang="ko-KR" altLang="en-US" sz="1600" dirty="0" err="1">
+                <a:latin typeface="D2Coding" panose="020B0609020101020101" pitchFamily="49" charset="-127"/>
+                <a:ea typeface="D2Coding" panose="020B0609020101020101" pitchFamily="49" charset="-127"/>
+              </a:rPr>
+              <a:t>Airplane은</a:t>
+            </a:r>
+            <a:r>
+              <a:rPr lang="ko-KR" altLang="en-US" sz="1600" dirty="0">
+                <a:latin typeface="D2Coding" panose="020B0609020101020101" pitchFamily="49" charset="-127"/>
+                <a:ea typeface="D2Coding" panose="020B0609020101020101" pitchFamily="49" charset="-127"/>
+              </a:rPr>
+              <a:t> </a:t>
+            </a:r>
+            <a:r>
+              <a:rPr lang="en-US" altLang="ko-KR" sz="1600" dirty="0">
+                <a:latin typeface="D2Coding" panose="020B0609020101020101" pitchFamily="49" charset="-127"/>
+                <a:ea typeface="D2Coding" panose="020B0609020101020101" pitchFamily="49" charset="-127"/>
+              </a:rPr>
               <a:t>0</a:t>
-            </a:r>
-            <a:r>
-              <a:rPr lang="ko-KR" altLang="en-US" sz="1600" dirty="0">
-                <a:latin typeface="D2Coding" panose="020B0609020101020101" pitchFamily="49" charset="-127"/>
-                <a:ea typeface="D2Coding" panose="020B0609020101020101" pitchFamily="49" charset="-127"/>
-              </a:rPr>
-              <a:t>, </a:t>
-            </a:r>
-            <a:r>
-              <a:rPr lang="ko-KR" altLang="en-US" sz="1600" dirty="0" err="1">
-                <a:latin typeface="D2Coding" panose="020B0609020101020101" pitchFamily="49" charset="-127"/>
-                <a:ea typeface="D2Coding" panose="020B0609020101020101" pitchFamily="49" charset="-127"/>
-              </a:rPr>
-              <a:t>Airplane은</a:t>
-            </a:r>
-            <a:r>
-              <a:rPr lang="ko-KR" altLang="en-US" sz="1600" dirty="0">
-                <a:latin typeface="D2Coding" panose="020B0609020101020101" pitchFamily="49" charset="-127"/>
-                <a:ea typeface="D2Coding" panose="020B0609020101020101" pitchFamily="49" charset="-127"/>
-              </a:rPr>
-              <a:t> </a:t>
-            </a:r>
-            <a:r>
-              <a:rPr lang="en-US" altLang="ko-KR" sz="1600" dirty="0">
-                <a:latin typeface="D2Coding" panose="020B0609020101020101" pitchFamily="49" charset="-127"/>
-                <a:ea typeface="D2Coding" panose="020B0609020101020101" pitchFamily="49" charset="-127"/>
-              </a:rPr>
-              <a:t>1</a:t>
             </a:r>
             <a:r>
               <a:rPr lang="ko-KR" altLang="en-US" sz="1600" dirty="0">
@@ -4476,15 +5987,7 @@
                 </a:r>
                 <a:r>
                   <a:rPr lang="en-US" altLang="ko-KR" dirty="0"/>
-                  <a:t>[</a:t>
-                </a:r>
-                <a:r>
-                  <a:rPr lang="ko-KR" altLang="en-US" dirty="0"/>
-                  <a:t>0</a:t>
-                </a:r>
-                <a:r>
-                  <a:rPr lang="en-US" altLang="ko-KR" dirty="0"/>
-                  <a:t>,</a:t>
+                  <a:t>[1,</a:t>
                 </a:r>
                 <a:r>
                   <a:rPr lang="ko-KR" altLang="en-US" dirty="0"/>
@@ -4629,7 +6132,7 @@
                 </a14:m>
                 <a:r>
                   <a:rPr lang="en-US" altLang="ko-KR" dirty="0"/>
-                  <a:t> = [1,</a:t>
+                  <a:t> = [0,</a:t>
                 </a:r>
                 <a:r>
                   <a:rPr lang="ko-KR" altLang="en-US" dirty="0"/>
@@ -10895,6 +12398,46 @@
           </a:prstGeom>
         </p:spPr>
       </p:pic>
+      <p:sp>
+        <p:nvSpPr>
+          <p:cNvPr id="7" name="TextBox 6">
+            <a:extLst>
+              <a:ext uri="{FF2B5EF4-FFF2-40B4-BE49-F238E27FC236}">
+                <a16:creationId xmlns:a16="http://schemas.microsoft.com/office/drawing/2014/main" id="{47765E26-0D3B-29BF-AA81-65E95B3EBB2A}"/>
+              </a:ext>
+            </a:extLst>
+          </p:cNvPr>
+          <p:cNvSpPr txBox="1"/>
+          <p:nvPr/>
+        </p:nvSpPr>
+        <p:spPr>
+          <a:xfrm>
+            <a:off x="5652526" y="4361801"/>
+            <a:ext cx="3486150" cy="369332"/>
+          </a:xfrm>
+          <a:prstGeom prst="rect">
+            <a:avLst/>
+          </a:prstGeom>
+          <a:noFill/>
+        </p:spPr>
+        <p:txBody>
+          <a:bodyPr wrap="square">
+            <a:spAutoFit/>
+          </a:bodyPr>
+          <a:lstStyle/>
+          <a:p>
+            <a:r>
+              <a:rPr lang="en-US" altLang="ko-KR" sz="1800" cap="none" dirty="0">
+                <a:latin typeface="D2Coding" panose="020B0609020101020101" pitchFamily="49" charset="-127"/>
+                <a:ea typeface="D2Coding" panose="020B0609020101020101" pitchFamily="49" charset="-127"/>
+                <a:cs typeface="Segoe UI Light" panose="020B0502040204020203" pitchFamily="34" charset="0"/>
+              </a:rPr>
+              <a:t>Convolutional Neural Network</a:t>
+            </a:r>
+            <a:endParaRPr lang="ko-KR" altLang="en-US" dirty="0"/>
+          </a:p>
+        </p:txBody>
+      </p:sp>
     </p:spTree>
     <p:extLst>
       <p:ext uri="{BB962C8B-B14F-4D97-AF65-F5344CB8AC3E}">

--- a/CNN/Object detection_YOLO.pptx
+++ b/CNN/Object detection_YOLO.pptx
@@ -5,10 +5,10 @@
     <p:sldMasterId id="2147483660" r:id="rId1"/>
   </p:sldMasterIdLst>
   <p:notesMasterIdLst>
-    <p:notesMasterId r:id="rId15"/>
+    <p:notesMasterId r:id="rId18"/>
   </p:notesMasterIdLst>
   <p:handoutMasterIdLst>
-    <p:handoutMasterId r:id="rId16"/>
+    <p:handoutMasterId r:id="rId19"/>
   </p:handoutMasterIdLst>
   <p:sldIdLst>
     <p:sldId id="256" r:id="rId2"/>
@@ -23,7 +23,10 @@
     <p:sldId id="1133" r:id="rId11"/>
     <p:sldId id="1132" r:id="rId12"/>
     <p:sldId id="1122" r:id="rId13"/>
-    <p:sldId id="1123" r:id="rId14"/>
+    <p:sldId id="1135" r:id="rId14"/>
+    <p:sldId id="1136" r:id="rId15"/>
+    <p:sldId id="1134" r:id="rId16"/>
+    <p:sldId id="1123" r:id="rId17"/>
   </p:sldIdLst>
   <p:sldSz cx="12192000" cy="6858000"/>
   <p:notesSz cx="6858000" cy="9144000"/>
@@ -146,6 +149,9 @@
             <p14:sldId id="1133"/>
             <p14:sldId id="1132"/>
             <p14:sldId id="1122"/>
+            <p14:sldId id="1135"/>
+            <p14:sldId id="1136"/>
+            <p14:sldId id="1134"/>
             <p14:sldId id="1123"/>
           </p14:sldIdLst>
         </p14:section>
@@ -3848,8 +3854,8 @@
             </a:prstGeom>
           </p:spPr>
         </p:pic>
-        <mc:AlternateContent xmlns:mc="http://schemas.openxmlformats.org/markup-compatibility/2006">
-          <mc:Choice xmlns:a14="http://schemas.microsoft.com/office/drawing/2010/main" Requires="a14">
+        <mc:AlternateContent xmlns:mc="http://schemas.openxmlformats.org/markup-compatibility/2006" xmlns:a14="http://schemas.microsoft.com/office/drawing/2010/main">
+          <mc:Choice Requires="a14">
             <p:sp>
               <p:nvSpPr>
                 <p:cNvPr id="10" name="TextBox 9">
@@ -3883,7 +3889,7 @@
                       <m:sSub>
                         <m:sSubPr>
                           <m:ctrlPr>
-                            <a:rPr lang="ko-KR" altLang="en-US" smtClean="0">
+                            <a:rPr lang="ko-KR" altLang="en-US" i="1" smtClean="0">
                               <a:latin typeface="Cambria Math" panose="02040503050406030204" pitchFamily="18" charset="0"/>
                             </a:rPr>
                           </m:ctrlPr>
@@ -3960,7 +3966,7 @@
               </p:txBody>
             </p:sp>
           </mc:Choice>
-          <mc:Fallback>
+          <mc:Fallback xmlns="">
             <p:sp>
               <p:nvSpPr>
                 <p:cNvPr id="10" name="TextBox 9">
@@ -4107,8 +4113,8 @@
           </p:txBody>
         </p:sp>
       </p:grpSp>
-      <mc:AlternateContent xmlns:mc="http://schemas.openxmlformats.org/markup-compatibility/2006">
-        <mc:Choice xmlns:a14="http://schemas.microsoft.com/office/drawing/2010/main" Requires="a14">
+      <mc:AlternateContent xmlns:mc="http://schemas.openxmlformats.org/markup-compatibility/2006" xmlns:a14="http://schemas.microsoft.com/office/drawing/2010/main">
+        <mc:Choice Requires="a14">
           <p:sp>
             <p:nvSpPr>
               <p:cNvPr id="20" name="TextBox 19">
@@ -4172,7 +4178,7 @@
             </p:txBody>
           </p:sp>
         </mc:Choice>
-        <mc:Fallback>
+        <mc:Fallback xmlns="">
           <p:sp>
             <p:nvSpPr>
               <p:cNvPr id="20" name="TextBox 19">
@@ -4222,8 +4228,8 @@
           </p:sp>
         </mc:Fallback>
       </mc:AlternateContent>
-      <mc:AlternateContent xmlns:mc="http://schemas.openxmlformats.org/markup-compatibility/2006">
-        <mc:Choice xmlns:a14="http://schemas.microsoft.com/office/drawing/2010/main" Requires="a14">
+      <mc:AlternateContent xmlns:mc="http://schemas.openxmlformats.org/markup-compatibility/2006" xmlns:a14="http://schemas.microsoft.com/office/drawing/2010/main">
+        <mc:Choice Requires="a14">
           <p:sp>
             <p:nvSpPr>
               <p:cNvPr id="21" name="TextBox 20">
@@ -4308,7 +4314,7 @@
             </p:txBody>
           </p:sp>
         </mc:Choice>
-        <mc:Fallback>
+        <mc:Fallback xmlns="">
           <p:sp>
             <p:nvSpPr>
               <p:cNvPr id="21" name="TextBox 20">
@@ -4393,8 +4399,8 @@
           </a:ln>
         </p:spPr>
       </p:pic>
-      <mc:AlternateContent xmlns:mc="http://schemas.openxmlformats.org/markup-compatibility/2006">
-        <mc:Choice xmlns:a14="http://schemas.microsoft.com/office/drawing/2010/main" Requires="a14">
+      <mc:AlternateContent xmlns:mc="http://schemas.openxmlformats.org/markup-compatibility/2006" xmlns:a14="http://schemas.microsoft.com/office/drawing/2010/main">
+        <mc:Choice Requires="a14">
           <p:sp>
             <p:nvSpPr>
               <p:cNvPr id="25" name="TextBox 24">
@@ -4443,7 +4449,7 @@
                     <m:sSup>
                       <m:sSupPr>
                         <m:ctrlPr>
-                          <a:rPr lang="en-US" altLang="ko-KR" smtClean="0">
+                          <a:rPr lang="en-US" altLang="ko-KR" i="1" smtClean="0">
                             <a:solidFill>
                               <a:srgbClr val="1F1F1F"/>
                             </a:solidFill>
@@ -4455,7 +4461,7 @@
                         <m:d>
                           <m:dPr>
                             <m:ctrlPr>
-                              <a:rPr lang="en-US" altLang="ko-KR" smtClean="0">
+                              <a:rPr lang="en-US" altLang="ko-KR" i="1" smtClean="0">
                                 <a:solidFill>
                                   <a:srgbClr val="1F1F1F"/>
                                 </a:solidFill>
@@ -4528,7 +4534,7 @@
             </p:txBody>
           </p:sp>
         </mc:Choice>
-        <mc:Fallback>
+        <mc:Fallback xmlns="">
           <p:sp>
             <p:nvSpPr>
               <p:cNvPr id="25" name="TextBox 24">
@@ -5259,6 +5265,3542 @@
         <p:cNvPr id="1" name="">
           <a:extLst>
             <a:ext uri="{FF2B5EF4-FFF2-40B4-BE49-F238E27FC236}">
+              <a16:creationId xmlns:a16="http://schemas.microsoft.com/office/drawing/2014/main" id="{C90A392C-D73D-D148-7BEB-416C2B757A2B}"/>
+            </a:ext>
+          </a:extLst>
+        </p:cNvPr>
+        <p:cNvGrpSpPr/>
+        <p:nvPr/>
+      </p:nvGrpSpPr>
+      <p:grpSpPr>
+        <a:xfrm>
+          <a:off x="0" y="0"/>
+          <a:ext cx="0" cy="0"/>
+          <a:chOff x="0" y="0"/>
+          <a:chExt cx="0" cy="0"/>
+        </a:xfrm>
+      </p:grpSpPr>
+      <p:sp>
+        <p:nvSpPr>
+          <p:cNvPr id="4" name="슬라이드 번호 개체 틀 3">
+            <a:extLst>
+              <a:ext uri="{FF2B5EF4-FFF2-40B4-BE49-F238E27FC236}">
+                <a16:creationId xmlns:a16="http://schemas.microsoft.com/office/drawing/2014/main" id="{5F02282E-9683-B750-B8F8-02AF06D5EA76}"/>
+              </a:ext>
+            </a:extLst>
+          </p:cNvPr>
+          <p:cNvSpPr>
+            <a:spLocks noGrp="1"/>
+          </p:cNvSpPr>
+          <p:nvPr>
+            <p:ph type="sldNum" sz="quarter" idx="12"/>
+          </p:nvPr>
+        </p:nvSpPr>
+        <p:spPr>
+          <a:xfrm>
+            <a:off x="10514011" y="6036261"/>
+            <a:ext cx="753545" cy="365125"/>
+          </a:xfrm>
+        </p:spPr>
+        <p:txBody>
+          <a:bodyPr/>
+          <a:lstStyle/>
+          <a:p>
+            <a:fld id="{D57F1E4F-1CFF-5643-939E-217C01CDF565}" type="slidenum">
+              <a:rPr lang="en-US" smtClean="0"/>
+              <a:pPr/>
+              <a:t>13</a:t>
+            </a:fld>
+            <a:endParaRPr lang="en-US" dirty="0"/>
+          </a:p>
+        </p:txBody>
+      </p:sp>
+      <p:sp>
+        <p:nvSpPr>
+          <p:cNvPr id="3" name="제목 1">
+            <a:extLst>
+              <a:ext uri="{FF2B5EF4-FFF2-40B4-BE49-F238E27FC236}">
+                <a16:creationId xmlns:a16="http://schemas.microsoft.com/office/drawing/2014/main" id="{EA29283D-A348-34F5-820F-7A89CCA15617}"/>
+              </a:ext>
+            </a:extLst>
+          </p:cNvPr>
+          <p:cNvSpPr txBox="1">
+            <a:spLocks/>
+          </p:cNvSpPr>
+          <p:nvPr/>
+        </p:nvSpPr>
+        <p:spPr>
+          <a:xfrm>
+            <a:off x="475645" y="481983"/>
+            <a:ext cx="10353762" cy="766439"/>
+          </a:xfrm>
+          <a:prstGeom prst="rect">
+            <a:avLst/>
+          </a:prstGeom>
+        </p:spPr>
+        <p:txBody>
+          <a:bodyPr vert="horz" lIns="91440" tIns="45720" rIns="91440" bIns="45720" rtlCol="0" anchor="ctr">
+            <a:normAutofit/>
+          </a:bodyPr>
+          <a:lstStyle>
+            <a:lvl1pPr algn="ctr" defTabSz="914400" rtl="0" eaLnBrk="1" latinLnBrk="1" hangingPunct="1">
+              <a:lnSpc>
+                <a:spcPct val="90000"/>
+              </a:lnSpc>
+              <a:spcBef>
+                <a:spcPct val="0"/>
+              </a:spcBef>
+              <a:buNone/>
+              <a:defRPr sz="3200" kern="1200" cap="all" baseline="0">
+                <a:solidFill>
+                  <a:schemeClr val="tx1"/>
+                </a:solidFill>
+                <a:effectLst/>
+                <a:latin typeface="Batang" panose="02030600000101010101" pitchFamily="18" charset="-127"/>
+                <a:ea typeface="Batang" panose="02030600000101010101" pitchFamily="18" charset="-127"/>
+                <a:cs typeface="+mj-cs"/>
+              </a:defRPr>
+            </a:lvl1pPr>
+          </a:lstStyle>
+          <a:p>
+            <a:pPr algn="l"/>
+            <a:r>
+              <a:rPr lang="en-US" altLang="ko-KR" sz="2800" cap="none" dirty="0">
+                <a:latin typeface="D2Coding" panose="020B0609020101020101" pitchFamily="49" charset="-127"/>
+                <a:ea typeface="D2Coding" panose="020B0609020101020101" pitchFamily="49" charset="-127"/>
+                <a:cs typeface="Segoe UI Light" panose="020B0502040204020203" pitchFamily="34" charset="0"/>
+              </a:rPr>
+              <a:t>YOLO: </a:t>
+            </a:r>
+            <a:r>
+              <a:rPr lang="ko-KR" altLang="en-US" sz="2800" cap="none" dirty="0">
+                <a:latin typeface="D2Coding" panose="020B0609020101020101" pitchFamily="49" charset="-127"/>
+                <a:ea typeface="D2Coding" panose="020B0609020101020101" pitchFamily="49" charset="-127"/>
+                <a:cs typeface="Segoe UI Light" panose="020B0502040204020203" pitchFamily="34" charset="0"/>
+              </a:rPr>
+              <a:t>학습 시</a:t>
+            </a:r>
+          </a:p>
+        </p:txBody>
+      </p:sp>
+      <p:sp>
+        <p:nvSpPr>
+          <p:cNvPr id="7" name="TextBox 6">
+            <a:extLst>
+              <a:ext uri="{FF2B5EF4-FFF2-40B4-BE49-F238E27FC236}">
+                <a16:creationId xmlns:a16="http://schemas.microsoft.com/office/drawing/2014/main" id="{E714B95D-8603-950A-4D8F-C5D08212F8D2}"/>
+              </a:ext>
+            </a:extLst>
+          </p:cNvPr>
+          <p:cNvSpPr txBox="1"/>
+          <p:nvPr/>
+        </p:nvSpPr>
+        <p:spPr>
+          <a:xfrm>
+            <a:off x="3071250" y="1440761"/>
+            <a:ext cx="5586973" cy="369332"/>
+          </a:xfrm>
+          <a:prstGeom prst="rect">
+            <a:avLst/>
+          </a:prstGeom>
+          <a:solidFill>
+            <a:schemeClr val="bg1"/>
+          </a:solidFill>
+        </p:spPr>
+        <p:txBody>
+          <a:bodyPr wrap="square">
+            <a:spAutoFit/>
+          </a:bodyPr>
+          <a:lstStyle/>
+          <a:p>
+            <a:pPr algn="ctr"/>
+            <a:r>
+              <a:rPr lang="ko-KR" altLang="en-US" dirty="0" err="1">
+                <a:latin typeface="D2Coding" panose="020B0609020101020101" pitchFamily="49" charset="-127"/>
+                <a:ea typeface="D2Coding" panose="020B0609020101020101" pitchFamily="49" charset="-127"/>
+              </a:rPr>
+              <a:t>Ground</a:t>
+            </a:r>
+            <a:r>
+              <a:rPr lang="ko-KR" altLang="en-US" dirty="0">
+                <a:latin typeface="D2Coding" panose="020B0609020101020101" pitchFamily="49" charset="-127"/>
+                <a:ea typeface="D2Coding" panose="020B0609020101020101" pitchFamily="49" charset="-127"/>
+              </a:rPr>
+              <a:t> </a:t>
+            </a:r>
+            <a:r>
+              <a:rPr lang="ko-KR" altLang="en-US" dirty="0" err="1">
+                <a:latin typeface="D2Coding" panose="020B0609020101020101" pitchFamily="49" charset="-127"/>
+                <a:ea typeface="D2Coding" panose="020B0609020101020101" pitchFamily="49" charset="-127"/>
+              </a:rPr>
+              <a:t>Truth</a:t>
+            </a:r>
+            <a:r>
+              <a:rPr lang="ko-KR" altLang="en-US" dirty="0">
+                <a:latin typeface="D2Coding" panose="020B0609020101020101" pitchFamily="49" charset="-127"/>
+                <a:ea typeface="D2Coding" panose="020B0609020101020101" pitchFamily="49" charset="-127"/>
+              </a:rPr>
+              <a:t>(트럭 정답지 박스) 입력</a:t>
+            </a:r>
+          </a:p>
+        </p:txBody>
+      </p:sp>
+      <p:sp>
+        <p:nvSpPr>
+          <p:cNvPr id="9" name="TextBox 8">
+            <a:extLst>
+              <a:ext uri="{FF2B5EF4-FFF2-40B4-BE49-F238E27FC236}">
+                <a16:creationId xmlns:a16="http://schemas.microsoft.com/office/drawing/2014/main" id="{3375CC89-CC96-6ADD-2122-34AF5C2AF1E7}"/>
+              </a:ext>
+            </a:extLst>
+          </p:cNvPr>
+          <p:cNvSpPr txBox="1"/>
+          <p:nvPr/>
+        </p:nvSpPr>
+        <p:spPr>
+          <a:xfrm>
+            <a:off x="3071251" y="2310922"/>
+            <a:ext cx="5586974" cy="369332"/>
+          </a:xfrm>
+          <a:prstGeom prst="rect">
+            <a:avLst/>
+          </a:prstGeom>
+          <a:solidFill>
+            <a:schemeClr val="bg1"/>
+          </a:solidFill>
+        </p:spPr>
+        <p:txBody>
+          <a:bodyPr wrap="square">
+            <a:spAutoFit/>
+          </a:bodyPr>
+          <a:lstStyle/>
+          <a:p>
+            <a:pPr algn="ctr"/>
+            <a:r>
+              <a:rPr lang="ko-KR" altLang="en-US" dirty="0">
+                <a:latin typeface="D2Coding" panose="020B0609020101020101" pitchFamily="49" charset="-127"/>
+                <a:ea typeface="D2Coding" panose="020B0609020101020101" pitchFamily="49" charset="-127"/>
+              </a:rPr>
+              <a:t>트럭 중심점이 속한 3×3 그리드 셀 지정</a:t>
+            </a:r>
+          </a:p>
+        </p:txBody>
+      </p:sp>
+      <p:sp>
+        <p:nvSpPr>
+          <p:cNvPr id="11" name="TextBox 10">
+            <a:extLst>
+              <a:ext uri="{FF2B5EF4-FFF2-40B4-BE49-F238E27FC236}">
+                <a16:creationId xmlns:a16="http://schemas.microsoft.com/office/drawing/2014/main" id="{CB7204E1-EC75-B6A5-B09E-00D3F55C80BA}"/>
+              </a:ext>
+            </a:extLst>
+          </p:cNvPr>
+          <p:cNvSpPr txBox="1"/>
+          <p:nvPr/>
+        </p:nvSpPr>
+        <p:spPr>
+          <a:xfrm>
+            <a:off x="3071251" y="3181083"/>
+            <a:ext cx="5586974" cy="369332"/>
+          </a:xfrm>
+          <a:prstGeom prst="rect">
+            <a:avLst/>
+          </a:prstGeom>
+          <a:solidFill>
+            <a:schemeClr val="accent6">
+              <a:lumMod val="60000"/>
+              <a:lumOff val="40000"/>
+            </a:schemeClr>
+          </a:solidFill>
+        </p:spPr>
+        <p:txBody>
+          <a:bodyPr wrap="square">
+            <a:spAutoFit/>
+          </a:bodyPr>
+          <a:lstStyle/>
+          <a:p>
+            <a:r>
+              <a:rPr lang="ko-KR" altLang="en-US" dirty="0">
+                <a:latin typeface="D2Coding" panose="020B0609020101020101" pitchFamily="49" charset="-127"/>
+                <a:ea typeface="D2Coding" panose="020B0609020101020101" pitchFamily="49" charset="-127"/>
+              </a:rPr>
+              <a:t>해당 그리드가 가진 2개의 고정 </a:t>
+            </a:r>
+            <a:r>
+              <a:rPr lang="ko-KR" altLang="en-US" dirty="0" err="1">
+                <a:latin typeface="D2Coding" panose="020B0609020101020101" pitchFamily="49" charset="-127"/>
+                <a:ea typeface="D2Coding" panose="020B0609020101020101" pitchFamily="49" charset="-127"/>
+              </a:rPr>
+              <a:t>Anchor</a:t>
+            </a:r>
+            <a:r>
+              <a:rPr lang="ko-KR" altLang="en-US" dirty="0">
+                <a:latin typeface="D2Coding" panose="020B0609020101020101" pitchFamily="49" charset="-127"/>
+                <a:ea typeface="D2Coding" panose="020B0609020101020101" pitchFamily="49" charset="-127"/>
+              </a:rPr>
+              <a:t> </a:t>
+            </a:r>
+            <a:r>
+              <a:rPr lang="ko-KR" altLang="en-US" dirty="0" err="1">
+                <a:latin typeface="D2Coding" panose="020B0609020101020101" pitchFamily="49" charset="-127"/>
+                <a:ea typeface="D2Coding" panose="020B0609020101020101" pitchFamily="49" charset="-127"/>
+              </a:rPr>
+              <a:t>Box</a:t>
+            </a:r>
+            <a:r>
+              <a:rPr lang="ko-KR" altLang="en-US" dirty="0">
+                <a:latin typeface="D2Coding" panose="020B0609020101020101" pitchFamily="49" charset="-127"/>
+                <a:ea typeface="D2Coding" panose="020B0609020101020101" pitchFamily="49" charset="-127"/>
+              </a:rPr>
+              <a:t> 호출</a:t>
+            </a:r>
+          </a:p>
+        </p:txBody>
+      </p:sp>
+      <p:sp>
+        <p:nvSpPr>
+          <p:cNvPr id="13" name="TextBox 12">
+            <a:extLst>
+              <a:ext uri="{FF2B5EF4-FFF2-40B4-BE49-F238E27FC236}">
+                <a16:creationId xmlns:a16="http://schemas.microsoft.com/office/drawing/2014/main" id="{F7228B6A-1C00-D15E-CF70-00E6A3D12821}"/>
+              </a:ext>
+            </a:extLst>
+          </p:cNvPr>
+          <p:cNvSpPr txBox="1"/>
+          <p:nvPr/>
+        </p:nvSpPr>
+        <p:spPr>
+          <a:xfrm>
+            <a:off x="742949" y="4051244"/>
+            <a:ext cx="5162549" cy="369332"/>
+          </a:xfrm>
+          <a:prstGeom prst="rect">
+            <a:avLst/>
+          </a:prstGeom>
+          <a:solidFill>
+            <a:schemeClr val="bg1"/>
+          </a:solidFill>
+        </p:spPr>
+        <p:txBody>
+          <a:bodyPr wrap="square">
+            <a:spAutoFit/>
+          </a:bodyPr>
+          <a:lstStyle/>
+          <a:p>
+            <a:pPr algn="ctr"/>
+            <a:r>
+              <a:rPr lang="ko-KR" altLang="en-US" dirty="0" err="1">
+                <a:latin typeface="D2Coding" panose="020B0609020101020101" pitchFamily="49" charset="-127"/>
+                <a:ea typeface="D2Coding" panose="020B0609020101020101" pitchFamily="49" charset="-127"/>
+              </a:rPr>
+              <a:t>Anchor</a:t>
+            </a:r>
+            <a:r>
+              <a:rPr lang="ko-KR" altLang="en-US" dirty="0">
+                <a:latin typeface="D2Coding" panose="020B0609020101020101" pitchFamily="49" charset="-127"/>
+                <a:ea typeface="D2Coding" panose="020B0609020101020101" pitchFamily="49" charset="-127"/>
+              </a:rPr>
+              <a:t> 1 (</a:t>
+            </a:r>
+            <a:r>
+              <a:rPr lang="ko-KR" altLang="en-US" dirty="0" err="1">
+                <a:latin typeface="D2Coding" panose="020B0609020101020101" pitchFamily="49" charset="-127"/>
+                <a:ea typeface="D2Coding" panose="020B0609020101020101" pitchFamily="49" charset="-127"/>
+              </a:rPr>
+              <a:t>IoU</a:t>
+            </a:r>
+            <a:r>
+              <a:rPr lang="ko-KR" altLang="en-US" dirty="0">
+                <a:latin typeface="D2Coding" panose="020B0609020101020101" pitchFamily="49" charset="-127"/>
+                <a:ea typeface="D2Coding" panose="020B0609020101020101" pitchFamily="49" charset="-127"/>
+              </a:rPr>
+              <a:t>=0.83)</a:t>
+            </a:r>
+          </a:p>
+        </p:txBody>
+      </p:sp>
+      <p:sp>
+        <p:nvSpPr>
+          <p:cNvPr id="15" name="TextBox 14">
+            <a:extLst>
+              <a:ext uri="{FF2B5EF4-FFF2-40B4-BE49-F238E27FC236}">
+                <a16:creationId xmlns:a16="http://schemas.microsoft.com/office/drawing/2014/main" id="{11A89B76-6DE4-E5B3-0409-39D76DEB4D13}"/>
+              </a:ext>
+            </a:extLst>
+          </p:cNvPr>
+          <p:cNvSpPr txBox="1"/>
+          <p:nvPr/>
+        </p:nvSpPr>
+        <p:spPr>
+          <a:xfrm>
+            <a:off x="742950" y="4921405"/>
+            <a:ext cx="5162550" cy="369332"/>
+          </a:xfrm>
+          <a:prstGeom prst="rect">
+            <a:avLst/>
+          </a:prstGeom>
+          <a:solidFill>
+            <a:schemeClr val="bg1"/>
+          </a:solidFill>
+        </p:spPr>
+        <p:txBody>
+          <a:bodyPr wrap="square">
+            <a:spAutoFit/>
+          </a:bodyPr>
+          <a:lstStyle/>
+          <a:p>
+            <a:pPr algn="ctr"/>
+            <a:r>
+              <a:rPr lang="ko-KR" altLang="en-US" dirty="0" err="1">
+                <a:latin typeface="D2Coding" panose="020B0609020101020101" pitchFamily="49" charset="-127"/>
+                <a:ea typeface="D2Coding" panose="020B0609020101020101" pitchFamily="49" charset="-127"/>
+              </a:rPr>
+              <a:t>Anchor</a:t>
+            </a:r>
+            <a:r>
+              <a:rPr lang="ko-KR" altLang="en-US" dirty="0">
+                <a:latin typeface="D2Coding" panose="020B0609020101020101" pitchFamily="49" charset="-127"/>
+                <a:ea typeface="D2Coding" panose="020B0609020101020101" pitchFamily="49" charset="-127"/>
+              </a:rPr>
+              <a:t> 1 선택 (이 트럭의 예측 책임자로 임명)</a:t>
+            </a:r>
+          </a:p>
+        </p:txBody>
+      </p:sp>
+      <p:sp>
+        <p:nvSpPr>
+          <p:cNvPr id="18" name="TextBox 17">
+            <a:extLst>
+              <a:ext uri="{FF2B5EF4-FFF2-40B4-BE49-F238E27FC236}">
+                <a16:creationId xmlns:a16="http://schemas.microsoft.com/office/drawing/2014/main" id="{B868CD83-0591-827F-13C5-83124305D8FD}"/>
+              </a:ext>
+            </a:extLst>
+          </p:cNvPr>
+          <p:cNvSpPr txBox="1"/>
+          <p:nvPr/>
+        </p:nvSpPr>
+        <p:spPr>
+          <a:xfrm>
+            <a:off x="742950" y="5791567"/>
+            <a:ext cx="5162550" cy="646331"/>
+          </a:xfrm>
+          <a:prstGeom prst="rect">
+            <a:avLst/>
+          </a:prstGeom>
+          <a:solidFill>
+            <a:schemeClr val="bg1"/>
+          </a:solidFill>
+        </p:spPr>
+        <p:txBody>
+          <a:bodyPr wrap="square">
+            <a:spAutoFit/>
+          </a:bodyPr>
+          <a:lstStyle/>
+          <a:p>
+            <a:pPr algn="ctr"/>
+            <a:r>
+              <a:rPr lang="ko-KR" altLang="en-US" dirty="0" err="1">
+                <a:latin typeface="D2Coding" panose="020B0609020101020101" pitchFamily="49" charset="-127"/>
+                <a:ea typeface="D2Coding" panose="020B0609020101020101" pitchFamily="49" charset="-127"/>
+              </a:rPr>
+              <a:t>Anchor</a:t>
+            </a:r>
+            <a:r>
+              <a:rPr lang="ko-KR" altLang="en-US" dirty="0">
+                <a:latin typeface="D2Coding" panose="020B0609020101020101" pitchFamily="49" charset="-127"/>
+                <a:ea typeface="D2Coding" panose="020B0609020101020101" pitchFamily="49" charset="-127"/>
+              </a:rPr>
+              <a:t> 1의 </a:t>
+            </a:r>
+            <a:r>
+              <a:rPr lang="ko-KR" altLang="en-US" dirty="0" err="1">
+                <a:latin typeface="D2Coding" panose="020B0609020101020101" pitchFamily="49" charset="-127"/>
+                <a:ea typeface="D2Coding" panose="020B0609020101020101" pitchFamily="49" charset="-127"/>
+              </a:rPr>
+              <a:t>예측값과</a:t>
+            </a:r>
+            <a:r>
+              <a:rPr lang="ko-KR" altLang="en-US" dirty="0">
+                <a:latin typeface="D2Coding" panose="020B0609020101020101" pitchFamily="49" charset="-127"/>
+                <a:ea typeface="D2Coding" panose="020B0609020101020101" pitchFamily="49" charset="-127"/>
+              </a:rPr>
+              <a:t> </a:t>
+            </a:r>
+            <a:r>
+              <a:rPr lang="ko-KR" altLang="en-US" dirty="0" err="1">
+                <a:latin typeface="D2Coding" panose="020B0609020101020101" pitchFamily="49" charset="-127"/>
+                <a:ea typeface="D2Coding" panose="020B0609020101020101" pitchFamily="49" charset="-127"/>
+              </a:rPr>
+              <a:t>Ground</a:t>
+            </a:r>
+            <a:r>
+              <a:rPr lang="ko-KR" altLang="en-US" dirty="0">
+                <a:latin typeface="D2Coding" panose="020B0609020101020101" pitchFamily="49" charset="-127"/>
+                <a:ea typeface="D2Coding" panose="020B0609020101020101" pitchFamily="49" charset="-127"/>
+              </a:rPr>
+              <a:t> </a:t>
+            </a:r>
+            <a:r>
+              <a:rPr lang="ko-KR" altLang="en-US" dirty="0" err="1">
+                <a:latin typeface="D2Coding" panose="020B0609020101020101" pitchFamily="49" charset="-127"/>
+                <a:ea typeface="D2Coding" panose="020B0609020101020101" pitchFamily="49" charset="-127"/>
+              </a:rPr>
+              <a:t>Truth</a:t>
+            </a:r>
+            <a:r>
+              <a:rPr lang="ko-KR" altLang="en-US" dirty="0">
+                <a:latin typeface="D2Coding" panose="020B0609020101020101" pitchFamily="49" charset="-127"/>
+                <a:ea typeface="D2Coding" panose="020B0609020101020101" pitchFamily="49" charset="-127"/>
+              </a:rPr>
+              <a:t> 간의 오차(</a:t>
+            </a:r>
+            <a:r>
+              <a:rPr lang="ko-KR" altLang="en-US" dirty="0" err="1">
+                <a:latin typeface="D2Coding" panose="020B0609020101020101" pitchFamily="49" charset="-127"/>
+                <a:ea typeface="D2Coding" panose="020B0609020101020101" pitchFamily="49" charset="-127"/>
+              </a:rPr>
+              <a:t>Loss</a:t>
+            </a:r>
+            <a:r>
+              <a:rPr lang="ko-KR" altLang="en-US" dirty="0">
+                <a:latin typeface="D2Coding" panose="020B0609020101020101" pitchFamily="49" charset="-127"/>
+                <a:ea typeface="D2Coding" panose="020B0609020101020101" pitchFamily="49" charset="-127"/>
+              </a:rPr>
+              <a:t>) 계산 및 학습</a:t>
+            </a:r>
+          </a:p>
+        </p:txBody>
+      </p:sp>
+      <p:sp>
+        <p:nvSpPr>
+          <p:cNvPr id="20" name="TextBox 19">
+            <a:extLst>
+              <a:ext uri="{FF2B5EF4-FFF2-40B4-BE49-F238E27FC236}">
+                <a16:creationId xmlns:a16="http://schemas.microsoft.com/office/drawing/2014/main" id="{979C0550-16F1-A1AD-28BD-25E06B4F9863}"/>
+              </a:ext>
+            </a:extLst>
+          </p:cNvPr>
+          <p:cNvSpPr txBox="1"/>
+          <p:nvPr/>
+        </p:nvSpPr>
+        <p:spPr>
+          <a:xfrm>
+            <a:off x="7780336" y="4051587"/>
+            <a:ext cx="2733675" cy="369332"/>
+          </a:xfrm>
+          <a:prstGeom prst="rect">
+            <a:avLst/>
+          </a:prstGeom>
+          <a:solidFill>
+            <a:schemeClr val="bg1"/>
+          </a:solidFill>
+        </p:spPr>
+        <p:txBody>
+          <a:bodyPr wrap="square">
+            <a:spAutoFit/>
+          </a:bodyPr>
+          <a:lstStyle/>
+          <a:p>
+            <a:pPr algn="ctr"/>
+            <a:r>
+              <a:rPr lang="ko-KR" altLang="en-US" dirty="0" err="1">
+                <a:latin typeface="D2Coding" panose="020B0609020101020101" pitchFamily="49" charset="-127"/>
+                <a:ea typeface="D2Coding" panose="020B0609020101020101" pitchFamily="49" charset="-127"/>
+              </a:rPr>
+              <a:t>Anchor</a:t>
+            </a:r>
+            <a:r>
+              <a:rPr lang="ko-KR" altLang="en-US" dirty="0">
+                <a:latin typeface="D2Coding" panose="020B0609020101020101" pitchFamily="49" charset="-127"/>
+                <a:ea typeface="D2Coding" panose="020B0609020101020101" pitchFamily="49" charset="-127"/>
+              </a:rPr>
+              <a:t> 2 (</a:t>
+            </a:r>
+            <a:r>
+              <a:rPr lang="ko-KR" altLang="en-US" dirty="0" err="1">
+                <a:latin typeface="D2Coding" panose="020B0609020101020101" pitchFamily="49" charset="-127"/>
+                <a:ea typeface="D2Coding" panose="020B0609020101020101" pitchFamily="49" charset="-127"/>
+              </a:rPr>
+              <a:t>IoU</a:t>
+            </a:r>
+            <a:r>
+              <a:rPr lang="ko-KR" altLang="en-US" dirty="0">
+                <a:latin typeface="D2Coding" panose="020B0609020101020101" pitchFamily="49" charset="-127"/>
+                <a:ea typeface="D2Coding" panose="020B0609020101020101" pitchFamily="49" charset="-127"/>
+              </a:rPr>
+              <a:t>=0.39)</a:t>
+            </a:r>
+          </a:p>
+        </p:txBody>
+      </p:sp>
+      <p:cxnSp>
+        <p:nvCxnSpPr>
+          <p:cNvPr id="22" name="직선 화살표 연결선 21">
+            <a:extLst>
+              <a:ext uri="{FF2B5EF4-FFF2-40B4-BE49-F238E27FC236}">
+                <a16:creationId xmlns:a16="http://schemas.microsoft.com/office/drawing/2014/main" id="{D8CA16CC-F0D8-0A02-CB22-6F5B5EEEE803}"/>
+              </a:ext>
+            </a:extLst>
+          </p:cNvPr>
+          <p:cNvCxnSpPr>
+            <a:stCxn id="7" idx="2"/>
+            <a:endCxn id="9" idx="0"/>
+          </p:cNvCxnSpPr>
+          <p:nvPr/>
+        </p:nvCxnSpPr>
+        <p:spPr>
+          <a:xfrm>
+            <a:off x="5864737" y="1810093"/>
+            <a:ext cx="1" cy="500829"/>
+          </a:xfrm>
+          <a:prstGeom prst="straightConnector1">
+            <a:avLst/>
+          </a:prstGeom>
+          <a:ln>
+            <a:tailEnd type="triangle"/>
+          </a:ln>
+        </p:spPr>
+        <p:style>
+          <a:lnRef idx="1">
+            <a:schemeClr val="dk1"/>
+          </a:lnRef>
+          <a:fillRef idx="0">
+            <a:schemeClr val="dk1"/>
+          </a:fillRef>
+          <a:effectRef idx="0">
+            <a:schemeClr val="dk1"/>
+          </a:effectRef>
+          <a:fontRef idx="minor">
+            <a:schemeClr val="tx1"/>
+          </a:fontRef>
+        </p:style>
+      </p:cxnSp>
+      <p:cxnSp>
+        <p:nvCxnSpPr>
+          <p:cNvPr id="23" name="직선 화살표 연결선 22">
+            <a:extLst>
+              <a:ext uri="{FF2B5EF4-FFF2-40B4-BE49-F238E27FC236}">
+                <a16:creationId xmlns:a16="http://schemas.microsoft.com/office/drawing/2014/main" id="{AA5E7E48-3B4D-F26F-9347-98BAC65EDBC7}"/>
+              </a:ext>
+            </a:extLst>
+          </p:cNvPr>
+          <p:cNvCxnSpPr>
+            <a:cxnSpLocks/>
+            <a:stCxn id="9" idx="2"/>
+            <a:endCxn id="11" idx="0"/>
+          </p:cNvCxnSpPr>
+          <p:nvPr/>
+        </p:nvCxnSpPr>
+        <p:spPr>
+          <a:xfrm>
+            <a:off x="5864738" y="2680254"/>
+            <a:ext cx="0" cy="500829"/>
+          </a:xfrm>
+          <a:prstGeom prst="straightConnector1">
+            <a:avLst/>
+          </a:prstGeom>
+          <a:ln>
+            <a:tailEnd type="triangle"/>
+          </a:ln>
+        </p:spPr>
+        <p:style>
+          <a:lnRef idx="1">
+            <a:schemeClr val="dk1"/>
+          </a:lnRef>
+          <a:fillRef idx="0">
+            <a:schemeClr val="dk1"/>
+          </a:fillRef>
+          <a:effectRef idx="0">
+            <a:schemeClr val="dk1"/>
+          </a:effectRef>
+          <a:fontRef idx="minor">
+            <a:schemeClr val="tx1"/>
+          </a:fontRef>
+        </p:style>
+      </p:cxnSp>
+      <p:cxnSp>
+        <p:nvCxnSpPr>
+          <p:cNvPr id="27" name="연결선: 꺾임 26">
+            <a:extLst>
+              <a:ext uri="{FF2B5EF4-FFF2-40B4-BE49-F238E27FC236}">
+                <a16:creationId xmlns:a16="http://schemas.microsoft.com/office/drawing/2014/main" id="{E07B488B-7E4B-D151-890E-3E14EC18F72C}"/>
+              </a:ext>
+            </a:extLst>
+          </p:cNvPr>
+          <p:cNvCxnSpPr>
+            <a:cxnSpLocks/>
+            <a:stCxn id="11" idx="2"/>
+            <a:endCxn id="13" idx="0"/>
+          </p:cNvCxnSpPr>
+          <p:nvPr/>
+        </p:nvCxnSpPr>
+        <p:spPr>
+          <a:xfrm rot="5400000">
+            <a:off x="4344067" y="2530572"/>
+            <a:ext cx="500829" cy="2540514"/>
+          </a:xfrm>
+          <a:prstGeom prst="bentConnector3">
+            <a:avLst/>
+          </a:prstGeom>
+          <a:ln>
+            <a:tailEnd type="triangle"/>
+          </a:ln>
+        </p:spPr>
+        <p:style>
+          <a:lnRef idx="1">
+            <a:schemeClr val="dk1"/>
+          </a:lnRef>
+          <a:fillRef idx="0">
+            <a:schemeClr val="dk1"/>
+          </a:fillRef>
+          <a:effectRef idx="0">
+            <a:schemeClr val="dk1"/>
+          </a:effectRef>
+          <a:fontRef idx="minor">
+            <a:schemeClr val="tx1"/>
+          </a:fontRef>
+        </p:style>
+      </p:cxnSp>
+      <p:cxnSp>
+        <p:nvCxnSpPr>
+          <p:cNvPr id="28" name="연결선: 꺾임 27">
+            <a:extLst>
+              <a:ext uri="{FF2B5EF4-FFF2-40B4-BE49-F238E27FC236}">
+                <a16:creationId xmlns:a16="http://schemas.microsoft.com/office/drawing/2014/main" id="{975C9583-F42F-E4E0-C1B9-463FAD485FF9}"/>
+              </a:ext>
+            </a:extLst>
+          </p:cNvPr>
+          <p:cNvCxnSpPr>
+            <a:cxnSpLocks/>
+            <a:stCxn id="11" idx="2"/>
+            <a:endCxn id="20" idx="0"/>
+          </p:cNvCxnSpPr>
+          <p:nvPr/>
+        </p:nvCxnSpPr>
+        <p:spPr>
+          <a:xfrm rot="16200000" flipH="1">
+            <a:off x="7255370" y="2159783"/>
+            <a:ext cx="501172" cy="3282436"/>
+          </a:xfrm>
+          <a:prstGeom prst="bentConnector3">
+            <a:avLst>
+              <a:gd name="adj1" fmla="val 50000"/>
+            </a:avLst>
+          </a:prstGeom>
+          <a:ln>
+            <a:tailEnd type="triangle"/>
+          </a:ln>
+        </p:spPr>
+        <p:style>
+          <a:lnRef idx="1">
+            <a:schemeClr val="dk1"/>
+          </a:lnRef>
+          <a:fillRef idx="0">
+            <a:schemeClr val="dk1"/>
+          </a:fillRef>
+          <a:effectRef idx="0">
+            <a:schemeClr val="dk1"/>
+          </a:effectRef>
+          <a:fontRef idx="minor">
+            <a:schemeClr val="tx1"/>
+          </a:fontRef>
+        </p:style>
+      </p:cxnSp>
+      <p:cxnSp>
+        <p:nvCxnSpPr>
+          <p:cNvPr id="31" name="직선 화살표 연결선 30">
+            <a:extLst>
+              <a:ext uri="{FF2B5EF4-FFF2-40B4-BE49-F238E27FC236}">
+                <a16:creationId xmlns:a16="http://schemas.microsoft.com/office/drawing/2014/main" id="{65C443F0-BF90-7A15-BD60-492A591179D4}"/>
+              </a:ext>
+            </a:extLst>
+          </p:cNvPr>
+          <p:cNvCxnSpPr>
+            <a:cxnSpLocks/>
+            <a:stCxn id="13" idx="2"/>
+            <a:endCxn id="15" idx="0"/>
+          </p:cNvCxnSpPr>
+          <p:nvPr/>
+        </p:nvCxnSpPr>
+        <p:spPr>
+          <a:xfrm>
+            <a:off x="3324224" y="4420576"/>
+            <a:ext cx="1" cy="500829"/>
+          </a:xfrm>
+          <a:prstGeom prst="straightConnector1">
+            <a:avLst/>
+          </a:prstGeom>
+          <a:ln>
+            <a:tailEnd type="triangle"/>
+          </a:ln>
+        </p:spPr>
+        <p:style>
+          <a:lnRef idx="1">
+            <a:schemeClr val="dk1"/>
+          </a:lnRef>
+          <a:fillRef idx="0">
+            <a:schemeClr val="dk1"/>
+          </a:fillRef>
+          <a:effectRef idx="0">
+            <a:schemeClr val="dk1"/>
+          </a:effectRef>
+          <a:fontRef idx="minor">
+            <a:schemeClr val="tx1"/>
+          </a:fontRef>
+        </p:style>
+      </p:cxnSp>
+      <p:cxnSp>
+        <p:nvCxnSpPr>
+          <p:cNvPr id="34" name="직선 화살표 연결선 33">
+            <a:extLst>
+              <a:ext uri="{FF2B5EF4-FFF2-40B4-BE49-F238E27FC236}">
+                <a16:creationId xmlns:a16="http://schemas.microsoft.com/office/drawing/2014/main" id="{9FC3A9A9-988A-B71B-3036-C47B853CB609}"/>
+              </a:ext>
+            </a:extLst>
+          </p:cNvPr>
+          <p:cNvCxnSpPr>
+            <a:cxnSpLocks/>
+            <a:stCxn id="15" idx="2"/>
+          </p:cNvCxnSpPr>
+          <p:nvPr/>
+        </p:nvCxnSpPr>
+        <p:spPr>
+          <a:xfrm>
+            <a:off x="3324225" y="5290737"/>
+            <a:ext cx="0" cy="500486"/>
+          </a:xfrm>
+          <a:prstGeom prst="straightConnector1">
+            <a:avLst/>
+          </a:prstGeom>
+          <a:ln>
+            <a:tailEnd type="triangle"/>
+          </a:ln>
+        </p:spPr>
+        <p:style>
+          <a:lnRef idx="1">
+            <a:schemeClr val="dk1"/>
+          </a:lnRef>
+          <a:fillRef idx="0">
+            <a:schemeClr val="dk1"/>
+          </a:fillRef>
+          <a:effectRef idx="0">
+            <a:schemeClr val="dk1"/>
+          </a:effectRef>
+          <a:fontRef idx="minor">
+            <a:schemeClr val="tx1"/>
+          </a:fontRef>
+        </p:style>
+      </p:cxnSp>
+      <p:sp>
+        <p:nvSpPr>
+          <p:cNvPr id="41" name="TextBox 40">
+            <a:extLst>
+              <a:ext uri="{FF2B5EF4-FFF2-40B4-BE49-F238E27FC236}">
+                <a16:creationId xmlns:a16="http://schemas.microsoft.com/office/drawing/2014/main" id="{AEA87C6C-B906-B205-AB55-1ED2D60EB29F}"/>
+              </a:ext>
+            </a:extLst>
+          </p:cNvPr>
+          <p:cNvSpPr txBox="1"/>
+          <p:nvPr/>
+        </p:nvSpPr>
+        <p:spPr>
+          <a:xfrm>
+            <a:off x="7680340" y="5001740"/>
+            <a:ext cx="3768709" cy="830997"/>
+          </a:xfrm>
+          <a:prstGeom prst="rect">
+            <a:avLst/>
+          </a:prstGeom>
+          <a:noFill/>
+        </p:spPr>
+        <p:txBody>
+          <a:bodyPr wrap="square">
+            <a:spAutoFit/>
+          </a:bodyPr>
+          <a:lstStyle/>
+          <a:p>
+            <a:r>
+              <a:rPr lang="en-US" altLang="ko-KR" sz="1600" b="1" dirty="0" err="1">
+                <a:latin typeface="D2Coding" panose="020B0609020101020101" pitchFamily="49" charset="-127"/>
+                <a:ea typeface="D2Coding" panose="020B0609020101020101" pitchFamily="49" charset="-127"/>
+              </a:rPr>
+              <a:t>IoU</a:t>
+            </a:r>
+            <a:r>
+              <a:rPr lang="en-US" altLang="ko-KR" sz="1600" b="1" dirty="0">
+                <a:latin typeface="D2Coding" panose="020B0609020101020101" pitchFamily="49" charset="-127"/>
+                <a:ea typeface="D2Coding" panose="020B0609020101020101" pitchFamily="49" charset="-127"/>
+              </a:rPr>
+              <a:t> </a:t>
+            </a:r>
+            <a:r>
+              <a:rPr lang="ko-KR" altLang="en-US" sz="1600" b="1" dirty="0">
+                <a:latin typeface="D2Coding" panose="020B0609020101020101" pitchFamily="49" charset="-127"/>
+                <a:ea typeface="D2Coding" panose="020B0609020101020101" pitchFamily="49" charset="-127"/>
+              </a:rPr>
+              <a:t>계산 부분은 모델이 학습할 때 어떤 앵커 박스에 </a:t>
+            </a:r>
+            <a:r>
+              <a:rPr lang="en-US" altLang="ko-KR" sz="1600" b="1" dirty="0">
+                <a:latin typeface="D2Coding" panose="020B0609020101020101" pitchFamily="49" charset="-127"/>
+                <a:ea typeface="D2Coding" panose="020B0609020101020101" pitchFamily="49" charset="-127"/>
+              </a:rPr>
+              <a:t>'</a:t>
+            </a:r>
+            <a:r>
+              <a:rPr lang="ko-KR" altLang="en-US" sz="1600" b="1" dirty="0">
+                <a:latin typeface="D2Coding" panose="020B0609020101020101" pitchFamily="49" charset="-127"/>
+                <a:ea typeface="D2Coding" panose="020B0609020101020101" pitchFamily="49" charset="-127"/>
+              </a:rPr>
+              <a:t>정답 책임</a:t>
+            </a:r>
+            <a:r>
+              <a:rPr lang="en-US" altLang="ko-KR" sz="1600" b="1" dirty="0">
+                <a:latin typeface="D2Coding" panose="020B0609020101020101" pitchFamily="49" charset="-127"/>
+                <a:ea typeface="D2Coding" panose="020B0609020101020101" pitchFamily="49" charset="-127"/>
+              </a:rPr>
+              <a:t>'</a:t>
+            </a:r>
+            <a:r>
+              <a:rPr lang="ko-KR" altLang="en-US" sz="1600" b="1" dirty="0">
+                <a:latin typeface="D2Coding" panose="020B0609020101020101" pitchFamily="49" charset="-127"/>
+                <a:ea typeface="D2Coding" panose="020B0609020101020101" pitchFamily="49" charset="-127"/>
+              </a:rPr>
+              <a:t>을 부여하는 흐름도</a:t>
+            </a:r>
+          </a:p>
+        </p:txBody>
+      </p:sp>
+    </p:spTree>
+    <p:extLst>
+      <p:ext uri="{BB962C8B-B14F-4D97-AF65-F5344CB8AC3E}">
+        <p14:creationId xmlns:p14="http://schemas.microsoft.com/office/powerpoint/2010/main" val="1337942637"/>
+      </p:ext>
+    </p:extLst>
+  </p:cSld>
+  <p:clrMapOvr>
+    <a:masterClrMapping/>
+  </p:clrMapOvr>
+</p:sld>
+</file>
+
+<file path=ppt/slides/slide14.xml><?xml version="1.0" encoding="utf-8"?>
+<p:sld xmlns:a="http://schemas.openxmlformats.org/drawingml/2006/main" xmlns:r="http://schemas.openxmlformats.org/officeDocument/2006/relationships" xmlns:p="http://schemas.openxmlformats.org/presentationml/2006/main">
+  <p:cSld>
+    <p:spTree>
+      <p:nvGrpSpPr>
+        <p:cNvPr id="1" name="">
+          <a:extLst>
+            <a:ext uri="{FF2B5EF4-FFF2-40B4-BE49-F238E27FC236}">
+              <a16:creationId xmlns:a16="http://schemas.microsoft.com/office/drawing/2014/main" id="{A467B388-39AA-E0A2-0017-71F7F3C9EACB}"/>
+            </a:ext>
+          </a:extLst>
+        </p:cNvPr>
+        <p:cNvGrpSpPr/>
+        <p:nvPr/>
+      </p:nvGrpSpPr>
+      <p:grpSpPr>
+        <a:xfrm>
+          <a:off x="0" y="0"/>
+          <a:ext cx="0" cy="0"/>
+          <a:chOff x="0" y="0"/>
+          <a:chExt cx="0" cy="0"/>
+        </a:xfrm>
+      </p:grpSpPr>
+      <p:cxnSp>
+        <p:nvCxnSpPr>
+          <p:cNvPr id="42" name="직선 화살표 연결선 41">
+            <a:extLst>
+              <a:ext uri="{FF2B5EF4-FFF2-40B4-BE49-F238E27FC236}">
+                <a16:creationId xmlns:a16="http://schemas.microsoft.com/office/drawing/2014/main" id="{CE90C49D-AB57-9AA2-21E0-9A78DEAE5570}"/>
+              </a:ext>
+            </a:extLst>
+          </p:cNvPr>
+          <p:cNvCxnSpPr>
+            <a:stCxn id="8" idx="2"/>
+            <a:endCxn id="33" idx="0"/>
+          </p:cNvCxnSpPr>
+          <p:nvPr/>
+        </p:nvCxnSpPr>
+        <p:spPr>
+          <a:xfrm>
+            <a:off x="5731894" y="1800253"/>
+            <a:ext cx="82512" cy="4199846"/>
+          </a:xfrm>
+          <a:prstGeom prst="straightConnector1">
+            <a:avLst/>
+          </a:prstGeom>
+          <a:ln>
+            <a:tailEnd type="triangle"/>
+          </a:ln>
+        </p:spPr>
+        <p:style>
+          <a:lnRef idx="1">
+            <a:schemeClr val="dk1"/>
+          </a:lnRef>
+          <a:fillRef idx="0">
+            <a:schemeClr val="dk1"/>
+          </a:fillRef>
+          <a:effectRef idx="0">
+            <a:schemeClr val="dk1"/>
+          </a:effectRef>
+          <a:fontRef idx="minor">
+            <a:schemeClr val="tx1"/>
+          </a:fontRef>
+        </p:style>
+      </p:cxnSp>
+      <p:sp>
+        <p:nvSpPr>
+          <p:cNvPr id="39" name="직사각형 38">
+            <a:extLst>
+              <a:ext uri="{FF2B5EF4-FFF2-40B4-BE49-F238E27FC236}">
+                <a16:creationId xmlns:a16="http://schemas.microsoft.com/office/drawing/2014/main" id="{FB955799-49DB-29C0-45D8-EE9C45C70E97}"/>
+              </a:ext>
+            </a:extLst>
+          </p:cNvPr>
+          <p:cNvSpPr/>
+          <p:nvPr/>
+        </p:nvSpPr>
+        <p:spPr>
+          <a:xfrm>
+            <a:off x="962025" y="3676651"/>
+            <a:ext cx="9620250" cy="1037992"/>
+          </a:xfrm>
+          <a:prstGeom prst="rect">
+            <a:avLst/>
+          </a:prstGeom>
+          <a:solidFill>
+            <a:schemeClr val="bg1"/>
+          </a:solidFill>
+        </p:spPr>
+        <p:style>
+          <a:lnRef idx="2">
+            <a:schemeClr val="accent1">
+              <a:shade val="15000"/>
+            </a:schemeClr>
+          </a:lnRef>
+          <a:fillRef idx="1">
+            <a:schemeClr val="accent1"/>
+          </a:fillRef>
+          <a:effectRef idx="0">
+            <a:schemeClr val="accent1"/>
+          </a:effectRef>
+          <a:fontRef idx="minor">
+            <a:schemeClr val="lt1"/>
+          </a:fontRef>
+        </p:style>
+        <p:txBody>
+          <a:bodyPr rtlCol="0" anchor="ctr"/>
+          <a:lstStyle/>
+          <a:p>
+            <a:pPr algn="ctr"/>
+            <a:endParaRPr lang="ko-KR" altLang="en-US"/>
+          </a:p>
+        </p:txBody>
+      </p:sp>
+      <p:sp>
+        <p:nvSpPr>
+          <p:cNvPr id="4" name="슬라이드 번호 개체 틀 3">
+            <a:extLst>
+              <a:ext uri="{FF2B5EF4-FFF2-40B4-BE49-F238E27FC236}">
+                <a16:creationId xmlns:a16="http://schemas.microsoft.com/office/drawing/2014/main" id="{DD961C02-DF94-8074-69E4-0F73E7F9E722}"/>
+              </a:ext>
+            </a:extLst>
+          </p:cNvPr>
+          <p:cNvSpPr>
+            <a:spLocks noGrp="1"/>
+          </p:cNvSpPr>
+          <p:nvPr>
+            <p:ph type="sldNum" sz="quarter" idx="12"/>
+          </p:nvPr>
+        </p:nvSpPr>
+        <p:spPr>
+          <a:xfrm>
+            <a:off x="10514011" y="6036261"/>
+            <a:ext cx="753545" cy="365125"/>
+          </a:xfrm>
+        </p:spPr>
+        <p:txBody>
+          <a:bodyPr/>
+          <a:lstStyle/>
+          <a:p>
+            <a:fld id="{D57F1E4F-1CFF-5643-939E-217C01CDF565}" type="slidenum">
+              <a:rPr lang="en-US" smtClean="0"/>
+              <a:pPr/>
+              <a:t>14</a:t>
+            </a:fld>
+            <a:endParaRPr lang="en-US" dirty="0"/>
+          </a:p>
+        </p:txBody>
+      </p:sp>
+      <p:sp>
+        <p:nvSpPr>
+          <p:cNvPr id="3" name="제목 1">
+            <a:extLst>
+              <a:ext uri="{FF2B5EF4-FFF2-40B4-BE49-F238E27FC236}">
+                <a16:creationId xmlns:a16="http://schemas.microsoft.com/office/drawing/2014/main" id="{1A37BC71-4E6B-4145-5B2D-2F2113DA9659}"/>
+              </a:ext>
+            </a:extLst>
+          </p:cNvPr>
+          <p:cNvSpPr txBox="1">
+            <a:spLocks/>
+          </p:cNvSpPr>
+          <p:nvPr/>
+        </p:nvSpPr>
+        <p:spPr>
+          <a:xfrm>
+            <a:off x="475645" y="481983"/>
+            <a:ext cx="10353762" cy="766439"/>
+          </a:xfrm>
+          <a:prstGeom prst="rect">
+            <a:avLst/>
+          </a:prstGeom>
+        </p:spPr>
+        <p:txBody>
+          <a:bodyPr vert="horz" lIns="91440" tIns="45720" rIns="91440" bIns="45720" rtlCol="0" anchor="ctr">
+            <a:normAutofit/>
+          </a:bodyPr>
+          <a:lstStyle>
+            <a:lvl1pPr algn="ctr" defTabSz="914400" rtl="0" eaLnBrk="1" latinLnBrk="1" hangingPunct="1">
+              <a:lnSpc>
+                <a:spcPct val="90000"/>
+              </a:lnSpc>
+              <a:spcBef>
+                <a:spcPct val="0"/>
+              </a:spcBef>
+              <a:buNone/>
+              <a:defRPr sz="3200" kern="1200" cap="all" baseline="0">
+                <a:solidFill>
+                  <a:schemeClr val="tx1"/>
+                </a:solidFill>
+                <a:effectLst/>
+                <a:latin typeface="Batang" panose="02030600000101010101" pitchFamily="18" charset="-127"/>
+                <a:ea typeface="Batang" panose="02030600000101010101" pitchFamily="18" charset="-127"/>
+                <a:cs typeface="+mj-cs"/>
+              </a:defRPr>
+            </a:lvl1pPr>
+          </a:lstStyle>
+          <a:p>
+            <a:pPr algn="l"/>
+            <a:r>
+              <a:rPr lang="en-US" altLang="ko-KR" sz="2800" cap="none" dirty="0">
+                <a:latin typeface="D2Coding" panose="020B0609020101020101" pitchFamily="49" charset="-127"/>
+                <a:ea typeface="D2Coding" panose="020B0609020101020101" pitchFamily="49" charset="-127"/>
+                <a:cs typeface="Segoe UI Light" panose="020B0502040204020203" pitchFamily="34" charset="0"/>
+              </a:rPr>
+              <a:t>YOLO: </a:t>
+            </a:r>
+            <a:r>
+              <a:rPr lang="ko-KR" altLang="en-US" sz="2800" cap="none" dirty="0">
+                <a:latin typeface="D2Coding" panose="020B0609020101020101" pitchFamily="49" charset="-127"/>
+                <a:ea typeface="D2Coding" panose="020B0609020101020101" pitchFamily="49" charset="-127"/>
+                <a:cs typeface="Segoe UI Light" panose="020B0502040204020203" pitchFamily="34" charset="0"/>
+              </a:rPr>
+              <a:t>새로운 데이터 </a:t>
+            </a:r>
+            <a:r>
+              <a:rPr lang="ko-KR" altLang="en-US" sz="2800" cap="none" dirty="0" err="1">
+                <a:latin typeface="D2Coding" panose="020B0609020101020101" pitchFamily="49" charset="-127"/>
+                <a:ea typeface="D2Coding" panose="020B0609020101020101" pitchFamily="49" charset="-127"/>
+                <a:cs typeface="Segoe UI Light" panose="020B0502040204020203" pitchFamily="34" charset="0"/>
+              </a:rPr>
+              <a:t>입력시</a:t>
+            </a:r>
+            <a:endParaRPr lang="ko-KR" altLang="en-US" sz="2800" cap="none" dirty="0">
+              <a:latin typeface="D2Coding" panose="020B0609020101020101" pitchFamily="49" charset="-127"/>
+              <a:ea typeface="D2Coding" panose="020B0609020101020101" pitchFamily="49" charset="-127"/>
+              <a:cs typeface="Segoe UI Light" panose="020B0502040204020203" pitchFamily="34" charset="0"/>
+            </a:endParaRPr>
+          </a:p>
+        </p:txBody>
+      </p:sp>
+      <p:sp>
+        <p:nvSpPr>
+          <p:cNvPr id="8" name="TextBox 7">
+            <a:extLst>
+              <a:ext uri="{FF2B5EF4-FFF2-40B4-BE49-F238E27FC236}">
+                <a16:creationId xmlns:a16="http://schemas.microsoft.com/office/drawing/2014/main" id="{21BB619F-0062-510C-891B-7E12324BAB3B}"/>
+              </a:ext>
+            </a:extLst>
+          </p:cNvPr>
+          <p:cNvSpPr txBox="1"/>
+          <p:nvPr/>
+        </p:nvSpPr>
+        <p:spPr>
+          <a:xfrm>
+            <a:off x="2656870" y="1461699"/>
+            <a:ext cx="6150047" cy="338554"/>
+          </a:xfrm>
+          <a:prstGeom prst="rect">
+            <a:avLst/>
+          </a:prstGeom>
+          <a:solidFill>
+            <a:schemeClr val="bg1"/>
+          </a:solidFill>
+          <a:ln>
+            <a:solidFill>
+              <a:schemeClr val="tx1"/>
+            </a:solidFill>
+          </a:ln>
+        </p:spPr>
+        <p:txBody>
+          <a:bodyPr wrap="square">
+            <a:spAutoFit/>
+          </a:bodyPr>
+          <a:lstStyle/>
+          <a:p>
+            <a:pPr algn="ctr"/>
+            <a:r>
+              <a:rPr lang="ko-KR" altLang="en-US" sz="1600" dirty="0">
+                <a:latin typeface="D2Coding" panose="020B0609020101020101" pitchFamily="49" charset="-127"/>
+                <a:ea typeface="D2Coding" panose="020B0609020101020101" pitchFamily="49" charset="-127"/>
+              </a:rPr>
+              <a:t>입력 이미지(</a:t>
+            </a:r>
+            <a:r>
+              <a:rPr lang="ko-KR" altLang="en-US" sz="1600" dirty="0" err="1">
+                <a:latin typeface="D2Coding" panose="020B0609020101020101" pitchFamily="49" charset="-127"/>
+                <a:ea typeface="D2Coding" panose="020B0609020101020101" pitchFamily="49" charset="-127"/>
+              </a:rPr>
+              <a:t>Truck</a:t>
+            </a:r>
+            <a:r>
+              <a:rPr lang="ko-KR" altLang="en-US" sz="1600" dirty="0">
+                <a:latin typeface="D2Coding" panose="020B0609020101020101" pitchFamily="49" charset="-127"/>
+                <a:ea typeface="D2Coding" panose="020B0609020101020101" pitchFamily="49" charset="-127"/>
+              </a:rPr>
+              <a:t>)</a:t>
+            </a:r>
+          </a:p>
+        </p:txBody>
+      </p:sp>
+      <p:sp>
+        <p:nvSpPr>
+          <p:cNvPr id="12" name="TextBox 11">
+            <a:extLst>
+              <a:ext uri="{FF2B5EF4-FFF2-40B4-BE49-F238E27FC236}">
+                <a16:creationId xmlns:a16="http://schemas.microsoft.com/office/drawing/2014/main" id="{D70B6023-9906-B77E-F400-0ACA04ABE54A}"/>
+              </a:ext>
+            </a:extLst>
+          </p:cNvPr>
+          <p:cNvSpPr txBox="1"/>
+          <p:nvPr/>
+        </p:nvSpPr>
+        <p:spPr>
+          <a:xfrm>
+            <a:off x="2656870" y="1934754"/>
+            <a:ext cx="6150047" cy="338554"/>
+          </a:xfrm>
+          <a:prstGeom prst="rect">
+            <a:avLst/>
+          </a:prstGeom>
+          <a:solidFill>
+            <a:schemeClr val="bg1"/>
+          </a:solidFill>
+          <a:ln>
+            <a:solidFill>
+              <a:schemeClr val="tx1"/>
+            </a:solidFill>
+          </a:ln>
+        </p:spPr>
+        <p:txBody>
+          <a:bodyPr wrap="square">
+            <a:spAutoFit/>
+          </a:bodyPr>
+          <a:lstStyle/>
+          <a:p>
+            <a:pPr algn="ctr"/>
+            <a:r>
+              <a:rPr lang="ko-KR" altLang="en-US" sz="1600" dirty="0">
+                <a:latin typeface="D2Coding" panose="020B0609020101020101" pitchFamily="49" charset="-127"/>
+                <a:ea typeface="D2Coding" panose="020B0609020101020101" pitchFamily="49" charset="-127"/>
+              </a:rPr>
+              <a:t>CNN </a:t>
+            </a:r>
+            <a:r>
+              <a:rPr lang="ko-KR" altLang="en-US" sz="1600" dirty="0" err="1">
+                <a:latin typeface="D2Coding" panose="020B0609020101020101" pitchFamily="49" charset="-127"/>
+                <a:ea typeface="D2Coding" panose="020B0609020101020101" pitchFamily="49" charset="-127"/>
+              </a:rPr>
+              <a:t>Backbone</a:t>
+            </a:r>
+            <a:endParaRPr lang="ko-KR" altLang="en-US" sz="1600" dirty="0">
+              <a:latin typeface="D2Coding" panose="020B0609020101020101" pitchFamily="49" charset="-127"/>
+              <a:ea typeface="D2Coding" panose="020B0609020101020101" pitchFamily="49" charset="-127"/>
+            </a:endParaRPr>
+          </a:p>
+        </p:txBody>
+      </p:sp>
+      <p:sp>
+        <p:nvSpPr>
+          <p:cNvPr id="16" name="TextBox 15">
+            <a:extLst>
+              <a:ext uri="{FF2B5EF4-FFF2-40B4-BE49-F238E27FC236}">
+                <a16:creationId xmlns:a16="http://schemas.microsoft.com/office/drawing/2014/main" id="{1E4A0911-DFC8-1CE4-4438-69E5B5DBFBE1}"/>
+              </a:ext>
+            </a:extLst>
+          </p:cNvPr>
+          <p:cNvSpPr txBox="1"/>
+          <p:nvPr/>
+        </p:nvSpPr>
+        <p:spPr>
+          <a:xfrm>
+            <a:off x="2656870" y="2407809"/>
+            <a:ext cx="6150047" cy="338554"/>
+          </a:xfrm>
+          <a:prstGeom prst="rect">
+            <a:avLst/>
+          </a:prstGeom>
+          <a:solidFill>
+            <a:schemeClr val="bg1"/>
+          </a:solidFill>
+          <a:ln>
+            <a:solidFill>
+              <a:schemeClr val="tx1"/>
+            </a:solidFill>
+          </a:ln>
+        </p:spPr>
+        <p:txBody>
+          <a:bodyPr wrap="square">
+            <a:spAutoFit/>
+          </a:bodyPr>
+          <a:lstStyle/>
+          <a:p>
+            <a:pPr algn="ctr"/>
+            <a:r>
+              <a:rPr lang="ko-KR" altLang="en-US" sz="1600" dirty="0" err="1">
+                <a:latin typeface="D2Coding" panose="020B0609020101020101" pitchFamily="49" charset="-127"/>
+                <a:ea typeface="D2Coding" panose="020B0609020101020101" pitchFamily="49" charset="-127"/>
+              </a:rPr>
+              <a:t>Feature</a:t>
+            </a:r>
+            <a:r>
+              <a:rPr lang="ko-KR" altLang="en-US" sz="1600" dirty="0">
+                <a:latin typeface="D2Coding" panose="020B0609020101020101" pitchFamily="49" charset="-127"/>
+                <a:ea typeface="D2Coding" panose="020B0609020101020101" pitchFamily="49" charset="-127"/>
+              </a:rPr>
+              <a:t> </a:t>
+            </a:r>
+            <a:r>
+              <a:rPr lang="ko-KR" altLang="en-US" sz="1600" dirty="0" err="1">
+                <a:latin typeface="D2Coding" panose="020B0609020101020101" pitchFamily="49" charset="-127"/>
+                <a:ea typeface="D2Coding" panose="020B0609020101020101" pitchFamily="49" charset="-127"/>
+              </a:rPr>
+              <a:t>Map</a:t>
+            </a:r>
+            <a:r>
+              <a:rPr lang="ko-KR" altLang="en-US" sz="1600" dirty="0">
+                <a:latin typeface="D2Coding" panose="020B0609020101020101" pitchFamily="49" charset="-127"/>
+                <a:ea typeface="D2Coding" panose="020B0609020101020101" pitchFamily="49" charset="-127"/>
+              </a:rPr>
+              <a:t> 생성 (3×3 그리드의 공간 정보가 한 번에 계산됨)</a:t>
+            </a:r>
+          </a:p>
+        </p:txBody>
+      </p:sp>
+      <p:sp>
+        <p:nvSpPr>
+          <p:cNvPr id="19" name="TextBox 18">
+            <a:extLst>
+              <a:ext uri="{FF2B5EF4-FFF2-40B4-BE49-F238E27FC236}">
+                <a16:creationId xmlns:a16="http://schemas.microsoft.com/office/drawing/2014/main" id="{30052CC3-348B-F575-F5B9-047B23F72F01}"/>
+              </a:ext>
+            </a:extLst>
+          </p:cNvPr>
+          <p:cNvSpPr txBox="1"/>
+          <p:nvPr/>
+        </p:nvSpPr>
+        <p:spPr>
+          <a:xfrm>
+            <a:off x="2656870" y="3052313"/>
+            <a:ext cx="6150047" cy="338554"/>
+          </a:xfrm>
+          <a:prstGeom prst="rect">
+            <a:avLst/>
+          </a:prstGeom>
+          <a:solidFill>
+            <a:schemeClr val="bg1"/>
+          </a:solidFill>
+          <a:ln>
+            <a:solidFill>
+              <a:schemeClr val="tx1"/>
+            </a:solidFill>
+          </a:ln>
+        </p:spPr>
+        <p:txBody>
+          <a:bodyPr wrap="square">
+            <a:spAutoFit/>
+          </a:bodyPr>
+          <a:lstStyle/>
+          <a:p>
+            <a:pPr algn="ctr"/>
+            <a:r>
+              <a:rPr lang="ko-KR" altLang="en-US" sz="1600" dirty="0">
+                <a:latin typeface="D2Coding" panose="020B0609020101020101" pitchFamily="49" charset="-127"/>
+                <a:ea typeface="D2Coding" panose="020B0609020101020101" pitchFamily="49" charset="-127"/>
+              </a:rPr>
+              <a:t>[CNN 최종 레이어의 </a:t>
+            </a:r>
+            <a:r>
+              <a:rPr lang="ko-KR" altLang="en-US" sz="1600" dirty="0" err="1">
+                <a:latin typeface="D2Coding" panose="020B0609020101020101" pitchFamily="49" charset="-127"/>
+                <a:ea typeface="D2Coding" panose="020B0609020101020101" pitchFamily="49" charset="-127"/>
+              </a:rPr>
+              <a:t>원샷</a:t>
+            </a:r>
+            <a:r>
+              <a:rPr lang="ko-KR" altLang="en-US" sz="1600" dirty="0">
+                <a:latin typeface="D2Coding" panose="020B0609020101020101" pitchFamily="49" charset="-127"/>
+                <a:ea typeface="D2Coding" panose="020B0609020101020101" pitchFamily="49" charset="-127"/>
+              </a:rPr>
+              <a:t>(One-</a:t>
+            </a:r>
+            <a:r>
+              <a:rPr lang="ko-KR" altLang="en-US" sz="1600" dirty="0" err="1">
+                <a:latin typeface="D2Coding" panose="020B0609020101020101" pitchFamily="49" charset="-127"/>
+                <a:ea typeface="D2Coding" panose="020B0609020101020101" pitchFamily="49" charset="-127"/>
+              </a:rPr>
+              <a:t>shot</a:t>
+            </a:r>
+            <a:r>
+              <a:rPr lang="ko-KR" altLang="en-US" sz="1600" dirty="0">
+                <a:latin typeface="D2Coding" panose="020B0609020101020101" pitchFamily="49" charset="-127"/>
+                <a:ea typeface="D2Coding" panose="020B0609020101020101" pitchFamily="49" charset="-127"/>
+              </a:rPr>
+              <a:t>) 동시 예측]</a:t>
+            </a:r>
+          </a:p>
+        </p:txBody>
+      </p:sp>
+      <p:sp>
+        <p:nvSpPr>
+          <p:cNvPr id="24" name="TextBox 23">
+            <a:extLst>
+              <a:ext uri="{FF2B5EF4-FFF2-40B4-BE49-F238E27FC236}">
+                <a16:creationId xmlns:a16="http://schemas.microsoft.com/office/drawing/2014/main" id="{9099F1FA-4165-EEEB-EBDC-E107054392C5}"/>
+              </a:ext>
+            </a:extLst>
+          </p:cNvPr>
+          <p:cNvSpPr txBox="1"/>
+          <p:nvPr/>
+        </p:nvSpPr>
+        <p:spPr>
+          <a:xfrm>
+            <a:off x="1178312" y="3776668"/>
+            <a:ext cx="2526506" cy="584775"/>
+          </a:xfrm>
+          <a:prstGeom prst="rect">
+            <a:avLst/>
+          </a:prstGeom>
+          <a:solidFill>
+            <a:schemeClr val="bg1"/>
+          </a:solidFill>
+          <a:ln>
+            <a:solidFill>
+              <a:schemeClr val="tx1"/>
+            </a:solidFill>
+          </a:ln>
+        </p:spPr>
+        <p:txBody>
+          <a:bodyPr wrap="square">
+            <a:spAutoFit/>
+          </a:bodyPr>
+          <a:lstStyle/>
+          <a:p>
+            <a:pPr algn="ctr"/>
+            <a:r>
+              <a:rPr lang="ko-KR" altLang="en-US" sz="1600" dirty="0" err="1">
+                <a:latin typeface="D2Coding" panose="020B0609020101020101" pitchFamily="49" charset="-127"/>
+                <a:ea typeface="D2Coding" panose="020B0609020101020101" pitchFamily="49" charset="-127"/>
+              </a:rPr>
+              <a:t>Objectness</a:t>
+            </a:r>
+            <a:r>
+              <a:rPr lang="ko-KR" altLang="en-US" sz="1600" dirty="0">
+                <a:latin typeface="D2Coding" panose="020B0609020101020101" pitchFamily="49" charset="-127"/>
+                <a:ea typeface="D2Coding" panose="020B0609020101020101" pitchFamily="49" charset="-127"/>
+              </a:rPr>
+              <a:t> 점수 예측</a:t>
+            </a:r>
+            <a:endParaRPr lang="en-US" altLang="ko-KR" sz="1600" dirty="0">
+              <a:latin typeface="D2Coding" panose="020B0609020101020101" pitchFamily="49" charset="-127"/>
+              <a:ea typeface="D2Coding" panose="020B0609020101020101" pitchFamily="49" charset="-127"/>
+            </a:endParaRPr>
+          </a:p>
+          <a:p>
+            <a:pPr algn="ctr"/>
+            <a:r>
+              <a:rPr lang="en-US" altLang="ko-KR" sz="1600" dirty="0">
+                <a:latin typeface="D2Coding" panose="020B0609020101020101" pitchFamily="49" charset="-127"/>
+                <a:ea typeface="D2Coding" panose="020B0609020101020101" pitchFamily="49" charset="-127"/>
+              </a:rPr>
+              <a:t>(</a:t>
+            </a:r>
+            <a:r>
+              <a:rPr lang="ko-KR" altLang="en-US" sz="1600" dirty="0">
+                <a:latin typeface="D2Coding" panose="020B0609020101020101" pitchFamily="49" charset="-127"/>
+                <a:ea typeface="D2Coding" panose="020B0609020101020101" pitchFamily="49" charset="-127"/>
+              </a:rPr>
+              <a:t>물체가 있을 확률 </a:t>
+            </a:r>
+            <a:r>
+              <a:rPr lang="ko-KR" altLang="en-US" sz="1600" dirty="0" err="1">
+                <a:latin typeface="D2Coding" panose="020B0609020101020101" pitchFamily="49" charset="-127"/>
+                <a:ea typeface="D2Coding" panose="020B0609020101020101" pitchFamily="49" charset="-127"/>
+              </a:rPr>
+              <a:t>P_c</a:t>
+            </a:r>
+            <a:r>
+              <a:rPr lang="ko-KR" altLang="en-US" sz="1600" dirty="0">
+                <a:latin typeface="D2Coding" panose="020B0609020101020101" pitchFamily="49" charset="-127"/>
+                <a:ea typeface="D2Coding" panose="020B0609020101020101" pitchFamily="49" charset="-127"/>
+              </a:rPr>
+              <a:t>) </a:t>
+            </a:r>
+          </a:p>
+        </p:txBody>
+      </p:sp>
+      <p:sp>
+        <p:nvSpPr>
+          <p:cNvPr id="26" name="TextBox 25">
+            <a:extLst>
+              <a:ext uri="{FF2B5EF4-FFF2-40B4-BE49-F238E27FC236}">
+                <a16:creationId xmlns:a16="http://schemas.microsoft.com/office/drawing/2014/main" id="{C16106AA-7D2F-6509-4834-392F2AB307DE}"/>
+              </a:ext>
+            </a:extLst>
+          </p:cNvPr>
+          <p:cNvSpPr txBox="1"/>
+          <p:nvPr/>
+        </p:nvSpPr>
+        <p:spPr>
+          <a:xfrm>
+            <a:off x="2660081" y="4913429"/>
+            <a:ext cx="6308651" cy="338554"/>
+          </a:xfrm>
+          <a:prstGeom prst="rect">
+            <a:avLst/>
+          </a:prstGeom>
+          <a:solidFill>
+            <a:schemeClr val="bg1"/>
+          </a:solidFill>
+          <a:ln>
+            <a:solidFill>
+              <a:schemeClr val="tx1"/>
+            </a:solidFill>
+          </a:ln>
+        </p:spPr>
+        <p:txBody>
+          <a:bodyPr wrap="square">
+            <a:spAutoFit/>
+          </a:bodyPr>
+          <a:lstStyle/>
+          <a:p>
+            <a:pPr algn="ctr"/>
+            <a:r>
+              <a:rPr lang="ko-KR" altLang="en-US" sz="1600" dirty="0">
+                <a:latin typeface="D2Coding" panose="020B0609020101020101" pitchFamily="49" charset="-127"/>
+                <a:ea typeface="D2Coding" panose="020B0609020101020101" pitchFamily="49" charset="-127"/>
+              </a:rPr>
+              <a:t>미리 정의된 2개의 </a:t>
+            </a:r>
+            <a:r>
+              <a:rPr lang="ko-KR" altLang="en-US" sz="1600" dirty="0" err="1">
+                <a:latin typeface="D2Coding" panose="020B0609020101020101" pitchFamily="49" charset="-127"/>
+                <a:ea typeface="D2Coding" panose="020B0609020101020101" pitchFamily="49" charset="-127"/>
+              </a:rPr>
+              <a:t>Anchor</a:t>
+            </a:r>
+            <a:r>
+              <a:rPr lang="ko-KR" altLang="en-US" sz="1600" dirty="0">
+                <a:latin typeface="D2Coding" panose="020B0609020101020101" pitchFamily="49" charset="-127"/>
+                <a:ea typeface="D2Coding" panose="020B0609020101020101" pitchFamily="49" charset="-127"/>
+              </a:rPr>
+              <a:t> </a:t>
+            </a:r>
+            <a:r>
+              <a:rPr lang="ko-KR" altLang="en-US" sz="1600" dirty="0" err="1">
+                <a:latin typeface="D2Coding" panose="020B0609020101020101" pitchFamily="49" charset="-127"/>
+                <a:ea typeface="D2Coding" panose="020B0609020101020101" pitchFamily="49" charset="-127"/>
+              </a:rPr>
+              <a:t>Box</a:t>
+            </a:r>
+            <a:r>
+              <a:rPr lang="ko-KR" altLang="en-US" sz="1600" dirty="0">
+                <a:latin typeface="D2Coding" panose="020B0609020101020101" pitchFamily="49" charset="-127"/>
+                <a:ea typeface="D2Coding" panose="020B0609020101020101" pitchFamily="49" charset="-127"/>
+              </a:rPr>
+              <a:t> 비율에 (</a:t>
+            </a:r>
+            <a:r>
+              <a:rPr lang="ko-KR" altLang="en-US" sz="1600" dirty="0" err="1">
+                <a:latin typeface="D2Coding" panose="020B0609020101020101" pitchFamily="49" charset="-127"/>
+                <a:ea typeface="D2Coding" panose="020B0609020101020101" pitchFamily="49" charset="-127"/>
+              </a:rPr>
+              <a:t>tx</a:t>
+            </a:r>
+            <a:r>
+              <a:rPr lang="ko-KR" altLang="en-US" sz="1600" dirty="0">
+                <a:latin typeface="D2Coding" panose="020B0609020101020101" pitchFamily="49" charset="-127"/>
+                <a:ea typeface="D2Coding" panose="020B0609020101020101" pitchFamily="49" charset="-127"/>
+              </a:rPr>
+              <a:t>, </a:t>
+            </a:r>
+            <a:r>
+              <a:rPr lang="ko-KR" altLang="en-US" sz="1600" dirty="0" err="1">
+                <a:latin typeface="D2Coding" panose="020B0609020101020101" pitchFamily="49" charset="-127"/>
+                <a:ea typeface="D2Coding" panose="020B0609020101020101" pitchFamily="49" charset="-127"/>
+              </a:rPr>
+              <a:t>ty</a:t>
+            </a:r>
+            <a:r>
+              <a:rPr lang="ko-KR" altLang="en-US" sz="1600" dirty="0">
+                <a:latin typeface="D2Coding" panose="020B0609020101020101" pitchFamily="49" charset="-127"/>
+                <a:ea typeface="D2Coding" panose="020B0609020101020101" pitchFamily="49" charset="-127"/>
+              </a:rPr>
+              <a:t>, </a:t>
+            </a:r>
+            <a:r>
+              <a:rPr lang="ko-KR" altLang="en-US" sz="1600" dirty="0" err="1">
+                <a:latin typeface="D2Coding" panose="020B0609020101020101" pitchFamily="49" charset="-127"/>
+                <a:ea typeface="D2Coding" panose="020B0609020101020101" pitchFamily="49" charset="-127"/>
+              </a:rPr>
+              <a:t>tw</a:t>
+            </a:r>
+            <a:r>
+              <a:rPr lang="ko-KR" altLang="en-US" sz="1600" dirty="0">
+                <a:latin typeface="D2Coding" panose="020B0609020101020101" pitchFamily="49" charset="-127"/>
+                <a:ea typeface="D2Coding" panose="020B0609020101020101" pitchFamily="49" charset="-127"/>
+              </a:rPr>
+              <a:t>, </a:t>
+            </a:r>
+            <a:r>
+              <a:rPr lang="ko-KR" altLang="en-US" sz="1600" dirty="0" err="1">
+                <a:latin typeface="D2Coding" panose="020B0609020101020101" pitchFamily="49" charset="-127"/>
+                <a:ea typeface="D2Coding" panose="020B0609020101020101" pitchFamily="49" charset="-127"/>
+              </a:rPr>
+              <a:t>th</a:t>
+            </a:r>
+            <a:r>
+              <a:rPr lang="ko-KR" altLang="en-US" sz="1600" dirty="0">
+                <a:latin typeface="D2Coding" panose="020B0609020101020101" pitchFamily="49" charset="-127"/>
+                <a:ea typeface="D2Coding" panose="020B0609020101020101" pitchFamily="49" charset="-127"/>
+              </a:rPr>
+              <a:t>)</a:t>
+            </a:r>
+            <a:r>
+              <a:rPr lang="ko-KR" altLang="en-US" sz="1600" dirty="0" err="1">
+                <a:latin typeface="D2Coding" panose="020B0609020101020101" pitchFamily="49" charset="-127"/>
+                <a:ea typeface="D2Coding" panose="020B0609020101020101" pitchFamily="49" charset="-127"/>
+              </a:rPr>
+              <a:t>를</a:t>
+            </a:r>
+            <a:r>
+              <a:rPr lang="ko-KR" altLang="en-US" sz="1600" dirty="0">
+                <a:latin typeface="D2Coding" panose="020B0609020101020101" pitchFamily="49" charset="-127"/>
+                <a:ea typeface="D2Coding" panose="020B0609020101020101" pitchFamily="49" charset="-127"/>
+              </a:rPr>
+              <a:t> 곱함</a:t>
+            </a:r>
+          </a:p>
+        </p:txBody>
+      </p:sp>
+      <p:sp>
+        <p:nvSpPr>
+          <p:cNvPr id="30" name="TextBox 29">
+            <a:extLst>
+              <a:ext uri="{FF2B5EF4-FFF2-40B4-BE49-F238E27FC236}">
+                <a16:creationId xmlns:a16="http://schemas.microsoft.com/office/drawing/2014/main" id="{4AF1C64F-7C2D-88FA-7E26-9442F3EE751A}"/>
+              </a:ext>
+            </a:extLst>
+          </p:cNvPr>
+          <p:cNvSpPr txBox="1"/>
+          <p:nvPr/>
+        </p:nvSpPr>
+        <p:spPr>
+          <a:xfrm>
+            <a:off x="2660081" y="5456764"/>
+            <a:ext cx="6308651" cy="338554"/>
+          </a:xfrm>
+          <a:prstGeom prst="rect">
+            <a:avLst/>
+          </a:prstGeom>
+          <a:solidFill>
+            <a:schemeClr val="bg1"/>
+          </a:solidFill>
+          <a:ln>
+            <a:solidFill>
+              <a:schemeClr val="tx1"/>
+            </a:solidFill>
+          </a:ln>
+        </p:spPr>
+        <p:txBody>
+          <a:bodyPr wrap="square">
+            <a:spAutoFit/>
+          </a:bodyPr>
+          <a:lstStyle/>
+          <a:p>
+            <a:pPr algn="ctr"/>
+            <a:r>
+              <a:rPr lang="ko-KR" altLang="en-US" sz="1600" dirty="0" err="1">
+                <a:latin typeface="D2Coding" panose="020B0609020101020101" pitchFamily="49" charset="-127"/>
+                <a:ea typeface="D2Coding" panose="020B0609020101020101" pitchFamily="49" charset="-127"/>
+              </a:rPr>
+              <a:t>Bounding</a:t>
+            </a:r>
+            <a:r>
+              <a:rPr lang="ko-KR" altLang="en-US" sz="1600" dirty="0">
+                <a:latin typeface="D2Coding" panose="020B0609020101020101" pitchFamily="49" charset="-127"/>
+                <a:ea typeface="D2Coding" panose="020B0609020101020101" pitchFamily="49" charset="-127"/>
+              </a:rPr>
+              <a:t> </a:t>
+            </a:r>
+            <a:r>
+              <a:rPr lang="ko-KR" altLang="en-US" sz="1600" dirty="0" err="1">
+                <a:latin typeface="D2Coding" panose="020B0609020101020101" pitchFamily="49" charset="-127"/>
+                <a:ea typeface="D2Coding" panose="020B0609020101020101" pitchFamily="49" charset="-127"/>
+              </a:rPr>
+              <a:t>Box</a:t>
+            </a:r>
+            <a:r>
+              <a:rPr lang="ko-KR" altLang="en-US" sz="1600" dirty="0">
+                <a:latin typeface="D2Coding" panose="020B0609020101020101" pitchFamily="49" charset="-127"/>
+                <a:ea typeface="D2Coding" panose="020B0609020101020101" pitchFamily="49" charset="-127"/>
+              </a:rPr>
+              <a:t> 최종 복원</a:t>
+            </a:r>
+          </a:p>
+        </p:txBody>
+      </p:sp>
+      <p:sp>
+        <p:nvSpPr>
+          <p:cNvPr id="33" name="TextBox 32">
+            <a:extLst>
+              <a:ext uri="{FF2B5EF4-FFF2-40B4-BE49-F238E27FC236}">
+                <a16:creationId xmlns:a16="http://schemas.microsoft.com/office/drawing/2014/main" id="{5DD48AD6-2F49-9014-3FAE-B6F9E3D8B5A3}"/>
+              </a:ext>
+            </a:extLst>
+          </p:cNvPr>
+          <p:cNvSpPr txBox="1"/>
+          <p:nvPr/>
+        </p:nvSpPr>
+        <p:spPr>
+          <a:xfrm>
+            <a:off x="2660080" y="6000099"/>
+            <a:ext cx="6308651" cy="338554"/>
+          </a:xfrm>
+          <a:prstGeom prst="rect">
+            <a:avLst/>
+          </a:prstGeom>
+          <a:solidFill>
+            <a:schemeClr val="bg1"/>
+          </a:solidFill>
+          <a:ln>
+            <a:solidFill>
+              <a:schemeClr val="tx1"/>
+            </a:solidFill>
+          </a:ln>
+        </p:spPr>
+        <p:txBody>
+          <a:bodyPr wrap="square">
+            <a:spAutoFit/>
+          </a:bodyPr>
+          <a:lstStyle/>
+          <a:p>
+            <a:pPr algn="ctr"/>
+            <a:r>
+              <a:rPr lang="ko-KR" altLang="en-US" sz="1600" dirty="0">
+                <a:latin typeface="D2Coding" panose="020B0609020101020101" pitchFamily="49" charset="-127"/>
+                <a:ea typeface="D2Coding" panose="020B0609020101020101" pitchFamily="49" charset="-127"/>
+              </a:rPr>
+              <a:t>NMS 알고리즘 (중복 박스 제거 및 최종 </a:t>
+            </a:r>
+            <a:r>
+              <a:rPr lang="ko-KR" altLang="en-US" sz="1600" dirty="0" err="1">
+                <a:latin typeface="D2Coding" panose="020B0609020101020101" pitchFamily="49" charset="-127"/>
+                <a:ea typeface="D2Coding" panose="020B0609020101020101" pitchFamily="49" charset="-127"/>
+              </a:rPr>
+              <a:t>Detection</a:t>
+            </a:r>
+            <a:r>
+              <a:rPr lang="ko-KR" altLang="en-US" sz="1600" dirty="0">
+                <a:latin typeface="D2Coding" panose="020B0609020101020101" pitchFamily="49" charset="-127"/>
+                <a:ea typeface="D2Coding" panose="020B0609020101020101" pitchFamily="49" charset="-127"/>
+              </a:rPr>
+              <a:t>)</a:t>
+            </a:r>
+          </a:p>
+        </p:txBody>
+      </p:sp>
+      <p:sp>
+        <p:nvSpPr>
+          <p:cNvPr id="36" name="TextBox 35">
+            <a:extLst>
+              <a:ext uri="{FF2B5EF4-FFF2-40B4-BE49-F238E27FC236}">
+                <a16:creationId xmlns:a16="http://schemas.microsoft.com/office/drawing/2014/main" id="{B2E3E4DD-439A-9175-0EF6-9BAC6B1ADEBA}"/>
+              </a:ext>
+            </a:extLst>
+          </p:cNvPr>
+          <p:cNvSpPr txBox="1"/>
+          <p:nvPr/>
+        </p:nvSpPr>
+        <p:spPr>
+          <a:xfrm>
+            <a:off x="4635564" y="3776668"/>
+            <a:ext cx="2621755" cy="584775"/>
+          </a:xfrm>
+          <a:prstGeom prst="rect">
+            <a:avLst/>
+          </a:prstGeom>
+          <a:solidFill>
+            <a:schemeClr val="bg1"/>
+          </a:solidFill>
+          <a:ln>
+            <a:solidFill>
+              <a:schemeClr val="tx1"/>
+            </a:solidFill>
+          </a:ln>
+        </p:spPr>
+        <p:txBody>
+          <a:bodyPr wrap="square">
+            <a:spAutoFit/>
+          </a:bodyPr>
+          <a:lstStyle/>
+          <a:p>
+            <a:pPr algn="ctr"/>
+            <a:r>
+              <a:rPr lang="ko-KR" altLang="en-US" sz="1600" dirty="0" err="1">
+                <a:latin typeface="D2Coding" panose="020B0609020101020101" pitchFamily="49" charset="-127"/>
+                <a:ea typeface="D2Coding" panose="020B0609020101020101" pitchFamily="49" charset="-127"/>
+              </a:rPr>
+              <a:t>Class</a:t>
+            </a:r>
+            <a:r>
+              <a:rPr lang="ko-KR" altLang="en-US" sz="1600" dirty="0">
+                <a:latin typeface="D2Coding" panose="020B0609020101020101" pitchFamily="49" charset="-127"/>
+                <a:ea typeface="D2Coding" panose="020B0609020101020101" pitchFamily="49" charset="-127"/>
+              </a:rPr>
+              <a:t> 확률 예측</a:t>
+            </a:r>
+            <a:endParaRPr lang="en-US" altLang="ko-KR" sz="1600" dirty="0">
+              <a:latin typeface="D2Coding" panose="020B0609020101020101" pitchFamily="49" charset="-127"/>
+              <a:ea typeface="D2Coding" panose="020B0609020101020101" pitchFamily="49" charset="-127"/>
+            </a:endParaRPr>
+          </a:p>
+          <a:p>
+            <a:pPr algn="ctr"/>
+            <a:r>
+              <a:rPr lang="ko-KR" altLang="en-US" sz="1600" dirty="0">
+                <a:latin typeface="D2Coding" panose="020B0609020101020101" pitchFamily="49" charset="-127"/>
+                <a:ea typeface="D2Coding" panose="020B0609020101020101" pitchFamily="49" charset="-127"/>
+              </a:rPr>
+              <a:t>(</a:t>
+            </a:r>
+            <a:r>
+              <a:rPr lang="ko-KR" altLang="en-US" sz="1600" dirty="0" err="1">
+                <a:latin typeface="D2Coding" panose="020B0609020101020101" pitchFamily="49" charset="-127"/>
+                <a:ea typeface="D2Coding" panose="020B0609020101020101" pitchFamily="49" charset="-127"/>
+              </a:rPr>
+              <a:t>Car</a:t>
+            </a:r>
+            <a:r>
+              <a:rPr lang="ko-KR" altLang="en-US" sz="1600" dirty="0">
+                <a:latin typeface="D2Coding" panose="020B0609020101020101" pitchFamily="49" charset="-127"/>
+                <a:ea typeface="D2Coding" panose="020B0609020101020101" pitchFamily="49" charset="-127"/>
+              </a:rPr>
+              <a:t> 인지 </a:t>
+            </a:r>
+            <a:r>
+              <a:rPr lang="ko-KR" altLang="en-US" sz="1600" dirty="0" err="1">
+                <a:latin typeface="D2Coding" panose="020B0609020101020101" pitchFamily="49" charset="-127"/>
+                <a:ea typeface="D2Coding" panose="020B0609020101020101" pitchFamily="49" charset="-127"/>
+              </a:rPr>
+              <a:t>Airplane</a:t>
+            </a:r>
+            <a:r>
+              <a:rPr lang="ko-KR" altLang="en-US" sz="1600" dirty="0">
+                <a:latin typeface="D2Coding" panose="020B0609020101020101" pitchFamily="49" charset="-127"/>
+                <a:ea typeface="D2Coding" panose="020B0609020101020101" pitchFamily="49" charset="-127"/>
+              </a:rPr>
+              <a:t> 인지)</a:t>
+            </a:r>
+          </a:p>
+        </p:txBody>
+      </p:sp>
+      <p:sp>
+        <p:nvSpPr>
+          <p:cNvPr id="38" name="TextBox 37">
+            <a:extLst>
+              <a:ext uri="{FF2B5EF4-FFF2-40B4-BE49-F238E27FC236}">
+                <a16:creationId xmlns:a16="http://schemas.microsoft.com/office/drawing/2014/main" id="{C8D458F1-E636-A79E-2F7C-E81BF7E2C9BB}"/>
+              </a:ext>
+            </a:extLst>
+          </p:cNvPr>
+          <p:cNvSpPr txBox="1"/>
+          <p:nvPr/>
+        </p:nvSpPr>
+        <p:spPr>
+          <a:xfrm>
+            <a:off x="8188064" y="3776668"/>
+            <a:ext cx="2108461" cy="861774"/>
+          </a:xfrm>
+          <a:prstGeom prst="rect">
+            <a:avLst/>
+          </a:prstGeom>
+          <a:solidFill>
+            <a:schemeClr val="bg1"/>
+          </a:solidFill>
+          <a:ln>
+            <a:solidFill>
+              <a:schemeClr val="tx1"/>
+            </a:solidFill>
+          </a:ln>
+        </p:spPr>
+        <p:txBody>
+          <a:bodyPr wrap="square">
+            <a:spAutoFit/>
+          </a:bodyPr>
+          <a:lstStyle/>
+          <a:p>
+            <a:pPr algn="ctr"/>
+            <a:r>
+              <a:rPr lang="ko-KR" altLang="en-US" sz="1600" dirty="0" err="1">
+                <a:latin typeface="D2Coding" panose="020B0609020101020101" pitchFamily="49" charset="-127"/>
+                <a:ea typeface="D2Coding" panose="020B0609020101020101" pitchFamily="49" charset="-127"/>
+              </a:rPr>
+              <a:t>Bounding</a:t>
+            </a:r>
+            <a:r>
+              <a:rPr lang="ko-KR" altLang="en-US" sz="1600" dirty="0">
+                <a:latin typeface="D2Coding" panose="020B0609020101020101" pitchFamily="49" charset="-127"/>
+                <a:ea typeface="D2Coding" panose="020B0609020101020101" pitchFamily="49" charset="-127"/>
+              </a:rPr>
+              <a:t> </a:t>
+            </a:r>
+            <a:r>
+              <a:rPr lang="ko-KR" altLang="en-US" sz="1600" dirty="0" err="1">
+                <a:latin typeface="D2Coding" panose="020B0609020101020101" pitchFamily="49" charset="-127"/>
+                <a:ea typeface="D2Coding" panose="020B0609020101020101" pitchFamily="49" charset="-127"/>
+              </a:rPr>
+              <a:t>Box</a:t>
+            </a:r>
+            <a:r>
+              <a:rPr lang="ko-KR" altLang="en-US" sz="1600" dirty="0">
+                <a:latin typeface="D2Coding" panose="020B0609020101020101" pitchFamily="49" charset="-127"/>
+                <a:ea typeface="D2Coding" panose="020B0609020101020101" pitchFamily="49" charset="-127"/>
+              </a:rPr>
+              <a:t> 위치 미세조정 값 예측</a:t>
+            </a:r>
+            <a:endParaRPr lang="en-US" altLang="ko-KR" sz="1600" dirty="0">
+              <a:latin typeface="D2Coding" panose="020B0609020101020101" pitchFamily="49" charset="-127"/>
+              <a:ea typeface="D2Coding" panose="020B0609020101020101" pitchFamily="49" charset="-127"/>
+            </a:endParaRPr>
+          </a:p>
+          <a:p>
+            <a:pPr algn="ctr"/>
+            <a:r>
+              <a:rPr lang="ko-KR" altLang="en-US" sz="1600" dirty="0">
+                <a:latin typeface="D2Coding" panose="020B0609020101020101" pitchFamily="49" charset="-127"/>
+                <a:ea typeface="D2Coding" panose="020B0609020101020101" pitchFamily="49" charset="-127"/>
+              </a:rPr>
+              <a:t>(</a:t>
+            </a:r>
+            <a:r>
+              <a:rPr lang="ko-KR" altLang="en-US" sz="1600" dirty="0" err="1">
+                <a:latin typeface="D2Coding" panose="020B0609020101020101" pitchFamily="49" charset="-127"/>
+                <a:ea typeface="D2Coding" panose="020B0609020101020101" pitchFamily="49" charset="-127"/>
+              </a:rPr>
+              <a:t>tx</a:t>
+            </a:r>
+            <a:r>
+              <a:rPr lang="ko-KR" altLang="en-US" sz="1600" dirty="0">
+                <a:latin typeface="D2Coding" panose="020B0609020101020101" pitchFamily="49" charset="-127"/>
+                <a:ea typeface="D2Coding" panose="020B0609020101020101" pitchFamily="49" charset="-127"/>
+              </a:rPr>
+              <a:t>, </a:t>
+            </a:r>
+            <a:r>
+              <a:rPr lang="ko-KR" altLang="en-US" sz="1600" dirty="0" err="1">
+                <a:latin typeface="D2Coding" panose="020B0609020101020101" pitchFamily="49" charset="-127"/>
+                <a:ea typeface="D2Coding" panose="020B0609020101020101" pitchFamily="49" charset="-127"/>
+              </a:rPr>
+              <a:t>ty</a:t>
+            </a:r>
+            <a:r>
+              <a:rPr lang="ko-KR" altLang="en-US" sz="1600" dirty="0">
+                <a:latin typeface="D2Coding" panose="020B0609020101020101" pitchFamily="49" charset="-127"/>
+                <a:ea typeface="D2Coding" panose="020B0609020101020101" pitchFamily="49" charset="-127"/>
+              </a:rPr>
+              <a:t>, </a:t>
+            </a:r>
+            <a:r>
+              <a:rPr lang="ko-KR" altLang="en-US" sz="1600" dirty="0" err="1">
+                <a:latin typeface="D2Coding" panose="020B0609020101020101" pitchFamily="49" charset="-127"/>
+                <a:ea typeface="D2Coding" panose="020B0609020101020101" pitchFamily="49" charset="-127"/>
+              </a:rPr>
+              <a:t>tw</a:t>
+            </a:r>
+            <a:r>
+              <a:rPr lang="ko-KR" altLang="en-US" sz="1600" dirty="0">
+                <a:latin typeface="D2Coding" panose="020B0609020101020101" pitchFamily="49" charset="-127"/>
+                <a:ea typeface="D2Coding" panose="020B0609020101020101" pitchFamily="49" charset="-127"/>
+              </a:rPr>
+              <a:t>, </a:t>
+            </a:r>
+            <a:r>
+              <a:rPr lang="ko-KR" altLang="en-US" sz="1600" dirty="0" err="1">
+                <a:latin typeface="D2Coding" panose="020B0609020101020101" pitchFamily="49" charset="-127"/>
+                <a:ea typeface="D2Coding" panose="020B0609020101020101" pitchFamily="49" charset="-127"/>
+              </a:rPr>
+              <a:t>th</a:t>
+            </a:r>
+            <a:r>
+              <a:rPr lang="ko-KR" altLang="en-US" sz="1600" dirty="0">
+                <a:latin typeface="D2Coding" panose="020B0609020101020101" pitchFamily="49" charset="-127"/>
+                <a:ea typeface="D2Coding" panose="020B0609020101020101" pitchFamily="49" charset="-127"/>
+              </a:rPr>
+              <a:t>)</a:t>
+            </a:r>
+          </a:p>
+        </p:txBody>
+      </p:sp>
+    </p:spTree>
+    <p:extLst>
+      <p:ext uri="{BB962C8B-B14F-4D97-AF65-F5344CB8AC3E}">
+        <p14:creationId xmlns:p14="http://schemas.microsoft.com/office/powerpoint/2010/main" val="1816502483"/>
+      </p:ext>
+    </p:extLst>
+  </p:cSld>
+  <p:clrMapOvr>
+    <a:masterClrMapping/>
+  </p:clrMapOvr>
+</p:sld>
+</file>
+
+<file path=ppt/slides/slide15.xml><?xml version="1.0" encoding="utf-8"?>
+<p:sld xmlns:a="http://schemas.openxmlformats.org/drawingml/2006/main" xmlns:r="http://schemas.openxmlformats.org/officeDocument/2006/relationships" xmlns:p="http://schemas.openxmlformats.org/presentationml/2006/main">
+  <p:cSld>
+    <p:spTree>
+      <p:nvGrpSpPr>
+        <p:cNvPr id="1" name="">
+          <a:extLst>
+            <a:ext uri="{FF2B5EF4-FFF2-40B4-BE49-F238E27FC236}">
+              <a16:creationId xmlns:a16="http://schemas.microsoft.com/office/drawing/2014/main" id="{BBCFC880-3FC5-5040-901C-09509B7019A1}"/>
+            </a:ext>
+          </a:extLst>
+        </p:cNvPr>
+        <p:cNvGrpSpPr/>
+        <p:nvPr/>
+      </p:nvGrpSpPr>
+      <p:grpSpPr>
+        <a:xfrm>
+          <a:off x="0" y="0"/>
+          <a:ext cx="0" cy="0"/>
+          <a:chOff x="0" y="0"/>
+          <a:chExt cx="0" cy="0"/>
+        </a:xfrm>
+      </p:grpSpPr>
+      <p:sp>
+        <p:nvSpPr>
+          <p:cNvPr id="4" name="슬라이드 번호 개체 틀 3">
+            <a:extLst>
+              <a:ext uri="{FF2B5EF4-FFF2-40B4-BE49-F238E27FC236}">
+                <a16:creationId xmlns:a16="http://schemas.microsoft.com/office/drawing/2014/main" id="{A2739D34-884D-6A8E-37A0-AAFA14470011}"/>
+              </a:ext>
+            </a:extLst>
+          </p:cNvPr>
+          <p:cNvSpPr>
+            <a:spLocks noGrp="1"/>
+          </p:cNvSpPr>
+          <p:nvPr>
+            <p:ph type="sldNum" sz="quarter" idx="12"/>
+          </p:nvPr>
+        </p:nvSpPr>
+        <p:spPr>
+          <a:xfrm>
+            <a:off x="10514011" y="6036261"/>
+            <a:ext cx="753545" cy="365125"/>
+          </a:xfrm>
+        </p:spPr>
+        <p:txBody>
+          <a:bodyPr/>
+          <a:lstStyle/>
+          <a:p>
+            <a:fld id="{D57F1E4F-1CFF-5643-939E-217C01CDF565}" type="slidenum">
+              <a:rPr lang="en-US" smtClean="0"/>
+              <a:pPr/>
+              <a:t>15</a:t>
+            </a:fld>
+            <a:endParaRPr lang="en-US" dirty="0"/>
+          </a:p>
+        </p:txBody>
+      </p:sp>
+      <p:sp>
+        <p:nvSpPr>
+          <p:cNvPr id="3" name="제목 1">
+            <a:extLst>
+              <a:ext uri="{FF2B5EF4-FFF2-40B4-BE49-F238E27FC236}">
+                <a16:creationId xmlns:a16="http://schemas.microsoft.com/office/drawing/2014/main" id="{C0072049-B98A-6E72-6DB4-6346833BE6D2}"/>
+              </a:ext>
+            </a:extLst>
+          </p:cNvPr>
+          <p:cNvSpPr txBox="1">
+            <a:spLocks/>
+          </p:cNvSpPr>
+          <p:nvPr/>
+        </p:nvSpPr>
+        <p:spPr>
+          <a:xfrm>
+            <a:off x="475645" y="481983"/>
+            <a:ext cx="10353762" cy="766439"/>
+          </a:xfrm>
+          <a:prstGeom prst="rect">
+            <a:avLst/>
+          </a:prstGeom>
+        </p:spPr>
+        <p:txBody>
+          <a:bodyPr vert="horz" lIns="91440" tIns="45720" rIns="91440" bIns="45720" rtlCol="0" anchor="ctr">
+            <a:normAutofit/>
+          </a:bodyPr>
+          <a:lstStyle>
+            <a:lvl1pPr algn="ctr" defTabSz="914400" rtl="0" eaLnBrk="1" latinLnBrk="1" hangingPunct="1">
+              <a:lnSpc>
+                <a:spcPct val="90000"/>
+              </a:lnSpc>
+              <a:spcBef>
+                <a:spcPct val="0"/>
+              </a:spcBef>
+              <a:buNone/>
+              <a:defRPr sz="3200" kern="1200" cap="all" baseline="0">
+                <a:solidFill>
+                  <a:schemeClr val="tx1"/>
+                </a:solidFill>
+                <a:effectLst/>
+                <a:latin typeface="Batang" panose="02030600000101010101" pitchFamily="18" charset="-127"/>
+                <a:ea typeface="Batang" panose="02030600000101010101" pitchFamily="18" charset="-127"/>
+                <a:cs typeface="+mj-cs"/>
+              </a:defRPr>
+            </a:lvl1pPr>
+          </a:lstStyle>
+          <a:p>
+            <a:pPr algn="l"/>
+            <a:r>
+              <a:rPr lang="en-US" altLang="ko-KR" sz="2800" cap="none" dirty="0">
+                <a:latin typeface="D2Coding" panose="020B0609020101020101" pitchFamily="49" charset="-127"/>
+                <a:ea typeface="D2Coding" panose="020B0609020101020101" pitchFamily="49" charset="-127"/>
+                <a:cs typeface="Segoe UI Light" panose="020B0502040204020203" pitchFamily="34" charset="0"/>
+              </a:rPr>
+              <a:t>YOLO</a:t>
+            </a:r>
+            <a:endParaRPr lang="ko-KR" altLang="en-US" sz="2800" cap="none" dirty="0">
+              <a:latin typeface="D2Coding" panose="020B0609020101020101" pitchFamily="49" charset="-127"/>
+              <a:ea typeface="D2Coding" panose="020B0609020101020101" pitchFamily="49" charset="-127"/>
+              <a:cs typeface="Segoe UI Light" panose="020B0502040204020203" pitchFamily="34" charset="0"/>
+            </a:endParaRPr>
+          </a:p>
+        </p:txBody>
+      </p:sp>
+      <p:sp>
+        <p:nvSpPr>
+          <p:cNvPr id="11" name="TextBox 10">
+            <a:extLst>
+              <a:ext uri="{FF2B5EF4-FFF2-40B4-BE49-F238E27FC236}">
+                <a16:creationId xmlns:a16="http://schemas.microsoft.com/office/drawing/2014/main" id="{05DBD817-F068-6BAF-9E41-3CB38C12C624}"/>
+              </a:ext>
+            </a:extLst>
+          </p:cNvPr>
+          <p:cNvSpPr txBox="1"/>
+          <p:nvPr/>
+        </p:nvSpPr>
+        <p:spPr>
+          <a:xfrm>
+            <a:off x="571802" y="1248422"/>
+            <a:ext cx="11144553" cy="880819"/>
+          </a:xfrm>
+          <a:prstGeom prst="rect">
+            <a:avLst/>
+          </a:prstGeom>
+          <a:noFill/>
+        </p:spPr>
+        <p:txBody>
+          <a:bodyPr wrap="square">
+            <a:spAutoFit/>
+          </a:bodyPr>
+          <a:lstStyle/>
+          <a:p>
+            <a:pPr>
+              <a:lnSpc>
+                <a:spcPct val="150000"/>
+              </a:lnSpc>
+            </a:pPr>
+            <a:r>
+              <a:rPr lang="en-US" altLang="ko-KR" dirty="0">
+                <a:latin typeface="D2Coding" panose="020B0609020101020101" pitchFamily="49" charset="-127"/>
+                <a:ea typeface="D2Coding" panose="020B0609020101020101" pitchFamily="49" charset="-127"/>
+              </a:rPr>
+              <a:t>YOLO</a:t>
+            </a:r>
+            <a:r>
+              <a:rPr lang="ko-KR" altLang="en-US" dirty="0">
+                <a:latin typeface="D2Coding" panose="020B0609020101020101" pitchFamily="49" charset="-127"/>
+                <a:ea typeface="D2Coding" panose="020B0609020101020101" pitchFamily="49" charset="-127"/>
+              </a:rPr>
+              <a:t>는 새로운</a:t>
+            </a:r>
+            <a:r>
+              <a:rPr lang="en-US" altLang="ko-KR" dirty="0">
+                <a:latin typeface="D2Coding" panose="020B0609020101020101" pitchFamily="49" charset="-127"/>
+                <a:ea typeface="D2Coding" panose="020B0609020101020101" pitchFamily="49" charset="-127"/>
+              </a:rPr>
+              <a:t> </a:t>
+            </a:r>
+            <a:r>
+              <a:rPr lang="ko-KR" altLang="en-US" dirty="0">
+                <a:latin typeface="D2Coding" panose="020B0609020101020101" pitchFamily="49" charset="-127"/>
+                <a:ea typeface="D2Coding" panose="020B0609020101020101" pitchFamily="49" charset="-127"/>
+              </a:rPr>
+              <a:t>이미지가 들어오면 가상의 </a:t>
+            </a:r>
+            <a:r>
+              <a:rPr lang="en-US" altLang="ko-KR" dirty="0">
+                <a:latin typeface="D2Coding" panose="020B0609020101020101" pitchFamily="49" charset="-127"/>
+                <a:ea typeface="D2Coding" panose="020B0609020101020101" pitchFamily="49" charset="-127"/>
+              </a:rPr>
+              <a:t>3 by</a:t>
+            </a:r>
+            <a:r>
+              <a:rPr lang="ko-KR" altLang="en-US" dirty="0">
+                <a:latin typeface="D2Coding" panose="020B0609020101020101" pitchFamily="49" charset="-127"/>
+                <a:ea typeface="D2Coding" panose="020B0609020101020101" pitchFamily="49" charset="-127"/>
+              </a:rPr>
+              <a:t> </a:t>
+            </a:r>
+            <a:r>
+              <a:rPr lang="en-US" altLang="ko-KR" dirty="0">
+                <a:latin typeface="D2Coding" panose="020B0609020101020101" pitchFamily="49" charset="-127"/>
+                <a:ea typeface="D2Coding" panose="020B0609020101020101" pitchFamily="49" charset="-127"/>
+              </a:rPr>
+              <a:t>3 </a:t>
+            </a:r>
+            <a:r>
+              <a:rPr lang="ko-KR" altLang="en-US" dirty="0">
+                <a:latin typeface="D2Coding" panose="020B0609020101020101" pitchFamily="49" charset="-127"/>
+                <a:ea typeface="D2Coding" panose="020B0609020101020101" pitchFamily="49" charset="-127"/>
+              </a:rPr>
+              <a:t>격자를 바탕으로 각 칸마다 물체의 중심이 있는지를 기계적으로 조사하여 </a:t>
+            </a:r>
+            <a:r>
+              <a:rPr lang="en-US" altLang="ko-KR" dirty="0">
+                <a:latin typeface="D2Coding" panose="020B0609020101020101" pitchFamily="49" charset="-127"/>
+                <a:ea typeface="D2Coding" panose="020B0609020101020101" pitchFamily="49" charset="-127"/>
+              </a:rPr>
+              <a:t>P(Object) </a:t>
+            </a:r>
+            <a:r>
+              <a:rPr lang="ko-KR" altLang="en-US" dirty="0">
+                <a:latin typeface="D2Coding" panose="020B0609020101020101" pitchFamily="49" charset="-127"/>
+                <a:ea typeface="D2Coding" panose="020B0609020101020101" pitchFamily="49" charset="-127"/>
+              </a:rPr>
+              <a:t>값을 생성</a:t>
+            </a:r>
+            <a:endParaRPr lang="en-US" altLang="ko-KR" dirty="0">
+              <a:latin typeface="D2Coding" panose="020B0609020101020101" pitchFamily="49" charset="-127"/>
+              <a:ea typeface="D2Coding" panose="020B0609020101020101" pitchFamily="49" charset="-127"/>
+            </a:endParaRPr>
+          </a:p>
+        </p:txBody>
+      </p:sp>
+      <p:sp>
+        <p:nvSpPr>
+          <p:cNvPr id="6" name="제목 1">
+            <a:extLst>
+              <a:ext uri="{FF2B5EF4-FFF2-40B4-BE49-F238E27FC236}">
+                <a16:creationId xmlns:a16="http://schemas.microsoft.com/office/drawing/2014/main" id="{FCCFD44B-A96A-7C75-4F30-5EBDA0F0CC5B}"/>
+              </a:ext>
+            </a:extLst>
+          </p:cNvPr>
+          <p:cNvSpPr txBox="1">
+            <a:spLocks/>
+          </p:cNvSpPr>
+          <p:nvPr/>
+        </p:nvSpPr>
+        <p:spPr>
+          <a:xfrm>
+            <a:off x="7031196" y="647700"/>
+            <a:ext cx="4629755" cy="600722"/>
+          </a:xfrm>
+          <a:prstGeom prst="rect">
+            <a:avLst/>
+          </a:prstGeom>
+        </p:spPr>
+        <p:txBody>
+          <a:bodyPr vert="horz" lIns="91440" tIns="45720" rIns="91440" bIns="45720" rtlCol="0" anchor="ctr">
+            <a:normAutofit/>
+          </a:bodyPr>
+          <a:lstStyle>
+            <a:lvl1pPr algn="ctr" defTabSz="914400" rtl="0" eaLnBrk="1" latinLnBrk="1" hangingPunct="1">
+              <a:lnSpc>
+                <a:spcPct val="90000"/>
+              </a:lnSpc>
+              <a:spcBef>
+                <a:spcPct val="0"/>
+              </a:spcBef>
+              <a:buNone/>
+              <a:defRPr sz="3200" kern="1200" cap="all" baseline="0">
+                <a:solidFill>
+                  <a:schemeClr val="tx1"/>
+                </a:solidFill>
+                <a:effectLst/>
+                <a:latin typeface="Batang" panose="02030600000101010101" pitchFamily="18" charset="-127"/>
+                <a:ea typeface="Batang" panose="02030600000101010101" pitchFamily="18" charset="-127"/>
+                <a:cs typeface="+mj-cs"/>
+              </a:defRPr>
+            </a:lvl1pPr>
+          </a:lstStyle>
+          <a:p>
+            <a:pPr algn="r"/>
+            <a:r>
+              <a:rPr lang="en-US" altLang="ko-KR" sz="2000" cap="none" dirty="0">
+                <a:latin typeface="D2Coding" panose="020B0609020101020101" pitchFamily="49" charset="-127"/>
+                <a:ea typeface="D2Coding" panose="020B0609020101020101" pitchFamily="49" charset="-127"/>
+                <a:cs typeface="Segoe UI Light" panose="020B0502040204020203" pitchFamily="34" charset="0"/>
+              </a:rPr>
+              <a:t>3. </a:t>
+            </a:r>
+            <a:r>
+              <a:rPr lang="ko-KR" altLang="en-US" sz="2000" cap="none" dirty="0">
+                <a:latin typeface="D2Coding" panose="020B0609020101020101" pitchFamily="49" charset="-127"/>
+                <a:ea typeface="D2Coding" panose="020B0609020101020101" pitchFamily="49" charset="-127"/>
+                <a:cs typeface="Segoe UI Light" panose="020B0502040204020203" pitchFamily="34" charset="0"/>
+              </a:rPr>
+              <a:t>새로운 데이터 격자로 나누기</a:t>
+            </a:r>
+          </a:p>
+        </p:txBody>
+      </p:sp>
+      <p:graphicFrame>
+        <p:nvGraphicFramePr>
+          <p:cNvPr id="10" name="표 9">
+            <a:extLst>
+              <a:ext uri="{FF2B5EF4-FFF2-40B4-BE49-F238E27FC236}">
+                <a16:creationId xmlns:a16="http://schemas.microsoft.com/office/drawing/2014/main" id="{6395662B-B4C5-A72E-099F-FBD431E5E9A3}"/>
+              </a:ext>
+            </a:extLst>
+          </p:cNvPr>
+          <p:cNvGraphicFramePr>
+            <a:graphicFrameLocks noGrp="1"/>
+          </p:cNvGraphicFramePr>
+          <p:nvPr>
+            <p:extLst>
+              <p:ext uri="{D42A27DB-BD31-4B8C-83A1-F6EECF244321}">
+                <p14:modId xmlns:p14="http://schemas.microsoft.com/office/powerpoint/2010/main" val="2197550660"/>
+              </p:ext>
+            </p:extLst>
+          </p:nvPr>
+        </p:nvGraphicFramePr>
+        <p:xfrm>
+          <a:off x="790572" y="3090008"/>
+          <a:ext cx="3790953" cy="3204663"/>
+        </p:xfrm>
+        <a:graphic>
+          <a:graphicData uri="http://schemas.openxmlformats.org/drawingml/2006/table">
+            <a:tbl>
+              <a:tblPr firstRow="1" bandRow="1">
+                <a:tableStyleId>{5940675A-B579-460E-94D1-54222C63F5DA}</a:tableStyleId>
+              </a:tblPr>
+              <a:tblGrid>
+                <a:gridCol w="1263651">
+                  <a:extLst>
+                    <a:ext uri="{9D8B030D-6E8A-4147-A177-3AD203B41FA5}">
+                      <a16:colId xmlns:a16="http://schemas.microsoft.com/office/drawing/2014/main" val="1961843274"/>
+                    </a:ext>
+                  </a:extLst>
+                </a:gridCol>
+                <a:gridCol w="1263651">
+                  <a:extLst>
+                    <a:ext uri="{9D8B030D-6E8A-4147-A177-3AD203B41FA5}">
+                      <a16:colId xmlns:a16="http://schemas.microsoft.com/office/drawing/2014/main" val="2923400843"/>
+                    </a:ext>
+                  </a:extLst>
+                </a:gridCol>
+                <a:gridCol w="1263651">
+                  <a:extLst>
+                    <a:ext uri="{9D8B030D-6E8A-4147-A177-3AD203B41FA5}">
+                      <a16:colId xmlns:a16="http://schemas.microsoft.com/office/drawing/2014/main" val="2951067763"/>
+                    </a:ext>
+                  </a:extLst>
+                </a:gridCol>
+              </a:tblGrid>
+              <a:tr h="1068221">
+                <a:tc>
+                  <a:txBody>
+                    <a:bodyPr/>
+                    <a:lstStyle/>
+                    <a:p>
+                      <a:pPr latinLnBrk="1"/>
+                      <a:endParaRPr lang="ko-KR" altLang="en-US" sz="1400" dirty="0">
+                        <a:solidFill>
+                          <a:srgbClr val="FF0000"/>
+                        </a:solidFill>
+                      </a:endParaRPr>
+                    </a:p>
+                  </a:txBody>
+                  <a:tcPr marL="86797" marR="86797" marT="43397" marB="43397"/>
+                </a:tc>
+                <a:tc>
+                  <a:txBody>
+                    <a:bodyPr/>
+                    <a:lstStyle/>
+                    <a:p>
+                      <a:pPr marL="0" marR="0" lvl="0" indent="0" algn="l" defTabSz="914400" rtl="0" eaLnBrk="1" fontAlgn="auto" latinLnBrk="1" hangingPunct="1">
+                        <a:lnSpc>
+                          <a:spcPct val="100000"/>
+                        </a:lnSpc>
+                        <a:spcBef>
+                          <a:spcPts val="0"/>
+                        </a:spcBef>
+                        <a:spcAft>
+                          <a:spcPts val="0"/>
+                        </a:spcAft>
+                        <a:buClrTx/>
+                        <a:buSzTx/>
+                        <a:buFontTx/>
+                        <a:buNone/>
+                        <a:tabLst/>
+                        <a:defRPr/>
+                      </a:pPr>
+                      <a:endParaRPr kumimoji="0" lang="ko-KR" altLang="en-US" sz="1400" b="0" i="0" u="none" strike="noStrike" kern="1200" cap="none" spc="0" normalizeH="0" baseline="0" noProof="0" dirty="0">
+                        <a:ln>
+                          <a:noFill/>
+                        </a:ln>
+                        <a:solidFill>
+                          <a:srgbClr val="FF0000"/>
+                        </a:solidFill>
+                        <a:effectLst/>
+                        <a:uLnTx/>
+                        <a:uFillTx/>
+                        <a:latin typeface="Segoe UI"/>
+                        <a:ea typeface="+mn-ea"/>
+                        <a:cs typeface="+mn-cs"/>
+                      </a:endParaRPr>
+                    </a:p>
+                  </a:txBody>
+                  <a:tcPr marL="86797" marR="86797" marT="43397" marB="43397"/>
+                </a:tc>
+                <a:tc>
+                  <a:txBody>
+                    <a:bodyPr/>
+                    <a:lstStyle/>
+                    <a:p>
+                      <a:pPr marL="0" marR="0" lvl="0" indent="0" algn="l" defTabSz="914400" rtl="0" eaLnBrk="1" fontAlgn="auto" latinLnBrk="1" hangingPunct="1">
+                        <a:lnSpc>
+                          <a:spcPct val="100000"/>
+                        </a:lnSpc>
+                        <a:spcBef>
+                          <a:spcPts val="0"/>
+                        </a:spcBef>
+                        <a:spcAft>
+                          <a:spcPts val="0"/>
+                        </a:spcAft>
+                        <a:buClrTx/>
+                        <a:buSzTx/>
+                        <a:buFontTx/>
+                        <a:buNone/>
+                        <a:tabLst/>
+                        <a:defRPr/>
+                      </a:pPr>
+                      <a:endParaRPr kumimoji="0" lang="ko-KR" altLang="en-US" sz="1400" b="0" i="0" u="none" strike="noStrike" kern="1200" cap="none" spc="0" normalizeH="0" baseline="0" noProof="0" dirty="0">
+                        <a:ln>
+                          <a:noFill/>
+                        </a:ln>
+                        <a:solidFill>
+                          <a:srgbClr val="FF0000"/>
+                        </a:solidFill>
+                        <a:effectLst/>
+                        <a:uLnTx/>
+                        <a:uFillTx/>
+                        <a:latin typeface="Segoe UI"/>
+                        <a:ea typeface="+mn-ea"/>
+                        <a:cs typeface="+mn-cs"/>
+                      </a:endParaRPr>
+                    </a:p>
+                  </a:txBody>
+                  <a:tcPr marL="86797" marR="86797" marT="43397" marB="43397"/>
+                </a:tc>
+                <a:extLst>
+                  <a:ext uri="{0D108BD9-81ED-4DB2-BD59-A6C34878D82A}">
+                    <a16:rowId xmlns:a16="http://schemas.microsoft.com/office/drawing/2014/main" val="844891742"/>
+                  </a:ext>
+                </a:extLst>
+              </a:tr>
+              <a:tr h="1068221">
+                <a:tc>
+                  <a:txBody>
+                    <a:bodyPr/>
+                    <a:lstStyle/>
+                    <a:p>
+                      <a:pPr marL="0" marR="0" lvl="0" indent="0" algn="l" defTabSz="914400" rtl="0" eaLnBrk="1" fontAlgn="auto" latinLnBrk="1" hangingPunct="1">
+                        <a:lnSpc>
+                          <a:spcPct val="100000"/>
+                        </a:lnSpc>
+                        <a:spcBef>
+                          <a:spcPts val="0"/>
+                        </a:spcBef>
+                        <a:spcAft>
+                          <a:spcPts val="0"/>
+                        </a:spcAft>
+                        <a:buClrTx/>
+                        <a:buSzTx/>
+                        <a:buFontTx/>
+                        <a:buNone/>
+                        <a:tabLst/>
+                        <a:defRPr/>
+                      </a:pPr>
+                      <a:endParaRPr kumimoji="0" lang="ko-KR" altLang="en-US" sz="1400" b="0" i="0" u="none" strike="noStrike" kern="1200" cap="none" spc="0" normalizeH="0" baseline="0" noProof="0" dirty="0">
+                        <a:ln>
+                          <a:noFill/>
+                        </a:ln>
+                        <a:solidFill>
+                          <a:srgbClr val="FF0000"/>
+                        </a:solidFill>
+                        <a:effectLst/>
+                        <a:uLnTx/>
+                        <a:uFillTx/>
+                        <a:latin typeface="Segoe UI"/>
+                        <a:ea typeface="+mn-ea"/>
+                        <a:cs typeface="+mn-cs"/>
+                      </a:endParaRPr>
+                    </a:p>
+                  </a:txBody>
+                  <a:tcPr marL="86797" marR="86797" marT="43397" marB="43397"/>
+                </a:tc>
+                <a:tc>
+                  <a:txBody>
+                    <a:bodyPr/>
+                    <a:lstStyle/>
+                    <a:p>
+                      <a:pPr marL="0" marR="0" lvl="0" indent="0" algn="l" defTabSz="914400" rtl="0" eaLnBrk="1" fontAlgn="auto" latinLnBrk="1" hangingPunct="1">
+                        <a:lnSpc>
+                          <a:spcPct val="100000"/>
+                        </a:lnSpc>
+                        <a:spcBef>
+                          <a:spcPts val="0"/>
+                        </a:spcBef>
+                        <a:spcAft>
+                          <a:spcPts val="0"/>
+                        </a:spcAft>
+                        <a:buClrTx/>
+                        <a:buSzTx/>
+                        <a:buFontTx/>
+                        <a:buNone/>
+                        <a:tabLst/>
+                        <a:defRPr/>
+                      </a:pPr>
+                      <a:endParaRPr kumimoji="0" lang="ko-KR" altLang="en-US" sz="1400" b="0" i="0" u="none" strike="noStrike" kern="1200" cap="none" spc="0" normalizeH="0" baseline="0" noProof="0" dirty="0">
+                        <a:ln>
+                          <a:noFill/>
+                        </a:ln>
+                        <a:solidFill>
+                          <a:srgbClr val="FF0000"/>
+                        </a:solidFill>
+                        <a:effectLst/>
+                        <a:uLnTx/>
+                        <a:uFillTx/>
+                        <a:latin typeface="Segoe UI"/>
+                        <a:ea typeface="+mn-ea"/>
+                        <a:cs typeface="+mn-cs"/>
+                      </a:endParaRPr>
+                    </a:p>
+                  </a:txBody>
+                  <a:tcPr marL="86797" marR="86797" marT="43397" marB="43397"/>
+                </a:tc>
+                <a:tc>
+                  <a:txBody>
+                    <a:bodyPr/>
+                    <a:lstStyle/>
+                    <a:p>
+                      <a:pPr marL="0" marR="0" lvl="0" indent="0" algn="l" defTabSz="914400" rtl="0" eaLnBrk="1" fontAlgn="auto" latinLnBrk="1" hangingPunct="1">
+                        <a:lnSpc>
+                          <a:spcPct val="100000"/>
+                        </a:lnSpc>
+                        <a:spcBef>
+                          <a:spcPts val="0"/>
+                        </a:spcBef>
+                        <a:spcAft>
+                          <a:spcPts val="0"/>
+                        </a:spcAft>
+                        <a:buClrTx/>
+                        <a:buSzTx/>
+                        <a:buFontTx/>
+                        <a:buNone/>
+                        <a:tabLst/>
+                        <a:defRPr/>
+                      </a:pPr>
+                      <a:endParaRPr kumimoji="0" lang="ko-KR" altLang="en-US" sz="1400" b="0" i="0" u="none" strike="noStrike" kern="1200" cap="none" spc="0" normalizeH="0" baseline="0" noProof="0" dirty="0">
+                        <a:ln>
+                          <a:noFill/>
+                        </a:ln>
+                        <a:solidFill>
+                          <a:srgbClr val="FF0000"/>
+                        </a:solidFill>
+                        <a:effectLst/>
+                        <a:uLnTx/>
+                        <a:uFillTx/>
+                        <a:latin typeface="Segoe UI"/>
+                        <a:ea typeface="+mn-ea"/>
+                        <a:cs typeface="+mn-cs"/>
+                      </a:endParaRPr>
+                    </a:p>
+                  </a:txBody>
+                  <a:tcPr marL="86797" marR="86797" marT="43397" marB="43397"/>
+                </a:tc>
+                <a:extLst>
+                  <a:ext uri="{0D108BD9-81ED-4DB2-BD59-A6C34878D82A}">
+                    <a16:rowId xmlns:a16="http://schemas.microsoft.com/office/drawing/2014/main" val="4097710734"/>
+                  </a:ext>
+                </a:extLst>
+              </a:tr>
+              <a:tr h="1068221">
+                <a:tc>
+                  <a:txBody>
+                    <a:bodyPr/>
+                    <a:lstStyle/>
+                    <a:p>
+                      <a:pPr marL="0" marR="0" lvl="0" indent="0" algn="l" defTabSz="914400" rtl="0" eaLnBrk="1" fontAlgn="auto" latinLnBrk="1" hangingPunct="1">
+                        <a:lnSpc>
+                          <a:spcPct val="100000"/>
+                        </a:lnSpc>
+                        <a:spcBef>
+                          <a:spcPts val="0"/>
+                        </a:spcBef>
+                        <a:spcAft>
+                          <a:spcPts val="0"/>
+                        </a:spcAft>
+                        <a:buClrTx/>
+                        <a:buSzTx/>
+                        <a:buFontTx/>
+                        <a:buNone/>
+                        <a:tabLst/>
+                        <a:defRPr/>
+                      </a:pPr>
+                      <a:endParaRPr kumimoji="0" lang="ko-KR" altLang="en-US" sz="1400" b="0" i="0" u="none" strike="noStrike" kern="1200" cap="none" spc="0" normalizeH="0" baseline="0" noProof="0" dirty="0">
+                        <a:ln>
+                          <a:noFill/>
+                        </a:ln>
+                        <a:solidFill>
+                          <a:srgbClr val="FF0000"/>
+                        </a:solidFill>
+                        <a:effectLst/>
+                        <a:uLnTx/>
+                        <a:uFillTx/>
+                        <a:latin typeface="Segoe UI"/>
+                        <a:ea typeface="+mn-ea"/>
+                        <a:cs typeface="+mn-cs"/>
+                      </a:endParaRPr>
+                    </a:p>
+                  </a:txBody>
+                  <a:tcPr marL="86797" marR="86797" marT="43397" marB="43397"/>
+                </a:tc>
+                <a:tc>
+                  <a:txBody>
+                    <a:bodyPr/>
+                    <a:lstStyle/>
+                    <a:p>
+                      <a:pPr marL="0" marR="0" lvl="0" indent="0" algn="l" defTabSz="914400" rtl="0" eaLnBrk="1" fontAlgn="auto" latinLnBrk="1" hangingPunct="1">
+                        <a:lnSpc>
+                          <a:spcPct val="100000"/>
+                        </a:lnSpc>
+                        <a:spcBef>
+                          <a:spcPts val="0"/>
+                        </a:spcBef>
+                        <a:spcAft>
+                          <a:spcPts val="0"/>
+                        </a:spcAft>
+                        <a:buClrTx/>
+                        <a:buSzTx/>
+                        <a:buFontTx/>
+                        <a:buNone/>
+                        <a:tabLst/>
+                        <a:defRPr/>
+                      </a:pPr>
+                      <a:endParaRPr kumimoji="0" lang="ko-KR" altLang="en-US" sz="1400" b="0" i="0" u="none" strike="noStrike" kern="1200" cap="none" spc="0" normalizeH="0" baseline="0" noProof="0" dirty="0">
+                        <a:ln>
+                          <a:noFill/>
+                        </a:ln>
+                        <a:solidFill>
+                          <a:srgbClr val="FF0000"/>
+                        </a:solidFill>
+                        <a:effectLst/>
+                        <a:uLnTx/>
+                        <a:uFillTx/>
+                        <a:latin typeface="Segoe UI"/>
+                        <a:ea typeface="+mn-ea"/>
+                        <a:cs typeface="+mn-cs"/>
+                      </a:endParaRPr>
+                    </a:p>
+                  </a:txBody>
+                  <a:tcPr marL="86797" marR="86797" marT="43397" marB="43397"/>
+                </a:tc>
+                <a:tc>
+                  <a:txBody>
+                    <a:bodyPr/>
+                    <a:lstStyle/>
+                    <a:p>
+                      <a:pPr marL="0" marR="0" lvl="0" indent="0" algn="l" defTabSz="914400" rtl="0" eaLnBrk="1" fontAlgn="auto" latinLnBrk="1" hangingPunct="1">
+                        <a:lnSpc>
+                          <a:spcPct val="100000"/>
+                        </a:lnSpc>
+                        <a:spcBef>
+                          <a:spcPts val="0"/>
+                        </a:spcBef>
+                        <a:spcAft>
+                          <a:spcPts val="0"/>
+                        </a:spcAft>
+                        <a:buClrTx/>
+                        <a:buSzTx/>
+                        <a:buFontTx/>
+                        <a:buNone/>
+                        <a:tabLst/>
+                        <a:defRPr/>
+                      </a:pPr>
+                      <a:endParaRPr kumimoji="0" lang="ko-KR" altLang="en-US" sz="1400" b="0" i="0" u="none" strike="noStrike" kern="1200" cap="none" spc="0" normalizeH="0" baseline="0" noProof="0" dirty="0">
+                        <a:ln>
+                          <a:noFill/>
+                        </a:ln>
+                        <a:solidFill>
+                          <a:srgbClr val="0070C0"/>
+                        </a:solidFill>
+                        <a:effectLst/>
+                        <a:uLnTx/>
+                        <a:uFillTx/>
+                        <a:latin typeface="Segoe UI"/>
+                        <a:ea typeface="+mn-ea"/>
+                        <a:cs typeface="+mn-cs"/>
+                      </a:endParaRPr>
+                    </a:p>
+                  </a:txBody>
+                  <a:tcPr marL="86797" marR="86797" marT="43397" marB="43397"/>
+                </a:tc>
+                <a:extLst>
+                  <a:ext uri="{0D108BD9-81ED-4DB2-BD59-A6C34878D82A}">
+                    <a16:rowId xmlns:a16="http://schemas.microsoft.com/office/drawing/2014/main" val="3232772719"/>
+                  </a:ext>
+                </a:extLst>
+              </a:tr>
+            </a:tbl>
+          </a:graphicData>
+        </a:graphic>
+      </p:graphicFrame>
+      <p:sp>
+        <p:nvSpPr>
+          <p:cNvPr id="13" name="TextBox 12">
+            <a:extLst>
+              <a:ext uri="{FF2B5EF4-FFF2-40B4-BE49-F238E27FC236}">
+                <a16:creationId xmlns:a16="http://schemas.microsoft.com/office/drawing/2014/main" id="{8591BC02-825D-9D1B-2479-A64B013DDC92}"/>
+              </a:ext>
+            </a:extLst>
+          </p:cNvPr>
+          <p:cNvSpPr txBox="1"/>
+          <p:nvPr/>
+        </p:nvSpPr>
+        <p:spPr>
+          <a:xfrm>
+            <a:off x="790571" y="2647933"/>
+            <a:ext cx="3790953" cy="369332"/>
+          </a:xfrm>
+          <a:prstGeom prst="rect">
+            <a:avLst/>
+          </a:prstGeom>
+          <a:noFill/>
+        </p:spPr>
+        <p:txBody>
+          <a:bodyPr wrap="square">
+            <a:spAutoFit/>
+          </a:bodyPr>
+          <a:lstStyle/>
+          <a:p>
+            <a:r>
+              <a:rPr lang="en-US" altLang="ko-KR" dirty="0">
+                <a:latin typeface="D2Coding" panose="020B0609020101020101" pitchFamily="49" charset="-127"/>
+                <a:ea typeface="D2Coding" panose="020B0609020101020101" pitchFamily="49" charset="-127"/>
+              </a:rPr>
+              <a:t>(3, 3) grid </a:t>
+            </a:r>
+            <a:r>
+              <a:rPr lang="en-US" altLang="ko-KR" dirty="0">
+                <a:latin typeface="D2Coding" panose="020B0609020101020101" pitchFamily="49" charset="-127"/>
+                <a:ea typeface="D2Coding" panose="020B0609020101020101" pitchFamily="49" charset="-127"/>
+                <a:sym typeface="Wingdings" panose="05000000000000000000" pitchFamily="2" charset="2"/>
+              </a:rPr>
+              <a:t> P(Object)</a:t>
+            </a:r>
+            <a:endParaRPr lang="ko-KR" altLang="en-US" dirty="0"/>
+          </a:p>
+        </p:txBody>
+      </p:sp>
+      <p:pic>
+        <p:nvPicPr>
+          <p:cNvPr id="5" name="그래픽 4" descr="트럭">
+            <a:extLst>
+              <a:ext uri="{FF2B5EF4-FFF2-40B4-BE49-F238E27FC236}">
+                <a16:creationId xmlns:a16="http://schemas.microsoft.com/office/drawing/2014/main" id="{CFE80B72-C091-E3E0-69F4-226A624F1482}"/>
+              </a:ext>
+            </a:extLst>
+          </p:cNvPr>
+          <p:cNvPicPr>
+            <a:picLocks noChangeAspect="1"/>
+          </p:cNvPicPr>
+          <p:nvPr/>
+        </p:nvPicPr>
+        <p:blipFill>
+          <a:blip r:embed="rId2">
+            <a:extLst>
+              <a:ext uri="{96DAC541-7B7A-43D3-8B79-37D633B846F1}">
+                <asvg:svgBlip xmlns:asvg="http://schemas.microsoft.com/office/drawing/2016/SVG/main" r:embed="rId3"/>
+              </a:ext>
+            </a:extLst>
+          </a:blip>
+          <a:stretch>
+            <a:fillRect/>
+          </a:stretch>
+        </p:blipFill>
+        <p:spPr>
+          <a:xfrm>
+            <a:off x="2048137" y="3535957"/>
+            <a:ext cx="1590414" cy="1590414"/>
+          </a:xfrm>
+          <a:prstGeom prst="rect">
+            <a:avLst/>
+          </a:prstGeom>
+        </p:spPr>
+      </p:pic>
+      <p:graphicFrame>
+        <p:nvGraphicFramePr>
+          <p:cNvPr id="12" name="표 11">
+            <a:extLst>
+              <a:ext uri="{FF2B5EF4-FFF2-40B4-BE49-F238E27FC236}">
+                <a16:creationId xmlns:a16="http://schemas.microsoft.com/office/drawing/2014/main" id="{A401A2D9-7049-7B61-3731-53F44EFF5D3D}"/>
+              </a:ext>
+            </a:extLst>
+          </p:cNvPr>
+          <p:cNvGraphicFramePr>
+            <a:graphicFrameLocks noGrp="1"/>
+          </p:cNvGraphicFramePr>
+          <p:nvPr>
+            <p:extLst>
+              <p:ext uri="{D42A27DB-BD31-4B8C-83A1-F6EECF244321}">
+                <p14:modId xmlns:p14="http://schemas.microsoft.com/office/powerpoint/2010/main" val="4183127602"/>
+              </p:ext>
+            </p:extLst>
+          </p:nvPr>
+        </p:nvGraphicFramePr>
+        <p:xfrm>
+          <a:off x="5286372" y="3090008"/>
+          <a:ext cx="3790953" cy="3204663"/>
+        </p:xfrm>
+        <a:graphic>
+          <a:graphicData uri="http://schemas.openxmlformats.org/drawingml/2006/table">
+            <a:tbl>
+              <a:tblPr firstRow="1" bandRow="1">
+                <a:tableStyleId>{5940675A-B579-460E-94D1-54222C63F5DA}</a:tableStyleId>
+              </a:tblPr>
+              <a:tblGrid>
+                <a:gridCol w="1263651">
+                  <a:extLst>
+                    <a:ext uri="{9D8B030D-6E8A-4147-A177-3AD203B41FA5}">
+                      <a16:colId xmlns:a16="http://schemas.microsoft.com/office/drawing/2014/main" val="1961843274"/>
+                    </a:ext>
+                  </a:extLst>
+                </a:gridCol>
+                <a:gridCol w="1263651">
+                  <a:extLst>
+                    <a:ext uri="{9D8B030D-6E8A-4147-A177-3AD203B41FA5}">
+                      <a16:colId xmlns:a16="http://schemas.microsoft.com/office/drawing/2014/main" val="2923400843"/>
+                    </a:ext>
+                  </a:extLst>
+                </a:gridCol>
+                <a:gridCol w="1263651">
+                  <a:extLst>
+                    <a:ext uri="{9D8B030D-6E8A-4147-A177-3AD203B41FA5}">
+                      <a16:colId xmlns:a16="http://schemas.microsoft.com/office/drawing/2014/main" val="2951067763"/>
+                    </a:ext>
+                  </a:extLst>
+                </a:gridCol>
+              </a:tblGrid>
+              <a:tr h="1068221">
+                <a:tc>
+                  <a:txBody>
+                    <a:bodyPr/>
+                    <a:lstStyle/>
+                    <a:p>
+                      <a:pPr algn="ctr" latinLnBrk="1"/>
+                      <a:r>
+                        <a:rPr lang="en-US" altLang="ko-KR" sz="2000" dirty="0">
+                          <a:solidFill>
+                            <a:schemeClr val="tx1"/>
+                          </a:solidFill>
+                        </a:rPr>
+                        <a:t>0.01</a:t>
+                      </a:r>
+                      <a:endParaRPr lang="ko-KR" altLang="en-US" sz="2000" dirty="0">
+                        <a:solidFill>
+                          <a:schemeClr val="tx1"/>
+                        </a:solidFill>
+                      </a:endParaRPr>
+                    </a:p>
+                  </a:txBody>
+                  <a:tcPr marL="86797" marR="86797" marT="43397" marB="43397"/>
+                </a:tc>
+                <a:tc>
+                  <a:txBody>
+                    <a:bodyPr/>
+                    <a:lstStyle/>
+                    <a:p>
+                      <a:pPr marL="0" marR="0" lvl="0" indent="0" algn="ctr" defTabSz="914400" rtl="0" eaLnBrk="1" fontAlgn="auto" latinLnBrk="1" hangingPunct="1">
+                        <a:lnSpc>
+                          <a:spcPct val="100000"/>
+                        </a:lnSpc>
+                        <a:spcBef>
+                          <a:spcPts val="0"/>
+                        </a:spcBef>
+                        <a:spcAft>
+                          <a:spcPts val="0"/>
+                        </a:spcAft>
+                        <a:buClrTx/>
+                        <a:buSzTx/>
+                        <a:buFontTx/>
+                        <a:buNone/>
+                        <a:tabLst/>
+                        <a:defRPr/>
+                      </a:pPr>
+                      <a:r>
+                        <a:rPr kumimoji="0" lang="en-US" altLang="ko-KR" sz="2000" b="0" i="0" u="none" strike="noStrike" kern="1200" cap="none" spc="0" normalizeH="0" baseline="0" noProof="0" dirty="0">
+                          <a:ln>
+                            <a:noFill/>
+                          </a:ln>
+                          <a:solidFill>
+                            <a:schemeClr val="tx1"/>
+                          </a:solidFill>
+                          <a:effectLst/>
+                          <a:uLnTx/>
+                          <a:uFillTx/>
+                          <a:latin typeface="Segoe UI"/>
+                          <a:ea typeface="+mn-ea"/>
+                          <a:cs typeface="+mn-cs"/>
+                        </a:rPr>
+                        <a:t>0.04</a:t>
+                      </a:r>
+                      <a:endParaRPr kumimoji="0" lang="ko-KR" altLang="en-US" sz="2000" b="0" i="0" u="none" strike="noStrike" kern="1200" cap="none" spc="0" normalizeH="0" baseline="0" noProof="0" dirty="0">
+                        <a:ln>
+                          <a:noFill/>
+                        </a:ln>
+                        <a:solidFill>
+                          <a:schemeClr val="tx1"/>
+                        </a:solidFill>
+                        <a:effectLst/>
+                        <a:uLnTx/>
+                        <a:uFillTx/>
+                        <a:latin typeface="Segoe UI"/>
+                        <a:ea typeface="+mn-ea"/>
+                        <a:cs typeface="+mn-cs"/>
+                      </a:endParaRPr>
+                    </a:p>
+                  </a:txBody>
+                  <a:tcPr marL="86797" marR="86797" marT="43397" marB="43397"/>
+                </a:tc>
+                <a:tc>
+                  <a:txBody>
+                    <a:bodyPr/>
+                    <a:lstStyle/>
+                    <a:p>
+                      <a:pPr marL="0" marR="0" lvl="0" indent="0" algn="ctr" defTabSz="914400" rtl="0" eaLnBrk="1" fontAlgn="auto" latinLnBrk="1" hangingPunct="1">
+                        <a:lnSpc>
+                          <a:spcPct val="100000"/>
+                        </a:lnSpc>
+                        <a:spcBef>
+                          <a:spcPts val="0"/>
+                        </a:spcBef>
+                        <a:spcAft>
+                          <a:spcPts val="0"/>
+                        </a:spcAft>
+                        <a:buClrTx/>
+                        <a:buSzTx/>
+                        <a:buFontTx/>
+                        <a:buNone/>
+                        <a:tabLst/>
+                        <a:defRPr/>
+                      </a:pPr>
+                      <a:r>
+                        <a:rPr kumimoji="0" lang="en-US" altLang="ko-KR" sz="2000" b="0" i="0" u="none" strike="noStrike" kern="1200" cap="none" spc="0" normalizeH="0" baseline="0" noProof="0" dirty="0">
+                          <a:ln>
+                            <a:noFill/>
+                          </a:ln>
+                          <a:solidFill>
+                            <a:schemeClr val="tx1"/>
+                          </a:solidFill>
+                          <a:effectLst/>
+                          <a:uLnTx/>
+                          <a:uFillTx/>
+                          <a:latin typeface="Segoe UI"/>
+                          <a:ea typeface="+mn-ea"/>
+                          <a:cs typeface="+mn-cs"/>
+                        </a:rPr>
+                        <a:t>0.01</a:t>
+                      </a:r>
+                      <a:endParaRPr kumimoji="0" lang="ko-KR" altLang="en-US" sz="2000" b="0" i="0" u="none" strike="noStrike" kern="1200" cap="none" spc="0" normalizeH="0" baseline="0" noProof="0" dirty="0">
+                        <a:ln>
+                          <a:noFill/>
+                        </a:ln>
+                        <a:solidFill>
+                          <a:schemeClr val="tx1"/>
+                        </a:solidFill>
+                        <a:effectLst/>
+                        <a:uLnTx/>
+                        <a:uFillTx/>
+                        <a:latin typeface="Segoe UI"/>
+                        <a:ea typeface="+mn-ea"/>
+                        <a:cs typeface="+mn-cs"/>
+                      </a:endParaRPr>
+                    </a:p>
+                  </a:txBody>
+                  <a:tcPr marL="86797" marR="86797" marT="43397" marB="43397"/>
+                </a:tc>
+                <a:extLst>
+                  <a:ext uri="{0D108BD9-81ED-4DB2-BD59-A6C34878D82A}">
+                    <a16:rowId xmlns:a16="http://schemas.microsoft.com/office/drawing/2014/main" val="844891742"/>
+                  </a:ext>
+                </a:extLst>
+              </a:tr>
+              <a:tr h="1068221">
+                <a:tc>
+                  <a:txBody>
+                    <a:bodyPr/>
+                    <a:lstStyle/>
+                    <a:p>
+                      <a:pPr marL="0" marR="0" lvl="0" indent="0" algn="ctr" defTabSz="914400" rtl="0" eaLnBrk="1" fontAlgn="auto" latinLnBrk="1" hangingPunct="1">
+                        <a:lnSpc>
+                          <a:spcPct val="100000"/>
+                        </a:lnSpc>
+                        <a:spcBef>
+                          <a:spcPts val="0"/>
+                        </a:spcBef>
+                        <a:spcAft>
+                          <a:spcPts val="0"/>
+                        </a:spcAft>
+                        <a:buClrTx/>
+                        <a:buSzTx/>
+                        <a:buFontTx/>
+                        <a:buNone/>
+                        <a:tabLst/>
+                        <a:defRPr/>
+                      </a:pPr>
+                      <a:r>
+                        <a:rPr kumimoji="0" lang="en-US" altLang="ko-KR" sz="2000" b="0" i="0" u="none" strike="noStrike" kern="1200" cap="none" spc="0" normalizeH="0" baseline="0" noProof="0" dirty="0">
+                          <a:ln>
+                            <a:noFill/>
+                          </a:ln>
+                          <a:solidFill>
+                            <a:schemeClr val="tx1"/>
+                          </a:solidFill>
+                          <a:effectLst/>
+                          <a:uLnTx/>
+                          <a:uFillTx/>
+                          <a:latin typeface="Segoe UI"/>
+                          <a:ea typeface="+mn-ea"/>
+                          <a:cs typeface="+mn-cs"/>
+                        </a:rPr>
+                        <a:t>0.88</a:t>
+                      </a:r>
+                      <a:endParaRPr kumimoji="0" lang="ko-KR" altLang="en-US" sz="2000" b="0" i="0" u="none" strike="noStrike" kern="1200" cap="none" spc="0" normalizeH="0" baseline="0" noProof="0" dirty="0">
+                        <a:ln>
+                          <a:noFill/>
+                        </a:ln>
+                        <a:solidFill>
+                          <a:schemeClr val="tx1"/>
+                        </a:solidFill>
+                        <a:effectLst/>
+                        <a:uLnTx/>
+                        <a:uFillTx/>
+                        <a:latin typeface="Segoe UI"/>
+                        <a:ea typeface="+mn-ea"/>
+                        <a:cs typeface="+mn-cs"/>
+                      </a:endParaRPr>
+                    </a:p>
+                  </a:txBody>
+                  <a:tcPr marL="86797" marR="86797" marT="43397" marB="43397"/>
+                </a:tc>
+                <a:tc>
+                  <a:txBody>
+                    <a:bodyPr/>
+                    <a:lstStyle/>
+                    <a:p>
+                      <a:pPr marL="0" marR="0" lvl="0" indent="0" algn="ctr" defTabSz="914400" rtl="0" eaLnBrk="1" fontAlgn="auto" latinLnBrk="1" hangingPunct="1">
+                        <a:lnSpc>
+                          <a:spcPct val="100000"/>
+                        </a:lnSpc>
+                        <a:spcBef>
+                          <a:spcPts val="0"/>
+                        </a:spcBef>
+                        <a:spcAft>
+                          <a:spcPts val="0"/>
+                        </a:spcAft>
+                        <a:buClrTx/>
+                        <a:buSzTx/>
+                        <a:buFontTx/>
+                        <a:buNone/>
+                        <a:tabLst/>
+                        <a:defRPr/>
+                      </a:pPr>
+                      <a:r>
+                        <a:rPr kumimoji="0" lang="en-US" altLang="ko-KR" sz="2000" b="0" i="0" u="none" strike="noStrike" kern="1200" cap="none" spc="0" normalizeH="0" baseline="0" noProof="0" dirty="0">
+                          <a:ln>
+                            <a:noFill/>
+                          </a:ln>
+                          <a:solidFill>
+                            <a:schemeClr val="tx1"/>
+                          </a:solidFill>
+                          <a:effectLst/>
+                          <a:uLnTx/>
+                          <a:uFillTx/>
+                          <a:latin typeface="Segoe UI"/>
+                          <a:ea typeface="+mn-ea"/>
+                          <a:cs typeface="+mn-cs"/>
+                        </a:rPr>
+                        <a:t>0.95</a:t>
+                      </a:r>
+                      <a:endParaRPr kumimoji="0" lang="ko-KR" altLang="en-US" sz="2000" b="0" i="0" u="none" strike="noStrike" kern="1200" cap="none" spc="0" normalizeH="0" baseline="0" noProof="0" dirty="0">
+                        <a:ln>
+                          <a:noFill/>
+                        </a:ln>
+                        <a:solidFill>
+                          <a:schemeClr val="tx1"/>
+                        </a:solidFill>
+                        <a:effectLst/>
+                        <a:uLnTx/>
+                        <a:uFillTx/>
+                        <a:latin typeface="Segoe UI"/>
+                        <a:ea typeface="+mn-ea"/>
+                        <a:cs typeface="+mn-cs"/>
+                      </a:endParaRPr>
+                    </a:p>
+                  </a:txBody>
+                  <a:tcPr marL="86797" marR="86797" marT="43397" marB="43397"/>
+                </a:tc>
+                <a:tc>
+                  <a:txBody>
+                    <a:bodyPr/>
+                    <a:lstStyle/>
+                    <a:p>
+                      <a:pPr marL="0" marR="0" lvl="0" indent="0" algn="ctr" defTabSz="914400" rtl="0" eaLnBrk="1" fontAlgn="auto" latinLnBrk="1" hangingPunct="1">
+                        <a:lnSpc>
+                          <a:spcPct val="100000"/>
+                        </a:lnSpc>
+                        <a:spcBef>
+                          <a:spcPts val="0"/>
+                        </a:spcBef>
+                        <a:spcAft>
+                          <a:spcPts val="0"/>
+                        </a:spcAft>
+                        <a:buClrTx/>
+                        <a:buSzTx/>
+                        <a:buFontTx/>
+                        <a:buNone/>
+                        <a:tabLst/>
+                        <a:defRPr/>
+                      </a:pPr>
+                      <a:r>
+                        <a:rPr kumimoji="0" lang="en-US" altLang="ko-KR" sz="2000" b="0" i="0" u="none" strike="noStrike" kern="1200" cap="none" spc="0" normalizeH="0" baseline="0" noProof="0" dirty="0">
+                          <a:ln>
+                            <a:noFill/>
+                          </a:ln>
+                          <a:solidFill>
+                            <a:schemeClr val="tx1"/>
+                          </a:solidFill>
+                          <a:effectLst/>
+                          <a:uLnTx/>
+                          <a:uFillTx/>
+                          <a:latin typeface="Segoe UI"/>
+                          <a:ea typeface="+mn-ea"/>
+                          <a:cs typeface="+mn-cs"/>
+                        </a:rPr>
+                        <a:t>0.05</a:t>
+                      </a:r>
+                      <a:endParaRPr kumimoji="0" lang="ko-KR" altLang="en-US" sz="2000" b="0" i="0" u="none" strike="noStrike" kern="1200" cap="none" spc="0" normalizeH="0" baseline="0" noProof="0" dirty="0">
+                        <a:ln>
+                          <a:noFill/>
+                        </a:ln>
+                        <a:solidFill>
+                          <a:schemeClr val="tx1"/>
+                        </a:solidFill>
+                        <a:effectLst/>
+                        <a:uLnTx/>
+                        <a:uFillTx/>
+                        <a:latin typeface="Segoe UI"/>
+                        <a:ea typeface="+mn-ea"/>
+                        <a:cs typeface="+mn-cs"/>
+                      </a:endParaRPr>
+                    </a:p>
+                  </a:txBody>
+                  <a:tcPr marL="86797" marR="86797" marT="43397" marB="43397"/>
+                </a:tc>
+                <a:extLst>
+                  <a:ext uri="{0D108BD9-81ED-4DB2-BD59-A6C34878D82A}">
+                    <a16:rowId xmlns:a16="http://schemas.microsoft.com/office/drawing/2014/main" val="4097710734"/>
+                  </a:ext>
+                </a:extLst>
+              </a:tr>
+              <a:tr h="1068221">
+                <a:tc>
+                  <a:txBody>
+                    <a:bodyPr/>
+                    <a:lstStyle/>
+                    <a:p>
+                      <a:pPr marL="0" marR="0" lvl="0" indent="0" algn="ctr" defTabSz="914400" rtl="0" eaLnBrk="1" fontAlgn="auto" latinLnBrk="1" hangingPunct="1">
+                        <a:lnSpc>
+                          <a:spcPct val="100000"/>
+                        </a:lnSpc>
+                        <a:spcBef>
+                          <a:spcPts val="0"/>
+                        </a:spcBef>
+                        <a:spcAft>
+                          <a:spcPts val="0"/>
+                        </a:spcAft>
+                        <a:buClrTx/>
+                        <a:buSzTx/>
+                        <a:buFontTx/>
+                        <a:buNone/>
+                        <a:tabLst/>
+                        <a:defRPr/>
+                      </a:pPr>
+                      <a:r>
+                        <a:rPr kumimoji="0" lang="en-US" altLang="ko-KR" sz="2000" b="0" i="0" u="none" strike="noStrike" kern="1200" cap="none" spc="0" normalizeH="0" baseline="0" noProof="0" dirty="0">
+                          <a:ln>
+                            <a:noFill/>
+                          </a:ln>
+                          <a:solidFill>
+                            <a:schemeClr val="tx1"/>
+                          </a:solidFill>
+                          <a:effectLst/>
+                          <a:uLnTx/>
+                          <a:uFillTx/>
+                          <a:latin typeface="Segoe UI"/>
+                          <a:ea typeface="+mn-ea"/>
+                          <a:cs typeface="+mn-cs"/>
+                        </a:rPr>
+                        <a:t>0.02</a:t>
+                      </a:r>
+                      <a:endParaRPr kumimoji="0" lang="ko-KR" altLang="en-US" sz="2000" b="0" i="0" u="none" strike="noStrike" kern="1200" cap="none" spc="0" normalizeH="0" baseline="0" noProof="0" dirty="0">
+                        <a:ln>
+                          <a:noFill/>
+                        </a:ln>
+                        <a:solidFill>
+                          <a:schemeClr val="tx1"/>
+                        </a:solidFill>
+                        <a:effectLst/>
+                        <a:uLnTx/>
+                        <a:uFillTx/>
+                        <a:latin typeface="Segoe UI"/>
+                        <a:ea typeface="+mn-ea"/>
+                        <a:cs typeface="+mn-cs"/>
+                      </a:endParaRPr>
+                    </a:p>
+                  </a:txBody>
+                  <a:tcPr marL="86797" marR="86797" marT="43397" marB="43397"/>
+                </a:tc>
+                <a:tc>
+                  <a:txBody>
+                    <a:bodyPr/>
+                    <a:lstStyle/>
+                    <a:p>
+                      <a:pPr marL="0" marR="0" lvl="0" indent="0" algn="ctr" defTabSz="914400" rtl="0" eaLnBrk="1" fontAlgn="auto" latinLnBrk="1" hangingPunct="1">
+                        <a:lnSpc>
+                          <a:spcPct val="100000"/>
+                        </a:lnSpc>
+                        <a:spcBef>
+                          <a:spcPts val="0"/>
+                        </a:spcBef>
+                        <a:spcAft>
+                          <a:spcPts val="0"/>
+                        </a:spcAft>
+                        <a:buClrTx/>
+                        <a:buSzTx/>
+                        <a:buFontTx/>
+                        <a:buNone/>
+                        <a:tabLst/>
+                        <a:defRPr/>
+                      </a:pPr>
+                      <a:r>
+                        <a:rPr kumimoji="0" lang="en-US" altLang="ko-KR" sz="2000" b="0" i="0" u="none" strike="noStrike" kern="1200" cap="none" spc="0" normalizeH="0" baseline="0" noProof="0" dirty="0">
+                          <a:ln>
+                            <a:noFill/>
+                          </a:ln>
+                          <a:solidFill>
+                            <a:schemeClr val="tx1"/>
+                          </a:solidFill>
+                          <a:effectLst/>
+                          <a:uLnTx/>
+                          <a:uFillTx/>
+                          <a:latin typeface="Segoe UI"/>
+                          <a:ea typeface="+mn-ea"/>
+                          <a:cs typeface="+mn-cs"/>
+                        </a:rPr>
+                        <a:t>0.03</a:t>
+                      </a:r>
+                      <a:endParaRPr kumimoji="0" lang="ko-KR" altLang="en-US" sz="2000" b="0" i="0" u="none" strike="noStrike" kern="1200" cap="none" spc="0" normalizeH="0" baseline="0" noProof="0" dirty="0">
+                        <a:ln>
+                          <a:noFill/>
+                        </a:ln>
+                        <a:solidFill>
+                          <a:schemeClr val="tx1"/>
+                        </a:solidFill>
+                        <a:effectLst/>
+                        <a:uLnTx/>
+                        <a:uFillTx/>
+                        <a:latin typeface="Segoe UI"/>
+                        <a:ea typeface="+mn-ea"/>
+                        <a:cs typeface="+mn-cs"/>
+                      </a:endParaRPr>
+                    </a:p>
+                  </a:txBody>
+                  <a:tcPr marL="86797" marR="86797" marT="43397" marB="43397"/>
+                </a:tc>
+                <a:tc>
+                  <a:txBody>
+                    <a:bodyPr/>
+                    <a:lstStyle/>
+                    <a:p>
+                      <a:pPr marL="0" marR="0" lvl="0" indent="0" algn="ctr" defTabSz="914400" rtl="0" eaLnBrk="1" fontAlgn="auto" latinLnBrk="1" hangingPunct="1">
+                        <a:lnSpc>
+                          <a:spcPct val="100000"/>
+                        </a:lnSpc>
+                        <a:spcBef>
+                          <a:spcPts val="0"/>
+                        </a:spcBef>
+                        <a:spcAft>
+                          <a:spcPts val="0"/>
+                        </a:spcAft>
+                        <a:buClrTx/>
+                        <a:buSzTx/>
+                        <a:buFontTx/>
+                        <a:buNone/>
+                        <a:tabLst/>
+                        <a:defRPr/>
+                      </a:pPr>
+                      <a:r>
+                        <a:rPr kumimoji="0" lang="en-US" altLang="ko-KR" sz="2000" b="0" i="0" u="none" strike="noStrike" kern="1200" cap="none" spc="0" normalizeH="0" baseline="0" noProof="0" dirty="0">
+                          <a:ln>
+                            <a:noFill/>
+                          </a:ln>
+                          <a:solidFill>
+                            <a:schemeClr val="tx1"/>
+                          </a:solidFill>
+                          <a:effectLst/>
+                          <a:uLnTx/>
+                          <a:uFillTx/>
+                          <a:latin typeface="Segoe UI"/>
+                          <a:ea typeface="+mn-ea"/>
+                          <a:cs typeface="+mn-cs"/>
+                        </a:rPr>
+                        <a:t>0.01</a:t>
+                      </a:r>
+                      <a:endParaRPr kumimoji="0" lang="ko-KR" altLang="en-US" sz="2000" b="0" i="0" u="none" strike="noStrike" kern="1200" cap="none" spc="0" normalizeH="0" baseline="0" noProof="0" dirty="0">
+                        <a:ln>
+                          <a:noFill/>
+                        </a:ln>
+                        <a:solidFill>
+                          <a:schemeClr val="tx1"/>
+                        </a:solidFill>
+                        <a:effectLst/>
+                        <a:uLnTx/>
+                        <a:uFillTx/>
+                        <a:latin typeface="Segoe UI"/>
+                        <a:ea typeface="+mn-ea"/>
+                        <a:cs typeface="+mn-cs"/>
+                      </a:endParaRPr>
+                    </a:p>
+                  </a:txBody>
+                  <a:tcPr marL="86797" marR="86797" marT="43397" marB="43397"/>
+                </a:tc>
+                <a:extLst>
+                  <a:ext uri="{0D108BD9-81ED-4DB2-BD59-A6C34878D82A}">
+                    <a16:rowId xmlns:a16="http://schemas.microsoft.com/office/drawing/2014/main" val="3232772719"/>
+                  </a:ext>
+                </a:extLst>
+              </a:tr>
+            </a:tbl>
+          </a:graphicData>
+        </a:graphic>
+      </p:graphicFrame>
+    </p:spTree>
+    <p:extLst>
+      <p:ext uri="{BB962C8B-B14F-4D97-AF65-F5344CB8AC3E}">
+        <p14:creationId xmlns:p14="http://schemas.microsoft.com/office/powerpoint/2010/main" val="2776669898"/>
+      </p:ext>
+    </p:extLst>
+  </p:cSld>
+  <p:clrMapOvr>
+    <a:masterClrMapping/>
+  </p:clrMapOvr>
+  <p:timing>
+    <p:tnLst>
+      <p:par>
+        <p:cTn id="1" dur="indefinite" restart="never" nodeType="tmRoot">
+          <p:childTnLst>
+            <p:seq concurrent="1" nextAc="seek">
+              <p:cTn id="2" dur="indefinite" nodeType="mainSeq">
+                <p:childTnLst>
+                  <p:par>
+                    <p:cTn id="3" fill="hold">
+                      <p:stCondLst>
+                        <p:cond delay="indefinite"/>
+                      </p:stCondLst>
+                      <p:childTnLst>
+                        <p:par>
+                          <p:cTn id="4" fill="hold">
+                            <p:stCondLst>
+                              <p:cond delay="0"/>
+                            </p:stCondLst>
+                            <p:childTnLst>
+                              <p:par>
+                                <p:cTn id="5" presetID="1" presetClass="entr" presetSubtype="0" fill="hold" nodeType="clickEffect">
+                                  <p:stCondLst>
+                                    <p:cond delay="0"/>
+                                  </p:stCondLst>
+                                  <p:childTnLst>
+                                    <p:set>
+                                      <p:cBhvr>
+                                        <p:cTn id="6" dur="1" fill="hold">
+                                          <p:stCondLst>
+                                            <p:cond delay="0"/>
+                                          </p:stCondLst>
+                                        </p:cTn>
+                                        <p:tgtEl>
+                                          <p:spTgt spid="10"/>
+                                        </p:tgtEl>
+                                        <p:attrNameLst>
+                                          <p:attrName>style.visibility</p:attrName>
+                                        </p:attrNameLst>
+                                      </p:cBhvr>
+                                      <p:to>
+                                        <p:strVal val="visible"/>
+                                      </p:to>
+                                    </p:set>
+                                  </p:childTnLst>
+                                </p:cTn>
+                              </p:par>
+                              <p:par>
+                                <p:cTn id="7" presetID="1" presetClass="entr" presetSubtype="0" fill="hold" grpId="0" nodeType="withEffect">
+                                  <p:stCondLst>
+                                    <p:cond delay="0"/>
+                                  </p:stCondLst>
+                                  <p:childTnLst>
+                                    <p:set>
+                                      <p:cBhvr>
+                                        <p:cTn id="8" dur="1" fill="hold">
+                                          <p:stCondLst>
+                                            <p:cond delay="0"/>
+                                          </p:stCondLst>
+                                        </p:cTn>
+                                        <p:tgtEl>
+                                          <p:spTgt spid="13"/>
+                                        </p:tgtEl>
+                                        <p:attrNameLst>
+                                          <p:attrName>style.visibility</p:attrName>
+                                        </p:attrNameLst>
+                                      </p:cBhvr>
+                                      <p:to>
+                                        <p:strVal val="visible"/>
+                                      </p:to>
+                                    </p:set>
+                                  </p:childTnLst>
+                                </p:cTn>
+                              </p:par>
+                            </p:childTnLst>
+                          </p:cTn>
+                        </p:par>
+                      </p:childTnLst>
+                    </p:cTn>
+                  </p:par>
+                  <p:par>
+                    <p:cTn id="9" fill="hold">
+                      <p:stCondLst>
+                        <p:cond delay="indefinite"/>
+                      </p:stCondLst>
+                      <p:childTnLst>
+                        <p:par>
+                          <p:cTn id="10" fill="hold">
+                            <p:stCondLst>
+                              <p:cond delay="0"/>
+                            </p:stCondLst>
+                            <p:childTnLst>
+                              <p:par>
+                                <p:cTn id="11" presetID="1" presetClass="entr" presetSubtype="0" fill="hold" nodeType="clickEffect">
+                                  <p:stCondLst>
+                                    <p:cond delay="0"/>
+                                  </p:stCondLst>
+                                  <p:childTnLst>
+                                    <p:set>
+                                      <p:cBhvr>
+                                        <p:cTn id="12" dur="1" fill="hold">
+                                          <p:stCondLst>
+                                            <p:cond delay="0"/>
+                                          </p:stCondLst>
+                                        </p:cTn>
+                                        <p:tgtEl>
+                                          <p:spTgt spid="12"/>
+                                        </p:tgtEl>
+                                        <p:attrNameLst>
+                                          <p:attrName>style.visibility</p:attrName>
+                                        </p:attrNameLst>
+                                      </p:cBhvr>
+                                      <p:to>
+                                        <p:strVal val="visible"/>
+                                      </p:to>
+                                    </p:set>
+                                  </p:childTnLst>
+                                </p:cTn>
+                              </p:par>
+                            </p:childTnLst>
+                          </p:cTn>
+                        </p:par>
+                      </p:childTnLst>
+                    </p:cTn>
+                  </p:par>
+                </p:childTnLst>
+              </p:cTn>
+              <p:prevCondLst>
+                <p:cond evt="onPrev" delay="0">
+                  <p:tgtEl>
+                    <p:sldTgt/>
+                  </p:tgtEl>
+                </p:cond>
+              </p:prevCondLst>
+              <p:nextCondLst>
+                <p:cond evt="onNext" delay="0">
+                  <p:tgtEl>
+                    <p:sldTgt/>
+                  </p:tgtEl>
+                </p:cond>
+              </p:nextCondLst>
+            </p:seq>
+          </p:childTnLst>
+        </p:cTn>
+      </p:par>
+    </p:tnLst>
+    <p:bldLst>
+      <p:bldP spid="13" grpId="0"/>
+    </p:bldLst>
+  </p:timing>
+</p:sld>
+</file>
+
+<file path=ppt/slides/slide16.xml><?xml version="1.0" encoding="utf-8"?>
+<p:sld xmlns:a="http://schemas.openxmlformats.org/drawingml/2006/main" xmlns:r="http://schemas.openxmlformats.org/officeDocument/2006/relationships" xmlns:p="http://schemas.openxmlformats.org/presentationml/2006/main">
+  <p:cSld>
+    <p:spTree>
+      <p:nvGrpSpPr>
+        <p:cNvPr id="1" name="">
+          <a:extLst>
+            <a:ext uri="{FF2B5EF4-FFF2-40B4-BE49-F238E27FC236}">
               <a16:creationId xmlns:a16="http://schemas.microsoft.com/office/drawing/2014/main" id="{F104C44D-F297-6601-F332-F8D92566EC1A}"/>
             </a:ext>
           </a:extLst>
@@ -5303,7 +8845,7 @@
             <a:fld id="{D57F1E4F-1CFF-5643-939E-217C01CDF565}" type="slidenum">
               <a:rPr lang="en-US" smtClean="0"/>
               <a:pPr/>
-              <a:t>13</a:t>
+              <a:t>16</a:t>
             </a:fld>
             <a:endParaRPr lang="en-US" dirty="0"/>
           </a:p>
@@ -5914,8 +9456,8 @@
           </a:p>
         </p:txBody>
       </p:sp>
-      <mc:AlternateContent xmlns:mc="http://schemas.openxmlformats.org/markup-compatibility/2006">
-        <mc:Choice xmlns:a14="http://schemas.microsoft.com/office/drawing/2010/main" Requires="a14">
+      <mc:AlternateContent xmlns:mc="http://schemas.openxmlformats.org/markup-compatibility/2006" xmlns:a14="http://schemas.microsoft.com/office/drawing/2010/main">
+        <mc:Choice Requires="a14">
           <p:sp>
             <p:nvSpPr>
               <p:cNvPr id="18" name="TextBox 17">
@@ -5949,7 +9491,7 @@
                     <m:sSub>
                       <m:sSubPr>
                         <m:ctrlPr>
-                          <a:rPr lang="ko-KR" altLang="en-US" sz="2000" smtClean="0">
+                          <a:rPr lang="ko-KR" altLang="en-US" sz="2000" i="1" smtClean="0">
                             <a:latin typeface="Cambria Math" panose="02040503050406030204" pitchFamily="18" charset="0"/>
                           </a:rPr>
                         </m:ctrlPr>
@@ -6026,7 +9568,7 @@
             </p:txBody>
           </p:sp>
         </mc:Choice>
-        <mc:Fallback>
+        <mc:Fallback xmlns="">
           <p:sp>
             <p:nvSpPr>
               <p:cNvPr id="18" name="TextBox 17">
@@ -6071,8 +9613,8 @@
           </p:sp>
         </mc:Fallback>
       </mc:AlternateContent>
-      <mc:AlternateContent xmlns:mc="http://schemas.openxmlformats.org/markup-compatibility/2006">
-        <mc:Choice xmlns:a14="http://schemas.microsoft.com/office/drawing/2010/main" Requires="a14">
+      <mc:AlternateContent xmlns:mc="http://schemas.openxmlformats.org/markup-compatibility/2006" xmlns:a14="http://schemas.microsoft.com/office/drawing/2010/main">
+        <mc:Choice Requires="a14">
           <p:sp>
             <p:nvSpPr>
               <p:cNvPr id="19" name="TextBox 18">
@@ -6171,7 +9713,7 @@
             </p:txBody>
           </p:sp>
         </mc:Choice>
-        <mc:Fallback>
+        <mc:Fallback xmlns="">
           <p:sp>
             <p:nvSpPr>
               <p:cNvPr id="19" name="TextBox 18">
@@ -8412,7 +11954,7 @@
         <p:spPr>
           <a:xfrm>
             <a:off x="571802" y="1248422"/>
-            <a:ext cx="11144553" cy="880819"/>
+            <a:ext cx="11144553" cy="793166"/>
           </a:xfrm>
           <a:prstGeom prst="rect">
             <a:avLst/>
@@ -8431,76 +11973,139 @@
               </a:lnSpc>
             </a:pPr>
             <a:r>
-              <a:rPr lang="en-US" altLang="ko-KR" dirty="0">
+              <a:rPr lang="en-US" altLang="ko-KR" sz="1600" dirty="0">
                 <a:latin typeface="D2Coding" panose="020B0609020101020101" pitchFamily="49" charset="-127"/>
                 <a:ea typeface="D2Coding" panose="020B0609020101020101" pitchFamily="49" charset="-127"/>
               </a:rPr>
               <a:t>YOLO</a:t>
             </a:r>
             <a:r>
-              <a:rPr lang="ko-KR" altLang="en-US" dirty="0">
+              <a:rPr lang="ko-KR" altLang="en-US" sz="1600" dirty="0">
                 <a:latin typeface="D2Coding" panose="020B0609020101020101" pitchFamily="49" charset="-127"/>
                 <a:ea typeface="D2Coding" panose="020B0609020101020101" pitchFamily="49" charset="-127"/>
               </a:rPr>
               <a:t>는 새로운</a:t>
             </a:r>
             <a:r>
-              <a:rPr lang="en-US" altLang="ko-KR" dirty="0">
+              <a:rPr lang="en-US" altLang="ko-KR" sz="1600" dirty="0">
                 <a:latin typeface="D2Coding" panose="020B0609020101020101" pitchFamily="49" charset="-127"/>
                 <a:ea typeface="D2Coding" panose="020B0609020101020101" pitchFamily="49" charset="-127"/>
               </a:rPr>
               <a:t> </a:t>
             </a:r>
             <a:r>
-              <a:rPr lang="ko-KR" altLang="en-US" dirty="0">
+              <a:rPr lang="ko-KR" altLang="en-US" sz="1600" dirty="0">
                 <a:latin typeface="D2Coding" panose="020B0609020101020101" pitchFamily="49" charset="-127"/>
                 <a:ea typeface="D2Coding" panose="020B0609020101020101" pitchFamily="49" charset="-127"/>
               </a:rPr>
               <a:t>이미지가 들어오면 가상의 </a:t>
             </a:r>
             <a:r>
-              <a:rPr lang="en-US" altLang="ko-KR" dirty="0">
+              <a:rPr lang="en-US" altLang="ko-KR" sz="1600" dirty="0">
                 <a:latin typeface="D2Coding" panose="020B0609020101020101" pitchFamily="49" charset="-127"/>
                 <a:ea typeface="D2Coding" panose="020B0609020101020101" pitchFamily="49" charset="-127"/>
               </a:rPr>
               <a:t>3 by</a:t>
             </a:r>
             <a:r>
-              <a:rPr lang="ko-KR" altLang="en-US" dirty="0">
+              <a:rPr lang="ko-KR" altLang="en-US" sz="1600" dirty="0">
                 <a:latin typeface="D2Coding" panose="020B0609020101020101" pitchFamily="49" charset="-127"/>
                 <a:ea typeface="D2Coding" panose="020B0609020101020101" pitchFamily="49" charset="-127"/>
               </a:rPr>
               <a:t> </a:t>
             </a:r>
             <a:r>
-              <a:rPr lang="en-US" altLang="ko-KR" dirty="0">
+              <a:rPr lang="en-US" altLang="ko-KR" sz="1600" dirty="0">
                 <a:latin typeface="D2Coding" panose="020B0609020101020101" pitchFamily="49" charset="-127"/>
                 <a:ea typeface="D2Coding" panose="020B0609020101020101" pitchFamily="49" charset="-127"/>
               </a:rPr>
               <a:t>3 </a:t>
             </a:r>
             <a:r>
-              <a:rPr lang="ko-KR" altLang="en-US" dirty="0">
-                <a:latin typeface="D2Coding" panose="020B0609020101020101" pitchFamily="49" charset="-127"/>
-                <a:ea typeface="D2Coding" panose="020B0609020101020101" pitchFamily="49" charset="-127"/>
-              </a:rPr>
-              <a:t>격자를 바탕으로 각 칸마다 물체의 중심이 있는지를 기계적으로 조사하여 </a:t>
-            </a:r>
-            <a:r>
-              <a:rPr lang="en-US" altLang="ko-KR" dirty="0">
+              <a:rPr lang="ko-KR" altLang="en-US" sz="1600" dirty="0">
+                <a:latin typeface="D2Coding" panose="020B0609020101020101" pitchFamily="49" charset="-127"/>
+                <a:ea typeface="D2Coding" panose="020B0609020101020101" pitchFamily="49" charset="-127"/>
+              </a:rPr>
+              <a:t>격자를 바탕으로 각 칸마다 물체의 중심이 있는지를 </a:t>
+            </a:r>
+            <a:r>
+              <a:rPr lang="en-US" altLang="ko-KR" sz="1600" dirty="0">
+                <a:latin typeface="D2Coding" panose="020B0609020101020101" pitchFamily="49" charset="-127"/>
+                <a:ea typeface="D2Coding" panose="020B0609020101020101" pitchFamily="49" charset="-127"/>
+              </a:rPr>
+              <a:t>CNN</a:t>
+            </a:r>
+            <a:r>
+              <a:rPr lang="ko-KR" altLang="en-US" sz="1600" dirty="0">
+                <a:latin typeface="D2Coding" panose="020B0609020101020101" pitchFamily="49" charset="-127"/>
+                <a:ea typeface="D2Coding" panose="020B0609020101020101" pitchFamily="49" charset="-127"/>
+              </a:rPr>
+              <a:t>을 수행하여 각 </a:t>
+            </a:r>
+            <a:r>
+              <a:rPr lang="en-US" altLang="ko-KR" sz="1600" dirty="0">
+                <a:latin typeface="D2Coding" panose="020B0609020101020101" pitchFamily="49" charset="-127"/>
+                <a:ea typeface="D2Coding" panose="020B0609020101020101" pitchFamily="49" charset="-127"/>
+              </a:rPr>
+              <a:t>Cell(gird)</a:t>
+            </a:r>
+            <a:r>
+              <a:rPr lang="ko-KR" altLang="en-US" sz="1600" dirty="0">
+                <a:latin typeface="D2Coding" panose="020B0609020101020101" pitchFamily="49" charset="-127"/>
+                <a:ea typeface="D2Coding" panose="020B0609020101020101" pitchFamily="49" charset="-127"/>
+              </a:rPr>
+              <a:t>에 물체가 있을 확률</a:t>
+            </a:r>
+            <a:r>
+              <a:rPr lang="en-US" altLang="ko-KR" sz="1600" dirty="0">
+                <a:latin typeface="D2Coding" panose="020B0609020101020101" pitchFamily="49" charset="-127"/>
+                <a:ea typeface="D2Coding" panose="020B0609020101020101" pitchFamily="49" charset="-127"/>
+              </a:rPr>
+              <a:t>(</a:t>
+            </a:r>
+            <a:r>
+              <a:rPr lang="ko-KR" altLang="en-US" sz="1600" dirty="0" err="1">
+                <a:latin typeface="D2Coding" panose="020B0609020101020101" pitchFamily="49" charset="-127"/>
+                <a:ea typeface="D2Coding" panose="020B0609020101020101" pitchFamily="49" charset="-127"/>
+              </a:rPr>
+              <a:t>시그모이드</a:t>
+            </a:r>
+            <a:r>
+              <a:rPr lang="ko-KR" altLang="en-US" sz="1600" dirty="0">
+                <a:latin typeface="D2Coding" panose="020B0609020101020101" pitchFamily="49" charset="-127"/>
+                <a:ea typeface="D2Coding" panose="020B0609020101020101" pitchFamily="49" charset="-127"/>
+              </a:rPr>
+              <a:t> 값</a:t>
+            </a:r>
+            <a:r>
+              <a:rPr lang="en-US" altLang="ko-KR" sz="1600" dirty="0">
+                <a:latin typeface="D2Coding" panose="020B0609020101020101" pitchFamily="49" charset="-127"/>
+                <a:ea typeface="D2Coding" panose="020B0609020101020101" pitchFamily="49" charset="-127"/>
+              </a:rPr>
+              <a:t>)</a:t>
+            </a:r>
+            <a:r>
+              <a:rPr lang="ko-KR" altLang="en-US" sz="1600" dirty="0">
+                <a:latin typeface="D2Coding" panose="020B0609020101020101" pitchFamily="49" charset="-127"/>
+                <a:ea typeface="D2Coding" panose="020B0609020101020101" pitchFamily="49" charset="-127"/>
+              </a:rPr>
+              <a:t>을 구하여 </a:t>
+            </a:r>
+            <a:r>
+              <a:rPr lang="en-US" altLang="ko-KR" sz="1600" dirty="0">
                 <a:latin typeface="D2Coding" panose="020B0609020101020101" pitchFamily="49" charset="-127"/>
                 <a:ea typeface="D2Coding" panose="020B0609020101020101" pitchFamily="49" charset="-127"/>
               </a:rPr>
               <a:t>P(Object) </a:t>
             </a:r>
             <a:r>
-              <a:rPr lang="ko-KR" altLang="en-US" dirty="0">
+              <a:rPr lang="ko-KR" altLang="en-US" sz="1600" dirty="0">
                 <a:latin typeface="D2Coding" panose="020B0609020101020101" pitchFamily="49" charset="-127"/>
                 <a:ea typeface="D2Coding" panose="020B0609020101020101" pitchFamily="49" charset="-127"/>
               </a:rPr>
               <a:t>값을 생성</a:t>
             </a:r>
-            <a:endParaRPr lang="en-US" altLang="ko-KR" dirty="0">
+            <a:endParaRPr lang="en-US" altLang="ko-KR" sz="1600" dirty="0">
               <a:latin typeface="D2Coding" panose="020B0609020101020101" pitchFamily="49" charset="-127"/>
               <a:ea typeface="D2Coding" panose="020B0609020101020101" pitchFamily="49" charset="-127"/>
             </a:endParaRPr>
@@ -8590,13 +12195,13 @@
           <p:nvPr>
             <p:extLst>
               <p:ext uri="{D42A27DB-BD31-4B8C-83A1-F6EECF244321}">
-                <p14:modId xmlns:p14="http://schemas.microsoft.com/office/powerpoint/2010/main" val="2370672187"/>
+                <p14:modId xmlns:p14="http://schemas.microsoft.com/office/powerpoint/2010/main" val="1343246348"/>
               </p:ext>
             </p:extLst>
           </p:nvPr>
         </p:nvGraphicFramePr>
         <p:xfrm>
-          <a:off x="5962647" y="3090009"/>
+          <a:off x="5219697" y="3090009"/>
           <a:ext cx="3790953" cy="3204663"/>
         </p:xfrm>
         <a:graphic>
@@ -9162,7 +12767,7 @@
         </p:blipFill>
         <p:spPr>
           <a:xfrm>
-            <a:off x="8580794" y="5313781"/>
+            <a:off x="7837844" y="5313781"/>
             <a:ext cx="1047565" cy="1047565"/>
           </a:xfrm>
           <a:prstGeom prst="rect">
@@ -9184,7 +12789,7 @@
         </p:nvSpPr>
         <p:spPr>
           <a:xfrm>
-            <a:off x="5962646" y="2647934"/>
+            <a:off x="5219696" y="2647934"/>
             <a:ext cx="3790953" cy="369332"/>
           </a:xfrm>
           <a:prstGeom prst="rect">
@@ -9758,7 +13363,7 @@
         </p:nvSpPr>
         <p:spPr>
           <a:xfrm>
-            <a:off x="9915411" y="3090008"/>
+            <a:off x="9094624" y="3090008"/>
             <a:ext cx="1827652" cy="584775"/>
           </a:xfrm>
           <a:prstGeom prst="rect">
@@ -9780,6 +13385,193 @@
               <a:t>격자 크기는 연구자가 결정</a:t>
             </a:r>
             <a:endParaRPr lang="ko-KR" altLang="en-US" sz="1600" dirty="0"/>
+          </a:p>
+        </p:txBody>
+      </p:sp>
+      <p:sp>
+        <p:nvSpPr>
+          <p:cNvPr id="15" name="TextBox 14">
+            <a:extLst>
+              <a:ext uri="{FF2B5EF4-FFF2-40B4-BE49-F238E27FC236}">
+                <a16:creationId xmlns:a16="http://schemas.microsoft.com/office/drawing/2014/main" id="{161E178B-AE3A-7F13-F919-7614F770271A}"/>
+              </a:ext>
+            </a:extLst>
+          </p:cNvPr>
+          <p:cNvSpPr txBox="1"/>
+          <p:nvPr/>
+        </p:nvSpPr>
+        <p:spPr>
+          <a:xfrm>
+            <a:off x="9094624" y="3912603"/>
+            <a:ext cx="2838773" cy="2123658"/>
+          </a:xfrm>
+          <a:prstGeom prst="rect">
+            <a:avLst/>
+          </a:prstGeom>
+          <a:noFill/>
+        </p:spPr>
+        <p:txBody>
+          <a:bodyPr wrap="square">
+            <a:spAutoFit/>
+          </a:bodyPr>
+          <a:lstStyle/>
+          <a:p>
+            <a:pPr marL="171450" indent="-171450">
+              <a:buFont typeface="Wingdings" panose="05000000000000000000" pitchFamily="2" charset="2"/>
+              <a:buChar char="§"/>
+            </a:pPr>
+            <a:r>
+              <a:rPr lang="ko-KR" altLang="en-US" sz="1200" dirty="0" err="1">
+                <a:latin typeface="D2Coding" panose="020B0609020101020101" pitchFamily="49" charset="-127"/>
+                <a:ea typeface="D2Coding" panose="020B0609020101020101" pitchFamily="49" charset="-127"/>
+              </a:rPr>
+              <a:t>CNN은</a:t>
+            </a:r>
+            <a:r>
+              <a:rPr lang="ko-KR" altLang="en-US" sz="1200" dirty="0">
+                <a:latin typeface="D2Coding" panose="020B0609020101020101" pitchFamily="49" charset="-127"/>
+                <a:ea typeface="D2Coding" panose="020B0609020101020101" pitchFamily="49" charset="-127"/>
+              </a:rPr>
+              <a:t> 물체가 있는지 </a:t>
+            </a:r>
+            <a:r>
+              <a:rPr lang="ko-KR" altLang="en-US" sz="1200" dirty="0" err="1">
+                <a:latin typeface="D2Coding" panose="020B0609020101020101" pitchFamily="49" charset="-127"/>
+                <a:ea typeface="D2Coding" panose="020B0609020101020101" pitchFamily="49" charset="-127"/>
+              </a:rPr>
+              <a:t>없는지만</a:t>
+            </a:r>
+            <a:r>
+              <a:rPr lang="ko-KR" altLang="en-US" sz="1200" dirty="0">
+                <a:latin typeface="D2Coding" panose="020B0609020101020101" pitchFamily="49" charset="-127"/>
+                <a:ea typeface="D2Coding" panose="020B0609020101020101" pitchFamily="49" charset="-127"/>
+              </a:rPr>
+              <a:t> 구하는 것이 아니라, "내 구역에 물체가 있을 확률은 95%이고</a:t>
+            </a:r>
+            <a:endParaRPr lang="en-US" altLang="ko-KR" sz="1200" dirty="0">
+              <a:latin typeface="D2Coding" panose="020B0609020101020101" pitchFamily="49" charset="-127"/>
+              <a:ea typeface="D2Coding" panose="020B0609020101020101" pitchFamily="49" charset="-127"/>
+            </a:endParaRPr>
+          </a:p>
+          <a:p>
+            <a:pPr marL="171450" indent="-171450">
+              <a:buFont typeface="Wingdings" panose="05000000000000000000" pitchFamily="2" charset="2"/>
+              <a:buChar char="§"/>
+            </a:pPr>
+            <a:endParaRPr lang="en-US" altLang="ko-KR" sz="1200" dirty="0">
+              <a:latin typeface="D2Coding" panose="020B0609020101020101" pitchFamily="49" charset="-127"/>
+              <a:ea typeface="D2Coding" panose="020B0609020101020101" pitchFamily="49" charset="-127"/>
+            </a:endParaRPr>
+          </a:p>
+          <a:p>
+            <a:pPr marL="171450" indent="-171450">
+              <a:buFont typeface="Wingdings" panose="05000000000000000000" pitchFamily="2" charset="2"/>
+              <a:buChar char="§"/>
+            </a:pPr>
+            <a:r>
+              <a:rPr lang="ko-KR" altLang="en-US" sz="1200" dirty="0">
+                <a:latin typeface="D2Coding" panose="020B0609020101020101" pitchFamily="49" charset="-127"/>
+                <a:ea typeface="D2Coding" panose="020B0609020101020101" pitchFamily="49" charset="-127"/>
+              </a:rPr>
+              <a:t>그 물체의 정체는 자동차일 확률이 높으며, 정확한 위치(</a:t>
+            </a:r>
+            <a:r>
+              <a:rPr lang="ko-KR" altLang="en-US" sz="1200" dirty="0" err="1">
+                <a:latin typeface="D2Coding" panose="020B0609020101020101" pitchFamily="49" charset="-127"/>
+                <a:ea typeface="D2Coding" panose="020B0609020101020101" pitchFamily="49" charset="-127"/>
+              </a:rPr>
+              <a:t>x,y,w,h</a:t>
+            </a:r>
+            <a:r>
+              <a:rPr lang="ko-KR" altLang="en-US" sz="1200" dirty="0">
+                <a:latin typeface="D2Coding" panose="020B0609020101020101" pitchFamily="49" charset="-127"/>
+                <a:ea typeface="D2Coding" panose="020B0609020101020101" pitchFamily="49" charset="-127"/>
+              </a:rPr>
+              <a:t>) </a:t>
+            </a:r>
+            <a:r>
+              <a:rPr lang="ko-KR" altLang="en-US" sz="1200" dirty="0" err="1">
+                <a:latin typeface="D2Coding" panose="020B0609020101020101" pitchFamily="49" charset="-127"/>
+                <a:ea typeface="D2Coding" panose="020B0609020101020101" pitchFamily="49" charset="-127"/>
+              </a:rPr>
+              <a:t>여기야!"라는</a:t>
+            </a:r>
+            <a:r>
+              <a:rPr lang="ko-KR" altLang="en-US" sz="1200" dirty="0">
+                <a:latin typeface="D2Coding" panose="020B0609020101020101" pitchFamily="49" charset="-127"/>
+                <a:ea typeface="D2Coding" panose="020B0609020101020101" pitchFamily="49" charset="-127"/>
+              </a:rPr>
+              <a:t> 종합 답변 세트를 단 한 번의 연산으로 동시에 출력하는</a:t>
+            </a:r>
+            <a:endParaRPr lang="en-US" altLang="ko-KR" sz="1200" dirty="0">
+              <a:latin typeface="D2Coding" panose="020B0609020101020101" pitchFamily="49" charset="-127"/>
+              <a:ea typeface="D2Coding" panose="020B0609020101020101" pitchFamily="49" charset="-127"/>
+            </a:endParaRPr>
+          </a:p>
+          <a:p>
+            <a:pPr marL="171450" indent="-171450">
+              <a:buFont typeface="Wingdings" panose="05000000000000000000" pitchFamily="2" charset="2"/>
+              <a:buChar char="§"/>
+            </a:pPr>
+            <a:endParaRPr lang="en-US" altLang="ko-KR" sz="1200" dirty="0">
+              <a:latin typeface="D2Coding" panose="020B0609020101020101" pitchFamily="49" charset="-127"/>
+              <a:ea typeface="D2Coding" panose="020B0609020101020101" pitchFamily="49" charset="-127"/>
+            </a:endParaRPr>
+          </a:p>
+          <a:p>
+            <a:pPr marL="171450" indent="-171450">
+              <a:buFont typeface="Wingdings" panose="05000000000000000000" pitchFamily="2" charset="2"/>
+              <a:buChar char="§"/>
+            </a:pPr>
+            <a:r>
+              <a:rPr lang="ko-KR" altLang="en-US" sz="1200" dirty="0" err="1">
+                <a:latin typeface="D2Coding" panose="020B0609020101020101" pitchFamily="49" charset="-127"/>
+                <a:ea typeface="D2Coding" panose="020B0609020101020101" pitchFamily="49" charset="-127"/>
+              </a:rPr>
+              <a:t>원샷</a:t>
+            </a:r>
+            <a:r>
+              <a:rPr lang="ko-KR" altLang="en-US" sz="1200" dirty="0">
+                <a:latin typeface="D2Coding" panose="020B0609020101020101" pitchFamily="49" charset="-127"/>
+                <a:ea typeface="D2Coding" panose="020B0609020101020101" pitchFamily="49" charset="-127"/>
+              </a:rPr>
+              <a:t>(One-</a:t>
+            </a:r>
+            <a:r>
+              <a:rPr lang="ko-KR" altLang="en-US" sz="1200" dirty="0" err="1">
+                <a:latin typeface="D2Coding" panose="020B0609020101020101" pitchFamily="49" charset="-127"/>
+                <a:ea typeface="D2Coding" panose="020B0609020101020101" pitchFamily="49" charset="-127"/>
+              </a:rPr>
+              <a:t>shot</a:t>
+            </a:r>
+            <a:r>
+              <a:rPr lang="en-US" altLang="ko-KR" sz="1200" dirty="0">
+                <a:latin typeface="D2Coding" panose="020B0609020101020101" pitchFamily="49" charset="-127"/>
+                <a:ea typeface="D2Coding" panose="020B0609020101020101" pitchFamily="49" charset="-127"/>
+              </a:rPr>
+              <a:t>,</a:t>
+            </a:r>
+            <a:r>
+              <a:rPr lang="ko-KR" altLang="en-US" sz="1200" dirty="0">
+                <a:latin typeface="D2Coding" panose="020B0609020101020101" pitchFamily="49" charset="-127"/>
+                <a:ea typeface="D2Coding" panose="020B0609020101020101" pitchFamily="49" charset="-127"/>
+              </a:rPr>
+              <a:t> </a:t>
+            </a:r>
+            <a:r>
+              <a:rPr lang="en-US" altLang="ko-KR" sz="1200" dirty="0">
+                <a:latin typeface="D2Coding" panose="020B0609020101020101" pitchFamily="49" charset="-127"/>
+                <a:ea typeface="D2Coding" panose="020B0609020101020101" pitchFamily="49" charset="-127"/>
+              </a:rPr>
+              <a:t>You Look Only Once)</a:t>
+            </a:r>
+            <a:r>
+              <a:rPr lang="ko-KR" altLang="en-US" sz="1200" dirty="0">
+                <a:latin typeface="D2Coding" panose="020B0609020101020101" pitchFamily="49" charset="-127"/>
+                <a:ea typeface="D2Coding" panose="020B0609020101020101" pitchFamily="49" charset="-127"/>
+              </a:rPr>
+              <a:t>알고리즘</a:t>
+            </a:r>
           </a:p>
         </p:txBody>
       </p:sp>
@@ -12412,8 +16204,8 @@
         </p:nvSpPr>
         <p:spPr>
           <a:xfrm>
-            <a:off x="5652526" y="4361801"/>
-            <a:ext cx="3486150" cy="369332"/>
+            <a:off x="5538225" y="3429000"/>
+            <a:ext cx="6310875" cy="1815882"/>
           </a:xfrm>
           <a:prstGeom prst="rect">
             <a:avLst/>
@@ -12426,15 +16218,248 @@
           </a:bodyPr>
           <a:lstStyle/>
           <a:p>
-            <a:r>
-              <a:rPr lang="en-US" altLang="ko-KR" sz="1800" cap="none" dirty="0">
+            <a:pPr marL="285750" indent="-285750">
+              <a:buFont typeface="Wingdings" panose="05000000000000000000" pitchFamily="2" charset="2"/>
+              <a:buChar char="v"/>
+            </a:pPr>
+            <a:r>
+              <a:rPr lang="en-US" altLang="ko-KR" sz="1600" dirty="0">
                 <a:latin typeface="D2Coding" panose="020B0609020101020101" pitchFamily="49" charset="-127"/>
                 <a:ea typeface="D2Coding" panose="020B0609020101020101" pitchFamily="49" charset="-127"/>
                 <a:cs typeface="Segoe UI Light" panose="020B0502040204020203" pitchFamily="34" charset="0"/>
               </a:rPr>
-              <a:t>Convolutional Neural Network</a:t>
-            </a:r>
-            <a:endParaRPr lang="ko-KR" altLang="en-US" dirty="0"/>
+              <a:t>YOLO</a:t>
+            </a:r>
+            <a:r>
+              <a:rPr lang="ko-KR" altLang="en-US" sz="1600" dirty="0">
+                <a:latin typeface="D2Coding" panose="020B0609020101020101" pitchFamily="49" charset="-127"/>
+                <a:ea typeface="D2Coding" panose="020B0609020101020101" pitchFamily="49" charset="-127"/>
+                <a:cs typeface="Segoe UI Light" panose="020B0502040204020203" pitchFamily="34" charset="0"/>
+              </a:rPr>
+              <a:t>의 </a:t>
+            </a:r>
+            <a:r>
+              <a:rPr lang="en-US" altLang="ko-KR" sz="1600" dirty="0">
+                <a:latin typeface="D2Coding" panose="020B0609020101020101" pitchFamily="49" charset="-127"/>
+                <a:ea typeface="D2Coding" panose="020B0609020101020101" pitchFamily="49" charset="-127"/>
+                <a:cs typeface="Segoe UI Light" panose="020B0502040204020203" pitchFamily="34" charset="0"/>
+              </a:rPr>
+              <a:t>Backbone</a:t>
+            </a:r>
+            <a:r>
+              <a:rPr lang="ko-KR" altLang="en-US" sz="1600" dirty="0">
+                <a:latin typeface="D2Coding" panose="020B0609020101020101" pitchFamily="49" charset="-127"/>
+                <a:ea typeface="D2Coding" panose="020B0609020101020101" pitchFamily="49" charset="-127"/>
+                <a:cs typeface="Segoe UI Light" panose="020B0502040204020203" pitchFamily="34" charset="0"/>
+              </a:rPr>
+              <a:t>과 최종 출력단은 </a:t>
+            </a:r>
+            <a:r>
+              <a:rPr lang="en-US" altLang="ko-KR" sz="1600" dirty="0">
+                <a:latin typeface="D2Coding" panose="020B0609020101020101" pitchFamily="49" charset="-127"/>
+                <a:ea typeface="D2Coding" panose="020B0609020101020101" pitchFamily="49" charset="-127"/>
+                <a:cs typeface="Segoe UI Light" panose="020B0502040204020203" pitchFamily="34" charset="0"/>
+              </a:rPr>
+              <a:t>FC Layer(Fully Connected Layer, </a:t>
+            </a:r>
+            <a:r>
+              <a:rPr lang="ko-KR" altLang="en-US" sz="1600" dirty="0">
+                <a:latin typeface="D2Coding" panose="020B0609020101020101" pitchFamily="49" charset="-127"/>
+                <a:ea typeface="D2Coding" panose="020B0609020101020101" pitchFamily="49" charset="-127"/>
+                <a:cs typeface="Segoe UI Light" panose="020B0502040204020203" pitchFamily="34" charset="0"/>
+              </a:rPr>
+              <a:t>전결합층</a:t>
+            </a:r>
+            <a:r>
+              <a:rPr lang="en-US" altLang="ko-KR" sz="1600" dirty="0">
+                <a:latin typeface="D2Coding" panose="020B0609020101020101" pitchFamily="49" charset="-127"/>
+                <a:ea typeface="D2Coding" panose="020B0609020101020101" pitchFamily="49" charset="-127"/>
+                <a:cs typeface="Segoe UI Light" panose="020B0502040204020203" pitchFamily="34" charset="0"/>
+              </a:rPr>
+              <a:t>)</a:t>
+            </a:r>
+            <a:r>
+              <a:rPr lang="ko-KR" altLang="en-US" sz="1600" dirty="0">
+                <a:latin typeface="D2Coding" panose="020B0609020101020101" pitchFamily="49" charset="-127"/>
+                <a:ea typeface="D2Coding" panose="020B0609020101020101" pitchFamily="49" charset="-127"/>
+                <a:cs typeface="Segoe UI Light" panose="020B0502040204020203" pitchFamily="34" charset="0"/>
+              </a:rPr>
+              <a:t>를 버리고</a:t>
+            </a:r>
+            <a:r>
+              <a:rPr lang="en-US" altLang="ko-KR" sz="1600" dirty="0">
+                <a:latin typeface="D2Coding" panose="020B0609020101020101" pitchFamily="49" charset="-127"/>
+                <a:ea typeface="D2Coding" panose="020B0609020101020101" pitchFamily="49" charset="-127"/>
+                <a:cs typeface="Segoe UI Light" panose="020B0502040204020203" pitchFamily="34" charset="0"/>
+              </a:rPr>
+              <a:t>, </a:t>
+            </a:r>
+            <a:r>
+              <a:rPr lang="ko-KR" altLang="en-US" sz="1600" dirty="0">
+                <a:latin typeface="D2Coding" panose="020B0609020101020101" pitchFamily="49" charset="-127"/>
+                <a:ea typeface="D2Coding" panose="020B0609020101020101" pitchFamily="49" charset="-127"/>
+                <a:cs typeface="Segoe UI Light" panose="020B0502040204020203" pitchFamily="34" charset="0"/>
+              </a:rPr>
+              <a:t>모든 레이어를 </a:t>
+            </a:r>
+            <a:r>
+              <a:rPr lang="en-US" altLang="ko-KR" sz="1600" dirty="0">
+                <a:latin typeface="D2Coding" panose="020B0609020101020101" pitchFamily="49" charset="-127"/>
+                <a:ea typeface="D2Coding" panose="020B0609020101020101" pitchFamily="49" charset="-127"/>
+                <a:cs typeface="Segoe UI Light" panose="020B0502040204020203" pitchFamily="34" charset="0"/>
+              </a:rPr>
+              <a:t>Convolution</a:t>
+            </a:r>
+            <a:r>
+              <a:rPr lang="ko-KR" altLang="en-US" sz="1600" dirty="0">
+                <a:latin typeface="D2Coding" panose="020B0609020101020101" pitchFamily="49" charset="-127"/>
+                <a:ea typeface="D2Coding" panose="020B0609020101020101" pitchFamily="49" charset="-127"/>
+                <a:cs typeface="Segoe UI Light" panose="020B0502040204020203" pitchFamily="34" charset="0"/>
+              </a:rPr>
+              <a:t>으로만 구성한 </a:t>
+            </a:r>
+            <a:r>
+              <a:rPr lang="en-US" altLang="ko-KR" sz="1600" dirty="0">
+                <a:latin typeface="D2Coding" panose="020B0609020101020101" pitchFamily="49" charset="-127"/>
+                <a:ea typeface="D2Coding" panose="020B0609020101020101" pitchFamily="49" charset="-127"/>
+                <a:cs typeface="Segoe UI Light" panose="020B0502040204020203" pitchFamily="34" charset="0"/>
+              </a:rPr>
+              <a:t>FCN(Fully Convolutional Network, </a:t>
+            </a:r>
+            <a:r>
+              <a:rPr lang="ko-KR" altLang="en-US" sz="1600" dirty="0" err="1">
+                <a:latin typeface="D2Coding" panose="020B0609020101020101" pitchFamily="49" charset="-127"/>
+                <a:ea typeface="D2Coding" panose="020B0609020101020101" pitchFamily="49" charset="-127"/>
+                <a:cs typeface="Segoe UI Light" panose="020B0502040204020203" pitchFamily="34" charset="0"/>
+              </a:rPr>
+              <a:t>전합성곱</a:t>
+            </a:r>
+            <a:r>
+              <a:rPr lang="ko-KR" altLang="en-US" sz="1600" dirty="0">
+                <a:latin typeface="D2Coding" panose="020B0609020101020101" pitchFamily="49" charset="-127"/>
+                <a:ea typeface="D2Coding" panose="020B0609020101020101" pitchFamily="49" charset="-127"/>
+                <a:cs typeface="Segoe UI Light" panose="020B0502040204020203" pitchFamily="34" charset="0"/>
+              </a:rPr>
+              <a:t> 신경망</a:t>
+            </a:r>
+            <a:r>
+              <a:rPr lang="en-US" altLang="ko-KR" sz="1600" dirty="0">
+                <a:latin typeface="D2Coding" panose="020B0609020101020101" pitchFamily="49" charset="-127"/>
+                <a:ea typeface="D2Coding" panose="020B0609020101020101" pitchFamily="49" charset="-127"/>
+                <a:cs typeface="Segoe UI Light" panose="020B0502040204020203" pitchFamily="34" charset="0"/>
+              </a:rPr>
+              <a:t>) </a:t>
+            </a:r>
+            <a:r>
+              <a:rPr lang="ko-KR" altLang="en-US" sz="1600" dirty="0">
+                <a:latin typeface="D2Coding" panose="020B0609020101020101" pitchFamily="49" charset="-127"/>
+                <a:ea typeface="D2Coding" panose="020B0609020101020101" pitchFamily="49" charset="-127"/>
+                <a:cs typeface="Segoe UI Light" panose="020B0502040204020203" pitchFamily="34" charset="0"/>
+              </a:rPr>
+              <a:t>구조를 사용</a:t>
+            </a:r>
+            <a:endParaRPr lang="en-US" altLang="ko-KR" sz="1600" dirty="0">
+              <a:latin typeface="D2Coding" panose="020B0609020101020101" pitchFamily="49" charset="-127"/>
+              <a:ea typeface="D2Coding" panose="020B0609020101020101" pitchFamily="49" charset="-127"/>
+              <a:cs typeface="Segoe UI Light" panose="020B0502040204020203" pitchFamily="34" charset="0"/>
+            </a:endParaRPr>
+          </a:p>
+          <a:p>
+            <a:pPr marL="285750" indent="-285750">
+              <a:buFont typeface="Wingdings" panose="05000000000000000000" pitchFamily="2" charset="2"/>
+              <a:buChar char="v"/>
+            </a:pPr>
+            <a:endParaRPr lang="en-US" altLang="ko-KR" sz="1600" dirty="0">
+              <a:latin typeface="D2Coding" panose="020B0609020101020101" pitchFamily="49" charset="-127"/>
+              <a:ea typeface="D2Coding" panose="020B0609020101020101" pitchFamily="49" charset="-127"/>
+              <a:cs typeface="Segoe UI Light" panose="020B0502040204020203" pitchFamily="34" charset="0"/>
+            </a:endParaRPr>
+          </a:p>
+          <a:p>
+            <a:pPr marL="285750" indent="-285750">
+              <a:buFont typeface="Wingdings" panose="05000000000000000000" pitchFamily="2" charset="2"/>
+              <a:buChar char="v"/>
+            </a:pPr>
+            <a:r>
+              <a:rPr lang="en-US" altLang="ko-KR" sz="1600" dirty="0">
+                <a:latin typeface="D2Coding" panose="020B0609020101020101" pitchFamily="49" charset="-127"/>
+                <a:ea typeface="D2Coding" panose="020B0609020101020101" pitchFamily="49" charset="-127"/>
+                <a:cs typeface="Segoe UI Light" panose="020B0502040204020203" pitchFamily="34" charset="0"/>
+              </a:rPr>
+              <a:t>Filer map</a:t>
+            </a:r>
+            <a:r>
+              <a:rPr lang="ko-KR" altLang="en-US" sz="1600" dirty="0">
+                <a:latin typeface="D2Coding" panose="020B0609020101020101" pitchFamily="49" charset="-127"/>
+                <a:ea typeface="D2Coding" panose="020B0609020101020101" pitchFamily="49" charset="-127"/>
+                <a:cs typeface="Segoe UI Light" panose="020B0502040204020203" pitchFamily="34" charset="0"/>
+              </a:rPr>
+              <a:t>으로 </a:t>
+            </a:r>
+            <a:r>
+              <a:rPr lang="en-US" altLang="ko-KR" sz="1600" dirty="0">
+                <a:latin typeface="D2Coding" panose="020B0609020101020101" pitchFamily="49" charset="-127"/>
+                <a:ea typeface="D2Coding" panose="020B0609020101020101" pitchFamily="49" charset="-127"/>
+                <a:cs typeface="Segoe UI Light" panose="020B0502040204020203" pitchFamily="34" charset="0"/>
+              </a:rPr>
+              <a:t>Object </a:t>
+            </a:r>
+            <a:r>
+              <a:rPr lang="ko-KR" altLang="en-US" sz="1600" dirty="0">
+                <a:latin typeface="D2Coding" panose="020B0609020101020101" pitchFamily="49" charset="-127"/>
+                <a:ea typeface="D2Coding" panose="020B0609020101020101" pitchFamily="49" charset="-127"/>
+                <a:cs typeface="Segoe UI Light" panose="020B0502040204020203" pitchFamily="34" charset="0"/>
+              </a:rPr>
+              <a:t>가 있는지</a:t>
+            </a:r>
+            <a:r>
+              <a:rPr lang="en-US" altLang="ko-KR" sz="1600" dirty="0">
+                <a:latin typeface="D2Coding" panose="020B0609020101020101" pitchFamily="49" charset="-127"/>
+                <a:ea typeface="D2Coding" panose="020B0609020101020101" pitchFamily="49" charset="-127"/>
+                <a:cs typeface="Segoe UI Light" panose="020B0502040204020203" pitchFamily="34" charset="0"/>
+              </a:rPr>
+              <a:t>, </a:t>
+            </a:r>
+            <a:r>
+              <a:rPr lang="ko-KR" altLang="en-US" sz="1600" dirty="0">
+                <a:latin typeface="D2Coding" panose="020B0609020101020101" pitchFamily="49" charset="-127"/>
+                <a:ea typeface="D2Coding" panose="020B0609020101020101" pitchFamily="49" charset="-127"/>
+                <a:cs typeface="Segoe UI Light" panose="020B0502040204020203" pitchFamily="34" charset="0"/>
+              </a:rPr>
+              <a:t>각</a:t>
+            </a:r>
+            <a:r>
+              <a:rPr lang="en-US" altLang="ko-KR" sz="1600" dirty="0">
+                <a:latin typeface="D2Coding" panose="020B0609020101020101" pitchFamily="49" charset="-127"/>
+                <a:ea typeface="D2Coding" panose="020B0609020101020101" pitchFamily="49" charset="-127"/>
+                <a:cs typeface="Segoe UI Light" panose="020B0502040204020203" pitchFamily="34" charset="0"/>
+              </a:rPr>
+              <a:t> Object</a:t>
+            </a:r>
+            <a:r>
+              <a:rPr lang="ko-KR" altLang="en-US" sz="1600" dirty="0">
+                <a:latin typeface="D2Coding" panose="020B0609020101020101" pitchFamily="49" charset="-127"/>
+                <a:ea typeface="D2Coding" panose="020B0609020101020101" pitchFamily="49" charset="-127"/>
+                <a:cs typeface="Segoe UI Light" panose="020B0502040204020203" pitchFamily="34" charset="0"/>
+              </a:rPr>
+              <a:t>의 </a:t>
+            </a:r>
+            <a:r>
+              <a:rPr lang="en-US" altLang="ko-KR" sz="1600" dirty="0">
+                <a:latin typeface="D2Coding" panose="020B0609020101020101" pitchFamily="49" charset="-127"/>
+                <a:ea typeface="D2Coding" panose="020B0609020101020101" pitchFamily="49" charset="-127"/>
+                <a:cs typeface="Segoe UI Light" panose="020B0502040204020203" pitchFamily="34" charset="0"/>
+              </a:rPr>
+              <a:t>width, height </a:t>
+            </a:r>
+            <a:r>
+              <a:rPr lang="ko-KR" altLang="en-US" sz="1600" dirty="0">
+                <a:latin typeface="D2Coding" panose="020B0609020101020101" pitchFamily="49" charset="-127"/>
+                <a:ea typeface="D2Coding" panose="020B0609020101020101" pitchFamily="49" charset="-127"/>
+                <a:cs typeface="Segoe UI Light" panose="020B0502040204020203" pitchFamily="34" charset="0"/>
+              </a:rPr>
+              <a:t>등을 알 수 있음</a:t>
+            </a:r>
           </a:p>
         </p:txBody>
       </p:sp>
@@ -14793,14 +18818,69 @@
         </p:blipFill>
         <p:spPr>
           <a:xfrm>
-            <a:off x="1133099" y="1662889"/>
-            <a:ext cx="9536749" cy="4461686"/>
+            <a:off x="1209300" y="2270463"/>
+            <a:ext cx="8439526" cy="3948360"/>
           </a:xfrm>
           <a:prstGeom prst="rect">
             <a:avLst/>
           </a:prstGeom>
         </p:spPr>
       </p:pic>
+      <p:sp>
+        <p:nvSpPr>
+          <p:cNvPr id="5" name="TextBox 4">
+            <a:extLst>
+              <a:ext uri="{FF2B5EF4-FFF2-40B4-BE49-F238E27FC236}">
+                <a16:creationId xmlns:a16="http://schemas.microsoft.com/office/drawing/2014/main" id="{425755E4-770B-BDE4-CDAA-9FB5C839D34C}"/>
+              </a:ext>
+            </a:extLst>
+          </p:cNvPr>
+          <p:cNvSpPr txBox="1"/>
+          <p:nvPr/>
+        </p:nvSpPr>
+        <p:spPr>
+          <a:xfrm>
+            <a:off x="571500" y="1390110"/>
+            <a:ext cx="6096000" cy="369332"/>
+          </a:xfrm>
+          <a:prstGeom prst="rect">
+            <a:avLst/>
+          </a:prstGeom>
+          <a:noFill/>
+        </p:spPr>
+        <p:txBody>
+          <a:bodyPr wrap="square">
+            <a:spAutoFit/>
+          </a:bodyPr>
+          <a:lstStyle/>
+          <a:p>
+            <a:pPr>
+              <a:buNone/>
+            </a:pPr>
+            <a:r>
+              <a:rPr lang="en-US" altLang="ko-KR" dirty="0">
+                <a:latin typeface="D2Coding" panose="020B0609020101020101" pitchFamily="49" charset="-127"/>
+                <a:ea typeface="D2Coding" panose="020B0609020101020101" pitchFamily="49" charset="-127"/>
+              </a:rPr>
+              <a:t>YOLO</a:t>
+            </a:r>
+            <a:r>
+              <a:rPr lang="ko-KR" altLang="en-US" dirty="0">
+                <a:latin typeface="D2Coding" panose="020B0609020101020101" pitchFamily="49" charset="-127"/>
+                <a:ea typeface="D2Coding" panose="020B0609020101020101" pitchFamily="49" charset="-127"/>
+              </a:rPr>
+              <a:t>가 선택한 </a:t>
+            </a:r>
+            <a:r>
+              <a:rPr lang="en-US" altLang="ko-KR" dirty="0">
+                <a:latin typeface="D2Coding" panose="020B0609020101020101" pitchFamily="49" charset="-127"/>
+                <a:ea typeface="D2Coding" panose="020B0609020101020101" pitchFamily="49" charset="-127"/>
+              </a:rPr>
+              <a:t>FCN (Fully Convolutional Network)</a:t>
+            </a:r>
+          </a:p>
+        </p:txBody>
+      </p:sp>
     </p:spTree>
     <p:extLst>
       <p:ext uri="{BB962C8B-B14F-4D97-AF65-F5344CB8AC3E}">

--- a/CNN/Object detection_YOLO.pptx
+++ b/CNN/Object detection_YOLO.pptx
@@ -5,10 +5,10 @@
     <p:sldMasterId id="2147483660" r:id="rId1"/>
   </p:sldMasterIdLst>
   <p:notesMasterIdLst>
-    <p:notesMasterId r:id="rId18"/>
+    <p:notesMasterId r:id="rId19"/>
   </p:notesMasterIdLst>
   <p:handoutMasterIdLst>
-    <p:handoutMasterId r:id="rId19"/>
+    <p:handoutMasterId r:id="rId20"/>
   </p:handoutMasterIdLst>
   <p:sldIdLst>
     <p:sldId id="256" r:id="rId2"/>
@@ -21,12 +21,13 @@
     <p:sldId id="1127" r:id="rId9"/>
     <p:sldId id="1121" r:id="rId10"/>
     <p:sldId id="1133" r:id="rId11"/>
-    <p:sldId id="1132" r:id="rId12"/>
-    <p:sldId id="1122" r:id="rId13"/>
-    <p:sldId id="1135" r:id="rId14"/>
-    <p:sldId id="1136" r:id="rId15"/>
-    <p:sldId id="1134" r:id="rId16"/>
-    <p:sldId id="1123" r:id="rId17"/>
+    <p:sldId id="1135" r:id="rId12"/>
+    <p:sldId id="1136" r:id="rId13"/>
+    <p:sldId id="1132" r:id="rId14"/>
+    <p:sldId id="1122" r:id="rId15"/>
+    <p:sldId id="1137" r:id="rId16"/>
+    <p:sldId id="1138" r:id="rId17"/>
+    <p:sldId id="1123" r:id="rId18"/>
   </p:sldIdLst>
   <p:sldSz cx="12192000" cy="6858000"/>
   <p:notesSz cx="6858000" cy="9144000"/>
@@ -147,11 +148,12 @@
             <p14:sldId id="1127"/>
             <p14:sldId id="1121"/>
             <p14:sldId id="1133"/>
+            <p14:sldId id="1135"/>
+            <p14:sldId id="1136"/>
             <p14:sldId id="1132"/>
             <p14:sldId id="1122"/>
-            <p14:sldId id="1135"/>
-            <p14:sldId id="1136"/>
-            <p14:sldId id="1134"/>
+            <p14:sldId id="1137"/>
+            <p14:sldId id="1138"/>
             <p14:sldId id="1123"/>
           </p14:sldIdLst>
         </p14:section>
@@ -4799,472 +4801,6 @@
         <p:cNvPr id="1" name="">
           <a:extLst>
             <a:ext uri="{FF2B5EF4-FFF2-40B4-BE49-F238E27FC236}">
-              <a16:creationId xmlns:a16="http://schemas.microsoft.com/office/drawing/2014/main" id="{8D67D301-B114-F827-4260-924D7C208916}"/>
-            </a:ext>
-          </a:extLst>
-        </p:cNvPr>
-        <p:cNvGrpSpPr/>
-        <p:nvPr/>
-      </p:nvGrpSpPr>
-      <p:grpSpPr>
-        <a:xfrm>
-          <a:off x="0" y="0"/>
-          <a:ext cx="0" cy="0"/>
-          <a:chOff x="0" y="0"/>
-          <a:chExt cx="0" cy="0"/>
-        </a:xfrm>
-      </p:grpSpPr>
-      <p:sp>
-        <p:nvSpPr>
-          <p:cNvPr id="4" name="슬라이드 번호 개체 틀 3">
-            <a:extLst>
-              <a:ext uri="{FF2B5EF4-FFF2-40B4-BE49-F238E27FC236}">
-                <a16:creationId xmlns:a16="http://schemas.microsoft.com/office/drawing/2014/main" id="{445FA5C7-898C-1C68-7E74-AD6760E3C3F3}"/>
-              </a:ext>
-            </a:extLst>
-          </p:cNvPr>
-          <p:cNvSpPr>
-            <a:spLocks noGrp="1"/>
-          </p:cNvSpPr>
-          <p:nvPr>
-            <p:ph type="sldNum" sz="quarter" idx="12"/>
-          </p:nvPr>
-        </p:nvSpPr>
-        <p:spPr>
-          <a:xfrm>
-            <a:off x="10514011" y="6036261"/>
-            <a:ext cx="753545" cy="365125"/>
-          </a:xfrm>
-        </p:spPr>
-        <p:txBody>
-          <a:bodyPr/>
-          <a:lstStyle/>
-          <a:p>
-            <a:fld id="{D57F1E4F-1CFF-5643-939E-217C01CDF565}" type="slidenum">
-              <a:rPr lang="en-US" smtClean="0"/>
-              <a:pPr/>
-              <a:t>11</a:t>
-            </a:fld>
-            <a:endParaRPr lang="en-US" dirty="0"/>
-          </a:p>
-        </p:txBody>
-      </p:sp>
-      <p:sp>
-        <p:nvSpPr>
-          <p:cNvPr id="3" name="제목 1">
-            <a:extLst>
-              <a:ext uri="{FF2B5EF4-FFF2-40B4-BE49-F238E27FC236}">
-                <a16:creationId xmlns:a16="http://schemas.microsoft.com/office/drawing/2014/main" id="{1D8A7BF3-1C90-CC60-888E-27948DFAF53C}"/>
-              </a:ext>
-            </a:extLst>
-          </p:cNvPr>
-          <p:cNvSpPr txBox="1">
-            <a:spLocks/>
-          </p:cNvSpPr>
-          <p:nvPr/>
-        </p:nvSpPr>
-        <p:spPr>
-          <a:xfrm>
-            <a:off x="475645" y="481983"/>
-            <a:ext cx="10353762" cy="766439"/>
-          </a:xfrm>
-          <a:prstGeom prst="rect">
-            <a:avLst/>
-          </a:prstGeom>
-        </p:spPr>
-        <p:txBody>
-          <a:bodyPr vert="horz" lIns="91440" tIns="45720" rIns="91440" bIns="45720" rtlCol="0" anchor="ctr">
-            <a:normAutofit/>
-          </a:bodyPr>
-          <a:lstStyle>
-            <a:lvl1pPr algn="ctr" defTabSz="914400" rtl="0" eaLnBrk="1" latinLnBrk="1" hangingPunct="1">
-              <a:lnSpc>
-                <a:spcPct val="90000"/>
-              </a:lnSpc>
-              <a:spcBef>
-                <a:spcPct val="0"/>
-              </a:spcBef>
-              <a:buNone/>
-              <a:defRPr sz="3200" kern="1200" cap="all" baseline="0">
-                <a:solidFill>
-                  <a:schemeClr val="tx1"/>
-                </a:solidFill>
-                <a:effectLst/>
-                <a:latin typeface="Batang" panose="02030600000101010101" pitchFamily="18" charset="-127"/>
-                <a:ea typeface="Batang" panose="02030600000101010101" pitchFamily="18" charset="-127"/>
-                <a:cs typeface="+mj-cs"/>
-              </a:defRPr>
-            </a:lvl1pPr>
-          </a:lstStyle>
-          <a:p>
-            <a:pPr algn="l"/>
-            <a:r>
-              <a:rPr lang="en-US" altLang="ko-KR" sz="2800" cap="none" dirty="0">
-                <a:latin typeface="D2Coding" panose="020B0609020101020101" pitchFamily="49" charset="-127"/>
-                <a:ea typeface="D2Coding" panose="020B0609020101020101" pitchFamily="49" charset="-127"/>
-                <a:cs typeface="Segoe UI Light" panose="020B0502040204020203" pitchFamily="34" charset="0"/>
-              </a:rPr>
-              <a:t>YOLO</a:t>
-            </a:r>
-            <a:endParaRPr lang="ko-KR" altLang="en-US" sz="2800" cap="none" dirty="0">
-              <a:latin typeface="D2Coding" panose="020B0609020101020101" pitchFamily="49" charset="-127"/>
-              <a:ea typeface="D2Coding" panose="020B0609020101020101" pitchFamily="49" charset="-127"/>
-              <a:cs typeface="Segoe UI Light" panose="020B0502040204020203" pitchFamily="34" charset="0"/>
-            </a:endParaRPr>
-          </a:p>
-        </p:txBody>
-      </p:sp>
-      <p:pic>
-        <p:nvPicPr>
-          <p:cNvPr id="7" name="Picture 2">
-            <a:extLst>
-              <a:ext uri="{FF2B5EF4-FFF2-40B4-BE49-F238E27FC236}">
-                <a16:creationId xmlns:a16="http://schemas.microsoft.com/office/drawing/2014/main" id="{991A9F3B-8F15-60CA-FF37-066CA17F4ACD}"/>
-              </a:ext>
-            </a:extLst>
-          </p:cNvPr>
-          <p:cNvPicPr>
-            <a:picLocks noChangeAspect="1" noChangeArrowheads="1"/>
-          </p:cNvPicPr>
-          <p:nvPr/>
-        </p:nvPicPr>
-        <p:blipFill>
-          <a:blip r:embed="rId2">
-            <a:extLst>
-              <a:ext uri="{28A0092B-C50C-407E-A947-70E740481C1C}">
-                <a14:useLocalDpi xmlns:a14="http://schemas.microsoft.com/office/drawing/2010/main" val="0"/>
-              </a:ext>
-            </a:extLst>
-          </a:blip>
-          <a:srcRect/>
-          <a:stretch>
-            <a:fillRect/>
-          </a:stretch>
-        </p:blipFill>
-        <p:spPr bwMode="auto">
-          <a:xfrm>
-            <a:off x="1728040" y="2178311"/>
-            <a:ext cx="8244635" cy="4126339"/>
-          </a:xfrm>
-          <a:prstGeom prst="rect">
-            <a:avLst/>
-          </a:prstGeom>
-          <a:noFill/>
-          <a:extLst>
-            <a:ext uri="{909E8E84-426E-40DD-AFC4-6F175D3DCCD1}">
-              <a14:hiddenFill xmlns:a14="http://schemas.microsoft.com/office/drawing/2010/main">
-                <a:solidFill>
-                  <a:srgbClr val="FFFFFF"/>
-                </a:solidFill>
-              </a14:hiddenFill>
-            </a:ext>
-          </a:extLst>
-        </p:spPr>
-      </p:pic>
-      <p:sp>
-        <p:nvSpPr>
-          <p:cNvPr id="8" name="TextBox 7">
-            <a:extLst>
-              <a:ext uri="{FF2B5EF4-FFF2-40B4-BE49-F238E27FC236}">
-                <a16:creationId xmlns:a16="http://schemas.microsoft.com/office/drawing/2014/main" id="{F07ADC64-4751-52A0-DDEB-20843A556B71}"/>
-              </a:ext>
-            </a:extLst>
-          </p:cNvPr>
-          <p:cNvSpPr txBox="1"/>
-          <p:nvPr/>
-        </p:nvSpPr>
-        <p:spPr>
-          <a:xfrm>
-            <a:off x="623140" y="1424888"/>
-            <a:ext cx="11159285" cy="369332"/>
-          </a:xfrm>
-          <a:prstGeom prst="rect">
-            <a:avLst/>
-          </a:prstGeom>
-          <a:noFill/>
-        </p:spPr>
-        <p:txBody>
-          <a:bodyPr wrap="square" rtlCol="0">
-            <a:spAutoFit/>
-          </a:bodyPr>
-          <a:lstStyle/>
-          <a:p>
-            <a:r>
-              <a:rPr lang="ko-KR" altLang="en-US" dirty="0">
-                <a:latin typeface="D2Coding" panose="020B0609020101020101" pitchFamily="49" charset="-127"/>
-                <a:ea typeface="D2Coding" panose="020B0609020101020101" pitchFamily="49" charset="-127"/>
-              </a:rPr>
-              <a:t>컴퓨터가 </a:t>
-            </a:r>
-            <a:r>
-              <a:rPr lang="en-US" altLang="ko-KR" dirty="0">
-                <a:latin typeface="D2Coding" panose="020B0609020101020101" pitchFamily="49" charset="-127"/>
-                <a:ea typeface="D2Coding" panose="020B0609020101020101" pitchFamily="49" charset="-127"/>
-              </a:rPr>
-              <a:t>Image</a:t>
-            </a:r>
-            <a:r>
-              <a:rPr lang="ko-KR" altLang="en-US" dirty="0">
-                <a:latin typeface="D2Coding" panose="020B0609020101020101" pitchFamily="49" charset="-127"/>
-                <a:ea typeface="D2Coding" panose="020B0609020101020101" pitchFamily="49" charset="-127"/>
-              </a:rPr>
-              <a:t>의 물체를 감지하고 분류 예측</a:t>
-            </a:r>
-            <a:r>
-              <a:rPr lang="en-US" altLang="ko-KR" dirty="0">
-                <a:latin typeface="D2Coding" panose="020B0609020101020101" pitchFamily="49" charset="-127"/>
-                <a:ea typeface="D2Coding" panose="020B0609020101020101" pitchFamily="49" charset="-127"/>
-              </a:rPr>
-              <a:t>(Object Detection)</a:t>
-            </a:r>
-            <a:r>
-              <a:rPr lang="ko-KR" altLang="en-US" dirty="0">
-                <a:latin typeface="D2Coding" panose="020B0609020101020101" pitchFamily="49" charset="-127"/>
-                <a:ea typeface="D2Coding" panose="020B0609020101020101" pitchFamily="49" charset="-127"/>
-              </a:rPr>
-              <a:t> </a:t>
-            </a:r>
-            <a:r>
-              <a:rPr lang="en-US" altLang="ko-KR" dirty="0">
-                <a:latin typeface="D2Coding" panose="020B0609020101020101" pitchFamily="49" charset="-127"/>
-                <a:ea typeface="D2Coding" panose="020B0609020101020101" pitchFamily="49" charset="-127"/>
-              </a:rPr>
-              <a:t>: </a:t>
-            </a:r>
-            <a:r>
-              <a:rPr lang="en-US" altLang="ko-KR" dirty="0">
-                <a:latin typeface="D2Coding" panose="020B0609020101020101" pitchFamily="49" charset="-127"/>
-                <a:ea typeface="D2Coding" panose="020B0609020101020101" pitchFamily="49" charset="-127"/>
-                <a:hlinkClick r:id="rId3"/>
-              </a:rPr>
-              <a:t>https://roboflow.com/</a:t>
-            </a:r>
-            <a:r>
-              <a:rPr lang="en-US" altLang="ko-KR" dirty="0">
-                <a:latin typeface="D2Coding" panose="020B0609020101020101" pitchFamily="49" charset="-127"/>
-                <a:ea typeface="D2Coding" panose="020B0609020101020101" pitchFamily="49" charset="-127"/>
-              </a:rPr>
-              <a:t> </a:t>
-            </a:r>
-            <a:r>
-              <a:rPr lang="ko-KR" altLang="en-US" dirty="0">
-                <a:latin typeface="D2Coding" panose="020B0609020101020101" pitchFamily="49" charset="-127"/>
-                <a:ea typeface="D2Coding" panose="020B0609020101020101" pitchFamily="49" charset="-127"/>
-              </a:rPr>
-              <a:t> </a:t>
-            </a:r>
-            <a:endParaRPr lang="ko-KR" altLang="en-US" dirty="0">
-              <a:solidFill>
-                <a:srgbClr val="0070C0"/>
-              </a:solidFill>
-              <a:latin typeface="D2Coding" panose="020B0609020101020101" pitchFamily="49" charset="-127"/>
-              <a:ea typeface="D2Coding" panose="020B0609020101020101" pitchFamily="49" charset="-127"/>
-            </a:endParaRPr>
-          </a:p>
-        </p:txBody>
-      </p:sp>
-    </p:spTree>
-    <p:extLst>
-      <p:ext uri="{BB962C8B-B14F-4D97-AF65-F5344CB8AC3E}">
-        <p14:creationId xmlns:p14="http://schemas.microsoft.com/office/powerpoint/2010/main" val="1798292069"/>
-      </p:ext>
-    </p:extLst>
-  </p:cSld>
-  <p:clrMapOvr>
-    <a:masterClrMapping/>
-  </p:clrMapOvr>
-</p:sld>
-</file>
-
-<file path=ppt/slides/slide12.xml><?xml version="1.0" encoding="utf-8"?>
-<p:sld xmlns:a="http://schemas.openxmlformats.org/drawingml/2006/main" xmlns:r="http://schemas.openxmlformats.org/officeDocument/2006/relationships" xmlns:p="http://schemas.openxmlformats.org/presentationml/2006/main">
-  <p:cSld>
-    <p:spTree>
-      <p:nvGrpSpPr>
-        <p:cNvPr id="1" name="">
-          <a:extLst>
-            <a:ext uri="{FF2B5EF4-FFF2-40B4-BE49-F238E27FC236}">
-              <a16:creationId xmlns:a16="http://schemas.microsoft.com/office/drawing/2014/main" id="{8FB326FB-150E-BE96-08E2-079622462002}"/>
-            </a:ext>
-          </a:extLst>
-        </p:cNvPr>
-        <p:cNvGrpSpPr/>
-        <p:nvPr/>
-      </p:nvGrpSpPr>
-      <p:grpSpPr>
-        <a:xfrm>
-          <a:off x="0" y="0"/>
-          <a:ext cx="0" cy="0"/>
-          <a:chOff x="0" y="0"/>
-          <a:chExt cx="0" cy="0"/>
-        </a:xfrm>
-      </p:grpSpPr>
-      <p:sp>
-        <p:nvSpPr>
-          <p:cNvPr id="4" name="슬라이드 번호 개체 틀 3">
-            <a:extLst>
-              <a:ext uri="{FF2B5EF4-FFF2-40B4-BE49-F238E27FC236}">
-                <a16:creationId xmlns:a16="http://schemas.microsoft.com/office/drawing/2014/main" id="{AF74812A-4AB7-6AC8-E8CF-FBA1128EF365}"/>
-              </a:ext>
-            </a:extLst>
-          </p:cNvPr>
-          <p:cNvSpPr>
-            <a:spLocks noGrp="1"/>
-          </p:cNvSpPr>
-          <p:nvPr>
-            <p:ph type="sldNum" sz="quarter" idx="12"/>
-          </p:nvPr>
-        </p:nvSpPr>
-        <p:spPr>
-          <a:xfrm>
-            <a:off x="10514011" y="6036261"/>
-            <a:ext cx="753545" cy="365125"/>
-          </a:xfrm>
-        </p:spPr>
-        <p:txBody>
-          <a:bodyPr/>
-          <a:lstStyle/>
-          <a:p>
-            <a:fld id="{D57F1E4F-1CFF-5643-939E-217C01CDF565}" type="slidenum">
-              <a:rPr lang="en-US" smtClean="0"/>
-              <a:pPr/>
-              <a:t>12</a:t>
-            </a:fld>
-            <a:endParaRPr lang="en-US" dirty="0"/>
-          </a:p>
-        </p:txBody>
-      </p:sp>
-      <p:sp>
-        <p:nvSpPr>
-          <p:cNvPr id="3" name="제목 1">
-            <a:extLst>
-              <a:ext uri="{FF2B5EF4-FFF2-40B4-BE49-F238E27FC236}">
-                <a16:creationId xmlns:a16="http://schemas.microsoft.com/office/drawing/2014/main" id="{FCBB2FC7-ABBB-6EF3-A901-A983D707DAD0}"/>
-              </a:ext>
-            </a:extLst>
-          </p:cNvPr>
-          <p:cNvSpPr txBox="1">
-            <a:spLocks/>
-          </p:cNvSpPr>
-          <p:nvPr/>
-        </p:nvSpPr>
-        <p:spPr>
-          <a:xfrm>
-            <a:off x="475645" y="481983"/>
-            <a:ext cx="10353762" cy="766439"/>
-          </a:xfrm>
-          <a:prstGeom prst="rect">
-            <a:avLst/>
-          </a:prstGeom>
-        </p:spPr>
-        <p:txBody>
-          <a:bodyPr vert="horz" lIns="91440" tIns="45720" rIns="91440" bIns="45720" rtlCol="0" anchor="ctr">
-            <a:normAutofit/>
-          </a:bodyPr>
-          <a:lstStyle>
-            <a:lvl1pPr algn="ctr" defTabSz="914400" rtl="0" eaLnBrk="1" latinLnBrk="1" hangingPunct="1">
-              <a:lnSpc>
-                <a:spcPct val="90000"/>
-              </a:lnSpc>
-              <a:spcBef>
-                <a:spcPct val="0"/>
-              </a:spcBef>
-              <a:buNone/>
-              <a:defRPr sz="3200" kern="1200" cap="all" baseline="0">
-                <a:solidFill>
-                  <a:schemeClr val="tx1"/>
-                </a:solidFill>
-                <a:effectLst/>
-                <a:latin typeface="Batang" panose="02030600000101010101" pitchFamily="18" charset="-127"/>
-                <a:ea typeface="Batang" panose="02030600000101010101" pitchFamily="18" charset="-127"/>
-                <a:cs typeface="+mj-cs"/>
-              </a:defRPr>
-            </a:lvl1pPr>
-          </a:lstStyle>
-          <a:p>
-            <a:pPr algn="l"/>
-            <a:r>
-              <a:rPr lang="en-US" altLang="ko-KR" sz="2800" cap="none" dirty="0">
-                <a:latin typeface="D2Coding" panose="020B0609020101020101" pitchFamily="49" charset="-127"/>
-                <a:ea typeface="D2Coding" panose="020B0609020101020101" pitchFamily="49" charset="-127"/>
-                <a:cs typeface="Segoe UI Light" panose="020B0502040204020203" pitchFamily="34" charset="0"/>
-              </a:rPr>
-              <a:t>YOLO: </a:t>
-            </a:r>
-            <a:r>
-              <a:rPr lang="en-US" altLang="ko-KR" sz="2800" cap="none" dirty="0">
-                <a:latin typeface="D2Coding" panose="020B0609020101020101" pitchFamily="49" charset="-127"/>
-                <a:ea typeface="D2Coding" panose="020B0609020101020101" pitchFamily="49" charset="-127"/>
-                <a:cs typeface="Segoe UI Light" panose="020B0502040204020203" pitchFamily="34" charset="0"/>
-                <a:hlinkClick r:id="rId2">
-                  <a:extLst>
-                    <a:ext uri="{A12FA001-AC4F-418D-AE19-62706E023703}">
-                      <ahyp:hlinkClr xmlns:ahyp="http://schemas.microsoft.com/office/drawing/2018/hyperlinkcolor" val="tx"/>
-                    </a:ext>
-                  </a:extLst>
-                </a:hlinkClick>
-              </a:rPr>
-              <a:t>YOLO Object Detection</a:t>
-            </a:r>
-            <a:endParaRPr lang="ko-KR" altLang="en-US" sz="2800" cap="none" dirty="0">
-              <a:latin typeface="D2Coding" panose="020B0609020101020101" pitchFamily="49" charset="-127"/>
-              <a:ea typeface="D2Coding" panose="020B0609020101020101" pitchFamily="49" charset="-127"/>
-              <a:cs typeface="Segoe UI Light" panose="020B0502040204020203" pitchFamily="34" charset="0"/>
-            </a:endParaRPr>
-          </a:p>
-        </p:txBody>
-      </p:sp>
-      <p:pic>
-        <p:nvPicPr>
-          <p:cNvPr id="17" name="그림 16">
-            <a:extLst>
-              <a:ext uri="{FF2B5EF4-FFF2-40B4-BE49-F238E27FC236}">
-                <a16:creationId xmlns:a16="http://schemas.microsoft.com/office/drawing/2014/main" id="{AE399E9D-0E06-6644-28CE-43E6B82352B6}"/>
-              </a:ext>
-            </a:extLst>
-          </p:cNvPr>
-          <p:cNvPicPr>
-            <a:picLocks noChangeAspect="1"/>
-          </p:cNvPicPr>
-          <p:nvPr/>
-        </p:nvPicPr>
-        <p:blipFill>
-          <a:blip r:embed="rId3"/>
-          <a:stretch>
-            <a:fillRect/>
-          </a:stretch>
-        </p:blipFill>
-        <p:spPr>
-          <a:xfrm>
-            <a:off x="1268356" y="1685745"/>
-            <a:ext cx="9600234" cy="4562655"/>
-          </a:xfrm>
-          <a:prstGeom prst="rect">
-            <a:avLst/>
-          </a:prstGeom>
-        </p:spPr>
-      </p:pic>
-    </p:spTree>
-    <p:extLst>
-      <p:ext uri="{BB962C8B-B14F-4D97-AF65-F5344CB8AC3E}">
-        <p14:creationId xmlns:p14="http://schemas.microsoft.com/office/powerpoint/2010/main" val="1478085054"/>
-      </p:ext>
-    </p:extLst>
-  </p:cSld>
-  <p:clrMapOvr>
-    <a:masterClrMapping/>
-  </p:clrMapOvr>
-</p:sld>
-</file>
-
-<file path=ppt/slides/slide13.xml><?xml version="1.0" encoding="utf-8"?>
-<p:sld xmlns:a="http://schemas.openxmlformats.org/drawingml/2006/main" xmlns:r="http://schemas.openxmlformats.org/officeDocument/2006/relationships" xmlns:p="http://schemas.openxmlformats.org/presentationml/2006/main">
-  <p:cSld>
-    <p:spTree>
-      <p:nvGrpSpPr>
-        <p:cNvPr id="1" name="">
-          <a:extLst>
-            <a:ext uri="{FF2B5EF4-FFF2-40B4-BE49-F238E27FC236}">
               <a16:creationId xmlns:a16="http://schemas.microsoft.com/office/drawing/2014/main" id="{C90A392C-D73D-D148-7BEB-416C2B757A2B}"/>
             </a:ext>
           </a:extLst>
@@ -5309,7 +4845,7 @@
             <a:fld id="{D57F1E4F-1CFF-5643-939E-217C01CDF565}" type="slidenum">
               <a:rPr lang="en-US" smtClean="0"/>
               <a:pPr/>
-              <a:t>13</a:t>
+              <a:t>11</a:t>
             </a:fld>
             <a:endParaRPr lang="en-US" dirty="0"/>
           </a:p>
@@ -5406,6 +4942,11 @@
           <a:solidFill>
             <a:schemeClr val="bg1"/>
           </a:solidFill>
+          <a:ln>
+            <a:solidFill>
+              <a:schemeClr val="tx1"/>
+            </a:solidFill>
+          </a:ln>
         </p:spPr>
         <p:txBody>
           <a:bodyPr wrap="square">
@@ -5459,7 +5000,7 @@
         </p:nvSpPr>
         <p:spPr>
           <a:xfrm>
-            <a:off x="3071251" y="2310922"/>
+            <a:off x="3071251" y="2120422"/>
             <a:ext cx="5586974" cy="369332"/>
           </a:xfrm>
           <a:prstGeom prst="rect">
@@ -5468,6 +5009,11 @@
           <a:solidFill>
             <a:schemeClr val="bg1"/>
           </a:solidFill>
+          <a:ln>
+            <a:solidFill>
+              <a:schemeClr val="tx1"/>
+            </a:solidFill>
+          </a:ln>
         </p:spPr>
         <p:txBody>
           <a:bodyPr wrap="square">
@@ -5500,18 +5046,20 @@
         </p:nvSpPr>
         <p:spPr>
           <a:xfrm>
-            <a:off x="3071251" y="3181083"/>
+            <a:off x="3071251" y="2828658"/>
             <a:ext cx="5586974" cy="369332"/>
           </a:xfrm>
           <a:prstGeom prst="rect">
             <a:avLst/>
           </a:prstGeom>
           <a:solidFill>
-            <a:schemeClr val="accent6">
-              <a:lumMod val="60000"/>
-              <a:lumOff val="40000"/>
-            </a:schemeClr>
+            <a:schemeClr val="bg1"/>
           </a:solidFill>
+          <a:ln>
+            <a:solidFill>
+              <a:schemeClr val="tx1"/>
+            </a:solidFill>
+          </a:ln>
         </p:spPr>
         <p:txBody>
           <a:bodyPr wrap="square">
@@ -5580,6 +5128,11 @@
           <a:solidFill>
             <a:schemeClr val="bg1"/>
           </a:solidFill>
+          <a:ln>
+            <a:solidFill>
+              <a:schemeClr val="tx1"/>
+            </a:solidFill>
+          </a:ln>
         </p:spPr>
         <p:txBody>
           <a:bodyPr wrap="square">
@@ -5642,6 +5195,11 @@
           <a:solidFill>
             <a:schemeClr val="bg1"/>
           </a:solidFill>
+          <a:ln>
+            <a:solidFill>
+              <a:schemeClr val="tx1"/>
+            </a:solidFill>
+          </a:ln>
         </p:spPr>
         <p:txBody>
           <a:bodyPr wrap="square">
@@ -5690,6 +5248,11 @@
           <a:solidFill>
             <a:schemeClr val="bg1"/>
           </a:solidFill>
+          <a:ln>
+            <a:solidFill>
+              <a:schemeClr val="tx1"/>
+            </a:solidFill>
+          </a:ln>
         </p:spPr>
         <p:txBody>
           <a:bodyPr wrap="square">
@@ -5794,6 +5357,11 @@
           <a:solidFill>
             <a:schemeClr val="bg1"/>
           </a:solidFill>
+          <a:ln>
+            <a:solidFill>
+              <a:schemeClr val="tx1"/>
+            </a:solidFill>
+          </a:ln>
         </p:spPr>
         <p:txBody>
           <a:bodyPr wrap="square">
@@ -5851,7 +5419,7 @@
         <p:spPr>
           <a:xfrm>
             <a:off x="5864737" y="1810093"/>
-            <a:ext cx="1" cy="500829"/>
+            <a:ext cx="1" cy="310329"/>
           </a:xfrm>
           <a:prstGeom prst="straightConnector1">
             <a:avLst/>
@@ -5893,8 +5461,8 @@
         </p:nvCxnSpPr>
         <p:spPr>
           <a:xfrm>
-            <a:off x="5864738" y="2680254"/>
-            <a:ext cx="0" cy="500829"/>
+            <a:off x="5864738" y="2489754"/>
+            <a:ext cx="0" cy="338904"/>
           </a:xfrm>
           <a:prstGeom prst="straightConnector1">
             <a:avLst/>
@@ -5936,8 +5504,8 @@
         </p:nvCxnSpPr>
         <p:spPr>
           <a:xfrm rot="5400000">
-            <a:off x="4344067" y="2530572"/>
-            <a:ext cx="500829" cy="2540514"/>
+            <a:off x="4167854" y="2354360"/>
+            <a:ext cx="853254" cy="2540514"/>
           </a:xfrm>
           <a:prstGeom prst="bentConnector3">
             <a:avLst/>
@@ -5979,8 +5547,8 @@
         </p:nvCxnSpPr>
         <p:spPr>
           <a:xfrm rot="16200000" flipH="1">
-            <a:off x="7255370" y="2159783"/>
-            <a:ext cx="501172" cy="3282436"/>
+            <a:off x="7079158" y="1983570"/>
+            <a:ext cx="853597" cy="3282436"/>
           </a:xfrm>
           <a:prstGeom prst="bentConnector3">
             <a:avLst>
@@ -6120,49 +5688,49 @@
           <a:lstStyle/>
           <a:p>
             <a:r>
-              <a:rPr lang="en-US" altLang="ko-KR" sz="1600" b="1" dirty="0" err="1">
+              <a:rPr lang="en-US" altLang="ko-KR" sz="1600" dirty="0" err="1">
                 <a:latin typeface="D2Coding" panose="020B0609020101020101" pitchFamily="49" charset="-127"/>
                 <a:ea typeface="D2Coding" panose="020B0609020101020101" pitchFamily="49" charset="-127"/>
               </a:rPr>
               <a:t>IoU</a:t>
             </a:r>
             <a:r>
-              <a:rPr lang="en-US" altLang="ko-KR" sz="1600" b="1" dirty="0">
+              <a:rPr lang="en-US" altLang="ko-KR" sz="1600" dirty="0">
                 <a:latin typeface="D2Coding" panose="020B0609020101020101" pitchFamily="49" charset="-127"/>
                 <a:ea typeface="D2Coding" panose="020B0609020101020101" pitchFamily="49" charset="-127"/>
               </a:rPr>
               <a:t> </a:t>
             </a:r>
             <a:r>
-              <a:rPr lang="ko-KR" altLang="en-US" sz="1600" b="1" dirty="0">
+              <a:rPr lang="ko-KR" altLang="en-US" sz="1600" dirty="0">
                 <a:latin typeface="D2Coding" panose="020B0609020101020101" pitchFamily="49" charset="-127"/>
                 <a:ea typeface="D2Coding" panose="020B0609020101020101" pitchFamily="49" charset="-127"/>
               </a:rPr>
               <a:t>계산 부분은 모델이 학습할 때 어떤 앵커 박스에 </a:t>
             </a:r>
             <a:r>
-              <a:rPr lang="en-US" altLang="ko-KR" sz="1600" b="1" dirty="0">
+              <a:rPr lang="en-US" altLang="ko-KR" sz="1600" dirty="0">
                 <a:latin typeface="D2Coding" panose="020B0609020101020101" pitchFamily="49" charset="-127"/>
                 <a:ea typeface="D2Coding" panose="020B0609020101020101" pitchFamily="49" charset="-127"/>
               </a:rPr>
               <a:t>'</a:t>
             </a:r>
             <a:r>
-              <a:rPr lang="ko-KR" altLang="en-US" sz="1600" b="1" dirty="0">
+              <a:rPr lang="ko-KR" altLang="en-US" sz="1600" dirty="0">
                 <a:latin typeface="D2Coding" panose="020B0609020101020101" pitchFamily="49" charset="-127"/>
                 <a:ea typeface="D2Coding" panose="020B0609020101020101" pitchFamily="49" charset="-127"/>
               </a:rPr>
               <a:t>정답 책임</a:t>
             </a:r>
             <a:r>
-              <a:rPr lang="en-US" altLang="ko-KR" sz="1600" b="1" dirty="0">
+              <a:rPr lang="en-US" altLang="ko-KR" sz="1600" dirty="0">
                 <a:latin typeface="D2Coding" panose="020B0609020101020101" pitchFamily="49" charset="-127"/>
                 <a:ea typeface="D2Coding" panose="020B0609020101020101" pitchFamily="49" charset="-127"/>
               </a:rPr>
               <a:t>'</a:t>
             </a:r>
             <a:r>
-              <a:rPr lang="ko-KR" altLang="en-US" sz="1600" b="1" dirty="0">
+              <a:rPr lang="ko-KR" altLang="en-US" sz="1600" dirty="0">
                 <a:latin typeface="D2Coding" panose="020B0609020101020101" pitchFamily="49" charset="-127"/>
                 <a:ea typeface="D2Coding" panose="020B0609020101020101" pitchFamily="49" charset="-127"/>
               </a:rPr>
@@ -6184,7 +5752,7 @@
 </p:sld>
 </file>
 
-<file path=ppt/slides/slide14.xml><?xml version="1.0" encoding="utf-8"?>
+<file path=ppt/slides/slide12.xml><?xml version="1.0" encoding="utf-8"?>
 <p:sld xmlns:a="http://schemas.openxmlformats.org/drawingml/2006/main" xmlns:r="http://schemas.openxmlformats.org/officeDocument/2006/relationships" xmlns:p="http://schemas.openxmlformats.org/presentationml/2006/main">
   <p:cSld>
     <p:spTree>
@@ -6224,7 +5792,7 @@
         </p:nvCxnSpPr>
         <p:spPr>
           <a:xfrm>
-            <a:off x="5731894" y="1800253"/>
+            <a:off x="5417569" y="1800253"/>
             <a:ext cx="82512" cy="4199846"/>
           </a:xfrm>
           <a:prstGeom prst="straightConnector1">
@@ -6263,7 +5831,7 @@
         </p:nvSpPr>
         <p:spPr>
           <a:xfrm>
-            <a:off x="962025" y="3676651"/>
+            <a:off x="647700" y="3676651"/>
             <a:ext cx="9620250" cy="1037992"/>
           </a:xfrm>
           <a:prstGeom prst="rect">
@@ -6327,7 +5895,7 @@
             <a:fld id="{D57F1E4F-1CFF-5643-939E-217C01CDF565}" type="slidenum">
               <a:rPr lang="en-US" smtClean="0"/>
               <a:pPr/>
-              <a:t>14</a:t>
+              <a:t>12</a:t>
             </a:fld>
             <a:endParaRPr lang="en-US" dirty="0"/>
           </a:p>
@@ -6428,7 +5996,7 @@
         </p:nvSpPr>
         <p:spPr>
           <a:xfrm>
-            <a:off x="2656870" y="1461699"/>
+            <a:off x="2342545" y="1461699"/>
             <a:ext cx="6150047" cy="338554"/>
           </a:xfrm>
           <a:prstGeom prst="rect">
@@ -6488,7 +6056,7 @@
         </p:nvSpPr>
         <p:spPr>
           <a:xfrm>
-            <a:off x="2656870" y="1934754"/>
+            <a:off x="2342545" y="1934754"/>
             <a:ext cx="6150047" cy="338554"/>
           </a:xfrm>
           <a:prstGeom prst="rect">
@@ -6545,7 +6113,7 @@
         </p:nvSpPr>
         <p:spPr>
           <a:xfrm>
-            <a:off x="2656870" y="2407809"/>
+            <a:off x="2342545" y="2407809"/>
             <a:ext cx="6150047" cy="338554"/>
           </a:xfrm>
           <a:prstGeom prst="rect">
@@ -6612,7 +6180,7 @@
         </p:nvSpPr>
         <p:spPr>
           <a:xfrm>
-            <a:off x="2656870" y="3052313"/>
+            <a:off x="2342545" y="3052313"/>
             <a:ext cx="6150047" cy="338554"/>
           </a:xfrm>
           <a:prstGeom prst="rect">
@@ -6686,7 +6254,7 @@
         </p:nvSpPr>
         <p:spPr>
           <a:xfrm>
-            <a:off x="1178312" y="3776668"/>
+            <a:off x="863987" y="3776668"/>
             <a:ext cx="2526506" cy="584775"/>
           </a:xfrm>
           <a:prstGeom prst="rect">
@@ -6774,7 +6342,7 @@
         </p:nvSpPr>
         <p:spPr>
           <a:xfrm>
-            <a:off x="2660081" y="4913429"/>
+            <a:off x="2345756" y="4913429"/>
             <a:ext cx="6308651" cy="338554"/>
           </a:xfrm>
           <a:prstGeom prst="rect">
@@ -6918,7 +6486,7 @@
         </p:nvSpPr>
         <p:spPr>
           <a:xfrm>
-            <a:off x="2660081" y="5456764"/>
+            <a:off x="2345756" y="5456764"/>
             <a:ext cx="6308651" cy="338554"/>
           </a:xfrm>
           <a:prstGeom prst="rect">
@@ -6985,7 +6553,7 @@
         </p:nvSpPr>
         <p:spPr>
           <a:xfrm>
-            <a:off x="2660080" y="6000099"/>
+            <a:off x="2345755" y="6000099"/>
             <a:ext cx="6308651" cy="338554"/>
           </a:xfrm>
           <a:prstGeom prst="rect">
@@ -7045,7 +6613,7 @@
         </p:nvSpPr>
         <p:spPr>
           <a:xfrm>
-            <a:off x="4635564" y="3776668"/>
+            <a:off x="4321239" y="3776668"/>
             <a:ext cx="2621755" cy="584775"/>
           </a:xfrm>
           <a:prstGeom prst="rect">
@@ -7140,7 +6708,7 @@
         </p:nvSpPr>
         <p:spPr>
           <a:xfrm>
-            <a:off x="8188064" y="3776668"/>
+            <a:off x="7873739" y="3776668"/>
             <a:ext cx="2108461" cy="861774"/>
           </a:xfrm>
           <a:prstGeom prst="rect">
@@ -7263,6 +6831,44 @@
           </a:p>
         </p:txBody>
       </p:sp>
+      <p:sp>
+        <p:nvSpPr>
+          <p:cNvPr id="44" name="TextBox 43">
+            <a:extLst>
+              <a:ext uri="{FF2B5EF4-FFF2-40B4-BE49-F238E27FC236}">
+                <a16:creationId xmlns:a16="http://schemas.microsoft.com/office/drawing/2014/main" id="{CD89F926-22E0-909C-2834-1D6D8680FFFB}"/>
+              </a:ext>
+            </a:extLst>
+          </p:cNvPr>
+          <p:cNvSpPr txBox="1"/>
+          <p:nvPr/>
+        </p:nvSpPr>
+        <p:spPr>
+          <a:xfrm>
+            <a:off x="8635356" y="1384754"/>
+            <a:ext cx="3242319" cy="830997"/>
+          </a:xfrm>
+          <a:prstGeom prst="rect">
+            <a:avLst/>
+          </a:prstGeom>
+          <a:noFill/>
+        </p:spPr>
+        <p:txBody>
+          <a:bodyPr wrap="square">
+            <a:spAutoFit/>
+          </a:bodyPr>
+          <a:lstStyle/>
+          <a:p>
+            <a:r>
+              <a:rPr lang="ko-KR" altLang="en-US" sz="1600" dirty="0">
+                <a:latin typeface="D2Coding" panose="020B0609020101020101" pitchFamily="49" charset="-127"/>
+                <a:ea typeface="D2Coding" panose="020B0609020101020101" pitchFamily="49" charset="-127"/>
+              </a:rPr>
+              <a:t>새로운 이미지가 들어왔을 때 컴퓨터가 단 한 번에 모든 것을 찍어내는 실시간 구동 흐름</a:t>
+            </a:r>
+          </a:p>
+        </p:txBody>
+      </p:sp>
     </p:spTree>
     <p:extLst>
       <p:ext uri="{BB962C8B-B14F-4D97-AF65-F5344CB8AC3E}">
@@ -7276,7 +6882,7 @@
 </p:sld>
 </file>
 
-<file path=ppt/slides/slide15.xml><?xml version="1.0" encoding="utf-8"?>
+<file path=ppt/slides/slide13.xml><?xml version="1.0" encoding="utf-8"?>
 <p:sld xmlns:a="http://schemas.openxmlformats.org/drawingml/2006/main" xmlns:r="http://schemas.openxmlformats.org/officeDocument/2006/relationships" xmlns:p="http://schemas.openxmlformats.org/presentationml/2006/main">
   <p:cSld>
     <p:spTree>
@@ -7284,7 +6890,7 @@
         <p:cNvPr id="1" name="">
           <a:extLst>
             <a:ext uri="{FF2B5EF4-FFF2-40B4-BE49-F238E27FC236}">
-              <a16:creationId xmlns:a16="http://schemas.microsoft.com/office/drawing/2014/main" id="{BBCFC880-3FC5-5040-901C-09509B7019A1}"/>
+              <a16:creationId xmlns:a16="http://schemas.microsoft.com/office/drawing/2014/main" id="{8D67D301-B114-F827-4260-924D7C208916}"/>
             </a:ext>
           </a:extLst>
         </p:cNvPr>
@@ -7304,7 +6910,7 @@
           <p:cNvPr id="4" name="슬라이드 번호 개체 틀 3">
             <a:extLst>
               <a:ext uri="{FF2B5EF4-FFF2-40B4-BE49-F238E27FC236}">
-                <a16:creationId xmlns:a16="http://schemas.microsoft.com/office/drawing/2014/main" id="{A2739D34-884D-6A8E-37A0-AAFA14470011}"/>
+                <a16:creationId xmlns:a16="http://schemas.microsoft.com/office/drawing/2014/main" id="{445FA5C7-898C-1C68-7E74-AD6760E3C3F3}"/>
               </a:ext>
             </a:extLst>
           </p:cNvPr>
@@ -7328,7 +6934,7 @@
             <a:fld id="{D57F1E4F-1CFF-5643-939E-217C01CDF565}" type="slidenum">
               <a:rPr lang="en-US" smtClean="0"/>
               <a:pPr/>
-              <a:t>15</a:t>
+              <a:t>13</a:t>
             </a:fld>
             <a:endParaRPr lang="en-US" dirty="0"/>
           </a:p>
@@ -7339,7 +6945,7 @@
           <p:cNvPr id="3" name="제목 1">
             <a:extLst>
               <a:ext uri="{FF2B5EF4-FFF2-40B4-BE49-F238E27FC236}">
-                <a16:creationId xmlns:a16="http://schemas.microsoft.com/office/drawing/2014/main" id="{C0072049-B98A-6E72-6DB4-6346833BE6D2}"/>
+                <a16:creationId xmlns:a16="http://schemas.microsoft.com/office/drawing/2014/main" id="{1D8A7BF3-1C90-CC60-888E-27948DFAF53C}"/>
               </a:ext>
             </a:extLst>
           </p:cNvPr>
@@ -7399,12 +7005,478 @@
           </a:p>
         </p:txBody>
       </p:sp>
+      <p:pic>
+        <p:nvPicPr>
+          <p:cNvPr id="7" name="Picture 2">
+            <a:extLst>
+              <a:ext uri="{FF2B5EF4-FFF2-40B4-BE49-F238E27FC236}">
+                <a16:creationId xmlns:a16="http://schemas.microsoft.com/office/drawing/2014/main" id="{991A9F3B-8F15-60CA-FF37-066CA17F4ACD}"/>
+              </a:ext>
+            </a:extLst>
+          </p:cNvPr>
+          <p:cNvPicPr>
+            <a:picLocks noChangeAspect="1" noChangeArrowheads="1"/>
+          </p:cNvPicPr>
+          <p:nvPr/>
+        </p:nvPicPr>
+        <p:blipFill>
+          <a:blip r:embed="rId2">
+            <a:extLst>
+              <a:ext uri="{28A0092B-C50C-407E-A947-70E740481C1C}">
+                <a14:useLocalDpi xmlns:a14="http://schemas.microsoft.com/office/drawing/2010/main" val="0"/>
+              </a:ext>
+            </a:extLst>
+          </a:blip>
+          <a:srcRect/>
+          <a:stretch>
+            <a:fillRect/>
+          </a:stretch>
+        </p:blipFill>
+        <p:spPr bwMode="auto">
+          <a:xfrm>
+            <a:off x="1728040" y="2178311"/>
+            <a:ext cx="8244635" cy="4126339"/>
+          </a:xfrm>
+          <a:prstGeom prst="rect">
+            <a:avLst/>
+          </a:prstGeom>
+          <a:noFill/>
+          <a:extLst>
+            <a:ext uri="{909E8E84-426E-40DD-AFC4-6F175D3DCCD1}">
+              <a14:hiddenFill xmlns:a14="http://schemas.microsoft.com/office/drawing/2010/main">
+                <a:solidFill>
+                  <a:srgbClr val="FFFFFF"/>
+                </a:solidFill>
+              </a14:hiddenFill>
+            </a:ext>
+          </a:extLst>
+        </p:spPr>
+      </p:pic>
+      <p:sp>
+        <p:nvSpPr>
+          <p:cNvPr id="8" name="TextBox 7">
+            <a:extLst>
+              <a:ext uri="{FF2B5EF4-FFF2-40B4-BE49-F238E27FC236}">
+                <a16:creationId xmlns:a16="http://schemas.microsoft.com/office/drawing/2014/main" id="{F07ADC64-4751-52A0-DDEB-20843A556B71}"/>
+              </a:ext>
+            </a:extLst>
+          </p:cNvPr>
+          <p:cNvSpPr txBox="1"/>
+          <p:nvPr/>
+        </p:nvSpPr>
+        <p:spPr>
+          <a:xfrm>
+            <a:off x="623140" y="1424888"/>
+            <a:ext cx="11159285" cy="369332"/>
+          </a:xfrm>
+          <a:prstGeom prst="rect">
+            <a:avLst/>
+          </a:prstGeom>
+          <a:noFill/>
+        </p:spPr>
+        <p:txBody>
+          <a:bodyPr wrap="square" rtlCol="0">
+            <a:spAutoFit/>
+          </a:bodyPr>
+          <a:lstStyle/>
+          <a:p>
+            <a:r>
+              <a:rPr lang="ko-KR" altLang="en-US" dirty="0">
+                <a:latin typeface="D2Coding" panose="020B0609020101020101" pitchFamily="49" charset="-127"/>
+                <a:ea typeface="D2Coding" panose="020B0609020101020101" pitchFamily="49" charset="-127"/>
+              </a:rPr>
+              <a:t>컴퓨터가 </a:t>
+            </a:r>
+            <a:r>
+              <a:rPr lang="en-US" altLang="ko-KR" dirty="0">
+                <a:latin typeface="D2Coding" panose="020B0609020101020101" pitchFamily="49" charset="-127"/>
+                <a:ea typeface="D2Coding" panose="020B0609020101020101" pitchFamily="49" charset="-127"/>
+              </a:rPr>
+              <a:t>Image</a:t>
+            </a:r>
+            <a:r>
+              <a:rPr lang="ko-KR" altLang="en-US" dirty="0">
+                <a:latin typeface="D2Coding" panose="020B0609020101020101" pitchFamily="49" charset="-127"/>
+                <a:ea typeface="D2Coding" panose="020B0609020101020101" pitchFamily="49" charset="-127"/>
+              </a:rPr>
+              <a:t>의 물체를 감지하고 분류 예측</a:t>
+            </a:r>
+            <a:r>
+              <a:rPr lang="en-US" altLang="ko-KR" dirty="0">
+                <a:latin typeface="D2Coding" panose="020B0609020101020101" pitchFamily="49" charset="-127"/>
+                <a:ea typeface="D2Coding" panose="020B0609020101020101" pitchFamily="49" charset="-127"/>
+              </a:rPr>
+              <a:t>(Object Detection)</a:t>
+            </a:r>
+            <a:r>
+              <a:rPr lang="ko-KR" altLang="en-US" dirty="0">
+                <a:latin typeface="D2Coding" panose="020B0609020101020101" pitchFamily="49" charset="-127"/>
+                <a:ea typeface="D2Coding" panose="020B0609020101020101" pitchFamily="49" charset="-127"/>
+              </a:rPr>
+              <a:t> </a:t>
+            </a:r>
+            <a:r>
+              <a:rPr lang="en-US" altLang="ko-KR" dirty="0">
+                <a:latin typeface="D2Coding" panose="020B0609020101020101" pitchFamily="49" charset="-127"/>
+                <a:ea typeface="D2Coding" panose="020B0609020101020101" pitchFamily="49" charset="-127"/>
+              </a:rPr>
+              <a:t>: </a:t>
+            </a:r>
+            <a:r>
+              <a:rPr lang="en-US" altLang="ko-KR" dirty="0">
+                <a:latin typeface="D2Coding" panose="020B0609020101020101" pitchFamily="49" charset="-127"/>
+                <a:ea typeface="D2Coding" panose="020B0609020101020101" pitchFamily="49" charset="-127"/>
+                <a:hlinkClick r:id="rId3"/>
+              </a:rPr>
+              <a:t>https://roboflow.com/</a:t>
+            </a:r>
+            <a:r>
+              <a:rPr lang="en-US" altLang="ko-KR" dirty="0">
+                <a:latin typeface="D2Coding" panose="020B0609020101020101" pitchFamily="49" charset="-127"/>
+                <a:ea typeface="D2Coding" panose="020B0609020101020101" pitchFamily="49" charset="-127"/>
+              </a:rPr>
+              <a:t> </a:t>
+            </a:r>
+            <a:r>
+              <a:rPr lang="ko-KR" altLang="en-US" dirty="0">
+                <a:latin typeface="D2Coding" panose="020B0609020101020101" pitchFamily="49" charset="-127"/>
+                <a:ea typeface="D2Coding" panose="020B0609020101020101" pitchFamily="49" charset="-127"/>
+              </a:rPr>
+              <a:t> </a:t>
+            </a:r>
+            <a:endParaRPr lang="ko-KR" altLang="en-US" dirty="0">
+              <a:solidFill>
+                <a:srgbClr val="0070C0"/>
+              </a:solidFill>
+              <a:latin typeface="D2Coding" panose="020B0609020101020101" pitchFamily="49" charset="-127"/>
+              <a:ea typeface="D2Coding" panose="020B0609020101020101" pitchFamily="49" charset="-127"/>
+            </a:endParaRPr>
+          </a:p>
+        </p:txBody>
+      </p:sp>
+    </p:spTree>
+    <p:extLst>
+      <p:ext uri="{BB962C8B-B14F-4D97-AF65-F5344CB8AC3E}">
+        <p14:creationId xmlns:p14="http://schemas.microsoft.com/office/powerpoint/2010/main" val="1798292069"/>
+      </p:ext>
+    </p:extLst>
+  </p:cSld>
+  <p:clrMapOvr>
+    <a:masterClrMapping/>
+  </p:clrMapOvr>
+</p:sld>
+</file>
+
+<file path=ppt/slides/slide14.xml><?xml version="1.0" encoding="utf-8"?>
+<p:sld xmlns:a="http://schemas.openxmlformats.org/drawingml/2006/main" xmlns:r="http://schemas.openxmlformats.org/officeDocument/2006/relationships" xmlns:p="http://schemas.openxmlformats.org/presentationml/2006/main">
+  <p:cSld>
+    <p:spTree>
+      <p:nvGrpSpPr>
+        <p:cNvPr id="1" name="">
+          <a:extLst>
+            <a:ext uri="{FF2B5EF4-FFF2-40B4-BE49-F238E27FC236}">
+              <a16:creationId xmlns:a16="http://schemas.microsoft.com/office/drawing/2014/main" id="{8FB326FB-150E-BE96-08E2-079622462002}"/>
+            </a:ext>
+          </a:extLst>
+        </p:cNvPr>
+        <p:cNvGrpSpPr/>
+        <p:nvPr/>
+      </p:nvGrpSpPr>
+      <p:grpSpPr>
+        <a:xfrm>
+          <a:off x="0" y="0"/>
+          <a:ext cx="0" cy="0"/>
+          <a:chOff x="0" y="0"/>
+          <a:chExt cx="0" cy="0"/>
+        </a:xfrm>
+      </p:grpSpPr>
+      <p:sp>
+        <p:nvSpPr>
+          <p:cNvPr id="4" name="슬라이드 번호 개체 틀 3">
+            <a:extLst>
+              <a:ext uri="{FF2B5EF4-FFF2-40B4-BE49-F238E27FC236}">
+                <a16:creationId xmlns:a16="http://schemas.microsoft.com/office/drawing/2014/main" id="{AF74812A-4AB7-6AC8-E8CF-FBA1128EF365}"/>
+              </a:ext>
+            </a:extLst>
+          </p:cNvPr>
+          <p:cNvSpPr>
+            <a:spLocks noGrp="1"/>
+          </p:cNvSpPr>
+          <p:nvPr>
+            <p:ph type="sldNum" sz="quarter" idx="12"/>
+          </p:nvPr>
+        </p:nvSpPr>
+        <p:spPr>
+          <a:xfrm>
+            <a:off x="10514011" y="6036261"/>
+            <a:ext cx="753545" cy="365125"/>
+          </a:xfrm>
+        </p:spPr>
+        <p:txBody>
+          <a:bodyPr/>
+          <a:lstStyle/>
+          <a:p>
+            <a:fld id="{D57F1E4F-1CFF-5643-939E-217C01CDF565}" type="slidenum">
+              <a:rPr lang="en-US" smtClean="0"/>
+              <a:pPr/>
+              <a:t>14</a:t>
+            </a:fld>
+            <a:endParaRPr lang="en-US" dirty="0"/>
+          </a:p>
+        </p:txBody>
+      </p:sp>
+      <p:sp>
+        <p:nvSpPr>
+          <p:cNvPr id="3" name="제목 1">
+            <a:extLst>
+              <a:ext uri="{FF2B5EF4-FFF2-40B4-BE49-F238E27FC236}">
+                <a16:creationId xmlns:a16="http://schemas.microsoft.com/office/drawing/2014/main" id="{FCBB2FC7-ABBB-6EF3-A901-A983D707DAD0}"/>
+              </a:ext>
+            </a:extLst>
+          </p:cNvPr>
+          <p:cNvSpPr txBox="1">
+            <a:spLocks/>
+          </p:cNvSpPr>
+          <p:nvPr/>
+        </p:nvSpPr>
+        <p:spPr>
+          <a:xfrm>
+            <a:off x="475645" y="481983"/>
+            <a:ext cx="10353762" cy="766439"/>
+          </a:xfrm>
+          <a:prstGeom prst="rect">
+            <a:avLst/>
+          </a:prstGeom>
+        </p:spPr>
+        <p:txBody>
+          <a:bodyPr vert="horz" lIns="91440" tIns="45720" rIns="91440" bIns="45720" rtlCol="0" anchor="ctr">
+            <a:normAutofit/>
+          </a:bodyPr>
+          <a:lstStyle>
+            <a:lvl1pPr algn="ctr" defTabSz="914400" rtl="0" eaLnBrk="1" latinLnBrk="1" hangingPunct="1">
+              <a:lnSpc>
+                <a:spcPct val="90000"/>
+              </a:lnSpc>
+              <a:spcBef>
+                <a:spcPct val="0"/>
+              </a:spcBef>
+              <a:buNone/>
+              <a:defRPr sz="3200" kern="1200" cap="all" baseline="0">
+                <a:solidFill>
+                  <a:schemeClr val="tx1"/>
+                </a:solidFill>
+                <a:effectLst/>
+                <a:latin typeface="Batang" panose="02030600000101010101" pitchFamily="18" charset="-127"/>
+                <a:ea typeface="Batang" panose="02030600000101010101" pitchFamily="18" charset="-127"/>
+                <a:cs typeface="+mj-cs"/>
+              </a:defRPr>
+            </a:lvl1pPr>
+          </a:lstStyle>
+          <a:p>
+            <a:pPr algn="l"/>
+            <a:r>
+              <a:rPr lang="en-US" altLang="ko-KR" sz="2800" cap="none" dirty="0">
+                <a:latin typeface="D2Coding" panose="020B0609020101020101" pitchFamily="49" charset="-127"/>
+                <a:ea typeface="D2Coding" panose="020B0609020101020101" pitchFamily="49" charset="-127"/>
+                <a:cs typeface="Segoe UI Light" panose="020B0502040204020203" pitchFamily="34" charset="0"/>
+              </a:rPr>
+              <a:t>YOLO: </a:t>
+            </a:r>
+            <a:r>
+              <a:rPr lang="en-US" altLang="ko-KR" sz="2800" cap="none" dirty="0">
+                <a:latin typeface="D2Coding" panose="020B0609020101020101" pitchFamily="49" charset="-127"/>
+                <a:ea typeface="D2Coding" panose="020B0609020101020101" pitchFamily="49" charset="-127"/>
+                <a:cs typeface="Segoe UI Light" panose="020B0502040204020203" pitchFamily="34" charset="0"/>
+                <a:hlinkClick r:id="rId2">
+                  <a:extLst>
+                    <a:ext uri="{A12FA001-AC4F-418D-AE19-62706E023703}">
+                      <ahyp:hlinkClr xmlns:ahyp="http://schemas.microsoft.com/office/drawing/2018/hyperlinkcolor" val="tx"/>
+                    </a:ext>
+                  </a:extLst>
+                </a:hlinkClick>
+              </a:rPr>
+              <a:t>YOLO Object Detection</a:t>
+            </a:r>
+            <a:endParaRPr lang="ko-KR" altLang="en-US" sz="2800" cap="none" dirty="0">
+              <a:latin typeface="D2Coding" panose="020B0609020101020101" pitchFamily="49" charset="-127"/>
+              <a:ea typeface="D2Coding" panose="020B0609020101020101" pitchFamily="49" charset="-127"/>
+              <a:cs typeface="Segoe UI Light" panose="020B0502040204020203" pitchFamily="34" charset="0"/>
+            </a:endParaRPr>
+          </a:p>
+        </p:txBody>
+      </p:sp>
+      <p:pic>
+        <p:nvPicPr>
+          <p:cNvPr id="17" name="그림 16">
+            <a:extLst>
+              <a:ext uri="{FF2B5EF4-FFF2-40B4-BE49-F238E27FC236}">
+                <a16:creationId xmlns:a16="http://schemas.microsoft.com/office/drawing/2014/main" id="{AE399E9D-0E06-6644-28CE-43E6B82352B6}"/>
+              </a:ext>
+            </a:extLst>
+          </p:cNvPr>
+          <p:cNvPicPr>
+            <a:picLocks noChangeAspect="1"/>
+          </p:cNvPicPr>
+          <p:nvPr/>
+        </p:nvPicPr>
+        <p:blipFill>
+          <a:blip r:embed="rId3"/>
+          <a:stretch>
+            <a:fillRect/>
+          </a:stretch>
+        </p:blipFill>
+        <p:spPr>
+          <a:xfrm>
+            <a:off x="1268356" y="1685745"/>
+            <a:ext cx="9600234" cy="4562655"/>
+          </a:xfrm>
+          <a:prstGeom prst="rect">
+            <a:avLst/>
+          </a:prstGeom>
+        </p:spPr>
+      </p:pic>
+    </p:spTree>
+    <p:extLst>
+      <p:ext uri="{BB962C8B-B14F-4D97-AF65-F5344CB8AC3E}">
+        <p14:creationId xmlns:p14="http://schemas.microsoft.com/office/powerpoint/2010/main" val="1478085054"/>
+      </p:ext>
+    </p:extLst>
+  </p:cSld>
+  <p:clrMapOvr>
+    <a:masterClrMapping/>
+  </p:clrMapOvr>
+</p:sld>
+</file>
+
+<file path=ppt/slides/slide15.xml><?xml version="1.0" encoding="utf-8"?>
+<p:sld xmlns:a="http://schemas.openxmlformats.org/drawingml/2006/main" xmlns:r="http://schemas.openxmlformats.org/officeDocument/2006/relationships" xmlns:p="http://schemas.openxmlformats.org/presentationml/2006/main">
+  <p:cSld>
+    <p:spTree>
+      <p:nvGrpSpPr>
+        <p:cNvPr id="1" name="">
+          <a:extLst>
+            <a:ext uri="{FF2B5EF4-FFF2-40B4-BE49-F238E27FC236}">
+              <a16:creationId xmlns:a16="http://schemas.microsoft.com/office/drawing/2014/main" id="{50B3DCF7-1DBA-D4CB-1900-6CB1F1A10862}"/>
+            </a:ext>
+          </a:extLst>
+        </p:cNvPr>
+        <p:cNvGrpSpPr/>
+        <p:nvPr/>
+      </p:nvGrpSpPr>
+      <p:grpSpPr>
+        <a:xfrm>
+          <a:off x="0" y="0"/>
+          <a:ext cx="0" cy="0"/>
+          <a:chOff x="0" y="0"/>
+          <a:chExt cx="0" cy="0"/>
+        </a:xfrm>
+      </p:grpSpPr>
+      <p:sp>
+        <p:nvSpPr>
+          <p:cNvPr id="4" name="슬라이드 번호 개체 틀 3">
+            <a:extLst>
+              <a:ext uri="{FF2B5EF4-FFF2-40B4-BE49-F238E27FC236}">
+                <a16:creationId xmlns:a16="http://schemas.microsoft.com/office/drawing/2014/main" id="{F1F65D88-8573-ADF0-534A-5F383AF9AA44}"/>
+              </a:ext>
+            </a:extLst>
+          </p:cNvPr>
+          <p:cNvSpPr>
+            <a:spLocks noGrp="1"/>
+          </p:cNvSpPr>
+          <p:nvPr>
+            <p:ph type="sldNum" sz="quarter" idx="12"/>
+          </p:nvPr>
+        </p:nvSpPr>
+        <p:spPr>
+          <a:xfrm>
+            <a:off x="10514011" y="6036261"/>
+            <a:ext cx="753545" cy="365125"/>
+          </a:xfrm>
+        </p:spPr>
+        <p:txBody>
+          <a:bodyPr/>
+          <a:lstStyle/>
+          <a:p>
+            <a:fld id="{D57F1E4F-1CFF-5643-939E-217C01CDF565}" type="slidenum">
+              <a:rPr lang="en-US" smtClean="0"/>
+              <a:pPr/>
+              <a:t>15</a:t>
+            </a:fld>
+            <a:endParaRPr lang="en-US" dirty="0"/>
+          </a:p>
+        </p:txBody>
+      </p:sp>
+      <p:sp>
+        <p:nvSpPr>
+          <p:cNvPr id="3" name="제목 1">
+            <a:extLst>
+              <a:ext uri="{FF2B5EF4-FFF2-40B4-BE49-F238E27FC236}">
+                <a16:creationId xmlns:a16="http://schemas.microsoft.com/office/drawing/2014/main" id="{78388F96-8C5B-F1DF-C77E-73C822A46DA6}"/>
+              </a:ext>
+            </a:extLst>
+          </p:cNvPr>
+          <p:cNvSpPr txBox="1">
+            <a:spLocks/>
+          </p:cNvSpPr>
+          <p:nvPr/>
+        </p:nvSpPr>
+        <p:spPr>
+          <a:xfrm>
+            <a:off x="475645" y="481983"/>
+            <a:ext cx="10353762" cy="766439"/>
+          </a:xfrm>
+          <a:prstGeom prst="rect">
+            <a:avLst/>
+          </a:prstGeom>
+        </p:spPr>
+        <p:txBody>
+          <a:bodyPr vert="horz" lIns="91440" tIns="45720" rIns="91440" bIns="45720" rtlCol="0" anchor="ctr">
+            <a:normAutofit/>
+          </a:bodyPr>
+          <a:lstStyle>
+            <a:lvl1pPr algn="ctr" defTabSz="914400" rtl="0" eaLnBrk="1" latinLnBrk="1" hangingPunct="1">
+              <a:lnSpc>
+                <a:spcPct val="90000"/>
+              </a:lnSpc>
+              <a:spcBef>
+                <a:spcPct val="0"/>
+              </a:spcBef>
+              <a:buNone/>
+              <a:defRPr sz="3200" kern="1200" cap="all" baseline="0">
+                <a:solidFill>
+                  <a:schemeClr val="tx1"/>
+                </a:solidFill>
+                <a:effectLst/>
+                <a:latin typeface="Batang" panose="02030600000101010101" pitchFamily="18" charset="-127"/>
+                <a:ea typeface="Batang" panose="02030600000101010101" pitchFamily="18" charset="-127"/>
+                <a:cs typeface="+mj-cs"/>
+              </a:defRPr>
+            </a:lvl1pPr>
+          </a:lstStyle>
+          <a:p>
+            <a:pPr algn="l"/>
+            <a:r>
+              <a:rPr lang="en-US" altLang="ko-KR" sz="2800" cap="none" dirty="0">
+                <a:latin typeface="D2Coding" panose="020B0609020101020101" pitchFamily="49" charset="-127"/>
+                <a:ea typeface="D2Coding" panose="020B0609020101020101" pitchFamily="49" charset="-127"/>
+                <a:cs typeface="Segoe UI Light" panose="020B0502040204020203" pitchFamily="34" charset="0"/>
+              </a:rPr>
+              <a:t>YOLO</a:t>
+            </a:r>
+            <a:endParaRPr lang="ko-KR" altLang="en-US" sz="2800" cap="none" dirty="0">
+              <a:latin typeface="D2Coding" panose="020B0609020101020101" pitchFamily="49" charset="-127"/>
+              <a:ea typeface="D2Coding" panose="020B0609020101020101" pitchFamily="49" charset="-127"/>
+              <a:cs typeface="Segoe UI Light" panose="020B0502040204020203" pitchFamily="34" charset="0"/>
+            </a:endParaRPr>
+          </a:p>
+        </p:txBody>
+      </p:sp>
       <p:sp>
         <p:nvSpPr>
           <p:cNvPr id="11" name="TextBox 10">
             <a:extLst>
               <a:ext uri="{FF2B5EF4-FFF2-40B4-BE49-F238E27FC236}">
-                <a16:creationId xmlns:a16="http://schemas.microsoft.com/office/drawing/2014/main" id="{05DBD817-F068-6BAF-9E41-3CB38C12C624}"/>
+                <a16:creationId xmlns:a16="http://schemas.microsoft.com/office/drawing/2014/main" id="{113E2947-A36B-D4FB-CE58-18226E25275C}"/>
               </a:ext>
             </a:extLst>
           </p:cNvPr>
@@ -7500,7 +7572,7 @@
                 <a:latin typeface="D2Coding" panose="020B0609020101020101" pitchFamily="49" charset="-127"/>
                 <a:ea typeface="D2Coding" panose="020B0609020101020101" pitchFamily="49" charset="-127"/>
               </a:rPr>
-              <a:t>값을 생성</a:t>
+              <a:t>값을 생성하고 </a:t>
             </a:r>
             <a:endParaRPr lang="en-US" altLang="ko-KR" dirty="0">
               <a:latin typeface="D2Coding" panose="020B0609020101020101" pitchFamily="49" charset="-127"/>
@@ -7514,7 +7586,7 @@
           <p:cNvPr id="6" name="제목 1">
             <a:extLst>
               <a:ext uri="{FF2B5EF4-FFF2-40B4-BE49-F238E27FC236}">
-                <a16:creationId xmlns:a16="http://schemas.microsoft.com/office/drawing/2014/main" id="{FCCFD44B-A96A-7C75-4F30-5EBDA0F0CC5B}"/>
+                <a16:creationId xmlns:a16="http://schemas.microsoft.com/office/drawing/2014/main" id="{3D9F3631-9490-A675-864C-33CEA1F143A9}"/>
               </a:ext>
             </a:extLst>
           </p:cNvPr>
@@ -7582,7 +7654,7 @@
           <p:cNvPr id="10" name="표 9">
             <a:extLst>
               <a:ext uri="{FF2B5EF4-FFF2-40B4-BE49-F238E27FC236}">
-                <a16:creationId xmlns:a16="http://schemas.microsoft.com/office/drawing/2014/main" id="{6395662B-B4C5-A72E-099F-FBD431E5E9A3}"/>
+                <a16:creationId xmlns:a16="http://schemas.microsoft.com/office/drawing/2014/main" id="{C5DEAD37-CB18-E69A-24A6-CAD4CBE65C7D}"/>
               </a:ext>
             </a:extLst>
           </p:cNvPr>
@@ -7592,14 +7664,14 @@
           <p:nvPr>
             <p:extLst>
               <p:ext uri="{D42A27DB-BD31-4B8C-83A1-F6EECF244321}">
-                <p14:modId xmlns:p14="http://schemas.microsoft.com/office/powerpoint/2010/main" val="2197550660"/>
+                <p14:modId xmlns:p14="http://schemas.microsoft.com/office/powerpoint/2010/main" val="4106436136"/>
               </p:ext>
             </p:extLst>
           </p:nvPr>
         </p:nvGraphicFramePr>
         <p:xfrm>
-          <a:off x="790572" y="3090008"/>
-          <a:ext cx="3790953" cy="3204663"/>
+          <a:off x="2057397" y="3376294"/>
+          <a:ext cx="2966088" cy="2430681"/>
         </p:xfrm>
         <a:graphic>
           <a:graphicData uri="http://schemas.openxmlformats.org/drawingml/2006/table">
@@ -7608,21 +7680,21 @@
                 <a:tableStyleId>{5940675A-B579-460E-94D1-54222C63F5DA}</a:tableStyleId>
               </a:tblPr>
               <a:tblGrid>
-                <a:gridCol w="1263651">
+                <a:gridCol w="988696">
                   <a:extLst>
                     <a:ext uri="{9D8B030D-6E8A-4147-A177-3AD203B41FA5}">
                       <a16:colId xmlns:a16="http://schemas.microsoft.com/office/drawing/2014/main" val="1961843274"/>
                     </a:ext>
                   </a:extLst>
                 </a:gridCol>
-                <a:gridCol w="1263651">
+                <a:gridCol w="988696">
                   <a:extLst>
                     <a:ext uri="{9D8B030D-6E8A-4147-A177-3AD203B41FA5}">
                       <a16:colId xmlns:a16="http://schemas.microsoft.com/office/drawing/2014/main" val="2923400843"/>
                     </a:ext>
                   </a:extLst>
                 </a:gridCol>
-                <a:gridCol w="1263651">
+                <a:gridCol w="988696">
                   <a:extLst>
                     <a:ext uri="{9D8B030D-6E8A-4147-A177-3AD203B41FA5}">
                       <a16:colId xmlns:a16="http://schemas.microsoft.com/office/drawing/2014/main" val="2951067763"/>
@@ -7630,28 +7702,60 @@
                   </a:extLst>
                 </a:gridCol>
               </a:tblGrid>
-              <a:tr h="1068221">
+              <a:tr h="810227">
                 <a:tc>
                   <a:txBody>
                     <a:bodyPr/>
                     <a:lstStyle/>
                     <a:p>
-                      <a:pPr latinLnBrk="1"/>
-                      <a:endParaRPr lang="ko-KR" altLang="en-US" sz="1400" dirty="0">
+                      <a:pPr algn="ctr" latinLnBrk="1"/>
+                      <a:endParaRPr lang="en-US" altLang="ko-KR" sz="1200" dirty="0">
                         <a:solidFill>
-                          <a:srgbClr val="FF0000"/>
+                          <a:schemeClr val="tx1"/>
+                        </a:solidFill>
+                      </a:endParaRPr>
+                    </a:p>
+                    <a:p>
+                      <a:pPr algn="ctr" latinLnBrk="1"/>
+                      <a:endParaRPr lang="en-US" altLang="ko-KR" sz="1200" dirty="0">
+                        <a:solidFill>
+                          <a:schemeClr val="tx1"/>
+                        </a:solidFill>
+                      </a:endParaRPr>
+                    </a:p>
+                    <a:p>
+                      <a:pPr algn="ctr" latinLnBrk="1"/>
+                      <a:endParaRPr lang="en-US" altLang="ko-KR" sz="1200" dirty="0">
+                        <a:solidFill>
+                          <a:schemeClr val="tx1"/>
+                        </a:solidFill>
+                      </a:endParaRPr>
+                    </a:p>
+                    <a:p>
+                      <a:pPr algn="ctr" latinLnBrk="1"/>
+                      <a:r>
+                        <a:rPr lang="en-US" altLang="ko-KR" sz="1200" dirty="0">
+                          <a:solidFill>
+                            <a:schemeClr val="tx1"/>
+                          </a:solidFill>
+                        </a:rPr>
+                        <a:t>0.01</a:t>
+                      </a:r>
+                      <a:endParaRPr lang="ko-KR" altLang="en-US" sz="1200" dirty="0">
+                        <a:solidFill>
+                          <a:schemeClr val="tx1"/>
                         </a:solidFill>
                       </a:endParaRPr>
                     </a:p>
                   </a:txBody>
-                  <a:tcPr marL="86797" marR="86797" marT="43397" marB="43397"/>
+                  <a:tcPr marL="67388" marR="67388" marT="33693" marB="33693"/>
                 </a:tc>
                 <a:tc>
                   <a:txBody>
                     <a:bodyPr/>
                     <a:lstStyle/>
                     <a:p>
-                      <a:pPr marL="0" marR="0" lvl="0" indent="0" algn="l" defTabSz="914400" rtl="0" eaLnBrk="1" fontAlgn="auto" latinLnBrk="1" hangingPunct="1">
+                      <a:pPr marL="0" marR="0" lvl="0" indent="0" algn="ctr" defTabSz="914400" rtl="0" eaLnBrk="1" fontAlgn="auto" latinLnBrk="1" hangingPunct="1">
                         <a:lnSpc>
                           <a:spcPct val="100000"/>
                         </a:lnSpc>
@@ -7668,12 +7772,128 @@
                         <a:tabLst/>
                         <a:defRPr/>
                       </a:pPr>
-                      <a:endParaRPr kumimoji="0" lang="ko-KR" altLang="en-US" sz="1400" b="0" i="0" u="none" strike="noStrike" kern="1200" cap="none" spc="0" normalizeH="0" baseline="0" noProof="0" dirty="0">
+                      <a:endParaRPr kumimoji="0" lang="en-US" altLang="ko-KR" sz="1200" b="0" i="0" u="none" strike="noStrike" kern="1200" cap="none" spc="0" normalizeH="0" baseline="0" noProof="0" dirty="0">
                         <a:ln>
                           <a:noFill/>
                         </a:ln>
                         <a:solidFill>
-                          <a:srgbClr val="FF0000"/>
+                          <a:schemeClr val="tx1"/>
+                        </a:solidFill>
+                        <a:effectLst/>
+                        <a:uLnTx/>
+                        <a:uFillTx/>
+                        <a:latin typeface="Segoe UI"/>
+                        <a:ea typeface="+mn-ea"/>
+                        <a:cs typeface="+mn-cs"/>
+                      </a:endParaRPr>
+                    </a:p>
+                    <a:p>
+                      <a:pPr marL="0" marR="0" lvl="0" indent="0" algn="ctr" defTabSz="914400" rtl="0" eaLnBrk="1" fontAlgn="auto" latinLnBrk="1" hangingPunct="1">
+                        <a:lnSpc>
+                          <a:spcPct val="100000"/>
+                        </a:lnSpc>
+                        <a:spcBef>
+                          <a:spcPts val="0"/>
+                        </a:spcBef>
+                        <a:spcAft>
+                          <a:spcPts val="0"/>
+                        </a:spcAft>
+                        <a:buClrTx/>
+                        <a:buSzTx/>
+                        <a:buFontTx/>
+                        <a:buNone/>
+                        <a:tabLst/>
+                        <a:defRPr/>
+                      </a:pPr>
+                      <a:endParaRPr kumimoji="0" lang="en-US" altLang="ko-KR" sz="1200" b="0" i="0" u="none" strike="noStrike" kern="1200" cap="none" spc="0" normalizeH="0" baseline="0" noProof="0" dirty="0">
+                        <a:ln>
+                          <a:noFill/>
+                        </a:ln>
+                        <a:solidFill>
+                          <a:schemeClr val="tx1"/>
+                        </a:solidFill>
+                        <a:effectLst/>
+                        <a:uLnTx/>
+                        <a:uFillTx/>
+                        <a:latin typeface="Segoe UI"/>
+                        <a:ea typeface="+mn-ea"/>
+                        <a:cs typeface="+mn-cs"/>
+                      </a:endParaRPr>
+                    </a:p>
+                    <a:p>
+                      <a:pPr marL="0" marR="0" lvl="0" indent="0" algn="ctr" defTabSz="914400" rtl="0" eaLnBrk="1" fontAlgn="auto" latinLnBrk="1" hangingPunct="1">
+                        <a:lnSpc>
+                          <a:spcPct val="100000"/>
+                        </a:lnSpc>
+                        <a:spcBef>
+                          <a:spcPts val="0"/>
+                        </a:spcBef>
+                        <a:spcAft>
+                          <a:spcPts val="0"/>
+                        </a:spcAft>
+                        <a:buClrTx/>
+                        <a:buSzTx/>
+                        <a:buFontTx/>
+                        <a:buNone/>
+                        <a:tabLst/>
+                        <a:defRPr/>
+                      </a:pPr>
+                      <a:endParaRPr kumimoji="0" lang="en-US" altLang="ko-KR" sz="1200" b="0" i="0" u="none" strike="noStrike" kern="1200" cap="none" spc="0" normalizeH="0" baseline="0" noProof="0" dirty="0">
+                        <a:ln>
+                          <a:noFill/>
+                        </a:ln>
+                        <a:solidFill>
+                          <a:schemeClr val="tx1"/>
+                        </a:solidFill>
+                        <a:effectLst/>
+                        <a:uLnTx/>
+                        <a:uFillTx/>
+                        <a:latin typeface="Segoe UI"/>
+                        <a:ea typeface="+mn-ea"/>
+                        <a:cs typeface="+mn-cs"/>
+                      </a:endParaRPr>
+                    </a:p>
+                    <a:p>
+                      <a:pPr marL="0" marR="0" lvl="0" indent="0" algn="ctr" defTabSz="914400" rtl="0" eaLnBrk="1" fontAlgn="auto" latinLnBrk="1" hangingPunct="1">
+                        <a:lnSpc>
+                          <a:spcPct val="100000"/>
+                        </a:lnSpc>
+                        <a:spcBef>
+                          <a:spcPts val="0"/>
+                        </a:spcBef>
+                        <a:spcAft>
+                          <a:spcPts val="0"/>
+                        </a:spcAft>
+                        <a:buClrTx/>
+                        <a:buSzTx/>
+                        <a:buFontTx/>
+                        <a:buNone/>
+                        <a:tabLst/>
+                        <a:defRPr/>
+                      </a:pPr>
+                      <a:r>
+                        <a:rPr kumimoji="0" lang="en-US" altLang="ko-KR" sz="1200" b="0" i="0" u="none" strike="noStrike" kern="1200" cap="none" spc="0" normalizeH="0" baseline="0" noProof="0" dirty="0">
+                          <a:ln>
+                            <a:noFill/>
+                          </a:ln>
+                          <a:solidFill>
+                            <a:schemeClr val="tx1"/>
+                          </a:solidFill>
+                          <a:effectLst/>
+                          <a:uLnTx/>
+                          <a:uFillTx/>
+                          <a:latin typeface="Segoe UI"/>
+                          <a:ea typeface="+mn-ea"/>
+                          <a:cs typeface="+mn-cs"/>
+                        </a:rPr>
+                        <a:t>0.15</a:t>
+                      </a:r>
+                      <a:endParaRPr kumimoji="0" lang="ko-KR" altLang="en-US" sz="1200" b="0" i="0" u="none" strike="noStrike" kern="1200" cap="none" spc="0" normalizeH="0" baseline="0" noProof="0" dirty="0">
+                        <a:ln>
+                          <a:noFill/>
+                        </a:ln>
+                        <a:solidFill>
+                          <a:schemeClr val="tx1"/>
                         </a:solidFill>
                         <a:effectLst/>
                         <a:uLnTx/>
@@ -7684,14 +7904,14 @@
                       </a:endParaRPr>
                     </a:p>
                   </a:txBody>
-                  <a:tcPr marL="86797" marR="86797" marT="43397" marB="43397"/>
+                  <a:tcPr marL="67388" marR="67388" marT="33693" marB="33693"/>
                 </a:tc>
                 <a:tc>
                   <a:txBody>
                     <a:bodyPr/>
                     <a:lstStyle/>
                     <a:p>
-                      <a:pPr marL="0" marR="0" lvl="0" indent="0" algn="l" defTabSz="914400" rtl="0" eaLnBrk="1" fontAlgn="auto" latinLnBrk="1" hangingPunct="1">
+                      <a:pPr marL="0" marR="0" lvl="0" indent="0" algn="ctr" defTabSz="914400" rtl="0" eaLnBrk="1" fontAlgn="auto" latinLnBrk="1" hangingPunct="1">
                         <a:lnSpc>
                           <a:spcPct val="100000"/>
                         </a:lnSpc>
@@ -7708,12 +7928,128 @@
                         <a:tabLst/>
                         <a:defRPr/>
                       </a:pPr>
-                      <a:endParaRPr kumimoji="0" lang="ko-KR" altLang="en-US" sz="1400" b="0" i="0" u="none" strike="noStrike" kern="1200" cap="none" spc="0" normalizeH="0" baseline="0" noProof="0" dirty="0">
+                      <a:endParaRPr kumimoji="0" lang="en-US" altLang="ko-KR" sz="1200" b="0" i="0" u="none" strike="noStrike" kern="1200" cap="none" spc="0" normalizeH="0" baseline="0" noProof="0" dirty="0">
                         <a:ln>
                           <a:noFill/>
                         </a:ln>
                         <a:solidFill>
-                          <a:srgbClr val="FF0000"/>
+                          <a:schemeClr val="tx1"/>
+                        </a:solidFill>
+                        <a:effectLst/>
+                        <a:uLnTx/>
+                        <a:uFillTx/>
+                        <a:latin typeface="Segoe UI"/>
+                        <a:ea typeface="+mn-ea"/>
+                        <a:cs typeface="+mn-cs"/>
+                      </a:endParaRPr>
+                    </a:p>
+                    <a:p>
+                      <a:pPr marL="0" marR="0" lvl="0" indent="0" algn="ctr" defTabSz="914400" rtl="0" eaLnBrk="1" fontAlgn="auto" latinLnBrk="1" hangingPunct="1">
+                        <a:lnSpc>
+                          <a:spcPct val="100000"/>
+                        </a:lnSpc>
+                        <a:spcBef>
+                          <a:spcPts val="0"/>
+                        </a:spcBef>
+                        <a:spcAft>
+                          <a:spcPts val="0"/>
+                        </a:spcAft>
+                        <a:buClrTx/>
+                        <a:buSzTx/>
+                        <a:buFontTx/>
+                        <a:buNone/>
+                        <a:tabLst/>
+                        <a:defRPr/>
+                      </a:pPr>
+                      <a:endParaRPr kumimoji="0" lang="en-US" altLang="ko-KR" sz="1200" b="0" i="0" u="none" strike="noStrike" kern="1200" cap="none" spc="0" normalizeH="0" baseline="0" noProof="0" dirty="0">
+                        <a:ln>
+                          <a:noFill/>
+                        </a:ln>
+                        <a:solidFill>
+                          <a:schemeClr val="tx1"/>
+                        </a:solidFill>
+                        <a:effectLst/>
+                        <a:uLnTx/>
+                        <a:uFillTx/>
+                        <a:latin typeface="Segoe UI"/>
+                        <a:ea typeface="+mn-ea"/>
+                        <a:cs typeface="+mn-cs"/>
+                      </a:endParaRPr>
+                    </a:p>
+                    <a:p>
+                      <a:pPr marL="0" marR="0" lvl="0" indent="0" algn="ctr" defTabSz="914400" rtl="0" eaLnBrk="1" fontAlgn="auto" latinLnBrk="1" hangingPunct="1">
+                        <a:lnSpc>
+                          <a:spcPct val="100000"/>
+                        </a:lnSpc>
+                        <a:spcBef>
+                          <a:spcPts val="0"/>
+                        </a:spcBef>
+                        <a:spcAft>
+                          <a:spcPts val="0"/>
+                        </a:spcAft>
+                        <a:buClrTx/>
+                        <a:buSzTx/>
+                        <a:buFontTx/>
+                        <a:buNone/>
+                        <a:tabLst/>
+                        <a:defRPr/>
+                      </a:pPr>
+                      <a:endParaRPr kumimoji="0" lang="en-US" altLang="ko-KR" sz="1200" b="0" i="0" u="none" strike="noStrike" kern="1200" cap="none" spc="0" normalizeH="0" baseline="0" noProof="0" dirty="0">
+                        <a:ln>
+                          <a:noFill/>
+                        </a:ln>
+                        <a:solidFill>
+                          <a:schemeClr val="tx1"/>
+                        </a:solidFill>
+                        <a:effectLst/>
+                        <a:uLnTx/>
+                        <a:uFillTx/>
+                        <a:latin typeface="Segoe UI"/>
+                        <a:ea typeface="+mn-ea"/>
+                        <a:cs typeface="+mn-cs"/>
+                      </a:endParaRPr>
+                    </a:p>
+                    <a:p>
+                      <a:pPr marL="0" marR="0" lvl="0" indent="0" algn="ctr" defTabSz="914400" rtl="0" eaLnBrk="1" fontAlgn="auto" latinLnBrk="1" hangingPunct="1">
+                        <a:lnSpc>
+                          <a:spcPct val="100000"/>
+                        </a:lnSpc>
+                        <a:spcBef>
+                          <a:spcPts val="0"/>
+                        </a:spcBef>
+                        <a:spcAft>
+                          <a:spcPts val="0"/>
+                        </a:spcAft>
+                        <a:buClrTx/>
+                        <a:buSzTx/>
+                        <a:buFontTx/>
+                        <a:buNone/>
+                        <a:tabLst/>
+                        <a:defRPr/>
+                      </a:pPr>
+                      <a:r>
+                        <a:rPr kumimoji="0" lang="en-US" altLang="ko-KR" sz="1200" b="0" i="0" u="none" strike="noStrike" kern="1200" cap="none" spc="0" normalizeH="0" baseline="0" noProof="0" dirty="0">
+                          <a:ln>
+                            <a:noFill/>
+                          </a:ln>
+                          <a:solidFill>
+                            <a:schemeClr val="tx1"/>
+                          </a:solidFill>
+                          <a:effectLst/>
+                          <a:uLnTx/>
+                          <a:uFillTx/>
+                          <a:latin typeface="Segoe UI"/>
+                          <a:ea typeface="+mn-ea"/>
+                          <a:cs typeface="+mn-cs"/>
+                        </a:rPr>
+                        <a:t>0.06</a:t>
+                      </a:r>
+                      <a:endParaRPr kumimoji="0" lang="ko-KR" altLang="en-US" sz="1200" b="0" i="0" u="none" strike="noStrike" kern="1200" cap="none" spc="0" normalizeH="0" baseline="0" noProof="0" dirty="0">
+                        <a:ln>
+                          <a:noFill/>
+                        </a:ln>
+                        <a:solidFill>
+                          <a:schemeClr val="tx1"/>
                         </a:solidFill>
                         <a:effectLst/>
                         <a:uLnTx/>
@@ -7724,7 +8060,7 @@
                       </a:endParaRPr>
                     </a:p>
                   </a:txBody>
-                  <a:tcPr marL="86797" marR="86797" marT="43397" marB="43397"/>
+                  <a:tcPr marL="67388" marR="67388" marT="33693" marB="33693"/>
                 </a:tc>
                 <a:extLst>
                   <a:ext uri="{0D108BD9-81ED-4DB2-BD59-A6C34878D82A}">
@@ -7732,13 +8068,13 @@
                   </a:ext>
                 </a:extLst>
               </a:tr>
-              <a:tr h="1068221">
+              <a:tr h="810227">
                 <a:tc>
                   <a:txBody>
                     <a:bodyPr/>
                     <a:lstStyle/>
                     <a:p>
-                      <a:pPr marL="0" marR="0" lvl="0" indent="0" algn="l" defTabSz="914400" rtl="0" eaLnBrk="1" fontAlgn="auto" latinLnBrk="1" hangingPunct="1">
+                      <a:pPr marL="0" marR="0" lvl="0" indent="0" algn="ctr" defTabSz="914400" rtl="0" eaLnBrk="1" fontAlgn="auto" latinLnBrk="1" hangingPunct="1">
                         <a:lnSpc>
                           <a:spcPct val="100000"/>
                         </a:lnSpc>
@@ -7755,12 +8091,128 @@
                         <a:tabLst/>
                         <a:defRPr/>
                       </a:pPr>
-                      <a:endParaRPr kumimoji="0" lang="ko-KR" altLang="en-US" sz="1400" b="0" i="0" u="none" strike="noStrike" kern="1200" cap="none" spc="0" normalizeH="0" baseline="0" noProof="0" dirty="0">
+                      <a:endParaRPr kumimoji="0" lang="en-US" altLang="ko-KR" sz="1200" b="0" i="0" u="none" strike="noStrike" kern="1200" cap="none" spc="0" normalizeH="0" baseline="0" noProof="0" dirty="0">
                         <a:ln>
                           <a:noFill/>
                         </a:ln>
                         <a:solidFill>
-                          <a:srgbClr val="FF0000"/>
+                          <a:schemeClr val="tx1"/>
+                        </a:solidFill>
+                        <a:effectLst/>
+                        <a:uLnTx/>
+                        <a:uFillTx/>
+                        <a:latin typeface="Segoe UI"/>
+                        <a:ea typeface="+mn-ea"/>
+                        <a:cs typeface="+mn-cs"/>
+                      </a:endParaRPr>
+                    </a:p>
+                    <a:p>
+                      <a:pPr marL="0" marR="0" lvl="0" indent="0" algn="ctr" defTabSz="914400" rtl="0" eaLnBrk="1" fontAlgn="auto" latinLnBrk="1" hangingPunct="1">
+                        <a:lnSpc>
+                          <a:spcPct val="100000"/>
+                        </a:lnSpc>
+                        <a:spcBef>
+                          <a:spcPts val="0"/>
+                        </a:spcBef>
+                        <a:spcAft>
+                          <a:spcPts val="0"/>
+                        </a:spcAft>
+                        <a:buClrTx/>
+                        <a:buSzTx/>
+                        <a:buFontTx/>
+                        <a:buNone/>
+                        <a:tabLst/>
+                        <a:defRPr/>
+                      </a:pPr>
+                      <a:endParaRPr kumimoji="0" lang="en-US" altLang="ko-KR" sz="1200" b="0" i="0" u="none" strike="noStrike" kern="1200" cap="none" spc="0" normalizeH="0" baseline="0" noProof="0" dirty="0">
+                        <a:ln>
+                          <a:noFill/>
+                        </a:ln>
+                        <a:solidFill>
+                          <a:schemeClr val="tx1"/>
+                        </a:solidFill>
+                        <a:effectLst/>
+                        <a:uLnTx/>
+                        <a:uFillTx/>
+                        <a:latin typeface="Segoe UI"/>
+                        <a:ea typeface="+mn-ea"/>
+                        <a:cs typeface="+mn-cs"/>
+                      </a:endParaRPr>
+                    </a:p>
+                    <a:p>
+                      <a:pPr marL="0" marR="0" lvl="0" indent="0" algn="ctr" defTabSz="914400" rtl="0" eaLnBrk="1" fontAlgn="auto" latinLnBrk="1" hangingPunct="1">
+                        <a:lnSpc>
+                          <a:spcPct val="100000"/>
+                        </a:lnSpc>
+                        <a:spcBef>
+                          <a:spcPts val="0"/>
+                        </a:spcBef>
+                        <a:spcAft>
+                          <a:spcPts val="0"/>
+                        </a:spcAft>
+                        <a:buClrTx/>
+                        <a:buSzTx/>
+                        <a:buFontTx/>
+                        <a:buNone/>
+                        <a:tabLst/>
+                        <a:defRPr/>
+                      </a:pPr>
+                      <a:endParaRPr kumimoji="0" lang="en-US" altLang="ko-KR" sz="1200" b="0" i="0" u="none" strike="noStrike" kern="1200" cap="none" spc="0" normalizeH="0" baseline="0" noProof="0" dirty="0">
+                        <a:ln>
+                          <a:noFill/>
+                        </a:ln>
+                        <a:solidFill>
+                          <a:schemeClr val="tx1"/>
+                        </a:solidFill>
+                        <a:effectLst/>
+                        <a:uLnTx/>
+                        <a:uFillTx/>
+                        <a:latin typeface="Segoe UI"/>
+                        <a:ea typeface="+mn-ea"/>
+                        <a:cs typeface="+mn-cs"/>
+                      </a:endParaRPr>
+                    </a:p>
+                    <a:p>
+                      <a:pPr marL="0" marR="0" lvl="0" indent="0" algn="ctr" defTabSz="914400" rtl="0" eaLnBrk="1" fontAlgn="auto" latinLnBrk="1" hangingPunct="1">
+                        <a:lnSpc>
+                          <a:spcPct val="100000"/>
+                        </a:lnSpc>
+                        <a:spcBef>
+                          <a:spcPts val="0"/>
+                        </a:spcBef>
+                        <a:spcAft>
+                          <a:spcPts val="0"/>
+                        </a:spcAft>
+                        <a:buClrTx/>
+                        <a:buSzTx/>
+                        <a:buFontTx/>
+                        <a:buNone/>
+                        <a:tabLst/>
+                        <a:defRPr/>
+                      </a:pPr>
+                      <a:r>
+                        <a:rPr kumimoji="0" lang="en-US" altLang="ko-KR" sz="1200" b="0" i="0" u="none" strike="noStrike" kern="1200" cap="none" spc="0" normalizeH="0" baseline="0" noProof="0" dirty="0">
+                          <a:ln>
+                            <a:noFill/>
+                          </a:ln>
+                          <a:solidFill>
+                            <a:schemeClr val="tx1"/>
+                          </a:solidFill>
+                          <a:effectLst/>
+                          <a:uLnTx/>
+                          <a:uFillTx/>
+                          <a:latin typeface="Segoe UI"/>
+                          <a:ea typeface="+mn-ea"/>
+                          <a:cs typeface="+mn-cs"/>
+                        </a:rPr>
+                        <a:t>0.02</a:t>
+                      </a:r>
+                      <a:endParaRPr kumimoji="0" lang="ko-KR" altLang="en-US" sz="1200" b="0" i="0" u="none" strike="noStrike" kern="1200" cap="none" spc="0" normalizeH="0" baseline="0" noProof="0" dirty="0">
+                        <a:ln>
+                          <a:noFill/>
+                        </a:ln>
+                        <a:solidFill>
+                          <a:schemeClr val="tx1"/>
                         </a:solidFill>
                         <a:effectLst/>
                         <a:uLnTx/>
@@ -7771,14 +8223,14 @@
                       </a:endParaRPr>
                     </a:p>
                   </a:txBody>
-                  <a:tcPr marL="86797" marR="86797" marT="43397" marB="43397"/>
+                  <a:tcPr marL="67388" marR="67388" marT="33693" marB="33693"/>
                 </a:tc>
                 <a:tc>
                   <a:txBody>
                     <a:bodyPr/>
                     <a:lstStyle/>
                     <a:p>
-                      <a:pPr marL="0" marR="0" lvl="0" indent="0" algn="l" defTabSz="914400" rtl="0" eaLnBrk="1" fontAlgn="auto" latinLnBrk="1" hangingPunct="1">
+                      <a:pPr marL="0" marR="0" lvl="0" indent="0" algn="ctr" defTabSz="914400" rtl="0" eaLnBrk="1" fontAlgn="auto" latinLnBrk="1" hangingPunct="1">
                         <a:lnSpc>
                           <a:spcPct val="100000"/>
                         </a:lnSpc>
@@ -7795,12 +8247,128 @@
                         <a:tabLst/>
                         <a:defRPr/>
                       </a:pPr>
-                      <a:endParaRPr kumimoji="0" lang="ko-KR" altLang="en-US" sz="1400" b="0" i="0" u="none" strike="noStrike" kern="1200" cap="none" spc="0" normalizeH="0" baseline="0" noProof="0" dirty="0">
+                      <a:endParaRPr kumimoji="0" lang="en-US" altLang="ko-KR" sz="1200" b="0" i="0" u="none" strike="noStrike" kern="1200" cap="none" spc="0" normalizeH="0" baseline="0" noProof="0" dirty="0">
                         <a:ln>
                           <a:noFill/>
                         </a:ln>
                         <a:solidFill>
-                          <a:srgbClr val="FF0000"/>
+                          <a:schemeClr val="bg1"/>
+                        </a:solidFill>
+                        <a:effectLst/>
+                        <a:uLnTx/>
+                        <a:uFillTx/>
+                        <a:latin typeface="Segoe UI"/>
+                        <a:ea typeface="+mn-ea"/>
+                        <a:cs typeface="+mn-cs"/>
+                      </a:endParaRPr>
+                    </a:p>
+                    <a:p>
+                      <a:pPr marL="0" marR="0" lvl="0" indent="0" algn="ctr" defTabSz="914400" rtl="0" eaLnBrk="1" fontAlgn="auto" latinLnBrk="1" hangingPunct="1">
+                        <a:lnSpc>
+                          <a:spcPct val="100000"/>
+                        </a:lnSpc>
+                        <a:spcBef>
+                          <a:spcPts val="0"/>
+                        </a:spcBef>
+                        <a:spcAft>
+                          <a:spcPts val="0"/>
+                        </a:spcAft>
+                        <a:buClrTx/>
+                        <a:buSzTx/>
+                        <a:buFontTx/>
+                        <a:buNone/>
+                        <a:tabLst/>
+                        <a:defRPr/>
+                      </a:pPr>
+                      <a:endParaRPr kumimoji="0" lang="en-US" altLang="ko-KR" sz="1200" b="0" i="0" u="none" strike="noStrike" kern="1200" cap="none" spc="0" normalizeH="0" baseline="0" noProof="0" dirty="0">
+                        <a:ln>
+                          <a:noFill/>
+                        </a:ln>
+                        <a:solidFill>
+                          <a:schemeClr val="bg1"/>
+                        </a:solidFill>
+                        <a:effectLst/>
+                        <a:uLnTx/>
+                        <a:uFillTx/>
+                        <a:latin typeface="Segoe UI"/>
+                        <a:ea typeface="+mn-ea"/>
+                        <a:cs typeface="+mn-cs"/>
+                      </a:endParaRPr>
+                    </a:p>
+                    <a:p>
+                      <a:pPr marL="0" marR="0" lvl="0" indent="0" algn="ctr" defTabSz="914400" rtl="0" eaLnBrk="1" fontAlgn="auto" latinLnBrk="1" hangingPunct="1">
+                        <a:lnSpc>
+                          <a:spcPct val="100000"/>
+                        </a:lnSpc>
+                        <a:spcBef>
+                          <a:spcPts val="0"/>
+                        </a:spcBef>
+                        <a:spcAft>
+                          <a:spcPts val="0"/>
+                        </a:spcAft>
+                        <a:buClrTx/>
+                        <a:buSzTx/>
+                        <a:buFontTx/>
+                        <a:buNone/>
+                        <a:tabLst/>
+                        <a:defRPr/>
+                      </a:pPr>
+                      <a:endParaRPr kumimoji="0" lang="en-US" altLang="ko-KR" sz="1200" b="0" i="0" u="none" strike="noStrike" kern="1200" cap="none" spc="0" normalizeH="0" baseline="0" noProof="0" dirty="0">
+                        <a:ln>
+                          <a:noFill/>
+                        </a:ln>
+                        <a:solidFill>
+                          <a:schemeClr val="bg1"/>
+                        </a:solidFill>
+                        <a:effectLst/>
+                        <a:uLnTx/>
+                        <a:uFillTx/>
+                        <a:latin typeface="Segoe UI"/>
+                        <a:ea typeface="+mn-ea"/>
+                        <a:cs typeface="+mn-cs"/>
+                      </a:endParaRPr>
+                    </a:p>
+                    <a:p>
+                      <a:pPr marL="0" marR="0" lvl="0" indent="0" algn="ctr" defTabSz="914400" rtl="0" eaLnBrk="1" fontAlgn="auto" latinLnBrk="1" hangingPunct="1">
+                        <a:lnSpc>
+                          <a:spcPct val="100000"/>
+                        </a:lnSpc>
+                        <a:spcBef>
+                          <a:spcPts val="0"/>
+                        </a:spcBef>
+                        <a:spcAft>
+                          <a:spcPts val="0"/>
+                        </a:spcAft>
+                        <a:buClrTx/>
+                        <a:buSzTx/>
+                        <a:buFontTx/>
+                        <a:buNone/>
+                        <a:tabLst/>
+                        <a:defRPr/>
+                      </a:pPr>
+                      <a:r>
+                        <a:rPr kumimoji="0" lang="en-US" altLang="ko-KR" sz="1200" b="0" i="0" u="none" strike="noStrike" kern="1200" cap="none" spc="0" normalizeH="0" baseline="0" noProof="0" dirty="0">
+                          <a:ln>
+                            <a:noFill/>
+                          </a:ln>
+                          <a:solidFill>
+                            <a:schemeClr val="tx1"/>
+                          </a:solidFill>
+                          <a:effectLst/>
+                          <a:uLnTx/>
+                          <a:uFillTx/>
+                          <a:latin typeface="Segoe UI"/>
+                          <a:ea typeface="+mn-ea"/>
+                          <a:cs typeface="+mn-cs"/>
+                        </a:rPr>
+                        <a:t>0.95</a:t>
+                      </a:r>
+                      <a:endParaRPr kumimoji="0" lang="ko-KR" altLang="en-US" sz="1200" b="0" i="0" u="none" strike="noStrike" kern="1200" cap="none" spc="0" normalizeH="0" baseline="0" noProof="0" dirty="0">
+                        <a:ln>
+                          <a:noFill/>
+                        </a:ln>
+                        <a:solidFill>
+                          <a:schemeClr val="tx1"/>
                         </a:solidFill>
                         <a:effectLst/>
                         <a:uLnTx/>
@@ -7811,14 +8379,14 @@
                       </a:endParaRPr>
                     </a:p>
                   </a:txBody>
-                  <a:tcPr marL="86797" marR="86797" marT="43397" marB="43397"/>
+                  <a:tcPr marL="67388" marR="67388" marT="33693" marB="33693"/>
                 </a:tc>
                 <a:tc>
                   <a:txBody>
                     <a:bodyPr/>
                     <a:lstStyle/>
                     <a:p>
-                      <a:pPr marL="0" marR="0" lvl="0" indent="0" algn="l" defTabSz="914400" rtl="0" eaLnBrk="1" fontAlgn="auto" latinLnBrk="1" hangingPunct="1">
+                      <a:pPr marL="0" marR="0" lvl="0" indent="0" algn="ctr" defTabSz="914400" rtl="0" eaLnBrk="1" fontAlgn="auto" latinLnBrk="1" hangingPunct="1">
                         <a:lnSpc>
                           <a:spcPct val="100000"/>
                         </a:lnSpc>
@@ -7835,12 +8403,128 @@
                         <a:tabLst/>
                         <a:defRPr/>
                       </a:pPr>
-                      <a:endParaRPr kumimoji="0" lang="ko-KR" altLang="en-US" sz="1400" b="0" i="0" u="none" strike="noStrike" kern="1200" cap="none" spc="0" normalizeH="0" baseline="0" noProof="0" dirty="0">
+                      <a:endParaRPr kumimoji="0" lang="en-US" altLang="ko-KR" sz="1200" b="0" i="0" u="none" strike="noStrike" kern="1200" cap="none" spc="0" normalizeH="0" baseline="0" noProof="0" dirty="0">
                         <a:ln>
                           <a:noFill/>
                         </a:ln>
                         <a:solidFill>
-                          <a:srgbClr val="FF0000"/>
+                          <a:schemeClr val="tx1"/>
+                        </a:solidFill>
+                        <a:effectLst/>
+                        <a:uLnTx/>
+                        <a:uFillTx/>
+                        <a:latin typeface="Segoe UI"/>
+                        <a:ea typeface="+mn-ea"/>
+                        <a:cs typeface="+mn-cs"/>
+                      </a:endParaRPr>
+                    </a:p>
+                    <a:p>
+                      <a:pPr marL="0" marR="0" lvl="0" indent="0" algn="ctr" defTabSz="914400" rtl="0" eaLnBrk="1" fontAlgn="auto" latinLnBrk="1" hangingPunct="1">
+                        <a:lnSpc>
+                          <a:spcPct val="100000"/>
+                        </a:lnSpc>
+                        <a:spcBef>
+                          <a:spcPts val="0"/>
+                        </a:spcBef>
+                        <a:spcAft>
+                          <a:spcPts val="0"/>
+                        </a:spcAft>
+                        <a:buClrTx/>
+                        <a:buSzTx/>
+                        <a:buFontTx/>
+                        <a:buNone/>
+                        <a:tabLst/>
+                        <a:defRPr/>
+                      </a:pPr>
+                      <a:endParaRPr kumimoji="0" lang="en-US" altLang="ko-KR" sz="1200" b="0" i="0" u="none" strike="noStrike" kern="1200" cap="none" spc="0" normalizeH="0" baseline="0" noProof="0" dirty="0">
+                        <a:ln>
+                          <a:noFill/>
+                        </a:ln>
+                        <a:solidFill>
+                          <a:schemeClr val="tx1"/>
+                        </a:solidFill>
+                        <a:effectLst/>
+                        <a:uLnTx/>
+                        <a:uFillTx/>
+                        <a:latin typeface="Segoe UI"/>
+                        <a:ea typeface="+mn-ea"/>
+                        <a:cs typeface="+mn-cs"/>
+                      </a:endParaRPr>
+                    </a:p>
+                    <a:p>
+                      <a:pPr marL="0" marR="0" lvl="0" indent="0" algn="ctr" defTabSz="914400" rtl="0" eaLnBrk="1" fontAlgn="auto" latinLnBrk="1" hangingPunct="1">
+                        <a:lnSpc>
+                          <a:spcPct val="100000"/>
+                        </a:lnSpc>
+                        <a:spcBef>
+                          <a:spcPts val="0"/>
+                        </a:spcBef>
+                        <a:spcAft>
+                          <a:spcPts val="0"/>
+                        </a:spcAft>
+                        <a:buClrTx/>
+                        <a:buSzTx/>
+                        <a:buFontTx/>
+                        <a:buNone/>
+                        <a:tabLst/>
+                        <a:defRPr/>
+                      </a:pPr>
+                      <a:endParaRPr kumimoji="0" lang="en-US" altLang="ko-KR" sz="1200" b="0" i="0" u="none" strike="noStrike" kern="1200" cap="none" spc="0" normalizeH="0" baseline="0" noProof="0" dirty="0">
+                        <a:ln>
+                          <a:noFill/>
+                        </a:ln>
+                        <a:solidFill>
+                          <a:schemeClr val="tx1"/>
+                        </a:solidFill>
+                        <a:effectLst/>
+                        <a:uLnTx/>
+                        <a:uFillTx/>
+                        <a:latin typeface="Segoe UI"/>
+                        <a:ea typeface="+mn-ea"/>
+                        <a:cs typeface="+mn-cs"/>
+                      </a:endParaRPr>
+                    </a:p>
+                    <a:p>
+                      <a:pPr marL="0" marR="0" lvl="0" indent="0" algn="ctr" defTabSz="914400" rtl="0" eaLnBrk="1" fontAlgn="auto" latinLnBrk="1" hangingPunct="1">
+                        <a:lnSpc>
+                          <a:spcPct val="100000"/>
+                        </a:lnSpc>
+                        <a:spcBef>
+                          <a:spcPts val="0"/>
+                        </a:spcBef>
+                        <a:spcAft>
+                          <a:spcPts val="0"/>
+                        </a:spcAft>
+                        <a:buClrTx/>
+                        <a:buSzTx/>
+                        <a:buFontTx/>
+                        <a:buNone/>
+                        <a:tabLst/>
+                        <a:defRPr/>
+                      </a:pPr>
+                      <a:r>
+                        <a:rPr kumimoji="0" lang="en-US" altLang="ko-KR" sz="1200" b="0" i="0" u="none" strike="noStrike" kern="1200" cap="none" spc="0" normalizeH="0" baseline="0" noProof="0" dirty="0">
+                          <a:ln>
+                            <a:noFill/>
+                          </a:ln>
+                          <a:solidFill>
+                            <a:schemeClr val="tx1"/>
+                          </a:solidFill>
+                          <a:effectLst/>
+                          <a:uLnTx/>
+                          <a:uFillTx/>
+                          <a:latin typeface="Segoe UI"/>
+                          <a:ea typeface="+mn-ea"/>
+                          <a:cs typeface="+mn-cs"/>
+                        </a:rPr>
+                        <a:t>0.56</a:t>
+                      </a:r>
+                      <a:endParaRPr kumimoji="0" lang="ko-KR" altLang="en-US" sz="1200" b="0" i="0" u="none" strike="noStrike" kern="1200" cap="none" spc="0" normalizeH="0" baseline="0" noProof="0" dirty="0">
+                        <a:ln>
+                          <a:noFill/>
+                        </a:ln>
+                        <a:solidFill>
+                          <a:schemeClr val="tx1"/>
                         </a:solidFill>
                         <a:effectLst/>
                         <a:uLnTx/>
@@ -7851,7 +8535,7 @@
                       </a:endParaRPr>
                     </a:p>
                   </a:txBody>
-                  <a:tcPr marL="86797" marR="86797" marT="43397" marB="43397"/>
+                  <a:tcPr marL="67388" marR="67388" marT="33693" marB="33693"/>
                 </a:tc>
                 <a:extLst>
                   <a:ext uri="{0D108BD9-81ED-4DB2-BD59-A6C34878D82A}">
@@ -7859,13 +8543,13 @@
                   </a:ext>
                 </a:extLst>
               </a:tr>
-              <a:tr h="1068221">
+              <a:tr h="810227">
                 <a:tc>
                   <a:txBody>
                     <a:bodyPr/>
                     <a:lstStyle/>
                     <a:p>
-                      <a:pPr marL="0" marR="0" lvl="0" indent="0" algn="l" defTabSz="914400" rtl="0" eaLnBrk="1" fontAlgn="auto" latinLnBrk="1" hangingPunct="1">
+                      <a:pPr marL="0" marR="0" lvl="0" indent="0" algn="ctr" defTabSz="914400" rtl="0" eaLnBrk="1" fontAlgn="auto" latinLnBrk="1" hangingPunct="1">
                         <a:lnSpc>
                           <a:spcPct val="100000"/>
                         </a:lnSpc>
@@ -7882,12 +8566,128 @@
                         <a:tabLst/>
                         <a:defRPr/>
                       </a:pPr>
-                      <a:endParaRPr kumimoji="0" lang="ko-KR" altLang="en-US" sz="1400" b="0" i="0" u="none" strike="noStrike" kern="1200" cap="none" spc="0" normalizeH="0" baseline="0" noProof="0" dirty="0">
+                      <a:endParaRPr kumimoji="0" lang="en-US" altLang="ko-KR" sz="1200" b="0" i="0" u="none" strike="noStrike" kern="1200" cap="none" spc="0" normalizeH="0" baseline="0" noProof="0" dirty="0">
                         <a:ln>
                           <a:noFill/>
                         </a:ln>
                         <a:solidFill>
-                          <a:srgbClr val="FF0000"/>
+                          <a:schemeClr val="tx1"/>
+                        </a:solidFill>
+                        <a:effectLst/>
+                        <a:uLnTx/>
+                        <a:uFillTx/>
+                        <a:latin typeface="Segoe UI"/>
+                        <a:ea typeface="+mn-ea"/>
+                        <a:cs typeface="+mn-cs"/>
+                      </a:endParaRPr>
+                    </a:p>
+                    <a:p>
+                      <a:pPr marL="0" marR="0" lvl="0" indent="0" algn="ctr" defTabSz="914400" rtl="0" eaLnBrk="1" fontAlgn="auto" latinLnBrk="1" hangingPunct="1">
+                        <a:lnSpc>
+                          <a:spcPct val="100000"/>
+                        </a:lnSpc>
+                        <a:spcBef>
+                          <a:spcPts val="0"/>
+                        </a:spcBef>
+                        <a:spcAft>
+                          <a:spcPts val="0"/>
+                        </a:spcAft>
+                        <a:buClrTx/>
+                        <a:buSzTx/>
+                        <a:buFontTx/>
+                        <a:buNone/>
+                        <a:tabLst/>
+                        <a:defRPr/>
+                      </a:pPr>
+                      <a:endParaRPr kumimoji="0" lang="en-US" altLang="ko-KR" sz="1200" b="0" i="0" u="none" strike="noStrike" kern="1200" cap="none" spc="0" normalizeH="0" baseline="0" noProof="0" dirty="0">
+                        <a:ln>
+                          <a:noFill/>
+                        </a:ln>
+                        <a:solidFill>
+                          <a:schemeClr val="tx1"/>
+                        </a:solidFill>
+                        <a:effectLst/>
+                        <a:uLnTx/>
+                        <a:uFillTx/>
+                        <a:latin typeface="Segoe UI"/>
+                        <a:ea typeface="+mn-ea"/>
+                        <a:cs typeface="+mn-cs"/>
+                      </a:endParaRPr>
+                    </a:p>
+                    <a:p>
+                      <a:pPr marL="0" marR="0" lvl="0" indent="0" algn="ctr" defTabSz="914400" rtl="0" eaLnBrk="1" fontAlgn="auto" latinLnBrk="1" hangingPunct="1">
+                        <a:lnSpc>
+                          <a:spcPct val="100000"/>
+                        </a:lnSpc>
+                        <a:spcBef>
+                          <a:spcPts val="0"/>
+                        </a:spcBef>
+                        <a:spcAft>
+                          <a:spcPts val="0"/>
+                        </a:spcAft>
+                        <a:buClrTx/>
+                        <a:buSzTx/>
+                        <a:buFontTx/>
+                        <a:buNone/>
+                        <a:tabLst/>
+                        <a:defRPr/>
+                      </a:pPr>
+                      <a:endParaRPr kumimoji="0" lang="en-US" altLang="ko-KR" sz="1200" b="0" i="0" u="none" strike="noStrike" kern="1200" cap="none" spc="0" normalizeH="0" baseline="0" noProof="0" dirty="0">
+                        <a:ln>
+                          <a:noFill/>
+                        </a:ln>
+                        <a:solidFill>
+                          <a:schemeClr val="tx1"/>
+                        </a:solidFill>
+                        <a:effectLst/>
+                        <a:uLnTx/>
+                        <a:uFillTx/>
+                        <a:latin typeface="Segoe UI"/>
+                        <a:ea typeface="+mn-ea"/>
+                        <a:cs typeface="+mn-cs"/>
+                      </a:endParaRPr>
+                    </a:p>
+                    <a:p>
+                      <a:pPr marL="0" marR="0" lvl="0" indent="0" algn="ctr" defTabSz="914400" rtl="0" eaLnBrk="1" fontAlgn="auto" latinLnBrk="1" hangingPunct="1">
+                        <a:lnSpc>
+                          <a:spcPct val="100000"/>
+                        </a:lnSpc>
+                        <a:spcBef>
+                          <a:spcPts val="0"/>
+                        </a:spcBef>
+                        <a:spcAft>
+                          <a:spcPts val="0"/>
+                        </a:spcAft>
+                        <a:buClrTx/>
+                        <a:buSzTx/>
+                        <a:buFontTx/>
+                        <a:buNone/>
+                        <a:tabLst/>
+                        <a:defRPr/>
+                      </a:pPr>
+                      <a:r>
+                        <a:rPr kumimoji="0" lang="en-US" altLang="ko-KR" sz="1200" b="0" i="0" u="none" strike="noStrike" kern="1200" cap="none" spc="0" normalizeH="0" baseline="0" noProof="0" dirty="0">
+                          <a:ln>
+                            <a:noFill/>
+                          </a:ln>
+                          <a:solidFill>
+                            <a:schemeClr val="tx1"/>
+                          </a:solidFill>
+                          <a:effectLst/>
+                          <a:uLnTx/>
+                          <a:uFillTx/>
+                          <a:latin typeface="Segoe UI"/>
+                          <a:ea typeface="+mn-ea"/>
+                          <a:cs typeface="+mn-cs"/>
+                        </a:rPr>
+                        <a:t>0.02</a:t>
+                      </a:r>
+                      <a:endParaRPr kumimoji="0" lang="ko-KR" altLang="en-US" sz="1200" b="0" i="0" u="none" strike="noStrike" kern="1200" cap="none" spc="0" normalizeH="0" baseline="0" noProof="0" dirty="0">
+                        <a:ln>
+                          <a:noFill/>
+                        </a:ln>
+                        <a:solidFill>
+                          <a:schemeClr val="tx1"/>
                         </a:solidFill>
                         <a:effectLst/>
                         <a:uLnTx/>
@@ -7898,14 +8698,14 @@
                       </a:endParaRPr>
                     </a:p>
                   </a:txBody>
-                  <a:tcPr marL="86797" marR="86797" marT="43397" marB="43397"/>
+                  <a:tcPr marL="67388" marR="67388" marT="33693" marB="33693"/>
                 </a:tc>
                 <a:tc>
                   <a:txBody>
                     <a:bodyPr/>
                     <a:lstStyle/>
                     <a:p>
-                      <a:pPr marL="0" marR="0" lvl="0" indent="0" algn="l" defTabSz="914400" rtl="0" eaLnBrk="1" fontAlgn="auto" latinLnBrk="1" hangingPunct="1">
+                      <a:pPr marL="0" marR="0" lvl="0" indent="0" algn="ctr" defTabSz="914400" rtl="0" eaLnBrk="1" fontAlgn="auto" latinLnBrk="1" hangingPunct="1">
                         <a:lnSpc>
                           <a:spcPct val="100000"/>
                         </a:lnSpc>
@@ -7922,12 +8722,128 @@
                         <a:tabLst/>
                         <a:defRPr/>
                       </a:pPr>
-                      <a:endParaRPr kumimoji="0" lang="ko-KR" altLang="en-US" sz="1400" b="0" i="0" u="none" strike="noStrike" kern="1200" cap="none" spc="0" normalizeH="0" baseline="0" noProof="0" dirty="0">
+                      <a:endParaRPr kumimoji="0" lang="en-US" altLang="ko-KR" sz="1200" b="0" i="0" u="none" strike="noStrike" kern="1200" cap="none" spc="0" normalizeH="0" baseline="0" noProof="0" dirty="0">
                         <a:ln>
                           <a:noFill/>
                         </a:ln>
                         <a:solidFill>
-                          <a:srgbClr val="FF0000"/>
+                          <a:schemeClr val="tx1"/>
+                        </a:solidFill>
+                        <a:effectLst/>
+                        <a:uLnTx/>
+                        <a:uFillTx/>
+                        <a:latin typeface="Segoe UI"/>
+                        <a:ea typeface="+mn-ea"/>
+                        <a:cs typeface="+mn-cs"/>
+                      </a:endParaRPr>
+                    </a:p>
+                    <a:p>
+                      <a:pPr marL="0" marR="0" lvl="0" indent="0" algn="ctr" defTabSz="914400" rtl="0" eaLnBrk="1" fontAlgn="auto" latinLnBrk="1" hangingPunct="1">
+                        <a:lnSpc>
+                          <a:spcPct val="100000"/>
+                        </a:lnSpc>
+                        <a:spcBef>
+                          <a:spcPts val="0"/>
+                        </a:spcBef>
+                        <a:spcAft>
+                          <a:spcPts val="0"/>
+                        </a:spcAft>
+                        <a:buClrTx/>
+                        <a:buSzTx/>
+                        <a:buFontTx/>
+                        <a:buNone/>
+                        <a:tabLst/>
+                        <a:defRPr/>
+                      </a:pPr>
+                      <a:endParaRPr kumimoji="0" lang="en-US" altLang="ko-KR" sz="1200" b="0" i="0" u="none" strike="noStrike" kern="1200" cap="none" spc="0" normalizeH="0" baseline="0" noProof="0" dirty="0">
+                        <a:ln>
+                          <a:noFill/>
+                        </a:ln>
+                        <a:solidFill>
+                          <a:schemeClr val="tx1"/>
+                        </a:solidFill>
+                        <a:effectLst/>
+                        <a:uLnTx/>
+                        <a:uFillTx/>
+                        <a:latin typeface="Segoe UI"/>
+                        <a:ea typeface="+mn-ea"/>
+                        <a:cs typeface="+mn-cs"/>
+                      </a:endParaRPr>
+                    </a:p>
+                    <a:p>
+                      <a:pPr marL="0" marR="0" lvl="0" indent="0" algn="ctr" defTabSz="914400" rtl="0" eaLnBrk="1" fontAlgn="auto" latinLnBrk="1" hangingPunct="1">
+                        <a:lnSpc>
+                          <a:spcPct val="100000"/>
+                        </a:lnSpc>
+                        <a:spcBef>
+                          <a:spcPts val="0"/>
+                        </a:spcBef>
+                        <a:spcAft>
+                          <a:spcPts val="0"/>
+                        </a:spcAft>
+                        <a:buClrTx/>
+                        <a:buSzTx/>
+                        <a:buFontTx/>
+                        <a:buNone/>
+                        <a:tabLst/>
+                        <a:defRPr/>
+                      </a:pPr>
+                      <a:endParaRPr kumimoji="0" lang="en-US" altLang="ko-KR" sz="1200" b="0" i="0" u="none" strike="noStrike" kern="1200" cap="none" spc="0" normalizeH="0" baseline="0" noProof="0" dirty="0">
+                        <a:ln>
+                          <a:noFill/>
+                        </a:ln>
+                        <a:solidFill>
+                          <a:schemeClr val="tx1"/>
+                        </a:solidFill>
+                        <a:effectLst/>
+                        <a:uLnTx/>
+                        <a:uFillTx/>
+                        <a:latin typeface="Segoe UI"/>
+                        <a:ea typeface="+mn-ea"/>
+                        <a:cs typeface="+mn-cs"/>
+                      </a:endParaRPr>
+                    </a:p>
+                    <a:p>
+                      <a:pPr marL="0" marR="0" lvl="0" indent="0" algn="ctr" defTabSz="914400" rtl="0" eaLnBrk="1" fontAlgn="auto" latinLnBrk="1" hangingPunct="1">
+                        <a:lnSpc>
+                          <a:spcPct val="100000"/>
+                        </a:lnSpc>
+                        <a:spcBef>
+                          <a:spcPts val="0"/>
+                        </a:spcBef>
+                        <a:spcAft>
+                          <a:spcPts val="0"/>
+                        </a:spcAft>
+                        <a:buClrTx/>
+                        <a:buSzTx/>
+                        <a:buFontTx/>
+                        <a:buNone/>
+                        <a:tabLst/>
+                        <a:defRPr/>
+                      </a:pPr>
+                      <a:r>
+                        <a:rPr kumimoji="0" lang="en-US" altLang="ko-KR" sz="1200" b="0" i="0" u="none" strike="noStrike" kern="1200" cap="none" spc="0" normalizeH="0" baseline="0" noProof="0" dirty="0">
+                          <a:ln>
+                            <a:noFill/>
+                          </a:ln>
+                          <a:solidFill>
+                            <a:schemeClr val="tx1"/>
+                          </a:solidFill>
+                          <a:effectLst/>
+                          <a:uLnTx/>
+                          <a:uFillTx/>
+                          <a:latin typeface="Segoe UI"/>
+                          <a:ea typeface="+mn-ea"/>
+                          <a:cs typeface="+mn-cs"/>
+                        </a:rPr>
+                        <a:t>0.03</a:t>
+                      </a:r>
+                      <a:endParaRPr kumimoji="0" lang="ko-KR" altLang="en-US" sz="1200" b="0" i="0" u="none" strike="noStrike" kern="1200" cap="none" spc="0" normalizeH="0" baseline="0" noProof="0" dirty="0">
+                        <a:ln>
+                          <a:noFill/>
+                        </a:ln>
+                        <a:solidFill>
+                          <a:schemeClr val="tx1"/>
                         </a:solidFill>
                         <a:effectLst/>
                         <a:uLnTx/>
@@ -7938,14 +8854,14 @@
                       </a:endParaRPr>
                     </a:p>
                   </a:txBody>
-                  <a:tcPr marL="86797" marR="86797" marT="43397" marB="43397"/>
+                  <a:tcPr marL="67388" marR="67388" marT="33693" marB="33693"/>
                 </a:tc>
                 <a:tc>
                   <a:txBody>
                     <a:bodyPr/>
                     <a:lstStyle/>
                     <a:p>
-                      <a:pPr marL="0" marR="0" lvl="0" indent="0" algn="l" defTabSz="914400" rtl="0" eaLnBrk="1" fontAlgn="auto" latinLnBrk="1" hangingPunct="1">
+                      <a:pPr marL="0" marR="0" lvl="0" indent="0" algn="ctr" defTabSz="914400" rtl="0" eaLnBrk="1" fontAlgn="auto" latinLnBrk="1" hangingPunct="1">
                         <a:lnSpc>
                           <a:spcPct val="100000"/>
                         </a:lnSpc>
@@ -7962,12 +8878,128 @@
                         <a:tabLst/>
                         <a:defRPr/>
                       </a:pPr>
-                      <a:endParaRPr kumimoji="0" lang="ko-KR" altLang="en-US" sz="1400" b="0" i="0" u="none" strike="noStrike" kern="1200" cap="none" spc="0" normalizeH="0" baseline="0" noProof="0" dirty="0">
+                      <a:endParaRPr kumimoji="0" lang="en-US" altLang="ko-KR" sz="1200" b="0" i="0" u="none" strike="noStrike" kern="1200" cap="none" spc="0" normalizeH="0" baseline="0" noProof="0" dirty="0">
                         <a:ln>
                           <a:noFill/>
                         </a:ln>
                         <a:solidFill>
-                          <a:srgbClr val="0070C0"/>
+                          <a:schemeClr val="tx1"/>
+                        </a:solidFill>
+                        <a:effectLst/>
+                        <a:uLnTx/>
+                        <a:uFillTx/>
+                        <a:latin typeface="Segoe UI"/>
+                        <a:ea typeface="+mn-ea"/>
+                        <a:cs typeface="+mn-cs"/>
+                      </a:endParaRPr>
+                    </a:p>
+                    <a:p>
+                      <a:pPr marL="0" marR="0" lvl="0" indent="0" algn="ctr" defTabSz="914400" rtl="0" eaLnBrk="1" fontAlgn="auto" latinLnBrk="1" hangingPunct="1">
+                        <a:lnSpc>
+                          <a:spcPct val="100000"/>
+                        </a:lnSpc>
+                        <a:spcBef>
+                          <a:spcPts val="0"/>
+                        </a:spcBef>
+                        <a:spcAft>
+                          <a:spcPts val="0"/>
+                        </a:spcAft>
+                        <a:buClrTx/>
+                        <a:buSzTx/>
+                        <a:buFontTx/>
+                        <a:buNone/>
+                        <a:tabLst/>
+                        <a:defRPr/>
+                      </a:pPr>
+                      <a:endParaRPr kumimoji="0" lang="en-US" altLang="ko-KR" sz="1200" b="0" i="0" u="none" strike="noStrike" kern="1200" cap="none" spc="0" normalizeH="0" baseline="0" noProof="0" dirty="0">
+                        <a:ln>
+                          <a:noFill/>
+                        </a:ln>
+                        <a:solidFill>
+                          <a:schemeClr val="tx1"/>
+                        </a:solidFill>
+                        <a:effectLst/>
+                        <a:uLnTx/>
+                        <a:uFillTx/>
+                        <a:latin typeface="Segoe UI"/>
+                        <a:ea typeface="+mn-ea"/>
+                        <a:cs typeface="+mn-cs"/>
+                      </a:endParaRPr>
+                    </a:p>
+                    <a:p>
+                      <a:pPr marL="0" marR="0" lvl="0" indent="0" algn="ctr" defTabSz="914400" rtl="0" eaLnBrk="1" fontAlgn="auto" latinLnBrk="1" hangingPunct="1">
+                        <a:lnSpc>
+                          <a:spcPct val="100000"/>
+                        </a:lnSpc>
+                        <a:spcBef>
+                          <a:spcPts val="0"/>
+                        </a:spcBef>
+                        <a:spcAft>
+                          <a:spcPts val="0"/>
+                        </a:spcAft>
+                        <a:buClrTx/>
+                        <a:buSzTx/>
+                        <a:buFontTx/>
+                        <a:buNone/>
+                        <a:tabLst/>
+                        <a:defRPr/>
+                      </a:pPr>
+                      <a:endParaRPr kumimoji="0" lang="en-US" altLang="ko-KR" sz="1200" b="0" i="0" u="none" strike="noStrike" kern="1200" cap="none" spc="0" normalizeH="0" baseline="0" noProof="0" dirty="0">
+                        <a:ln>
+                          <a:noFill/>
+                        </a:ln>
+                        <a:solidFill>
+                          <a:schemeClr val="tx1"/>
+                        </a:solidFill>
+                        <a:effectLst/>
+                        <a:uLnTx/>
+                        <a:uFillTx/>
+                        <a:latin typeface="Segoe UI"/>
+                        <a:ea typeface="+mn-ea"/>
+                        <a:cs typeface="+mn-cs"/>
+                      </a:endParaRPr>
+                    </a:p>
+                    <a:p>
+                      <a:pPr marL="0" marR="0" lvl="0" indent="0" algn="ctr" defTabSz="914400" rtl="0" eaLnBrk="1" fontAlgn="auto" latinLnBrk="1" hangingPunct="1">
+                        <a:lnSpc>
+                          <a:spcPct val="100000"/>
+                        </a:lnSpc>
+                        <a:spcBef>
+                          <a:spcPts val="0"/>
+                        </a:spcBef>
+                        <a:spcAft>
+                          <a:spcPts val="0"/>
+                        </a:spcAft>
+                        <a:buClrTx/>
+                        <a:buSzTx/>
+                        <a:buFontTx/>
+                        <a:buNone/>
+                        <a:tabLst/>
+                        <a:defRPr/>
+                      </a:pPr>
+                      <a:r>
+                        <a:rPr kumimoji="0" lang="en-US" altLang="ko-KR" sz="1200" b="0" i="0" u="none" strike="noStrike" kern="1200" cap="none" spc="0" normalizeH="0" baseline="0" noProof="0" dirty="0">
+                          <a:ln>
+                            <a:noFill/>
+                          </a:ln>
+                          <a:solidFill>
+                            <a:schemeClr val="tx1"/>
+                          </a:solidFill>
+                          <a:effectLst/>
+                          <a:uLnTx/>
+                          <a:uFillTx/>
+                          <a:latin typeface="Segoe UI"/>
+                          <a:ea typeface="+mn-ea"/>
+                          <a:cs typeface="+mn-cs"/>
+                        </a:rPr>
+                        <a:t>0.01</a:t>
+                      </a:r>
+                      <a:endParaRPr kumimoji="0" lang="ko-KR" altLang="en-US" sz="1200" b="0" i="0" u="none" strike="noStrike" kern="1200" cap="none" spc="0" normalizeH="0" baseline="0" noProof="0" dirty="0">
+                        <a:ln>
+                          <a:noFill/>
+                        </a:ln>
+                        <a:solidFill>
+                          <a:schemeClr val="tx1"/>
                         </a:solidFill>
                         <a:effectLst/>
                         <a:uLnTx/>
@@ -7978,7 +9010,7 @@
                       </a:endParaRPr>
                     </a:p>
                   </a:txBody>
-                  <a:tcPr marL="86797" marR="86797" marT="43397" marB="43397"/>
+                  <a:tcPr marL="67388" marR="67388" marT="33693" marB="33693"/>
                 </a:tc>
                 <a:extLst>
                   <a:ext uri="{0D108BD9-81ED-4DB2-BD59-A6C34878D82A}">
@@ -7995,7 +9027,7 @@
           <p:cNvPr id="13" name="TextBox 12">
             <a:extLst>
               <a:ext uri="{FF2B5EF4-FFF2-40B4-BE49-F238E27FC236}">
-                <a16:creationId xmlns:a16="http://schemas.microsoft.com/office/drawing/2014/main" id="{8591BC02-825D-9D1B-2479-A64B013DDC92}"/>
+                <a16:creationId xmlns:a16="http://schemas.microsoft.com/office/drawing/2014/main" id="{34E218BB-5B43-136C-C46E-06F7CC275FF8}"/>
               </a:ext>
             </a:extLst>
           </p:cNvPr>
@@ -8004,8 +9036,8 @@
         </p:nvSpPr>
         <p:spPr>
           <a:xfrm>
-            <a:off x="790571" y="2647933"/>
-            <a:ext cx="3790953" cy="369332"/>
+            <a:off x="1981197" y="2729963"/>
+            <a:ext cx="2838454" cy="584775"/>
           </a:xfrm>
           <a:prstGeom prst="rect">
             <a:avLst/>
@@ -8018,22 +9050,43 @@
           </a:bodyPr>
           <a:lstStyle/>
           <a:p>
-            <a:r>
-              <a:rPr lang="en-US" altLang="ko-KR" dirty="0">
-                <a:latin typeface="D2Coding" panose="020B0609020101020101" pitchFamily="49" charset="-127"/>
-                <a:ea typeface="D2Coding" panose="020B0609020101020101" pitchFamily="49" charset="-127"/>
-              </a:rPr>
-              <a:t>(3, 3) grid </a:t>
-            </a:r>
-            <a:r>
-              <a:rPr lang="en-US" altLang="ko-KR" dirty="0">
-                <a:latin typeface="D2Coding" panose="020B0609020101020101" pitchFamily="49" charset="-127"/>
-                <a:ea typeface="D2Coding" panose="020B0609020101020101" pitchFamily="49" charset="-127"/>
-                <a:sym typeface="Wingdings" panose="05000000000000000000" pitchFamily="2" charset="2"/>
-              </a:rPr>
-              <a:t> P(Object)</a:t>
-            </a:r>
-            <a:endParaRPr lang="ko-KR" altLang="en-US" dirty="0"/>
+            <a:pPr algn="ctr"/>
+            <a:r>
+              <a:rPr lang="ko-KR" altLang="en-US" sz="1600" dirty="0">
+                <a:latin typeface="D2Coding" panose="020B0609020101020101" pitchFamily="49" charset="-127"/>
+                <a:ea typeface="D2Coding" panose="020B0609020101020101" pitchFamily="49" charset="-127"/>
+              </a:rPr>
+              <a:t>원래 </a:t>
+            </a:r>
+            <a:r>
+              <a:rPr lang="en-US" altLang="ko-KR" sz="1600" dirty="0">
+                <a:latin typeface="D2Coding" panose="020B0609020101020101" pitchFamily="49" charset="-127"/>
+                <a:ea typeface="D2Coding" panose="020B0609020101020101" pitchFamily="49" charset="-127"/>
+              </a:rPr>
+              <a:t>(30, 30) </a:t>
+            </a:r>
+            <a:r>
+              <a:rPr lang="ko-KR" altLang="en-US" sz="1600" dirty="0">
+                <a:latin typeface="D2Coding" panose="020B0609020101020101" pitchFamily="49" charset="-127"/>
+                <a:ea typeface="D2Coding" panose="020B0609020101020101" pitchFamily="49" charset="-127"/>
+              </a:rPr>
+              <a:t>이미지를</a:t>
+            </a:r>
+            <a:endParaRPr lang="en-US" altLang="ko-KR" sz="1600" dirty="0">
+              <a:latin typeface="D2Coding" panose="020B0609020101020101" pitchFamily="49" charset="-127"/>
+              <a:ea typeface="D2Coding" panose="020B0609020101020101" pitchFamily="49" charset="-127"/>
+            </a:endParaRPr>
+          </a:p>
+          <a:p>
+            <a:pPr algn="ctr"/>
+            <a:r>
+              <a:rPr lang="en-US" altLang="ko-KR" sz="1600" dirty="0">
+                <a:latin typeface="D2Coding" panose="020B0609020101020101" pitchFamily="49" charset="-127"/>
+                <a:ea typeface="D2Coding" panose="020B0609020101020101" pitchFamily="49" charset="-127"/>
+              </a:rPr>
+              <a:t>(3, 3) grid</a:t>
+            </a:r>
+            <a:endParaRPr lang="ko-KR" altLang="en-US" sz="1600" dirty="0"/>
           </a:p>
         </p:txBody>
       </p:sp>
@@ -8042,7 +9095,7 @@
           <p:cNvPr id="5" name="그래픽 4" descr="트럭">
             <a:extLst>
               <a:ext uri="{FF2B5EF4-FFF2-40B4-BE49-F238E27FC236}">
-                <a16:creationId xmlns:a16="http://schemas.microsoft.com/office/drawing/2014/main" id="{CFE80B72-C091-E3E0-69F4-226A624F1482}"/>
+                <a16:creationId xmlns:a16="http://schemas.microsoft.com/office/drawing/2014/main" id="{48EDE1C5-CEFC-1658-7E5F-7FEF49E7CF3A}"/>
               </a:ext>
             </a:extLst>
           </p:cNvPr>
@@ -8065,20 +9118,69 @@
         </p:blipFill>
         <p:spPr>
           <a:xfrm>
-            <a:off x="2048137" y="3535957"/>
-            <a:ext cx="1590414" cy="1590414"/>
+            <a:off x="3121757" y="3815064"/>
+            <a:ext cx="1234769" cy="1234769"/>
           </a:xfrm>
           <a:prstGeom prst="rect">
             <a:avLst/>
           </a:prstGeom>
         </p:spPr>
       </p:pic>
+      <p:sp>
+        <p:nvSpPr>
+          <p:cNvPr id="17" name="곱하기 기호 16">
+            <a:extLst>
+              <a:ext uri="{FF2B5EF4-FFF2-40B4-BE49-F238E27FC236}">
+                <a16:creationId xmlns:a16="http://schemas.microsoft.com/office/drawing/2014/main" id="{FE7C3A32-47C6-96EA-D059-FE24F727CDCB}"/>
+              </a:ext>
+            </a:extLst>
+          </p:cNvPr>
+          <p:cNvSpPr/>
+          <p:nvPr/>
+        </p:nvSpPr>
+        <p:spPr>
+          <a:xfrm>
+            <a:off x="3487876" y="4505862"/>
+            <a:ext cx="185112" cy="184876"/>
+          </a:xfrm>
+          <a:prstGeom prst="mathMultiply">
+            <a:avLst/>
+          </a:prstGeom>
+          <a:solidFill>
+            <a:srgbClr val="FF0000"/>
+          </a:solidFill>
+        </p:spPr>
+        <p:style>
+          <a:lnRef idx="2">
+            <a:schemeClr val="accent1">
+              <a:shade val="15000"/>
+            </a:schemeClr>
+          </a:lnRef>
+          <a:fillRef idx="1">
+            <a:schemeClr val="accent1"/>
+          </a:fillRef>
+          <a:effectRef idx="0">
+            <a:schemeClr val="accent1"/>
+          </a:effectRef>
+          <a:fontRef idx="minor">
+            <a:schemeClr val="lt1"/>
+          </a:fontRef>
+        </p:style>
+        <p:txBody>
+          <a:bodyPr rtlCol="0" anchor="ctr"/>
+          <a:lstStyle/>
+          <a:p>
+            <a:pPr algn="ctr"/>
+            <a:endParaRPr lang="ko-KR" altLang="en-US"/>
+          </a:p>
+        </p:txBody>
+      </p:sp>
       <p:graphicFrame>
         <p:nvGraphicFramePr>
-          <p:cNvPr id="12" name="표 11">
+          <p:cNvPr id="18" name="표 17">
             <a:extLst>
               <a:ext uri="{FF2B5EF4-FFF2-40B4-BE49-F238E27FC236}">
-                <a16:creationId xmlns:a16="http://schemas.microsoft.com/office/drawing/2014/main" id="{A401A2D9-7049-7B61-3731-53F44EFF5D3D}"/>
+                <a16:creationId xmlns:a16="http://schemas.microsoft.com/office/drawing/2014/main" id="{2F596DFF-0164-42DC-220E-AAB9EB436D40}"/>
               </a:ext>
             </a:extLst>
           </p:cNvPr>
@@ -8088,14 +9190,14 @@
           <p:nvPr>
             <p:extLst>
               <p:ext uri="{D42A27DB-BD31-4B8C-83A1-F6EECF244321}">
-                <p14:modId xmlns:p14="http://schemas.microsoft.com/office/powerpoint/2010/main" val="4183127602"/>
+                <p14:modId xmlns:p14="http://schemas.microsoft.com/office/powerpoint/2010/main" val="4092064144"/>
               </p:ext>
             </p:extLst>
           </p:nvPr>
         </p:nvGraphicFramePr>
         <p:xfrm>
-          <a:off x="5286372" y="3090008"/>
-          <a:ext cx="3790953" cy="3204663"/>
+          <a:off x="5819773" y="3376294"/>
+          <a:ext cx="2943228" cy="2488044"/>
         </p:xfrm>
         <a:graphic>
           <a:graphicData uri="http://schemas.openxmlformats.org/drawingml/2006/table">
@@ -8104,21 +9206,21 @@
                 <a:tableStyleId>{5940675A-B579-460E-94D1-54222C63F5DA}</a:tableStyleId>
               </a:tblPr>
               <a:tblGrid>
-                <a:gridCol w="1263651">
+                <a:gridCol w="981076">
                   <a:extLst>
                     <a:ext uri="{9D8B030D-6E8A-4147-A177-3AD203B41FA5}">
                       <a16:colId xmlns:a16="http://schemas.microsoft.com/office/drawing/2014/main" val="1961843274"/>
                     </a:ext>
                   </a:extLst>
                 </a:gridCol>
-                <a:gridCol w="1263651">
+                <a:gridCol w="981076">
                   <a:extLst>
                     <a:ext uri="{9D8B030D-6E8A-4147-A177-3AD203B41FA5}">
                       <a16:colId xmlns:a16="http://schemas.microsoft.com/office/drawing/2014/main" val="2923400843"/>
                     </a:ext>
                   </a:extLst>
                 </a:gridCol>
-                <a:gridCol w="1263651">
+                <a:gridCol w="981076">
                   <a:extLst>
                     <a:ext uri="{9D8B030D-6E8A-4147-A177-3AD203B41FA5}">
                       <a16:colId xmlns:a16="http://schemas.microsoft.com/office/drawing/2014/main" val="2951067763"/>
@@ -8126,29 +9228,53 @@
                   </a:extLst>
                 </a:gridCol>
               </a:tblGrid>
-              <a:tr h="1068221">
+              <a:tr h="829348">
                 <a:tc>
                   <a:txBody>
                     <a:bodyPr/>
                     <a:lstStyle/>
                     <a:p>
                       <a:pPr algn="ctr" latinLnBrk="1"/>
+                      <a:endParaRPr lang="en-US" altLang="ko-KR" sz="1200" dirty="0">
+                        <a:solidFill>
+                          <a:schemeClr val="tx1"/>
+                        </a:solidFill>
+                      </a:endParaRPr>
+                    </a:p>
+                    <a:p>
+                      <a:pPr algn="ctr" latinLnBrk="1"/>
+                      <a:endParaRPr lang="en-US" altLang="ko-KR" sz="1200" dirty="0">
+                        <a:solidFill>
+                          <a:schemeClr val="tx1"/>
+                        </a:solidFill>
+                      </a:endParaRPr>
+                    </a:p>
+                    <a:p>
+                      <a:pPr algn="ctr" latinLnBrk="1"/>
+                      <a:endParaRPr lang="en-US" altLang="ko-KR" sz="1200" dirty="0">
+                        <a:solidFill>
+                          <a:schemeClr val="tx1"/>
+                        </a:solidFill>
+                      </a:endParaRPr>
+                    </a:p>
+                    <a:p>
+                      <a:pPr algn="ctr" latinLnBrk="1"/>
                       <a:r>
-                        <a:rPr lang="en-US" altLang="ko-KR" sz="2000" dirty="0">
+                        <a:rPr lang="en-US" altLang="ko-KR" sz="1200" dirty="0">
                           <a:solidFill>
                             <a:schemeClr val="tx1"/>
                           </a:solidFill>
                         </a:rPr>
                         <a:t>0.01</a:t>
                       </a:r>
-                      <a:endParaRPr lang="ko-KR" altLang="en-US" sz="2000" dirty="0">
+                      <a:endParaRPr lang="ko-KR" altLang="en-US" sz="1200" dirty="0">
                         <a:solidFill>
                           <a:schemeClr val="tx1"/>
                         </a:solidFill>
                       </a:endParaRPr>
                     </a:p>
                   </a:txBody>
-                  <a:tcPr marL="86797" marR="86797" marT="43397" marB="43397"/>
+                  <a:tcPr marL="67388" marR="67388" marT="33693" marB="33693"/>
                 </a:tc>
                 <a:tc>
                   <a:txBody>
@@ -8172,8 +9298,107 @@
                         <a:tabLst/>
                         <a:defRPr/>
                       </a:pPr>
+                      <a:endParaRPr kumimoji="0" lang="en-US" altLang="ko-KR" sz="1200" b="0" i="0" u="none" strike="noStrike" kern="1200" cap="none" spc="0" normalizeH="0" baseline="0" noProof="0" dirty="0">
+                        <a:ln>
+                          <a:noFill/>
+                        </a:ln>
+                        <a:solidFill>
+                          <a:schemeClr val="tx1"/>
+                        </a:solidFill>
+                        <a:effectLst/>
+                        <a:uLnTx/>
+                        <a:uFillTx/>
+                        <a:latin typeface="Segoe UI"/>
+                        <a:ea typeface="+mn-ea"/>
+                        <a:cs typeface="+mn-cs"/>
+                      </a:endParaRPr>
+                    </a:p>
+                    <a:p>
+                      <a:pPr marL="0" marR="0" lvl="0" indent="0" algn="ctr" defTabSz="914400" rtl="0" eaLnBrk="1" fontAlgn="auto" latinLnBrk="1" hangingPunct="1">
+                        <a:lnSpc>
+                          <a:spcPct val="100000"/>
+                        </a:lnSpc>
+                        <a:spcBef>
+                          <a:spcPts val="0"/>
+                        </a:spcBef>
+                        <a:spcAft>
+                          <a:spcPts val="0"/>
+                        </a:spcAft>
+                        <a:buClrTx/>
+                        <a:buSzTx/>
+                        <a:buFontTx/>
+                        <a:buNone/>
+                        <a:tabLst/>
+                        <a:defRPr/>
+                      </a:pPr>
+                      <a:endParaRPr kumimoji="0" lang="en-US" altLang="ko-KR" sz="1200" b="0" i="0" u="none" strike="noStrike" kern="1200" cap="none" spc="0" normalizeH="0" baseline="0" noProof="0" dirty="0">
+                        <a:ln>
+                          <a:noFill/>
+                        </a:ln>
+                        <a:solidFill>
+                          <a:schemeClr val="tx1"/>
+                        </a:solidFill>
+                        <a:effectLst/>
+                        <a:uLnTx/>
+                        <a:uFillTx/>
+                        <a:latin typeface="Segoe UI"/>
+                        <a:ea typeface="+mn-ea"/>
+                        <a:cs typeface="+mn-cs"/>
+                      </a:endParaRPr>
+                    </a:p>
+                    <a:p>
+                      <a:pPr marL="0" marR="0" lvl="0" indent="0" algn="ctr" defTabSz="914400" rtl="0" eaLnBrk="1" fontAlgn="auto" latinLnBrk="1" hangingPunct="1">
+                        <a:lnSpc>
+                          <a:spcPct val="100000"/>
+                        </a:lnSpc>
+                        <a:spcBef>
+                          <a:spcPts val="0"/>
+                        </a:spcBef>
+                        <a:spcAft>
+                          <a:spcPts val="0"/>
+                        </a:spcAft>
+                        <a:buClrTx/>
+                        <a:buSzTx/>
+                        <a:buFontTx/>
+                        <a:buNone/>
+                        <a:tabLst/>
+                        <a:defRPr/>
+                      </a:pPr>
+                      <a:endParaRPr kumimoji="0" lang="en-US" altLang="ko-KR" sz="1200" b="0" i="0" u="none" strike="noStrike" kern="1200" cap="none" spc="0" normalizeH="0" baseline="0" noProof="0" dirty="0">
+                        <a:ln>
+                          <a:noFill/>
+                        </a:ln>
+                        <a:solidFill>
+                          <a:schemeClr val="tx1"/>
+                        </a:solidFill>
+                        <a:effectLst/>
+                        <a:uLnTx/>
+                        <a:uFillTx/>
+                        <a:latin typeface="Segoe UI"/>
+                        <a:ea typeface="+mn-ea"/>
+                        <a:cs typeface="+mn-cs"/>
+                      </a:endParaRPr>
+                    </a:p>
+                    <a:p>
+                      <a:pPr marL="0" marR="0" lvl="0" indent="0" algn="ctr" defTabSz="914400" rtl="0" eaLnBrk="1" fontAlgn="auto" latinLnBrk="1" hangingPunct="1">
+                        <a:lnSpc>
+                          <a:spcPct val="100000"/>
+                        </a:lnSpc>
+                        <a:spcBef>
+                          <a:spcPts val="0"/>
+                        </a:spcBef>
+                        <a:spcAft>
+                          <a:spcPts val="0"/>
+                        </a:spcAft>
+                        <a:buClrTx/>
+                        <a:buSzTx/>
+                        <a:buFontTx/>
+                        <a:buNone/>
+                        <a:tabLst/>
+                        <a:defRPr/>
+                      </a:pPr>
                       <a:r>
-                        <a:rPr kumimoji="0" lang="en-US" altLang="ko-KR" sz="2000" b="0" i="0" u="none" strike="noStrike" kern="1200" cap="none" spc="0" normalizeH="0" baseline="0" noProof="0" dirty="0">
+                        <a:rPr kumimoji="0" lang="en-US" altLang="ko-KR" sz="1200" b="0" i="0" u="none" strike="noStrike" kern="1200" cap="none" spc="0" normalizeH="0" baseline="0" noProof="0" dirty="0">
                           <a:ln>
                             <a:noFill/>
                           </a:ln>
@@ -8187,9 +9412,9 @@
                           <a:ea typeface="+mn-ea"/>
                           <a:cs typeface="+mn-cs"/>
                         </a:rPr>
-                        <a:t>0.04</a:t>
+                        <a:t>0.15</a:t>
                       </a:r>
-                      <a:endParaRPr kumimoji="0" lang="ko-KR" altLang="en-US" sz="2000" b="0" i="0" u="none" strike="noStrike" kern="1200" cap="none" spc="0" normalizeH="0" baseline="0" noProof="0" dirty="0">
+                      <a:endParaRPr kumimoji="0" lang="ko-KR" altLang="en-US" sz="1200" b="0" i="0" u="none" strike="noStrike" kern="1200" cap="none" spc="0" normalizeH="0" baseline="0" noProof="0" dirty="0">
                         <a:ln>
                           <a:noFill/>
                         </a:ln>
@@ -8205,7 +9430,7 @@
                       </a:endParaRPr>
                     </a:p>
                   </a:txBody>
-                  <a:tcPr marL="86797" marR="86797" marT="43397" marB="43397"/>
+                  <a:tcPr marL="67388" marR="67388" marT="33693" marB="33693"/>
                 </a:tc>
                 <a:tc>
                   <a:txBody>
@@ -8229,8 +9454,1057 @@
                         <a:tabLst/>
                         <a:defRPr/>
                       </a:pPr>
+                      <a:endParaRPr kumimoji="0" lang="en-US" altLang="ko-KR" sz="1200" b="0" i="0" u="none" strike="noStrike" kern="1200" cap="none" spc="0" normalizeH="0" baseline="0" noProof="0" dirty="0">
+                        <a:ln>
+                          <a:noFill/>
+                        </a:ln>
+                        <a:solidFill>
+                          <a:schemeClr val="tx1"/>
+                        </a:solidFill>
+                        <a:effectLst/>
+                        <a:uLnTx/>
+                        <a:uFillTx/>
+                        <a:latin typeface="Segoe UI"/>
+                        <a:ea typeface="+mn-ea"/>
+                        <a:cs typeface="+mn-cs"/>
+                      </a:endParaRPr>
+                    </a:p>
+                    <a:p>
+                      <a:pPr marL="0" marR="0" lvl="0" indent="0" algn="ctr" defTabSz="914400" rtl="0" eaLnBrk="1" fontAlgn="auto" latinLnBrk="1" hangingPunct="1">
+                        <a:lnSpc>
+                          <a:spcPct val="100000"/>
+                        </a:lnSpc>
+                        <a:spcBef>
+                          <a:spcPts val="0"/>
+                        </a:spcBef>
+                        <a:spcAft>
+                          <a:spcPts val="0"/>
+                        </a:spcAft>
+                        <a:buClrTx/>
+                        <a:buSzTx/>
+                        <a:buFontTx/>
+                        <a:buNone/>
+                        <a:tabLst/>
+                        <a:defRPr/>
+                      </a:pPr>
+                      <a:endParaRPr kumimoji="0" lang="en-US" altLang="ko-KR" sz="1200" b="0" i="0" u="none" strike="noStrike" kern="1200" cap="none" spc="0" normalizeH="0" baseline="0" noProof="0" dirty="0">
+                        <a:ln>
+                          <a:noFill/>
+                        </a:ln>
+                        <a:solidFill>
+                          <a:schemeClr val="tx1"/>
+                        </a:solidFill>
+                        <a:effectLst/>
+                        <a:uLnTx/>
+                        <a:uFillTx/>
+                        <a:latin typeface="Segoe UI"/>
+                        <a:ea typeface="+mn-ea"/>
+                        <a:cs typeface="+mn-cs"/>
+                      </a:endParaRPr>
+                    </a:p>
+                    <a:p>
+                      <a:pPr marL="0" marR="0" lvl="0" indent="0" algn="ctr" defTabSz="914400" rtl="0" eaLnBrk="1" fontAlgn="auto" latinLnBrk="1" hangingPunct="1">
+                        <a:lnSpc>
+                          <a:spcPct val="100000"/>
+                        </a:lnSpc>
+                        <a:spcBef>
+                          <a:spcPts val="0"/>
+                        </a:spcBef>
+                        <a:spcAft>
+                          <a:spcPts val="0"/>
+                        </a:spcAft>
+                        <a:buClrTx/>
+                        <a:buSzTx/>
+                        <a:buFontTx/>
+                        <a:buNone/>
+                        <a:tabLst/>
+                        <a:defRPr/>
+                      </a:pPr>
+                      <a:endParaRPr kumimoji="0" lang="en-US" altLang="ko-KR" sz="1200" b="0" i="0" u="none" strike="noStrike" kern="1200" cap="none" spc="0" normalizeH="0" baseline="0" noProof="0" dirty="0">
+                        <a:ln>
+                          <a:noFill/>
+                        </a:ln>
+                        <a:solidFill>
+                          <a:schemeClr val="tx1"/>
+                        </a:solidFill>
+                        <a:effectLst/>
+                        <a:uLnTx/>
+                        <a:uFillTx/>
+                        <a:latin typeface="Segoe UI"/>
+                        <a:ea typeface="+mn-ea"/>
+                        <a:cs typeface="+mn-cs"/>
+                      </a:endParaRPr>
+                    </a:p>
+                    <a:p>
+                      <a:pPr marL="0" marR="0" lvl="0" indent="0" algn="ctr" defTabSz="914400" rtl="0" eaLnBrk="1" fontAlgn="auto" latinLnBrk="1" hangingPunct="1">
+                        <a:lnSpc>
+                          <a:spcPct val="100000"/>
+                        </a:lnSpc>
+                        <a:spcBef>
+                          <a:spcPts val="0"/>
+                        </a:spcBef>
+                        <a:spcAft>
+                          <a:spcPts val="0"/>
+                        </a:spcAft>
+                        <a:buClrTx/>
+                        <a:buSzTx/>
+                        <a:buFontTx/>
+                        <a:buNone/>
+                        <a:tabLst/>
+                        <a:defRPr/>
+                      </a:pPr>
                       <a:r>
-                        <a:rPr kumimoji="0" lang="en-US" altLang="ko-KR" sz="2000" b="0" i="0" u="none" strike="noStrike" kern="1200" cap="none" spc="0" normalizeH="0" baseline="0" noProof="0" dirty="0">
+                        <a:rPr kumimoji="0" lang="en-US" altLang="ko-KR" sz="1200" b="0" i="0" u="none" strike="noStrike" kern="1200" cap="none" spc="0" normalizeH="0" baseline="0" noProof="0" dirty="0">
+                          <a:ln>
+                            <a:noFill/>
+                          </a:ln>
+                          <a:solidFill>
+                            <a:schemeClr val="tx1"/>
+                          </a:solidFill>
+                          <a:effectLst/>
+                          <a:uLnTx/>
+                          <a:uFillTx/>
+                          <a:latin typeface="Segoe UI"/>
+                          <a:ea typeface="+mn-ea"/>
+                          <a:cs typeface="+mn-cs"/>
+                        </a:rPr>
+                        <a:t>0.06</a:t>
+                      </a:r>
+                      <a:endParaRPr kumimoji="0" lang="ko-KR" altLang="en-US" sz="1200" b="0" i="0" u="none" strike="noStrike" kern="1200" cap="none" spc="0" normalizeH="0" baseline="0" noProof="0" dirty="0">
+                        <a:ln>
+                          <a:noFill/>
+                        </a:ln>
+                        <a:solidFill>
+                          <a:schemeClr val="tx1"/>
+                        </a:solidFill>
+                        <a:effectLst/>
+                        <a:uLnTx/>
+                        <a:uFillTx/>
+                        <a:latin typeface="Segoe UI"/>
+                        <a:ea typeface="+mn-ea"/>
+                        <a:cs typeface="+mn-cs"/>
+                      </a:endParaRPr>
+                    </a:p>
+                  </a:txBody>
+                  <a:tcPr marL="67388" marR="67388" marT="33693" marB="33693"/>
+                </a:tc>
+                <a:extLst>
+                  <a:ext uri="{0D108BD9-81ED-4DB2-BD59-A6C34878D82A}">
+                    <a16:rowId xmlns:a16="http://schemas.microsoft.com/office/drawing/2014/main" val="844891742"/>
+                  </a:ext>
+                </a:extLst>
+              </a:tr>
+              <a:tr h="829348">
+                <a:tc>
+                  <a:txBody>
+                    <a:bodyPr/>
+                    <a:lstStyle/>
+                    <a:p>
+                      <a:pPr marL="0" marR="0" lvl="0" indent="0" algn="ctr" defTabSz="914400" rtl="0" eaLnBrk="1" fontAlgn="auto" latinLnBrk="1" hangingPunct="1">
+                        <a:lnSpc>
+                          <a:spcPct val="100000"/>
+                        </a:lnSpc>
+                        <a:spcBef>
+                          <a:spcPts val="0"/>
+                        </a:spcBef>
+                        <a:spcAft>
+                          <a:spcPts val="0"/>
+                        </a:spcAft>
+                        <a:buClrTx/>
+                        <a:buSzTx/>
+                        <a:buFontTx/>
+                        <a:buNone/>
+                        <a:tabLst/>
+                        <a:defRPr/>
+                      </a:pPr>
+                      <a:endParaRPr kumimoji="0" lang="en-US" altLang="ko-KR" sz="1200" b="0" i="0" u="none" strike="noStrike" kern="1200" cap="none" spc="0" normalizeH="0" baseline="0" noProof="0" dirty="0">
+                        <a:ln>
+                          <a:noFill/>
+                        </a:ln>
+                        <a:solidFill>
+                          <a:schemeClr val="tx1"/>
+                        </a:solidFill>
+                        <a:effectLst/>
+                        <a:uLnTx/>
+                        <a:uFillTx/>
+                        <a:latin typeface="Segoe UI"/>
+                        <a:ea typeface="+mn-ea"/>
+                        <a:cs typeface="+mn-cs"/>
+                      </a:endParaRPr>
+                    </a:p>
+                    <a:p>
+                      <a:pPr marL="0" marR="0" lvl="0" indent="0" algn="ctr" defTabSz="914400" rtl="0" eaLnBrk="1" fontAlgn="auto" latinLnBrk="1" hangingPunct="1">
+                        <a:lnSpc>
+                          <a:spcPct val="100000"/>
+                        </a:lnSpc>
+                        <a:spcBef>
+                          <a:spcPts val="0"/>
+                        </a:spcBef>
+                        <a:spcAft>
+                          <a:spcPts val="0"/>
+                        </a:spcAft>
+                        <a:buClrTx/>
+                        <a:buSzTx/>
+                        <a:buFontTx/>
+                        <a:buNone/>
+                        <a:tabLst/>
+                        <a:defRPr/>
+                      </a:pPr>
+                      <a:endParaRPr kumimoji="0" lang="en-US" altLang="ko-KR" sz="1200" b="0" i="0" u="none" strike="noStrike" kern="1200" cap="none" spc="0" normalizeH="0" baseline="0" noProof="0" dirty="0">
+                        <a:ln>
+                          <a:noFill/>
+                        </a:ln>
+                        <a:solidFill>
+                          <a:schemeClr val="tx1"/>
+                        </a:solidFill>
+                        <a:effectLst/>
+                        <a:uLnTx/>
+                        <a:uFillTx/>
+                        <a:latin typeface="Segoe UI"/>
+                        <a:ea typeface="+mn-ea"/>
+                        <a:cs typeface="+mn-cs"/>
+                      </a:endParaRPr>
+                    </a:p>
+                    <a:p>
+                      <a:pPr marL="0" marR="0" lvl="0" indent="0" algn="ctr" defTabSz="914400" rtl="0" eaLnBrk="1" fontAlgn="auto" latinLnBrk="1" hangingPunct="1">
+                        <a:lnSpc>
+                          <a:spcPct val="100000"/>
+                        </a:lnSpc>
+                        <a:spcBef>
+                          <a:spcPts val="0"/>
+                        </a:spcBef>
+                        <a:spcAft>
+                          <a:spcPts val="0"/>
+                        </a:spcAft>
+                        <a:buClrTx/>
+                        <a:buSzTx/>
+                        <a:buFontTx/>
+                        <a:buNone/>
+                        <a:tabLst/>
+                        <a:defRPr/>
+                      </a:pPr>
+                      <a:endParaRPr kumimoji="0" lang="en-US" altLang="ko-KR" sz="1200" b="0" i="0" u="none" strike="noStrike" kern="1200" cap="none" spc="0" normalizeH="0" baseline="0" noProof="0" dirty="0">
+                        <a:ln>
+                          <a:noFill/>
+                        </a:ln>
+                        <a:solidFill>
+                          <a:schemeClr val="tx1"/>
+                        </a:solidFill>
+                        <a:effectLst/>
+                        <a:uLnTx/>
+                        <a:uFillTx/>
+                        <a:latin typeface="Segoe UI"/>
+                        <a:ea typeface="+mn-ea"/>
+                        <a:cs typeface="+mn-cs"/>
+                      </a:endParaRPr>
+                    </a:p>
+                    <a:p>
+                      <a:pPr marL="0" marR="0" lvl="0" indent="0" algn="ctr" defTabSz="914400" rtl="0" eaLnBrk="1" fontAlgn="auto" latinLnBrk="1" hangingPunct="1">
+                        <a:lnSpc>
+                          <a:spcPct val="100000"/>
+                        </a:lnSpc>
+                        <a:spcBef>
+                          <a:spcPts val="0"/>
+                        </a:spcBef>
+                        <a:spcAft>
+                          <a:spcPts val="0"/>
+                        </a:spcAft>
+                        <a:buClrTx/>
+                        <a:buSzTx/>
+                        <a:buFontTx/>
+                        <a:buNone/>
+                        <a:tabLst/>
+                        <a:defRPr/>
+                      </a:pPr>
+                      <a:r>
+                        <a:rPr kumimoji="0" lang="en-US" altLang="ko-KR" sz="1200" b="0" i="0" u="none" strike="noStrike" kern="1200" cap="none" spc="0" normalizeH="0" baseline="0" noProof="0" dirty="0">
+                          <a:ln>
+                            <a:noFill/>
+                          </a:ln>
+                          <a:solidFill>
+                            <a:schemeClr val="tx1"/>
+                          </a:solidFill>
+                          <a:effectLst/>
+                          <a:uLnTx/>
+                          <a:uFillTx/>
+                          <a:latin typeface="Segoe UI"/>
+                          <a:ea typeface="+mn-ea"/>
+                          <a:cs typeface="+mn-cs"/>
+                        </a:rPr>
+                        <a:t>0.02</a:t>
+                      </a:r>
+                      <a:endParaRPr kumimoji="0" lang="ko-KR" altLang="en-US" sz="1200" b="0" i="0" u="none" strike="noStrike" kern="1200" cap="none" spc="0" normalizeH="0" baseline="0" noProof="0" dirty="0">
+                        <a:ln>
+                          <a:noFill/>
+                        </a:ln>
+                        <a:solidFill>
+                          <a:schemeClr val="tx1"/>
+                        </a:solidFill>
+                        <a:effectLst/>
+                        <a:uLnTx/>
+                        <a:uFillTx/>
+                        <a:latin typeface="Segoe UI"/>
+                        <a:ea typeface="+mn-ea"/>
+                        <a:cs typeface="+mn-cs"/>
+                      </a:endParaRPr>
+                    </a:p>
+                  </a:txBody>
+                  <a:tcPr marL="67388" marR="67388" marT="33693" marB="33693"/>
+                </a:tc>
+                <a:tc>
+                  <a:txBody>
+                    <a:bodyPr/>
+                    <a:lstStyle/>
+                    <a:p>
+                      <a:pPr marL="0" marR="0" lvl="0" indent="0" algn="ctr" defTabSz="914400" rtl="0" eaLnBrk="1" fontAlgn="auto" latinLnBrk="1" hangingPunct="1">
+                        <a:lnSpc>
+                          <a:spcPct val="100000"/>
+                        </a:lnSpc>
+                        <a:spcBef>
+                          <a:spcPts val="0"/>
+                        </a:spcBef>
+                        <a:spcAft>
+                          <a:spcPts val="0"/>
+                        </a:spcAft>
+                        <a:buClrTx/>
+                        <a:buSzTx/>
+                        <a:buFontTx/>
+                        <a:buNone/>
+                        <a:tabLst/>
+                        <a:defRPr/>
+                      </a:pPr>
+                      <a:endParaRPr kumimoji="0" lang="en-US" altLang="ko-KR" sz="1200" b="0" i="0" u="none" strike="noStrike" kern="1200" cap="none" spc="0" normalizeH="0" baseline="0" noProof="0" dirty="0">
+                        <a:ln>
+                          <a:noFill/>
+                        </a:ln>
+                        <a:solidFill>
+                          <a:schemeClr val="bg1"/>
+                        </a:solidFill>
+                        <a:effectLst/>
+                        <a:uLnTx/>
+                        <a:uFillTx/>
+                        <a:latin typeface="Segoe UI"/>
+                        <a:ea typeface="+mn-ea"/>
+                        <a:cs typeface="+mn-cs"/>
+                      </a:endParaRPr>
+                    </a:p>
+                    <a:p>
+                      <a:pPr marL="0" marR="0" lvl="0" indent="0" algn="ctr" defTabSz="914400" rtl="0" eaLnBrk="1" fontAlgn="auto" latinLnBrk="1" hangingPunct="1">
+                        <a:lnSpc>
+                          <a:spcPct val="100000"/>
+                        </a:lnSpc>
+                        <a:spcBef>
+                          <a:spcPts val="0"/>
+                        </a:spcBef>
+                        <a:spcAft>
+                          <a:spcPts val="0"/>
+                        </a:spcAft>
+                        <a:buClrTx/>
+                        <a:buSzTx/>
+                        <a:buFontTx/>
+                        <a:buNone/>
+                        <a:tabLst/>
+                        <a:defRPr/>
+                      </a:pPr>
+                      <a:endParaRPr kumimoji="0" lang="en-US" altLang="ko-KR" sz="1200" b="0" i="0" u="none" strike="noStrike" kern="1200" cap="none" spc="0" normalizeH="0" baseline="0" noProof="0" dirty="0">
+                        <a:ln>
+                          <a:noFill/>
+                        </a:ln>
+                        <a:solidFill>
+                          <a:schemeClr val="bg1"/>
+                        </a:solidFill>
+                        <a:effectLst/>
+                        <a:uLnTx/>
+                        <a:uFillTx/>
+                        <a:latin typeface="Segoe UI"/>
+                        <a:ea typeface="+mn-ea"/>
+                        <a:cs typeface="+mn-cs"/>
+                      </a:endParaRPr>
+                    </a:p>
+                    <a:p>
+                      <a:pPr marL="0" marR="0" lvl="0" indent="0" algn="ctr" defTabSz="914400" rtl="0" eaLnBrk="1" fontAlgn="auto" latinLnBrk="1" hangingPunct="1">
+                        <a:lnSpc>
+                          <a:spcPct val="100000"/>
+                        </a:lnSpc>
+                        <a:spcBef>
+                          <a:spcPts val="0"/>
+                        </a:spcBef>
+                        <a:spcAft>
+                          <a:spcPts val="0"/>
+                        </a:spcAft>
+                        <a:buClrTx/>
+                        <a:buSzTx/>
+                        <a:buFontTx/>
+                        <a:buNone/>
+                        <a:tabLst/>
+                        <a:defRPr/>
+                      </a:pPr>
+                      <a:endParaRPr kumimoji="0" lang="en-US" altLang="ko-KR" sz="1200" b="0" i="0" u="none" strike="noStrike" kern="1200" cap="none" spc="0" normalizeH="0" baseline="0" noProof="0" dirty="0">
+                        <a:ln>
+                          <a:noFill/>
+                        </a:ln>
+                        <a:solidFill>
+                          <a:schemeClr val="bg1"/>
+                        </a:solidFill>
+                        <a:effectLst/>
+                        <a:uLnTx/>
+                        <a:uFillTx/>
+                        <a:latin typeface="Segoe UI"/>
+                        <a:ea typeface="+mn-ea"/>
+                        <a:cs typeface="+mn-cs"/>
+                      </a:endParaRPr>
+                    </a:p>
+                    <a:p>
+                      <a:pPr marL="0" marR="0" lvl="0" indent="0" algn="ctr" defTabSz="914400" rtl="0" eaLnBrk="1" fontAlgn="auto" latinLnBrk="1" hangingPunct="1">
+                        <a:lnSpc>
+                          <a:spcPct val="100000"/>
+                        </a:lnSpc>
+                        <a:spcBef>
+                          <a:spcPts val="0"/>
+                        </a:spcBef>
+                        <a:spcAft>
+                          <a:spcPts val="0"/>
+                        </a:spcAft>
+                        <a:buClrTx/>
+                        <a:buSzTx/>
+                        <a:buFontTx/>
+                        <a:buNone/>
+                        <a:tabLst/>
+                        <a:defRPr/>
+                      </a:pPr>
+                      <a:r>
+                        <a:rPr kumimoji="0" lang="en-US" altLang="ko-KR" sz="1200" b="0" i="0" u="none" strike="noStrike" kern="1200" cap="none" spc="0" normalizeH="0" baseline="0" noProof="0" dirty="0">
+                          <a:ln>
+                            <a:noFill/>
+                          </a:ln>
+                          <a:solidFill>
+                            <a:schemeClr val="tx1"/>
+                          </a:solidFill>
+                          <a:effectLst/>
+                          <a:uLnTx/>
+                          <a:uFillTx/>
+                          <a:latin typeface="Segoe UI"/>
+                          <a:ea typeface="+mn-ea"/>
+                          <a:cs typeface="+mn-cs"/>
+                        </a:rPr>
+                        <a:t>0.95</a:t>
+                      </a:r>
+                      <a:endParaRPr kumimoji="0" lang="ko-KR" altLang="en-US" sz="1200" b="0" i="0" u="none" strike="noStrike" kern="1200" cap="none" spc="0" normalizeH="0" baseline="0" noProof="0" dirty="0">
+                        <a:ln>
+                          <a:noFill/>
+                        </a:ln>
+                        <a:solidFill>
+                          <a:schemeClr val="tx1"/>
+                        </a:solidFill>
+                        <a:effectLst/>
+                        <a:uLnTx/>
+                        <a:uFillTx/>
+                        <a:latin typeface="Segoe UI"/>
+                        <a:ea typeface="+mn-ea"/>
+                        <a:cs typeface="+mn-cs"/>
+                      </a:endParaRPr>
+                    </a:p>
+                  </a:txBody>
+                  <a:tcPr marL="67388" marR="67388" marT="33693" marB="33693"/>
+                </a:tc>
+                <a:tc>
+                  <a:txBody>
+                    <a:bodyPr/>
+                    <a:lstStyle/>
+                    <a:p>
+                      <a:pPr marL="0" marR="0" lvl="0" indent="0" algn="ctr" defTabSz="914400" rtl="0" eaLnBrk="1" fontAlgn="auto" latinLnBrk="1" hangingPunct="1">
+                        <a:lnSpc>
+                          <a:spcPct val="100000"/>
+                        </a:lnSpc>
+                        <a:spcBef>
+                          <a:spcPts val="0"/>
+                        </a:spcBef>
+                        <a:spcAft>
+                          <a:spcPts val="0"/>
+                        </a:spcAft>
+                        <a:buClrTx/>
+                        <a:buSzTx/>
+                        <a:buFontTx/>
+                        <a:buNone/>
+                        <a:tabLst/>
+                        <a:defRPr/>
+                      </a:pPr>
+                      <a:endParaRPr kumimoji="0" lang="en-US" altLang="ko-KR" sz="1200" b="0" i="0" u="none" strike="noStrike" kern="1200" cap="none" spc="0" normalizeH="0" baseline="0" noProof="0" dirty="0">
+                        <a:ln>
+                          <a:noFill/>
+                        </a:ln>
+                        <a:solidFill>
+                          <a:schemeClr val="tx1"/>
+                        </a:solidFill>
+                        <a:effectLst/>
+                        <a:uLnTx/>
+                        <a:uFillTx/>
+                        <a:latin typeface="Segoe UI"/>
+                        <a:ea typeface="+mn-ea"/>
+                        <a:cs typeface="+mn-cs"/>
+                      </a:endParaRPr>
+                    </a:p>
+                    <a:p>
+                      <a:pPr marL="0" marR="0" lvl="0" indent="0" algn="ctr" defTabSz="914400" rtl="0" eaLnBrk="1" fontAlgn="auto" latinLnBrk="1" hangingPunct="1">
+                        <a:lnSpc>
+                          <a:spcPct val="100000"/>
+                        </a:lnSpc>
+                        <a:spcBef>
+                          <a:spcPts val="0"/>
+                        </a:spcBef>
+                        <a:spcAft>
+                          <a:spcPts val="0"/>
+                        </a:spcAft>
+                        <a:buClrTx/>
+                        <a:buSzTx/>
+                        <a:buFontTx/>
+                        <a:buNone/>
+                        <a:tabLst/>
+                        <a:defRPr/>
+                      </a:pPr>
+                      <a:endParaRPr kumimoji="0" lang="en-US" altLang="ko-KR" sz="1200" b="0" i="0" u="none" strike="noStrike" kern="1200" cap="none" spc="0" normalizeH="0" baseline="0" noProof="0" dirty="0">
+                        <a:ln>
+                          <a:noFill/>
+                        </a:ln>
+                        <a:solidFill>
+                          <a:schemeClr val="tx1"/>
+                        </a:solidFill>
+                        <a:effectLst/>
+                        <a:uLnTx/>
+                        <a:uFillTx/>
+                        <a:latin typeface="Segoe UI"/>
+                        <a:ea typeface="+mn-ea"/>
+                        <a:cs typeface="+mn-cs"/>
+                      </a:endParaRPr>
+                    </a:p>
+                    <a:p>
+                      <a:pPr marL="0" marR="0" lvl="0" indent="0" algn="ctr" defTabSz="914400" rtl="0" eaLnBrk="1" fontAlgn="auto" latinLnBrk="1" hangingPunct="1">
+                        <a:lnSpc>
+                          <a:spcPct val="100000"/>
+                        </a:lnSpc>
+                        <a:spcBef>
+                          <a:spcPts val="0"/>
+                        </a:spcBef>
+                        <a:spcAft>
+                          <a:spcPts val="0"/>
+                        </a:spcAft>
+                        <a:buClrTx/>
+                        <a:buSzTx/>
+                        <a:buFontTx/>
+                        <a:buNone/>
+                        <a:tabLst/>
+                        <a:defRPr/>
+                      </a:pPr>
+                      <a:endParaRPr kumimoji="0" lang="en-US" altLang="ko-KR" sz="1200" b="0" i="0" u="none" strike="noStrike" kern="1200" cap="none" spc="0" normalizeH="0" baseline="0" noProof="0" dirty="0">
+                        <a:ln>
+                          <a:noFill/>
+                        </a:ln>
+                        <a:solidFill>
+                          <a:schemeClr val="tx1"/>
+                        </a:solidFill>
+                        <a:effectLst/>
+                        <a:uLnTx/>
+                        <a:uFillTx/>
+                        <a:latin typeface="Segoe UI"/>
+                        <a:ea typeface="+mn-ea"/>
+                        <a:cs typeface="+mn-cs"/>
+                      </a:endParaRPr>
+                    </a:p>
+                    <a:p>
+                      <a:pPr marL="0" marR="0" lvl="0" indent="0" algn="ctr" defTabSz="914400" rtl="0" eaLnBrk="1" fontAlgn="auto" latinLnBrk="1" hangingPunct="1">
+                        <a:lnSpc>
+                          <a:spcPct val="100000"/>
+                        </a:lnSpc>
+                        <a:spcBef>
+                          <a:spcPts val="0"/>
+                        </a:spcBef>
+                        <a:spcAft>
+                          <a:spcPts val="0"/>
+                        </a:spcAft>
+                        <a:buClrTx/>
+                        <a:buSzTx/>
+                        <a:buFontTx/>
+                        <a:buNone/>
+                        <a:tabLst/>
+                        <a:defRPr/>
+                      </a:pPr>
+                      <a:r>
+                        <a:rPr kumimoji="0" lang="en-US" altLang="ko-KR" sz="1200" b="0" i="0" u="none" strike="noStrike" kern="1200" cap="none" spc="0" normalizeH="0" baseline="0" noProof="0" dirty="0">
+                          <a:ln>
+                            <a:noFill/>
+                          </a:ln>
+                          <a:solidFill>
+                            <a:schemeClr val="tx1"/>
+                          </a:solidFill>
+                          <a:effectLst/>
+                          <a:uLnTx/>
+                          <a:uFillTx/>
+                          <a:latin typeface="Segoe UI"/>
+                          <a:ea typeface="+mn-ea"/>
+                          <a:cs typeface="+mn-cs"/>
+                        </a:rPr>
+                        <a:t>0.56</a:t>
+                      </a:r>
+                      <a:endParaRPr kumimoji="0" lang="ko-KR" altLang="en-US" sz="1200" b="0" i="0" u="none" strike="noStrike" kern="1200" cap="none" spc="0" normalizeH="0" baseline="0" noProof="0" dirty="0">
+                        <a:ln>
+                          <a:noFill/>
+                        </a:ln>
+                        <a:solidFill>
+                          <a:schemeClr val="tx1"/>
+                        </a:solidFill>
+                        <a:effectLst/>
+                        <a:uLnTx/>
+                        <a:uFillTx/>
+                        <a:latin typeface="Segoe UI"/>
+                        <a:ea typeface="+mn-ea"/>
+                        <a:cs typeface="+mn-cs"/>
+                      </a:endParaRPr>
+                    </a:p>
+                  </a:txBody>
+                  <a:tcPr marL="67388" marR="67388" marT="33693" marB="33693"/>
+                </a:tc>
+                <a:extLst>
+                  <a:ext uri="{0D108BD9-81ED-4DB2-BD59-A6C34878D82A}">
+                    <a16:rowId xmlns:a16="http://schemas.microsoft.com/office/drawing/2014/main" val="4097710734"/>
+                  </a:ext>
+                </a:extLst>
+              </a:tr>
+              <a:tr h="829348">
+                <a:tc>
+                  <a:txBody>
+                    <a:bodyPr/>
+                    <a:lstStyle/>
+                    <a:p>
+                      <a:pPr marL="0" marR="0" lvl="0" indent="0" algn="ctr" defTabSz="914400" rtl="0" eaLnBrk="1" fontAlgn="auto" latinLnBrk="1" hangingPunct="1">
+                        <a:lnSpc>
+                          <a:spcPct val="100000"/>
+                        </a:lnSpc>
+                        <a:spcBef>
+                          <a:spcPts val="0"/>
+                        </a:spcBef>
+                        <a:spcAft>
+                          <a:spcPts val="0"/>
+                        </a:spcAft>
+                        <a:buClrTx/>
+                        <a:buSzTx/>
+                        <a:buFontTx/>
+                        <a:buNone/>
+                        <a:tabLst/>
+                        <a:defRPr/>
+                      </a:pPr>
+                      <a:endParaRPr kumimoji="0" lang="en-US" altLang="ko-KR" sz="1200" b="0" i="0" u="none" strike="noStrike" kern="1200" cap="none" spc="0" normalizeH="0" baseline="0" noProof="0" dirty="0">
+                        <a:ln>
+                          <a:noFill/>
+                        </a:ln>
+                        <a:solidFill>
+                          <a:schemeClr val="tx1"/>
+                        </a:solidFill>
+                        <a:effectLst/>
+                        <a:uLnTx/>
+                        <a:uFillTx/>
+                        <a:latin typeface="Segoe UI"/>
+                        <a:ea typeface="+mn-ea"/>
+                        <a:cs typeface="+mn-cs"/>
+                      </a:endParaRPr>
+                    </a:p>
+                    <a:p>
+                      <a:pPr marL="0" marR="0" lvl="0" indent="0" algn="ctr" defTabSz="914400" rtl="0" eaLnBrk="1" fontAlgn="auto" latinLnBrk="1" hangingPunct="1">
+                        <a:lnSpc>
+                          <a:spcPct val="100000"/>
+                        </a:lnSpc>
+                        <a:spcBef>
+                          <a:spcPts val="0"/>
+                        </a:spcBef>
+                        <a:spcAft>
+                          <a:spcPts val="0"/>
+                        </a:spcAft>
+                        <a:buClrTx/>
+                        <a:buSzTx/>
+                        <a:buFontTx/>
+                        <a:buNone/>
+                        <a:tabLst/>
+                        <a:defRPr/>
+                      </a:pPr>
+                      <a:endParaRPr kumimoji="0" lang="en-US" altLang="ko-KR" sz="1200" b="0" i="0" u="none" strike="noStrike" kern="1200" cap="none" spc="0" normalizeH="0" baseline="0" noProof="0" dirty="0">
+                        <a:ln>
+                          <a:noFill/>
+                        </a:ln>
+                        <a:solidFill>
+                          <a:schemeClr val="tx1"/>
+                        </a:solidFill>
+                        <a:effectLst/>
+                        <a:uLnTx/>
+                        <a:uFillTx/>
+                        <a:latin typeface="Segoe UI"/>
+                        <a:ea typeface="+mn-ea"/>
+                        <a:cs typeface="+mn-cs"/>
+                      </a:endParaRPr>
+                    </a:p>
+                    <a:p>
+                      <a:pPr marL="0" marR="0" lvl="0" indent="0" algn="ctr" defTabSz="914400" rtl="0" eaLnBrk="1" fontAlgn="auto" latinLnBrk="1" hangingPunct="1">
+                        <a:lnSpc>
+                          <a:spcPct val="100000"/>
+                        </a:lnSpc>
+                        <a:spcBef>
+                          <a:spcPts val="0"/>
+                        </a:spcBef>
+                        <a:spcAft>
+                          <a:spcPts val="0"/>
+                        </a:spcAft>
+                        <a:buClrTx/>
+                        <a:buSzTx/>
+                        <a:buFontTx/>
+                        <a:buNone/>
+                        <a:tabLst/>
+                        <a:defRPr/>
+                      </a:pPr>
+                      <a:endParaRPr kumimoji="0" lang="en-US" altLang="ko-KR" sz="1200" b="0" i="0" u="none" strike="noStrike" kern="1200" cap="none" spc="0" normalizeH="0" baseline="0" noProof="0" dirty="0">
+                        <a:ln>
+                          <a:noFill/>
+                        </a:ln>
+                        <a:solidFill>
+                          <a:schemeClr val="tx1"/>
+                        </a:solidFill>
+                        <a:effectLst/>
+                        <a:uLnTx/>
+                        <a:uFillTx/>
+                        <a:latin typeface="Segoe UI"/>
+                        <a:ea typeface="+mn-ea"/>
+                        <a:cs typeface="+mn-cs"/>
+                      </a:endParaRPr>
+                    </a:p>
+                    <a:p>
+                      <a:pPr marL="0" marR="0" lvl="0" indent="0" algn="ctr" defTabSz="914400" rtl="0" eaLnBrk="1" fontAlgn="auto" latinLnBrk="1" hangingPunct="1">
+                        <a:lnSpc>
+                          <a:spcPct val="100000"/>
+                        </a:lnSpc>
+                        <a:spcBef>
+                          <a:spcPts val="0"/>
+                        </a:spcBef>
+                        <a:spcAft>
+                          <a:spcPts val="0"/>
+                        </a:spcAft>
+                        <a:buClrTx/>
+                        <a:buSzTx/>
+                        <a:buFontTx/>
+                        <a:buNone/>
+                        <a:tabLst/>
+                        <a:defRPr/>
+                      </a:pPr>
+                      <a:r>
+                        <a:rPr kumimoji="0" lang="en-US" altLang="ko-KR" sz="1200" b="0" i="0" u="none" strike="noStrike" kern="1200" cap="none" spc="0" normalizeH="0" baseline="0" noProof="0" dirty="0">
+                          <a:ln>
+                            <a:noFill/>
+                          </a:ln>
+                          <a:solidFill>
+                            <a:schemeClr val="tx1"/>
+                          </a:solidFill>
+                          <a:effectLst/>
+                          <a:uLnTx/>
+                          <a:uFillTx/>
+                          <a:latin typeface="Segoe UI"/>
+                          <a:ea typeface="+mn-ea"/>
+                          <a:cs typeface="+mn-cs"/>
+                        </a:rPr>
+                        <a:t>0.02</a:t>
+                      </a:r>
+                      <a:endParaRPr kumimoji="0" lang="ko-KR" altLang="en-US" sz="1200" b="0" i="0" u="none" strike="noStrike" kern="1200" cap="none" spc="0" normalizeH="0" baseline="0" noProof="0" dirty="0">
+                        <a:ln>
+                          <a:noFill/>
+                        </a:ln>
+                        <a:solidFill>
+                          <a:schemeClr val="tx1"/>
+                        </a:solidFill>
+                        <a:effectLst/>
+                        <a:uLnTx/>
+                        <a:uFillTx/>
+                        <a:latin typeface="Segoe UI"/>
+                        <a:ea typeface="+mn-ea"/>
+                        <a:cs typeface="+mn-cs"/>
+                      </a:endParaRPr>
+                    </a:p>
+                  </a:txBody>
+                  <a:tcPr marL="67388" marR="67388" marT="33693" marB="33693"/>
+                </a:tc>
+                <a:tc>
+                  <a:txBody>
+                    <a:bodyPr/>
+                    <a:lstStyle/>
+                    <a:p>
+                      <a:pPr marL="0" marR="0" lvl="0" indent="0" algn="ctr" defTabSz="914400" rtl="0" eaLnBrk="1" fontAlgn="auto" latinLnBrk="1" hangingPunct="1">
+                        <a:lnSpc>
+                          <a:spcPct val="100000"/>
+                        </a:lnSpc>
+                        <a:spcBef>
+                          <a:spcPts val="0"/>
+                        </a:spcBef>
+                        <a:spcAft>
+                          <a:spcPts val="0"/>
+                        </a:spcAft>
+                        <a:buClrTx/>
+                        <a:buSzTx/>
+                        <a:buFontTx/>
+                        <a:buNone/>
+                        <a:tabLst/>
+                        <a:defRPr/>
+                      </a:pPr>
+                      <a:endParaRPr kumimoji="0" lang="en-US" altLang="ko-KR" sz="1200" b="0" i="0" u="none" strike="noStrike" kern="1200" cap="none" spc="0" normalizeH="0" baseline="0" noProof="0" dirty="0">
+                        <a:ln>
+                          <a:noFill/>
+                        </a:ln>
+                        <a:solidFill>
+                          <a:schemeClr val="tx1"/>
+                        </a:solidFill>
+                        <a:effectLst/>
+                        <a:uLnTx/>
+                        <a:uFillTx/>
+                        <a:latin typeface="Segoe UI"/>
+                        <a:ea typeface="+mn-ea"/>
+                        <a:cs typeface="+mn-cs"/>
+                      </a:endParaRPr>
+                    </a:p>
+                    <a:p>
+                      <a:pPr marL="0" marR="0" lvl="0" indent="0" algn="ctr" defTabSz="914400" rtl="0" eaLnBrk="1" fontAlgn="auto" latinLnBrk="1" hangingPunct="1">
+                        <a:lnSpc>
+                          <a:spcPct val="100000"/>
+                        </a:lnSpc>
+                        <a:spcBef>
+                          <a:spcPts val="0"/>
+                        </a:spcBef>
+                        <a:spcAft>
+                          <a:spcPts val="0"/>
+                        </a:spcAft>
+                        <a:buClrTx/>
+                        <a:buSzTx/>
+                        <a:buFontTx/>
+                        <a:buNone/>
+                        <a:tabLst/>
+                        <a:defRPr/>
+                      </a:pPr>
+                      <a:endParaRPr kumimoji="0" lang="en-US" altLang="ko-KR" sz="1200" b="0" i="0" u="none" strike="noStrike" kern="1200" cap="none" spc="0" normalizeH="0" baseline="0" noProof="0" dirty="0">
+                        <a:ln>
+                          <a:noFill/>
+                        </a:ln>
+                        <a:solidFill>
+                          <a:schemeClr val="tx1"/>
+                        </a:solidFill>
+                        <a:effectLst/>
+                        <a:uLnTx/>
+                        <a:uFillTx/>
+                        <a:latin typeface="Segoe UI"/>
+                        <a:ea typeface="+mn-ea"/>
+                        <a:cs typeface="+mn-cs"/>
+                      </a:endParaRPr>
+                    </a:p>
+                    <a:p>
+                      <a:pPr marL="0" marR="0" lvl="0" indent="0" algn="ctr" defTabSz="914400" rtl="0" eaLnBrk="1" fontAlgn="auto" latinLnBrk="1" hangingPunct="1">
+                        <a:lnSpc>
+                          <a:spcPct val="100000"/>
+                        </a:lnSpc>
+                        <a:spcBef>
+                          <a:spcPts val="0"/>
+                        </a:spcBef>
+                        <a:spcAft>
+                          <a:spcPts val="0"/>
+                        </a:spcAft>
+                        <a:buClrTx/>
+                        <a:buSzTx/>
+                        <a:buFontTx/>
+                        <a:buNone/>
+                        <a:tabLst/>
+                        <a:defRPr/>
+                      </a:pPr>
+                      <a:endParaRPr kumimoji="0" lang="en-US" altLang="ko-KR" sz="1200" b="0" i="0" u="none" strike="noStrike" kern="1200" cap="none" spc="0" normalizeH="0" baseline="0" noProof="0" dirty="0">
+                        <a:ln>
+                          <a:noFill/>
+                        </a:ln>
+                        <a:solidFill>
+                          <a:schemeClr val="tx1"/>
+                        </a:solidFill>
+                        <a:effectLst/>
+                        <a:uLnTx/>
+                        <a:uFillTx/>
+                        <a:latin typeface="Segoe UI"/>
+                        <a:ea typeface="+mn-ea"/>
+                        <a:cs typeface="+mn-cs"/>
+                      </a:endParaRPr>
+                    </a:p>
+                    <a:p>
+                      <a:pPr marL="0" marR="0" lvl="0" indent="0" algn="ctr" defTabSz="914400" rtl="0" eaLnBrk="1" fontAlgn="auto" latinLnBrk="1" hangingPunct="1">
+                        <a:lnSpc>
+                          <a:spcPct val="100000"/>
+                        </a:lnSpc>
+                        <a:spcBef>
+                          <a:spcPts val="0"/>
+                        </a:spcBef>
+                        <a:spcAft>
+                          <a:spcPts val="0"/>
+                        </a:spcAft>
+                        <a:buClrTx/>
+                        <a:buSzTx/>
+                        <a:buFontTx/>
+                        <a:buNone/>
+                        <a:tabLst/>
+                        <a:defRPr/>
+                      </a:pPr>
+                      <a:r>
+                        <a:rPr kumimoji="0" lang="en-US" altLang="ko-KR" sz="1200" b="0" i="0" u="none" strike="noStrike" kern="1200" cap="none" spc="0" normalizeH="0" baseline="0" noProof="0" dirty="0">
+                          <a:ln>
+                            <a:noFill/>
+                          </a:ln>
+                          <a:solidFill>
+                            <a:schemeClr val="tx1"/>
+                          </a:solidFill>
+                          <a:effectLst/>
+                          <a:uLnTx/>
+                          <a:uFillTx/>
+                          <a:latin typeface="Segoe UI"/>
+                          <a:ea typeface="+mn-ea"/>
+                          <a:cs typeface="+mn-cs"/>
+                        </a:rPr>
+                        <a:t>0.03</a:t>
+                      </a:r>
+                      <a:endParaRPr kumimoji="0" lang="ko-KR" altLang="en-US" sz="1200" b="0" i="0" u="none" strike="noStrike" kern="1200" cap="none" spc="0" normalizeH="0" baseline="0" noProof="0" dirty="0">
+                        <a:ln>
+                          <a:noFill/>
+                        </a:ln>
+                        <a:solidFill>
+                          <a:schemeClr val="tx1"/>
+                        </a:solidFill>
+                        <a:effectLst/>
+                        <a:uLnTx/>
+                        <a:uFillTx/>
+                        <a:latin typeface="Segoe UI"/>
+                        <a:ea typeface="+mn-ea"/>
+                        <a:cs typeface="+mn-cs"/>
+                      </a:endParaRPr>
+                    </a:p>
+                  </a:txBody>
+                  <a:tcPr marL="67388" marR="67388" marT="33693" marB="33693"/>
+                </a:tc>
+                <a:tc>
+                  <a:txBody>
+                    <a:bodyPr/>
+                    <a:lstStyle/>
+                    <a:p>
+                      <a:pPr marL="0" marR="0" lvl="0" indent="0" algn="ctr" defTabSz="914400" rtl="0" eaLnBrk="1" fontAlgn="auto" latinLnBrk="1" hangingPunct="1">
+                        <a:lnSpc>
+                          <a:spcPct val="100000"/>
+                        </a:lnSpc>
+                        <a:spcBef>
+                          <a:spcPts val="0"/>
+                        </a:spcBef>
+                        <a:spcAft>
+                          <a:spcPts val="0"/>
+                        </a:spcAft>
+                        <a:buClrTx/>
+                        <a:buSzTx/>
+                        <a:buFontTx/>
+                        <a:buNone/>
+                        <a:tabLst/>
+                        <a:defRPr/>
+                      </a:pPr>
+                      <a:endParaRPr kumimoji="0" lang="en-US" altLang="ko-KR" sz="1200" b="0" i="0" u="none" strike="noStrike" kern="1200" cap="none" spc="0" normalizeH="0" baseline="0" noProof="0" dirty="0">
+                        <a:ln>
+                          <a:noFill/>
+                        </a:ln>
+                        <a:solidFill>
+                          <a:schemeClr val="tx1"/>
+                        </a:solidFill>
+                        <a:effectLst/>
+                        <a:uLnTx/>
+                        <a:uFillTx/>
+                        <a:latin typeface="Segoe UI"/>
+                        <a:ea typeface="+mn-ea"/>
+                        <a:cs typeface="+mn-cs"/>
+                      </a:endParaRPr>
+                    </a:p>
+                    <a:p>
+                      <a:pPr marL="0" marR="0" lvl="0" indent="0" algn="ctr" defTabSz="914400" rtl="0" eaLnBrk="1" fontAlgn="auto" latinLnBrk="1" hangingPunct="1">
+                        <a:lnSpc>
+                          <a:spcPct val="100000"/>
+                        </a:lnSpc>
+                        <a:spcBef>
+                          <a:spcPts val="0"/>
+                        </a:spcBef>
+                        <a:spcAft>
+                          <a:spcPts val="0"/>
+                        </a:spcAft>
+                        <a:buClrTx/>
+                        <a:buSzTx/>
+                        <a:buFontTx/>
+                        <a:buNone/>
+                        <a:tabLst/>
+                        <a:defRPr/>
+                      </a:pPr>
+                      <a:endParaRPr kumimoji="0" lang="en-US" altLang="ko-KR" sz="1200" b="0" i="0" u="none" strike="noStrike" kern="1200" cap="none" spc="0" normalizeH="0" baseline="0" noProof="0" dirty="0">
+                        <a:ln>
+                          <a:noFill/>
+                        </a:ln>
+                        <a:solidFill>
+                          <a:schemeClr val="tx1"/>
+                        </a:solidFill>
+                        <a:effectLst/>
+                        <a:uLnTx/>
+                        <a:uFillTx/>
+                        <a:latin typeface="Segoe UI"/>
+                        <a:ea typeface="+mn-ea"/>
+                        <a:cs typeface="+mn-cs"/>
+                      </a:endParaRPr>
+                    </a:p>
+                    <a:p>
+                      <a:pPr marL="0" marR="0" lvl="0" indent="0" algn="ctr" defTabSz="914400" rtl="0" eaLnBrk="1" fontAlgn="auto" latinLnBrk="1" hangingPunct="1">
+                        <a:lnSpc>
+                          <a:spcPct val="100000"/>
+                        </a:lnSpc>
+                        <a:spcBef>
+                          <a:spcPts val="0"/>
+                        </a:spcBef>
+                        <a:spcAft>
+                          <a:spcPts val="0"/>
+                        </a:spcAft>
+                        <a:buClrTx/>
+                        <a:buSzTx/>
+                        <a:buFontTx/>
+                        <a:buNone/>
+                        <a:tabLst/>
+                        <a:defRPr/>
+                      </a:pPr>
+                      <a:endParaRPr kumimoji="0" lang="en-US" altLang="ko-KR" sz="1200" b="0" i="0" u="none" strike="noStrike" kern="1200" cap="none" spc="0" normalizeH="0" baseline="0" noProof="0" dirty="0">
+                        <a:ln>
+                          <a:noFill/>
+                        </a:ln>
+                        <a:solidFill>
+                          <a:schemeClr val="tx1"/>
+                        </a:solidFill>
+                        <a:effectLst/>
+                        <a:uLnTx/>
+                        <a:uFillTx/>
+                        <a:latin typeface="Segoe UI"/>
+                        <a:ea typeface="+mn-ea"/>
+                        <a:cs typeface="+mn-cs"/>
+                      </a:endParaRPr>
+                    </a:p>
+                    <a:p>
+                      <a:pPr marL="0" marR="0" lvl="0" indent="0" algn="ctr" defTabSz="914400" rtl="0" eaLnBrk="1" fontAlgn="auto" latinLnBrk="1" hangingPunct="1">
+                        <a:lnSpc>
+                          <a:spcPct val="100000"/>
+                        </a:lnSpc>
+                        <a:spcBef>
+                          <a:spcPts val="0"/>
+                        </a:spcBef>
+                        <a:spcAft>
+                          <a:spcPts val="0"/>
+                        </a:spcAft>
+                        <a:buClrTx/>
+                        <a:buSzTx/>
+                        <a:buFontTx/>
+                        <a:buNone/>
+                        <a:tabLst/>
+                        <a:defRPr/>
+                      </a:pPr>
+                      <a:r>
+                        <a:rPr kumimoji="0" lang="en-US" altLang="ko-KR" sz="1200" b="0" i="0" u="none" strike="noStrike" kern="1200" cap="none" spc="0" normalizeH="0" baseline="0" noProof="0" dirty="0">
                           <a:ln>
                             <a:noFill/>
                           </a:ln>
@@ -8246,7 +10520,7 @@
                         </a:rPr>
                         <a:t>0.01</a:t>
                       </a:r>
-                      <a:endParaRPr kumimoji="0" lang="ko-KR" altLang="en-US" sz="2000" b="0" i="0" u="none" strike="noStrike" kern="1200" cap="none" spc="0" normalizeH="0" baseline="0" noProof="0" dirty="0">
+                      <a:endParaRPr kumimoji="0" lang="ko-KR" altLang="en-US" sz="1200" b="0" i="0" u="none" strike="noStrike" kern="1200" cap="none" spc="0" normalizeH="0" baseline="0" noProof="0" dirty="0">
                         <a:ln>
                           <a:noFill/>
                         </a:ln>
@@ -8262,363 +10536,7 @@
                       </a:endParaRPr>
                     </a:p>
                   </a:txBody>
-                  <a:tcPr marL="86797" marR="86797" marT="43397" marB="43397"/>
-                </a:tc>
-                <a:extLst>
-                  <a:ext uri="{0D108BD9-81ED-4DB2-BD59-A6C34878D82A}">
-                    <a16:rowId xmlns:a16="http://schemas.microsoft.com/office/drawing/2014/main" val="844891742"/>
-                  </a:ext>
-                </a:extLst>
-              </a:tr>
-              <a:tr h="1068221">
-                <a:tc>
-                  <a:txBody>
-                    <a:bodyPr/>
-                    <a:lstStyle/>
-                    <a:p>
-                      <a:pPr marL="0" marR="0" lvl="0" indent="0" algn="ctr" defTabSz="914400" rtl="0" eaLnBrk="1" fontAlgn="auto" latinLnBrk="1" hangingPunct="1">
-                        <a:lnSpc>
-                          <a:spcPct val="100000"/>
-                        </a:lnSpc>
-                        <a:spcBef>
-                          <a:spcPts val="0"/>
-                        </a:spcBef>
-                        <a:spcAft>
-                          <a:spcPts val="0"/>
-                        </a:spcAft>
-                        <a:buClrTx/>
-                        <a:buSzTx/>
-                        <a:buFontTx/>
-                        <a:buNone/>
-                        <a:tabLst/>
-                        <a:defRPr/>
-                      </a:pPr>
-                      <a:r>
-                        <a:rPr kumimoji="0" lang="en-US" altLang="ko-KR" sz="2000" b="0" i="0" u="none" strike="noStrike" kern="1200" cap="none" spc="0" normalizeH="0" baseline="0" noProof="0" dirty="0">
-                          <a:ln>
-                            <a:noFill/>
-                          </a:ln>
-                          <a:solidFill>
-                            <a:schemeClr val="tx1"/>
-                          </a:solidFill>
-                          <a:effectLst/>
-                          <a:uLnTx/>
-                          <a:uFillTx/>
-                          <a:latin typeface="Segoe UI"/>
-                          <a:ea typeface="+mn-ea"/>
-                          <a:cs typeface="+mn-cs"/>
-                        </a:rPr>
-                        <a:t>0.88</a:t>
-                      </a:r>
-                      <a:endParaRPr kumimoji="0" lang="ko-KR" altLang="en-US" sz="2000" b="0" i="0" u="none" strike="noStrike" kern="1200" cap="none" spc="0" normalizeH="0" baseline="0" noProof="0" dirty="0">
-                        <a:ln>
-                          <a:noFill/>
-                        </a:ln>
-                        <a:solidFill>
-                          <a:schemeClr val="tx1"/>
-                        </a:solidFill>
-                        <a:effectLst/>
-                        <a:uLnTx/>
-                        <a:uFillTx/>
-                        <a:latin typeface="Segoe UI"/>
-                        <a:ea typeface="+mn-ea"/>
-                        <a:cs typeface="+mn-cs"/>
-                      </a:endParaRPr>
-                    </a:p>
-                  </a:txBody>
-                  <a:tcPr marL="86797" marR="86797" marT="43397" marB="43397"/>
-                </a:tc>
-                <a:tc>
-                  <a:txBody>
-                    <a:bodyPr/>
-                    <a:lstStyle/>
-                    <a:p>
-                      <a:pPr marL="0" marR="0" lvl="0" indent="0" algn="ctr" defTabSz="914400" rtl="0" eaLnBrk="1" fontAlgn="auto" latinLnBrk="1" hangingPunct="1">
-                        <a:lnSpc>
-                          <a:spcPct val="100000"/>
-                        </a:lnSpc>
-                        <a:spcBef>
-                          <a:spcPts val="0"/>
-                        </a:spcBef>
-                        <a:spcAft>
-                          <a:spcPts val="0"/>
-                        </a:spcAft>
-                        <a:buClrTx/>
-                        <a:buSzTx/>
-                        <a:buFontTx/>
-                        <a:buNone/>
-                        <a:tabLst/>
-                        <a:defRPr/>
-                      </a:pPr>
-                      <a:r>
-                        <a:rPr kumimoji="0" lang="en-US" altLang="ko-KR" sz="2000" b="0" i="0" u="none" strike="noStrike" kern="1200" cap="none" spc="0" normalizeH="0" baseline="0" noProof="0" dirty="0">
-                          <a:ln>
-                            <a:noFill/>
-                          </a:ln>
-                          <a:solidFill>
-                            <a:schemeClr val="tx1"/>
-                          </a:solidFill>
-                          <a:effectLst/>
-                          <a:uLnTx/>
-                          <a:uFillTx/>
-                          <a:latin typeface="Segoe UI"/>
-                          <a:ea typeface="+mn-ea"/>
-                          <a:cs typeface="+mn-cs"/>
-                        </a:rPr>
-                        <a:t>0.95</a:t>
-                      </a:r>
-                      <a:endParaRPr kumimoji="0" lang="ko-KR" altLang="en-US" sz="2000" b="0" i="0" u="none" strike="noStrike" kern="1200" cap="none" spc="0" normalizeH="0" baseline="0" noProof="0" dirty="0">
-                        <a:ln>
-                          <a:noFill/>
-                        </a:ln>
-                        <a:solidFill>
-                          <a:schemeClr val="tx1"/>
-                        </a:solidFill>
-                        <a:effectLst/>
-                        <a:uLnTx/>
-                        <a:uFillTx/>
-                        <a:latin typeface="Segoe UI"/>
-                        <a:ea typeface="+mn-ea"/>
-                        <a:cs typeface="+mn-cs"/>
-                      </a:endParaRPr>
-                    </a:p>
-                  </a:txBody>
-                  <a:tcPr marL="86797" marR="86797" marT="43397" marB="43397"/>
-                </a:tc>
-                <a:tc>
-                  <a:txBody>
-                    <a:bodyPr/>
-                    <a:lstStyle/>
-                    <a:p>
-                      <a:pPr marL="0" marR="0" lvl="0" indent="0" algn="ctr" defTabSz="914400" rtl="0" eaLnBrk="1" fontAlgn="auto" latinLnBrk="1" hangingPunct="1">
-                        <a:lnSpc>
-                          <a:spcPct val="100000"/>
-                        </a:lnSpc>
-                        <a:spcBef>
-                          <a:spcPts val="0"/>
-                        </a:spcBef>
-                        <a:spcAft>
-                          <a:spcPts val="0"/>
-                        </a:spcAft>
-                        <a:buClrTx/>
-                        <a:buSzTx/>
-                        <a:buFontTx/>
-                        <a:buNone/>
-                        <a:tabLst/>
-                        <a:defRPr/>
-                      </a:pPr>
-                      <a:r>
-                        <a:rPr kumimoji="0" lang="en-US" altLang="ko-KR" sz="2000" b="0" i="0" u="none" strike="noStrike" kern="1200" cap="none" spc="0" normalizeH="0" baseline="0" noProof="0" dirty="0">
-                          <a:ln>
-                            <a:noFill/>
-                          </a:ln>
-                          <a:solidFill>
-                            <a:schemeClr val="tx1"/>
-                          </a:solidFill>
-                          <a:effectLst/>
-                          <a:uLnTx/>
-                          <a:uFillTx/>
-                          <a:latin typeface="Segoe UI"/>
-                          <a:ea typeface="+mn-ea"/>
-                          <a:cs typeface="+mn-cs"/>
-                        </a:rPr>
-                        <a:t>0.05</a:t>
-                      </a:r>
-                      <a:endParaRPr kumimoji="0" lang="ko-KR" altLang="en-US" sz="2000" b="0" i="0" u="none" strike="noStrike" kern="1200" cap="none" spc="0" normalizeH="0" baseline="0" noProof="0" dirty="0">
-                        <a:ln>
-                          <a:noFill/>
-                        </a:ln>
-                        <a:solidFill>
-                          <a:schemeClr val="tx1"/>
-                        </a:solidFill>
-                        <a:effectLst/>
-                        <a:uLnTx/>
-                        <a:uFillTx/>
-                        <a:latin typeface="Segoe UI"/>
-                        <a:ea typeface="+mn-ea"/>
-                        <a:cs typeface="+mn-cs"/>
-                      </a:endParaRPr>
-                    </a:p>
-                  </a:txBody>
-                  <a:tcPr marL="86797" marR="86797" marT="43397" marB="43397"/>
-                </a:tc>
-                <a:extLst>
-                  <a:ext uri="{0D108BD9-81ED-4DB2-BD59-A6C34878D82A}">
-                    <a16:rowId xmlns:a16="http://schemas.microsoft.com/office/drawing/2014/main" val="4097710734"/>
-                  </a:ext>
-                </a:extLst>
-              </a:tr>
-              <a:tr h="1068221">
-                <a:tc>
-                  <a:txBody>
-                    <a:bodyPr/>
-                    <a:lstStyle/>
-                    <a:p>
-                      <a:pPr marL="0" marR="0" lvl="0" indent="0" algn="ctr" defTabSz="914400" rtl="0" eaLnBrk="1" fontAlgn="auto" latinLnBrk="1" hangingPunct="1">
-                        <a:lnSpc>
-                          <a:spcPct val="100000"/>
-                        </a:lnSpc>
-                        <a:spcBef>
-                          <a:spcPts val="0"/>
-                        </a:spcBef>
-                        <a:spcAft>
-                          <a:spcPts val="0"/>
-                        </a:spcAft>
-                        <a:buClrTx/>
-                        <a:buSzTx/>
-                        <a:buFontTx/>
-                        <a:buNone/>
-                        <a:tabLst/>
-                        <a:defRPr/>
-                      </a:pPr>
-                      <a:r>
-                        <a:rPr kumimoji="0" lang="en-US" altLang="ko-KR" sz="2000" b="0" i="0" u="none" strike="noStrike" kern="1200" cap="none" spc="0" normalizeH="0" baseline="0" noProof="0" dirty="0">
-                          <a:ln>
-                            <a:noFill/>
-                          </a:ln>
-                          <a:solidFill>
-                            <a:schemeClr val="tx1"/>
-                          </a:solidFill>
-                          <a:effectLst/>
-                          <a:uLnTx/>
-                          <a:uFillTx/>
-                          <a:latin typeface="Segoe UI"/>
-                          <a:ea typeface="+mn-ea"/>
-                          <a:cs typeface="+mn-cs"/>
-                        </a:rPr>
-                        <a:t>0.02</a:t>
-                      </a:r>
-                      <a:endParaRPr kumimoji="0" lang="ko-KR" altLang="en-US" sz="2000" b="0" i="0" u="none" strike="noStrike" kern="1200" cap="none" spc="0" normalizeH="0" baseline="0" noProof="0" dirty="0">
-                        <a:ln>
-                          <a:noFill/>
-                        </a:ln>
-                        <a:solidFill>
-                          <a:schemeClr val="tx1"/>
-                        </a:solidFill>
-                        <a:effectLst/>
-                        <a:uLnTx/>
-                        <a:uFillTx/>
-                        <a:latin typeface="Segoe UI"/>
-                        <a:ea typeface="+mn-ea"/>
-                        <a:cs typeface="+mn-cs"/>
-                      </a:endParaRPr>
-                    </a:p>
-                  </a:txBody>
-                  <a:tcPr marL="86797" marR="86797" marT="43397" marB="43397"/>
-                </a:tc>
-                <a:tc>
-                  <a:txBody>
-                    <a:bodyPr/>
-                    <a:lstStyle/>
-                    <a:p>
-                      <a:pPr marL="0" marR="0" lvl="0" indent="0" algn="ctr" defTabSz="914400" rtl="0" eaLnBrk="1" fontAlgn="auto" latinLnBrk="1" hangingPunct="1">
-                        <a:lnSpc>
-                          <a:spcPct val="100000"/>
-                        </a:lnSpc>
-                        <a:spcBef>
-                          <a:spcPts val="0"/>
-                        </a:spcBef>
-                        <a:spcAft>
-                          <a:spcPts val="0"/>
-                        </a:spcAft>
-                        <a:buClrTx/>
-                        <a:buSzTx/>
-                        <a:buFontTx/>
-                        <a:buNone/>
-                        <a:tabLst/>
-                        <a:defRPr/>
-                      </a:pPr>
-                      <a:r>
-                        <a:rPr kumimoji="0" lang="en-US" altLang="ko-KR" sz="2000" b="0" i="0" u="none" strike="noStrike" kern="1200" cap="none" spc="0" normalizeH="0" baseline="0" noProof="0" dirty="0">
-                          <a:ln>
-                            <a:noFill/>
-                          </a:ln>
-                          <a:solidFill>
-                            <a:schemeClr val="tx1"/>
-                          </a:solidFill>
-                          <a:effectLst/>
-                          <a:uLnTx/>
-                          <a:uFillTx/>
-                          <a:latin typeface="Segoe UI"/>
-                          <a:ea typeface="+mn-ea"/>
-                          <a:cs typeface="+mn-cs"/>
-                        </a:rPr>
-                        <a:t>0.03</a:t>
-                      </a:r>
-                      <a:endParaRPr kumimoji="0" lang="ko-KR" altLang="en-US" sz="2000" b="0" i="0" u="none" strike="noStrike" kern="1200" cap="none" spc="0" normalizeH="0" baseline="0" noProof="0" dirty="0">
-                        <a:ln>
-                          <a:noFill/>
-                        </a:ln>
-                        <a:solidFill>
-                          <a:schemeClr val="tx1"/>
-                        </a:solidFill>
-                        <a:effectLst/>
-                        <a:uLnTx/>
-                        <a:uFillTx/>
-                        <a:latin typeface="Segoe UI"/>
-                        <a:ea typeface="+mn-ea"/>
-                        <a:cs typeface="+mn-cs"/>
-                      </a:endParaRPr>
-                    </a:p>
-                  </a:txBody>
-                  <a:tcPr marL="86797" marR="86797" marT="43397" marB="43397"/>
-                </a:tc>
-                <a:tc>
-                  <a:txBody>
-                    <a:bodyPr/>
-                    <a:lstStyle/>
-                    <a:p>
-                      <a:pPr marL="0" marR="0" lvl="0" indent="0" algn="ctr" defTabSz="914400" rtl="0" eaLnBrk="1" fontAlgn="auto" latinLnBrk="1" hangingPunct="1">
-                        <a:lnSpc>
-                          <a:spcPct val="100000"/>
-                        </a:lnSpc>
-                        <a:spcBef>
-                          <a:spcPts val="0"/>
-                        </a:spcBef>
-                        <a:spcAft>
-                          <a:spcPts val="0"/>
-                        </a:spcAft>
-                        <a:buClrTx/>
-                        <a:buSzTx/>
-                        <a:buFontTx/>
-                        <a:buNone/>
-                        <a:tabLst/>
-                        <a:defRPr/>
-                      </a:pPr>
-                      <a:r>
-                        <a:rPr kumimoji="0" lang="en-US" altLang="ko-KR" sz="2000" b="0" i="0" u="none" strike="noStrike" kern="1200" cap="none" spc="0" normalizeH="0" baseline="0" noProof="0" dirty="0">
-                          <a:ln>
-                            <a:noFill/>
-                          </a:ln>
-                          <a:solidFill>
-                            <a:schemeClr val="tx1"/>
-                          </a:solidFill>
-                          <a:effectLst/>
-                          <a:uLnTx/>
-                          <a:uFillTx/>
-                          <a:latin typeface="Segoe UI"/>
-                          <a:ea typeface="+mn-ea"/>
-                          <a:cs typeface="+mn-cs"/>
-                        </a:rPr>
-                        <a:t>0.01</a:t>
-                      </a:r>
-                      <a:endParaRPr kumimoji="0" lang="ko-KR" altLang="en-US" sz="2000" b="0" i="0" u="none" strike="noStrike" kern="1200" cap="none" spc="0" normalizeH="0" baseline="0" noProof="0" dirty="0">
-                        <a:ln>
-                          <a:noFill/>
-                        </a:ln>
-                        <a:solidFill>
-                          <a:schemeClr val="tx1"/>
-                        </a:solidFill>
-                        <a:effectLst/>
-                        <a:uLnTx/>
-                        <a:uFillTx/>
-                        <a:latin typeface="Segoe UI"/>
-                        <a:ea typeface="+mn-ea"/>
-                        <a:cs typeface="+mn-cs"/>
-                      </a:endParaRPr>
-                    </a:p>
-                  </a:txBody>
-                  <a:tcPr marL="86797" marR="86797" marT="43397" marB="43397"/>
+                  <a:tcPr marL="67388" marR="67388" marT="33693" marB="33693"/>
                 </a:tc>
                 <a:extLst>
                   <a:ext uri="{0D108BD9-81ED-4DB2-BD59-A6C34878D82A}">
@@ -8630,10 +10548,209 @@
           </a:graphicData>
         </a:graphic>
       </p:graphicFrame>
+      <p:pic>
+        <p:nvPicPr>
+          <p:cNvPr id="19" name="그래픽 18" descr="트럭">
+            <a:extLst>
+              <a:ext uri="{FF2B5EF4-FFF2-40B4-BE49-F238E27FC236}">
+                <a16:creationId xmlns:a16="http://schemas.microsoft.com/office/drawing/2014/main" id="{853C999D-303D-FCA5-93A8-2A6A2289B371}"/>
+              </a:ext>
+            </a:extLst>
+          </p:cNvPr>
+          <p:cNvPicPr>
+            <a:picLocks noChangeAspect="1"/>
+          </p:cNvPicPr>
+          <p:nvPr/>
+        </p:nvPicPr>
+        <p:blipFill>
+          <a:blip r:embed="rId2">
+            <a:extLst>
+              <a:ext uri="{96DAC541-7B7A-43D3-8B79-37D633B846F1}">
+                <asvg:svgBlip xmlns:asvg="http://schemas.microsoft.com/office/drawing/2016/SVG/main" r:embed="rId3"/>
+              </a:ext>
+            </a:extLst>
+          </a:blip>
+          <a:stretch>
+            <a:fillRect/>
+          </a:stretch>
+        </p:blipFill>
+        <p:spPr>
+          <a:xfrm>
+            <a:off x="6859473" y="3839388"/>
+            <a:ext cx="1234769" cy="1234769"/>
+          </a:xfrm>
+          <a:prstGeom prst="rect">
+            <a:avLst/>
+          </a:prstGeom>
+        </p:spPr>
+      </p:pic>
+      <p:sp>
+        <p:nvSpPr>
+          <p:cNvPr id="20" name="곱하기 기호 19">
+            <a:extLst>
+              <a:ext uri="{FF2B5EF4-FFF2-40B4-BE49-F238E27FC236}">
+                <a16:creationId xmlns:a16="http://schemas.microsoft.com/office/drawing/2014/main" id="{FAF47D6F-2F45-F6E7-F7A6-8E9D078D4226}"/>
+              </a:ext>
+            </a:extLst>
+          </p:cNvPr>
+          <p:cNvSpPr/>
+          <p:nvPr/>
+        </p:nvSpPr>
+        <p:spPr>
+          <a:xfrm>
+            <a:off x="7250251" y="4505862"/>
+            <a:ext cx="185112" cy="184876"/>
+          </a:xfrm>
+          <a:prstGeom prst="mathMultiply">
+            <a:avLst/>
+          </a:prstGeom>
+          <a:solidFill>
+            <a:srgbClr val="FF0000"/>
+          </a:solidFill>
+        </p:spPr>
+        <p:style>
+          <a:lnRef idx="2">
+            <a:schemeClr val="accent1">
+              <a:shade val="15000"/>
+            </a:schemeClr>
+          </a:lnRef>
+          <a:fillRef idx="1">
+            <a:schemeClr val="accent1"/>
+          </a:fillRef>
+          <a:effectRef idx="0">
+            <a:schemeClr val="accent1"/>
+          </a:effectRef>
+          <a:fontRef idx="minor">
+            <a:schemeClr val="lt1"/>
+          </a:fontRef>
+        </p:style>
+        <p:txBody>
+          <a:bodyPr rtlCol="0" anchor="ctr"/>
+          <a:lstStyle/>
+          <a:p>
+            <a:pPr algn="ctr"/>
+            <a:endParaRPr lang="ko-KR" altLang="en-US"/>
+          </a:p>
+        </p:txBody>
+      </p:sp>
+      <p:sp>
+        <p:nvSpPr>
+          <p:cNvPr id="21" name="TextBox 20">
+            <a:extLst>
+              <a:ext uri="{FF2B5EF4-FFF2-40B4-BE49-F238E27FC236}">
+                <a16:creationId xmlns:a16="http://schemas.microsoft.com/office/drawing/2014/main" id="{6FCFE11D-65D8-184D-264F-F9BF72C2754B}"/>
+              </a:ext>
+            </a:extLst>
+          </p:cNvPr>
+          <p:cNvSpPr txBox="1"/>
+          <p:nvPr/>
+        </p:nvSpPr>
+        <p:spPr>
+          <a:xfrm>
+            <a:off x="5595936" y="2736837"/>
+            <a:ext cx="3452814" cy="584775"/>
+          </a:xfrm>
+          <a:prstGeom prst="rect">
+            <a:avLst/>
+          </a:prstGeom>
+          <a:noFill/>
+        </p:spPr>
+        <p:txBody>
+          <a:bodyPr wrap="square">
+            <a:spAutoFit/>
+          </a:bodyPr>
+          <a:lstStyle/>
+          <a:p>
+            <a:pPr algn="ctr"/>
+            <a:r>
+              <a:rPr lang="en-US" altLang="ko-KR" sz="1600" dirty="0">
+                <a:latin typeface="D2Coding" panose="020B0609020101020101" pitchFamily="49" charset="-127"/>
+                <a:ea typeface="D2Coding" panose="020B0609020101020101" pitchFamily="49" charset="-127"/>
+              </a:rPr>
+              <a:t>Tensor[2,2,:] = 0.5,0.5,0.6,0.4 = x, y, w, h</a:t>
+            </a:r>
+            <a:endParaRPr lang="ko-KR" altLang="en-US" sz="1600" dirty="0"/>
+          </a:p>
+        </p:txBody>
+      </p:sp>
+      <p:sp>
+        <p:nvSpPr>
+          <p:cNvPr id="23" name="TextBox 22">
+            <a:extLst>
+              <a:ext uri="{FF2B5EF4-FFF2-40B4-BE49-F238E27FC236}">
+                <a16:creationId xmlns:a16="http://schemas.microsoft.com/office/drawing/2014/main" id="{D8325E59-1279-0762-4595-DB5CED3F8FA8}"/>
+              </a:ext>
+            </a:extLst>
+          </p:cNvPr>
+          <p:cNvSpPr txBox="1"/>
+          <p:nvPr/>
+        </p:nvSpPr>
+        <p:spPr>
+          <a:xfrm>
+            <a:off x="9030572" y="3410979"/>
+            <a:ext cx="2630379" cy="738664"/>
+          </a:xfrm>
+          <a:prstGeom prst="rect">
+            <a:avLst/>
+          </a:prstGeom>
+          <a:noFill/>
+        </p:spPr>
+        <p:txBody>
+          <a:bodyPr wrap="square">
+            <a:spAutoFit/>
+          </a:bodyPr>
+          <a:lstStyle/>
+          <a:p>
+            <a:r>
+              <a:rPr lang="en-US" altLang="ko-KR" sz="1400" dirty="0">
+                <a:latin typeface="D2Coding" panose="020B0609020101020101" pitchFamily="49" charset="-127"/>
+                <a:ea typeface="D2Coding" panose="020B0609020101020101" pitchFamily="49" charset="-127"/>
+              </a:rPr>
+              <a:t>(2,2) </a:t>
+            </a:r>
+            <a:r>
+              <a:rPr lang="ko-KR" altLang="en-US" sz="1400" dirty="0">
+                <a:latin typeface="D2Coding" panose="020B0609020101020101" pitchFamily="49" charset="-127"/>
+                <a:ea typeface="D2Coding" panose="020B0609020101020101" pitchFamily="49" charset="-127"/>
+              </a:rPr>
+              <a:t>셀의 왼쪽 상단을 </a:t>
+            </a:r>
+            <a:r>
+              <a:rPr lang="en-US" altLang="ko-KR" sz="1400" dirty="0">
+                <a:latin typeface="D2Coding" panose="020B0609020101020101" pitchFamily="49" charset="-127"/>
+                <a:ea typeface="D2Coding" panose="020B0609020101020101" pitchFamily="49" charset="-127"/>
+              </a:rPr>
+              <a:t>(0,0)</a:t>
+            </a:r>
+            <a:r>
+              <a:rPr lang="ko-KR" altLang="en-US" sz="1400" dirty="0">
+                <a:latin typeface="D2Coding" panose="020B0609020101020101" pitchFamily="49" charset="-127"/>
+                <a:ea typeface="D2Coding" panose="020B0609020101020101" pitchFamily="49" charset="-127"/>
+              </a:rPr>
+              <a:t>으로 가정하여 </a:t>
+            </a:r>
+            <a:r>
+              <a:rPr lang="en-US" altLang="ko-KR" sz="1400" dirty="0">
+                <a:latin typeface="D2Coding" panose="020B0609020101020101" pitchFamily="49" charset="-127"/>
+                <a:ea typeface="D2Coding" panose="020B0609020101020101" pitchFamily="49" charset="-127"/>
+              </a:rPr>
+              <a:t>x, y, w, h</a:t>
+            </a:r>
+            <a:r>
+              <a:rPr lang="ko-KR" altLang="en-US" sz="1400" dirty="0">
+                <a:latin typeface="D2Coding" panose="020B0609020101020101" pitchFamily="49" charset="-127"/>
+                <a:ea typeface="D2Coding" panose="020B0609020101020101" pitchFamily="49" charset="-127"/>
+              </a:rPr>
+              <a:t>를 구하라</a:t>
+            </a:r>
+            <a:endParaRPr lang="ko-KR" altLang="en-US" sz="1400" dirty="0"/>
+          </a:p>
+        </p:txBody>
+      </p:sp>
     </p:spTree>
     <p:extLst>
       <p:ext uri="{BB962C8B-B14F-4D97-AF65-F5344CB8AC3E}">
-        <p14:creationId xmlns:p14="http://schemas.microsoft.com/office/powerpoint/2010/main" val="2776669898"/>
+        <p14:creationId xmlns:p14="http://schemas.microsoft.com/office/powerpoint/2010/main" val="523673028"/>
       </p:ext>
     </p:extLst>
   </p:cSld>
@@ -8746,7 +10863,34 @@
                                           </p:stCondLst>
                                         </p:cTn>
                                         <p:tgtEl>
-                                          <p:spTgt spid="12"/>
+                                          <p:spTgt spid="18"/>
+                                        </p:tgtEl>
+                                        <p:attrNameLst>
+                                          <p:attrName>style.visibility</p:attrName>
+                                        </p:attrNameLst>
+                                      </p:cBhvr>
+                                      <p:to>
+                                        <p:strVal val="visible"/>
+                                      </p:to>
+                                    </p:set>
+                                  </p:childTnLst>
+                                </p:cTn>
+                              </p:par>
+                              <p:par>
+                                <p:cTn id="13" presetID="1" presetClass="entr" presetSubtype="0" fill="hold" grpId="0" nodeType="withEffect">
+                                  <p:stCondLst>
+                                    <p:cond delay="0"/>
+                                  </p:stCondLst>
+                                  <p:childTnLst>
+                                    <p:set>
+                                      <p:cBhvr>
+                                        <p:cTn id="14" dur="1" fill="hold">
+                                          <p:stCondLst>
+                                            <p:cond delay="0"/>
+                                          </p:stCondLst>
+                                        </p:cTn>
+                                        <p:tgtEl>
+                                          <p:spTgt spid="21"/>
                                         </p:tgtEl>
                                         <p:attrNameLst>
                                           <p:attrName>style.visibility</p:attrName>
@@ -8788,12 +10932,2766 @@
     </p:tnLst>
     <p:bldLst>
       <p:bldP spid="13" grpId="0"/>
+      <p:bldP spid="21" grpId="0"/>
     </p:bldLst>
   </p:timing>
 </p:sld>
 </file>
 
 <file path=ppt/slides/slide16.xml><?xml version="1.0" encoding="utf-8"?>
+<p:sld xmlns:a="http://schemas.openxmlformats.org/drawingml/2006/main" xmlns:r="http://schemas.openxmlformats.org/officeDocument/2006/relationships" xmlns:p="http://schemas.openxmlformats.org/presentationml/2006/main">
+  <p:cSld>
+    <p:spTree>
+      <p:nvGrpSpPr>
+        <p:cNvPr id="1" name="">
+          <a:extLst>
+            <a:ext uri="{FF2B5EF4-FFF2-40B4-BE49-F238E27FC236}">
+              <a16:creationId xmlns:a16="http://schemas.microsoft.com/office/drawing/2014/main" id="{371C4AA4-FB3F-4028-BAB6-1068F53E0751}"/>
+            </a:ext>
+          </a:extLst>
+        </p:cNvPr>
+        <p:cNvGrpSpPr/>
+        <p:nvPr/>
+      </p:nvGrpSpPr>
+      <p:grpSpPr>
+        <a:xfrm>
+          <a:off x="0" y="0"/>
+          <a:ext cx="0" cy="0"/>
+          <a:chOff x="0" y="0"/>
+          <a:chExt cx="0" cy="0"/>
+        </a:xfrm>
+      </p:grpSpPr>
+      <p:sp>
+        <p:nvSpPr>
+          <p:cNvPr id="4" name="슬라이드 번호 개체 틀 3">
+            <a:extLst>
+              <a:ext uri="{FF2B5EF4-FFF2-40B4-BE49-F238E27FC236}">
+                <a16:creationId xmlns:a16="http://schemas.microsoft.com/office/drawing/2014/main" id="{4DDE57EB-9327-70C4-90A9-D5A05DD2ED75}"/>
+              </a:ext>
+            </a:extLst>
+          </p:cNvPr>
+          <p:cNvSpPr>
+            <a:spLocks noGrp="1"/>
+          </p:cNvSpPr>
+          <p:nvPr>
+            <p:ph type="sldNum" sz="quarter" idx="12"/>
+          </p:nvPr>
+        </p:nvSpPr>
+        <p:spPr>
+          <a:xfrm>
+            <a:off x="10514011" y="6036261"/>
+            <a:ext cx="753545" cy="365125"/>
+          </a:xfrm>
+        </p:spPr>
+        <p:txBody>
+          <a:bodyPr/>
+          <a:lstStyle/>
+          <a:p>
+            <a:fld id="{D57F1E4F-1CFF-5643-939E-217C01CDF565}" type="slidenum">
+              <a:rPr lang="en-US" smtClean="0"/>
+              <a:pPr/>
+              <a:t>16</a:t>
+            </a:fld>
+            <a:endParaRPr lang="en-US" dirty="0"/>
+          </a:p>
+        </p:txBody>
+      </p:sp>
+      <p:sp>
+        <p:nvSpPr>
+          <p:cNvPr id="3" name="제목 1">
+            <a:extLst>
+              <a:ext uri="{FF2B5EF4-FFF2-40B4-BE49-F238E27FC236}">
+                <a16:creationId xmlns:a16="http://schemas.microsoft.com/office/drawing/2014/main" id="{13C618B3-0B0A-4153-0F16-6CD8BC985D0E}"/>
+              </a:ext>
+            </a:extLst>
+          </p:cNvPr>
+          <p:cNvSpPr txBox="1">
+            <a:spLocks/>
+          </p:cNvSpPr>
+          <p:nvPr/>
+        </p:nvSpPr>
+        <p:spPr>
+          <a:xfrm>
+            <a:off x="475645" y="481983"/>
+            <a:ext cx="10353762" cy="766439"/>
+          </a:xfrm>
+          <a:prstGeom prst="rect">
+            <a:avLst/>
+          </a:prstGeom>
+        </p:spPr>
+        <p:txBody>
+          <a:bodyPr vert="horz" lIns="91440" tIns="45720" rIns="91440" bIns="45720" rtlCol="0" anchor="ctr">
+            <a:normAutofit/>
+          </a:bodyPr>
+          <a:lstStyle>
+            <a:lvl1pPr algn="ctr" defTabSz="914400" rtl="0" eaLnBrk="1" latinLnBrk="1" hangingPunct="1">
+              <a:lnSpc>
+                <a:spcPct val="90000"/>
+              </a:lnSpc>
+              <a:spcBef>
+                <a:spcPct val="0"/>
+              </a:spcBef>
+              <a:buNone/>
+              <a:defRPr sz="3200" kern="1200" cap="all" baseline="0">
+                <a:solidFill>
+                  <a:schemeClr val="tx1"/>
+                </a:solidFill>
+                <a:effectLst/>
+                <a:latin typeface="Batang" panose="02030600000101010101" pitchFamily="18" charset="-127"/>
+                <a:ea typeface="Batang" panose="02030600000101010101" pitchFamily="18" charset="-127"/>
+                <a:cs typeface="+mj-cs"/>
+              </a:defRPr>
+            </a:lvl1pPr>
+          </a:lstStyle>
+          <a:p>
+            <a:pPr algn="l"/>
+            <a:r>
+              <a:rPr lang="en-US" altLang="ko-KR" sz="2800" cap="none" dirty="0">
+                <a:latin typeface="D2Coding" panose="020B0609020101020101" pitchFamily="49" charset="-127"/>
+                <a:ea typeface="D2Coding" panose="020B0609020101020101" pitchFamily="49" charset="-127"/>
+                <a:cs typeface="Segoe UI Light" panose="020B0502040204020203" pitchFamily="34" charset="0"/>
+              </a:rPr>
+              <a:t>YOLO</a:t>
+            </a:r>
+            <a:endParaRPr lang="ko-KR" altLang="en-US" sz="2800" cap="none" dirty="0">
+              <a:latin typeface="D2Coding" panose="020B0609020101020101" pitchFamily="49" charset="-127"/>
+              <a:ea typeface="D2Coding" panose="020B0609020101020101" pitchFamily="49" charset="-127"/>
+              <a:cs typeface="Segoe UI Light" panose="020B0502040204020203" pitchFamily="34" charset="0"/>
+            </a:endParaRPr>
+          </a:p>
+        </p:txBody>
+      </p:sp>
+      <p:sp>
+        <p:nvSpPr>
+          <p:cNvPr id="11" name="TextBox 10">
+            <a:extLst>
+              <a:ext uri="{FF2B5EF4-FFF2-40B4-BE49-F238E27FC236}">
+                <a16:creationId xmlns:a16="http://schemas.microsoft.com/office/drawing/2014/main" id="{706632DF-E2C3-456E-17D1-EE7B95FF96B8}"/>
+              </a:ext>
+            </a:extLst>
+          </p:cNvPr>
+          <p:cNvSpPr txBox="1"/>
+          <p:nvPr/>
+        </p:nvSpPr>
+        <p:spPr>
+          <a:xfrm>
+            <a:off x="571802" y="1248422"/>
+            <a:ext cx="11144553" cy="465320"/>
+          </a:xfrm>
+          <a:prstGeom prst="rect">
+            <a:avLst/>
+          </a:prstGeom>
+          <a:noFill/>
+        </p:spPr>
+        <p:txBody>
+          <a:bodyPr wrap="square">
+            <a:spAutoFit/>
+          </a:bodyPr>
+          <a:lstStyle/>
+          <a:p>
+            <a:pPr>
+              <a:lnSpc>
+                <a:spcPct val="150000"/>
+              </a:lnSpc>
+            </a:pPr>
+            <a:r>
+              <a:rPr lang="ko-KR" altLang="en-US" dirty="0" err="1">
+                <a:latin typeface="D2Coding" panose="020B0609020101020101" pitchFamily="49" charset="-127"/>
+                <a:ea typeface="D2Coding" panose="020B0609020101020101" pitchFamily="49" charset="-127"/>
+              </a:rPr>
+              <a:t>사령탑셀의</a:t>
+            </a:r>
+            <a:r>
+              <a:rPr lang="ko-KR" altLang="en-US" dirty="0">
+                <a:latin typeface="D2Coding" panose="020B0609020101020101" pitchFamily="49" charset="-127"/>
+                <a:ea typeface="D2Coding" panose="020B0609020101020101" pitchFamily="49" charset="-127"/>
+              </a:rPr>
+              <a:t> 실제 픽셀 범위는 가로 </a:t>
+            </a:r>
+            <a:r>
+              <a:rPr lang="en-US" altLang="ko-KR" dirty="0">
+                <a:latin typeface="D2Coding" panose="020B0609020101020101" pitchFamily="49" charset="-127"/>
+                <a:ea typeface="D2Coding" panose="020B0609020101020101" pitchFamily="49" charset="-127"/>
+              </a:rPr>
+              <a:t>10~20, </a:t>
+            </a:r>
+            <a:r>
+              <a:rPr lang="ko-KR" altLang="en-US" dirty="0">
+                <a:latin typeface="D2Coding" panose="020B0609020101020101" pitchFamily="49" charset="-127"/>
+                <a:ea typeface="D2Coding" panose="020B0609020101020101" pitchFamily="49" charset="-127"/>
+              </a:rPr>
+              <a:t>세로 </a:t>
+            </a:r>
+            <a:r>
+              <a:rPr lang="en-US" altLang="ko-KR" dirty="0">
+                <a:latin typeface="D2Coding" panose="020B0609020101020101" pitchFamily="49" charset="-127"/>
+                <a:ea typeface="D2Coding" panose="020B0609020101020101" pitchFamily="49" charset="-127"/>
+              </a:rPr>
+              <a:t>10~20 </a:t>
+            </a:r>
+            <a:r>
+              <a:rPr lang="ko-KR" altLang="en-US" dirty="0">
+                <a:latin typeface="D2Coding" panose="020B0609020101020101" pitchFamily="49" charset="-127"/>
+                <a:ea typeface="D2Coding" panose="020B0609020101020101" pitchFamily="49" charset="-127"/>
+              </a:rPr>
+              <a:t>영역이며</a:t>
+            </a:r>
+            <a:r>
+              <a:rPr lang="en-US" altLang="ko-KR" dirty="0">
+                <a:latin typeface="D2Coding" panose="020B0609020101020101" pitchFamily="49" charset="-127"/>
+                <a:ea typeface="D2Coding" panose="020B0609020101020101" pitchFamily="49" charset="-127"/>
+              </a:rPr>
+              <a:t> </a:t>
+            </a:r>
+            <a:r>
+              <a:rPr lang="ko-KR" altLang="en-US" dirty="0">
+                <a:latin typeface="D2Coding" panose="020B0609020101020101" pitchFamily="49" charset="-127"/>
+                <a:ea typeface="D2Coding" panose="020B0609020101020101" pitchFamily="49" charset="-127"/>
+              </a:rPr>
+              <a:t>원본</a:t>
+            </a:r>
+            <a:r>
+              <a:rPr lang="en-US" altLang="ko-KR" dirty="0">
+                <a:latin typeface="D2Coding" panose="020B0609020101020101" pitchFamily="49" charset="-127"/>
+                <a:ea typeface="D2Coding" panose="020B0609020101020101" pitchFamily="49" charset="-127"/>
+              </a:rPr>
+              <a:t>(30, 30)</a:t>
+            </a:r>
+            <a:r>
+              <a:rPr lang="ko-KR" altLang="en-US" dirty="0">
+                <a:latin typeface="D2Coding" panose="020B0609020101020101" pitchFamily="49" charset="-127"/>
+                <a:ea typeface="D2Coding" panose="020B0609020101020101" pitchFamily="49" charset="-127"/>
+              </a:rPr>
+              <a:t>이미지에는 </a:t>
+            </a:r>
+            <a:r>
+              <a:rPr lang="en-US" altLang="ko-KR" dirty="0">
+                <a:latin typeface="D2Coding" panose="020B0609020101020101" pitchFamily="49" charset="-127"/>
+                <a:ea typeface="D2Coding" panose="020B0609020101020101" pitchFamily="49" charset="-127"/>
+              </a:rPr>
+              <a:t>(15,15) </a:t>
+            </a:r>
+            <a:r>
+              <a:rPr lang="ko-KR" altLang="en-US" dirty="0">
+                <a:latin typeface="D2Coding" panose="020B0609020101020101" pitchFamily="49" charset="-127"/>
+                <a:ea typeface="D2Coding" panose="020B0609020101020101" pitchFamily="49" charset="-127"/>
+              </a:rPr>
+              <a:t>픽셀</a:t>
+            </a:r>
+            <a:endParaRPr lang="en-US" altLang="ko-KR" dirty="0">
+              <a:latin typeface="D2Coding" panose="020B0609020101020101" pitchFamily="49" charset="-127"/>
+              <a:ea typeface="D2Coding" panose="020B0609020101020101" pitchFamily="49" charset="-127"/>
+            </a:endParaRPr>
+          </a:p>
+        </p:txBody>
+      </p:sp>
+      <p:sp>
+        <p:nvSpPr>
+          <p:cNvPr id="6" name="제목 1">
+            <a:extLst>
+              <a:ext uri="{FF2B5EF4-FFF2-40B4-BE49-F238E27FC236}">
+                <a16:creationId xmlns:a16="http://schemas.microsoft.com/office/drawing/2014/main" id="{6902043F-72A8-4F16-1C1B-1E4721B19C82}"/>
+              </a:ext>
+            </a:extLst>
+          </p:cNvPr>
+          <p:cNvSpPr txBox="1">
+            <a:spLocks/>
+          </p:cNvSpPr>
+          <p:nvPr/>
+        </p:nvSpPr>
+        <p:spPr>
+          <a:xfrm>
+            <a:off x="7031196" y="647700"/>
+            <a:ext cx="4629755" cy="600722"/>
+          </a:xfrm>
+          <a:prstGeom prst="rect">
+            <a:avLst/>
+          </a:prstGeom>
+        </p:spPr>
+        <p:txBody>
+          <a:bodyPr vert="horz" lIns="91440" tIns="45720" rIns="91440" bIns="45720" rtlCol="0" anchor="ctr">
+            <a:normAutofit/>
+          </a:bodyPr>
+          <a:lstStyle>
+            <a:lvl1pPr algn="ctr" defTabSz="914400" rtl="0" eaLnBrk="1" latinLnBrk="1" hangingPunct="1">
+              <a:lnSpc>
+                <a:spcPct val="90000"/>
+              </a:lnSpc>
+              <a:spcBef>
+                <a:spcPct val="0"/>
+              </a:spcBef>
+              <a:buNone/>
+              <a:defRPr sz="3200" kern="1200" cap="all" baseline="0">
+                <a:solidFill>
+                  <a:schemeClr val="tx1"/>
+                </a:solidFill>
+                <a:effectLst/>
+                <a:latin typeface="Batang" panose="02030600000101010101" pitchFamily="18" charset="-127"/>
+                <a:ea typeface="Batang" panose="02030600000101010101" pitchFamily="18" charset="-127"/>
+                <a:cs typeface="+mj-cs"/>
+              </a:defRPr>
+            </a:lvl1pPr>
+          </a:lstStyle>
+          <a:p>
+            <a:pPr algn="r"/>
+            <a:r>
+              <a:rPr lang="en-US" altLang="ko-KR" sz="2000" cap="none" dirty="0">
+                <a:latin typeface="D2Coding" panose="020B0609020101020101" pitchFamily="49" charset="-127"/>
+                <a:ea typeface="D2Coding" panose="020B0609020101020101" pitchFamily="49" charset="-127"/>
+                <a:cs typeface="Segoe UI Light" panose="020B0502040204020203" pitchFamily="34" charset="0"/>
+              </a:rPr>
+              <a:t>3. </a:t>
+            </a:r>
+            <a:r>
+              <a:rPr lang="ko-KR" altLang="en-US" sz="2000" cap="none" dirty="0">
+                <a:latin typeface="D2Coding" panose="020B0609020101020101" pitchFamily="49" charset="-127"/>
+                <a:ea typeface="D2Coding" panose="020B0609020101020101" pitchFamily="49" charset="-127"/>
+                <a:cs typeface="Segoe UI Light" panose="020B0502040204020203" pitchFamily="34" charset="0"/>
+              </a:rPr>
+              <a:t>새로운 데이터 격자로 나누기</a:t>
+            </a:r>
+          </a:p>
+        </p:txBody>
+      </p:sp>
+      <p:sp>
+        <p:nvSpPr>
+          <p:cNvPr id="9" name="TextBox 8">
+            <a:extLst>
+              <a:ext uri="{FF2B5EF4-FFF2-40B4-BE49-F238E27FC236}">
+                <a16:creationId xmlns:a16="http://schemas.microsoft.com/office/drawing/2014/main" id="{632CF61F-99BB-CEC3-ACB7-57BF9F0A02CC}"/>
+              </a:ext>
+            </a:extLst>
+          </p:cNvPr>
+          <p:cNvSpPr txBox="1"/>
+          <p:nvPr/>
+        </p:nvSpPr>
+        <p:spPr>
+          <a:xfrm>
+            <a:off x="5249494" y="1876127"/>
+            <a:ext cx="4663048" cy="705642"/>
+          </a:xfrm>
+          <a:prstGeom prst="rect">
+            <a:avLst/>
+          </a:prstGeom>
+          <a:noFill/>
+        </p:spPr>
+        <p:txBody>
+          <a:bodyPr wrap="square">
+            <a:spAutoFit/>
+          </a:bodyPr>
+          <a:lstStyle/>
+          <a:p>
+            <a:pPr>
+              <a:lnSpc>
+                <a:spcPct val="150000"/>
+              </a:lnSpc>
+            </a:pPr>
+            <a:r>
+              <a:rPr lang="en-US" altLang="ko-KR" sz="1400" dirty="0">
+                <a:latin typeface="D2Coding" panose="020B0609020101020101" pitchFamily="49" charset="-127"/>
+                <a:ea typeface="D2Coding" panose="020B0609020101020101" pitchFamily="49" charset="-127"/>
+              </a:rPr>
+              <a:t>X</a:t>
+            </a:r>
+            <a:r>
+              <a:rPr lang="ko-KR" altLang="en-US" sz="1400" dirty="0">
+                <a:latin typeface="D2Coding" panose="020B0609020101020101" pitchFamily="49" charset="-127"/>
+                <a:ea typeface="D2Coding" panose="020B0609020101020101" pitchFamily="49" charset="-127"/>
+              </a:rPr>
+              <a:t> </a:t>
+            </a:r>
+            <a:r>
+              <a:rPr lang="en-US" altLang="ko-KR" sz="1400" dirty="0">
+                <a:latin typeface="D2Coding" panose="020B0609020101020101" pitchFamily="49" charset="-127"/>
+                <a:ea typeface="D2Coding" panose="020B0609020101020101" pitchFamily="49" charset="-127"/>
+              </a:rPr>
+              <a:t>=</a:t>
+            </a:r>
+            <a:r>
+              <a:rPr lang="ko-KR" altLang="en-US" sz="1400" dirty="0">
+                <a:latin typeface="D2Coding" panose="020B0609020101020101" pitchFamily="49" charset="-127"/>
+                <a:ea typeface="D2Coding" panose="020B0609020101020101" pitchFamily="49" charset="-127"/>
+              </a:rPr>
+              <a:t> (10) +(그리드 한 칸 너비(10)</a:t>
+            </a:r>
+            <a:r>
+              <a:rPr lang="ko-KR" altLang="en-US" sz="1400" dirty="0" err="1">
+                <a:latin typeface="D2Coding" panose="020B0609020101020101" pitchFamily="49" charset="-127"/>
+                <a:ea typeface="D2Coding" panose="020B0609020101020101" pitchFamily="49" charset="-127"/>
+              </a:rPr>
+              <a:t>x</a:t>
+            </a:r>
+            <a:r>
+              <a:rPr lang="ko-KR" altLang="en-US" sz="1400" dirty="0">
+                <a:latin typeface="D2Coding" panose="020B0609020101020101" pitchFamily="49" charset="-127"/>
+                <a:ea typeface="D2Coding" panose="020B0609020101020101" pitchFamily="49" charset="-127"/>
+              </a:rPr>
+              <a:t>(0.5)) = </a:t>
+            </a:r>
+            <a:r>
+              <a:rPr lang="en-US" altLang="ko-KR" sz="1400" dirty="0">
+                <a:latin typeface="D2Coding" panose="020B0609020101020101" pitchFamily="49" charset="-127"/>
+                <a:ea typeface="D2Coding" panose="020B0609020101020101" pitchFamily="49" charset="-127"/>
+              </a:rPr>
+              <a:t>15 </a:t>
+            </a:r>
+            <a:r>
+              <a:rPr lang="ko-KR" altLang="en-US" sz="1400" dirty="0">
+                <a:latin typeface="D2Coding" panose="020B0609020101020101" pitchFamily="49" charset="-127"/>
+                <a:ea typeface="D2Coding" panose="020B0609020101020101" pitchFamily="49" charset="-127"/>
+              </a:rPr>
+              <a:t>픽셀</a:t>
+            </a:r>
+            <a:endParaRPr lang="en-US" altLang="ko-KR" sz="1400" dirty="0">
+              <a:latin typeface="D2Coding" panose="020B0609020101020101" pitchFamily="49" charset="-127"/>
+              <a:ea typeface="D2Coding" panose="020B0609020101020101" pitchFamily="49" charset="-127"/>
+            </a:endParaRPr>
+          </a:p>
+          <a:p>
+            <a:pPr>
+              <a:lnSpc>
+                <a:spcPct val="150000"/>
+              </a:lnSpc>
+            </a:pPr>
+            <a:r>
+              <a:rPr lang="en-US" altLang="ko-KR" sz="1400" dirty="0">
+                <a:latin typeface="D2Coding" panose="020B0609020101020101" pitchFamily="49" charset="-127"/>
+                <a:ea typeface="D2Coding" panose="020B0609020101020101" pitchFamily="49" charset="-127"/>
+              </a:rPr>
+              <a:t>Y</a:t>
+            </a:r>
+            <a:r>
+              <a:rPr lang="ko-KR" altLang="en-US" sz="1400" dirty="0">
+                <a:latin typeface="D2Coding" panose="020B0609020101020101" pitchFamily="49" charset="-127"/>
+                <a:ea typeface="D2Coding" panose="020B0609020101020101" pitchFamily="49" charset="-127"/>
+              </a:rPr>
+              <a:t> </a:t>
+            </a:r>
+            <a:r>
+              <a:rPr lang="en-US" altLang="ko-KR" sz="1400" dirty="0">
+                <a:latin typeface="D2Coding" panose="020B0609020101020101" pitchFamily="49" charset="-127"/>
+                <a:ea typeface="D2Coding" panose="020B0609020101020101" pitchFamily="49" charset="-127"/>
+              </a:rPr>
+              <a:t>=</a:t>
+            </a:r>
+            <a:r>
+              <a:rPr lang="ko-KR" altLang="en-US" sz="1400" dirty="0">
+                <a:latin typeface="D2Coding" panose="020B0609020101020101" pitchFamily="49" charset="-127"/>
+                <a:ea typeface="D2Coding" panose="020B0609020101020101" pitchFamily="49" charset="-127"/>
+              </a:rPr>
+              <a:t> (10) +(그리드 한 칸 높이(10)</a:t>
+            </a:r>
+            <a:r>
+              <a:rPr lang="ko-KR" altLang="en-US" sz="1400" dirty="0" err="1">
+                <a:latin typeface="D2Coding" panose="020B0609020101020101" pitchFamily="49" charset="-127"/>
+                <a:ea typeface="D2Coding" panose="020B0609020101020101" pitchFamily="49" charset="-127"/>
+              </a:rPr>
+              <a:t>x</a:t>
+            </a:r>
+            <a:r>
+              <a:rPr lang="ko-KR" altLang="en-US" sz="1400" dirty="0">
+                <a:latin typeface="D2Coding" panose="020B0609020101020101" pitchFamily="49" charset="-127"/>
+                <a:ea typeface="D2Coding" panose="020B0609020101020101" pitchFamily="49" charset="-127"/>
+              </a:rPr>
+              <a:t>(0.5)) = </a:t>
+            </a:r>
+            <a:r>
+              <a:rPr lang="en-US" altLang="ko-KR" sz="1400" dirty="0">
+                <a:latin typeface="D2Coding" panose="020B0609020101020101" pitchFamily="49" charset="-127"/>
+                <a:ea typeface="D2Coding" panose="020B0609020101020101" pitchFamily="49" charset="-127"/>
+              </a:rPr>
+              <a:t>15 </a:t>
+            </a:r>
+            <a:r>
+              <a:rPr lang="ko-KR" altLang="en-US" sz="1400" dirty="0">
+                <a:latin typeface="D2Coding" panose="020B0609020101020101" pitchFamily="49" charset="-127"/>
+                <a:ea typeface="D2Coding" panose="020B0609020101020101" pitchFamily="49" charset="-127"/>
+              </a:rPr>
+              <a:t>픽셀</a:t>
+            </a:r>
+          </a:p>
+        </p:txBody>
+      </p:sp>
+      <p:graphicFrame>
+        <p:nvGraphicFramePr>
+          <p:cNvPr id="46" name="표 45">
+            <a:extLst>
+              <a:ext uri="{FF2B5EF4-FFF2-40B4-BE49-F238E27FC236}">
+                <a16:creationId xmlns:a16="http://schemas.microsoft.com/office/drawing/2014/main" id="{B1738D25-B1C2-FA34-9984-56937D29C5A2}"/>
+              </a:ext>
+            </a:extLst>
+          </p:cNvPr>
+          <p:cNvGraphicFramePr>
+            <a:graphicFrameLocks noGrp="1"/>
+          </p:cNvGraphicFramePr>
+          <p:nvPr>
+            <p:extLst>
+              <p:ext uri="{D42A27DB-BD31-4B8C-83A1-F6EECF244321}">
+                <p14:modId xmlns:p14="http://schemas.microsoft.com/office/powerpoint/2010/main" val="765407807"/>
+              </p:ext>
+            </p:extLst>
+          </p:nvPr>
+        </p:nvGraphicFramePr>
+        <p:xfrm>
+          <a:off x="684978" y="3123696"/>
+          <a:ext cx="2943228" cy="2488044"/>
+        </p:xfrm>
+        <a:graphic>
+          <a:graphicData uri="http://schemas.openxmlformats.org/drawingml/2006/table">
+            <a:tbl>
+              <a:tblPr firstRow="1" bandRow="1">
+                <a:tableStyleId>{5940675A-B579-460E-94D1-54222C63F5DA}</a:tableStyleId>
+              </a:tblPr>
+              <a:tblGrid>
+                <a:gridCol w="981076">
+                  <a:extLst>
+                    <a:ext uri="{9D8B030D-6E8A-4147-A177-3AD203B41FA5}">
+                      <a16:colId xmlns:a16="http://schemas.microsoft.com/office/drawing/2014/main" val="1961843274"/>
+                    </a:ext>
+                  </a:extLst>
+                </a:gridCol>
+                <a:gridCol w="981076">
+                  <a:extLst>
+                    <a:ext uri="{9D8B030D-6E8A-4147-A177-3AD203B41FA5}">
+                      <a16:colId xmlns:a16="http://schemas.microsoft.com/office/drawing/2014/main" val="2923400843"/>
+                    </a:ext>
+                  </a:extLst>
+                </a:gridCol>
+                <a:gridCol w="981076">
+                  <a:extLst>
+                    <a:ext uri="{9D8B030D-6E8A-4147-A177-3AD203B41FA5}">
+                      <a16:colId xmlns:a16="http://schemas.microsoft.com/office/drawing/2014/main" val="2951067763"/>
+                    </a:ext>
+                  </a:extLst>
+                </a:gridCol>
+              </a:tblGrid>
+              <a:tr h="829348">
+                <a:tc>
+                  <a:txBody>
+                    <a:bodyPr/>
+                    <a:lstStyle/>
+                    <a:p>
+                      <a:pPr algn="ctr" latinLnBrk="1"/>
+                      <a:endParaRPr lang="en-US" altLang="ko-KR" sz="1200" dirty="0">
+                        <a:solidFill>
+                          <a:schemeClr val="tx1"/>
+                        </a:solidFill>
+                      </a:endParaRPr>
+                    </a:p>
+                    <a:p>
+                      <a:pPr algn="ctr" latinLnBrk="1"/>
+                      <a:endParaRPr lang="en-US" altLang="ko-KR" sz="1200" dirty="0">
+                        <a:solidFill>
+                          <a:schemeClr val="tx1"/>
+                        </a:solidFill>
+                      </a:endParaRPr>
+                    </a:p>
+                    <a:p>
+                      <a:pPr algn="ctr" latinLnBrk="1"/>
+                      <a:endParaRPr lang="en-US" altLang="ko-KR" sz="1200" dirty="0">
+                        <a:solidFill>
+                          <a:schemeClr val="tx1"/>
+                        </a:solidFill>
+                      </a:endParaRPr>
+                    </a:p>
+                    <a:p>
+                      <a:pPr algn="ctr" latinLnBrk="1"/>
+                      <a:r>
+                        <a:rPr lang="en-US" altLang="ko-KR" sz="1200" dirty="0">
+                          <a:solidFill>
+                            <a:schemeClr val="tx1"/>
+                          </a:solidFill>
+                        </a:rPr>
+                        <a:t>0.01</a:t>
+                      </a:r>
+                      <a:endParaRPr lang="ko-KR" altLang="en-US" sz="1200" dirty="0">
+                        <a:solidFill>
+                          <a:schemeClr val="tx1"/>
+                        </a:solidFill>
+                      </a:endParaRPr>
+                    </a:p>
+                  </a:txBody>
+                  <a:tcPr marL="67388" marR="67388" marT="33693" marB="33693"/>
+                </a:tc>
+                <a:tc>
+                  <a:txBody>
+                    <a:bodyPr/>
+                    <a:lstStyle/>
+                    <a:p>
+                      <a:pPr marL="0" marR="0" lvl="0" indent="0" algn="ctr" defTabSz="914400" rtl="0" eaLnBrk="1" fontAlgn="auto" latinLnBrk="1" hangingPunct="1">
+                        <a:lnSpc>
+                          <a:spcPct val="100000"/>
+                        </a:lnSpc>
+                        <a:spcBef>
+                          <a:spcPts val="0"/>
+                        </a:spcBef>
+                        <a:spcAft>
+                          <a:spcPts val="0"/>
+                        </a:spcAft>
+                        <a:buClrTx/>
+                        <a:buSzTx/>
+                        <a:buFontTx/>
+                        <a:buNone/>
+                        <a:tabLst/>
+                        <a:defRPr/>
+                      </a:pPr>
+                      <a:endParaRPr kumimoji="0" lang="en-US" altLang="ko-KR" sz="1200" b="0" i="0" u="none" strike="noStrike" kern="1200" cap="none" spc="0" normalizeH="0" baseline="0" noProof="0" dirty="0">
+                        <a:ln>
+                          <a:noFill/>
+                        </a:ln>
+                        <a:solidFill>
+                          <a:schemeClr val="tx1"/>
+                        </a:solidFill>
+                        <a:effectLst/>
+                        <a:uLnTx/>
+                        <a:uFillTx/>
+                        <a:latin typeface="Segoe UI"/>
+                        <a:ea typeface="+mn-ea"/>
+                        <a:cs typeface="+mn-cs"/>
+                      </a:endParaRPr>
+                    </a:p>
+                    <a:p>
+                      <a:pPr marL="0" marR="0" lvl="0" indent="0" algn="ctr" defTabSz="914400" rtl="0" eaLnBrk="1" fontAlgn="auto" latinLnBrk="1" hangingPunct="1">
+                        <a:lnSpc>
+                          <a:spcPct val="100000"/>
+                        </a:lnSpc>
+                        <a:spcBef>
+                          <a:spcPts val="0"/>
+                        </a:spcBef>
+                        <a:spcAft>
+                          <a:spcPts val="0"/>
+                        </a:spcAft>
+                        <a:buClrTx/>
+                        <a:buSzTx/>
+                        <a:buFontTx/>
+                        <a:buNone/>
+                        <a:tabLst/>
+                        <a:defRPr/>
+                      </a:pPr>
+                      <a:endParaRPr kumimoji="0" lang="en-US" altLang="ko-KR" sz="1200" b="0" i="0" u="none" strike="noStrike" kern="1200" cap="none" spc="0" normalizeH="0" baseline="0" noProof="0" dirty="0">
+                        <a:ln>
+                          <a:noFill/>
+                        </a:ln>
+                        <a:solidFill>
+                          <a:schemeClr val="tx1"/>
+                        </a:solidFill>
+                        <a:effectLst/>
+                        <a:uLnTx/>
+                        <a:uFillTx/>
+                        <a:latin typeface="Segoe UI"/>
+                        <a:ea typeface="+mn-ea"/>
+                        <a:cs typeface="+mn-cs"/>
+                      </a:endParaRPr>
+                    </a:p>
+                    <a:p>
+                      <a:pPr marL="0" marR="0" lvl="0" indent="0" algn="ctr" defTabSz="914400" rtl="0" eaLnBrk="1" fontAlgn="auto" latinLnBrk="1" hangingPunct="1">
+                        <a:lnSpc>
+                          <a:spcPct val="100000"/>
+                        </a:lnSpc>
+                        <a:spcBef>
+                          <a:spcPts val="0"/>
+                        </a:spcBef>
+                        <a:spcAft>
+                          <a:spcPts val="0"/>
+                        </a:spcAft>
+                        <a:buClrTx/>
+                        <a:buSzTx/>
+                        <a:buFontTx/>
+                        <a:buNone/>
+                        <a:tabLst/>
+                        <a:defRPr/>
+                      </a:pPr>
+                      <a:endParaRPr kumimoji="0" lang="en-US" altLang="ko-KR" sz="1200" b="0" i="0" u="none" strike="noStrike" kern="1200" cap="none" spc="0" normalizeH="0" baseline="0" noProof="0" dirty="0">
+                        <a:ln>
+                          <a:noFill/>
+                        </a:ln>
+                        <a:solidFill>
+                          <a:schemeClr val="tx1"/>
+                        </a:solidFill>
+                        <a:effectLst/>
+                        <a:uLnTx/>
+                        <a:uFillTx/>
+                        <a:latin typeface="Segoe UI"/>
+                        <a:ea typeface="+mn-ea"/>
+                        <a:cs typeface="+mn-cs"/>
+                      </a:endParaRPr>
+                    </a:p>
+                    <a:p>
+                      <a:pPr marL="0" marR="0" lvl="0" indent="0" algn="ctr" defTabSz="914400" rtl="0" eaLnBrk="1" fontAlgn="auto" latinLnBrk="1" hangingPunct="1">
+                        <a:lnSpc>
+                          <a:spcPct val="100000"/>
+                        </a:lnSpc>
+                        <a:spcBef>
+                          <a:spcPts val="0"/>
+                        </a:spcBef>
+                        <a:spcAft>
+                          <a:spcPts val="0"/>
+                        </a:spcAft>
+                        <a:buClrTx/>
+                        <a:buSzTx/>
+                        <a:buFontTx/>
+                        <a:buNone/>
+                        <a:tabLst/>
+                        <a:defRPr/>
+                      </a:pPr>
+                      <a:r>
+                        <a:rPr kumimoji="0" lang="en-US" altLang="ko-KR" sz="1200" b="0" i="0" u="none" strike="noStrike" kern="1200" cap="none" spc="0" normalizeH="0" baseline="0" noProof="0" dirty="0">
+                          <a:ln>
+                            <a:noFill/>
+                          </a:ln>
+                          <a:solidFill>
+                            <a:schemeClr val="tx1"/>
+                          </a:solidFill>
+                          <a:effectLst/>
+                          <a:uLnTx/>
+                          <a:uFillTx/>
+                          <a:latin typeface="Segoe UI"/>
+                          <a:ea typeface="+mn-ea"/>
+                          <a:cs typeface="+mn-cs"/>
+                        </a:rPr>
+                        <a:t>0.15</a:t>
+                      </a:r>
+                      <a:endParaRPr kumimoji="0" lang="ko-KR" altLang="en-US" sz="1200" b="0" i="0" u="none" strike="noStrike" kern="1200" cap="none" spc="0" normalizeH="0" baseline="0" noProof="0" dirty="0">
+                        <a:ln>
+                          <a:noFill/>
+                        </a:ln>
+                        <a:solidFill>
+                          <a:schemeClr val="tx1"/>
+                        </a:solidFill>
+                        <a:effectLst/>
+                        <a:uLnTx/>
+                        <a:uFillTx/>
+                        <a:latin typeface="Segoe UI"/>
+                        <a:ea typeface="+mn-ea"/>
+                        <a:cs typeface="+mn-cs"/>
+                      </a:endParaRPr>
+                    </a:p>
+                  </a:txBody>
+                  <a:tcPr marL="67388" marR="67388" marT="33693" marB="33693"/>
+                </a:tc>
+                <a:tc>
+                  <a:txBody>
+                    <a:bodyPr/>
+                    <a:lstStyle/>
+                    <a:p>
+                      <a:pPr marL="0" marR="0" lvl="0" indent="0" algn="ctr" defTabSz="914400" rtl="0" eaLnBrk="1" fontAlgn="auto" latinLnBrk="1" hangingPunct="1">
+                        <a:lnSpc>
+                          <a:spcPct val="100000"/>
+                        </a:lnSpc>
+                        <a:spcBef>
+                          <a:spcPts val="0"/>
+                        </a:spcBef>
+                        <a:spcAft>
+                          <a:spcPts val="0"/>
+                        </a:spcAft>
+                        <a:buClrTx/>
+                        <a:buSzTx/>
+                        <a:buFontTx/>
+                        <a:buNone/>
+                        <a:tabLst/>
+                        <a:defRPr/>
+                      </a:pPr>
+                      <a:endParaRPr kumimoji="0" lang="en-US" altLang="ko-KR" sz="1200" b="0" i="0" u="none" strike="noStrike" kern="1200" cap="none" spc="0" normalizeH="0" baseline="0" noProof="0" dirty="0">
+                        <a:ln>
+                          <a:noFill/>
+                        </a:ln>
+                        <a:solidFill>
+                          <a:schemeClr val="tx1"/>
+                        </a:solidFill>
+                        <a:effectLst/>
+                        <a:uLnTx/>
+                        <a:uFillTx/>
+                        <a:latin typeface="Segoe UI"/>
+                        <a:ea typeface="+mn-ea"/>
+                        <a:cs typeface="+mn-cs"/>
+                      </a:endParaRPr>
+                    </a:p>
+                    <a:p>
+                      <a:pPr marL="0" marR="0" lvl="0" indent="0" algn="ctr" defTabSz="914400" rtl="0" eaLnBrk="1" fontAlgn="auto" latinLnBrk="1" hangingPunct="1">
+                        <a:lnSpc>
+                          <a:spcPct val="100000"/>
+                        </a:lnSpc>
+                        <a:spcBef>
+                          <a:spcPts val="0"/>
+                        </a:spcBef>
+                        <a:spcAft>
+                          <a:spcPts val="0"/>
+                        </a:spcAft>
+                        <a:buClrTx/>
+                        <a:buSzTx/>
+                        <a:buFontTx/>
+                        <a:buNone/>
+                        <a:tabLst/>
+                        <a:defRPr/>
+                      </a:pPr>
+                      <a:endParaRPr kumimoji="0" lang="en-US" altLang="ko-KR" sz="1200" b="0" i="0" u="none" strike="noStrike" kern="1200" cap="none" spc="0" normalizeH="0" baseline="0" noProof="0" dirty="0">
+                        <a:ln>
+                          <a:noFill/>
+                        </a:ln>
+                        <a:solidFill>
+                          <a:schemeClr val="tx1"/>
+                        </a:solidFill>
+                        <a:effectLst/>
+                        <a:uLnTx/>
+                        <a:uFillTx/>
+                        <a:latin typeface="Segoe UI"/>
+                        <a:ea typeface="+mn-ea"/>
+                        <a:cs typeface="+mn-cs"/>
+                      </a:endParaRPr>
+                    </a:p>
+                    <a:p>
+                      <a:pPr marL="0" marR="0" lvl="0" indent="0" algn="ctr" defTabSz="914400" rtl="0" eaLnBrk="1" fontAlgn="auto" latinLnBrk="1" hangingPunct="1">
+                        <a:lnSpc>
+                          <a:spcPct val="100000"/>
+                        </a:lnSpc>
+                        <a:spcBef>
+                          <a:spcPts val="0"/>
+                        </a:spcBef>
+                        <a:spcAft>
+                          <a:spcPts val="0"/>
+                        </a:spcAft>
+                        <a:buClrTx/>
+                        <a:buSzTx/>
+                        <a:buFontTx/>
+                        <a:buNone/>
+                        <a:tabLst/>
+                        <a:defRPr/>
+                      </a:pPr>
+                      <a:endParaRPr kumimoji="0" lang="en-US" altLang="ko-KR" sz="1200" b="0" i="0" u="none" strike="noStrike" kern="1200" cap="none" spc="0" normalizeH="0" baseline="0" noProof="0" dirty="0">
+                        <a:ln>
+                          <a:noFill/>
+                        </a:ln>
+                        <a:solidFill>
+                          <a:schemeClr val="tx1"/>
+                        </a:solidFill>
+                        <a:effectLst/>
+                        <a:uLnTx/>
+                        <a:uFillTx/>
+                        <a:latin typeface="Segoe UI"/>
+                        <a:ea typeface="+mn-ea"/>
+                        <a:cs typeface="+mn-cs"/>
+                      </a:endParaRPr>
+                    </a:p>
+                    <a:p>
+                      <a:pPr marL="0" marR="0" lvl="0" indent="0" algn="ctr" defTabSz="914400" rtl="0" eaLnBrk="1" fontAlgn="auto" latinLnBrk="1" hangingPunct="1">
+                        <a:lnSpc>
+                          <a:spcPct val="100000"/>
+                        </a:lnSpc>
+                        <a:spcBef>
+                          <a:spcPts val="0"/>
+                        </a:spcBef>
+                        <a:spcAft>
+                          <a:spcPts val="0"/>
+                        </a:spcAft>
+                        <a:buClrTx/>
+                        <a:buSzTx/>
+                        <a:buFontTx/>
+                        <a:buNone/>
+                        <a:tabLst/>
+                        <a:defRPr/>
+                      </a:pPr>
+                      <a:r>
+                        <a:rPr kumimoji="0" lang="en-US" altLang="ko-KR" sz="1200" b="0" i="0" u="none" strike="noStrike" kern="1200" cap="none" spc="0" normalizeH="0" baseline="0" noProof="0" dirty="0">
+                          <a:ln>
+                            <a:noFill/>
+                          </a:ln>
+                          <a:solidFill>
+                            <a:schemeClr val="tx1"/>
+                          </a:solidFill>
+                          <a:effectLst/>
+                          <a:uLnTx/>
+                          <a:uFillTx/>
+                          <a:latin typeface="Segoe UI"/>
+                          <a:ea typeface="+mn-ea"/>
+                          <a:cs typeface="+mn-cs"/>
+                        </a:rPr>
+                        <a:t>0.06</a:t>
+                      </a:r>
+                      <a:endParaRPr kumimoji="0" lang="ko-KR" altLang="en-US" sz="1200" b="0" i="0" u="none" strike="noStrike" kern="1200" cap="none" spc="0" normalizeH="0" baseline="0" noProof="0" dirty="0">
+                        <a:ln>
+                          <a:noFill/>
+                        </a:ln>
+                        <a:solidFill>
+                          <a:schemeClr val="tx1"/>
+                        </a:solidFill>
+                        <a:effectLst/>
+                        <a:uLnTx/>
+                        <a:uFillTx/>
+                        <a:latin typeface="Segoe UI"/>
+                        <a:ea typeface="+mn-ea"/>
+                        <a:cs typeface="+mn-cs"/>
+                      </a:endParaRPr>
+                    </a:p>
+                  </a:txBody>
+                  <a:tcPr marL="67388" marR="67388" marT="33693" marB="33693"/>
+                </a:tc>
+                <a:extLst>
+                  <a:ext uri="{0D108BD9-81ED-4DB2-BD59-A6C34878D82A}">
+                    <a16:rowId xmlns:a16="http://schemas.microsoft.com/office/drawing/2014/main" val="844891742"/>
+                  </a:ext>
+                </a:extLst>
+              </a:tr>
+              <a:tr h="829348">
+                <a:tc>
+                  <a:txBody>
+                    <a:bodyPr/>
+                    <a:lstStyle/>
+                    <a:p>
+                      <a:pPr marL="0" marR="0" lvl="0" indent="0" algn="ctr" defTabSz="914400" rtl="0" eaLnBrk="1" fontAlgn="auto" latinLnBrk="1" hangingPunct="1">
+                        <a:lnSpc>
+                          <a:spcPct val="100000"/>
+                        </a:lnSpc>
+                        <a:spcBef>
+                          <a:spcPts val="0"/>
+                        </a:spcBef>
+                        <a:spcAft>
+                          <a:spcPts val="0"/>
+                        </a:spcAft>
+                        <a:buClrTx/>
+                        <a:buSzTx/>
+                        <a:buFontTx/>
+                        <a:buNone/>
+                        <a:tabLst/>
+                        <a:defRPr/>
+                      </a:pPr>
+                      <a:endParaRPr kumimoji="0" lang="en-US" altLang="ko-KR" sz="1200" b="0" i="0" u="none" strike="noStrike" kern="1200" cap="none" spc="0" normalizeH="0" baseline="0" noProof="0" dirty="0">
+                        <a:ln>
+                          <a:noFill/>
+                        </a:ln>
+                        <a:solidFill>
+                          <a:schemeClr val="tx1"/>
+                        </a:solidFill>
+                        <a:effectLst/>
+                        <a:uLnTx/>
+                        <a:uFillTx/>
+                        <a:latin typeface="Segoe UI"/>
+                        <a:ea typeface="+mn-ea"/>
+                        <a:cs typeface="+mn-cs"/>
+                      </a:endParaRPr>
+                    </a:p>
+                    <a:p>
+                      <a:pPr marL="0" marR="0" lvl="0" indent="0" algn="ctr" defTabSz="914400" rtl="0" eaLnBrk="1" fontAlgn="auto" latinLnBrk="1" hangingPunct="1">
+                        <a:lnSpc>
+                          <a:spcPct val="100000"/>
+                        </a:lnSpc>
+                        <a:spcBef>
+                          <a:spcPts val="0"/>
+                        </a:spcBef>
+                        <a:spcAft>
+                          <a:spcPts val="0"/>
+                        </a:spcAft>
+                        <a:buClrTx/>
+                        <a:buSzTx/>
+                        <a:buFontTx/>
+                        <a:buNone/>
+                        <a:tabLst/>
+                        <a:defRPr/>
+                      </a:pPr>
+                      <a:endParaRPr kumimoji="0" lang="en-US" altLang="ko-KR" sz="1200" b="0" i="0" u="none" strike="noStrike" kern="1200" cap="none" spc="0" normalizeH="0" baseline="0" noProof="0" dirty="0">
+                        <a:ln>
+                          <a:noFill/>
+                        </a:ln>
+                        <a:solidFill>
+                          <a:schemeClr val="tx1"/>
+                        </a:solidFill>
+                        <a:effectLst/>
+                        <a:uLnTx/>
+                        <a:uFillTx/>
+                        <a:latin typeface="Segoe UI"/>
+                        <a:ea typeface="+mn-ea"/>
+                        <a:cs typeface="+mn-cs"/>
+                      </a:endParaRPr>
+                    </a:p>
+                    <a:p>
+                      <a:pPr marL="0" marR="0" lvl="0" indent="0" algn="ctr" defTabSz="914400" rtl="0" eaLnBrk="1" fontAlgn="auto" latinLnBrk="1" hangingPunct="1">
+                        <a:lnSpc>
+                          <a:spcPct val="100000"/>
+                        </a:lnSpc>
+                        <a:spcBef>
+                          <a:spcPts val="0"/>
+                        </a:spcBef>
+                        <a:spcAft>
+                          <a:spcPts val="0"/>
+                        </a:spcAft>
+                        <a:buClrTx/>
+                        <a:buSzTx/>
+                        <a:buFontTx/>
+                        <a:buNone/>
+                        <a:tabLst/>
+                        <a:defRPr/>
+                      </a:pPr>
+                      <a:endParaRPr kumimoji="0" lang="en-US" altLang="ko-KR" sz="1200" b="0" i="0" u="none" strike="noStrike" kern="1200" cap="none" spc="0" normalizeH="0" baseline="0" noProof="0" dirty="0">
+                        <a:ln>
+                          <a:noFill/>
+                        </a:ln>
+                        <a:solidFill>
+                          <a:schemeClr val="tx1"/>
+                        </a:solidFill>
+                        <a:effectLst/>
+                        <a:uLnTx/>
+                        <a:uFillTx/>
+                        <a:latin typeface="Segoe UI"/>
+                        <a:ea typeface="+mn-ea"/>
+                        <a:cs typeface="+mn-cs"/>
+                      </a:endParaRPr>
+                    </a:p>
+                    <a:p>
+                      <a:pPr marL="0" marR="0" lvl="0" indent="0" algn="ctr" defTabSz="914400" rtl="0" eaLnBrk="1" fontAlgn="auto" latinLnBrk="1" hangingPunct="1">
+                        <a:lnSpc>
+                          <a:spcPct val="100000"/>
+                        </a:lnSpc>
+                        <a:spcBef>
+                          <a:spcPts val="0"/>
+                        </a:spcBef>
+                        <a:spcAft>
+                          <a:spcPts val="0"/>
+                        </a:spcAft>
+                        <a:buClrTx/>
+                        <a:buSzTx/>
+                        <a:buFontTx/>
+                        <a:buNone/>
+                        <a:tabLst/>
+                        <a:defRPr/>
+                      </a:pPr>
+                      <a:r>
+                        <a:rPr kumimoji="0" lang="en-US" altLang="ko-KR" sz="1200" b="0" i="0" u="none" strike="noStrike" kern="1200" cap="none" spc="0" normalizeH="0" baseline="0" noProof="0" dirty="0">
+                          <a:ln>
+                            <a:noFill/>
+                          </a:ln>
+                          <a:solidFill>
+                            <a:schemeClr val="tx1"/>
+                          </a:solidFill>
+                          <a:effectLst/>
+                          <a:uLnTx/>
+                          <a:uFillTx/>
+                          <a:latin typeface="Segoe UI"/>
+                          <a:ea typeface="+mn-ea"/>
+                          <a:cs typeface="+mn-cs"/>
+                        </a:rPr>
+                        <a:t>0.02</a:t>
+                      </a:r>
+                      <a:endParaRPr kumimoji="0" lang="ko-KR" altLang="en-US" sz="1200" b="0" i="0" u="none" strike="noStrike" kern="1200" cap="none" spc="0" normalizeH="0" baseline="0" noProof="0" dirty="0">
+                        <a:ln>
+                          <a:noFill/>
+                        </a:ln>
+                        <a:solidFill>
+                          <a:schemeClr val="tx1"/>
+                        </a:solidFill>
+                        <a:effectLst/>
+                        <a:uLnTx/>
+                        <a:uFillTx/>
+                        <a:latin typeface="Segoe UI"/>
+                        <a:ea typeface="+mn-ea"/>
+                        <a:cs typeface="+mn-cs"/>
+                      </a:endParaRPr>
+                    </a:p>
+                  </a:txBody>
+                  <a:tcPr marL="67388" marR="67388" marT="33693" marB="33693"/>
+                </a:tc>
+                <a:tc>
+                  <a:txBody>
+                    <a:bodyPr/>
+                    <a:lstStyle/>
+                    <a:p>
+                      <a:pPr marL="0" marR="0" lvl="0" indent="0" algn="ctr" defTabSz="914400" rtl="0" eaLnBrk="1" fontAlgn="auto" latinLnBrk="1" hangingPunct="1">
+                        <a:lnSpc>
+                          <a:spcPct val="100000"/>
+                        </a:lnSpc>
+                        <a:spcBef>
+                          <a:spcPts val="0"/>
+                        </a:spcBef>
+                        <a:spcAft>
+                          <a:spcPts val="0"/>
+                        </a:spcAft>
+                        <a:buClrTx/>
+                        <a:buSzTx/>
+                        <a:buFontTx/>
+                        <a:buNone/>
+                        <a:tabLst/>
+                        <a:defRPr/>
+                      </a:pPr>
+                      <a:endParaRPr kumimoji="0" lang="en-US" altLang="ko-KR" sz="1200" b="0" i="0" u="none" strike="noStrike" kern="1200" cap="none" spc="0" normalizeH="0" baseline="0" noProof="0" dirty="0">
+                        <a:ln>
+                          <a:noFill/>
+                        </a:ln>
+                        <a:solidFill>
+                          <a:schemeClr val="bg1"/>
+                        </a:solidFill>
+                        <a:effectLst/>
+                        <a:uLnTx/>
+                        <a:uFillTx/>
+                        <a:latin typeface="Segoe UI"/>
+                        <a:ea typeface="+mn-ea"/>
+                        <a:cs typeface="+mn-cs"/>
+                      </a:endParaRPr>
+                    </a:p>
+                    <a:p>
+                      <a:pPr marL="0" marR="0" lvl="0" indent="0" algn="ctr" defTabSz="914400" rtl="0" eaLnBrk="1" fontAlgn="auto" latinLnBrk="1" hangingPunct="1">
+                        <a:lnSpc>
+                          <a:spcPct val="100000"/>
+                        </a:lnSpc>
+                        <a:spcBef>
+                          <a:spcPts val="0"/>
+                        </a:spcBef>
+                        <a:spcAft>
+                          <a:spcPts val="0"/>
+                        </a:spcAft>
+                        <a:buClrTx/>
+                        <a:buSzTx/>
+                        <a:buFontTx/>
+                        <a:buNone/>
+                        <a:tabLst/>
+                        <a:defRPr/>
+                      </a:pPr>
+                      <a:endParaRPr kumimoji="0" lang="en-US" altLang="ko-KR" sz="1200" b="0" i="0" u="none" strike="noStrike" kern="1200" cap="none" spc="0" normalizeH="0" baseline="0" noProof="0" dirty="0">
+                        <a:ln>
+                          <a:noFill/>
+                        </a:ln>
+                        <a:solidFill>
+                          <a:schemeClr val="bg1"/>
+                        </a:solidFill>
+                        <a:effectLst/>
+                        <a:uLnTx/>
+                        <a:uFillTx/>
+                        <a:latin typeface="Segoe UI"/>
+                        <a:ea typeface="+mn-ea"/>
+                        <a:cs typeface="+mn-cs"/>
+                      </a:endParaRPr>
+                    </a:p>
+                    <a:p>
+                      <a:pPr marL="0" marR="0" lvl="0" indent="0" algn="ctr" defTabSz="914400" rtl="0" eaLnBrk="1" fontAlgn="auto" latinLnBrk="1" hangingPunct="1">
+                        <a:lnSpc>
+                          <a:spcPct val="100000"/>
+                        </a:lnSpc>
+                        <a:spcBef>
+                          <a:spcPts val="0"/>
+                        </a:spcBef>
+                        <a:spcAft>
+                          <a:spcPts val="0"/>
+                        </a:spcAft>
+                        <a:buClrTx/>
+                        <a:buSzTx/>
+                        <a:buFontTx/>
+                        <a:buNone/>
+                        <a:tabLst/>
+                        <a:defRPr/>
+                      </a:pPr>
+                      <a:endParaRPr kumimoji="0" lang="en-US" altLang="ko-KR" sz="1200" b="0" i="0" u="none" strike="noStrike" kern="1200" cap="none" spc="0" normalizeH="0" baseline="0" noProof="0" dirty="0">
+                        <a:ln>
+                          <a:noFill/>
+                        </a:ln>
+                        <a:solidFill>
+                          <a:schemeClr val="bg1"/>
+                        </a:solidFill>
+                        <a:effectLst/>
+                        <a:uLnTx/>
+                        <a:uFillTx/>
+                        <a:latin typeface="Segoe UI"/>
+                        <a:ea typeface="+mn-ea"/>
+                        <a:cs typeface="+mn-cs"/>
+                      </a:endParaRPr>
+                    </a:p>
+                    <a:p>
+                      <a:pPr marL="0" marR="0" lvl="0" indent="0" algn="ctr" defTabSz="914400" rtl="0" eaLnBrk="1" fontAlgn="auto" latinLnBrk="1" hangingPunct="1">
+                        <a:lnSpc>
+                          <a:spcPct val="100000"/>
+                        </a:lnSpc>
+                        <a:spcBef>
+                          <a:spcPts val="0"/>
+                        </a:spcBef>
+                        <a:spcAft>
+                          <a:spcPts val="0"/>
+                        </a:spcAft>
+                        <a:buClrTx/>
+                        <a:buSzTx/>
+                        <a:buFontTx/>
+                        <a:buNone/>
+                        <a:tabLst/>
+                        <a:defRPr/>
+                      </a:pPr>
+                      <a:r>
+                        <a:rPr kumimoji="0" lang="en-US" altLang="ko-KR" sz="1200" b="0" i="0" u="none" strike="noStrike" kern="1200" cap="none" spc="0" normalizeH="0" baseline="0" noProof="0" dirty="0">
+                          <a:ln>
+                            <a:noFill/>
+                          </a:ln>
+                          <a:solidFill>
+                            <a:schemeClr val="tx1"/>
+                          </a:solidFill>
+                          <a:effectLst/>
+                          <a:uLnTx/>
+                          <a:uFillTx/>
+                          <a:latin typeface="Segoe UI"/>
+                          <a:ea typeface="+mn-ea"/>
+                          <a:cs typeface="+mn-cs"/>
+                        </a:rPr>
+                        <a:t>0.95</a:t>
+                      </a:r>
+                      <a:endParaRPr kumimoji="0" lang="ko-KR" altLang="en-US" sz="1200" b="0" i="0" u="none" strike="noStrike" kern="1200" cap="none" spc="0" normalizeH="0" baseline="0" noProof="0" dirty="0">
+                        <a:ln>
+                          <a:noFill/>
+                        </a:ln>
+                        <a:solidFill>
+                          <a:schemeClr val="tx1"/>
+                        </a:solidFill>
+                        <a:effectLst/>
+                        <a:uLnTx/>
+                        <a:uFillTx/>
+                        <a:latin typeface="Segoe UI"/>
+                        <a:ea typeface="+mn-ea"/>
+                        <a:cs typeface="+mn-cs"/>
+                      </a:endParaRPr>
+                    </a:p>
+                  </a:txBody>
+                  <a:tcPr marL="67388" marR="67388" marT="33693" marB="33693"/>
+                </a:tc>
+                <a:tc>
+                  <a:txBody>
+                    <a:bodyPr/>
+                    <a:lstStyle/>
+                    <a:p>
+                      <a:pPr marL="0" marR="0" lvl="0" indent="0" algn="ctr" defTabSz="914400" rtl="0" eaLnBrk="1" fontAlgn="auto" latinLnBrk="1" hangingPunct="1">
+                        <a:lnSpc>
+                          <a:spcPct val="100000"/>
+                        </a:lnSpc>
+                        <a:spcBef>
+                          <a:spcPts val="0"/>
+                        </a:spcBef>
+                        <a:spcAft>
+                          <a:spcPts val="0"/>
+                        </a:spcAft>
+                        <a:buClrTx/>
+                        <a:buSzTx/>
+                        <a:buFontTx/>
+                        <a:buNone/>
+                        <a:tabLst/>
+                        <a:defRPr/>
+                      </a:pPr>
+                      <a:endParaRPr kumimoji="0" lang="en-US" altLang="ko-KR" sz="1200" b="0" i="0" u="none" strike="noStrike" kern="1200" cap="none" spc="0" normalizeH="0" baseline="0" noProof="0" dirty="0">
+                        <a:ln>
+                          <a:noFill/>
+                        </a:ln>
+                        <a:solidFill>
+                          <a:schemeClr val="tx1"/>
+                        </a:solidFill>
+                        <a:effectLst/>
+                        <a:uLnTx/>
+                        <a:uFillTx/>
+                        <a:latin typeface="Segoe UI"/>
+                        <a:ea typeface="+mn-ea"/>
+                        <a:cs typeface="+mn-cs"/>
+                      </a:endParaRPr>
+                    </a:p>
+                    <a:p>
+                      <a:pPr marL="0" marR="0" lvl="0" indent="0" algn="ctr" defTabSz="914400" rtl="0" eaLnBrk="1" fontAlgn="auto" latinLnBrk="1" hangingPunct="1">
+                        <a:lnSpc>
+                          <a:spcPct val="100000"/>
+                        </a:lnSpc>
+                        <a:spcBef>
+                          <a:spcPts val="0"/>
+                        </a:spcBef>
+                        <a:spcAft>
+                          <a:spcPts val="0"/>
+                        </a:spcAft>
+                        <a:buClrTx/>
+                        <a:buSzTx/>
+                        <a:buFontTx/>
+                        <a:buNone/>
+                        <a:tabLst/>
+                        <a:defRPr/>
+                      </a:pPr>
+                      <a:endParaRPr kumimoji="0" lang="en-US" altLang="ko-KR" sz="1200" b="0" i="0" u="none" strike="noStrike" kern="1200" cap="none" spc="0" normalizeH="0" baseline="0" noProof="0" dirty="0">
+                        <a:ln>
+                          <a:noFill/>
+                        </a:ln>
+                        <a:solidFill>
+                          <a:schemeClr val="tx1"/>
+                        </a:solidFill>
+                        <a:effectLst/>
+                        <a:uLnTx/>
+                        <a:uFillTx/>
+                        <a:latin typeface="Segoe UI"/>
+                        <a:ea typeface="+mn-ea"/>
+                        <a:cs typeface="+mn-cs"/>
+                      </a:endParaRPr>
+                    </a:p>
+                    <a:p>
+                      <a:pPr marL="0" marR="0" lvl="0" indent="0" algn="ctr" defTabSz="914400" rtl="0" eaLnBrk="1" fontAlgn="auto" latinLnBrk="1" hangingPunct="1">
+                        <a:lnSpc>
+                          <a:spcPct val="100000"/>
+                        </a:lnSpc>
+                        <a:spcBef>
+                          <a:spcPts val="0"/>
+                        </a:spcBef>
+                        <a:spcAft>
+                          <a:spcPts val="0"/>
+                        </a:spcAft>
+                        <a:buClrTx/>
+                        <a:buSzTx/>
+                        <a:buFontTx/>
+                        <a:buNone/>
+                        <a:tabLst/>
+                        <a:defRPr/>
+                      </a:pPr>
+                      <a:endParaRPr kumimoji="0" lang="en-US" altLang="ko-KR" sz="1200" b="0" i="0" u="none" strike="noStrike" kern="1200" cap="none" spc="0" normalizeH="0" baseline="0" noProof="0" dirty="0">
+                        <a:ln>
+                          <a:noFill/>
+                        </a:ln>
+                        <a:solidFill>
+                          <a:schemeClr val="tx1"/>
+                        </a:solidFill>
+                        <a:effectLst/>
+                        <a:uLnTx/>
+                        <a:uFillTx/>
+                        <a:latin typeface="Segoe UI"/>
+                        <a:ea typeface="+mn-ea"/>
+                        <a:cs typeface="+mn-cs"/>
+                      </a:endParaRPr>
+                    </a:p>
+                    <a:p>
+                      <a:pPr marL="0" marR="0" lvl="0" indent="0" algn="ctr" defTabSz="914400" rtl="0" eaLnBrk="1" fontAlgn="auto" latinLnBrk="1" hangingPunct="1">
+                        <a:lnSpc>
+                          <a:spcPct val="100000"/>
+                        </a:lnSpc>
+                        <a:spcBef>
+                          <a:spcPts val="0"/>
+                        </a:spcBef>
+                        <a:spcAft>
+                          <a:spcPts val="0"/>
+                        </a:spcAft>
+                        <a:buClrTx/>
+                        <a:buSzTx/>
+                        <a:buFontTx/>
+                        <a:buNone/>
+                        <a:tabLst/>
+                        <a:defRPr/>
+                      </a:pPr>
+                      <a:r>
+                        <a:rPr kumimoji="0" lang="en-US" altLang="ko-KR" sz="1200" b="0" i="0" u="none" strike="noStrike" kern="1200" cap="none" spc="0" normalizeH="0" baseline="0" noProof="0" dirty="0">
+                          <a:ln>
+                            <a:noFill/>
+                          </a:ln>
+                          <a:solidFill>
+                            <a:schemeClr val="tx1"/>
+                          </a:solidFill>
+                          <a:effectLst/>
+                          <a:uLnTx/>
+                          <a:uFillTx/>
+                          <a:latin typeface="Segoe UI"/>
+                          <a:ea typeface="+mn-ea"/>
+                          <a:cs typeface="+mn-cs"/>
+                        </a:rPr>
+                        <a:t>0.56</a:t>
+                      </a:r>
+                      <a:endParaRPr kumimoji="0" lang="ko-KR" altLang="en-US" sz="1200" b="0" i="0" u="none" strike="noStrike" kern="1200" cap="none" spc="0" normalizeH="0" baseline="0" noProof="0" dirty="0">
+                        <a:ln>
+                          <a:noFill/>
+                        </a:ln>
+                        <a:solidFill>
+                          <a:schemeClr val="tx1"/>
+                        </a:solidFill>
+                        <a:effectLst/>
+                        <a:uLnTx/>
+                        <a:uFillTx/>
+                        <a:latin typeface="Segoe UI"/>
+                        <a:ea typeface="+mn-ea"/>
+                        <a:cs typeface="+mn-cs"/>
+                      </a:endParaRPr>
+                    </a:p>
+                  </a:txBody>
+                  <a:tcPr marL="67388" marR="67388" marT="33693" marB="33693"/>
+                </a:tc>
+                <a:extLst>
+                  <a:ext uri="{0D108BD9-81ED-4DB2-BD59-A6C34878D82A}">
+                    <a16:rowId xmlns:a16="http://schemas.microsoft.com/office/drawing/2014/main" val="4097710734"/>
+                  </a:ext>
+                </a:extLst>
+              </a:tr>
+              <a:tr h="829348">
+                <a:tc>
+                  <a:txBody>
+                    <a:bodyPr/>
+                    <a:lstStyle/>
+                    <a:p>
+                      <a:pPr marL="0" marR="0" lvl="0" indent="0" algn="ctr" defTabSz="914400" rtl="0" eaLnBrk="1" fontAlgn="auto" latinLnBrk="1" hangingPunct="1">
+                        <a:lnSpc>
+                          <a:spcPct val="100000"/>
+                        </a:lnSpc>
+                        <a:spcBef>
+                          <a:spcPts val="0"/>
+                        </a:spcBef>
+                        <a:spcAft>
+                          <a:spcPts val="0"/>
+                        </a:spcAft>
+                        <a:buClrTx/>
+                        <a:buSzTx/>
+                        <a:buFontTx/>
+                        <a:buNone/>
+                        <a:tabLst/>
+                        <a:defRPr/>
+                      </a:pPr>
+                      <a:endParaRPr kumimoji="0" lang="en-US" altLang="ko-KR" sz="1200" b="0" i="0" u="none" strike="noStrike" kern="1200" cap="none" spc="0" normalizeH="0" baseline="0" noProof="0" dirty="0">
+                        <a:ln>
+                          <a:noFill/>
+                        </a:ln>
+                        <a:solidFill>
+                          <a:schemeClr val="tx1"/>
+                        </a:solidFill>
+                        <a:effectLst/>
+                        <a:uLnTx/>
+                        <a:uFillTx/>
+                        <a:latin typeface="Segoe UI"/>
+                        <a:ea typeface="+mn-ea"/>
+                        <a:cs typeface="+mn-cs"/>
+                      </a:endParaRPr>
+                    </a:p>
+                    <a:p>
+                      <a:pPr marL="0" marR="0" lvl="0" indent="0" algn="ctr" defTabSz="914400" rtl="0" eaLnBrk="1" fontAlgn="auto" latinLnBrk="1" hangingPunct="1">
+                        <a:lnSpc>
+                          <a:spcPct val="100000"/>
+                        </a:lnSpc>
+                        <a:spcBef>
+                          <a:spcPts val="0"/>
+                        </a:spcBef>
+                        <a:spcAft>
+                          <a:spcPts val="0"/>
+                        </a:spcAft>
+                        <a:buClrTx/>
+                        <a:buSzTx/>
+                        <a:buFontTx/>
+                        <a:buNone/>
+                        <a:tabLst/>
+                        <a:defRPr/>
+                      </a:pPr>
+                      <a:endParaRPr kumimoji="0" lang="en-US" altLang="ko-KR" sz="1200" b="0" i="0" u="none" strike="noStrike" kern="1200" cap="none" spc="0" normalizeH="0" baseline="0" noProof="0" dirty="0">
+                        <a:ln>
+                          <a:noFill/>
+                        </a:ln>
+                        <a:solidFill>
+                          <a:schemeClr val="tx1"/>
+                        </a:solidFill>
+                        <a:effectLst/>
+                        <a:uLnTx/>
+                        <a:uFillTx/>
+                        <a:latin typeface="Segoe UI"/>
+                        <a:ea typeface="+mn-ea"/>
+                        <a:cs typeface="+mn-cs"/>
+                      </a:endParaRPr>
+                    </a:p>
+                    <a:p>
+                      <a:pPr marL="0" marR="0" lvl="0" indent="0" algn="ctr" defTabSz="914400" rtl="0" eaLnBrk="1" fontAlgn="auto" latinLnBrk="1" hangingPunct="1">
+                        <a:lnSpc>
+                          <a:spcPct val="100000"/>
+                        </a:lnSpc>
+                        <a:spcBef>
+                          <a:spcPts val="0"/>
+                        </a:spcBef>
+                        <a:spcAft>
+                          <a:spcPts val="0"/>
+                        </a:spcAft>
+                        <a:buClrTx/>
+                        <a:buSzTx/>
+                        <a:buFontTx/>
+                        <a:buNone/>
+                        <a:tabLst/>
+                        <a:defRPr/>
+                      </a:pPr>
+                      <a:endParaRPr kumimoji="0" lang="en-US" altLang="ko-KR" sz="1200" b="0" i="0" u="none" strike="noStrike" kern="1200" cap="none" spc="0" normalizeH="0" baseline="0" noProof="0" dirty="0">
+                        <a:ln>
+                          <a:noFill/>
+                        </a:ln>
+                        <a:solidFill>
+                          <a:schemeClr val="tx1"/>
+                        </a:solidFill>
+                        <a:effectLst/>
+                        <a:uLnTx/>
+                        <a:uFillTx/>
+                        <a:latin typeface="Segoe UI"/>
+                        <a:ea typeface="+mn-ea"/>
+                        <a:cs typeface="+mn-cs"/>
+                      </a:endParaRPr>
+                    </a:p>
+                    <a:p>
+                      <a:pPr marL="0" marR="0" lvl="0" indent="0" algn="ctr" defTabSz="914400" rtl="0" eaLnBrk="1" fontAlgn="auto" latinLnBrk="1" hangingPunct="1">
+                        <a:lnSpc>
+                          <a:spcPct val="100000"/>
+                        </a:lnSpc>
+                        <a:spcBef>
+                          <a:spcPts val="0"/>
+                        </a:spcBef>
+                        <a:spcAft>
+                          <a:spcPts val="0"/>
+                        </a:spcAft>
+                        <a:buClrTx/>
+                        <a:buSzTx/>
+                        <a:buFontTx/>
+                        <a:buNone/>
+                        <a:tabLst/>
+                        <a:defRPr/>
+                      </a:pPr>
+                      <a:r>
+                        <a:rPr kumimoji="0" lang="en-US" altLang="ko-KR" sz="1200" b="0" i="0" u="none" strike="noStrike" kern="1200" cap="none" spc="0" normalizeH="0" baseline="0" noProof="0" dirty="0">
+                          <a:ln>
+                            <a:noFill/>
+                          </a:ln>
+                          <a:solidFill>
+                            <a:schemeClr val="tx1"/>
+                          </a:solidFill>
+                          <a:effectLst/>
+                          <a:uLnTx/>
+                          <a:uFillTx/>
+                          <a:latin typeface="Segoe UI"/>
+                          <a:ea typeface="+mn-ea"/>
+                          <a:cs typeface="+mn-cs"/>
+                        </a:rPr>
+                        <a:t>0.02</a:t>
+                      </a:r>
+                      <a:endParaRPr kumimoji="0" lang="ko-KR" altLang="en-US" sz="1200" b="0" i="0" u="none" strike="noStrike" kern="1200" cap="none" spc="0" normalizeH="0" baseline="0" noProof="0" dirty="0">
+                        <a:ln>
+                          <a:noFill/>
+                        </a:ln>
+                        <a:solidFill>
+                          <a:schemeClr val="tx1"/>
+                        </a:solidFill>
+                        <a:effectLst/>
+                        <a:uLnTx/>
+                        <a:uFillTx/>
+                        <a:latin typeface="Segoe UI"/>
+                        <a:ea typeface="+mn-ea"/>
+                        <a:cs typeface="+mn-cs"/>
+                      </a:endParaRPr>
+                    </a:p>
+                  </a:txBody>
+                  <a:tcPr marL="67388" marR="67388" marT="33693" marB="33693"/>
+                </a:tc>
+                <a:tc>
+                  <a:txBody>
+                    <a:bodyPr/>
+                    <a:lstStyle/>
+                    <a:p>
+                      <a:pPr marL="0" marR="0" lvl="0" indent="0" algn="ctr" defTabSz="914400" rtl="0" eaLnBrk="1" fontAlgn="auto" latinLnBrk="1" hangingPunct="1">
+                        <a:lnSpc>
+                          <a:spcPct val="100000"/>
+                        </a:lnSpc>
+                        <a:spcBef>
+                          <a:spcPts val="0"/>
+                        </a:spcBef>
+                        <a:spcAft>
+                          <a:spcPts val="0"/>
+                        </a:spcAft>
+                        <a:buClrTx/>
+                        <a:buSzTx/>
+                        <a:buFontTx/>
+                        <a:buNone/>
+                        <a:tabLst/>
+                        <a:defRPr/>
+                      </a:pPr>
+                      <a:endParaRPr kumimoji="0" lang="en-US" altLang="ko-KR" sz="1200" b="0" i="0" u="none" strike="noStrike" kern="1200" cap="none" spc="0" normalizeH="0" baseline="0" noProof="0" dirty="0">
+                        <a:ln>
+                          <a:noFill/>
+                        </a:ln>
+                        <a:solidFill>
+                          <a:schemeClr val="tx1"/>
+                        </a:solidFill>
+                        <a:effectLst/>
+                        <a:uLnTx/>
+                        <a:uFillTx/>
+                        <a:latin typeface="Segoe UI"/>
+                        <a:ea typeface="+mn-ea"/>
+                        <a:cs typeface="+mn-cs"/>
+                      </a:endParaRPr>
+                    </a:p>
+                    <a:p>
+                      <a:pPr marL="0" marR="0" lvl="0" indent="0" algn="ctr" defTabSz="914400" rtl="0" eaLnBrk="1" fontAlgn="auto" latinLnBrk="1" hangingPunct="1">
+                        <a:lnSpc>
+                          <a:spcPct val="100000"/>
+                        </a:lnSpc>
+                        <a:spcBef>
+                          <a:spcPts val="0"/>
+                        </a:spcBef>
+                        <a:spcAft>
+                          <a:spcPts val="0"/>
+                        </a:spcAft>
+                        <a:buClrTx/>
+                        <a:buSzTx/>
+                        <a:buFontTx/>
+                        <a:buNone/>
+                        <a:tabLst/>
+                        <a:defRPr/>
+                      </a:pPr>
+                      <a:endParaRPr kumimoji="0" lang="en-US" altLang="ko-KR" sz="1200" b="0" i="0" u="none" strike="noStrike" kern="1200" cap="none" spc="0" normalizeH="0" baseline="0" noProof="0" dirty="0">
+                        <a:ln>
+                          <a:noFill/>
+                        </a:ln>
+                        <a:solidFill>
+                          <a:schemeClr val="tx1"/>
+                        </a:solidFill>
+                        <a:effectLst/>
+                        <a:uLnTx/>
+                        <a:uFillTx/>
+                        <a:latin typeface="Segoe UI"/>
+                        <a:ea typeface="+mn-ea"/>
+                        <a:cs typeface="+mn-cs"/>
+                      </a:endParaRPr>
+                    </a:p>
+                    <a:p>
+                      <a:pPr marL="0" marR="0" lvl="0" indent="0" algn="ctr" defTabSz="914400" rtl="0" eaLnBrk="1" fontAlgn="auto" latinLnBrk="1" hangingPunct="1">
+                        <a:lnSpc>
+                          <a:spcPct val="100000"/>
+                        </a:lnSpc>
+                        <a:spcBef>
+                          <a:spcPts val="0"/>
+                        </a:spcBef>
+                        <a:spcAft>
+                          <a:spcPts val="0"/>
+                        </a:spcAft>
+                        <a:buClrTx/>
+                        <a:buSzTx/>
+                        <a:buFontTx/>
+                        <a:buNone/>
+                        <a:tabLst/>
+                        <a:defRPr/>
+                      </a:pPr>
+                      <a:endParaRPr kumimoji="0" lang="en-US" altLang="ko-KR" sz="1200" b="0" i="0" u="none" strike="noStrike" kern="1200" cap="none" spc="0" normalizeH="0" baseline="0" noProof="0" dirty="0">
+                        <a:ln>
+                          <a:noFill/>
+                        </a:ln>
+                        <a:solidFill>
+                          <a:schemeClr val="tx1"/>
+                        </a:solidFill>
+                        <a:effectLst/>
+                        <a:uLnTx/>
+                        <a:uFillTx/>
+                        <a:latin typeface="Segoe UI"/>
+                        <a:ea typeface="+mn-ea"/>
+                        <a:cs typeface="+mn-cs"/>
+                      </a:endParaRPr>
+                    </a:p>
+                    <a:p>
+                      <a:pPr marL="0" marR="0" lvl="0" indent="0" algn="ctr" defTabSz="914400" rtl="0" eaLnBrk="1" fontAlgn="auto" latinLnBrk="1" hangingPunct="1">
+                        <a:lnSpc>
+                          <a:spcPct val="100000"/>
+                        </a:lnSpc>
+                        <a:spcBef>
+                          <a:spcPts val="0"/>
+                        </a:spcBef>
+                        <a:spcAft>
+                          <a:spcPts val="0"/>
+                        </a:spcAft>
+                        <a:buClrTx/>
+                        <a:buSzTx/>
+                        <a:buFontTx/>
+                        <a:buNone/>
+                        <a:tabLst/>
+                        <a:defRPr/>
+                      </a:pPr>
+                      <a:r>
+                        <a:rPr kumimoji="0" lang="en-US" altLang="ko-KR" sz="1200" b="0" i="0" u="none" strike="noStrike" kern="1200" cap="none" spc="0" normalizeH="0" baseline="0" noProof="0" dirty="0">
+                          <a:ln>
+                            <a:noFill/>
+                          </a:ln>
+                          <a:solidFill>
+                            <a:schemeClr val="tx1"/>
+                          </a:solidFill>
+                          <a:effectLst/>
+                          <a:uLnTx/>
+                          <a:uFillTx/>
+                          <a:latin typeface="Segoe UI"/>
+                          <a:ea typeface="+mn-ea"/>
+                          <a:cs typeface="+mn-cs"/>
+                        </a:rPr>
+                        <a:t>0.03</a:t>
+                      </a:r>
+                      <a:endParaRPr kumimoji="0" lang="ko-KR" altLang="en-US" sz="1200" b="0" i="0" u="none" strike="noStrike" kern="1200" cap="none" spc="0" normalizeH="0" baseline="0" noProof="0" dirty="0">
+                        <a:ln>
+                          <a:noFill/>
+                        </a:ln>
+                        <a:solidFill>
+                          <a:schemeClr val="tx1"/>
+                        </a:solidFill>
+                        <a:effectLst/>
+                        <a:uLnTx/>
+                        <a:uFillTx/>
+                        <a:latin typeface="Segoe UI"/>
+                        <a:ea typeface="+mn-ea"/>
+                        <a:cs typeface="+mn-cs"/>
+                      </a:endParaRPr>
+                    </a:p>
+                  </a:txBody>
+                  <a:tcPr marL="67388" marR="67388" marT="33693" marB="33693"/>
+                </a:tc>
+                <a:tc>
+                  <a:txBody>
+                    <a:bodyPr/>
+                    <a:lstStyle/>
+                    <a:p>
+                      <a:pPr marL="0" marR="0" lvl="0" indent="0" algn="ctr" defTabSz="914400" rtl="0" eaLnBrk="1" fontAlgn="auto" latinLnBrk="1" hangingPunct="1">
+                        <a:lnSpc>
+                          <a:spcPct val="100000"/>
+                        </a:lnSpc>
+                        <a:spcBef>
+                          <a:spcPts val="0"/>
+                        </a:spcBef>
+                        <a:spcAft>
+                          <a:spcPts val="0"/>
+                        </a:spcAft>
+                        <a:buClrTx/>
+                        <a:buSzTx/>
+                        <a:buFontTx/>
+                        <a:buNone/>
+                        <a:tabLst/>
+                        <a:defRPr/>
+                      </a:pPr>
+                      <a:endParaRPr kumimoji="0" lang="en-US" altLang="ko-KR" sz="1200" b="0" i="0" u="none" strike="noStrike" kern="1200" cap="none" spc="0" normalizeH="0" baseline="0" noProof="0" dirty="0">
+                        <a:ln>
+                          <a:noFill/>
+                        </a:ln>
+                        <a:solidFill>
+                          <a:schemeClr val="tx1"/>
+                        </a:solidFill>
+                        <a:effectLst/>
+                        <a:uLnTx/>
+                        <a:uFillTx/>
+                        <a:latin typeface="Segoe UI"/>
+                        <a:ea typeface="+mn-ea"/>
+                        <a:cs typeface="+mn-cs"/>
+                      </a:endParaRPr>
+                    </a:p>
+                    <a:p>
+                      <a:pPr marL="0" marR="0" lvl="0" indent="0" algn="ctr" defTabSz="914400" rtl="0" eaLnBrk="1" fontAlgn="auto" latinLnBrk="1" hangingPunct="1">
+                        <a:lnSpc>
+                          <a:spcPct val="100000"/>
+                        </a:lnSpc>
+                        <a:spcBef>
+                          <a:spcPts val="0"/>
+                        </a:spcBef>
+                        <a:spcAft>
+                          <a:spcPts val="0"/>
+                        </a:spcAft>
+                        <a:buClrTx/>
+                        <a:buSzTx/>
+                        <a:buFontTx/>
+                        <a:buNone/>
+                        <a:tabLst/>
+                        <a:defRPr/>
+                      </a:pPr>
+                      <a:endParaRPr kumimoji="0" lang="en-US" altLang="ko-KR" sz="1200" b="0" i="0" u="none" strike="noStrike" kern="1200" cap="none" spc="0" normalizeH="0" baseline="0" noProof="0" dirty="0">
+                        <a:ln>
+                          <a:noFill/>
+                        </a:ln>
+                        <a:solidFill>
+                          <a:schemeClr val="tx1"/>
+                        </a:solidFill>
+                        <a:effectLst/>
+                        <a:uLnTx/>
+                        <a:uFillTx/>
+                        <a:latin typeface="Segoe UI"/>
+                        <a:ea typeface="+mn-ea"/>
+                        <a:cs typeface="+mn-cs"/>
+                      </a:endParaRPr>
+                    </a:p>
+                    <a:p>
+                      <a:pPr marL="0" marR="0" lvl="0" indent="0" algn="ctr" defTabSz="914400" rtl="0" eaLnBrk="1" fontAlgn="auto" latinLnBrk="1" hangingPunct="1">
+                        <a:lnSpc>
+                          <a:spcPct val="100000"/>
+                        </a:lnSpc>
+                        <a:spcBef>
+                          <a:spcPts val="0"/>
+                        </a:spcBef>
+                        <a:spcAft>
+                          <a:spcPts val="0"/>
+                        </a:spcAft>
+                        <a:buClrTx/>
+                        <a:buSzTx/>
+                        <a:buFontTx/>
+                        <a:buNone/>
+                        <a:tabLst/>
+                        <a:defRPr/>
+                      </a:pPr>
+                      <a:endParaRPr kumimoji="0" lang="en-US" altLang="ko-KR" sz="1200" b="0" i="0" u="none" strike="noStrike" kern="1200" cap="none" spc="0" normalizeH="0" baseline="0" noProof="0" dirty="0">
+                        <a:ln>
+                          <a:noFill/>
+                        </a:ln>
+                        <a:solidFill>
+                          <a:schemeClr val="tx1"/>
+                        </a:solidFill>
+                        <a:effectLst/>
+                        <a:uLnTx/>
+                        <a:uFillTx/>
+                        <a:latin typeface="Segoe UI"/>
+                        <a:ea typeface="+mn-ea"/>
+                        <a:cs typeface="+mn-cs"/>
+                      </a:endParaRPr>
+                    </a:p>
+                    <a:p>
+                      <a:pPr marL="0" marR="0" lvl="0" indent="0" algn="ctr" defTabSz="914400" rtl="0" eaLnBrk="1" fontAlgn="auto" latinLnBrk="1" hangingPunct="1">
+                        <a:lnSpc>
+                          <a:spcPct val="100000"/>
+                        </a:lnSpc>
+                        <a:spcBef>
+                          <a:spcPts val="0"/>
+                        </a:spcBef>
+                        <a:spcAft>
+                          <a:spcPts val="0"/>
+                        </a:spcAft>
+                        <a:buClrTx/>
+                        <a:buSzTx/>
+                        <a:buFontTx/>
+                        <a:buNone/>
+                        <a:tabLst/>
+                        <a:defRPr/>
+                      </a:pPr>
+                      <a:r>
+                        <a:rPr kumimoji="0" lang="en-US" altLang="ko-KR" sz="1200" b="0" i="0" u="none" strike="noStrike" kern="1200" cap="none" spc="0" normalizeH="0" baseline="0" noProof="0" dirty="0">
+                          <a:ln>
+                            <a:noFill/>
+                          </a:ln>
+                          <a:solidFill>
+                            <a:schemeClr val="tx1"/>
+                          </a:solidFill>
+                          <a:effectLst/>
+                          <a:uLnTx/>
+                          <a:uFillTx/>
+                          <a:latin typeface="Segoe UI"/>
+                          <a:ea typeface="+mn-ea"/>
+                          <a:cs typeface="+mn-cs"/>
+                        </a:rPr>
+                        <a:t>0.01</a:t>
+                      </a:r>
+                      <a:endParaRPr kumimoji="0" lang="ko-KR" altLang="en-US" sz="1200" b="0" i="0" u="none" strike="noStrike" kern="1200" cap="none" spc="0" normalizeH="0" baseline="0" noProof="0" dirty="0">
+                        <a:ln>
+                          <a:noFill/>
+                        </a:ln>
+                        <a:solidFill>
+                          <a:schemeClr val="tx1"/>
+                        </a:solidFill>
+                        <a:effectLst/>
+                        <a:uLnTx/>
+                        <a:uFillTx/>
+                        <a:latin typeface="Segoe UI"/>
+                        <a:ea typeface="+mn-ea"/>
+                        <a:cs typeface="+mn-cs"/>
+                      </a:endParaRPr>
+                    </a:p>
+                  </a:txBody>
+                  <a:tcPr marL="67388" marR="67388" marT="33693" marB="33693"/>
+                </a:tc>
+                <a:extLst>
+                  <a:ext uri="{0D108BD9-81ED-4DB2-BD59-A6C34878D82A}">
+                    <a16:rowId xmlns:a16="http://schemas.microsoft.com/office/drawing/2014/main" val="3232772719"/>
+                  </a:ext>
+                </a:extLst>
+              </a:tr>
+            </a:tbl>
+          </a:graphicData>
+        </a:graphic>
+      </p:graphicFrame>
+      <p:pic>
+        <p:nvPicPr>
+          <p:cNvPr id="47" name="그래픽 46" descr="트럭">
+            <a:extLst>
+              <a:ext uri="{FF2B5EF4-FFF2-40B4-BE49-F238E27FC236}">
+                <a16:creationId xmlns:a16="http://schemas.microsoft.com/office/drawing/2014/main" id="{ACC57C0E-69E3-405B-01E8-D9750FA28226}"/>
+              </a:ext>
+            </a:extLst>
+          </p:cNvPr>
+          <p:cNvPicPr>
+            <a:picLocks noChangeAspect="1"/>
+          </p:cNvPicPr>
+          <p:nvPr/>
+        </p:nvPicPr>
+        <p:blipFill>
+          <a:blip r:embed="rId2">
+            <a:extLst>
+              <a:ext uri="{96DAC541-7B7A-43D3-8B79-37D633B846F1}">
+                <asvg:svgBlip xmlns:asvg="http://schemas.microsoft.com/office/drawing/2016/SVG/main" r:embed="rId3"/>
+              </a:ext>
+            </a:extLst>
+          </a:blip>
+          <a:stretch>
+            <a:fillRect/>
+          </a:stretch>
+        </p:blipFill>
+        <p:spPr>
+          <a:xfrm>
+            <a:off x="1724678" y="3586790"/>
+            <a:ext cx="1234769" cy="1234769"/>
+          </a:xfrm>
+          <a:prstGeom prst="rect">
+            <a:avLst/>
+          </a:prstGeom>
+        </p:spPr>
+      </p:pic>
+      <p:sp>
+        <p:nvSpPr>
+          <p:cNvPr id="48" name="곱하기 기호 47">
+            <a:extLst>
+              <a:ext uri="{FF2B5EF4-FFF2-40B4-BE49-F238E27FC236}">
+                <a16:creationId xmlns:a16="http://schemas.microsoft.com/office/drawing/2014/main" id="{C9559834-CFF6-526D-F332-255CD3C2947C}"/>
+              </a:ext>
+            </a:extLst>
+          </p:cNvPr>
+          <p:cNvSpPr/>
+          <p:nvPr/>
+        </p:nvSpPr>
+        <p:spPr>
+          <a:xfrm>
+            <a:off x="2115456" y="4253264"/>
+            <a:ext cx="185112" cy="184876"/>
+          </a:xfrm>
+          <a:prstGeom prst="mathMultiply">
+            <a:avLst/>
+          </a:prstGeom>
+          <a:solidFill>
+            <a:srgbClr val="FF0000"/>
+          </a:solidFill>
+        </p:spPr>
+        <p:style>
+          <a:lnRef idx="2">
+            <a:schemeClr val="accent1">
+              <a:shade val="15000"/>
+            </a:schemeClr>
+          </a:lnRef>
+          <a:fillRef idx="1">
+            <a:schemeClr val="accent1"/>
+          </a:fillRef>
+          <a:effectRef idx="0">
+            <a:schemeClr val="accent1"/>
+          </a:effectRef>
+          <a:fontRef idx="minor">
+            <a:schemeClr val="lt1"/>
+          </a:fontRef>
+        </p:style>
+        <p:txBody>
+          <a:bodyPr rtlCol="0" anchor="ctr"/>
+          <a:lstStyle/>
+          <a:p>
+            <a:pPr algn="ctr"/>
+            <a:endParaRPr lang="ko-KR" altLang="en-US"/>
+          </a:p>
+        </p:txBody>
+      </p:sp>
+      <p:sp>
+        <p:nvSpPr>
+          <p:cNvPr id="49" name="TextBox 48">
+            <a:extLst>
+              <a:ext uri="{FF2B5EF4-FFF2-40B4-BE49-F238E27FC236}">
+                <a16:creationId xmlns:a16="http://schemas.microsoft.com/office/drawing/2014/main" id="{16DBBA98-0620-8F5F-69BD-D714A7C0DB32}"/>
+              </a:ext>
+            </a:extLst>
+          </p:cNvPr>
+          <p:cNvSpPr txBox="1"/>
+          <p:nvPr/>
+        </p:nvSpPr>
+        <p:spPr>
+          <a:xfrm>
+            <a:off x="603163" y="2537062"/>
+            <a:ext cx="3106857" cy="523220"/>
+          </a:xfrm>
+          <a:prstGeom prst="rect">
+            <a:avLst/>
+          </a:prstGeom>
+          <a:noFill/>
+        </p:spPr>
+        <p:txBody>
+          <a:bodyPr wrap="square">
+            <a:spAutoFit/>
+          </a:bodyPr>
+          <a:lstStyle/>
+          <a:p>
+            <a:r>
+              <a:rPr lang="en-US" altLang="ko-KR" sz="1400" dirty="0">
+                <a:latin typeface="D2Coding" panose="020B0609020101020101" pitchFamily="49" charset="-127"/>
+                <a:ea typeface="D2Coding" panose="020B0609020101020101" pitchFamily="49" charset="-127"/>
+              </a:rPr>
+              <a:t>Tensor[2,2,:] = 0.5,0.5,0.6,0.4 </a:t>
+            </a:r>
+          </a:p>
+          <a:p>
+            <a:r>
+              <a:rPr lang="en-US" altLang="ko-KR" sz="1400" dirty="0">
+                <a:latin typeface="D2Coding" panose="020B0609020101020101" pitchFamily="49" charset="-127"/>
+                <a:ea typeface="D2Coding" panose="020B0609020101020101" pitchFamily="49" charset="-127"/>
+              </a:rPr>
+              <a:t>              = x, y, w, h</a:t>
+            </a:r>
+            <a:endParaRPr lang="ko-KR" altLang="en-US" sz="1400" dirty="0"/>
+          </a:p>
+        </p:txBody>
+      </p:sp>
+      <p:pic>
+        <p:nvPicPr>
+          <p:cNvPr id="51" name="그림 50">
+            <a:extLst>
+              <a:ext uri="{FF2B5EF4-FFF2-40B4-BE49-F238E27FC236}">
+                <a16:creationId xmlns:a16="http://schemas.microsoft.com/office/drawing/2014/main" id="{39DBE5B4-746E-7F63-1528-0F71FA920657}"/>
+              </a:ext>
+            </a:extLst>
+          </p:cNvPr>
+          <p:cNvPicPr>
+            <a:picLocks noChangeAspect="1"/>
+          </p:cNvPicPr>
+          <p:nvPr/>
+        </p:nvPicPr>
+        <p:blipFill>
+          <a:blip r:embed="rId4"/>
+          <a:stretch>
+            <a:fillRect/>
+          </a:stretch>
+        </p:blipFill>
+        <p:spPr>
+          <a:xfrm>
+            <a:off x="4020366" y="3097069"/>
+            <a:ext cx="3122567" cy="2541084"/>
+          </a:xfrm>
+          <a:prstGeom prst="rect">
+            <a:avLst/>
+          </a:prstGeom>
+        </p:spPr>
+      </p:pic>
+      <p:pic>
+        <p:nvPicPr>
+          <p:cNvPr id="56" name="그래픽 55" descr="트럭">
+            <a:extLst>
+              <a:ext uri="{FF2B5EF4-FFF2-40B4-BE49-F238E27FC236}">
+                <a16:creationId xmlns:a16="http://schemas.microsoft.com/office/drawing/2014/main" id="{3B0ED8AE-1AEC-531B-7833-3FD2E202B9FC}"/>
+              </a:ext>
+            </a:extLst>
+          </p:cNvPr>
+          <p:cNvPicPr>
+            <a:picLocks noChangeAspect="1"/>
+          </p:cNvPicPr>
+          <p:nvPr/>
+        </p:nvPicPr>
+        <p:blipFill>
+          <a:blip r:embed="rId2">
+            <a:extLst>
+              <a:ext uri="{96DAC541-7B7A-43D3-8B79-37D633B846F1}">
+                <asvg:svgBlip xmlns:asvg="http://schemas.microsoft.com/office/drawing/2016/SVG/main" r:embed="rId3"/>
+              </a:ext>
+            </a:extLst>
+          </a:blip>
+          <a:stretch>
+            <a:fillRect/>
+          </a:stretch>
+        </p:blipFill>
+        <p:spPr>
+          <a:xfrm>
+            <a:off x="5075044" y="3591041"/>
+            <a:ext cx="1234769" cy="1234769"/>
+          </a:xfrm>
+          <a:prstGeom prst="rect">
+            <a:avLst/>
+          </a:prstGeom>
+        </p:spPr>
+      </p:pic>
+      <p:sp>
+        <p:nvSpPr>
+          <p:cNvPr id="57" name="곱하기 기호 56">
+            <a:extLst>
+              <a:ext uri="{FF2B5EF4-FFF2-40B4-BE49-F238E27FC236}">
+                <a16:creationId xmlns:a16="http://schemas.microsoft.com/office/drawing/2014/main" id="{3C3C6F8B-6E1A-C708-E8EB-563926B46851}"/>
+              </a:ext>
+            </a:extLst>
+          </p:cNvPr>
+          <p:cNvSpPr/>
+          <p:nvPr/>
+        </p:nvSpPr>
+        <p:spPr>
+          <a:xfrm>
+            <a:off x="5477781" y="4262789"/>
+            <a:ext cx="185112" cy="184876"/>
+          </a:xfrm>
+          <a:prstGeom prst="mathMultiply">
+            <a:avLst/>
+          </a:prstGeom>
+          <a:solidFill>
+            <a:srgbClr val="FF0000"/>
+          </a:solidFill>
+        </p:spPr>
+        <p:style>
+          <a:lnRef idx="2">
+            <a:schemeClr val="accent1">
+              <a:shade val="15000"/>
+            </a:schemeClr>
+          </a:lnRef>
+          <a:fillRef idx="1">
+            <a:schemeClr val="accent1"/>
+          </a:fillRef>
+          <a:effectRef idx="0">
+            <a:schemeClr val="accent1"/>
+          </a:effectRef>
+          <a:fontRef idx="minor">
+            <a:schemeClr val="lt1"/>
+          </a:fontRef>
+        </p:style>
+        <p:txBody>
+          <a:bodyPr rtlCol="0" anchor="ctr"/>
+          <a:lstStyle/>
+          <a:p>
+            <a:pPr algn="ctr"/>
+            <a:endParaRPr lang="ko-KR" altLang="en-US"/>
+          </a:p>
+        </p:txBody>
+      </p:sp>
+      <p:cxnSp>
+        <p:nvCxnSpPr>
+          <p:cNvPr id="60" name="연결선: 구부러짐 59">
+            <a:extLst>
+              <a:ext uri="{FF2B5EF4-FFF2-40B4-BE49-F238E27FC236}">
+                <a16:creationId xmlns:a16="http://schemas.microsoft.com/office/drawing/2014/main" id="{2ADC0897-7A6E-B0A0-A15F-EACD2791CC12}"/>
+              </a:ext>
+            </a:extLst>
+          </p:cNvPr>
+          <p:cNvCxnSpPr>
+            <a:stCxn id="57" idx="0"/>
+            <a:endCxn id="9" idx="1"/>
+          </p:cNvCxnSpPr>
+          <p:nvPr/>
+        </p:nvCxnSpPr>
+        <p:spPr>
+          <a:xfrm rot="10800000">
+            <a:off x="5249494" y="2228948"/>
+            <a:ext cx="272746" cy="2078244"/>
+          </a:xfrm>
+          <a:prstGeom prst="curvedConnector3">
+            <a:avLst>
+              <a:gd name="adj1" fmla="val 183814"/>
+            </a:avLst>
+          </a:prstGeom>
+          <a:ln>
+            <a:tailEnd type="triangle"/>
+          </a:ln>
+        </p:spPr>
+        <p:style>
+          <a:lnRef idx="1">
+            <a:schemeClr val="dk1"/>
+          </a:lnRef>
+          <a:fillRef idx="0">
+            <a:schemeClr val="dk1"/>
+          </a:fillRef>
+          <a:effectRef idx="0">
+            <a:schemeClr val="dk1"/>
+          </a:effectRef>
+          <a:fontRef idx="minor">
+            <a:schemeClr val="tx1"/>
+          </a:fontRef>
+        </p:style>
+      </p:cxnSp>
+      <p:sp>
+        <p:nvSpPr>
+          <p:cNvPr id="62" name="TextBox 61">
+            <a:extLst>
+              <a:ext uri="{FF2B5EF4-FFF2-40B4-BE49-F238E27FC236}">
+                <a16:creationId xmlns:a16="http://schemas.microsoft.com/office/drawing/2014/main" id="{548642A5-BA53-FAE5-6D4E-3ED5D27BC91B}"/>
+              </a:ext>
+            </a:extLst>
+          </p:cNvPr>
+          <p:cNvSpPr txBox="1"/>
+          <p:nvPr/>
+        </p:nvSpPr>
+        <p:spPr>
+          <a:xfrm>
+            <a:off x="7344729" y="2860761"/>
+            <a:ext cx="4663048" cy="705642"/>
+          </a:xfrm>
+          <a:prstGeom prst="rect">
+            <a:avLst/>
+          </a:prstGeom>
+          <a:noFill/>
+        </p:spPr>
+        <p:txBody>
+          <a:bodyPr wrap="square">
+            <a:spAutoFit/>
+          </a:bodyPr>
+          <a:lstStyle/>
+          <a:p>
+            <a:pPr>
+              <a:lnSpc>
+                <a:spcPct val="150000"/>
+              </a:lnSpc>
+            </a:pPr>
+            <a:r>
+              <a:rPr lang="ko-KR" altLang="en-US" sz="1400" dirty="0">
+                <a:latin typeface="D2Coding" panose="020B0609020101020101" pitchFamily="49" charset="-127"/>
+                <a:ea typeface="D2Coding" panose="020B0609020101020101" pitchFamily="49" charset="-127"/>
+              </a:rPr>
+              <a:t>실제 박스 </a:t>
+            </a:r>
+            <a:r>
+              <a:rPr lang="en-US" altLang="ko-KR" sz="1400" dirty="0">
+                <a:latin typeface="D2Coding" panose="020B0609020101020101" pitchFamily="49" charset="-127"/>
+                <a:ea typeface="D2Coding" panose="020B0609020101020101" pitchFamily="49" charset="-127"/>
+              </a:rPr>
+              <a:t>W = </a:t>
+            </a:r>
+            <a:r>
+              <a:rPr lang="ko-KR" altLang="en-US" sz="1400" dirty="0">
+                <a:latin typeface="D2Coding" panose="020B0609020101020101" pitchFamily="49" charset="-127"/>
+                <a:ea typeface="D2Coding" panose="020B0609020101020101" pitchFamily="49" charset="-127"/>
+              </a:rPr>
+              <a:t>전체가로</a:t>
+            </a:r>
+            <a:r>
+              <a:rPr lang="en-US" altLang="ko-KR" sz="1400" dirty="0">
+                <a:latin typeface="D2Coding" panose="020B0609020101020101" pitchFamily="49" charset="-127"/>
+                <a:ea typeface="D2Coding" panose="020B0609020101020101" pitchFamily="49" charset="-127"/>
+              </a:rPr>
+              <a:t>(30) x w(0.6) = 18 </a:t>
+            </a:r>
+            <a:r>
+              <a:rPr lang="ko-KR" altLang="en-US" sz="1400" dirty="0">
+                <a:latin typeface="D2Coding" panose="020B0609020101020101" pitchFamily="49" charset="-127"/>
+                <a:ea typeface="D2Coding" panose="020B0609020101020101" pitchFamily="49" charset="-127"/>
+              </a:rPr>
+              <a:t>픽셀</a:t>
+            </a:r>
+            <a:endParaRPr lang="en-US" altLang="ko-KR" sz="1400" dirty="0">
+              <a:latin typeface="D2Coding" panose="020B0609020101020101" pitchFamily="49" charset="-127"/>
+              <a:ea typeface="D2Coding" panose="020B0609020101020101" pitchFamily="49" charset="-127"/>
+            </a:endParaRPr>
+          </a:p>
+          <a:p>
+            <a:pPr>
+              <a:lnSpc>
+                <a:spcPct val="150000"/>
+              </a:lnSpc>
+            </a:pPr>
+            <a:r>
+              <a:rPr lang="ko-KR" altLang="en-US" sz="1400" dirty="0">
+                <a:latin typeface="D2Coding" panose="020B0609020101020101" pitchFamily="49" charset="-127"/>
+                <a:ea typeface="D2Coding" panose="020B0609020101020101" pitchFamily="49" charset="-127"/>
+              </a:rPr>
+              <a:t>실제 박스 </a:t>
+            </a:r>
+            <a:r>
+              <a:rPr lang="en-US" altLang="ko-KR" sz="1400" dirty="0">
+                <a:latin typeface="D2Coding" panose="020B0609020101020101" pitchFamily="49" charset="-127"/>
+                <a:ea typeface="D2Coding" panose="020B0609020101020101" pitchFamily="49" charset="-127"/>
+              </a:rPr>
+              <a:t>H = </a:t>
+            </a:r>
+            <a:r>
+              <a:rPr lang="ko-KR" altLang="en-US" sz="1400" dirty="0">
+                <a:latin typeface="D2Coding" panose="020B0609020101020101" pitchFamily="49" charset="-127"/>
+                <a:ea typeface="D2Coding" panose="020B0609020101020101" pitchFamily="49" charset="-127"/>
+              </a:rPr>
+              <a:t>전체가로</a:t>
+            </a:r>
+            <a:r>
+              <a:rPr lang="en-US" altLang="ko-KR" sz="1400" dirty="0">
+                <a:latin typeface="D2Coding" panose="020B0609020101020101" pitchFamily="49" charset="-127"/>
+                <a:ea typeface="D2Coding" panose="020B0609020101020101" pitchFamily="49" charset="-127"/>
+              </a:rPr>
+              <a:t>(30) x w(0.4) = 12 </a:t>
+            </a:r>
+            <a:r>
+              <a:rPr lang="ko-KR" altLang="en-US" sz="1400" dirty="0">
+                <a:latin typeface="D2Coding" panose="020B0609020101020101" pitchFamily="49" charset="-127"/>
+                <a:ea typeface="D2Coding" panose="020B0609020101020101" pitchFamily="49" charset="-127"/>
+              </a:rPr>
+              <a:t>픽셀</a:t>
+            </a:r>
+          </a:p>
+        </p:txBody>
+      </p:sp>
+      <p:sp>
+        <p:nvSpPr>
+          <p:cNvPr id="66" name="TextBox 65">
+            <a:extLst>
+              <a:ext uri="{FF2B5EF4-FFF2-40B4-BE49-F238E27FC236}">
+                <a16:creationId xmlns:a16="http://schemas.microsoft.com/office/drawing/2014/main" id="{6596442B-4C57-3304-CF84-BD991E22F215}"/>
+              </a:ext>
+            </a:extLst>
+          </p:cNvPr>
+          <p:cNvSpPr txBox="1"/>
+          <p:nvPr/>
+        </p:nvSpPr>
+        <p:spPr>
+          <a:xfrm>
+            <a:off x="7581018" y="3709001"/>
+            <a:ext cx="3550639" cy="738664"/>
+          </a:xfrm>
+          <a:prstGeom prst="rect">
+            <a:avLst/>
+          </a:prstGeom>
+          <a:noFill/>
+        </p:spPr>
+        <p:txBody>
+          <a:bodyPr wrap="square">
+            <a:spAutoFit/>
+          </a:bodyPr>
+          <a:lstStyle/>
+          <a:p>
+            <a:r>
+              <a:rPr lang="ko-KR" altLang="en-US" sz="1400" dirty="0">
+                <a:latin typeface="D2Coding" panose="020B0609020101020101" pitchFamily="49" charset="-127"/>
+                <a:ea typeface="D2Coding" panose="020B0609020101020101" pitchFamily="49" charset="-127"/>
+              </a:rPr>
+              <a:t>중심점</a:t>
+            </a:r>
+            <a:r>
+              <a:rPr lang="en-US" altLang="ko-KR" sz="1400" dirty="0">
+                <a:latin typeface="D2Coding" panose="020B0609020101020101" pitchFamily="49" charset="-127"/>
+                <a:ea typeface="D2Coding" panose="020B0609020101020101" pitchFamily="49" charset="-127"/>
+              </a:rPr>
+              <a:t>(15, 15)</a:t>
+            </a:r>
+            <a:r>
+              <a:rPr lang="ko-KR" altLang="en-US" sz="1400" dirty="0">
+                <a:latin typeface="D2Coding" panose="020B0609020101020101" pitchFamily="49" charset="-127"/>
+                <a:ea typeface="D2Coding" panose="020B0609020101020101" pitchFamily="49" charset="-127"/>
+              </a:rPr>
+              <a:t>에서 가로 </a:t>
+            </a:r>
+            <a:r>
+              <a:rPr lang="en-US" altLang="ko-KR" sz="1400" dirty="0">
+                <a:latin typeface="D2Coding" panose="020B0609020101020101" pitchFamily="49" charset="-127"/>
+                <a:ea typeface="D2Coding" panose="020B0609020101020101" pitchFamily="49" charset="-127"/>
+              </a:rPr>
+              <a:t>18 </a:t>
+            </a:r>
+            <a:r>
+              <a:rPr lang="ko-KR" altLang="en-US" sz="1400" dirty="0">
+                <a:latin typeface="D2Coding" panose="020B0609020101020101" pitchFamily="49" charset="-127"/>
+                <a:ea typeface="D2Coding" panose="020B0609020101020101" pitchFamily="49" charset="-127"/>
+              </a:rPr>
+              <a:t>픽셀</a:t>
+            </a:r>
+            <a:r>
+              <a:rPr lang="en-US" altLang="ko-KR" sz="1400" dirty="0">
+                <a:latin typeface="D2Coding" panose="020B0609020101020101" pitchFamily="49" charset="-127"/>
+                <a:ea typeface="D2Coding" panose="020B0609020101020101" pitchFamily="49" charset="-127"/>
+              </a:rPr>
+              <a:t>, </a:t>
+            </a:r>
+            <a:r>
+              <a:rPr lang="ko-KR" altLang="en-US" sz="1400" dirty="0">
+                <a:latin typeface="D2Coding" panose="020B0609020101020101" pitchFamily="49" charset="-127"/>
+                <a:ea typeface="D2Coding" panose="020B0609020101020101" pitchFamily="49" charset="-127"/>
+              </a:rPr>
+              <a:t>세로 </a:t>
+            </a:r>
+            <a:r>
+              <a:rPr lang="en-US" altLang="ko-KR" sz="1400" dirty="0">
+                <a:latin typeface="D2Coding" panose="020B0609020101020101" pitchFamily="49" charset="-127"/>
+                <a:ea typeface="D2Coding" panose="020B0609020101020101" pitchFamily="49" charset="-127"/>
+              </a:rPr>
+              <a:t>12 </a:t>
+            </a:r>
+            <a:r>
+              <a:rPr lang="ko-KR" altLang="en-US" sz="1400" dirty="0">
+                <a:latin typeface="D2Coding" panose="020B0609020101020101" pitchFamily="49" charset="-127"/>
+                <a:ea typeface="D2Coding" panose="020B0609020101020101" pitchFamily="49" charset="-127"/>
+              </a:rPr>
+              <a:t>픽셀짜리 상자를 사방으로 넓혀서 </a:t>
+            </a:r>
+            <a:r>
+              <a:rPr lang="ko-KR" altLang="en-US" sz="1400" dirty="0" err="1">
+                <a:latin typeface="D2Coding" panose="020B0609020101020101" pitchFamily="49" charset="-127"/>
+                <a:ea typeface="D2Coding" panose="020B0609020101020101" pitchFamily="49" charset="-127"/>
+              </a:rPr>
+              <a:t>바운딩박스를</a:t>
+            </a:r>
+            <a:r>
+              <a:rPr lang="ko-KR" altLang="en-US" sz="1400" dirty="0">
+                <a:latin typeface="D2Coding" panose="020B0609020101020101" pitchFamily="49" charset="-127"/>
+                <a:ea typeface="D2Coding" panose="020B0609020101020101" pitchFamily="49" charset="-127"/>
+              </a:rPr>
+              <a:t> 생성하면</a:t>
+            </a:r>
+          </a:p>
+        </p:txBody>
+      </p:sp>
+      <p:sp>
+        <p:nvSpPr>
+          <p:cNvPr id="67" name="직사각형 66">
+            <a:extLst>
+              <a:ext uri="{FF2B5EF4-FFF2-40B4-BE49-F238E27FC236}">
+                <a16:creationId xmlns:a16="http://schemas.microsoft.com/office/drawing/2014/main" id="{2EFCE97D-E3E9-5F01-4094-17FF0005381B}"/>
+              </a:ext>
+            </a:extLst>
+          </p:cNvPr>
+          <p:cNvSpPr/>
+          <p:nvPr/>
+        </p:nvSpPr>
+        <p:spPr>
+          <a:xfrm>
+            <a:off x="4743265" y="3772072"/>
+            <a:ext cx="1783075" cy="970280"/>
+          </a:xfrm>
+          <a:prstGeom prst="rect">
+            <a:avLst/>
+          </a:prstGeom>
+          <a:noFill/>
+          <a:ln w="28575">
+            <a:solidFill>
+              <a:srgbClr val="FF0000"/>
+            </a:solidFill>
+          </a:ln>
+        </p:spPr>
+        <p:style>
+          <a:lnRef idx="2">
+            <a:schemeClr val="accent1">
+              <a:shade val="15000"/>
+            </a:schemeClr>
+          </a:lnRef>
+          <a:fillRef idx="1">
+            <a:schemeClr val="accent1"/>
+          </a:fillRef>
+          <a:effectRef idx="0">
+            <a:schemeClr val="accent1"/>
+          </a:effectRef>
+          <a:fontRef idx="minor">
+            <a:schemeClr val="lt1"/>
+          </a:fontRef>
+        </p:style>
+        <p:txBody>
+          <a:bodyPr rtlCol="0" anchor="ctr"/>
+          <a:lstStyle/>
+          <a:p>
+            <a:pPr algn="ctr"/>
+            <a:endParaRPr lang="ko-KR" altLang="en-US"/>
+          </a:p>
+        </p:txBody>
+      </p:sp>
+      <p:sp>
+        <p:nvSpPr>
+          <p:cNvPr id="68" name="TextBox 67">
+            <a:extLst>
+              <a:ext uri="{FF2B5EF4-FFF2-40B4-BE49-F238E27FC236}">
+                <a16:creationId xmlns:a16="http://schemas.microsoft.com/office/drawing/2014/main" id="{6C72C952-38E8-B305-DABE-D7D5CCE78405}"/>
+              </a:ext>
+            </a:extLst>
+          </p:cNvPr>
+          <p:cNvSpPr txBox="1"/>
+          <p:nvPr/>
+        </p:nvSpPr>
+        <p:spPr>
+          <a:xfrm>
+            <a:off x="7344729" y="4536683"/>
+            <a:ext cx="4371626" cy="1351973"/>
+          </a:xfrm>
+          <a:prstGeom prst="rect">
+            <a:avLst/>
+          </a:prstGeom>
+          <a:noFill/>
+          <a:ln w="19050">
+            <a:solidFill>
+              <a:srgbClr val="FF0000"/>
+            </a:solidFill>
+          </a:ln>
+        </p:spPr>
+        <p:txBody>
+          <a:bodyPr wrap="square">
+            <a:spAutoFit/>
+          </a:bodyPr>
+          <a:lstStyle/>
+          <a:p>
+            <a:pPr>
+              <a:lnSpc>
+                <a:spcPct val="150000"/>
+              </a:lnSpc>
+            </a:pPr>
+            <a:r>
+              <a:rPr lang="ko-KR" altLang="en-US" sz="1400" dirty="0">
+                <a:latin typeface="D2Coding" panose="020B0609020101020101" pitchFamily="49" charset="-127"/>
+                <a:ea typeface="D2Coding" panose="020B0609020101020101" pitchFamily="49" charset="-127"/>
+              </a:rPr>
+              <a:t>박스   왼쪽 끝 </a:t>
+            </a:r>
+            <a:r>
+              <a:rPr lang="en-US" altLang="ko-KR" sz="1400" dirty="0">
+                <a:latin typeface="D2Coding" panose="020B0609020101020101" pitchFamily="49" charset="-127"/>
+                <a:ea typeface="D2Coding" panose="020B0609020101020101" pitchFamily="49" charset="-127"/>
+              </a:rPr>
+              <a:t>= X – W/2 = 15 - 18/2 = 6 </a:t>
+            </a:r>
+            <a:r>
+              <a:rPr lang="ko-KR" altLang="en-US" sz="1400" dirty="0">
+                <a:latin typeface="D2Coding" panose="020B0609020101020101" pitchFamily="49" charset="-127"/>
+                <a:ea typeface="D2Coding" panose="020B0609020101020101" pitchFamily="49" charset="-127"/>
+              </a:rPr>
+              <a:t>픽셀</a:t>
+            </a:r>
+            <a:endParaRPr lang="en-US" altLang="ko-KR" sz="1400" dirty="0">
+              <a:latin typeface="D2Coding" panose="020B0609020101020101" pitchFamily="49" charset="-127"/>
+              <a:ea typeface="D2Coding" panose="020B0609020101020101" pitchFamily="49" charset="-127"/>
+            </a:endParaRPr>
+          </a:p>
+          <a:p>
+            <a:pPr>
+              <a:lnSpc>
+                <a:spcPct val="150000"/>
+              </a:lnSpc>
+            </a:pPr>
+            <a:r>
+              <a:rPr lang="ko-KR" altLang="en-US" sz="1400" dirty="0">
+                <a:latin typeface="D2Coding" panose="020B0609020101020101" pitchFamily="49" charset="-127"/>
+                <a:ea typeface="D2Coding" panose="020B0609020101020101" pitchFamily="49" charset="-127"/>
+              </a:rPr>
+              <a:t>박스 오른쪽 끝 </a:t>
+            </a:r>
+            <a:r>
+              <a:rPr lang="en-US" altLang="ko-KR" sz="1400" dirty="0">
+                <a:latin typeface="D2Coding" panose="020B0609020101020101" pitchFamily="49" charset="-127"/>
+                <a:ea typeface="D2Coding" panose="020B0609020101020101" pitchFamily="49" charset="-127"/>
+              </a:rPr>
+              <a:t>= X + W/2 = 15 + 18/2 = 24 </a:t>
+            </a:r>
+            <a:r>
+              <a:rPr lang="ko-KR" altLang="en-US" sz="1400" dirty="0">
+                <a:latin typeface="D2Coding" panose="020B0609020101020101" pitchFamily="49" charset="-127"/>
+                <a:ea typeface="D2Coding" panose="020B0609020101020101" pitchFamily="49" charset="-127"/>
+              </a:rPr>
+              <a:t>픽셀</a:t>
+            </a:r>
+            <a:endParaRPr lang="en-US" altLang="ko-KR" sz="1400" dirty="0">
+              <a:latin typeface="D2Coding" panose="020B0609020101020101" pitchFamily="49" charset="-127"/>
+              <a:ea typeface="D2Coding" panose="020B0609020101020101" pitchFamily="49" charset="-127"/>
+            </a:endParaRPr>
+          </a:p>
+          <a:p>
+            <a:pPr>
+              <a:lnSpc>
+                <a:spcPct val="150000"/>
+              </a:lnSpc>
+            </a:pPr>
+            <a:r>
+              <a:rPr lang="ko-KR" altLang="en-US" sz="1400" dirty="0">
+                <a:latin typeface="D2Coding" panose="020B0609020101020101" pitchFamily="49" charset="-127"/>
+                <a:ea typeface="D2Coding" panose="020B0609020101020101" pitchFamily="49" charset="-127"/>
+              </a:rPr>
+              <a:t>박스   위쪽 끝 </a:t>
+            </a:r>
+            <a:r>
+              <a:rPr lang="en-US" altLang="ko-KR" sz="1400" dirty="0">
+                <a:latin typeface="D2Coding" panose="020B0609020101020101" pitchFamily="49" charset="-127"/>
+                <a:ea typeface="D2Coding" panose="020B0609020101020101" pitchFamily="49" charset="-127"/>
+              </a:rPr>
+              <a:t>= Y – H/2 = 15 – 12/2 = 9 </a:t>
+            </a:r>
+            <a:r>
+              <a:rPr lang="ko-KR" altLang="en-US" sz="1400" dirty="0">
+                <a:latin typeface="D2Coding" panose="020B0609020101020101" pitchFamily="49" charset="-127"/>
+                <a:ea typeface="D2Coding" panose="020B0609020101020101" pitchFamily="49" charset="-127"/>
+              </a:rPr>
+              <a:t>픽셀</a:t>
+            </a:r>
+            <a:endParaRPr lang="en-US" altLang="ko-KR" sz="1400" dirty="0">
+              <a:latin typeface="D2Coding" panose="020B0609020101020101" pitchFamily="49" charset="-127"/>
+              <a:ea typeface="D2Coding" panose="020B0609020101020101" pitchFamily="49" charset="-127"/>
+            </a:endParaRPr>
+          </a:p>
+          <a:p>
+            <a:pPr>
+              <a:lnSpc>
+                <a:spcPct val="150000"/>
+              </a:lnSpc>
+            </a:pPr>
+            <a:r>
+              <a:rPr lang="ko-KR" altLang="en-US" sz="1400" dirty="0">
+                <a:latin typeface="D2Coding" panose="020B0609020101020101" pitchFamily="49" charset="-127"/>
+                <a:ea typeface="D2Coding" panose="020B0609020101020101" pitchFamily="49" charset="-127"/>
+              </a:rPr>
+              <a:t>박스 아래쪽 끝 </a:t>
+            </a:r>
+            <a:r>
+              <a:rPr lang="en-US" altLang="ko-KR" sz="1400" dirty="0">
+                <a:latin typeface="D2Coding" panose="020B0609020101020101" pitchFamily="49" charset="-127"/>
+                <a:ea typeface="D2Coding" panose="020B0609020101020101" pitchFamily="49" charset="-127"/>
+              </a:rPr>
+              <a:t>= Y + H/2 = 15 + 12/2 = 21 </a:t>
+            </a:r>
+            <a:r>
+              <a:rPr lang="ko-KR" altLang="en-US" sz="1400" dirty="0">
+                <a:latin typeface="D2Coding" panose="020B0609020101020101" pitchFamily="49" charset="-127"/>
+                <a:ea typeface="D2Coding" panose="020B0609020101020101" pitchFamily="49" charset="-127"/>
+              </a:rPr>
+              <a:t>픽셀</a:t>
+            </a:r>
+            <a:endParaRPr lang="en-US" altLang="ko-KR" sz="1400" dirty="0">
+              <a:latin typeface="D2Coding" panose="020B0609020101020101" pitchFamily="49" charset="-127"/>
+              <a:ea typeface="D2Coding" panose="020B0609020101020101" pitchFamily="49" charset="-127"/>
+            </a:endParaRPr>
+          </a:p>
+        </p:txBody>
+      </p:sp>
+      <p:cxnSp>
+        <p:nvCxnSpPr>
+          <p:cNvPr id="70" name="직선 연결선 69">
+            <a:extLst>
+              <a:ext uri="{FF2B5EF4-FFF2-40B4-BE49-F238E27FC236}">
+                <a16:creationId xmlns:a16="http://schemas.microsoft.com/office/drawing/2014/main" id="{75E4ADAA-A8CD-BB1C-DFED-FC90BB8FE5DB}"/>
+              </a:ext>
+            </a:extLst>
+          </p:cNvPr>
+          <p:cNvCxnSpPr/>
+          <p:nvPr/>
+        </p:nvCxnSpPr>
+        <p:spPr>
+          <a:xfrm>
+            <a:off x="6526340" y="3772072"/>
+            <a:ext cx="818389" cy="764611"/>
+          </a:xfrm>
+          <a:prstGeom prst="line">
+            <a:avLst/>
+          </a:prstGeom>
+          <a:ln w="19050">
+            <a:solidFill>
+              <a:srgbClr val="FF0000"/>
+            </a:solidFill>
+          </a:ln>
+        </p:spPr>
+        <p:style>
+          <a:lnRef idx="1">
+            <a:schemeClr val="accent1"/>
+          </a:lnRef>
+          <a:fillRef idx="0">
+            <a:schemeClr val="accent1"/>
+          </a:fillRef>
+          <a:effectRef idx="0">
+            <a:schemeClr val="accent1"/>
+          </a:effectRef>
+          <a:fontRef idx="minor">
+            <a:schemeClr val="tx1"/>
+          </a:fontRef>
+        </p:style>
+      </p:cxnSp>
+      <p:cxnSp>
+        <p:nvCxnSpPr>
+          <p:cNvPr id="71" name="직선 연결선 70">
+            <a:extLst>
+              <a:ext uri="{FF2B5EF4-FFF2-40B4-BE49-F238E27FC236}">
+                <a16:creationId xmlns:a16="http://schemas.microsoft.com/office/drawing/2014/main" id="{EE208B33-39A5-58FE-6711-8068A434BC15}"/>
+              </a:ext>
+            </a:extLst>
+          </p:cNvPr>
+          <p:cNvCxnSpPr>
+            <a:cxnSpLocks/>
+          </p:cNvCxnSpPr>
+          <p:nvPr/>
+        </p:nvCxnSpPr>
+        <p:spPr>
+          <a:xfrm>
+            <a:off x="6526340" y="4742352"/>
+            <a:ext cx="818389" cy="1146304"/>
+          </a:xfrm>
+          <a:prstGeom prst="line">
+            <a:avLst/>
+          </a:prstGeom>
+          <a:ln w="19050">
+            <a:solidFill>
+              <a:srgbClr val="FF0000"/>
+            </a:solidFill>
+          </a:ln>
+        </p:spPr>
+        <p:style>
+          <a:lnRef idx="1">
+            <a:schemeClr val="accent1"/>
+          </a:lnRef>
+          <a:fillRef idx="0">
+            <a:schemeClr val="accent1"/>
+          </a:fillRef>
+          <a:effectRef idx="0">
+            <a:schemeClr val="accent1"/>
+          </a:effectRef>
+          <a:fontRef idx="minor">
+            <a:schemeClr val="tx1"/>
+          </a:fontRef>
+        </p:style>
+      </p:cxnSp>
+      <p:sp>
+        <p:nvSpPr>
+          <p:cNvPr id="76" name="TextBox 75">
+            <a:extLst>
+              <a:ext uri="{FF2B5EF4-FFF2-40B4-BE49-F238E27FC236}">
+                <a16:creationId xmlns:a16="http://schemas.microsoft.com/office/drawing/2014/main" id="{453FC2DC-7B49-3440-6687-ACAC6260105D}"/>
+              </a:ext>
+            </a:extLst>
+          </p:cNvPr>
+          <p:cNvSpPr txBox="1"/>
+          <p:nvPr/>
+        </p:nvSpPr>
+        <p:spPr>
+          <a:xfrm>
+            <a:off x="1765358" y="5817739"/>
+            <a:ext cx="1153407" cy="369332"/>
+          </a:xfrm>
+          <a:prstGeom prst="rect">
+            <a:avLst/>
+          </a:prstGeom>
+          <a:noFill/>
+        </p:spPr>
+        <p:txBody>
+          <a:bodyPr wrap="square">
+            <a:spAutoFit/>
+          </a:bodyPr>
+          <a:lstStyle/>
+          <a:p>
+            <a:r>
+              <a:rPr lang="en-US" altLang="ko-KR" dirty="0">
+                <a:latin typeface="D2Coding" panose="020B0609020101020101" pitchFamily="49" charset="-127"/>
+                <a:ea typeface="D2Coding" panose="020B0609020101020101" pitchFamily="49" charset="-127"/>
+              </a:rPr>
+              <a:t>(9 by 9)</a:t>
+            </a:r>
+            <a:endParaRPr lang="ko-KR" altLang="en-US" dirty="0"/>
+          </a:p>
+        </p:txBody>
+      </p:sp>
+      <p:sp>
+        <p:nvSpPr>
+          <p:cNvPr id="77" name="TextBox 76">
+            <a:extLst>
+              <a:ext uri="{FF2B5EF4-FFF2-40B4-BE49-F238E27FC236}">
+                <a16:creationId xmlns:a16="http://schemas.microsoft.com/office/drawing/2014/main" id="{CE32B1FF-F8CB-DF63-9C05-E3BE4773286F}"/>
+              </a:ext>
+            </a:extLst>
+          </p:cNvPr>
+          <p:cNvSpPr txBox="1"/>
+          <p:nvPr/>
+        </p:nvSpPr>
+        <p:spPr>
+          <a:xfrm>
+            <a:off x="4827918" y="5759538"/>
+            <a:ext cx="1613767" cy="369332"/>
+          </a:xfrm>
+          <a:prstGeom prst="rect">
+            <a:avLst/>
+          </a:prstGeom>
+          <a:noFill/>
+        </p:spPr>
+        <p:txBody>
+          <a:bodyPr wrap="square">
+            <a:spAutoFit/>
+          </a:bodyPr>
+          <a:lstStyle/>
+          <a:p>
+            <a:r>
+              <a:rPr lang="en-US" altLang="ko-KR" dirty="0">
+                <a:latin typeface="D2Coding" panose="020B0609020101020101" pitchFamily="49" charset="-127"/>
+                <a:ea typeface="D2Coding" panose="020B0609020101020101" pitchFamily="49" charset="-127"/>
+              </a:rPr>
+              <a:t>(30 by 30)</a:t>
+            </a:r>
+            <a:endParaRPr lang="ko-KR" altLang="en-US" dirty="0"/>
+          </a:p>
+        </p:txBody>
+      </p:sp>
+    </p:spTree>
+    <p:extLst>
+      <p:ext uri="{BB962C8B-B14F-4D97-AF65-F5344CB8AC3E}">
+        <p14:creationId xmlns:p14="http://schemas.microsoft.com/office/powerpoint/2010/main" val="3293832986"/>
+      </p:ext>
+    </p:extLst>
+  </p:cSld>
+  <p:clrMapOvr>
+    <a:masterClrMapping/>
+  </p:clrMapOvr>
+</p:sld>
+</file>
+
+<file path=ppt/slides/slide17.xml><?xml version="1.0" encoding="utf-8"?>
 <p:sld xmlns:a="http://schemas.openxmlformats.org/drawingml/2006/main" xmlns:r="http://schemas.openxmlformats.org/officeDocument/2006/relationships" xmlns:p="http://schemas.openxmlformats.org/presentationml/2006/main">
   <p:cSld>
     <p:spTree>
@@ -8845,7 +13743,7 @@
             <a:fld id="{D57F1E4F-1CFF-5643-939E-217C01CDF565}" type="slidenum">
               <a:rPr lang="en-US" smtClean="0"/>
               <a:pPr/>
-              <a:t>16</a:t>
+              <a:t>17</a:t>
             </a:fld>
             <a:endParaRPr lang="en-US" dirty="0"/>
           </a:p>

--- a/CNN/Object detection_YOLO.pptx
+++ b/CNN/Object detection_YOLO.pptx
@@ -5,10 +5,10 @@
     <p:sldMasterId id="2147483660" r:id="rId1"/>
   </p:sldMasterIdLst>
   <p:notesMasterIdLst>
-    <p:notesMasterId r:id="rId19"/>
+    <p:notesMasterId r:id="rId20"/>
   </p:notesMasterIdLst>
   <p:handoutMasterIdLst>
-    <p:handoutMasterId r:id="rId20"/>
+    <p:handoutMasterId r:id="rId21"/>
   </p:handoutMasterIdLst>
   <p:sldIdLst>
     <p:sldId id="256" r:id="rId2"/>
@@ -17,17 +17,18 @@
     <p:sldId id="1128" r:id="rId5"/>
     <p:sldId id="1129" r:id="rId6"/>
     <p:sldId id="1131" r:id="rId7"/>
-    <p:sldId id="1130" r:id="rId8"/>
-    <p:sldId id="1127" r:id="rId9"/>
-    <p:sldId id="1121" r:id="rId10"/>
-    <p:sldId id="1133" r:id="rId11"/>
-    <p:sldId id="1135" r:id="rId12"/>
-    <p:sldId id="1136" r:id="rId13"/>
-    <p:sldId id="1132" r:id="rId14"/>
-    <p:sldId id="1122" r:id="rId15"/>
-    <p:sldId id="1137" r:id="rId16"/>
-    <p:sldId id="1138" r:id="rId17"/>
-    <p:sldId id="1123" r:id="rId18"/>
+    <p:sldId id="1139" r:id="rId8"/>
+    <p:sldId id="1130" r:id="rId9"/>
+    <p:sldId id="1127" r:id="rId10"/>
+    <p:sldId id="1121" r:id="rId11"/>
+    <p:sldId id="1133" r:id="rId12"/>
+    <p:sldId id="1135" r:id="rId13"/>
+    <p:sldId id="1136" r:id="rId14"/>
+    <p:sldId id="1132" r:id="rId15"/>
+    <p:sldId id="1122" r:id="rId16"/>
+    <p:sldId id="1137" r:id="rId17"/>
+    <p:sldId id="1138" r:id="rId18"/>
+    <p:sldId id="1123" r:id="rId19"/>
   </p:sldIdLst>
   <p:sldSz cx="12192000" cy="6858000"/>
   <p:notesSz cx="6858000" cy="9144000"/>
@@ -144,6 +145,7 @@
             <p14:sldId id="1128"/>
             <p14:sldId id="1129"/>
             <p14:sldId id="1131"/>
+            <p14:sldId id="1139"/>
             <p14:sldId id="1130"/>
             <p14:sldId id="1127"/>
             <p14:sldId id="1121"/>
@@ -3292,6 +3294,242 @@
         <p:cNvPr id="1" name="">
           <a:extLst>
             <a:ext uri="{FF2B5EF4-FFF2-40B4-BE49-F238E27FC236}">
+              <a16:creationId xmlns:a16="http://schemas.microsoft.com/office/drawing/2014/main" id="{13802734-AA6A-E730-3531-0054C5EEA84C}"/>
+            </a:ext>
+          </a:extLst>
+        </p:cNvPr>
+        <p:cNvGrpSpPr/>
+        <p:nvPr/>
+      </p:nvGrpSpPr>
+      <p:grpSpPr>
+        <a:xfrm>
+          <a:off x="0" y="0"/>
+          <a:ext cx="0" cy="0"/>
+          <a:chOff x="0" y="0"/>
+          <a:chExt cx="0" cy="0"/>
+        </a:xfrm>
+      </p:grpSpPr>
+      <p:sp>
+        <p:nvSpPr>
+          <p:cNvPr id="4" name="슬라이드 번호 개체 틀 3">
+            <a:extLst>
+              <a:ext uri="{FF2B5EF4-FFF2-40B4-BE49-F238E27FC236}">
+                <a16:creationId xmlns:a16="http://schemas.microsoft.com/office/drawing/2014/main" id="{67FFB6B3-4B54-5D5E-0596-98BAADA1B561}"/>
+              </a:ext>
+            </a:extLst>
+          </p:cNvPr>
+          <p:cNvSpPr>
+            <a:spLocks noGrp="1"/>
+          </p:cNvSpPr>
+          <p:nvPr>
+            <p:ph type="sldNum" sz="quarter" idx="12"/>
+          </p:nvPr>
+        </p:nvSpPr>
+        <p:spPr>
+          <a:xfrm>
+            <a:off x="10514011" y="6036261"/>
+            <a:ext cx="753545" cy="365125"/>
+          </a:xfrm>
+        </p:spPr>
+        <p:txBody>
+          <a:bodyPr/>
+          <a:lstStyle/>
+          <a:p>
+            <a:fld id="{D57F1E4F-1CFF-5643-939E-217C01CDF565}" type="slidenum">
+              <a:rPr lang="en-US" smtClean="0"/>
+              <a:pPr/>
+              <a:t>10</a:t>
+            </a:fld>
+            <a:endParaRPr lang="en-US" dirty="0"/>
+          </a:p>
+        </p:txBody>
+      </p:sp>
+      <p:sp>
+        <p:nvSpPr>
+          <p:cNvPr id="3" name="제목 1">
+            <a:extLst>
+              <a:ext uri="{FF2B5EF4-FFF2-40B4-BE49-F238E27FC236}">
+                <a16:creationId xmlns:a16="http://schemas.microsoft.com/office/drawing/2014/main" id="{2DFADB4A-FE33-2CB5-920A-08149AB4CC44}"/>
+              </a:ext>
+            </a:extLst>
+          </p:cNvPr>
+          <p:cNvSpPr txBox="1">
+            <a:spLocks/>
+          </p:cNvSpPr>
+          <p:nvPr/>
+        </p:nvSpPr>
+        <p:spPr>
+          <a:xfrm>
+            <a:off x="475645" y="481983"/>
+            <a:ext cx="10353762" cy="766439"/>
+          </a:xfrm>
+          <a:prstGeom prst="rect">
+            <a:avLst/>
+          </a:prstGeom>
+        </p:spPr>
+        <p:txBody>
+          <a:bodyPr vert="horz" lIns="91440" tIns="45720" rIns="91440" bIns="45720" rtlCol="0" anchor="ctr">
+            <a:normAutofit/>
+          </a:bodyPr>
+          <a:lstStyle>
+            <a:lvl1pPr algn="ctr" defTabSz="914400" rtl="0" eaLnBrk="1" latinLnBrk="1" hangingPunct="1">
+              <a:lnSpc>
+                <a:spcPct val="90000"/>
+              </a:lnSpc>
+              <a:spcBef>
+                <a:spcPct val="0"/>
+              </a:spcBef>
+              <a:buNone/>
+              <a:defRPr sz="3200" kern="1200" cap="all" baseline="0">
+                <a:solidFill>
+                  <a:schemeClr val="tx1"/>
+                </a:solidFill>
+                <a:effectLst/>
+                <a:latin typeface="Batang" panose="02030600000101010101" pitchFamily="18" charset="-127"/>
+                <a:ea typeface="Batang" panose="02030600000101010101" pitchFamily="18" charset="-127"/>
+                <a:cs typeface="+mj-cs"/>
+              </a:defRPr>
+            </a:lvl1pPr>
+          </a:lstStyle>
+          <a:p>
+            <a:pPr algn="l"/>
+            <a:r>
+              <a:rPr lang="en-US" altLang="ko-KR" sz="2800" cap="none" dirty="0">
+                <a:latin typeface="D2Coding" panose="020B0609020101020101" pitchFamily="49" charset="-127"/>
+                <a:ea typeface="D2Coding" panose="020B0609020101020101" pitchFamily="49" charset="-127"/>
+                <a:cs typeface="Segoe UI Light" panose="020B0502040204020203" pitchFamily="34" charset="0"/>
+              </a:rPr>
+              <a:t>YOLO: </a:t>
+            </a:r>
+            <a:r>
+              <a:rPr lang="en-US" altLang="ko-KR" sz="2800" cap="none" dirty="0">
+                <a:latin typeface="D2Coding" panose="020B0609020101020101" pitchFamily="49" charset="-127"/>
+                <a:ea typeface="D2Coding" panose="020B0609020101020101" pitchFamily="49" charset="-127"/>
+                <a:cs typeface="Segoe UI Light" panose="020B0502040204020203" pitchFamily="34" charset="0"/>
+                <a:hlinkClick r:id="rId2">
+                  <a:extLst>
+                    <a:ext uri="{A12FA001-AC4F-418D-AE19-62706E023703}">
+                      <ahyp:hlinkClr xmlns:ahyp="http://schemas.microsoft.com/office/drawing/2018/hyperlinkcolor" val="tx"/>
+                    </a:ext>
+                  </a:extLst>
+                </a:hlinkClick>
+              </a:rPr>
+              <a:t>YOLO Object Detection</a:t>
+            </a:r>
+            <a:endParaRPr lang="ko-KR" altLang="en-US" sz="2800" cap="none" dirty="0">
+              <a:latin typeface="D2Coding" panose="020B0609020101020101" pitchFamily="49" charset="-127"/>
+              <a:ea typeface="D2Coding" panose="020B0609020101020101" pitchFamily="49" charset="-127"/>
+              <a:cs typeface="Segoe UI Light" panose="020B0502040204020203" pitchFamily="34" charset="0"/>
+            </a:endParaRPr>
+          </a:p>
+        </p:txBody>
+      </p:sp>
+      <p:pic>
+        <p:nvPicPr>
+          <p:cNvPr id="16" name="그림 15">
+            <a:extLst>
+              <a:ext uri="{FF2B5EF4-FFF2-40B4-BE49-F238E27FC236}">
+                <a16:creationId xmlns:a16="http://schemas.microsoft.com/office/drawing/2014/main" id="{2686F96D-48F0-A770-6A20-E3AC1FC846E1}"/>
+              </a:ext>
+            </a:extLst>
+          </p:cNvPr>
+          <p:cNvPicPr>
+            <a:picLocks noChangeAspect="1"/>
+          </p:cNvPicPr>
+          <p:nvPr/>
+        </p:nvPicPr>
+        <p:blipFill>
+          <a:blip r:embed="rId3"/>
+          <a:stretch>
+            <a:fillRect/>
+          </a:stretch>
+        </p:blipFill>
+        <p:spPr>
+          <a:xfrm>
+            <a:off x="1209300" y="2270463"/>
+            <a:ext cx="8439526" cy="3948360"/>
+          </a:xfrm>
+          <a:prstGeom prst="rect">
+            <a:avLst/>
+          </a:prstGeom>
+        </p:spPr>
+      </p:pic>
+      <p:sp>
+        <p:nvSpPr>
+          <p:cNvPr id="5" name="TextBox 4">
+            <a:extLst>
+              <a:ext uri="{FF2B5EF4-FFF2-40B4-BE49-F238E27FC236}">
+                <a16:creationId xmlns:a16="http://schemas.microsoft.com/office/drawing/2014/main" id="{425755E4-770B-BDE4-CDAA-9FB5C839D34C}"/>
+              </a:ext>
+            </a:extLst>
+          </p:cNvPr>
+          <p:cNvSpPr txBox="1"/>
+          <p:nvPr/>
+        </p:nvSpPr>
+        <p:spPr>
+          <a:xfrm>
+            <a:off x="571500" y="1390110"/>
+            <a:ext cx="6096000" cy="369332"/>
+          </a:xfrm>
+          <a:prstGeom prst="rect">
+            <a:avLst/>
+          </a:prstGeom>
+          <a:noFill/>
+        </p:spPr>
+        <p:txBody>
+          <a:bodyPr wrap="square">
+            <a:spAutoFit/>
+          </a:bodyPr>
+          <a:lstStyle/>
+          <a:p>
+            <a:pPr>
+              <a:buNone/>
+            </a:pPr>
+            <a:r>
+              <a:rPr lang="en-US" altLang="ko-KR" dirty="0">
+                <a:latin typeface="D2Coding" panose="020B0609020101020101" pitchFamily="49" charset="-127"/>
+                <a:ea typeface="D2Coding" panose="020B0609020101020101" pitchFamily="49" charset="-127"/>
+              </a:rPr>
+              <a:t>YOLO</a:t>
+            </a:r>
+            <a:r>
+              <a:rPr lang="ko-KR" altLang="en-US" dirty="0">
+                <a:latin typeface="D2Coding" panose="020B0609020101020101" pitchFamily="49" charset="-127"/>
+                <a:ea typeface="D2Coding" panose="020B0609020101020101" pitchFamily="49" charset="-127"/>
+              </a:rPr>
+              <a:t>가 선택한 </a:t>
+            </a:r>
+            <a:r>
+              <a:rPr lang="en-US" altLang="ko-KR" dirty="0">
+                <a:latin typeface="D2Coding" panose="020B0609020101020101" pitchFamily="49" charset="-127"/>
+                <a:ea typeface="D2Coding" panose="020B0609020101020101" pitchFamily="49" charset="-127"/>
+              </a:rPr>
+              <a:t>FCN (Fully Convolutional Network)</a:t>
+            </a:r>
+          </a:p>
+        </p:txBody>
+      </p:sp>
+    </p:spTree>
+    <p:extLst>
+      <p:ext uri="{BB962C8B-B14F-4D97-AF65-F5344CB8AC3E}">
+        <p14:creationId xmlns:p14="http://schemas.microsoft.com/office/powerpoint/2010/main" val="3333756658"/>
+      </p:ext>
+    </p:extLst>
+  </p:cSld>
+  <p:clrMapOvr>
+    <a:masterClrMapping/>
+  </p:clrMapOvr>
+</p:sld>
+</file>
+
+<file path=ppt/slides/slide11.xml><?xml version="1.0" encoding="utf-8"?>
+<p:sld xmlns:a="http://schemas.openxmlformats.org/drawingml/2006/main" xmlns:r="http://schemas.openxmlformats.org/officeDocument/2006/relationships" xmlns:p="http://schemas.openxmlformats.org/presentationml/2006/main">
+  <p:cSld>
+    <p:spTree>
+      <p:nvGrpSpPr>
+        <p:cNvPr id="1" name="">
+          <a:extLst>
+            <a:ext uri="{FF2B5EF4-FFF2-40B4-BE49-F238E27FC236}">
               <a16:creationId xmlns:a16="http://schemas.microsoft.com/office/drawing/2014/main" id="{ED508830-D819-D25F-AB4C-FBB5ACD20A8A}"/>
             </a:ext>
           </a:extLst>
@@ -3336,7 +3574,7 @@
             <a:fld id="{D57F1E4F-1CFF-5643-939E-217C01CDF565}" type="slidenum">
               <a:rPr lang="en-US" smtClean="0"/>
               <a:pPr/>
-              <a:t>10</a:t>
+              <a:t>11</a:t>
             </a:fld>
             <a:endParaRPr lang="en-US" dirty="0"/>
           </a:p>
@@ -4793,7 +5031,7 @@
 </p:sld>
 </file>
 
-<file path=ppt/slides/slide11.xml><?xml version="1.0" encoding="utf-8"?>
+<file path=ppt/slides/slide12.xml><?xml version="1.0" encoding="utf-8"?>
 <p:sld xmlns:a="http://schemas.openxmlformats.org/drawingml/2006/main" xmlns:r="http://schemas.openxmlformats.org/officeDocument/2006/relationships" xmlns:p="http://schemas.openxmlformats.org/presentationml/2006/main">
   <p:cSld>
     <p:spTree>
@@ -4845,7 +5083,7 @@
             <a:fld id="{D57F1E4F-1CFF-5643-939E-217C01CDF565}" type="slidenum">
               <a:rPr lang="en-US" smtClean="0"/>
               <a:pPr/>
-              <a:t>11</a:t>
+              <a:t>12</a:t>
             </a:fld>
             <a:endParaRPr lang="en-US" dirty="0"/>
           </a:p>
@@ -5752,7 +5990,7 @@
 </p:sld>
 </file>
 
-<file path=ppt/slides/slide12.xml><?xml version="1.0" encoding="utf-8"?>
+<file path=ppt/slides/slide13.xml><?xml version="1.0" encoding="utf-8"?>
 <p:sld xmlns:a="http://schemas.openxmlformats.org/drawingml/2006/main" xmlns:r="http://schemas.openxmlformats.org/officeDocument/2006/relationships" xmlns:p="http://schemas.openxmlformats.org/presentationml/2006/main">
   <p:cSld>
     <p:spTree>
@@ -5895,7 +6133,7 @@
             <a:fld id="{D57F1E4F-1CFF-5643-939E-217C01CDF565}" type="slidenum">
               <a:rPr lang="en-US" smtClean="0"/>
               <a:pPr/>
-              <a:t>12</a:t>
+              <a:t>13</a:t>
             </a:fld>
             <a:endParaRPr lang="en-US" dirty="0"/>
           </a:p>
@@ -6882,7 +7120,7 @@
 </p:sld>
 </file>
 
-<file path=ppt/slides/slide13.xml><?xml version="1.0" encoding="utf-8"?>
+<file path=ppt/slides/slide14.xml><?xml version="1.0" encoding="utf-8"?>
 <p:sld xmlns:a="http://schemas.openxmlformats.org/drawingml/2006/main" xmlns:r="http://schemas.openxmlformats.org/officeDocument/2006/relationships" xmlns:p="http://schemas.openxmlformats.org/presentationml/2006/main">
   <p:cSld>
     <p:spTree>
@@ -6934,7 +7172,7 @@
             <a:fld id="{D57F1E4F-1CFF-5643-939E-217C01CDF565}" type="slidenum">
               <a:rPr lang="en-US" smtClean="0"/>
               <a:pPr/>
-              <a:t>13</a:t>
+              <a:t>14</a:t>
             </a:fld>
             <a:endParaRPr lang="en-US" dirty="0"/>
           </a:p>
@@ -7167,7 +7405,7 @@
 </p:sld>
 </file>
 
-<file path=ppt/slides/slide14.xml><?xml version="1.0" encoding="utf-8"?>
+<file path=ppt/slides/slide15.xml><?xml version="1.0" encoding="utf-8"?>
 <p:sld xmlns:a="http://schemas.openxmlformats.org/drawingml/2006/main" xmlns:r="http://schemas.openxmlformats.org/officeDocument/2006/relationships" xmlns:p="http://schemas.openxmlformats.org/presentationml/2006/main">
   <p:cSld>
     <p:spTree>
@@ -7219,7 +7457,7 @@
             <a:fld id="{D57F1E4F-1CFF-5643-939E-217C01CDF565}" type="slidenum">
               <a:rPr lang="en-US" smtClean="0"/>
               <a:pPr/>
-              <a:t>14</a:t>
+              <a:t>15</a:t>
             </a:fld>
             <a:endParaRPr lang="en-US" dirty="0"/>
           </a:p>
@@ -7348,7 +7586,7 @@
 </p:sld>
 </file>
 
-<file path=ppt/slides/slide15.xml><?xml version="1.0" encoding="utf-8"?>
+<file path=ppt/slides/slide16.xml><?xml version="1.0" encoding="utf-8"?>
 <p:sld xmlns:a="http://schemas.openxmlformats.org/drawingml/2006/main" xmlns:r="http://schemas.openxmlformats.org/officeDocument/2006/relationships" xmlns:p="http://schemas.openxmlformats.org/presentationml/2006/main">
   <p:cSld>
     <p:spTree>
@@ -7400,7 +7638,7 @@
             <a:fld id="{D57F1E4F-1CFF-5643-939E-217C01CDF565}" type="slidenum">
               <a:rPr lang="en-US" smtClean="0"/>
               <a:pPr/>
-              <a:t>15</a:t>
+              <a:t>16</a:t>
             </a:fld>
             <a:endParaRPr lang="en-US" dirty="0"/>
           </a:p>
@@ -10938,7 +11176,7 @@
 </p:sld>
 </file>
 
-<file path=ppt/slides/slide16.xml><?xml version="1.0" encoding="utf-8"?>
+<file path=ppt/slides/slide17.xml><?xml version="1.0" encoding="utf-8"?>
 <p:sld xmlns:a="http://schemas.openxmlformats.org/drawingml/2006/main" xmlns:r="http://schemas.openxmlformats.org/officeDocument/2006/relationships" xmlns:p="http://schemas.openxmlformats.org/presentationml/2006/main">
   <p:cSld>
     <p:spTree>
@@ -10990,7 +11228,7 @@
             <a:fld id="{D57F1E4F-1CFF-5643-939E-217C01CDF565}" type="slidenum">
               <a:rPr lang="en-US" smtClean="0"/>
               <a:pPr/>
-              <a:t>16</a:t>
+              <a:t>17</a:t>
             </a:fld>
             <a:endParaRPr lang="en-US" dirty="0"/>
           </a:p>
@@ -13691,7 +13929,7 @@
 </p:sld>
 </file>
 
-<file path=ppt/slides/slide17.xml><?xml version="1.0" encoding="utf-8"?>
+<file path=ppt/slides/slide18.xml><?xml version="1.0" encoding="utf-8"?>
 <p:sld xmlns:a="http://schemas.openxmlformats.org/drawingml/2006/main" xmlns:r="http://schemas.openxmlformats.org/officeDocument/2006/relationships" xmlns:p="http://schemas.openxmlformats.org/presentationml/2006/main">
   <p:cSld>
     <p:spTree>
@@ -13743,7 +13981,7 @@
             <a:fld id="{D57F1E4F-1CFF-5643-939E-217C01CDF565}" type="slidenum">
               <a:rPr lang="en-US" smtClean="0"/>
               <a:pPr/>
-              <a:t>17</a:t>
+              <a:t>18</a:t>
             </a:fld>
             <a:endParaRPr lang="en-US" dirty="0"/>
           </a:p>
@@ -20385,7 +20623,7 @@
         <p:cNvPr id="1" name="">
           <a:extLst>
             <a:ext uri="{FF2B5EF4-FFF2-40B4-BE49-F238E27FC236}">
-              <a16:creationId xmlns:a16="http://schemas.microsoft.com/office/drawing/2014/main" id="{EE49FD04-6707-491D-94E5-5D283BBFB716}"/>
+              <a16:creationId xmlns:a16="http://schemas.microsoft.com/office/drawing/2014/main" id="{F939B18E-3E0A-C274-ECC9-295768CA3675}"/>
             </a:ext>
           </a:extLst>
         </p:cNvPr>
@@ -20405,7 +20643,7 @@
           <p:cNvPr id="4" name="슬라이드 번호 개체 틀 3">
             <a:extLst>
               <a:ext uri="{FF2B5EF4-FFF2-40B4-BE49-F238E27FC236}">
-                <a16:creationId xmlns:a16="http://schemas.microsoft.com/office/drawing/2014/main" id="{447508AB-053B-0F55-054F-EA19F0D0448A}"/>
+                <a16:creationId xmlns:a16="http://schemas.microsoft.com/office/drawing/2014/main" id="{A86A7A19-64BD-F4CA-BB60-000D94627CB0}"/>
               </a:ext>
             </a:extLst>
           </p:cNvPr>
@@ -20440,7 +20678,7 @@
           <p:cNvPr id="3" name="제목 1">
             <a:extLst>
               <a:ext uri="{FF2B5EF4-FFF2-40B4-BE49-F238E27FC236}">
-                <a16:creationId xmlns:a16="http://schemas.microsoft.com/office/drawing/2014/main" id="{1C0125AD-F562-9BF3-3149-9536F58013DB}"/>
+                <a16:creationId xmlns:a16="http://schemas.microsoft.com/office/drawing/2014/main" id="{985C62E8-1853-E1FD-CC3A-8330CB4CCB9E}"/>
               </a:ext>
             </a:extLst>
           </p:cNvPr>
@@ -20505,7 +20743,7 @@
           <p:cNvPr id="11" name="TextBox 10">
             <a:extLst>
               <a:ext uri="{FF2B5EF4-FFF2-40B4-BE49-F238E27FC236}">
-                <a16:creationId xmlns:a16="http://schemas.microsoft.com/office/drawing/2014/main" id="{69062503-D9BC-80F8-E72A-F6D6C0798CD6}"/>
+                <a16:creationId xmlns:a16="http://schemas.microsoft.com/office/drawing/2014/main" id="{5A973E14-6083-A110-3707-58B8308316AF}"/>
               </a:ext>
             </a:extLst>
           </p:cNvPr>
@@ -20565,7 +20803,7 @@
           <p:cNvPr id="6" name="제목 1">
             <a:extLst>
               <a:ext uri="{FF2B5EF4-FFF2-40B4-BE49-F238E27FC236}">
-                <a16:creationId xmlns:a16="http://schemas.microsoft.com/office/drawing/2014/main" id="{5BBB1417-2155-3FD1-5795-B79DDE6B1CE0}"/>
+                <a16:creationId xmlns:a16="http://schemas.microsoft.com/office/drawing/2014/main" id="{6EFF6E6B-E87D-FEE1-4D00-50253A6816A6}"/>
               </a:ext>
             </a:extLst>
           </p:cNvPr>
@@ -20633,7 +20871,7 @@
           <p:cNvPr id="10" name="표 9">
             <a:extLst>
               <a:ext uri="{FF2B5EF4-FFF2-40B4-BE49-F238E27FC236}">
-                <a16:creationId xmlns:a16="http://schemas.microsoft.com/office/drawing/2014/main" id="{A3600702-A36E-F647-445A-BA5D36195825}"/>
+                <a16:creationId xmlns:a16="http://schemas.microsoft.com/office/drawing/2014/main" id="{95A11E39-F9F4-0DDE-2DB3-146C2BA27C44}"/>
               </a:ext>
             </a:extLst>
           </p:cNvPr>
@@ -21057,7 +21295,7 @@
           <p:cNvPr id="8" name="그래픽 7" descr="트럭">
             <a:extLst>
               <a:ext uri="{FF2B5EF4-FFF2-40B4-BE49-F238E27FC236}">
-                <a16:creationId xmlns:a16="http://schemas.microsoft.com/office/drawing/2014/main" id="{D4E106D7-CB6D-07E9-9F90-D883181277BA}"/>
+                <a16:creationId xmlns:a16="http://schemas.microsoft.com/office/drawing/2014/main" id="{28460220-777E-3C0C-B16C-BA571BA5F20D}"/>
               </a:ext>
             </a:extLst>
           </p:cNvPr>
@@ -21093,7 +21331,7 @@
           <p:cNvPr id="7" name="TextBox 6">
             <a:extLst>
               <a:ext uri="{FF2B5EF4-FFF2-40B4-BE49-F238E27FC236}">
-                <a16:creationId xmlns:a16="http://schemas.microsoft.com/office/drawing/2014/main" id="{47765E26-0D3B-29BF-AA81-65E95B3EBB2A}"/>
+                <a16:creationId xmlns:a16="http://schemas.microsoft.com/office/drawing/2014/main" id="{FF57FCBC-EFCE-E994-1881-03EFF3498D1B}"/>
               </a:ext>
             </a:extLst>
           </p:cNvPr>
@@ -21103,7 +21341,7 @@
         <p:spPr>
           <a:xfrm>
             <a:off x="5538225" y="3429000"/>
-            <a:ext cx="6310875" cy="1815882"/>
+            <a:ext cx="6310875" cy="2062103"/>
           </a:xfrm>
           <a:prstGeom prst="rect">
             <a:avLst/>
@@ -21255,6 +21493,33 @@
                 <a:cs typeface="Segoe UI Light" panose="020B0502040204020203" pitchFamily="34" charset="0"/>
               </a:rPr>
               <a:t>구조를 사용</a:t>
+            </a:r>
+            <a:r>
+              <a:rPr lang="en-US" altLang="ko-KR" sz="1600" dirty="0">
+                <a:latin typeface="D2Coding" panose="020B0609020101020101" pitchFamily="49" charset="-127"/>
+                <a:ea typeface="D2Coding" panose="020B0609020101020101" pitchFamily="49" charset="-127"/>
+                <a:cs typeface="Segoe UI Light" panose="020B0502040204020203" pitchFamily="34" charset="0"/>
+              </a:rPr>
+              <a:t> </a:t>
+            </a:r>
+            <a:r>
+              <a:rPr lang="en-US" altLang="ko-KR" sz="1600" dirty="0">
+                <a:latin typeface="D2Coding" panose="020B0609020101020101" pitchFamily="49" charset="-127"/>
+                <a:ea typeface="D2Coding" panose="020B0609020101020101" pitchFamily="49" charset="-127"/>
+                <a:cs typeface="Segoe UI Light" panose="020B0502040204020203" pitchFamily="34" charset="0"/>
+                <a:sym typeface="Wingdings" panose="05000000000000000000" pitchFamily="2" charset="2"/>
+              </a:rPr>
+              <a:t> </a:t>
+            </a:r>
+            <a:r>
+              <a:rPr lang="en-US" altLang="ko-KR" sz="1600" dirty="0">
+                <a:latin typeface="D2Coding" panose="020B0609020101020101" pitchFamily="49" charset="-127"/>
+                <a:ea typeface="D2Coding" panose="020B0609020101020101" pitchFamily="49" charset="-127"/>
+                <a:cs typeface="Segoe UI Light" panose="020B0502040204020203" pitchFamily="34" charset="0"/>
+                <a:sym typeface="Wingdings" panose="05000000000000000000" pitchFamily="2" charset="2"/>
+                <a:hlinkClick r:id="rId4"/>
+              </a:rPr>
+              <a:t>C4W3L04 Convolutional Implementation Sliding Windows</a:t>
             </a:r>
             <a:endParaRPr lang="en-US" altLang="ko-KR" sz="1600" dirty="0">
               <a:latin typeface="D2Coding" panose="020B0609020101020101" pitchFamily="49" charset="-127"/>
@@ -21364,7 +21629,7 @@
     </p:spTree>
     <p:extLst>
       <p:ext uri="{BB962C8B-B14F-4D97-AF65-F5344CB8AC3E}">
-        <p14:creationId xmlns:p14="http://schemas.microsoft.com/office/powerpoint/2010/main" val="1781201131"/>
+        <p14:creationId xmlns:p14="http://schemas.microsoft.com/office/powerpoint/2010/main" val="4120168176"/>
       </p:ext>
     </p:extLst>
   </p:cSld>
@@ -21484,6 +21749,670 @@
         <p:cNvPr id="1" name="">
           <a:extLst>
             <a:ext uri="{FF2B5EF4-FFF2-40B4-BE49-F238E27FC236}">
+              <a16:creationId xmlns:a16="http://schemas.microsoft.com/office/drawing/2014/main" id="{EE49FD04-6707-491D-94E5-5D283BBFB716}"/>
+            </a:ext>
+          </a:extLst>
+        </p:cNvPr>
+        <p:cNvGrpSpPr/>
+        <p:nvPr/>
+      </p:nvGrpSpPr>
+      <p:grpSpPr>
+        <a:xfrm>
+          <a:off x="0" y="0"/>
+          <a:ext cx="0" cy="0"/>
+          <a:chOff x="0" y="0"/>
+          <a:chExt cx="0" cy="0"/>
+        </a:xfrm>
+      </p:grpSpPr>
+      <p:sp>
+        <p:nvSpPr>
+          <p:cNvPr id="4" name="슬라이드 번호 개체 틀 3">
+            <a:extLst>
+              <a:ext uri="{FF2B5EF4-FFF2-40B4-BE49-F238E27FC236}">
+                <a16:creationId xmlns:a16="http://schemas.microsoft.com/office/drawing/2014/main" id="{447508AB-053B-0F55-054F-EA19F0D0448A}"/>
+              </a:ext>
+            </a:extLst>
+          </p:cNvPr>
+          <p:cNvSpPr>
+            <a:spLocks noGrp="1"/>
+          </p:cNvSpPr>
+          <p:nvPr>
+            <p:ph type="sldNum" sz="quarter" idx="12"/>
+          </p:nvPr>
+        </p:nvSpPr>
+        <p:spPr>
+          <a:xfrm>
+            <a:off x="10514011" y="6036261"/>
+            <a:ext cx="753545" cy="365125"/>
+          </a:xfrm>
+        </p:spPr>
+        <p:txBody>
+          <a:bodyPr/>
+          <a:lstStyle/>
+          <a:p>
+            <a:fld id="{D57F1E4F-1CFF-5643-939E-217C01CDF565}" type="slidenum">
+              <a:rPr lang="en-US" smtClean="0"/>
+              <a:pPr/>
+              <a:t>8</a:t>
+            </a:fld>
+            <a:endParaRPr lang="en-US" dirty="0"/>
+          </a:p>
+        </p:txBody>
+      </p:sp>
+      <p:sp>
+        <p:nvSpPr>
+          <p:cNvPr id="3" name="제목 1">
+            <a:extLst>
+              <a:ext uri="{FF2B5EF4-FFF2-40B4-BE49-F238E27FC236}">
+                <a16:creationId xmlns:a16="http://schemas.microsoft.com/office/drawing/2014/main" id="{1C0125AD-F562-9BF3-3149-9536F58013DB}"/>
+              </a:ext>
+            </a:extLst>
+          </p:cNvPr>
+          <p:cNvSpPr txBox="1">
+            <a:spLocks/>
+          </p:cNvSpPr>
+          <p:nvPr/>
+        </p:nvSpPr>
+        <p:spPr>
+          <a:xfrm>
+            <a:off x="475645" y="481983"/>
+            <a:ext cx="10353762" cy="766439"/>
+          </a:xfrm>
+          <a:prstGeom prst="rect">
+            <a:avLst/>
+          </a:prstGeom>
+        </p:spPr>
+        <p:txBody>
+          <a:bodyPr vert="horz" lIns="91440" tIns="45720" rIns="91440" bIns="45720" rtlCol="0" anchor="ctr">
+            <a:normAutofit/>
+          </a:bodyPr>
+          <a:lstStyle>
+            <a:lvl1pPr algn="ctr" defTabSz="914400" rtl="0" eaLnBrk="1" latinLnBrk="1" hangingPunct="1">
+              <a:lnSpc>
+                <a:spcPct val="90000"/>
+              </a:lnSpc>
+              <a:spcBef>
+                <a:spcPct val="0"/>
+              </a:spcBef>
+              <a:buNone/>
+              <a:defRPr sz="3200" kern="1200" cap="all" baseline="0">
+                <a:solidFill>
+                  <a:schemeClr val="tx1"/>
+                </a:solidFill>
+                <a:effectLst/>
+                <a:latin typeface="Batang" panose="02030600000101010101" pitchFamily="18" charset="-127"/>
+                <a:ea typeface="Batang" panose="02030600000101010101" pitchFamily="18" charset="-127"/>
+                <a:cs typeface="+mj-cs"/>
+              </a:defRPr>
+            </a:lvl1pPr>
+          </a:lstStyle>
+          <a:p>
+            <a:pPr algn="l"/>
+            <a:r>
+              <a:rPr lang="en-US" altLang="ko-KR" sz="2800" cap="none" dirty="0">
+                <a:latin typeface="D2Coding" panose="020B0609020101020101" pitchFamily="49" charset="-127"/>
+                <a:ea typeface="D2Coding" panose="020B0609020101020101" pitchFamily="49" charset="-127"/>
+                <a:cs typeface="Segoe UI Light" panose="020B0502040204020203" pitchFamily="34" charset="0"/>
+              </a:rPr>
+              <a:t>YOLO</a:t>
+            </a:r>
+            <a:endParaRPr lang="ko-KR" altLang="en-US" sz="2800" cap="none" dirty="0">
+              <a:latin typeface="D2Coding" panose="020B0609020101020101" pitchFamily="49" charset="-127"/>
+              <a:ea typeface="D2Coding" panose="020B0609020101020101" pitchFamily="49" charset="-127"/>
+              <a:cs typeface="Segoe UI Light" panose="020B0502040204020203" pitchFamily="34" charset="0"/>
+            </a:endParaRPr>
+          </a:p>
+        </p:txBody>
+      </p:sp>
+      <p:sp>
+        <p:nvSpPr>
+          <p:cNvPr id="11" name="TextBox 10">
+            <a:extLst>
+              <a:ext uri="{FF2B5EF4-FFF2-40B4-BE49-F238E27FC236}">
+                <a16:creationId xmlns:a16="http://schemas.microsoft.com/office/drawing/2014/main" id="{69062503-D9BC-80F8-E72A-F6D6C0798CD6}"/>
+              </a:ext>
+            </a:extLst>
+          </p:cNvPr>
+          <p:cNvSpPr txBox="1"/>
+          <p:nvPr/>
+        </p:nvSpPr>
+        <p:spPr>
+          <a:xfrm>
+            <a:off x="571802" y="1248422"/>
+            <a:ext cx="11144553" cy="4620304"/>
+          </a:xfrm>
+          <a:prstGeom prst="rect">
+            <a:avLst/>
+          </a:prstGeom>
+          <a:noFill/>
+        </p:spPr>
+        <p:txBody>
+          <a:bodyPr wrap="square">
+            <a:spAutoFit/>
+          </a:bodyPr>
+          <a:lstStyle/>
+          <a:p>
+            <a:pPr marL="285750" indent="-285750">
+              <a:lnSpc>
+                <a:spcPct val="150000"/>
+              </a:lnSpc>
+              <a:buFont typeface="Wingdings" panose="05000000000000000000" pitchFamily="2" charset="2"/>
+              <a:buChar char="v"/>
+            </a:pPr>
+            <a:r>
+              <a:rPr lang="en-US" altLang="ko-KR" dirty="0">
+                <a:latin typeface="D2Coding" panose="020B0609020101020101" pitchFamily="49" charset="-127"/>
+                <a:ea typeface="D2Coding" panose="020B0609020101020101" pitchFamily="49" charset="-127"/>
+              </a:rPr>
+              <a:t>YOLO</a:t>
+            </a:r>
+            <a:r>
+              <a:rPr lang="ko-KR" altLang="en-US" dirty="0">
+                <a:latin typeface="D2Coding" panose="020B0609020101020101" pitchFamily="49" charset="-127"/>
+                <a:ea typeface="D2Coding" panose="020B0609020101020101" pitchFamily="49" charset="-127"/>
+              </a:rPr>
+              <a:t>는 </a:t>
+            </a:r>
+            <a:r>
+              <a:rPr lang="en-US" altLang="ko-KR" dirty="0">
+                <a:latin typeface="D2Coding" panose="020B0609020101020101" pitchFamily="49" charset="-127"/>
+                <a:ea typeface="D2Coding" panose="020B0609020101020101" pitchFamily="49" charset="-127"/>
+              </a:rPr>
+              <a:t>“</a:t>
+            </a:r>
+            <a:r>
+              <a:rPr lang="ko-KR" altLang="en-US" dirty="0" err="1">
+                <a:latin typeface="D2Coding" panose="020B0609020101020101" pitchFamily="49" charset="-127"/>
+                <a:ea typeface="D2Coding" panose="020B0609020101020101" pitchFamily="49" charset="-127"/>
+              </a:rPr>
+              <a:t>합성곱</a:t>
+            </a:r>
+            <a:r>
+              <a:rPr lang="ko-KR" altLang="en-US" dirty="0">
+                <a:latin typeface="D2Coding" panose="020B0609020101020101" pitchFamily="49" charset="-127"/>
+                <a:ea typeface="D2Coding" panose="020B0609020101020101" pitchFamily="49" charset="-127"/>
+              </a:rPr>
+              <a:t> 슬라이딩 윈도우</a:t>
+            </a:r>
+            <a:r>
+              <a:rPr lang="en-US" altLang="ko-KR" dirty="0">
+                <a:latin typeface="D2Coding" panose="020B0609020101020101" pitchFamily="49" charset="-127"/>
+                <a:ea typeface="D2Coding" panose="020B0609020101020101" pitchFamily="49" charset="-127"/>
+              </a:rPr>
+              <a:t>(</a:t>
+            </a:r>
+            <a:r>
+              <a:rPr lang="en-US" altLang="ko-KR" dirty="0">
+                <a:latin typeface="D2Coding" panose="020B0609020101020101" pitchFamily="49" charset="-127"/>
+                <a:ea typeface="D2Coding" panose="020B0609020101020101" pitchFamily="49" charset="-127"/>
+                <a:cs typeface="Segoe UI Light" panose="020B0502040204020203" pitchFamily="34" charset="0"/>
+                <a:sym typeface="Wingdings" panose="05000000000000000000" pitchFamily="2" charset="2"/>
+                <a:hlinkClick r:id="rId2"/>
+              </a:rPr>
+              <a:t>Convolutional Implementation Sliding Windows</a:t>
+            </a:r>
+            <a:r>
+              <a:rPr lang="en-US" altLang="ko-KR" dirty="0">
+                <a:latin typeface="D2Coding" panose="020B0609020101020101" pitchFamily="49" charset="-127"/>
+                <a:ea typeface="D2Coding" panose="020B0609020101020101" pitchFamily="49" charset="-127"/>
+                <a:cs typeface="Segoe UI Light" panose="020B0502040204020203" pitchFamily="34" charset="0"/>
+                <a:sym typeface="Wingdings" panose="05000000000000000000" pitchFamily="2" charset="2"/>
+              </a:rPr>
+              <a:t>)</a:t>
+            </a:r>
+            <a:r>
+              <a:rPr lang="en-US" altLang="ko-KR" dirty="0">
+                <a:latin typeface="D2Coding" panose="020B0609020101020101" pitchFamily="49" charset="-127"/>
+                <a:ea typeface="D2Coding" panose="020B0609020101020101" pitchFamily="49" charset="-127"/>
+              </a:rPr>
+              <a:t>"</a:t>
+            </a:r>
+            <a:r>
+              <a:rPr lang="ko-KR" altLang="en-US" dirty="0">
+                <a:latin typeface="D2Coding" panose="020B0609020101020101" pitchFamily="49" charset="-127"/>
+                <a:ea typeface="D2Coding" panose="020B0609020101020101" pitchFamily="49" charset="-127"/>
+              </a:rPr>
+              <a:t>의 아이디어를 극대화하고 변형한 것</a:t>
+            </a:r>
+            <a:endParaRPr lang="en-US" altLang="ko-KR" dirty="0">
+              <a:latin typeface="D2Coding" panose="020B0609020101020101" pitchFamily="49" charset="-127"/>
+              <a:ea typeface="D2Coding" panose="020B0609020101020101" pitchFamily="49" charset="-127"/>
+            </a:endParaRPr>
+          </a:p>
+          <a:p>
+            <a:pPr marL="285750" indent="-285750">
+              <a:lnSpc>
+                <a:spcPct val="150000"/>
+              </a:lnSpc>
+              <a:buFont typeface="Wingdings" panose="05000000000000000000" pitchFamily="2" charset="2"/>
+              <a:buChar char="v"/>
+            </a:pPr>
+            <a:r>
+              <a:rPr lang="en-US" altLang="ko-KR" dirty="0">
+                <a:latin typeface="D2Coding" panose="020B0609020101020101" pitchFamily="49" charset="-127"/>
+                <a:ea typeface="D2Coding" panose="020B0609020101020101" pitchFamily="49" charset="-127"/>
+              </a:rPr>
+              <a:t>2 </a:t>
+            </a:r>
+            <a:r>
+              <a:rPr lang="ko-KR" altLang="en-US" dirty="0">
+                <a:latin typeface="D2Coding" panose="020B0609020101020101" pitchFamily="49" charset="-127"/>
+                <a:ea typeface="D2Coding" panose="020B0609020101020101" pitchFamily="49" charset="-127"/>
+              </a:rPr>
+              <a:t>방식의 공통점은 이미지를 </a:t>
+            </a:r>
+            <a:r>
+              <a:rPr lang="ko-KR" altLang="en-US" dirty="0" err="1">
+                <a:latin typeface="D2Coding" panose="020B0609020101020101" pitchFamily="49" charset="-127"/>
+                <a:ea typeface="D2Coding" panose="020B0609020101020101" pitchFamily="49" charset="-127"/>
+              </a:rPr>
+              <a:t>크롭하지</a:t>
+            </a:r>
+            <a:r>
+              <a:rPr lang="ko-KR" altLang="en-US" dirty="0">
+                <a:latin typeface="D2Coding" panose="020B0609020101020101" pitchFamily="49" charset="-127"/>
+                <a:ea typeface="D2Coding" panose="020B0609020101020101" pitchFamily="49" charset="-127"/>
+              </a:rPr>
+              <a:t> 않고 </a:t>
+            </a:r>
+            <a:r>
+              <a:rPr lang="en-US" altLang="ko-KR" dirty="0">
+                <a:latin typeface="D2Coding" panose="020B0609020101020101" pitchFamily="49" charset="-127"/>
+                <a:ea typeface="D2Coding" panose="020B0609020101020101" pitchFamily="49" charset="-127"/>
+              </a:rPr>
+              <a:t>CNN</a:t>
+            </a:r>
+            <a:r>
+              <a:rPr lang="ko-KR" altLang="en-US" dirty="0">
+                <a:latin typeface="D2Coding" panose="020B0609020101020101" pitchFamily="49" charset="-127"/>
+                <a:ea typeface="D2Coding" panose="020B0609020101020101" pitchFamily="49" charset="-127"/>
+              </a:rPr>
+              <a:t>에 통째로 한 번만 통과시켜 최종 출력 </a:t>
+            </a:r>
+            <a:r>
+              <a:rPr lang="ko-KR" altLang="en-US" dirty="0" err="1">
+                <a:latin typeface="D2Coding" panose="020B0609020101020101" pitchFamily="49" charset="-127"/>
+                <a:ea typeface="D2Coding" panose="020B0609020101020101" pitchFamily="49" charset="-127"/>
+              </a:rPr>
+              <a:t>텐서</a:t>
+            </a:r>
+            <a:r>
+              <a:rPr lang="en-US" altLang="ko-KR" dirty="0">
+                <a:latin typeface="D2Coding" panose="020B0609020101020101" pitchFamily="49" charset="-127"/>
+                <a:ea typeface="D2Coding" panose="020B0609020101020101" pitchFamily="49" charset="-127"/>
+              </a:rPr>
+              <a:t>(Tensor)</a:t>
+            </a:r>
+            <a:r>
+              <a:rPr lang="ko-KR" altLang="en-US" dirty="0">
+                <a:latin typeface="D2Coding" panose="020B0609020101020101" pitchFamily="49" charset="-127"/>
+                <a:ea typeface="D2Coding" panose="020B0609020101020101" pitchFamily="49" charset="-127"/>
+              </a:rPr>
+              <a:t>를 얻음</a:t>
+            </a:r>
+            <a:endParaRPr lang="en-US" altLang="ko-KR" dirty="0">
+              <a:latin typeface="D2Coding" panose="020B0609020101020101" pitchFamily="49" charset="-127"/>
+              <a:ea typeface="D2Coding" panose="020B0609020101020101" pitchFamily="49" charset="-127"/>
+            </a:endParaRPr>
+          </a:p>
+          <a:p>
+            <a:pPr marL="285750" indent="-285750">
+              <a:lnSpc>
+                <a:spcPct val="150000"/>
+              </a:lnSpc>
+              <a:buFont typeface="Wingdings" panose="05000000000000000000" pitchFamily="2" charset="2"/>
+              <a:buChar char="v"/>
+            </a:pPr>
+            <a:r>
+              <a:rPr lang="en-US" altLang="ko-KR" dirty="0">
+                <a:latin typeface="D2Coding" panose="020B0609020101020101" pitchFamily="49" charset="-127"/>
+                <a:ea typeface="D2Coding" panose="020B0609020101020101" pitchFamily="49" charset="-127"/>
+              </a:rPr>
+              <a:t>YOLO</a:t>
+            </a:r>
+            <a:r>
+              <a:rPr lang="ko-KR" altLang="en-US" dirty="0">
+                <a:latin typeface="D2Coding" panose="020B0609020101020101" pitchFamily="49" charset="-127"/>
+                <a:ea typeface="D2Coding" panose="020B0609020101020101" pitchFamily="49" charset="-127"/>
+              </a:rPr>
+              <a:t>의 발전은 겹치는 윈도우를 돌리는 대신</a:t>
+            </a:r>
+            <a:r>
+              <a:rPr lang="en-US" altLang="ko-KR" dirty="0">
+                <a:latin typeface="D2Coding" panose="020B0609020101020101" pitchFamily="49" charset="-127"/>
+                <a:ea typeface="D2Coding" panose="020B0609020101020101" pitchFamily="49" charset="-127"/>
+              </a:rPr>
+              <a:t>, </a:t>
+            </a:r>
+            <a:r>
+              <a:rPr lang="ko-KR" altLang="en-US" dirty="0">
+                <a:latin typeface="D2Coding" panose="020B0609020101020101" pitchFamily="49" charset="-127"/>
+                <a:ea typeface="D2Coding" panose="020B0609020101020101" pitchFamily="49" charset="-127"/>
+              </a:rPr>
+              <a:t>이미지를 명확한 그리드 격자로 나누고 각 격자가 </a:t>
+            </a:r>
+            <a:r>
+              <a:rPr lang="en-US" altLang="ko-KR" dirty="0">
+                <a:latin typeface="D2Coding" panose="020B0609020101020101" pitchFamily="49" charset="-127"/>
+                <a:ea typeface="D2Coding" panose="020B0609020101020101" pitchFamily="49" charset="-127"/>
+              </a:rPr>
+              <a:t>[</a:t>
+            </a:r>
+            <a:r>
+              <a:rPr lang="ko-KR" altLang="en-US" dirty="0">
+                <a:latin typeface="D2Coding" panose="020B0609020101020101" pitchFamily="49" charset="-127"/>
+                <a:ea typeface="D2Coding" panose="020B0609020101020101" pitchFamily="49" charset="-127"/>
+              </a:rPr>
+              <a:t>물체 존재 확률</a:t>
+            </a:r>
+            <a:r>
+              <a:rPr lang="en-US" altLang="ko-KR" dirty="0">
+                <a:latin typeface="D2Coding" panose="020B0609020101020101" pitchFamily="49" charset="-127"/>
+                <a:ea typeface="D2Coding" panose="020B0609020101020101" pitchFamily="49" charset="-127"/>
+              </a:rPr>
+              <a:t>, </a:t>
+            </a:r>
+            <a:r>
+              <a:rPr lang="ko-KR" altLang="en-US" dirty="0">
+                <a:latin typeface="D2Coding" panose="020B0609020101020101" pitchFamily="49" charset="-127"/>
+                <a:ea typeface="D2Coding" panose="020B0609020101020101" pitchFamily="49" charset="-127"/>
+              </a:rPr>
+              <a:t>정확한 </a:t>
+            </a:r>
+            <a:r>
+              <a:rPr lang="ko-KR" altLang="en-US" dirty="0" err="1">
+                <a:latin typeface="D2Coding" panose="020B0609020101020101" pitchFamily="49" charset="-127"/>
+                <a:ea typeface="D2Coding" panose="020B0609020101020101" pitchFamily="49" charset="-127"/>
+              </a:rPr>
+              <a:t>바운딩</a:t>
+            </a:r>
+            <a:r>
+              <a:rPr lang="ko-KR" altLang="en-US" dirty="0">
+                <a:latin typeface="D2Coding" panose="020B0609020101020101" pitchFamily="49" charset="-127"/>
+                <a:ea typeface="D2Coding" panose="020B0609020101020101" pitchFamily="49" charset="-127"/>
+              </a:rPr>
+              <a:t> 박스 좌표</a:t>
+            </a:r>
+            <a:r>
+              <a:rPr lang="en-US" altLang="ko-KR" dirty="0">
+                <a:latin typeface="D2Coding" panose="020B0609020101020101" pitchFamily="49" charset="-127"/>
+                <a:ea typeface="D2Coding" panose="020B0609020101020101" pitchFamily="49" charset="-127"/>
+              </a:rPr>
+              <a:t>, </a:t>
+            </a:r>
+            <a:r>
+              <a:rPr lang="ko-KR" altLang="en-US" dirty="0">
+                <a:latin typeface="D2Coding" panose="020B0609020101020101" pitchFamily="49" charset="-127"/>
+                <a:ea typeface="D2Coding" panose="020B0609020101020101" pitchFamily="49" charset="-127"/>
+              </a:rPr>
+              <a:t>클래스 확률</a:t>
+            </a:r>
+            <a:r>
+              <a:rPr lang="en-US" altLang="ko-KR" dirty="0">
+                <a:latin typeface="D2Coding" panose="020B0609020101020101" pitchFamily="49" charset="-127"/>
+                <a:ea typeface="D2Coding" panose="020B0609020101020101" pitchFamily="49" charset="-127"/>
+              </a:rPr>
+              <a:t>]</a:t>
+            </a:r>
+            <a:r>
+              <a:rPr lang="ko-KR" altLang="en-US" dirty="0">
+                <a:latin typeface="D2Coding" panose="020B0609020101020101" pitchFamily="49" charset="-127"/>
+                <a:ea typeface="D2Coding" panose="020B0609020101020101" pitchFamily="49" charset="-127"/>
+              </a:rPr>
+              <a:t>을 동시에 </a:t>
+            </a:r>
+            <a:r>
+              <a:rPr lang="ko-KR" altLang="en-US" dirty="0" err="1">
+                <a:latin typeface="D2Coding" panose="020B0609020101020101" pitchFamily="49" charset="-127"/>
+                <a:ea typeface="D2Coding" panose="020B0609020101020101" pitchFamily="49" charset="-127"/>
+              </a:rPr>
+              <a:t>뱉어내도록</a:t>
+            </a:r>
+            <a:r>
+              <a:rPr lang="ko-KR" altLang="en-US" dirty="0">
+                <a:latin typeface="D2Coding" panose="020B0609020101020101" pitchFamily="49" charset="-127"/>
+                <a:ea typeface="D2Coding" panose="020B0609020101020101" pitchFamily="49" charset="-127"/>
+              </a:rPr>
+              <a:t> 아키텍처를 정립하게 되어</a:t>
+            </a:r>
+            <a:endParaRPr lang="en-US" altLang="ko-KR" dirty="0">
+              <a:latin typeface="D2Coding" panose="020B0609020101020101" pitchFamily="49" charset="-127"/>
+              <a:ea typeface="D2Coding" panose="020B0609020101020101" pitchFamily="49" charset="-127"/>
+            </a:endParaRPr>
+          </a:p>
+          <a:p>
+            <a:pPr marL="285750" indent="-285750">
+              <a:lnSpc>
+                <a:spcPct val="150000"/>
+              </a:lnSpc>
+              <a:buFont typeface="Wingdings" panose="05000000000000000000" pitchFamily="2" charset="2"/>
+              <a:buChar char="v"/>
+            </a:pPr>
+            <a:r>
+              <a:rPr lang="en-US" altLang="ko-KR" dirty="0">
+                <a:latin typeface="D2Coding" panose="020B0609020101020101" pitchFamily="49" charset="-127"/>
+                <a:ea typeface="D2Coding" panose="020B0609020101020101" pitchFamily="49" charset="-127"/>
+              </a:rPr>
+              <a:t>YOLO</a:t>
+            </a:r>
+            <a:r>
+              <a:rPr lang="ko-KR" altLang="en-US" dirty="0">
+                <a:latin typeface="D2Coding" panose="020B0609020101020101" pitchFamily="49" charset="-127"/>
+                <a:ea typeface="D2Coding" panose="020B0609020101020101" pitchFamily="49" charset="-127"/>
+              </a:rPr>
+              <a:t>는 슬라이딩 윈도우 방식보다 훨씬 정밀하게 물체의 경계선</a:t>
+            </a:r>
+            <a:r>
+              <a:rPr lang="en-US" altLang="ko-KR" dirty="0">
+                <a:latin typeface="D2Coding" panose="020B0609020101020101" pitchFamily="49" charset="-127"/>
+                <a:ea typeface="D2Coding" panose="020B0609020101020101" pitchFamily="49" charset="-127"/>
+              </a:rPr>
+              <a:t>(Bounding Box)</a:t>
+            </a:r>
+            <a:r>
+              <a:rPr lang="ko-KR" altLang="en-US" dirty="0">
+                <a:latin typeface="D2Coding" panose="020B0609020101020101" pitchFamily="49" charset="-127"/>
+                <a:ea typeface="D2Coding" panose="020B0609020101020101" pitchFamily="49" charset="-127"/>
+              </a:rPr>
+              <a:t>을 찾아내면서도</a:t>
+            </a:r>
+            <a:r>
+              <a:rPr lang="en-US" altLang="ko-KR" dirty="0">
+                <a:latin typeface="D2Coding" panose="020B0609020101020101" pitchFamily="49" charset="-127"/>
+                <a:ea typeface="D2Coding" panose="020B0609020101020101" pitchFamily="49" charset="-127"/>
+              </a:rPr>
+              <a:t>, '</a:t>
+            </a:r>
+            <a:r>
+              <a:rPr lang="ko-KR" altLang="en-US" dirty="0">
+                <a:latin typeface="D2Coding" panose="020B0609020101020101" pitchFamily="49" charset="-127"/>
+                <a:ea typeface="D2Coding" panose="020B0609020101020101" pitchFamily="49" charset="-127"/>
+              </a:rPr>
+              <a:t>단 한 번만 보면 된다</a:t>
+            </a:r>
+            <a:r>
+              <a:rPr lang="en-US" altLang="ko-KR" dirty="0">
+                <a:latin typeface="D2Coding" panose="020B0609020101020101" pitchFamily="49" charset="-127"/>
+                <a:ea typeface="D2Coding" panose="020B0609020101020101" pitchFamily="49" charset="-127"/>
+              </a:rPr>
+              <a:t>(You Only Look Once)'</a:t>
+            </a:r>
+            <a:r>
+              <a:rPr lang="ko-KR" altLang="en-US" dirty="0">
+                <a:latin typeface="D2Coding" panose="020B0609020101020101" pitchFamily="49" charset="-127"/>
+                <a:ea typeface="D2Coding" panose="020B0609020101020101" pitchFamily="49" charset="-127"/>
+              </a:rPr>
+              <a:t>는 이름에 걸맞게 실시간</a:t>
+            </a:r>
+            <a:r>
+              <a:rPr lang="en-US" altLang="ko-KR" dirty="0">
+                <a:latin typeface="D2Coding" panose="020B0609020101020101" pitchFamily="49" charset="-127"/>
+                <a:ea typeface="D2Coding" panose="020B0609020101020101" pitchFamily="49" charset="-127"/>
+              </a:rPr>
+              <a:t>(FPS 45 </a:t>
+            </a:r>
+            <a:r>
+              <a:rPr lang="ko-KR" altLang="en-US" dirty="0">
+                <a:latin typeface="D2Coding" panose="020B0609020101020101" pitchFamily="49" charset="-127"/>
+                <a:ea typeface="D2Coding" panose="020B0609020101020101" pitchFamily="49" charset="-127"/>
+              </a:rPr>
+              <a:t>이상</a:t>
+            </a:r>
+            <a:r>
+              <a:rPr lang="en-US" altLang="ko-KR" dirty="0">
+                <a:latin typeface="D2Coding" panose="020B0609020101020101" pitchFamily="49" charset="-127"/>
+                <a:ea typeface="D2Coding" panose="020B0609020101020101" pitchFamily="49" charset="-127"/>
+              </a:rPr>
+              <a:t>)</a:t>
+            </a:r>
+            <a:r>
+              <a:rPr lang="ko-KR" altLang="en-US" dirty="0">
+                <a:latin typeface="D2Coding" panose="020B0609020101020101" pitchFamily="49" charset="-127"/>
+                <a:ea typeface="D2Coding" panose="020B0609020101020101" pitchFamily="49" charset="-127"/>
+              </a:rPr>
+              <a:t>으로 작동하는 엄청난 속도를 가질 수 있음</a:t>
+            </a:r>
+            <a:endParaRPr lang="en-US" altLang="ko-KR" dirty="0">
+              <a:latin typeface="D2Coding" panose="020B0609020101020101" pitchFamily="49" charset="-127"/>
+              <a:ea typeface="D2Coding" panose="020B0609020101020101" pitchFamily="49" charset="-127"/>
+            </a:endParaRPr>
+          </a:p>
+          <a:p>
+            <a:pPr marL="285750" indent="-285750">
+              <a:lnSpc>
+                <a:spcPct val="150000"/>
+              </a:lnSpc>
+              <a:buFont typeface="Wingdings" panose="05000000000000000000" pitchFamily="2" charset="2"/>
+              <a:buChar char="v"/>
+            </a:pPr>
+            <a:endParaRPr lang="en-US" altLang="ko-KR" dirty="0">
+              <a:latin typeface="D2Coding" panose="020B0609020101020101" pitchFamily="49" charset="-127"/>
+              <a:ea typeface="D2Coding" panose="020B0609020101020101" pitchFamily="49" charset="-127"/>
+            </a:endParaRPr>
+          </a:p>
+        </p:txBody>
+      </p:sp>
+      <p:sp>
+        <p:nvSpPr>
+          <p:cNvPr id="6" name="제목 1">
+            <a:extLst>
+              <a:ext uri="{FF2B5EF4-FFF2-40B4-BE49-F238E27FC236}">
+                <a16:creationId xmlns:a16="http://schemas.microsoft.com/office/drawing/2014/main" id="{5BBB1417-2155-3FD1-5795-B79DDE6B1CE0}"/>
+              </a:ext>
+            </a:extLst>
+          </p:cNvPr>
+          <p:cNvSpPr txBox="1">
+            <a:spLocks/>
+          </p:cNvSpPr>
+          <p:nvPr/>
+        </p:nvSpPr>
+        <p:spPr>
+          <a:xfrm>
+            <a:off x="5848350" y="647700"/>
+            <a:ext cx="5812601" cy="600722"/>
+          </a:xfrm>
+          <a:prstGeom prst="rect">
+            <a:avLst/>
+          </a:prstGeom>
+        </p:spPr>
+        <p:txBody>
+          <a:bodyPr vert="horz" lIns="91440" tIns="45720" rIns="91440" bIns="45720" rtlCol="0" anchor="ctr">
+            <a:normAutofit/>
+          </a:bodyPr>
+          <a:lstStyle>
+            <a:lvl1pPr algn="ctr" defTabSz="914400" rtl="0" eaLnBrk="1" latinLnBrk="1" hangingPunct="1">
+              <a:lnSpc>
+                <a:spcPct val="90000"/>
+              </a:lnSpc>
+              <a:spcBef>
+                <a:spcPct val="0"/>
+              </a:spcBef>
+              <a:buNone/>
+              <a:defRPr sz="3200" kern="1200" cap="all" baseline="0">
+                <a:solidFill>
+                  <a:schemeClr val="tx1"/>
+                </a:solidFill>
+                <a:effectLst/>
+                <a:latin typeface="Batang" panose="02030600000101010101" pitchFamily="18" charset="-127"/>
+                <a:ea typeface="Batang" panose="02030600000101010101" pitchFamily="18" charset="-127"/>
+                <a:cs typeface="+mj-cs"/>
+              </a:defRPr>
+            </a:lvl1pPr>
+          </a:lstStyle>
+          <a:p>
+            <a:pPr algn="r"/>
+            <a:r>
+              <a:rPr lang="en-US" altLang="ko-KR" sz="2000" cap="none" dirty="0">
+                <a:latin typeface="D2Coding" panose="020B0609020101020101" pitchFamily="49" charset="-127"/>
+                <a:ea typeface="D2Coding" panose="020B0609020101020101" pitchFamily="49" charset="-127"/>
+                <a:cs typeface="Segoe UI Light" panose="020B0502040204020203" pitchFamily="34" charset="0"/>
+              </a:rPr>
+              <a:t>Convolutional</a:t>
+            </a:r>
+            <a:r>
+              <a:rPr lang="ko-KR" altLang="en-US" sz="2000" cap="none" dirty="0">
+                <a:latin typeface="D2Coding" panose="020B0609020101020101" pitchFamily="49" charset="-127"/>
+                <a:ea typeface="D2Coding" panose="020B0609020101020101" pitchFamily="49" charset="-127"/>
+                <a:cs typeface="Segoe UI Light" panose="020B0502040204020203" pitchFamily="34" charset="0"/>
+              </a:rPr>
+              <a:t> </a:t>
+            </a:r>
+            <a:r>
+              <a:rPr lang="en-US" altLang="ko-KR" sz="2000" cap="none" dirty="0">
+                <a:latin typeface="D2Coding" panose="020B0609020101020101" pitchFamily="49" charset="-127"/>
+                <a:ea typeface="D2Coding" panose="020B0609020101020101" pitchFamily="49" charset="-127"/>
+                <a:cs typeface="Segoe UI Light" panose="020B0502040204020203" pitchFamily="34" charset="0"/>
+              </a:rPr>
+              <a:t>Implementation</a:t>
+            </a:r>
+            <a:r>
+              <a:rPr lang="ko-KR" altLang="en-US" sz="2000" cap="none" dirty="0">
+                <a:latin typeface="D2Coding" panose="020B0609020101020101" pitchFamily="49" charset="-127"/>
+                <a:ea typeface="D2Coding" panose="020B0609020101020101" pitchFamily="49" charset="-127"/>
+                <a:cs typeface="Segoe UI Light" panose="020B0502040204020203" pitchFamily="34" charset="0"/>
+              </a:rPr>
+              <a:t> </a:t>
+            </a:r>
+            <a:r>
+              <a:rPr lang="en-US" altLang="ko-KR" sz="2000" cap="none" dirty="0">
+                <a:latin typeface="D2Coding" panose="020B0609020101020101" pitchFamily="49" charset="-127"/>
+                <a:ea typeface="D2Coding" panose="020B0609020101020101" pitchFamily="49" charset="-127"/>
+                <a:cs typeface="Segoe UI Light" panose="020B0502040204020203" pitchFamily="34" charset="0"/>
+              </a:rPr>
+              <a:t>Sliding Windows</a:t>
+            </a:r>
+            <a:r>
+              <a:rPr lang="ko-KR" altLang="en-US" sz="2000" cap="none" dirty="0">
+                <a:latin typeface="D2Coding" panose="020B0609020101020101" pitchFamily="49" charset="-127"/>
+                <a:ea typeface="D2Coding" panose="020B0609020101020101" pitchFamily="49" charset="-127"/>
+                <a:cs typeface="Segoe UI Light" panose="020B0502040204020203" pitchFamily="34" charset="0"/>
+              </a:rPr>
+              <a:t> </a:t>
+            </a:r>
+          </a:p>
+        </p:txBody>
+      </p:sp>
+    </p:spTree>
+    <p:extLst>
+      <p:ext uri="{BB962C8B-B14F-4D97-AF65-F5344CB8AC3E}">
+        <p14:creationId xmlns:p14="http://schemas.microsoft.com/office/powerpoint/2010/main" val="1781201131"/>
+      </p:ext>
+    </p:extLst>
+  </p:cSld>
+  <p:clrMapOvr>
+    <a:masterClrMapping/>
+  </p:clrMapOvr>
+</p:sld>
+</file>
+
+<file path=ppt/slides/slide9.xml><?xml version="1.0" encoding="utf-8"?>
+<p:sld xmlns:a="http://schemas.openxmlformats.org/drawingml/2006/main" xmlns:r="http://schemas.openxmlformats.org/officeDocument/2006/relationships" xmlns:p="http://schemas.openxmlformats.org/presentationml/2006/main">
+  <p:cSld>
+    <p:spTree>
+      <p:nvGrpSpPr>
+        <p:cNvPr id="1" name="">
+          <a:extLst>
+            <a:ext uri="{FF2B5EF4-FFF2-40B4-BE49-F238E27FC236}">
               <a16:creationId xmlns:a16="http://schemas.microsoft.com/office/drawing/2014/main" id="{25EA1402-08FA-1414-7D39-D22F4CF6B8E3}"/>
             </a:ext>
           </a:extLst>
@@ -21528,7 +22457,7 @@
             <a:fld id="{D57F1E4F-1CFF-5643-939E-217C01CDF565}" type="slidenum">
               <a:rPr lang="en-US" smtClean="0"/>
               <a:pPr/>
-              <a:t>8</a:t>
+              <a:t>9</a:t>
             </a:fld>
             <a:endParaRPr lang="en-US" dirty="0"/>
           </a:p>
@@ -23553,242 +24482,6 @@
       </p:par>
     </p:tnLst>
   </p:timing>
-</p:sld>
-</file>
-
-<file path=ppt/slides/slide9.xml><?xml version="1.0" encoding="utf-8"?>
-<p:sld xmlns:a="http://schemas.openxmlformats.org/drawingml/2006/main" xmlns:r="http://schemas.openxmlformats.org/officeDocument/2006/relationships" xmlns:p="http://schemas.openxmlformats.org/presentationml/2006/main">
-  <p:cSld>
-    <p:spTree>
-      <p:nvGrpSpPr>
-        <p:cNvPr id="1" name="">
-          <a:extLst>
-            <a:ext uri="{FF2B5EF4-FFF2-40B4-BE49-F238E27FC236}">
-              <a16:creationId xmlns:a16="http://schemas.microsoft.com/office/drawing/2014/main" id="{13802734-AA6A-E730-3531-0054C5EEA84C}"/>
-            </a:ext>
-          </a:extLst>
-        </p:cNvPr>
-        <p:cNvGrpSpPr/>
-        <p:nvPr/>
-      </p:nvGrpSpPr>
-      <p:grpSpPr>
-        <a:xfrm>
-          <a:off x="0" y="0"/>
-          <a:ext cx="0" cy="0"/>
-          <a:chOff x="0" y="0"/>
-          <a:chExt cx="0" cy="0"/>
-        </a:xfrm>
-      </p:grpSpPr>
-      <p:sp>
-        <p:nvSpPr>
-          <p:cNvPr id="4" name="슬라이드 번호 개체 틀 3">
-            <a:extLst>
-              <a:ext uri="{FF2B5EF4-FFF2-40B4-BE49-F238E27FC236}">
-                <a16:creationId xmlns:a16="http://schemas.microsoft.com/office/drawing/2014/main" id="{67FFB6B3-4B54-5D5E-0596-98BAADA1B561}"/>
-              </a:ext>
-            </a:extLst>
-          </p:cNvPr>
-          <p:cNvSpPr>
-            <a:spLocks noGrp="1"/>
-          </p:cNvSpPr>
-          <p:nvPr>
-            <p:ph type="sldNum" sz="quarter" idx="12"/>
-          </p:nvPr>
-        </p:nvSpPr>
-        <p:spPr>
-          <a:xfrm>
-            <a:off x="10514011" y="6036261"/>
-            <a:ext cx="753545" cy="365125"/>
-          </a:xfrm>
-        </p:spPr>
-        <p:txBody>
-          <a:bodyPr/>
-          <a:lstStyle/>
-          <a:p>
-            <a:fld id="{D57F1E4F-1CFF-5643-939E-217C01CDF565}" type="slidenum">
-              <a:rPr lang="en-US" smtClean="0"/>
-              <a:pPr/>
-              <a:t>9</a:t>
-            </a:fld>
-            <a:endParaRPr lang="en-US" dirty="0"/>
-          </a:p>
-        </p:txBody>
-      </p:sp>
-      <p:sp>
-        <p:nvSpPr>
-          <p:cNvPr id="3" name="제목 1">
-            <a:extLst>
-              <a:ext uri="{FF2B5EF4-FFF2-40B4-BE49-F238E27FC236}">
-                <a16:creationId xmlns:a16="http://schemas.microsoft.com/office/drawing/2014/main" id="{2DFADB4A-FE33-2CB5-920A-08149AB4CC44}"/>
-              </a:ext>
-            </a:extLst>
-          </p:cNvPr>
-          <p:cNvSpPr txBox="1">
-            <a:spLocks/>
-          </p:cNvSpPr>
-          <p:nvPr/>
-        </p:nvSpPr>
-        <p:spPr>
-          <a:xfrm>
-            <a:off x="475645" y="481983"/>
-            <a:ext cx="10353762" cy="766439"/>
-          </a:xfrm>
-          <a:prstGeom prst="rect">
-            <a:avLst/>
-          </a:prstGeom>
-        </p:spPr>
-        <p:txBody>
-          <a:bodyPr vert="horz" lIns="91440" tIns="45720" rIns="91440" bIns="45720" rtlCol="0" anchor="ctr">
-            <a:normAutofit/>
-          </a:bodyPr>
-          <a:lstStyle>
-            <a:lvl1pPr algn="ctr" defTabSz="914400" rtl="0" eaLnBrk="1" latinLnBrk="1" hangingPunct="1">
-              <a:lnSpc>
-                <a:spcPct val="90000"/>
-              </a:lnSpc>
-              <a:spcBef>
-                <a:spcPct val="0"/>
-              </a:spcBef>
-              <a:buNone/>
-              <a:defRPr sz="3200" kern="1200" cap="all" baseline="0">
-                <a:solidFill>
-                  <a:schemeClr val="tx1"/>
-                </a:solidFill>
-                <a:effectLst/>
-                <a:latin typeface="Batang" panose="02030600000101010101" pitchFamily="18" charset="-127"/>
-                <a:ea typeface="Batang" panose="02030600000101010101" pitchFamily="18" charset="-127"/>
-                <a:cs typeface="+mj-cs"/>
-              </a:defRPr>
-            </a:lvl1pPr>
-          </a:lstStyle>
-          <a:p>
-            <a:pPr algn="l"/>
-            <a:r>
-              <a:rPr lang="en-US" altLang="ko-KR" sz="2800" cap="none" dirty="0">
-                <a:latin typeface="D2Coding" panose="020B0609020101020101" pitchFamily="49" charset="-127"/>
-                <a:ea typeface="D2Coding" panose="020B0609020101020101" pitchFamily="49" charset="-127"/>
-                <a:cs typeface="Segoe UI Light" panose="020B0502040204020203" pitchFamily="34" charset="0"/>
-              </a:rPr>
-              <a:t>YOLO: </a:t>
-            </a:r>
-            <a:r>
-              <a:rPr lang="en-US" altLang="ko-KR" sz="2800" cap="none" dirty="0">
-                <a:latin typeface="D2Coding" panose="020B0609020101020101" pitchFamily="49" charset="-127"/>
-                <a:ea typeface="D2Coding" panose="020B0609020101020101" pitchFamily="49" charset="-127"/>
-                <a:cs typeface="Segoe UI Light" panose="020B0502040204020203" pitchFamily="34" charset="0"/>
-                <a:hlinkClick r:id="rId2">
-                  <a:extLst>
-                    <a:ext uri="{A12FA001-AC4F-418D-AE19-62706E023703}">
-                      <ahyp:hlinkClr xmlns:ahyp="http://schemas.microsoft.com/office/drawing/2018/hyperlinkcolor" val="tx"/>
-                    </a:ext>
-                  </a:extLst>
-                </a:hlinkClick>
-              </a:rPr>
-              <a:t>YOLO Object Detection</a:t>
-            </a:r>
-            <a:endParaRPr lang="ko-KR" altLang="en-US" sz="2800" cap="none" dirty="0">
-              <a:latin typeface="D2Coding" panose="020B0609020101020101" pitchFamily="49" charset="-127"/>
-              <a:ea typeface="D2Coding" panose="020B0609020101020101" pitchFamily="49" charset="-127"/>
-              <a:cs typeface="Segoe UI Light" panose="020B0502040204020203" pitchFamily="34" charset="0"/>
-            </a:endParaRPr>
-          </a:p>
-        </p:txBody>
-      </p:sp>
-      <p:pic>
-        <p:nvPicPr>
-          <p:cNvPr id="16" name="그림 15">
-            <a:extLst>
-              <a:ext uri="{FF2B5EF4-FFF2-40B4-BE49-F238E27FC236}">
-                <a16:creationId xmlns:a16="http://schemas.microsoft.com/office/drawing/2014/main" id="{2686F96D-48F0-A770-6A20-E3AC1FC846E1}"/>
-              </a:ext>
-            </a:extLst>
-          </p:cNvPr>
-          <p:cNvPicPr>
-            <a:picLocks noChangeAspect="1"/>
-          </p:cNvPicPr>
-          <p:nvPr/>
-        </p:nvPicPr>
-        <p:blipFill>
-          <a:blip r:embed="rId3"/>
-          <a:stretch>
-            <a:fillRect/>
-          </a:stretch>
-        </p:blipFill>
-        <p:spPr>
-          <a:xfrm>
-            <a:off x="1209300" y="2270463"/>
-            <a:ext cx="8439526" cy="3948360"/>
-          </a:xfrm>
-          <a:prstGeom prst="rect">
-            <a:avLst/>
-          </a:prstGeom>
-        </p:spPr>
-      </p:pic>
-      <p:sp>
-        <p:nvSpPr>
-          <p:cNvPr id="5" name="TextBox 4">
-            <a:extLst>
-              <a:ext uri="{FF2B5EF4-FFF2-40B4-BE49-F238E27FC236}">
-                <a16:creationId xmlns:a16="http://schemas.microsoft.com/office/drawing/2014/main" id="{425755E4-770B-BDE4-CDAA-9FB5C839D34C}"/>
-              </a:ext>
-            </a:extLst>
-          </p:cNvPr>
-          <p:cNvSpPr txBox="1"/>
-          <p:nvPr/>
-        </p:nvSpPr>
-        <p:spPr>
-          <a:xfrm>
-            <a:off x="571500" y="1390110"/>
-            <a:ext cx="6096000" cy="369332"/>
-          </a:xfrm>
-          <a:prstGeom prst="rect">
-            <a:avLst/>
-          </a:prstGeom>
-          <a:noFill/>
-        </p:spPr>
-        <p:txBody>
-          <a:bodyPr wrap="square">
-            <a:spAutoFit/>
-          </a:bodyPr>
-          <a:lstStyle/>
-          <a:p>
-            <a:pPr>
-              <a:buNone/>
-            </a:pPr>
-            <a:r>
-              <a:rPr lang="en-US" altLang="ko-KR" dirty="0">
-                <a:latin typeface="D2Coding" panose="020B0609020101020101" pitchFamily="49" charset="-127"/>
-                <a:ea typeface="D2Coding" panose="020B0609020101020101" pitchFamily="49" charset="-127"/>
-              </a:rPr>
-              <a:t>YOLO</a:t>
-            </a:r>
-            <a:r>
-              <a:rPr lang="ko-KR" altLang="en-US" dirty="0">
-                <a:latin typeface="D2Coding" panose="020B0609020101020101" pitchFamily="49" charset="-127"/>
-                <a:ea typeface="D2Coding" panose="020B0609020101020101" pitchFamily="49" charset="-127"/>
-              </a:rPr>
-              <a:t>가 선택한 </a:t>
-            </a:r>
-            <a:r>
-              <a:rPr lang="en-US" altLang="ko-KR" dirty="0">
-                <a:latin typeface="D2Coding" panose="020B0609020101020101" pitchFamily="49" charset="-127"/>
-                <a:ea typeface="D2Coding" panose="020B0609020101020101" pitchFamily="49" charset="-127"/>
-              </a:rPr>
-              <a:t>FCN (Fully Convolutional Network)</a:t>
-            </a:r>
-          </a:p>
-        </p:txBody>
-      </p:sp>
-    </p:spTree>
-    <p:extLst>
-      <p:ext uri="{BB962C8B-B14F-4D97-AF65-F5344CB8AC3E}">
-        <p14:creationId xmlns:p14="http://schemas.microsoft.com/office/powerpoint/2010/main" val="3333756658"/>
-      </p:ext>
-    </p:extLst>
-  </p:cSld>
-  <p:clrMapOvr>
-    <a:masterClrMapping/>
-  </p:clrMapOvr>
 </p:sld>
 </file>
 

--- a/CNN/Object detection_YOLO.pptx
+++ b/CNN/Object detection_YOLO.pptx
@@ -5,10 +5,10 @@
     <p:sldMasterId id="2147483660" r:id="rId1"/>
   </p:sldMasterIdLst>
   <p:notesMasterIdLst>
-    <p:notesMasterId r:id="rId20"/>
+    <p:notesMasterId r:id="rId21"/>
   </p:notesMasterIdLst>
   <p:handoutMasterIdLst>
-    <p:handoutMasterId r:id="rId21"/>
+    <p:handoutMasterId r:id="rId22"/>
   </p:handoutMasterIdLst>
   <p:sldIdLst>
     <p:sldId id="256" r:id="rId2"/>
@@ -19,16 +19,17 @@
     <p:sldId id="1131" r:id="rId7"/>
     <p:sldId id="1139" r:id="rId8"/>
     <p:sldId id="1130" r:id="rId9"/>
-    <p:sldId id="1127" r:id="rId10"/>
-    <p:sldId id="1121" r:id="rId11"/>
-    <p:sldId id="1133" r:id="rId12"/>
-    <p:sldId id="1135" r:id="rId13"/>
-    <p:sldId id="1136" r:id="rId14"/>
-    <p:sldId id="1132" r:id="rId15"/>
-    <p:sldId id="1122" r:id="rId16"/>
-    <p:sldId id="1137" r:id="rId17"/>
-    <p:sldId id="1138" r:id="rId18"/>
-    <p:sldId id="1123" r:id="rId19"/>
+    <p:sldId id="1140" r:id="rId10"/>
+    <p:sldId id="1127" r:id="rId11"/>
+    <p:sldId id="1121" r:id="rId12"/>
+    <p:sldId id="1133" r:id="rId13"/>
+    <p:sldId id="1135" r:id="rId14"/>
+    <p:sldId id="1136" r:id="rId15"/>
+    <p:sldId id="1132" r:id="rId16"/>
+    <p:sldId id="1122" r:id="rId17"/>
+    <p:sldId id="1137" r:id="rId18"/>
+    <p:sldId id="1138" r:id="rId19"/>
+    <p:sldId id="1123" r:id="rId20"/>
   </p:sldIdLst>
   <p:sldSz cx="12192000" cy="6858000"/>
   <p:notesSz cx="6858000" cy="9144000"/>
@@ -147,6 +148,7 @@
             <p14:sldId id="1131"/>
             <p14:sldId id="1139"/>
             <p14:sldId id="1130"/>
+            <p14:sldId id="1140"/>
             <p14:sldId id="1127"/>
             <p14:sldId id="1121"/>
             <p14:sldId id="1133"/>
@@ -3294,6 +3296,2086 @@
         <p:cNvPr id="1" name="">
           <a:extLst>
             <a:ext uri="{FF2B5EF4-FFF2-40B4-BE49-F238E27FC236}">
+              <a16:creationId xmlns:a16="http://schemas.microsoft.com/office/drawing/2014/main" id="{25EA1402-08FA-1414-7D39-D22F4CF6B8E3}"/>
+            </a:ext>
+          </a:extLst>
+        </p:cNvPr>
+        <p:cNvGrpSpPr/>
+        <p:nvPr/>
+      </p:nvGrpSpPr>
+      <p:grpSpPr>
+        <a:xfrm>
+          <a:off x="0" y="0"/>
+          <a:ext cx="0" cy="0"/>
+          <a:chOff x="0" y="0"/>
+          <a:chExt cx="0" cy="0"/>
+        </a:xfrm>
+      </p:grpSpPr>
+      <p:sp>
+        <p:nvSpPr>
+          <p:cNvPr id="4" name="슬라이드 번호 개체 틀 3">
+            <a:extLst>
+              <a:ext uri="{FF2B5EF4-FFF2-40B4-BE49-F238E27FC236}">
+                <a16:creationId xmlns:a16="http://schemas.microsoft.com/office/drawing/2014/main" id="{3DF5A98A-E857-2423-C923-540092E7AC61}"/>
+              </a:ext>
+            </a:extLst>
+          </p:cNvPr>
+          <p:cNvSpPr>
+            <a:spLocks noGrp="1"/>
+          </p:cNvSpPr>
+          <p:nvPr>
+            <p:ph type="sldNum" sz="quarter" idx="12"/>
+          </p:nvPr>
+        </p:nvSpPr>
+        <p:spPr>
+          <a:xfrm>
+            <a:off x="10514011" y="6036261"/>
+            <a:ext cx="753545" cy="365125"/>
+          </a:xfrm>
+        </p:spPr>
+        <p:txBody>
+          <a:bodyPr/>
+          <a:lstStyle/>
+          <a:p>
+            <a:fld id="{D57F1E4F-1CFF-5643-939E-217C01CDF565}" type="slidenum">
+              <a:rPr lang="en-US" smtClean="0"/>
+              <a:pPr/>
+              <a:t>10</a:t>
+            </a:fld>
+            <a:endParaRPr lang="en-US" dirty="0"/>
+          </a:p>
+        </p:txBody>
+      </p:sp>
+      <p:sp>
+        <p:nvSpPr>
+          <p:cNvPr id="3" name="제목 1">
+            <a:extLst>
+              <a:ext uri="{FF2B5EF4-FFF2-40B4-BE49-F238E27FC236}">
+                <a16:creationId xmlns:a16="http://schemas.microsoft.com/office/drawing/2014/main" id="{EE8183F6-0D1A-6079-23B6-B90F1B8280D7}"/>
+              </a:ext>
+            </a:extLst>
+          </p:cNvPr>
+          <p:cNvSpPr txBox="1">
+            <a:spLocks/>
+          </p:cNvSpPr>
+          <p:nvPr/>
+        </p:nvSpPr>
+        <p:spPr>
+          <a:xfrm>
+            <a:off x="475645" y="481983"/>
+            <a:ext cx="10353762" cy="766439"/>
+          </a:xfrm>
+          <a:prstGeom prst="rect">
+            <a:avLst/>
+          </a:prstGeom>
+        </p:spPr>
+        <p:txBody>
+          <a:bodyPr vert="horz" lIns="91440" tIns="45720" rIns="91440" bIns="45720" rtlCol="0" anchor="ctr">
+            <a:normAutofit/>
+          </a:bodyPr>
+          <a:lstStyle>
+            <a:lvl1pPr algn="ctr" defTabSz="914400" rtl="0" eaLnBrk="1" latinLnBrk="1" hangingPunct="1">
+              <a:lnSpc>
+                <a:spcPct val="90000"/>
+              </a:lnSpc>
+              <a:spcBef>
+                <a:spcPct val="0"/>
+              </a:spcBef>
+              <a:buNone/>
+              <a:defRPr sz="3200" kern="1200" cap="all" baseline="0">
+                <a:solidFill>
+                  <a:schemeClr val="tx1"/>
+                </a:solidFill>
+                <a:effectLst/>
+                <a:latin typeface="Batang" panose="02030600000101010101" pitchFamily="18" charset="-127"/>
+                <a:ea typeface="Batang" panose="02030600000101010101" pitchFamily="18" charset="-127"/>
+                <a:cs typeface="+mj-cs"/>
+              </a:defRPr>
+            </a:lvl1pPr>
+          </a:lstStyle>
+          <a:p>
+            <a:pPr algn="l"/>
+            <a:r>
+              <a:rPr lang="en-US" altLang="ko-KR" sz="2800" cap="none" dirty="0">
+                <a:latin typeface="D2Coding" panose="020B0609020101020101" pitchFamily="49" charset="-127"/>
+                <a:ea typeface="D2Coding" panose="020B0609020101020101" pitchFamily="49" charset="-127"/>
+                <a:cs typeface="Segoe UI Light" panose="020B0502040204020203" pitchFamily="34" charset="0"/>
+              </a:rPr>
+              <a:t>YOLO</a:t>
+            </a:r>
+            <a:endParaRPr lang="ko-KR" altLang="en-US" sz="2800" cap="none" dirty="0">
+              <a:latin typeface="D2Coding" panose="020B0609020101020101" pitchFamily="49" charset="-127"/>
+              <a:ea typeface="D2Coding" panose="020B0609020101020101" pitchFamily="49" charset="-127"/>
+              <a:cs typeface="Segoe UI Light" panose="020B0502040204020203" pitchFamily="34" charset="0"/>
+            </a:endParaRPr>
+          </a:p>
+        </p:txBody>
+      </p:sp>
+      <p:sp>
+        <p:nvSpPr>
+          <p:cNvPr id="11" name="TextBox 10">
+            <a:extLst>
+              <a:ext uri="{FF2B5EF4-FFF2-40B4-BE49-F238E27FC236}">
+                <a16:creationId xmlns:a16="http://schemas.microsoft.com/office/drawing/2014/main" id="{2945D10D-4BEF-867B-D596-D0C787F6736E}"/>
+              </a:ext>
+            </a:extLst>
+          </p:cNvPr>
+          <p:cNvSpPr txBox="1"/>
+          <p:nvPr/>
+        </p:nvSpPr>
+        <p:spPr>
+          <a:xfrm>
+            <a:off x="571802" y="1248422"/>
+            <a:ext cx="11144553" cy="880819"/>
+          </a:xfrm>
+          <a:prstGeom prst="rect">
+            <a:avLst/>
+          </a:prstGeom>
+          <a:noFill/>
+        </p:spPr>
+        <p:txBody>
+          <a:bodyPr wrap="square">
+            <a:spAutoFit/>
+          </a:bodyPr>
+          <a:lstStyle/>
+          <a:p>
+            <a:pPr>
+              <a:lnSpc>
+                <a:spcPct val="150000"/>
+              </a:lnSpc>
+            </a:pPr>
+            <a:r>
+              <a:rPr lang="en-US" altLang="ko-KR" dirty="0">
+                <a:latin typeface="D2Coding" panose="020B0609020101020101" pitchFamily="49" charset="-127"/>
+                <a:ea typeface="D2Coding" panose="020B0609020101020101" pitchFamily="49" charset="-127"/>
+              </a:rPr>
+              <a:t>YOLO</a:t>
+            </a:r>
+            <a:r>
+              <a:rPr lang="ko-KR" altLang="en-US" dirty="0">
+                <a:latin typeface="D2Coding" panose="020B0609020101020101" pitchFamily="49" charset="-127"/>
+                <a:ea typeface="D2Coding" panose="020B0609020101020101" pitchFamily="49" charset="-127"/>
+              </a:rPr>
+              <a:t>는 격자</a:t>
+            </a:r>
+            <a:r>
+              <a:rPr lang="en-US" altLang="ko-KR" dirty="0">
+                <a:latin typeface="D2Coding" panose="020B0609020101020101" pitchFamily="49" charset="-127"/>
+                <a:ea typeface="D2Coding" panose="020B0609020101020101" pitchFamily="49" charset="-127"/>
+              </a:rPr>
+              <a:t>(3, 3)</a:t>
+            </a:r>
+            <a:r>
+              <a:rPr lang="ko-KR" altLang="en-US" dirty="0">
+                <a:latin typeface="D2Coding" panose="020B0609020101020101" pitchFamily="49" charset="-127"/>
+                <a:ea typeface="D2Coding" panose="020B0609020101020101" pitchFamily="49" charset="-127"/>
+              </a:rPr>
+              <a:t>에 모든 연산의 결과는 </a:t>
+            </a:r>
+            <a:r>
+              <a:rPr lang="en-US" altLang="ko-KR" dirty="0">
+                <a:latin typeface="D2Coding" panose="020B0609020101020101" pitchFamily="49" charset="-127"/>
+                <a:ea typeface="D2Coding" panose="020B0609020101020101" pitchFamily="49" charset="-127"/>
+              </a:rPr>
+              <a:t>(3, 3, 12)</a:t>
+            </a:r>
+            <a:r>
+              <a:rPr lang="ko-KR" altLang="en-US" dirty="0">
+                <a:latin typeface="D2Coding" panose="020B0609020101020101" pitchFamily="49" charset="-127"/>
+                <a:ea typeface="D2Coding" panose="020B0609020101020101" pitchFamily="49" charset="-127"/>
+              </a:rPr>
+              <a:t>크기의 </a:t>
+            </a:r>
+            <a:r>
+              <a:rPr lang="en-US" altLang="ko-KR" dirty="0">
+                <a:latin typeface="D2Coding" panose="020B0609020101020101" pitchFamily="49" charset="-127"/>
+                <a:ea typeface="D2Coding" panose="020B0609020101020101" pitchFamily="49" charset="-127"/>
+              </a:rPr>
+              <a:t>3</a:t>
+            </a:r>
+            <a:r>
+              <a:rPr lang="ko-KR" altLang="en-US" dirty="0">
+                <a:latin typeface="D2Coding" panose="020B0609020101020101" pitchFamily="49" charset="-127"/>
+                <a:ea typeface="D2Coding" panose="020B0609020101020101" pitchFamily="49" charset="-127"/>
+              </a:rPr>
+              <a:t>차원 숫자 행렬</a:t>
+            </a:r>
+            <a:r>
+              <a:rPr lang="en-US" altLang="ko-KR" dirty="0">
+                <a:latin typeface="D2Coding" panose="020B0609020101020101" pitchFamily="49" charset="-127"/>
+                <a:ea typeface="D2Coding" panose="020B0609020101020101" pitchFamily="49" charset="-127"/>
+              </a:rPr>
+              <a:t>(tensor)</a:t>
+            </a:r>
+            <a:r>
+              <a:rPr lang="ko-KR" altLang="en-US" dirty="0">
+                <a:latin typeface="D2Coding" panose="020B0609020101020101" pitchFamily="49" charset="-127"/>
+                <a:ea typeface="D2Coding" panose="020B0609020101020101" pitchFamily="49" charset="-127"/>
+              </a:rPr>
+              <a:t>로 생성하게 되어 행과열이 </a:t>
+            </a:r>
+            <a:r>
+              <a:rPr lang="en-US" altLang="ko-KR" dirty="0">
+                <a:latin typeface="D2Coding" panose="020B0609020101020101" pitchFamily="49" charset="-127"/>
+                <a:ea typeface="D2Coding" panose="020B0609020101020101" pitchFamily="49" charset="-127"/>
+              </a:rPr>
+              <a:t>3</a:t>
+            </a:r>
+            <a:r>
+              <a:rPr lang="ko-KR" altLang="en-US" dirty="0">
+                <a:latin typeface="D2Coding" panose="020B0609020101020101" pitchFamily="49" charset="-127"/>
+                <a:ea typeface="D2Coding" panose="020B0609020101020101" pitchFamily="49" charset="-127"/>
+              </a:rPr>
+              <a:t>과 </a:t>
+            </a:r>
+            <a:r>
+              <a:rPr lang="en-US" altLang="ko-KR" dirty="0">
+                <a:latin typeface="D2Coding" panose="020B0609020101020101" pitchFamily="49" charset="-127"/>
+                <a:ea typeface="D2Coding" panose="020B0609020101020101" pitchFamily="49" charset="-127"/>
+              </a:rPr>
+              <a:t>3</a:t>
+            </a:r>
+            <a:r>
+              <a:rPr lang="ko-KR" altLang="en-US" dirty="0">
+                <a:latin typeface="D2Coding" panose="020B0609020101020101" pitchFamily="49" charset="-127"/>
+                <a:ea typeface="D2Coding" panose="020B0609020101020101" pitchFamily="49" charset="-127"/>
+              </a:rPr>
+              <a:t>인 격자 </a:t>
+            </a:r>
+            <a:r>
+              <a:rPr lang="en-US" altLang="ko-KR" dirty="0">
+                <a:latin typeface="D2Coding" panose="020B0609020101020101" pitchFamily="49" charset="-127"/>
+                <a:ea typeface="D2Coding" panose="020B0609020101020101" pitchFamily="49" charset="-127"/>
+              </a:rPr>
+              <a:t>tensor[3,3 :]</a:t>
+            </a:r>
+            <a:r>
+              <a:rPr lang="ko-KR" altLang="en-US" dirty="0">
+                <a:latin typeface="D2Coding" panose="020B0609020101020101" pitchFamily="49" charset="-127"/>
+                <a:ea typeface="D2Coding" panose="020B0609020101020101" pitchFamily="49" charset="-127"/>
+              </a:rPr>
+              <a:t>를</a:t>
+            </a:r>
+            <a:r>
+              <a:rPr lang="en-US" altLang="ko-KR" dirty="0">
+                <a:latin typeface="D2Coding" panose="020B0609020101020101" pitchFamily="49" charset="-127"/>
+                <a:ea typeface="D2Coding" panose="020B0609020101020101" pitchFamily="49" charset="-127"/>
+              </a:rPr>
+              <a:t> </a:t>
+            </a:r>
+            <a:r>
+              <a:rPr lang="ko-KR" altLang="en-US" dirty="0">
+                <a:latin typeface="D2Coding" panose="020B0609020101020101" pitchFamily="49" charset="-127"/>
+                <a:ea typeface="D2Coding" panose="020B0609020101020101" pitchFamily="49" charset="-127"/>
+              </a:rPr>
+              <a:t>제외한 모든 격자에는 모두 </a:t>
+            </a:r>
+            <a:r>
+              <a:rPr lang="en-US" altLang="ko-KR" dirty="0">
+                <a:latin typeface="D2Coding" panose="020B0609020101020101" pitchFamily="49" charset="-127"/>
+                <a:ea typeface="D2Coding" panose="020B0609020101020101" pitchFamily="49" charset="-127"/>
+              </a:rPr>
+              <a:t>0</a:t>
+            </a:r>
+            <a:r>
+              <a:rPr lang="ko-KR" altLang="en-US" dirty="0">
+                <a:latin typeface="D2Coding" panose="020B0609020101020101" pitchFamily="49" charset="-127"/>
+                <a:ea typeface="D2Coding" panose="020B0609020101020101" pitchFamily="49" charset="-127"/>
+              </a:rPr>
+              <a:t>이 입력</a:t>
+            </a:r>
+            <a:endParaRPr lang="en-US" altLang="ko-KR" dirty="0">
+              <a:latin typeface="D2Coding" panose="020B0609020101020101" pitchFamily="49" charset="-127"/>
+              <a:ea typeface="D2Coding" panose="020B0609020101020101" pitchFamily="49" charset="-127"/>
+            </a:endParaRPr>
+          </a:p>
+        </p:txBody>
+      </p:sp>
+      <p:sp>
+        <p:nvSpPr>
+          <p:cNvPr id="6" name="제목 1">
+            <a:extLst>
+              <a:ext uri="{FF2B5EF4-FFF2-40B4-BE49-F238E27FC236}">
+                <a16:creationId xmlns:a16="http://schemas.microsoft.com/office/drawing/2014/main" id="{60B4B1F8-2BD4-DC3C-8D06-46C224D7D958}"/>
+              </a:ext>
+            </a:extLst>
+          </p:cNvPr>
+          <p:cNvSpPr txBox="1">
+            <a:spLocks/>
+          </p:cNvSpPr>
+          <p:nvPr/>
+        </p:nvSpPr>
+        <p:spPr>
+          <a:xfrm>
+            <a:off x="7031196" y="647700"/>
+            <a:ext cx="4629755" cy="600722"/>
+          </a:xfrm>
+          <a:prstGeom prst="rect">
+            <a:avLst/>
+          </a:prstGeom>
+        </p:spPr>
+        <p:txBody>
+          <a:bodyPr vert="horz" lIns="91440" tIns="45720" rIns="91440" bIns="45720" rtlCol="0" anchor="ctr">
+            <a:normAutofit/>
+          </a:bodyPr>
+          <a:lstStyle>
+            <a:lvl1pPr algn="ctr" defTabSz="914400" rtl="0" eaLnBrk="1" latinLnBrk="1" hangingPunct="1">
+              <a:lnSpc>
+                <a:spcPct val="90000"/>
+              </a:lnSpc>
+              <a:spcBef>
+                <a:spcPct val="0"/>
+              </a:spcBef>
+              <a:buNone/>
+              <a:defRPr sz="3200" kern="1200" cap="all" baseline="0">
+                <a:solidFill>
+                  <a:schemeClr val="tx1"/>
+                </a:solidFill>
+                <a:effectLst/>
+                <a:latin typeface="Batang" panose="02030600000101010101" pitchFamily="18" charset="-127"/>
+                <a:ea typeface="Batang" panose="02030600000101010101" pitchFamily="18" charset="-127"/>
+                <a:cs typeface="+mj-cs"/>
+              </a:defRPr>
+            </a:lvl1pPr>
+          </a:lstStyle>
+          <a:p>
+            <a:pPr algn="r"/>
+            <a:r>
+              <a:rPr lang="en-US" altLang="ko-KR" sz="2000" cap="none" dirty="0">
+                <a:latin typeface="D2Coding" panose="020B0609020101020101" pitchFamily="49" charset="-127"/>
+                <a:ea typeface="D2Coding" panose="020B0609020101020101" pitchFamily="49" charset="-127"/>
+                <a:cs typeface="Segoe UI Light" panose="020B0502040204020203" pitchFamily="34" charset="0"/>
+              </a:rPr>
+              <a:t>6. </a:t>
+            </a:r>
+            <a:r>
+              <a:rPr lang="ko-KR" altLang="en-US" sz="2000" cap="none" dirty="0">
+                <a:latin typeface="D2Coding" panose="020B0609020101020101" pitchFamily="49" charset="-127"/>
+                <a:ea typeface="D2Coding" panose="020B0609020101020101" pitchFamily="49" charset="-127"/>
+                <a:cs typeface="Segoe UI Light" panose="020B0502040204020203" pitchFamily="34" charset="0"/>
+              </a:rPr>
+              <a:t>예측 결과 행렬</a:t>
+            </a:r>
+          </a:p>
+        </p:txBody>
+      </p:sp>
+      <p:graphicFrame>
+        <p:nvGraphicFramePr>
+          <p:cNvPr id="16" name="표 15">
+            <a:extLst>
+              <a:ext uri="{FF2B5EF4-FFF2-40B4-BE49-F238E27FC236}">
+                <a16:creationId xmlns:a16="http://schemas.microsoft.com/office/drawing/2014/main" id="{F347C981-92AA-3BDF-EC34-00E01ECF6E01}"/>
+              </a:ext>
+            </a:extLst>
+          </p:cNvPr>
+          <p:cNvGraphicFramePr>
+            <a:graphicFrameLocks noGrp="1"/>
+          </p:cNvGraphicFramePr>
+          <p:nvPr>
+            <p:extLst>
+              <p:ext uri="{D42A27DB-BD31-4B8C-83A1-F6EECF244321}">
+                <p14:modId xmlns:p14="http://schemas.microsoft.com/office/powerpoint/2010/main" val="1825974799"/>
+              </p:ext>
+            </p:extLst>
+          </p:nvPr>
+        </p:nvGraphicFramePr>
+        <p:xfrm>
+          <a:off x="742947" y="2831598"/>
+          <a:ext cx="3790953" cy="3204663"/>
+        </p:xfrm>
+        <a:graphic>
+          <a:graphicData uri="http://schemas.openxmlformats.org/drawingml/2006/table">
+            <a:tbl>
+              <a:tblPr firstRow="1" bandRow="1">
+                <a:tableStyleId>{5940675A-B579-460E-94D1-54222C63F5DA}</a:tableStyleId>
+              </a:tblPr>
+              <a:tblGrid>
+                <a:gridCol w="1263651">
+                  <a:extLst>
+                    <a:ext uri="{9D8B030D-6E8A-4147-A177-3AD203B41FA5}">
+                      <a16:colId xmlns:a16="http://schemas.microsoft.com/office/drawing/2014/main" val="1961843274"/>
+                    </a:ext>
+                  </a:extLst>
+                </a:gridCol>
+                <a:gridCol w="1263651">
+                  <a:extLst>
+                    <a:ext uri="{9D8B030D-6E8A-4147-A177-3AD203B41FA5}">
+                      <a16:colId xmlns:a16="http://schemas.microsoft.com/office/drawing/2014/main" val="2923400843"/>
+                    </a:ext>
+                  </a:extLst>
+                </a:gridCol>
+                <a:gridCol w="1263651">
+                  <a:extLst>
+                    <a:ext uri="{9D8B030D-6E8A-4147-A177-3AD203B41FA5}">
+                      <a16:colId xmlns:a16="http://schemas.microsoft.com/office/drawing/2014/main" val="2951067763"/>
+                    </a:ext>
+                  </a:extLst>
+                </a:gridCol>
+              </a:tblGrid>
+              <a:tr h="1068221">
+                <a:tc>
+                  <a:txBody>
+                    <a:bodyPr/>
+                    <a:lstStyle/>
+                    <a:p>
+                      <a:pPr latinLnBrk="1"/>
+                      <a:r>
+                        <a:rPr lang="en-US" altLang="ko-KR" sz="1400" dirty="0">
+                          <a:solidFill>
+                            <a:schemeClr val="bg1">
+                              <a:lumMod val="50000"/>
+                            </a:schemeClr>
+                          </a:solidFill>
+                        </a:rPr>
+                        <a:t>[0,0,0,0,</a:t>
+                      </a:r>
+                    </a:p>
+                    <a:p>
+                      <a:pPr latinLnBrk="1"/>
+                      <a:r>
+                        <a:rPr lang="en-US" altLang="ko-KR" sz="1400" dirty="0">
+                          <a:solidFill>
+                            <a:schemeClr val="bg1">
+                              <a:lumMod val="50000"/>
+                            </a:schemeClr>
+                          </a:solidFill>
+                        </a:rPr>
+                        <a:t>0,0,0,0,</a:t>
+                      </a:r>
+                    </a:p>
+                    <a:p>
+                      <a:pPr latinLnBrk="1"/>
+                      <a:r>
+                        <a:rPr lang="en-US" altLang="ko-KR" sz="1400" dirty="0">
+                          <a:solidFill>
+                            <a:schemeClr val="bg1">
+                              <a:lumMod val="50000"/>
+                            </a:schemeClr>
+                          </a:solidFill>
+                        </a:rPr>
+                        <a:t>0,0,0,0]</a:t>
+                      </a:r>
+                      <a:endParaRPr lang="ko-KR" altLang="en-US" sz="1400" dirty="0">
+                        <a:solidFill>
+                          <a:schemeClr val="bg1">
+                            <a:lumMod val="50000"/>
+                          </a:schemeClr>
+                        </a:solidFill>
+                      </a:endParaRPr>
+                    </a:p>
+                  </a:txBody>
+                  <a:tcPr marL="86797" marR="86797" marT="43397" marB="43397"/>
+                </a:tc>
+                <a:tc>
+                  <a:txBody>
+                    <a:bodyPr/>
+                    <a:lstStyle/>
+                    <a:p>
+                      <a:pPr marL="0" marR="0" lvl="0" indent="0" algn="l" defTabSz="914400" rtl="0" eaLnBrk="1" fontAlgn="auto" latinLnBrk="1" hangingPunct="1">
+                        <a:lnSpc>
+                          <a:spcPct val="100000"/>
+                        </a:lnSpc>
+                        <a:spcBef>
+                          <a:spcPts val="0"/>
+                        </a:spcBef>
+                        <a:spcAft>
+                          <a:spcPts val="0"/>
+                        </a:spcAft>
+                        <a:buClrTx/>
+                        <a:buSzTx/>
+                        <a:buFontTx/>
+                        <a:buNone/>
+                        <a:tabLst/>
+                        <a:defRPr/>
+                      </a:pPr>
+                      <a:r>
+                        <a:rPr kumimoji="0" lang="en-US" altLang="ko-KR" sz="1400" b="0" i="0" u="none" strike="noStrike" kern="1200" cap="none" spc="0" normalizeH="0" baseline="0" noProof="0" dirty="0">
+                          <a:ln>
+                            <a:noFill/>
+                          </a:ln>
+                          <a:solidFill>
+                            <a:schemeClr val="bg1">
+                              <a:lumMod val="50000"/>
+                            </a:schemeClr>
+                          </a:solidFill>
+                          <a:effectLst/>
+                          <a:uLnTx/>
+                          <a:uFillTx/>
+                          <a:latin typeface="Segoe UI"/>
+                          <a:ea typeface="+mn-ea"/>
+                          <a:cs typeface="+mn-cs"/>
+                        </a:rPr>
+                        <a:t>[0,0,0,0,</a:t>
+                      </a:r>
+                    </a:p>
+                    <a:p>
+                      <a:pPr marL="0" marR="0" lvl="0" indent="0" algn="l" defTabSz="914400" rtl="0" eaLnBrk="1" fontAlgn="auto" latinLnBrk="1" hangingPunct="1">
+                        <a:lnSpc>
+                          <a:spcPct val="100000"/>
+                        </a:lnSpc>
+                        <a:spcBef>
+                          <a:spcPts val="0"/>
+                        </a:spcBef>
+                        <a:spcAft>
+                          <a:spcPts val="0"/>
+                        </a:spcAft>
+                        <a:buClrTx/>
+                        <a:buSzTx/>
+                        <a:buFontTx/>
+                        <a:buNone/>
+                        <a:tabLst/>
+                        <a:defRPr/>
+                      </a:pPr>
+                      <a:r>
+                        <a:rPr kumimoji="0" lang="en-US" altLang="ko-KR" sz="1400" b="0" i="0" u="none" strike="noStrike" kern="1200" cap="none" spc="0" normalizeH="0" baseline="0" noProof="0" dirty="0">
+                          <a:ln>
+                            <a:noFill/>
+                          </a:ln>
+                          <a:solidFill>
+                            <a:schemeClr val="bg1">
+                              <a:lumMod val="50000"/>
+                            </a:schemeClr>
+                          </a:solidFill>
+                          <a:effectLst/>
+                          <a:uLnTx/>
+                          <a:uFillTx/>
+                          <a:latin typeface="Segoe UI"/>
+                          <a:ea typeface="+mn-ea"/>
+                          <a:cs typeface="+mn-cs"/>
+                        </a:rPr>
+                        <a:t>0,0,0,0,</a:t>
+                      </a:r>
+                    </a:p>
+                    <a:p>
+                      <a:pPr marL="0" marR="0" lvl="0" indent="0" algn="l" defTabSz="914400" rtl="0" eaLnBrk="1" fontAlgn="auto" latinLnBrk="1" hangingPunct="1">
+                        <a:lnSpc>
+                          <a:spcPct val="100000"/>
+                        </a:lnSpc>
+                        <a:spcBef>
+                          <a:spcPts val="0"/>
+                        </a:spcBef>
+                        <a:spcAft>
+                          <a:spcPts val="0"/>
+                        </a:spcAft>
+                        <a:buClrTx/>
+                        <a:buSzTx/>
+                        <a:buFontTx/>
+                        <a:buNone/>
+                        <a:tabLst/>
+                        <a:defRPr/>
+                      </a:pPr>
+                      <a:r>
+                        <a:rPr kumimoji="0" lang="en-US" altLang="ko-KR" sz="1400" b="0" i="0" u="none" strike="noStrike" kern="1200" cap="none" spc="0" normalizeH="0" baseline="0" noProof="0" dirty="0">
+                          <a:ln>
+                            <a:noFill/>
+                          </a:ln>
+                          <a:solidFill>
+                            <a:schemeClr val="bg1">
+                              <a:lumMod val="50000"/>
+                            </a:schemeClr>
+                          </a:solidFill>
+                          <a:effectLst/>
+                          <a:uLnTx/>
+                          <a:uFillTx/>
+                          <a:latin typeface="Segoe UI"/>
+                          <a:ea typeface="+mn-ea"/>
+                          <a:cs typeface="+mn-cs"/>
+                        </a:rPr>
+                        <a:t>0,0,0,0]</a:t>
+                      </a:r>
+                      <a:endParaRPr kumimoji="0" lang="ko-KR" altLang="en-US" sz="1400" b="0" i="0" u="none" strike="noStrike" kern="1200" cap="none" spc="0" normalizeH="0" baseline="0" noProof="0" dirty="0">
+                        <a:ln>
+                          <a:noFill/>
+                        </a:ln>
+                        <a:solidFill>
+                          <a:schemeClr val="bg1">
+                            <a:lumMod val="50000"/>
+                          </a:schemeClr>
+                        </a:solidFill>
+                        <a:effectLst/>
+                        <a:uLnTx/>
+                        <a:uFillTx/>
+                        <a:latin typeface="Segoe UI"/>
+                        <a:ea typeface="+mn-ea"/>
+                        <a:cs typeface="+mn-cs"/>
+                      </a:endParaRPr>
+                    </a:p>
+                  </a:txBody>
+                  <a:tcPr marL="86797" marR="86797" marT="43397" marB="43397"/>
+                </a:tc>
+                <a:tc>
+                  <a:txBody>
+                    <a:bodyPr/>
+                    <a:lstStyle/>
+                    <a:p>
+                      <a:pPr marL="0" marR="0" lvl="0" indent="0" algn="l" defTabSz="914400" rtl="0" eaLnBrk="1" fontAlgn="auto" latinLnBrk="1" hangingPunct="1">
+                        <a:lnSpc>
+                          <a:spcPct val="100000"/>
+                        </a:lnSpc>
+                        <a:spcBef>
+                          <a:spcPts val="0"/>
+                        </a:spcBef>
+                        <a:spcAft>
+                          <a:spcPts val="0"/>
+                        </a:spcAft>
+                        <a:buClrTx/>
+                        <a:buSzTx/>
+                        <a:buFontTx/>
+                        <a:buNone/>
+                        <a:tabLst/>
+                        <a:defRPr/>
+                      </a:pPr>
+                      <a:r>
+                        <a:rPr kumimoji="0" lang="en-US" altLang="ko-KR" sz="1400" b="0" i="0" u="none" strike="noStrike" kern="1200" cap="none" spc="0" normalizeH="0" baseline="0" noProof="0">
+                          <a:ln>
+                            <a:noFill/>
+                          </a:ln>
+                          <a:solidFill>
+                            <a:schemeClr val="bg1">
+                              <a:lumMod val="50000"/>
+                            </a:schemeClr>
+                          </a:solidFill>
+                          <a:effectLst/>
+                          <a:uLnTx/>
+                          <a:uFillTx/>
+                          <a:latin typeface="Segoe UI"/>
+                          <a:ea typeface="+mn-ea"/>
+                          <a:cs typeface="+mn-cs"/>
+                        </a:rPr>
+                        <a:t>[0,0,0,0,</a:t>
+                      </a:r>
+                    </a:p>
+                    <a:p>
+                      <a:pPr marL="0" marR="0" lvl="0" indent="0" algn="l" defTabSz="914400" rtl="0" eaLnBrk="1" fontAlgn="auto" latinLnBrk="1" hangingPunct="1">
+                        <a:lnSpc>
+                          <a:spcPct val="100000"/>
+                        </a:lnSpc>
+                        <a:spcBef>
+                          <a:spcPts val="0"/>
+                        </a:spcBef>
+                        <a:spcAft>
+                          <a:spcPts val="0"/>
+                        </a:spcAft>
+                        <a:buClrTx/>
+                        <a:buSzTx/>
+                        <a:buFontTx/>
+                        <a:buNone/>
+                        <a:tabLst/>
+                        <a:defRPr/>
+                      </a:pPr>
+                      <a:r>
+                        <a:rPr kumimoji="0" lang="en-US" altLang="ko-KR" sz="1400" b="0" i="0" u="none" strike="noStrike" kern="1200" cap="none" spc="0" normalizeH="0" baseline="0" noProof="0">
+                          <a:ln>
+                            <a:noFill/>
+                          </a:ln>
+                          <a:solidFill>
+                            <a:schemeClr val="bg1">
+                              <a:lumMod val="50000"/>
+                            </a:schemeClr>
+                          </a:solidFill>
+                          <a:effectLst/>
+                          <a:uLnTx/>
+                          <a:uFillTx/>
+                          <a:latin typeface="Segoe UI"/>
+                          <a:ea typeface="+mn-ea"/>
+                          <a:cs typeface="+mn-cs"/>
+                        </a:rPr>
+                        <a:t>0,0,0,0,</a:t>
+                      </a:r>
+                    </a:p>
+                    <a:p>
+                      <a:pPr marL="0" marR="0" lvl="0" indent="0" algn="l" defTabSz="914400" rtl="0" eaLnBrk="1" fontAlgn="auto" latinLnBrk="1" hangingPunct="1">
+                        <a:lnSpc>
+                          <a:spcPct val="100000"/>
+                        </a:lnSpc>
+                        <a:spcBef>
+                          <a:spcPts val="0"/>
+                        </a:spcBef>
+                        <a:spcAft>
+                          <a:spcPts val="0"/>
+                        </a:spcAft>
+                        <a:buClrTx/>
+                        <a:buSzTx/>
+                        <a:buFontTx/>
+                        <a:buNone/>
+                        <a:tabLst/>
+                        <a:defRPr/>
+                      </a:pPr>
+                      <a:r>
+                        <a:rPr kumimoji="0" lang="en-US" altLang="ko-KR" sz="1400" b="0" i="0" u="none" strike="noStrike" kern="1200" cap="none" spc="0" normalizeH="0" baseline="0" noProof="0">
+                          <a:ln>
+                            <a:noFill/>
+                          </a:ln>
+                          <a:solidFill>
+                            <a:schemeClr val="bg1">
+                              <a:lumMod val="50000"/>
+                            </a:schemeClr>
+                          </a:solidFill>
+                          <a:effectLst/>
+                          <a:uLnTx/>
+                          <a:uFillTx/>
+                          <a:latin typeface="Segoe UI"/>
+                          <a:ea typeface="+mn-ea"/>
+                          <a:cs typeface="+mn-cs"/>
+                        </a:rPr>
+                        <a:t>0,0,0,0]</a:t>
+                      </a:r>
+                      <a:endParaRPr kumimoji="0" lang="ko-KR" altLang="en-US" sz="1400" b="0" i="0" u="none" strike="noStrike" kern="1200" cap="none" spc="0" normalizeH="0" baseline="0" noProof="0" dirty="0">
+                        <a:ln>
+                          <a:noFill/>
+                        </a:ln>
+                        <a:solidFill>
+                          <a:schemeClr val="bg1">
+                            <a:lumMod val="50000"/>
+                          </a:schemeClr>
+                        </a:solidFill>
+                        <a:effectLst/>
+                        <a:uLnTx/>
+                        <a:uFillTx/>
+                        <a:latin typeface="Segoe UI"/>
+                        <a:ea typeface="+mn-ea"/>
+                        <a:cs typeface="+mn-cs"/>
+                      </a:endParaRPr>
+                    </a:p>
+                  </a:txBody>
+                  <a:tcPr marL="86797" marR="86797" marT="43397" marB="43397"/>
+                </a:tc>
+                <a:extLst>
+                  <a:ext uri="{0D108BD9-81ED-4DB2-BD59-A6C34878D82A}">
+                    <a16:rowId xmlns:a16="http://schemas.microsoft.com/office/drawing/2014/main" val="844891742"/>
+                  </a:ext>
+                </a:extLst>
+              </a:tr>
+              <a:tr h="1068221">
+                <a:tc>
+                  <a:txBody>
+                    <a:bodyPr/>
+                    <a:lstStyle/>
+                    <a:p>
+                      <a:pPr marL="0" marR="0" lvl="0" indent="0" algn="l" defTabSz="914400" rtl="0" eaLnBrk="1" fontAlgn="auto" latinLnBrk="1" hangingPunct="1">
+                        <a:lnSpc>
+                          <a:spcPct val="100000"/>
+                        </a:lnSpc>
+                        <a:spcBef>
+                          <a:spcPts val="0"/>
+                        </a:spcBef>
+                        <a:spcAft>
+                          <a:spcPts val="0"/>
+                        </a:spcAft>
+                        <a:buClrTx/>
+                        <a:buSzTx/>
+                        <a:buFontTx/>
+                        <a:buNone/>
+                        <a:tabLst/>
+                        <a:defRPr/>
+                      </a:pPr>
+                      <a:r>
+                        <a:rPr kumimoji="0" lang="en-US" altLang="ko-KR" sz="1400" b="0" i="0" u="none" strike="noStrike" kern="1200" cap="none" spc="0" normalizeH="0" baseline="0" noProof="0">
+                          <a:ln>
+                            <a:noFill/>
+                          </a:ln>
+                          <a:solidFill>
+                            <a:schemeClr val="bg1">
+                              <a:lumMod val="50000"/>
+                            </a:schemeClr>
+                          </a:solidFill>
+                          <a:effectLst/>
+                          <a:uLnTx/>
+                          <a:uFillTx/>
+                          <a:latin typeface="Segoe UI"/>
+                          <a:ea typeface="+mn-ea"/>
+                          <a:cs typeface="+mn-cs"/>
+                        </a:rPr>
+                        <a:t>[0,0,0,0,</a:t>
+                      </a:r>
+                    </a:p>
+                    <a:p>
+                      <a:pPr marL="0" marR="0" lvl="0" indent="0" algn="l" defTabSz="914400" rtl="0" eaLnBrk="1" fontAlgn="auto" latinLnBrk="1" hangingPunct="1">
+                        <a:lnSpc>
+                          <a:spcPct val="100000"/>
+                        </a:lnSpc>
+                        <a:spcBef>
+                          <a:spcPts val="0"/>
+                        </a:spcBef>
+                        <a:spcAft>
+                          <a:spcPts val="0"/>
+                        </a:spcAft>
+                        <a:buClrTx/>
+                        <a:buSzTx/>
+                        <a:buFontTx/>
+                        <a:buNone/>
+                        <a:tabLst/>
+                        <a:defRPr/>
+                      </a:pPr>
+                      <a:r>
+                        <a:rPr kumimoji="0" lang="en-US" altLang="ko-KR" sz="1400" b="0" i="0" u="none" strike="noStrike" kern="1200" cap="none" spc="0" normalizeH="0" baseline="0" noProof="0">
+                          <a:ln>
+                            <a:noFill/>
+                          </a:ln>
+                          <a:solidFill>
+                            <a:schemeClr val="bg1">
+                              <a:lumMod val="50000"/>
+                            </a:schemeClr>
+                          </a:solidFill>
+                          <a:effectLst/>
+                          <a:uLnTx/>
+                          <a:uFillTx/>
+                          <a:latin typeface="Segoe UI"/>
+                          <a:ea typeface="+mn-ea"/>
+                          <a:cs typeface="+mn-cs"/>
+                        </a:rPr>
+                        <a:t>0,0,0,0,</a:t>
+                      </a:r>
+                    </a:p>
+                    <a:p>
+                      <a:pPr marL="0" marR="0" lvl="0" indent="0" algn="l" defTabSz="914400" rtl="0" eaLnBrk="1" fontAlgn="auto" latinLnBrk="1" hangingPunct="1">
+                        <a:lnSpc>
+                          <a:spcPct val="100000"/>
+                        </a:lnSpc>
+                        <a:spcBef>
+                          <a:spcPts val="0"/>
+                        </a:spcBef>
+                        <a:spcAft>
+                          <a:spcPts val="0"/>
+                        </a:spcAft>
+                        <a:buClrTx/>
+                        <a:buSzTx/>
+                        <a:buFontTx/>
+                        <a:buNone/>
+                        <a:tabLst/>
+                        <a:defRPr/>
+                      </a:pPr>
+                      <a:r>
+                        <a:rPr kumimoji="0" lang="en-US" altLang="ko-KR" sz="1400" b="0" i="0" u="none" strike="noStrike" kern="1200" cap="none" spc="0" normalizeH="0" baseline="0" noProof="0">
+                          <a:ln>
+                            <a:noFill/>
+                          </a:ln>
+                          <a:solidFill>
+                            <a:schemeClr val="bg1">
+                              <a:lumMod val="50000"/>
+                            </a:schemeClr>
+                          </a:solidFill>
+                          <a:effectLst/>
+                          <a:uLnTx/>
+                          <a:uFillTx/>
+                          <a:latin typeface="Segoe UI"/>
+                          <a:ea typeface="+mn-ea"/>
+                          <a:cs typeface="+mn-cs"/>
+                        </a:rPr>
+                        <a:t>0,0,0,0]</a:t>
+                      </a:r>
+                      <a:endParaRPr kumimoji="0" lang="ko-KR" altLang="en-US" sz="1400" b="0" i="0" u="none" strike="noStrike" kern="1200" cap="none" spc="0" normalizeH="0" baseline="0" noProof="0" dirty="0">
+                        <a:ln>
+                          <a:noFill/>
+                        </a:ln>
+                        <a:solidFill>
+                          <a:schemeClr val="bg1">
+                            <a:lumMod val="50000"/>
+                          </a:schemeClr>
+                        </a:solidFill>
+                        <a:effectLst/>
+                        <a:uLnTx/>
+                        <a:uFillTx/>
+                        <a:latin typeface="Segoe UI"/>
+                        <a:ea typeface="+mn-ea"/>
+                        <a:cs typeface="+mn-cs"/>
+                      </a:endParaRPr>
+                    </a:p>
+                  </a:txBody>
+                  <a:tcPr marL="86797" marR="86797" marT="43397" marB="43397"/>
+                </a:tc>
+                <a:tc>
+                  <a:txBody>
+                    <a:bodyPr/>
+                    <a:lstStyle/>
+                    <a:p>
+                      <a:pPr marL="0" marR="0" lvl="0" indent="0" algn="l" defTabSz="914400" rtl="0" eaLnBrk="1" fontAlgn="auto" latinLnBrk="1" hangingPunct="1">
+                        <a:lnSpc>
+                          <a:spcPct val="100000"/>
+                        </a:lnSpc>
+                        <a:spcBef>
+                          <a:spcPts val="0"/>
+                        </a:spcBef>
+                        <a:spcAft>
+                          <a:spcPts val="0"/>
+                        </a:spcAft>
+                        <a:buClrTx/>
+                        <a:buSzTx/>
+                        <a:buFontTx/>
+                        <a:buNone/>
+                        <a:tabLst/>
+                        <a:defRPr/>
+                      </a:pPr>
+                      <a:r>
+                        <a:rPr kumimoji="0" lang="en-US" altLang="ko-KR" sz="1400" b="0" i="0" u="none" strike="noStrike" kern="1200" cap="none" spc="0" normalizeH="0" baseline="0" noProof="0" dirty="0">
+                          <a:ln>
+                            <a:noFill/>
+                          </a:ln>
+                          <a:solidFill>
+                            <a:schemeClr val="bg1">
+                              <a:lumMod val="50000"/>
+                            </a:schemeClr>
+                          </a:solidFill>
+                          <a:effectLst/>
+                          <a:uLnTx/>
+                          <a:uFillTx/>
+                          <a:latin typeface="Segoe UI"/>
+                          <a:ea typeface="+mn-ea"/>
+                          <a:cs typeface="+mn-cs"/>
+                        </a:rPr>
+                        <a:t>[0,0,0,0,</a:t>
+                      </a:r>
+                    </a:p>
+                    <a:p>
+                      <a:pPr marL="0" marR="0" lvl="0" indent="0" algn="l" defTabSz="914400" rtl="0" eaLnBrk="1" fontAlgn="auto" latinLnBrk="1" hangingPunct="1">
+                        <a:lnSpc>
+                          <a:spcPct val="100000"/>
+                        </a:lnSpc>
+                        <a:spcBef>
+                          <a:spcPts val="0"/>
+                        </a:spcBef>
+                        <a:spcAft>
+                          <a:spcPts val="0"/>
+                        </a:spcAft>
+                        <a:buClrTx/>
+                        <a:buSzTx/>
+                        <a:buFontTx/>
+                        <a:buNone/>
+                        <a:tabLst/>
+                        <a:defRPr/>
+                      </a:pPr>
+                      <a:r>
+                        <a:rPr kumimoji="0" lang="en-US" altLang="ko-KR" sz="1400" b="0" i="0" u="none" strike="noStrike" kern="1200" cap="none" spc="0" normalizeH="0" baseline="0" noProof="0" dirty="0">
+                          <a:ln>
+                            <a:noFill/>
+                          </a:ln>
+                          <a:solidFill>
+                            <a:schemeClr val="bg1">
+                              <a:lumMod val="50000"/>
+                            </a:schemeClr>
+                          </a:solidFill>
+                          <a:effectLst/>
+                          <a:uLnTx/>
+                          <a:uFillTx/>
+                          <a:latin typeface="Segoe UI"/>
+                          <a:ea typeface="+mn-ea"/>
+                          <a:cs typeface="+mn-cs"/>
+                        </a:rPr>
+                        <a:t>0,0,0,0,</a:t>
+                      </a:r>
+                    </a:p>
+                    <a:p>
+                      <a:pPr marL="0" marR="0" lvl="0" indent="0" algn="l" defTabSz="914400" rtl="0" eaLnBrk="1" fontAlgn="auto" latinLnBrk="1" hangingPunct="1">
+                        <a:lnSpc>
+                          <a:spcPct val="100000"/>
+                        </a:lnSpc>
+                        <a:spcBef>
+                          <a:spcPts val="0"/>
+                        </a:spcBef>
+                        <a:spcAft>
+                          <a:spcPts val="0"/>
+                        </a:spcAft>
+                        <a:buClrTx/>
+                        <a:buSzTx/>
+                        <a:buFontTx/>
+                        <a:buNone/>
+                        <a:tabLst/>
+                        <a:defRPr/>
+                      </a:pPr>
+                      <a:r>
+                        <a:rPr kumimoji="0" lang="en-US" altLang="ko-KR" sz="1400" b="0" i="0" u="none" strike="noStrike" kern="1200" cap="none" spc="0" normalizeH="0" baseline="0" noProof="0" dirty="0">
+                          <a:ln>
+                            <a:noFill/>
+                          </a:ln>
+                          <a:solidFill>
+                            <a:schemeClr val="bg1">
+                              <a:lumMod val="50000"/>
+                            </a:schemeClr>
+                          </a:solidFill>
+                          <a:effectLst/>
+                          <a:uLnTx/>
+                          <a:uFillTx/>
+                          <a:latin typeface="Segoe UI"/>
+                          <a:ea typeface="+mn-ea"/>
+                          <a:cs typeface="+mn-cs"/>
+                        </a:rPr>
+                        <a:t>0,0,0,0]</a:t>
+                      </a:r>
+                      <a:endParaRPr kumimoji="0" lang="ko-KR" altLang="en-US" sz="1400" b="0" i="0" u="none" strike="noStrike" kern="1200" cap="none" spc="0" normalizeH="0" baseline="0" noProof="0" dirty="0">
+                        <a:ln>
+                          <a:noFill/>
+                        </a:ln>
+                        <a:solidFill>
+                          <a:schemeClr val="bg1">
+                            <a:lumMod val="50000"/>
+                          </a:schemeClr>
+                        </a:solidFill>
+                        <a:effectLst/>
+                        <a:uLnTx/>
+                        <a:uFillTx/>
+                        <a:latin typeface="Segoe UI"/>
+                        <a:ea typeface="+mn-ea"/>
+                        <a:cs typeface="+mn-cs"/>
+                      </a:endParaRPr>
+                    </a:p>
+                  </a:txBody>
+                  <a:tcPr marL="86797" marR="86797" marT="43397" marB="43397"/>
+                </a:tc>
+                <a:tc>
+                  <a:txBody>
+                    <a:bodyPr/>
+                    <a:lstStyle/>
+                    <a:p>
+                      <a:pPr marL="0" marR="0" lvl="0" indent="0" algn="l" defTabSz="914400" rtl="0" eaLnBrk="1" fontAlgn="auto" latinLnBrk="1" hangingPunct="1">
+                        <a:lnSpc>
+                          <a:spcPct val="100000"/>
+                        </a:lnSpc>
+                        <a:spcBef>
+                          <a:spcPts val="0"/>
+                        </a:spcBef>
+                        <a:spcAft>
+                          <a:spcPts val="0"/>
+                        </a:spcAft>
+                        <a:buClrTx/>
+                        <a:buSzTx/>
+                        <a:buFontTx/>
+                        <a:buNone/>
+                        <a:tabLst/>
+                        <a:defRPr/>
+                      </a:pPr>
+                      <a:r>
+                        <a:rPr kumimoji="0" lang="en-US" altLang="ko-KR" sz="1400" b="0" i="0" u="none" strike="noStrike" kern="1200" cap="none" spc="0" normalizeH="0" baseline="0" noProof="0" dirty="0">
+                          <a:ln>
+                            <a:noFill/>
+                          </a:ln>
+                          <a:solidFill>
+                            <a:schemeClr val="bg1">
+                              <a:lumMod val="50000"/>
+                            </a:schemeClr>
+                          </a:solidFill>
+                          <a:effectLst/>
+                          <a:uLnTx/>
+                          <a:uFillTx/>
+                          <a:latin typeface="Segoe UI"/>
+                          <a:ea typeface="+mn-ea"/>
+                          <a:cs typeface="+mn-cs"/>
+                        </a:rPr>
+                        <a:t>[0,0,0,0,</a:t>
+                      </a:r>
+                    </a:p>
+                    <a:p>
+                      <a:pPr marL="0" marR="0" lvl="0" indent="0" algn="l" defTabSz="914400" rtl="0" eaLnBrk="1" fontAlgn="auto" latinLnBrk="1" hangingPunct="1">
+                        <a:lnSpc>
+                          <a:spcPct val="100000"/>
+                        </a:lnSpc>
+                        <a:spcBef>
+                          <a:spcPts val="0"/>
+                        </a:spcBef>
+                        <a:spcAft>
+                          <a:spcPts val="0"/>
+                        </a:spcAft>
+                        <a:buClrTx/>
+                        <a:buSzTx/>
+                        <a:buFontTx/>
+                        <a:buNone/>
+                        <a:tabLst/>
+                        <a:defRPr/>
+                      </a:pPr>
+                      <a:r>
+                        <a:rPr kumimoji="0" lang="en-US" altLang="ko-KR" sz="1400" b="0" i="0" u="none" strike="noStrike" kern="1200" cap="none" spc="0" normalizeH="0" baseline="0" noProof="0" dirty="0">
+                          <a:ln>
+                            <a:noFill/>
+                          </a:ln>
+                          <a:solidFill>
+                            <a:schemeClr val="bg1">
+                              <a:lumMod val="50000"/>
+                            </a:schemeClr>
+                          </a:solidFill>
+                          <a:effectLst/>
+                          <a:uLnTx/>
+                          <a:uFillTx/>
+                          <a:latin typeface="Segoe UI"/>
+                          <a:ea typeface="+mn-ea"/>
+                          <a:cs typeface="+mn-cs"/>
+                        </a:rPr>
+                        <a:t>0,0,0,0,</a:t>
+                      </a:r>
+                    </a:p>
+                    <a:p>
+                      <a:pPr marL="0" marR="0" lvl="0" indent="0" algn="l" defTabSz="914400" rtl="0" eaLnBrk="1" fontAlgn="auto" latinLnBrk="1" hangingPunct="1">
+                        <a:lnSpc>
+                          <a:spcPct val="100000"/>
+                        </a:lnSpc>
+                        <a:spcBef>
+                          <a:spcPts val="0"/>
+                        </a:spcBef>
+                        <a:spcAft>
+                          <a:spcPts val="0"/>
+                        </a:spcAft>
+                        <a:buClrTx/>
+                        <a:buSzTx/>
+                        <a:buFontTx/>
+                        <a:buNone/>
+                        <a:tabLst/>
+                        <a:defRPr/>
+                      </a:pPr>
+                      <a:r>
+                        <a:rPr kumimoji="0" lang="en-US" altLang="ko-KR" sz="1400" b="0" i="0" u="none" strike="noStrike" kern="1200" cap="none" spc="0" normalizeH="0" baseline="0" noProof="0" dirty="0">
+                          <a:ln>
+                            <a:noFill/>
+                          </a:ln>
+                          <a:solidFill>
+                            <a:schemeClr val="bg1">
+                              <a:lumMod val="50000"/>
+                            </a:schemeClr>
+                          </a:solidFill>
+                          <a:effectLst/>
+                          <a:uLnTx/>
+                          <a:uFillTx/>
+                          <a:latin typeface="Segoe UI"/>
+                          <a:ea typeface="+mn-ea"/>
+                          <a:cs typeface="+mn-cs"/>
+                        </a:rPr>
+                        <a:t>0,0,0,0]</a:t>
+                      </a:r>
+                      <a:endParaRPr kumimoji="0" lang="ko-KR" altLang="en-US" sz="1400" b="0" i="0" u="none" strike="noStrike" kern="1200" cap="none" spc="0" normalizeH="0" baseline="0" noProof="0" dirty="0">
+                        <a:ln>
+                          <a:noFill/>
+                        </a:ln>
+                        <a:solidFill>
+                          <a:schemeClr val="bg1">
+                            <a:lumMod val="50000"/>
+                          </a:schemeClr>
+                        </a:solidFill>
+                        <a:effectLst/>
+                        <a:uLnTx/>
+                        <a:uFillTx/>
+                        <a:latin typeface="Segoe UI"/>
+                        <a:ea typeface="+mn-ea"/>
+                        <a:cs typeface="+mn-cs"/>
+                      </a:endParaRPr>
+                    </a:p>
+                  </a:txBody>
+                  <a:tcPr marL="86797" marR="86797" marT="43397" marB="43397"/>
+                </a:tc>
+                <a:extLst>
+                  <a:ext uri="{0D108BD9-81ED-4DB2-BD59-A6C34878D82A}">
+                    <a16:rowId xmlns:a16="http://schemas.microsoft.com/office/drawing/2014/main" val="4097710734"/>
+                  </a:ext>
+                </a:extLst>
+              </a:tr>
+              <a:tr h="1068221">
+                <a:tc>
+                  <a:txBody>
+                    <a:bodyPr/>
+                    <a:lstStyle/>
+                    <a:p>
+                      <a:pPr marL="0" marR="0" lvl="0" indent="0" algn="l" defTabSz="914400" rtl="0" eaLnBrk="1" fontAlgn="auto" latinLnBrk="1" hangingPunct="1">
+                        <a:lnSpc>
+                          <a:spcPct val="100000"/>
+                        </a:lnSpc>
+                        <a:spcBef>
+                          <a:spcPts val="0"/>
+                        </a:spcBef>
+                        <a:spcAft>
+                          <a:spcPts val="0"/>
+                        </a:spcAft>
+                        <a:buClrTx/>
+                        <a:buSzTx/>
+                        <a:buFontTx/>
+                        <a:buNone/>
+                        <a:tabLst/>
+                        <a:defRPr/>
+                      </a:pPr>
+                      <a:r>
+                        <a:rPr kumimoji="0" lang="en-US" altLang="ko-KR" sz="1400" b="0" i="0" u="none" strike="noStrike" kern="1200" cap="none" spc="0" normalizeH="0" baseline="0" noProof="0" dirty="0">
+                          <a:ln>
+                            <a:noFill/>
+                          </a:ln>
+                          <a:solidFill>
+                            <a:schemeClr val="bg1">
+                              <a:lumMod val="50000"/>
+                            </a:schemeClr>
+                          </a:solidFill>
+                          <a:effectLst/>
+                          <a:uLnTx/>
+                          <a:uFillTx/>
+                          <a:latin typeface="Segoe UI"/>
+                          <a:ea typeface="+mn-ea"/>
+                          <a:cs typeface="+mn-cs"/>
+                        </a:rPr>
+                        <a:t>[0,0,0,0,</a:t>
+                      </a:r>
+                    </a:p>
+                    <a:p>
+                      <a:pPr marL="0" marR="0" lvl="0" indent="0" algn="l" defTabSz="914400" rtl="0" eaLnBrk="1" fontAlgn="auto" latinLnBrk="1" hangingPunct="1">
+                        <a:lnSpc>
+                          <a:spcPct val="100000"/>
+                        </a:lnSpc>
+                        <a:spcBef>
+                          <a:spcPts val="0"/>
+                        </a:spcBef>
+                        <a:spcAft>
+                          <a:spcPts val="0"/>
+                        </a:spcAft>
+                        <a:buClrTx/>
+                        <a:buSzTx/>
+                        <a:buFontTx/>
+                        <a:buNone/>
+                        <a:tabLst/>
+                        <a:defRPr/>
+                      </a:pPr>
+                      <a:r>
+                        <a:rPr kumimoji="0" lang="en-US" altLang="ko-KR" sz="1400" b="0" i="0" u="none" strike="noStrike" kern="1200" cap="none" spc="0" normalizeH="0" baseline="0" noProof="0" dirty="0">
+                          <a:ln>
+                            <a:noFill/>
+                          </a:ln>
+                          <a:solidFill>
+                            <a:schemeClr val="bg1">
+                              <a:lumMod val="50000"/>
+                            </a:schemeClr>
+                          </a:solidFill>
+                          <a:effectLst/>
+                          <a:uLnTx/>
+                          <a:uFillTx/>
+                          <a:latin typeface="Segoe UI"/>
+                          <a:ea typeface="+mn-ea"/>
+                          <a:cs typeface="+mn-cs"/>
+                        </a:rPr>
+                        <a:t>0,0,0,0,</a:t>
+                      </a:r>
+                    </a:p>
+                    <a:p>
+                      <a:pPr marL="0" marR="0" lvl="0" indent="0" algn="l" defTabSz="914400" rtl="0" eaLnBrk="1" fontAlgn="auto" latinLnBrk="1" hangingPunct="1">
+                        <a:lnSpc>
+                          <a:spcPct val="100000"/>
+                        </a:lnSpc>
+                        <a:spcBef>
+                          <a:spcPts val="0"/>
+                        </a:spcBef>
+                        <a:spcAft>
+                          <a:spcPts val="0"/>
+                        </a:spcAft>
+                        <a:buClrTx/>
+                        <a:buSzTx/>
+                        <a:buFontTx/>
+                        <a:buNone/>
+                        <a:tabLst/>
+                        <a:defRPr/>
+                      </a:pPr>
+                      <a:r>
+                        <a:rPr kumimoji="0" lang="en-US" altLang="ko-KR" sz="1400" b="0" i="0" u="none" strike="noStrike" kern="1200" cap="none" spc="0" normalizeH="0" baseline="0" noProof="0" dirty="0">
+                          <a:ln>
+                            <a:noFill/>
+                          </a:ln>
+                          <a:solidFill>
+                            <a:schemeClr val="bg1">
+                              <a:lumMod val="50000"/>
+                            </a:schemeClr>
+                          </a:solidFill>
+                          <a:effectLst/>
+                          <a:uLnTx/>
+                          <a:uFillTx/>
+                          <a:latin typeface="Segoe UI"/>
+                          <a:ea typeface="+mn-ea"/>
+                          <a:cs typeface="+mn-cs"/>
+                        </a:rPr>
+                        <a:t>0,0,0,0]</a:t>
+                      </a:r>
+                      <a:endParaRPr kumimoji="0" lang="ko-KR" altLang="en-US" sz="1400" b="0" i="0" u="none" strike="noStrike" kern="1200" cap="none" spc="0" normalizeH="0" baseline="0" noProof="0" dirty="0">
+                        <a:ln>
+                          <a:noFill/>
+                        </a:ln>
+                        <a:solidFill>
+                          <a:schemeClr val="bg1">
+                            <a:lumMod val="50000"/>
+                          </a:schemeClr>
+                        </a:solidFill>
+                        <a:effectLst/>
+                        <a:uLnTx/>
+                        <a:uFillTx/>
+                        <a:latin typeface="Segoe UI"/>
+                        <a:ea typeface="+mn-ea"/>
+                        <a:cs typeface="+mn-cs"/>
+                      </a:endParaRPr>
+                    </a:p>
+                  </a:txBody>
+                  <a:tcPr marL="86797" marR="86797" marT="43397" marB="43397"/>
+                </a:tc>
+                <a:tc>
+                  <a:txBody>
+                    <a:bodyPr/>
+                    <a:lstStyle/>
+                    <a:p>
+                      <a:pPr latinLnBrk="1"/>
+                      <a:r>
+                        <a:rPr lang="en-US" altLang="ko-KR" sz="1400" dirty="0">
+                          <a:solidFill>
+                            <a:schemeClr val="bg1">
+                              <a:lumMod val="50000"/>
+                            </a:schemeClr>
+                          </a:solidFill>
+                        </a:rPr>
+                        <a:t>[0,0,0,0,</a:t>
+                      </a:r>
+                    </a:p>
+                    <a:p>
+                      <a:pPr latinLnBrk="1"/>
+                      <a:r>
+                        <a:rPr lang="en-US" altLang="ko-KR" sz="1400" dirty="0">
+                          <a:solidFill>
+                            <a:schemeClr val="bg1">
+                              <a:lumMod val="50000"/>
+                            </a:schemeClr>
+                          </a:solidFill>
+                        </a:rPr>
+                        <a:t>0,0,0,0,</a:t>
+                      </a:r>
+                    </a:p>
+                    <a:p>
+                      <a:pPr latinLnBrk="1"/>
+                      <a:r>
+                        <a:rPr lang="en-US" altLang="ko-KR" sz="1400" dirty="0">
+                          <a:solidFill>
+                            <a:schemeClr val="bg1">
+                              <a:lumMod val="50000"/>
+                            </a:schemeClr>
+                          </a:solidFill>
+                        </a:rPr>
+                        <a:t>0,0,0,0]</a:t>
+                      </a:r>
+                      <a:endParaRPr lang="ko-KR" altLang="en-US" sz="1400" dirty="0">
+                        <a:solidFill>
+                          <a:schemeClr val="bg1">
+                            <a:lumMod val="50000"/>
+                          </a:schemeClr>
+                        </a:solidFill>
+                      </a:endParaRPr>
+                    </a:p>
+                    <a:p>
+                      <a:pPr marL="0" marR="0" lvl="0" indent="0" algn="l" defTabSz="914400" rtl="0" eaLnBrk="1" fontAlgn="auto" latinLnBrk="1" hangingPunct="1">
+                        <a:lnSpc>
+                          <a:spcPct val="100000"/>
+                        </a:lnSpc>
+                        <a:spcBef>
+                          <a:spcPts val="0"/>
+                        </a:spcBef>
+                        <a:spcAft>
+                          <a:spcPts val="0"/>
+                        </a:spcAft>
+                        <a:buClrTx/>
+                        <a:buSzTx/>
+                        <a:buFontTx/>
+                        <a:buNone/>
+                        <a:tabLst/>
+                        <a:defRPr/>
+                      </a:pPr>
+                      <a:endParaRPr kumimoji="0" lang="ko-KR" altLang="en-US" sz="1400" b="0" i="0" u="none" strike="noStrike" kern="1200" cap="none" spc="0" normalizeH="0" baseline="0" noProof="0" dirty="0">
+                        <a:ln>
+                          <a:noFill/>
+                        </a:ln>
+                        <a:solidFill>
+                          <a:schemeClr val="bg1">
+                            <a:lumMod val="50000"/>
+                          </a:schemeClr>
+                        </a:solidFill>
+                        <a:effectLst/>
+                        <a:uLnTx/>
+                        <a:uFillTx/>
+                        <a:latin typeface="Segoe UI"/>
+                        <a:ea typeface="+mn-ea"/>
+                        <a:cs typeface="+mn-cs"/>
+                      </a:endParaRPr>
+                    </a:p>
+                  </a:txBody>
+                  <a:tcPr marL="86797" marR="86797" marT="43397" marB="43397"/>
+                </a:tc>
+                <a:tc>
+                  <a:txBody>
+                    <a:bodyPr/>
+                    <a:lstStyle/>
+                    <a:p>
+                      <a:pPr marL="0" marR="0" lvl="0" indent="0" algn="l" defTabSz="914400" rtl="0" eaLnBrk="1" fontAlgn="auto" latinLnBrk="1" hangingPunct="1">
+                        <a:lnSpc>
+                          <a:spcPct val="100000"/>
+                        </a:lnSpc>
+                        <a:spcBef>
+                          <a:spcPts val="0"/>
+                        </a:spcBef>
+                        <a:spcAft>
+                          <a:spcPts val="0"/>
+                        </a:spcAft>
+                        <a:buClrTx/>
+                        <a:buSzTx/>
+                        <a:buFontTx/>
+                        <a:buNone/>
+                        <a:tabLst/>
+                        <a:defRPr/>
+                      </a:pPr>
+                      <a:endParaRPr kumimoji="0" lang="ko-KR" altLang="en-US" sz="1400" b="0" i="0" u="none" strike="noStrike" kern="1200" cap="none" spc="0" normalizeH="0" baseline="0" noProof="0" dirty="0">
+                        <a:ln>
+                          <a:noFill/>
+                        </a:ln>
+                        <a:solidFill>
+                          <a:srgbClr val="0070C0"/>
+                        </a:solidFill>
+                        <a:effectLst/>
+                        <a:uLnTx/>
+                        <a:uFillTx/>
+                        <a:latin typeface="Segoe UI"/>
+                        <a:ea typeface="+mn-ea"/>
+                        <a:cs typeface="+mn-cs"/>
+                      </a:endParaRPr>
+                    </a:p>
+                  </a:txBody>
+                  <a:tcPr marL="86797" marR="86797" marT="43397" marB="43397"/>
+                </a:tc>
+                <a:extLst>
+                  <a:ext uri="{0D108BD9-81ED-4DB2-BD59-A6C34878D82A}">
+                    <a16:rowId xmlns:a16="http://schemas.microsoft.com/office/drawing/2014/main" val="3232772719"/>
+                  </a:ext>
+                </a:extLst>
+              </a:tr>
+            </a:tbl>
+          </a:graphicData>
+        </a:graphic>
+      </p:graphicFrame>
+      <p:pic>
+        <p:nvPicPr>
+          <p:cNvPr id="17" name="그래픽 16" descr="트럭">
+            <a:extLst>
+              <a:ext uri="{FF2B5EF4-FFF2-40B4-BE49-F238E27FC236}">
+                <a16:creationId xmlns:a16="http://schemas.microsoft.com/office/drawing/2014/main" id="{67DAE3B8-38BA-9DF2-0C8C-6B0E375406CE}"/>
+              </a:ext>
+            </a:extLst>
+          </p:cNvPr>
+          <p:cNvPicPr>
+            <a:picLocks noChangeAspect="1"/>
+          </p:cNvPicPr>
+          <p:nvPr/>
+        </p:nvPicPr>
+        <p:blipFill>
+          <a:blip r:embed="rId2">
+            <a:extLst>
+              <a:ext uri="{96DAC541-7B7A-43D3-8B79-37D633B846F1}">
+                <asvg:svgBlip xmlns:asvg="http://schemas.microsoft.com/office/drawing/2016/SVG/main" r:embed="rId3"/>
+              </a:ext>
+            </a:extLst>
+          </a:blip>
+          <a:stretch>
+            <a:fillRect/>
+          </a:stretch>
+        </p:blipFill>
+        <p:spPr>
+          <a:xfrm>
+            <a:off x="3361094" y="5055370"/>
+            <a:ext cx="1047565" cy="1047565"/>
+          </a:xfrm>
+          <a:prstGeom prst="rect">
+            <a:avLst/>
+          </a:prstGeom>
+        </p:spPr>
+      </p:pic>
+      <p:grpSp>
+        <p:nvGrpSpPr>
+          <p:cNvPr id="24" name="그룹 23">
+            <a:extLst>
+              <a:ext uri="{FF2B5EF4-FFF2-40B4-BE49-F238E27FC236}">
+                <a16:creationId xmlns:a16="http://schemas.microsoft.com/office/drawing/2014/main" id="{7A71C663-CECD-3C91-0E31-D92F6C2969EB}"/>
+              </a:ext>
+            </a:extLst>
+          </p:cNvPr>
+          <p:cNvGrpSpPr/>
+          <p:nvPr/>
+        </p:nvGrpSpPr>
+        <p:grpSpPr>
+          <a:xfrm>
+            <a:off x="4734108" y="5293299"/>
+            <a:ext cx="6463832" cy="632558"/>
+            <a:chOff x="4146500" y="2118065"/>
+            <a:chExt cx="7553595" cy="739204"/>
+          </a:xfrm>
+        </p:grpSpPr>
+        <p:pic>
+          <p:nvPicPr>
+            <p:cNvPr id="21" name="그림 20">
+              <a:extLst>
+                <a:ext uri="{FF2B5EF4-FFF2-40B4-BE49-F238E27FC236}">
+                  <a16:creationId xmlns:a16="http://schemas.microsoft.com/office/drawing/2014/main" id="{7C3878D2-1CF4-FCEB-FFB0-1845386CEE16}"/>
+                </a:ext>
+              </a:extLst>
+            </p:cNvPr>
+            <p:cNvPicPr>
+              <a:picLocks noChangeAspect="1"/>
+            </p:cNvPicPr>
+            <p:nvPr/>
+          </p:nvPicPr>
+          <p:blipFill>
+            <a:blip r:embed="rId4"/>
+            <a:stretch>
+              <a:fillRect/>
+            </a:stretch>
+          </p:blipFill>
+          <p:spPr>
+            <a:xfrm>
+              <a:off x="4146500" y="2140327"/>
+              <a:ext cx="6501224" cy="712564"/>
+            </a:xfrm>
+            <a:prstGeom prst="rect">
+              <a:avLst/>
+            </a:prstGeom>
+          </p:spPr>
+        </p:pic>
+        <p:pic>
+          <p:nvPicPr>
+            <p:cNvPr id="23" name="그림 22">
+              <a:extLst>
+                <a:ext uri="{FF2B5EF4-FFF2-40B4-BE49-F238E27FC236}">
+                  <a16:creationId xmlns:a16="http://schemas.microsoft.com/office/drawing/2014/main" id="{DC9335D3-2E15-C112-E230-E722EF653BED}"/>
+                </a:ext>
+              </a:extLst>
+            </p:cNvPr>
+            <p:cNvPicPr>
+              <a:picLocks noChangeAspect="1"/>
+            </p:cNvPicPr>
+            <p:nvPr/>
+          </p:nvPicPr>
+          <p:blipFill>
+            <a:blip r:embed="rId5"/>
+            <a:stretch>
+              <a:fillRect/>
+            </a:stretch>
+          </p:blipFill>
+          <p:spPr>
+            <a:xfrm>
+              <a:off x="10634771" y="2118065"/>
+              <a:ext cx="1065324" cy="739204"/>
+            </a:xfrm>
+            <a:prstGeom prst="rect">
+              <a:avLst/>
+            </a:prstGeom>
+          </p:spPr>
+        </p:pic>
+      </p:grpSp>
+      <p:sp>
+        <p:nvSpPr>
+          <p:cNvPr id="30" name="TextBox 29">
+            <a:extLst>
+              <a:ext uri="{FF2B5EF4-FFF2-40B4-BE49-F238E27FC236}">
+                <a16:creationId xmlns:a16="http://schemas.microsoft.com/office/drawing/2014/main" id="{911B19B7-5598-F929-A03D-F603088DA936}"/>
+              </a:ext>
+            </a:extLst>
+          </p:cNvPr>
+          <p:cNvSpPr txBox="1"/>
+          <p:nvPr/>
+        </p:nvSpPr>
+        <p:spPr>
+          <a:xfrm>
+            <a:off x="4898973" y="2772867"/>
+            <a:ext cx="6817381" cy="2062103"/>
+          </a:xfrm>
+          <a:prstGeom prst="rect">
+            <a:avLst/>
+          </a:prstGeom>
+          <a:noFill/>
+        </p:spPr>
+        <p:txBody>
+          <a:bodyPr wrap="square">
+            <a:spAutoFit/>
+          </a:bodyPr>
+          <a:lstStyle/>
+          <a:p>
+            <a:pPr marL="285750" indent="-285750" rtl="0">
+              <a:buFont typeface="Wingdings" panose="05000000000000000000" pitchFamily="2" charset="2"/>
+              <a:buChar char="§"/>
+            </a:pPr>
+            <a:r>
+              <a:rPr lang="en-US" altLang="ko-KR" sz="1600" dirty="0">
+                <a:effectLst/>
+                <a:latin typeface="D2Coding" panose="020B0609020101020101" pitchFamily="49" charset="-127"/>
+                <a:ea typeface="D2Coding" panose="020B0609020101020101" pitchFamily="49" charset="-127"/>
+              </a:rPr>
+              <a:t>Tensor[3, 3, :]</a:t>
+            </a:r>
+            <a:r>
+              <a:rPr lang="ko-KR" altLang="en-US" sz="1600" dirty="0">
+                <a:effectLst/>
+                <a:latin typeface="D2Coding" panose="020B0609020101020101" pitchFamily="49" charset="-127"/>
+                <a:ea typeface="D2Coding" panose="020B0609020101020101" pitchFamily="49" charset="-127"/>
+              </a:rPr>
+              <a:t>은 </a:t>
+            </a:r>
+            <a:r>
+              <a:rPr lang="en-US" altLang="ko-KR" sz="1600" dirty="0">
+                <a:effectLst/>
+                <a:latin typeface="D2Coding" panose="020B0609020101020101" pitchFamily="49" charset="-127"/>
+                <a:ea typeface="D2Coding" panose="020B0609020101020101" pitchFamily="49" charset="-127"/>
+              </a:rPr>
+              <a:t>3×3 </a:t>
+            </a:r>
+            <a:r>
+              <a:rPr lang="ko-KR" altLang="en-US" sz="1600" dirty="0" err="1">
+                <a:effectLst/>
+                <a:latin typeface="D2Coding" panose="020B0609020101020101" pitchFamily="49" charset="-127"/>
+                <a:ea typeface="D2Coding" panose="020B0609020101020101" pitchFamily="49" charset="-127"/>
+              </a:rPr>
+              <a:t>격자판</a:t>
+            </a:r>
+            <a:r>
+              <a:rPr lang="ko-KR" altLang="en-US" sz="1600" dirty="0">
+                <a:effectLst/>
+                <a:latin typeface="D2Coding" panose="020B0609020101020101" pitchFamily="49" charset="-127"/>
+                <a:ea typeface="D2Coding" panose="020B0609020101020101" pitchFamily="49" charset="-127"/>
+              </a:rPr>
+              <a:t> 중에서 트럭은 우측 하단 방문을 열면 </a:t>
+            </a:r>
+            <a:r>
+              <a:rPr lang="en-US" altLang="ko-KR" sz="1600" dirty="0">
+                <a:effectLst/>
+                <a:latin typeface="D2Coding" panose="020B0609020101020101" pitchFamily="49" charset="-127"/>
+                <a:ea typeface="D2Coding" panose="020B0609020101020101" pitchFamily="49" charset="-127"/>
+              </a:rPr>
+              <a:t>12</a:t>
+            </a:r>
+            <a:r>
+              <a:rPr lang="ko-KR" altLang="en-US" sz="1600" dirty="0">
+                <a:effectLst/>
+                <a:latin typeface="D2Coding" panose="020B0609020101020101" pitchFamily="49" charset="-127"/>
+                <a:ea typeface="D2Coding" panose="020B0609020101020101" pitchFamily="49" charset="-127"/>
+              </a:rPr>
+              <a:t>개의 숫자가 들어있는데</a:t>
+            </a:r>
+            <a:r>
+              <a:rPr lang="en-US" altLang="ko-KR" sz="1600" dirty="0">
+                <a:effectLst/>
+                <a:latin typeface="D2Coding" panose="020B0609020101020101" pitchFamily="49" charset="-127"/>
+                <a:ea typeface="D2Coding" panose="020B0609020101020101" pitchFamily="49" charset="-127"/>
+              </a:rPr>
+              <a:t>, </a:t>
+            </a:r>
+            <a:r>
+              <a:rPr lang="ko-KR" altLang="en-US" sz="1600" dirty="0">
+                <a:effectLst/>
+                <a:latin typeface="D2Coding" panose="020B0609020101020101" pitchFamily="49" charset="-127"/>
+                <a:ea typeface="D2Coding" panose="020B0609020101020101" pitchFamily="49" charset="-127"/>
+              </a:rPr>
+              <a:t>그 숫자들이 각각 </a:t>
+            </a:r>
+            <a:r>
+              <a:rPr lang="en-US" altLang="ko-KR" sz="1600" dirty="0">
+                <a:effectLst/>
+                <a:latin typeface="D2Coding" panose="020B0609020101020101" pitchFamily="49" charset="-127"/>
+                <a:ea typeface="D2Coding" panose="020B0609020101020101" pitchFamily="49" charset="-127"/>
+              </a:rPr>
+              <a:t>'</a:t>
+            </a:r>
+            <a:r>
+              <a:rPr lang="ko-KR" altLang="en-US" sz="1600" dirty="0">
+                <a:effectLst/>
+                <a:latin typeface="D2Coding" panose="020B0609020101020101" pitchFamily="49" charset="-127"/>
+                <a:ea typeface="D2Coding" panose="020B0609020101020101" pitchFamily="49" charset="-127"/>
+              </a:rPr>
+              <a:t>가로 상자 정보 </a:t>
+            </a:r>
+            <a:r>
+              <a:rPr lang="en-US" altLang="ko-KR" sz="1600" dirty="0">
+                <a:effectLst/>
+                <a:latin typeface="D2Coding" panose="020B0609020101020101" pitchFamily="49" charset="-127"/>
+                <a:ea typeface="D2Coding" panose="020B0609020101020101" pitchFamily="49" charset="-127"/>
+              </a:rPr>
+              <a:t>5</a:t>
+            </a:r>
+            <a:r>
+              <a:rPr lang="ko-KR" altLang="en-US" sz="1600" dirty="0">
+                <a:effectLst/>
+                <a:latin typeface="D2Coding" panose="020B0609020101020101" pitchFamily="49" charset="-127"/>
+                <a:ea typeface="D2Coding" panose="020B0609020101020101" pitchFamily="49" charset="-127"/>
+              </a:rPr>
+              <a:t>개</a:t>
+            </a:r>
+            <a:r>
+              <a:rPr lang="en-US" altLang="ko-KR" sz="1600" dirty="0">
+                <a:effectLst/>
+                <a:latin typeface="D2Coding" panose="020B0609020101020101" pitchFamily="49" charset="-127"/>
+                <a:ea typeface="D2Coding" panose="020B0609020101020101" pitchFamily="49" charset="-127"/>
+              </a:rPr>
+              <a:t>', '</a:t>
+            </a:r>
+            <a:r>
+              <a:rPr lang="ko-KR" altLang="en-US" sz="1600" dirty="0">
+                <a:effectLst/>
+                <a:latin typeface="D2Coding" panose="020B0609020101020101" pitchFamily="49" charset="-127"/>
+                <a:ea typeface="D2Coding" panose="020B0609020101020101" pitchFamily="49" charset="-127"/>
+              </a:rPr>
+              <a:t>세로 상자 정보 </a:t>
+            </a:r>
+            <a:r>
+              <a:rPr lang="en-US" altLang="ko-KR" sz="1600" dirty="0">
+                <a:effectLst/>
+                <a:latin typeface="D2Coding" panose="020B0609020101020101" pitchFamily="49" charset="-127"/>
+                <a:ea typeface="D2Coding" panose="020B0609020101020101" pitchFamily="49" charset="-127"/>
+              </a:rPr>
+              <a:t>5</a:t>
+            </a:r>
+            <a:r>
+              <a:rPr lang="ko-KR" altLang="en-US" sz="1600" dirty="0">
+                <a:effectLst/>
+                <a:latin typeface="D2Coding" panose="020B0609020101020101" pitchFamily="49" charset="-127"/>
+                <a:ea typeface="D2Coding" panose="020B0609020101020101" pitchFamily="49" charset="-127"/>
+              </a:rPr>
+              <a:t>개</a:t>
+            </a:r>
+            <a:r>
+              <a:rPr lang="en-US" altLang="ko-KR" sz="1600" dirty="0">
+                <a:effectLst/>
+                <a:latin typeface="D2Coding" panose="020B0609020101020101" pitchFamily="49" charset="-127"/>
+                <a:ea typeface="D2Coding" panose="020B0609020101020101" pitchFamily="49" charset="-127"/>
+              </a:rPr>
+              <a:t>', '</a:t>
+            </a:r>
+            <a:r>
+              <a:rPr lang="ko-KR" altLang="en-US" sz="1600" dirty="0">
+                <a:effectLst/>
+                <a:latin typeface="D2Coding" panose="020B0609020101020101" pitchFamily="49" charset="-127"/>
+                <a:ea typeface="D2Coding" panose="020B0609020101020101" pitchFamily="49" charset="-127"/>
+              </a:rPr>
+              <a:t>이게 비행기인지 자동차인지 알려주는 정체 정보 </a:t>
+            </a:r>
+            <a:r>
+              <a:rPr lang="en-US" altLang="ko-KR" sz="1600" dirty="0">
+                <a:effectLst/>
+                <a:latin typeface="D2Coding" panose="020B0609020101020101" pitchFamily="49" charset="-127"/>
+                <a:ea typeface="D2Coding" panose="020B0609020101020101" pitchFamily="49" charset="-127"/>
+              </a:rPr>
+              <a:t>2</a:t>
+            </a:r>
+            <a:r>
+              <a:rPr lang="ko-KR" altLang="en-US" sz="1600" dirty="0">
+                <a:effectLst/>
+                <a:latin typeface="D2Coding" panose="020B0609020101020101" pitchFamily="49" charset="-127"/>
+                <a:ea typeface="D2Coding" panose="020B0609020101020101" pitchFamily="49" charset="-127"/>
+              </a:rPr>
+              <a:t>개</a:t>
+            </a:r>
+            <a:r>
+              <a:rPr lang="en-US" altLang="ko-KR" sz="1600" dirty="0">
+                <a:effectLst/>
+                <a:latin typeface="D2Coding" panose="020B0609020101020101" pitchFamily="49" charset="-127"/>
+                <a:ea typeface="D2Coding" panose="020B0609020101020101" pitchFamily="49" charset="-127"/>
+              </a:rPr>
+              <a:t>’</a:t>
+            </a:r>
+            <a:r>
+              <a:rPr lang="ko-KR" altLang="en-US" sz="1600" dirty="0">
+                <a:effectLst/>
+                <a:latin typeface="D2Coding" panose="020B0609020101020101" pitchFamily="49" charset="-127"/>
+                <a:ea typeface="D2Coding" panose="020B0609020101020101" pitchFamily="49" charset="-127"/>
+              </a:rPr>
+              <a:t>를 보여줌</a:t>
+            </a:r>
+            <a:endParaRPr lang="en-US" altLang="ko-KR" sz="1600" dirty="0">
+              <a:latin typeface="D2Coding" panose="020B0609020101020101" pitchFamily="49" charset="-127"/>
+              <a:ea typeface="D2Coding" panose="020B0609020101020101" pitchFamily="49" charset="-127"/>
+            </a:endParaRPr>
+          </a:p>
+          <a:p>
+            <a:pPr marL="285750" indent="-285750" rtl="0">
+              <a:buFont typeface="Wingdings" panose="05000000000000000000" pitchFamily="2" charset="2"/>
+              <a:buChar char="§"/>
+            </a:pPr>
+            <a:endParaRPr lang="en-US" altLang="ko-KR" sz="1600" dirty="0">
+              <a:effectLst/>
+              <a:latin typeface="D2Coding" panose="020B0609020101020101" pitchFamily="49" charset="-127"/>
+              <a:ea typeface="D2Coding" panose="020B0609020101020101" pitchFamily="49" charset="-127"/>
+            </a:endParaRPr>
+          </a:p>
+          <a:p>
+            <a:pPr marL="285750" indent="-285750" rtl="0">
+              <a:buFont typeface="Wingdings" panose="05000000000000000000" pitchFamily="2" charset="2"/>
+              <a:buChar char="§"/>
+            </a:pPr>
+            <a:r>
+              <a:rPr lang="en-US" altLang="ko-KR" sz="1600" dirty="0">
+                <a:effectLst/>
+                <a:latin typeface="D2Coding" panose="020B0609020101020101" pitchFamily="49" charset="-127"/>
+                <a:ea typeface="D2Coding" panose="020B0609020101020101" pitchFamily="49" charset="-127"/>
+              </a:rPr>
+              <a:t>YOLO</a:t>
+            </a:r>
+            <a:r>
+              <a:rPr lang="ko-KR" altLang="en-US" sz="1600" dirty="0">
+                <a:effectLst/>
+                <a:latin typeface="D2Coding" panose="020B0609020101020101" pitchFamily="49" charset="-127"/>
+                <a:ea typeface="D2Coding" panose="020B0609020101020101" pitchFamily="49" charset="-127"/>
+              </a:rPr>
+              <a:t>는 이 </a:t>
+            </a:r>
+            <a:r>
+              <a:rPr lang="en-US" altLang="ko-KR" sz="1600" dirty="0">
+                <a:effectLst/>
+                <a:latin typeface="D2Coding" panose="020B0609020101020101" pitchFamily="49" charset="-127"/>
+                <a:ea typeface="D2Coding" panose="020B0609020101020101" pitchFamily="49" charset="-127"/>
+              </a:rPr>
+              <a:t>12</a:t>
+            </a:r>
+            <a:r>
+              <a:rPr lang="ko-KR" altLang="en-US" sz="1600" dirty="0">
+                <a:effectLst/>
+                <a:latin typeface="D2Coding" panose="020B0609020101020101" pitchFamily="49" charset="-127"/>
+                <a:ea typeface="D2Coding" panose="020B0609020101020101" pitchFamily="49" charset="-127"/>
+              </a:rPr>
+              <a:t>개의 숫자를 보고 </a:t>
+            </a:r>
+            <a:r>
+              <a:rPr lang="en-US" altLang="ko-KR" sz="1600" dirty="0">
+                <a:effectLst/>
+                <a:latin typeface="D2Coding" panose="020B0609020101020101" pitchFamily="49" charset="-127"/>
+                <a:ea typeface="D2Coding" panose="020B0609020101020101" pitchFamily="49" charset="-127"/>
+              </a:rPr>
+              <a:t>'</a:t>
+            </a:r>
+            <a:r>
+              <a:rPr lang="ko-KR" altLang="en-US" sz="1600" dirty="0">
+                <a:effectLst/>
+                <a:latin typeface="D2Coding" panose="020B0609020101020101" pitchFamily="49" charset="-127"/>
+                <a:ea typeface="D2Coding" panose="020B0609020101020101" pitchFamily="49" charset="-127"/>
+              </a:rPr>
+              <a:t>아</a:t>
+            </a:r>
+            <a:r>
+              <a:rPr lang="en-US" altLang="ko-KR" sz="1600" dirty="0">
+                <a:effectLst/>
+                <a:latin typeface="D2Coding" panose="020B0609020101020101" pitchFamily="49" charset="-127"/>
+                <a:ea typeface="D2Coding" panose="020B0609020101020101" pitchFamily="49" charset="-127"/>
+              </a:rPr>
+              <a:t>! 3</a:t>
+            </a:r>
+            <a:r>
+              <a:rPr lang="ko-KR" altLang="en-US" sz="1600" dirty="0">
+                <a:effectLst/>
+                <a:latin typeface="D2Coding" panose="020B0609020101020101" pitchFamily="49" charset="-127"/>
+                <a:ea typeface="D2Coding" panose="020B0609020101020101" pitchFamily="49" charset="-127"/>
+              </a:rPr>
+              <a:t>행 </a:t>
+            </a:r>
+            <a:r>
+              <a:rPr lang="en-US" altLang="ko-KR" sz="1600" dirty="0">
+                <a:effectLst/>
+                <a:latin typeface="D2Coding" panose="020B0609020101020101" pitchFamily="49" charset="-127"/>
+                <a:ea typeface="D2Coding" panose="020B0609020101020101" pitchFamily="49" charset="-127"/>
+              </a:rPr>
+              <a:t>3</a:t>
+            </a:r>
+            <a:r>
+              <a:rPr lang="ko-KR" altLang="en-US" sz="1600" dirty="0">
+                <a:effectLst/>
+                <a:latin typeface="D2Coding" panose="020B0609020101020101" pitchFamily="49" charset="-127"/>
+                <a:ea typeface="D2Coding" panose="020B0609020101020101" pitchFamily="49" charset="-127"/>
+              </a:rPr>
+              <a:t>열에 </a:t>
+            </a:r>
+            <a:r>
+              <a:rPr lang="en-US" altLang="ko-KR" sz="1600" dirty="0">
+                <a:effectLst/>
+                <a:latin typeface="D2Coding" panose="020B0609020101020101" pitchFamily="49" charset="-127"/>
+                <a:ea typeface="D2Coding" panose="020B0609020101020101" pitchFamily="49" charset="-127"/>
+              </a:rPr>
+              <a:t>88%</a:t>
+            </a:r>
+            <a:r>
+              <a:rPr lang="ko-KR" altLang="en-US" sz="1600" dirty="0" err="1">
+                <a:effectLst/>
+                <a:latin typeface="D2Coding" panose="020B0609020101020101" pitchFamily="49" charset="-127"/>
+                <a:ea typeface="D2Coding" panose="020B0609020101020101" pitchFamily="49" charset="-127"/>
+              </a:rPr>
+              <a:t>짜리</a:t>
+            </a:r>
+            <a:r>
+              <a:rPr lang="ko-KR" altLang="en-US" sz="1600" dirty="0">
+                <a:effectLst/>
+                <a:latin typeface="D2Coding" panose="020B0609020101020101" pitchFamily="49" charset="-127"/>
+                <a:ea typeface="D2Coding" panose="020B0609020101020101" pitchFamily="49" charset="-127"/>
+              </a:rPr>
+              <a:t> 가로 상자를 치고</a:t>
+            </a:r>
+            <a:r>
+              <a:rPr lang="en-US" altLang="ko-KR" sz="1600" dirty="0">
+                <a:effectLst/>
+                <a:latin typeface="D2Coding" panose="020B0609020101020101" pitchFamily="49" charset="-127"/>
+                <a:ea typeface="D2Coding" panose="020B0609020101020101" pitchFamily="49" charset="-127"/>
+              </a:rPr>
+              <a:t>, </a:t>
+            </a:r>
+            <a:r>
+              <a:rPr lang="ko-KR" altLang="en-US" sz="1600" dirty="0">
+                <a:effectLst/>
+                <a:latin typeface="D2Coding" panose="020B0609020101020101" pitchFamily="49" charset="-127"/>
+                <a:ea typeface="D2Coding" panose="020B0609020101020101" pitchFamily="49" charset="-127"/>
+              </a:rPr>
+              <a:t>정체는 자동차라고 </a:t>
+            </a:r>
+            <a:r>
+              <a:rPr lang="ko-KR" altLang="en-US" sz="1600" dirty="0" err="1">
+                <a:effectLst/>
+                <a:latin typeface="D2Coding" panose="020B0609020101020101" pitchFamily="49" charset="-127"/>
+                <a:ea typeface="D2Coding" panose="020B0609020101020101" pitchFamily="49" charset="-127"/>
+              </a:rPr>
+              <a:t>띄워야겠구나</a:t>
+            </a:r>
+            <a:r>
+              <a:rPr lang="en-US" altLang="ko-KR" sz="1600" dirty="0">
+                <a:effectLst/>
+                <a:latin typeface="D2Coding" panose="020B0609020101020101" pitchFamily="49" charset="-127"/>
+                <a:ea typeface="D2Coding" panose="020B0609020101020101" pitchFamily="49" charset="-127"/>
+              </a:rPr>
+              <a:t>!' </a:t>
+            </a:r>
+            <a:r>
+              <a:rPr lang="ko-KR" altLang="en-US" sz="1600" dirty="0">
+                <a:effectLst/>
+                <a:latin typeface="D2Coding" panose="020B0609020101020101" pitchFamily="49" charset="-127"/>
+                <a:ea typeface="D2Coding" panose="020B0609020101020101" pitchFamily="49" charset="-127"/>
+              </a:rPr>
+              <a:t>하고 최종 화면을 </a:t>
+            </a:r>
+            <a:r>
+              <a:rPr lang="ko-KR" altLang="en-US" sz="1600" dirty="0">
+                <a:latin typeface="D2Coding" panose="020B0609020101020101" pitchFamily="49" charset="-127"/>
+                <a:ea typeface="D2Coding" panose="020B0609020101020101" pitchFamily="49" charset="-127"/>
+              </a:rPr>
+              <a:t>그려서 예측</a:t>
+            </a:r>
+            <a:endParaRPr lang="en-US" altLang="ko-KR" sz="1600" dirty="0">
+              <a:effectLst/>
+              <a:latin typeface="D2Coding" panose="020B0609020101020101" pitchFamily="49" charset="-127"/>
+              <a:ea typeface="D2Coding" panose="020B0609020101020101" pitchFamily="49" charset="-127"/>
+            </a:endParaRPr>
+          </a:p>
+        </p:txBody>
+      </p:sp>
+    </p:spTree>
+    <p:extLst>
+      <p:ext uri="{BB962C8B-B14F-4D97-AF65-F5344CB8AC3E}">
+        <p14:creationId xmlns:p14="http://schemas.microsoft.com/office/powerpoint/2010/main" val="3607778234"/>
+      </p:ext>
+    </p:extLst>
+  </p:cSld>
+  <p:clrMapOvr>
+    <a:masterClrMapping/>
+  </p:clrMapOvr>
+  <p:timing>
+    <p:tnLst>
+      <p:par>
+        <p:cTn id="1" dur="indefinite" restart="never" nodeType="tmRoot">
+          <p:childTnLst>
+            <p:seq concurrent="1" nextAc="seek">
+              <p:cTn id="2" dur="indefinite" nodeType="mainSeq">
+                <p:childTnLst>
+                  <p:par>
+                    <p:cTn id="3" fill="hold">
+                      <p:stCondLst>
+                        <p:cond delay="indefinite"/>
+                      </p:stCondLst>
+                      <p:childTnLst>
+                        <p:par>
+                          <p:cTn id="4" fill="hold">
+                            <p:stCondLst>
+                              <p:cond delay="0"/>
+                            </p:stCondLst>
+                            <p:childTnLst>
+                              <p:par>
+                                <p:cTn id="5" presetID="1" presetClass="entr" presetSubtype="0" fill="hold" nodeType="clickEffect">
+                                  <p:stCondLst>
+                                    <p:cond delay="0"/>
+                                  </p:stCondLst>
+                                  <p:childTnLst>
+                                    <p:set>
+                                      <p:cBhvr>
+                                        <p:cTn id="6" dur="1" fill="hold">
+                                          <p:stCondLst>
+                                            <p:cond delay="0"/>
+                                          </p:stCondLst>
+                                        </p:cTn>
+                                        <p:tgtEl>
+                                          <p:spTgt spid="16"/>
+                                        </p:tgtEl>
+                                        <p:attrNameLst>
+                                          <p:attrName>style.visibility</p:attrName>
+                                        </p:attrNameLst>
+                                      </p:cBhvr>
+                                      <p:to>
+                                        <p:strVal val="visible"/>
+                                      </p:to>
+                                    </p:set>
+                                  </p:childTnLst>
+                                </p:cTn>
+                              </p:par>
+                              <p:par>
+                                <p:cTn id="7" presetID="1" presetClass="entr" presetSubtype="0" fill="hold" nodeType="withEffect">
+                                  <p:stCondLst>
+                                    <p:cond delay="0"/>
+                                  </p:stCondLst>
+                                  <p:childTnLst>
+                                    <p:set>
+                                      <p:cBhvr>
+                                        <p:cTn id="8" dur="1" fill="hold">
+                                          <p:stCondLst>
+                                            <p:cond delay="0"/>
+                                          </p:stCondLst>
+                                        </p:cTn>
+                                        <p:tgtEl>
+                                          <p:spTgt spid="17"/>
+                                        </p:tgtEl>
+                                        <p:attrNameLst>
+                                          <p:attrName>style.visibility</p:attrName>
+                                        </p:attrNameLst>
+                                      </p:cBhvr>
+                                      <p:to>
+                                        <p:strVal val="visible"/>
+                                      </p:to>
+                                    </p:set>
+                                  </p:childTnLst>
+                                </p:cTn>
+                              </p:par>
+                            </p:childTnLst>
+                          </p:cTn>
+                        </p:par>
+                      </p:childTnLst>
+                    </p:cTn>
+                  </p:par>
+                </p:childTnLst>
+              </p:cTn>
+              <p:prevCondLst>
+                <p:cond evt="onPrev" delay="0">
+                  <p:tgtEl>
+                    <p:sldTgt/>
+                  </p:tgtEl>
+                </p:cond>
+              </p:prevCondLst>
+              <p:nextCondLst>
+                <p:cond evt="onNext" delay="0">
+                  <p:tgtEl>
+                    <p:sldTgt/>
+                  </p:tgtEl>
+                </p:cond>
+              </p:nextCondLst>
+            </p:seq>
+          </p:childTnLst>
+        </p:cTn>
+      </p:par>
+    </p:tnLst>
+  </p:timing>
+</p:sld>
+</file>
+
+<file path=ppt/slides/slide11.xml><?xml version="1.0" encoding="utf-8"?>
+<p:sld xmlns:a="http://schemas.openxmlformats.org/drawingml/2006/main" xmlns:r="http://schemas.openxmlformats.org/officeDocument/2006/relationships" xmlns:p="http://schemas.openxmlformats.org/presentationml/2006/main">
+  <p:cSld>
+    <p:spTree>
+      <p:nvGrpSpPr>
+        <p:cNvPr id="1" name="">
+          <a:extLst>
+            <a:ext uri="{FF2B5EF4-FFF2-40B4-BE49-F238E27FC236}">
               <a16:creationId xmlns:a16="http://schemas.microsoft.com/office/drawing/2014/main" id="{13802734-AA6A-E730-3531-0054C5EEA84C}"/>
             </a:ext>
           </a:extLst>
@@ -3338,7 +5420,7 @@
             <a:fld id="{D57F1E4F-1CFF-5643-939E-217C01CDF565}" type="slidenum">
               <a:rPr lang="en-US" smtClean="0"/>
               <a:pPr/>
-              <a:t>10</a:t>
+              <a:t>11</a:t>
             </a:fld>
             <a:endParaRPr lang="en-US" dirty="0"/>
           </a:p>
@@ -3522,7 +5604,7 @@
 </p:sld>
 </file>
 
-<file path=ppt/slides/slide11.xml><?xml version="1.0" encoding="utf-8"?>
+<file path=ppt/slides/slide12.xml><?xml version="1.0" encoding="utf-8"?>
 <p:sld xmlns:a="http://schemas.openxmlformats.org/drawingml/2006/main" xmlns:r="http://schemas.openxmlformats.org/officeDocument/2006/relationships" xmlns:p="http://schemas.openxmlformats.org/presentationml/2006/main">
   <p:cSld>
     <p:spTree>
@@ -3574,7 +5656,7 @@
             <a:fld id="{D57F1E4F-1CFF-5643-939E-217C01CDF565}" type="slidenum">
               <a:rPr lang="en-US" smtClean="0"/>
               <a:pPr/>
-              <a:t>11</a:t>
+              <a:t>12</a:t>
             </a:fld>
             <a:endParaRPr lang="en-US" dirty="0"/>
           </a:p>
@@ -5031,7 +7113,7 @@
 </p:sld>
 </file>
 
-<file path=ppt/slides/slide12.xml><?xml version="1.0" encoding="utf-8"?>
+<file path=ppt/slides/slide13.xml><?xml version="1.0" encoding="utf-8"?>
 <p:sld xmlns:a="http://schemas.openxmlformats.org/drawingml/2006/main" xmlns:r="http://schemas.openxmlformats.org/officeDocument/2006/relationships" xmlns:p="http://schemas.openxmlformats.org/presentationml/2006/main">
   <p:cSld>
     <p:spTree>
@@ -5083,7 +7165,7 @@
             <a:fld id="{D57F1E4F-1CFF-5643-939E-217C01CDF565}" type="slidenum">
               <a:rPr lang="en-US" smtClean="0"/>
               <a:pPr/>
-              <a:t>12</a:t>
+              <a:t>13</a:t>
             </a:fld>
             <a:endParaRPr lang="en-US" dirty="0"/>
           </a:p>
@@ -5990,7 +8072,7 @@
 </p:sld>
 </file>
 
-<file path=ppt/slides/slide13.xml><?xml version="1.0" encoding="utf-8"?>
+<file path=ppt/slides/slide14.xml><?xml version="1.0" encoding="utf-8"?>
 <p:sld xmlns:a="http://schemas.openxmlformats.org/drawingml/2006/main" xmlns:r="http://schemas.openxmlformats.org/officeDocument/2006/relationships" xmlns:p="http://schemas.openxmlformats.org/presentationml/2006/main">
   <p:cSld>
     <p:spTree>
@@ -6133,7 +8215,7 @@
             <a:fld id="{D57F1E4F-1CFF-5643-939E-217C01CDF565}" type="slidenum">
               <a:rPr lang="en-US" smtClean="0"/>
               <a:pPr/>
-              <a:t>13</a:t>
+              <a:t>14</a:t>
             </a:fld>
             <a:endParaRPr lang="en-US" dirty="0"/>
           </a:p>
@@ -7120,7 +9202,7 @@
 </p:sld>
 </file>
 
-<file path=ppt/slides/slide14.xml><?xml version="1.0" encoding="utf-8"?>
+<file path=ppt/slides/slide15.xml><?xml version="1.0" encoding="utf-8"?>
 <p:sld xmlns:a="http://schemas.openxmlformats.org/drawingml/2006/main" xmlns:r="http://schemas.openxmlformats.org/officeDocument/2006/relationships" xmlns:p="http://schemas.openxmlformats.org/presentationml/2006/main">
   <p:cSld>
     <p:spTree>
@@ -7172,7 +9254,7 @@
             <a:fld id="{D57F1E4F-1CFF-5643-939E-217C01CDF565}" type="slidenum">
               <a:rPr lang="en-US" smtClean="0"/>
               <a:pPr/>
-              <a:t>14</a:t>
+              <a:t>15</a:t>
             </a:fld>
             <a:endParaRPr lang="en-US" dirty="0"/>
           </a:p>
@@ -7405,7 +9487,7 @@
 </p:sld>
 </file>
 
-<file path=ppt/slides/slide15.xml><?xml version="1.0" encoding="utf-8"?>
+<file path=ppt/slides/slide16.xml><?xml version="1.0" encoding="utf-8"?>
 <p:sld xmlns:a="http://schemas.openxmlformats.org/drawingml/2006/main" xmlns:r="http://schemas.openxmlformats.org/officeDocument/2006/relationships" xmlns:p="http://schemas.openxmlformats.org/presentationml/2006/main">
   <p:cSld>
     <p:spTree>
@@ -7457,7 +9539,7 @@
             <a:fld id="{D57F1E4F-1CFF-5643-939E-217C01CDF565}" type="slidenum">
               <a:rPr lang="en-US" smtClean="0"/>
               <a:pPr/>
-              <a:t>15</a:t>
+              <a:t>16</a:t>
             </a:fld>
             <a:endParaRPr lang="en-US" dirty="0"/>
           </a:p>
@@ -7586,7 +9668,7 @@
 </p:sld>
 </file>
 
-<file path=ppt/slides/slide16.xml><?xml version="1.0" encoding="utf-8"?>
+<file path=ppt/slides/slide17.xml><?xml version="1.0" encoding="utf-8"?>
 <p:sld xmlns:a="http://schemas.openxmlformats.org/drawingml/2006/main" xmlns:r="http://schemas.openxmlformats.org/officeDocument/2006/relationships" xmlns:p="http://schemas.openxmlformats.org/presentationml/2006/main">
   <p:cSld>
     <p:spTree>
@@ -7638,7 +9720,7 @@
             <a:fld id="{D57F1E4F-1CFF-5643-939E-217C01CDF565}" type="slidenum">
               <a:rPr lang="en-US" smtClean="0"/>
               <a:pPr/>
-              <a:t>16</a:t>
+              <a:t>17</a:t>
             </a:fld>
             <a:endParaRPr lang="en-US" dirty="0"/>
           </a:p>
@@ -11176,7 +13258,7 @@
 </p:sld>
 </file>
 
-<file path=ppt/slides/slide17.xml><?xml version="1.0" encoding="utf-8"?>
+<file path=ppt/slides/slide18.xml><?xml version="1.0" encoding="utf-8"?>
 <p:sld xmlns:a="http://schemas.openxmlformats.org/drawingml/2006/main" xmlns:r="http://schemas.openxmlformats.org/officeDocument/2006/relationships" xmlns:p="http://schemas.openxmlformats.org/presentationml/2006/main">
   <p:cSld>
     <p:spTree>
@@ -11228,7 +13310,7 @@
             <a:fld id="{D57F1E4F-1CFF-5643-939E-217C01CDF565}" type="slidenum">
               <a:rPr lang="en-US" smtClean="0"/>
               <a:pPr/>
-              <a:t>17</a:t>
+              <a:t>18</a:t>
             </a:fld>
             <a:endParaRPr lang="en-US" dirty="0"/>
           </a:p>
@@ -13929,7 +16011,7 @@
 </p:sld>
 </file>
 
-<file path=ppt/slides/slide18.xml><?xml version="1.0" encoding="utf-8"?>
+<file path=ppt/slides/slide19.xml><?xml version="1.0" encoding="utf-8"?>
 <p:sld xmlns:a="http://schemas.openxmlformats.org/drawingml/2006/main" xmlns:r="http://schemas.openxmlformats.org/officeDocument/2006/relationships" xmlns:p="http://schemas.openxmlformats.org/presentationml/2006/main">
   <p:cSld>
     <p:spTree>
@@ -13981,7 +16063,7 @@
             <a:fld id="{D57F1E4F-1CFF-5643-939E-217C01CDF565}" type="slidenum">
               <a:rPr lang="en-US" smtClean="0"/>
               <a:pPr/>
-              <a:t>18</a:t>
+              <a:t>19</a:t>
             </a:fld>
             <a:endParaRPr lang="en-US" dirty="0"/>
           </a:p>
@@ -21879,7 +23961,7 @@
         <p:spPr>
           <a:xfrm>
             <a:off x="571802" y="1248422"/>
-            <a:ext cx="11144553" cy="4620304"/>
+            <a:ext cx="11144553" cy="4204805"/>
           </a:xfrm>
           <a:prstGeom prst="rect">
             <a:avLst/>
@@ -22272,19 +24354,6 @@
               </a:rPr>
               <a:t>으로 작동하는 엄청난 속도를 가질 수 있음</a:t>
             </a:r>
-            <a:endParaRPr lang="en-US" altLang="ko-KR" dirty="0">
-              <a:latin typeface="D2Coding" panose="020B0609020101020101" pitchFamily="49" charset="-127"/>
-              <a:ea typeface="D2Coding" panose="020B0609020101020101" pitchFamily="49" charset="-127"/>
-            </a:endParaRPr>
-          </a:p>
-          <a:p>
-            <a:pPr marL="285750" indent="-285750">
-              <a:lnSpc>
-                <a:spcPct val="150000"/>
-              </a:lnSpc>
-              <a:buFont typeface="Wingdings" panose="05000000000000000000" pitchFamily="2" charset="2"/>
-              <a:buChar char="v"/>
-            </a:pPr>
             <a:endParaRPr lang="en-US" altLang="ko-KR" dirty="0">
               <a:latin typeface="D2Coding" panose="020B0609020101020101" pitchFamily="49" charset="-127"/>
               <a:ea typeface="D2Coding" panose="020B0609020101020101" pitchFamily="49" charset="-127"/>
@@ -22392,6 +24461,198 @@
           </a:p>
         </p:txBody>
       </p:sp>
+      <p:sp>
+        <p:nvSpPr>
+          <p:cNvPr id="5" name="화살표: 줄무늬가 있는 오른쪽 4">
+            <a:extLst>
+              <a:ext uri="{FF2B5EF4-FFF2-40B4-BE49-F238E27FC236}">
+                <a16:creationId xmlns:a16="http://schemas.microsoft.com/office/drawing/2014/main" id="{4D67FE0F-4DC2-404F-6F22-44F7A09B816C}"/>
+              </a:ext>
+            </a:extLst>
+          </p:cNvPr>
+          <p:cNvSpPr/>
+          <p:nvPr/>
+        </p:nvSpPr>
+        <p:spPr>
+          <a:xfrm>
+            <a:off x="2162175" y="5524500"/>
+            <a:ext cx="1819275" cy="971550"/>
+          </a:xfrm>
+          <a:prstGeom prst="stripedRightArrow">
+            <a:avLst/>
+          </a:prstGeom>
+        </p:spPr>
+        <p:style>
+          <a:lnRef idx="2">
+            <a:schemeClr val="accent1">
+              <a:shade val="15000"/>
+            </a:schemeClr>
+          </a:lnRef>
+          <a:fillRef idx="1">
+            <a:schemeClr val="accent1"/>
+          </a:fillRef>
+          <a:effectRef idx="0">
+            <a:schemeClr val="accent1"/>
+          </a:effectRef>
+          <a:fontRef idx="minor">
+            <a:schemeClr val="lt1"/>
+          </a:fontRef>
+        </p:style>
+        <p:txBody>
+          <a:bodyPr rtlCol="0" anchor="ctr"/>
+          <a:lstStyle/>
+          <a:p>
+            <a:pPr algn="ctr"/>
+            <a:r>
+              <a:rPr lang="en-US" altLang="ko-KR" dirty="0"/>
+              <a:t>CNN</a:t>
+            </a:r>
+            <a:endParaRPr lang="ko-KR" altLang="en-US" dirty="0"/>
+          </a:p>
+        </p:txBody>
+      </p:sp>
+      <p:sp>
+        <p:nvSpPr>
+          <p:cNvPr id="9" name="화살표: 줄무늬가 있는 오른쪽 8">
+            <a:extLst>
+              <a:ext uri="{FF2B5EF4-FFF2-40B4-BE49-F238E27FC236}">
+                <a16:creationId xmlns:a16="http://schemas.microsoft.com/office/drawing/2014/main" id="{8ED3DA13-E072-EACF-44BD-CD51A95A352D}"/>
+              </a:ext>
+            </a:extLst>
+          </p:cNvPr>
+          <p:cNvSpPr/>
+          <p:nvPr/>
+        </p:nvSpPr>
+        <p:spPr>
+          <a:xfrm>
+            <a:off x="4364040" y="5524500"/>
+            <a:ext cx="2114550" cy="971550"/>
+          </a:xfrm>
+          <a:prstGeom prst="stripedRightArrow">
+            <a:avLst/>
+          </a:prstGeom>
+        </p:spPr>
+        <p:style>
+          <a:lnRef idx="2">
+            <a:schemeClr val="accent1">
+              <a:shade val="15000"/>
+            </a:schemeClr>
+          </a:lnRef>
+          <a:fillRef idx="1">
+            <a:schemeClr val="accent1"/>
+          </a:fillRef>
+          <a:effectRef idx="0">
+            <a:schemeClr val="accent1"/>
+          </a:effectRef>
+          <a:fontRef idx="minor">
+            <a:schemeClr val="lt1"/>
+          </a:fontRef>
+        </p:style>
+        <p:txBody>
+          <a:bodyPr rtlCol="0" anchor="ctr"/>
+          <a:lstStyle/>
+          <a:p>
+            <a:pPr algn="ctr"/>
+            <a:r>
+              <a:rPr lang="en-US" altLang="ko-KR" dirty="0"/>
+              <a:t>FCN</a:t>
+            </a:r>
+            <a:endParaRPr lang="ko-KR" altLang="en-US" dirty="0"/>
+          </a:p>
+        </p:txBody>
+      </p:sp>
+      <p:sp>
+        <p:nvSpPr>
+          <p:cNvPr id="12" name="화살표: 줄무늬가 있는 오른쪽 11">
+            <a:extLst>
+              <a:ext uri="{FF2B5EF4-FFF2-40B4-BE49-F238E27FC236}">
+                <a16:creationId xmlns:a16="http://schemas.microsoft.com/office/drawing/2014/main" id="{1B48C2D7-1CFE-27E0-A5CA-99E4B2094216}"/>
+              </a:ext>
+            </a:extLst>
+          </p:cNvPr>
+          <p:cNvSpPr/>
+          <p:nvPr/>
+        </p:nvSpPr>
+        <p:spPr>
+          <a:xfrm>
+            <a:off x="6770686" y="5524500"/>
+            <a:ext cx="2230439" cy="971550"/>
+          </a:xfrm>
+          <a:prstGeom prst="stripedRightArrow">
+            <a:avLst/>
+          </a:prstGeom>
+        </p:spPr>
+        <p:style>
+          <a:lnRef idx="2">
+            <a:schemeClr val="accent1">
+              <a:shade val="15000"/>
+            </a:schemeClr>
+          </a:lnRef>
+          <a:fillRef idx="1">
+            <a:schemeClr val="accent1"/>
+          </a:fillRef>
+          <a:effectRef idx="0">
+            <a:schemeClr val="accent1"/>
+          </a:effectRef>
+          <a:fontRef idx="minor">
+            <a:schemeClr val="lt1"/>
+          </a:fontRef>
+        </p:style>
+        <p:txBody>
+          <a:bodyPr rtlCol="0" anchor="ctr"/>
+          <a:lstStyle/>
+          <a:p>
+            <a:pPr algn="ctr"/>
+            <a:r>
+              <a:rPr lang="en-US" altLang="ko-KR" dirty="0"/>
+              <a:t>YOLO</a:t>
+            </a:r>
+            <a:endParaRPr lang="ko-KR" altLang="en-US" dirty="0"/>
+          </a:p>
+        </p:txBody>
+      </p:sp>
+      <p:sp>
+        <p:nvSpPr>
+          <p:cNvPr id="14" name="TextBox 13">
+            <a:extLst>
+              <a:ext uri="{FF2B5EF4-FFF2-40B4-BE49-F238E27FC236}">
+                <a16:creationId xmlns:a16="http://schemas.microsoft.com/office/drawing/2014/main" id="{F14B63C3-40E3-4674-73DF-19766371227A}"/>
+              </a:ext>
+            </a:extLst>
+          </p:cNvPr>
+          <p:cNvSpPr txBox="1"/>
+          <p:nvPr/>
+        </p:nvSpPr>
+        <p:spPr>
+          <a:xfrm>
+            <a:off x="4181475" y="6311384"/>
+            <a:ext cx="2981325" cy="307777"/>
+          </a:xfrm>
+          <a:prstGeom prst="rect">
+            <a:avLst/>
+          </a:prstGeom>
+          <a:noFill/>
+        </p:spPr>
+        <p:txBody>
+          <a:bodyPr wrap="square">
+            <a:spAutoFit/>
+          </a:bodyPr>
+          <a:lstStyle/>
+          <a:p>
+            <a:r>
+              <a:rPr lang="en-US" altLang="ko-KR" sz="1400" dirty="0">
+                <a:latin typeface="D2Coding" panose="020B0609020101020101" pitchFamily="49" charset="-127"/>
+                <a:ea typeface="D2Coding" panose="020B0609020101020101" pitchFamily="49" charset="-127"/>
+              </a:rPr>
+              <a:t>Fully Convolutional Network</a:t>
+            </a:r>
+            <a:endParaRPr lang="ko-KR" altLang="en-US" sz="1400" dirty="0">
+              <a:latin typeface="D2Coding" panose="020B0609020101020101" pitchFamily="49" charset="-127"/>
+              <a:ea typeface="D2Coding" panose="020B0609020101020101" pitchFamily="49" charset="-127"/>
+            </a:endParaRPr>
+          </a:p>
+        </p:txBody>
+      </p:sp>
     </p:spTree>
     <p:extLst>
       <p:ext uri="{BB962C8B-B14F-4D97-AF65-F5344CB8AC3E}">
@@ -22413,7 +24674,7 @@
         <p:cNvPr id="1" name="">
           <a:extLst>
             <a:ext uri="{FF2B5EF4-FFF2-40B4-BE49-F238E27FC236}">
-              <a16:creationId xmlns:a16="http://schemas.microsoft.com/office/drawing/2014/main" id="{25EA1402-08FA-1414-7D39-D22F4CF6B8E3}"/>
+              <a16:creationId xmlns:a16="http://schemas.microsoft.com/office/drawing/2014/main" id="{5F1B69DC-2798-102A-758D-0633F85E6A6D}"/>
             </a:ext>
           </a:extLst>
         </p:cNvPr>
@@ -22433,7 +24694,7 @@
           <p:cNvPr id="4" name="슬라이드 번호 개체 틀 3">
             <a:extLst>
               <a:ext uri="{FF2B5EF4-FFF2-40B4-BE49-F238E27FC236}">
-                <a16:creationId xmlns:a16="http://schemas.microsoft.com/office/drawing/2014/main" id="{3DF5A98A-E857-2423-C923-540092E7AC61}"/>
+                <a16:creationId xmlns:a16="http://schemas.microsoft.com/office/drawing/2014/main" id="{8D909ACC-26E9-738A-BAF0-C80379F8B159}"/>
               </a:ext>
             </a:extLst>
           </p:cNvPr>
@@ -22468,7 +24729,7 @@
           <p:cNvPr id="3" name="제목 1">
             <a:extLst>
               <a:ext uri="{FF2B5EF4-FFF2-40B4-BE49-F238E27FC236}">
-                <a16:creationId xmlns:a16="http://schemas.microsoft.com/office/drawing/2014/main" id="{EE8183F6-0D1A-6079-23B6-B90F1B8280D7}"/>
+                <a16:creationId xmlns:a16="http://schemas.microsoft.com/office/drawing/2014/main" id="{DFAEFCED-6CBC-D29B-2168-981B87593790}"/>
               </a:ext>
             </a:extLst>
           </p:cNvPr>
@@ -22533,7 +24794,7 @@
           <p:cNvPr id="11" name="TextBox 10">
             <a:extLst>
               <a:ext uri="{FF2B5EF4-FFF2-40B4-BE49-F238E27FC236}">
-                <a16:creationId xmlns:a16="http://schemas.microsoft.com/office/drawing/2014/main" id="{2945D10D-4BEF-867B-D596-D0C787F6736E}"/>
+                <a16:creationId xmlns:a16="http://schemas.microsoft.com/office/drawing/2014/main" id="{8C99E99B-7916-877A-FEAB-B136620D58E8}"/>
               </a:ext>
             </a:extLst>
           </p:cNvPr>
@@ -22542,8 +24803,8 @@
         </p:nvSpPr>
         <p:spPr>
           <a:xfrm>
-            <a:off x="571802" y="1248422"/>
-            <a:ext cx="11144553" cy="880819"/>
+            <a:off x="571802" y="1315097"/>
+            <a:ext cx="11144553" cy="4855816"/>
           </a:xfrm>
           <a:prstGeom prst="rect">
             <a:avLst/>
@@ -22556,152 +24817,601 @@
           </a:bodyPr>
           <a:lstStyle/>
           <a:p>
-            <a:pPr>
+            <a:pPr marL="342900" indent="-342900">
               <a:lnSpc>
                 <a:spcPct val="150000"/>
               </a:lnSpc>
+              <a:buFont typeface="+mj-lt"/>
+              <a:buAutoNum type="arabicPeriod"/>
             </a:pPr>
             <a:r>
-              <a:rPr lang="en-US" altLang="ko-KR" dirty="0">
-                <a:latin typeface="D2Coding" panose="020B0609020101020101" pitchFamily="49" charset="-127"/>
-                <a:ea typeface="D2Coding" panose="020B0609020101020101" pitchFamily="49" charset="-127"/>
-              </a:rPr>
-              <a:t>YOLO</a:t>
-            </a:r>
-            <a:r>
-              <a:rPr lang="ko-KR" altLang="en-US" dirty="0">
-                <a:latin typeface="D2Coding" panose="020B0609020101020101" pitchFamily="49" charset="-127"/>
-                <a:ea typeface="D2Coding" panose="020B0609020101020101" pitchFamily="49" charset="-127"/>
-              </a:rPr>
-              <a:t>는 격자</a:t>
-            </a:r>
-            <a:r>
-              <a:rPr lang="en-US" altLang="ko-KR" dirty="0">
-                <a:latin typeface="D2Coding" panose="020B0609020101020101" pitchFamily="49" charset="-127"/>
-                <a:ea typeface="D2Coding" panose="020B0609020101020101" pitchFamily="49" charset="-127"/>
-              </a:rPr>
-              <a:t>(3, 3)</a:t>
-            </a:r>
-            <a:r>
-              <a:rPr lang="ko-KR" altLang="en-US" dirty="0">
-                <a:latin typeface="D2Coding" panose="020B0609020101020101" pitchFamily="49" charset="-127"/>
-                <a:ea typeface="D2Coding" panose="020B0609020101020101" pitchFamily="49" charset="-127"/>
-              </a:rPr>
-              <a:t>에 모든 연산의 결과는 </a:t>
-            </a:r>
-            <a:r>
-              <a:rPr lang="en-US" altLang="ko-KR" dirty="0">
-                <a:latin typeface="D2Coding" panose="020B0609020101020101" pitchFamily="49" charset="-127"/>
-                <a:ea typeface="D2Coding" panose="020B0609020101020101" pitchFamily="49" charset="-127"/>
-              </a:rPr>
-              <a:t>(3, 3, 12)</a:t>
-            </a:r>
-            <a:r>
-              <a:rPr lang="ko-KR" altLang="en-US" dirty="0">
-                <a:latin typeface="D2Coding" panose="020B0609020101020101" pitchFamily="49" charset="-127"/>
-                <a:ea typeface="D2Coding" panose="020B0609020101020101" pitchFamily="49" charset="-127"/>
-              </a:rPr>
-              <a:t>크기의 </a:t>
-            </a:r>
-            <a:r>
-              <a:rPr lang="en-US" altLang="ko-KR" dirty="0">
-                <a:latin typeface="D2Coding" panose="020B0609020101020101" pitchFamily="49" charset="-127"/>
-                <a:ea typeface="D2Coding" panose="020B0609020101020101" pitchFamily="49" charset="-127"/>
-              </a:rPr>
-              <a:t>3</a:t>
-            </a:r>
-            <a:r>
-              <a:rPr lang="ko-KR" altLang="en-US" dirty="0">
-                <a:latin typeface="D2Coding" panose="020B0609020101020101" pitchFamily="49" charset="-127"/>
-                <a:ea typeface="D2Coding" panose="020B0609020101020101" pitchFamily="49" charset="-127"/>
-              </a:rPr>
-              <a:t>차원 숫자 행렬</a:t>
-            </a:r>
-            <a:r>
-              <a:rPr lang="en-US" altLang="ko-KR" dirty="0">
-                <a:latin typeface="D2Coding" panose="020B0609020101020101" pitchFamily="49" charset="-127"/>
-                <a:ea typeface="D2Coding" panose="020B0609020101020101" pitchFamily="49" charset="-127"/>
-              </a:rPr>
-              <a:t>(tensor)</a:t>
-            </a:r>
-            <a:r>
-              <a:rPr lang="ko-KR" altLang="en-US" dirty="0">
-                <a:latin typeface="D2Coding" panose="020B0609020101020101" pitchFamily="49" charset="-127"/>
-                <a:ea typeface="D2Coding" panose="020B0609020101020101" pitchFamily="49" charset="-127"/>
-              </a:rPr>
-              <a:t>로 생성하게 되어 행과열이 </a:t>
-            </a:r>
-            <a:r>
-              <a:rPr lang="en-US" altLang="ko-KR" dirty="0">
-                <a:latin typeface="D2Coding" panose="020B0609020101020101" pitchFamily="49" charset="-127"/>
-                <a:ea typeface="D2Coding" panose="020B0609020101020101" pitchFamily="49" charset="-127"/>
-              </a:rPr>
-              <a:t>3</a:t>
-            </a:r>
-            <a:r>
-              <a:rPr lang="ko-KR" altLang="en-US" dirty="0">
-                <a:latin typeface="D2Coding" panose="020B0609020101020101" pitchFamily="49" charset="-127"/>
-                <a:ea typeface="D2Coding" panose="020B0609020101020101" pitchFamily="49" charset="-127"/>
-              </a:rPr>
-              <a:t>과 </a:t>
-            </a:r>
-            <a:r>
-              <a:rPr lang="en-US" altLang="ko-KR" dirty="0">
-                <a:latin typeface="D2Coding" panose="020B0609020101020101" pitchFamily="49" charset="-127"/>
-                <a:ea typeface="D2Coding" panose="020B0609020101020101" pitchFamily="49" charset="-127"/>
-              </a:rPr>
-              <a:t>3</a:t>
-            </a:r>
-            <a:r>
-              <a:rPr lang="ko-KR" altLang="en-US" dirty="0">
-                <a:latin typeface="D2Coding" panose="020B0609020101020101" pitchFamily="49" charset="-127"/>
-                <a:ea typeface="D2Coding" panose="020B0609020101020101" pitchFamily="49" charset="-127"/>
-              </a:rPr>
-              <a:t>인 격자 </a:t>
-            </a:r>
-            <a:r>
-              <a:rPr lang="en-US" altLang="ko-KR" dirty="0">
-                <a:latin typeface="D2Coding" panose="020B0609020101020101" pitchFamily="49" charset="-127"/>
-                <a:ea typeface="D2Coding" panose="020B0609020101020101" pitchFamily="49" charset="-127"/>
-              </a:rPr>
-              <a:t>tensor[3,3 :]</a:t>
-            </a:r>
-            <a:r>
-              <a:rPr lang="ko-KR" altLang="en-US" dirty="0">
-                <a:latin typeface="D2Coding" panose="020B0609020101020101" pitchFamily="49" charset="-127"/>
-                <a:ea typeface="D2Coding" panose="020B0609020101020101" pitchFamily="49" charset="-127"/>
-              </a:rPr>
-              <a:t>를</a:t>
-            </a:r>
-            <a:r>
-              <a:rPr lang="en-US" altLang="ko-KR" dirty="0">
-                <a:latin typeface="D2Coding" panose="020B0609020101020101" pitchFamily="49" charset="-127"/>
-                <a:ea typeface="D2Coding" panose="020B0609020101020101" pitchFamily="49" charset="-127"/>
-              </a:rPr>
-              <a:t> </a:t>
-            </a:r>
-            <a:r>
-              <a:rPr lang="ko-KR" altLang="en-US" dirty="0">
-                <a:latin typeface="D2Coding" panose="020B0609020101020101" pitchFamily="49" charset="-127"/>
-                <a:ea typeface="D2Coding" panose="020B0609020101020101" pitchFamily="49" charset="-127"/>
-              </a:rPr>
-              <a:t>제외한 모든 격자에는 모두 </a:t>
-            </a:r>
-            <a:r>
-              <a:rPr lang="en-US" altLang="ko-KR" dirty="0">
-                <a:latin typeface="D2Coding" panose="020B0609020101020101" pitchFamily="49" charset="-127"/>
-                <a:ea typeface="D2Coding" panose="020B0609020101020101" pitchFamily="49" charset="-127"/>
-              </a:rPr>
-              <a:t>0</a:t>
-            </a:r>
-            <a:r>
-              <a:rPr lang="ko-KR" altLang="en-US" dirty="0">
-                <a:latin typeface="D2Coding" panose="020B0609020101020101" pitchFamily="49" charset="-127"/>
-                <a:ea typeface="D2Coding" panose="020B0609020101020101" pitchFamily="49" charset="-127"/>
-              </a:rPr>
-              <a:t>이 입력</a:t>
-            </a:r>
-            <a:endParaRPr lang="en-US" altLang="ko-KR" dirty="0">
+              <a:rPr lang="ko-KR" altLang="en-US" sz="1600" b="1" dirty="0">
+                <a:latin typeface="D2Coding" panose="020B0609020101020101" pitchFamily="49" charset="-127"/>
+                <a:ea typeface="D2Coding" panose="020B0609020101020101" pitchFamily="49" charset="-127"/>
+              </a:rPr>
+              <a:t>연산의 효율화</a:t>
+            </a:r>
+            <a:r>
+              <a:rPr lang="en-US" altLang="ko-KR" sz="1600" b="1" dirty="0">
+                <a:latin typeface="D2Coding" panose="020B0609020101020101" pitchFamily="49" charset="-127"/>
+                <a:ea typeface="D2Coding" panose="020B0609020101020101" pitchFamily="49" charset="-127"/>
+              </a:rPr>
+              <a:t>: '</a:t>
+            </a:r>
+            <a:r>
+              <a:rPr lang="ko-KR" altLang="en-US" sz="1600" b="1" dirty="0">
+                <a:latin typeface="D2Coding" panose="020B0609020101020101" pitchFamily="49" charset="-127"/>
+                <a:ea typeface="D2Coding" panose="020B0609020101020101" pitchFamily="49" charset="-127"/>
+              </a:rPr>
+              <a:t>이미지</a:t>
+            </a:r>
+            <a:r>
+              <a:rPr lang="en-US" altLang="ko-KR" sz="1600" b="1" dirty="0">
+                <a:latin typeface="D2Coding" panose="020B0609020101020101" pitchFamily="49" charset="-127"/>
+                <a:ea typeface="D2Coding" panose="020B0609020101020101" pitchFamily="49" charset="-127"/>
+              </a:rPr>
+              <a:t>'</a:t>
+            </a:r>
+            <a:r>
+              <a:rPr lang="ko-KR" altLang="en-US" sz="1600" b="1" dirty="0">
+                <a:latin typeface="D2Coding" panose="020B0609020101020101" pitchFamily="49" charset="-127"/>
+                <a:ea typeface="D2Coding" panose="020B0609020101020101" pitchFamily="49" charset="-127"/>
+              </a:rPr>
+              <a:t>가 아닌 </a:t>
+            </a:r>
+            <a:r>
+              <a:rPr lang="en-US" altLang="ko-KR" sz="1600" b="1" dirty="0">
+                <a:latin typeface="D2Coding" panose="020B0609020101020101" pitchFamily="49" charset="-127"/>
+                <a:ea typeface="D2Coding" panose="020B0609020101020101" pitchFamily="49" charset="-127"/>
+              </a:rPr>
+              <a:t>'</a:t>
+            </a:r>
+            <a:r>
+              <a:rPr lang="ko-KR" altLang="en-US" sz="1600" b="1" dirty="0">
+                <a:latin typeface="D2Coding" panose="020B0609020101020101" pitchFamily="49" charset="-127"/>
+                <a:ea typeface="D2Coding" panose="020B0609020101020101" pitchFamily="49" charset="-127"/>
+              </a:rPr>
+              <a:t>특징 맵</a:t>
+            </a:r>
+            <a:r>
+              <a:rPr lang="en-US" altLang="ko-KR" sz="1600" b="1" dirty="0">
+                <a:latin typeface="D2Coding" panose="020B0609020101020101" pitchFamily="49" charset="-127"/>
+                <a:ea typeface="D2Coding" panose="020B0609020101020101" pitchFamily="49" charset="-127"/>
+              </a:rPr>
+              <a:t>' </a:t>
+            </a:r>
+            <a:r>
+              <a:rPr lang="ko-KR" altLang="en-US" sz="1600" b="1" dirty="0">
+                <a:latin typeface="D2Coding" panose="020B0609020101020101" pitchFamily="49" charset="-127"/>
+                <a:ea typeface="D2Coding" panose="020B0609020101020101" pitchFamily="49" charset="-127"/>
+              </a:rPr>
+              <a:t>위의 슬라이딩 윈도우</a:t>
+            </a:r>
+          </a:p>
+          <a:p>
+            <a:pPr marL="800100" lvl="1" indent="-342900">
+              <a:lnSpc>
+                <a:spcPct val="150000"/>
+              </a:lnSpc>
+              <a:buFont typeface="+mj-lt"/>
+              <a:buAutoNum type="arabicPeriod"/>
+            </a:pPr>
+            <a:r>
+              <a:rPr lang="ko-KR" altLang="en-US" sz="1600" dirty="0">
+                <a:latin typeface="D2Coding" panose="020B0609020101020101" pitchFamily="49" charset="-127"/>
+                <a:ea typeface="D2Coding" panose="020B0609020101020101" pitchFamily="49" charset="-127"/>
+              </a:rPr>
+              <a:t>과거 원본 이미지를 수없이 잘라내어 매번 </a:t>
+            </a:r>
+            <a:r>
+              <a:rPr lang="en-US" altLang="ko-KR" sz="1600" dirty="0">
+                <a:latin typeface="D2Coding" panose="020B0609020101020101" pitchFamily="49" charset="-127"/>
+                <a:ea typeface="D2Coding" panose="020B0609020101020101" pitchFamily="49" charset="-127"/>
+              </a:rPr>
+              <a:t>CNN</a:t>
+            </a:r>
+            <a:r>
+              <a:rPr lang="ko-KR" altLang="en-US" sz="1600" dirty="0">
+                <a:latin typeface="D2Coding" panose="020B0609020101020101" pitchFamily="49" charset="-127"/>
+                <a:ea typeface="D2Coding" panose="020B0609020101020101" pitchFamily="49" charset="-127"/>
+              </a:rPr>
+              <a:t>을 돌리던 무식한 방식을 탈피</a:t>
+            </a:r>
+            <a:endParaRPr lang="en-US" altLang="ko-KR" sz="1600" dirty="0">
+              <a:latin typeface="D2Coding" panose="020B0609020101020101" pitchFamily="49" charset="-127"/>
+              <a:ea typeface="D2Coding" panose="020B0609020101020101" pitchFamily="49" charset="-127"/>
+            </a:endParaRPr>
+          </a:p>
+          <a:p>
+            <a:pPr marL="800100" lvl="1" indent="-342900">
+              <a:lnSpc>
+                <a:spcPct val="150000"/>
+              </a:lnSpc>
+              <a:buFont typeface="+mj-lt"/>
+              <a:buAutoNum type="arabicPeriod"/>
+            </a:pPr>
+            <a:r>
+              <a:rPr lang="ko-KR" altLang="en-US" sz="1600" dirty="0">
+                <a:latin typeface="D2Coding" panose="020B0609020101020101" pitchFamily="49" charset="-127"/>
+                <a:ea typeface="D2Coding" panose="020B0609020101020101" pitchFamily="49" charset="-127"/>
+              </a:rPr>
+              <a:t>이미지 전체를 </a:t>
+            </a:r>
+            <a:r>
+              <a:rPr lang="en-US" altLang="ko-KR" sz="1600" dirty="0">
+                <a:latin typeface="D2Coding" panose="020B0609020101020101" pitchFamily="49" charset="-127"/>
+                <a:ea typeface="D2Coding" panose="020B0609020101020101" pitchFamily="49" charset="-127"/>
+              </a:rPr>
+              <a:t>CNN</a:t>
+            </a:r>
+            <a:r>
+              <a:rPr lang="ko-KR" altLang="en-US" sz="1600" dirty="0">
+                <a:latin typeface="D2Coding" panose="020B0609020101020101" pitchFamily="49" charset="-127"/>
+                <a:ea typeface="D2Coding" panose="020B0609020101020101" pitchFamily="49" charset="-127"/>
+              </a:rPr>
+              <a:t>에 한 번만 통과시켜 압축된 특징 맵</a:t>
+            </a:r>
+            <a:r>
+              <a:rPr lang="en-US" altLang="ko-KR" sz="1600" dirty="0">
+                <a:latin typeface="D2Coding" panose="020B0609020101020101" pitchFamily="49" charset="-127"/>
+                <a:ea typeface="D2Coding" panose="020B0609020101020101" pitchFamily="49" charset="-127"/>
+              </a:rPr>
+              <a:t>(Feature Map)</a:t>
+            </a:r>
+            <a:r>
+              <a:rPr lang="ko-KR" altLang="en-US" sz="1600" dirty="0">
+                <a:latin typeface="D2Coding" panose="020B0609020101020101" pitchFamily="49" charset="-127"/>
+                <a:ea typeface="D2Coding" panose="020B0609020101020101" pitchFamily="49" charset="-127"/>
+              </a:rPr>
+              <a:t>을 추출한 뒤</a:t>
+            </a:r>
+            <a:r>
+              <a:rPr lang="en-US" altLang="ko-KR" sz="1600" dirty="0">
+                <a:latin typeface="D2Coding" panose="020B0609020101020101" pitchFamily="49" charset="-127"/>
+                <a:ea typeface="D2Coding" panose="020B0609020101020101" pitchFamily="49" charset="-127"/>
+              </a:rPr>
+              <a:t>, </a:t>
+            </a:r>
+            <a:r>
+              <a:rPr lang="ko-KR" altLang="en-US" sz="1600" dirty="0">
+                <a:latin typeface="D2Coding" panose="020B0609020101020101" pitchFamily="49" charset="-127"/>
+                <a:ea typeface="D2Coding" panose="020B0609020101020101" pitchFamily="49" charset="-127"/>
+              </a:rPr>
+              <a:t>그 위에서 </a:t>
+            </a:r>
+            <a:r>
+              <a:rPr lang="ko-KR" altLang="en-US" sz="1600" dirty="0" err="1">
+                <a:latin typeface="D2Coding" panose="020B0609020101020101" pitchFamily="49" charset="-127"/>
+                <a:ea typeface="D2Coding" panose="020B0609020101020101" pitchFamily="49" charset="-127"/>
+              </a:rPr>
+              <a:t>합성곱</a:t>
+            </a:r>
+            <a:r>
+              <a:rPr lang="ko-KR" altLang="en-US" sz="1600" dirty="0">
+                <a:latin typeface="D2Coding" panose="020B0609020101020101" pitchFamily="49" charset="-127"/>
+                <a:ea typeface="D2Coding" panose="020B0609020101020101" pitchFamily="49" charset="-127"/>
+              </a:rPr>
+              <a:t> 필터</a:t>
+            </a:r>
+            <a:r>
+              <a:rPr lang="en-US" altLang="ko-KR" sz="1600" dirty="0">
+                <a:latin typeface="D2Coding" panose="020B0609020101020101" pitchFamily="49" charset="-127"/>
+                <a:ea typeface="D2Coding" panose="020B0609020101020101" pitchFamily="49" charset="-127"/>
+              </a:rPr>
+              <a:t>(1x1 </a:t>
+            </a:r>
+            <a:r>
+              <a:rPr lang="ko-KR" altLang="en-US" sz="1600" dirty="0">
+                <a:latin typeface="D2Coding" panose="020B0609020101020101" pitchFamily="49" charset="-127"/>
+                <a:ea typeface="D2Coding" panose="020B0609020101020101" pitchFamily="49" charset="-127"/>
+              </a:rPr>
+              <a:t>또는 </a:t>
+            </a:r>
+            <a:r>
+              <a:rPr lang="en-US" altLang="ko-KR" sz="1600" dirty="0">
+                <a:latin typeface="D2Coding" panose="020B0609020101020101" pitchFamily="49" charset="-127"/>
+                <a:ea typeface="D2Coding" panose="020B0609020101020101" pitchFamily="49" charset="-127"/>
+              </a:rPr>
+              <a:t>3x3 Conv)</a:t>
+            </a:r>
+            <a:r>
+              <a:rPr lang="ko-KR" altLang="en-US" sz="1600" dirty="0">
+                <a:latin typeface="D2Coding" panose="020B0609020101020101" pitchFamily="49" charset="-127"/>
+                <a:ea typeface="D2Coding" panose="020B0609020101020101" pitchFamily="49" charset="-127"/>
+              </a:rPr>
+              <a:t>를 이동시키는 방식으로 슬라이딩 윈도우를 효율적으로 구현</a:t>
+            </a:r>
+            <a:endParaRPr lang="en-US" altLang="ko-KR" sz="1600" dirty="0">
+              <a:latin typeface="D2Coding" panose="020B0609020101020101" pitchFamily="49" charset="-127"/>
+              <a:ea typeface="D2Coding" panose="020B0609020101020101" pitchFamily="49" charset="-127"/>
+            </a:endParaRPr>
+          </a:p>
+          <a:p>
+            <a:pPr marL="800100" lvl="1" indent="-342900">
+              <a:lnSpc>
+                <a:spcPct val="150000"/>
+              </a:lnSpc>
+              <a:buFont typeface="+mj-lt"/>
+              <a:buAutoNum type="arabicPeriod"/>
+            </a:pPr>
+            <a:endParaRPr lang="en-US" altLang="ko-KR" sz="1600" dirty="0">
+              <a:latin typeface="D2Coding" panose="020B0609020101020101" pitchFamily="49" charset="-127"/>
+              <a:ea typeface="D2Coding" panose="020B0609020101020101" pitchFamily="49" charset="-127"/>
+            </a:endParaRPr>
+          </a:p>
+          <a:p>
+            <a:pPr marL="342900" indent="-342900">
+              <a:lnSpc>
+                <a:spcPct val="150000"/>
+              </a:lnSpc>
+              <a:buFont typeface="+mj-lt"/>
+              <a:buAutoNum type="arabicPeriod"/>
+            </a:pPr>
+            <a:r>
+              <a:rPr lang="ko-KR" altLang="en-US" sz="1600" b="1" dirty="0">
+                <a:latin typeface="D2Coding" panose="020B0609020101020101" pitchFamily="49" charset="-127"/>
+                <a:ea typeface="D2Coding" panose="020B0609020101020101" pitchFamily="49" charset="-127"/>
+              </a:rPr>
+              <a:t>가상의 틀 도입</a:t>
+            </a:r>
+            <a:r>
+              <a:rPr lang="en-US" altLang="ko-KR" sz="1600" b="1" dirty="0">
+                <a:latin typeface="D2Coding" panose="020B0609020101020101" pitchFamily="49" charset="-127"/>
+                <a:ea typeface="D2Coding" panose="020B0609020101020101" pitchFamily="49" charset="-127"/>
+              </a:rPr>
+              <a:t>: </a:t>
+            </a:r>
+            <a:r>
+              <a:rPr lang="ko-KR" altLang="en-US" sz="1600" b="1" dirty="0">
+                <a:latin typeface="D2Coding" panose="020B0609020101020101" pitchFamily="49" charset="-127"/>
+                <a:ea typeface="D2Coding" panose="020B0609020101020101" pitchFamily="49" charset="-127"/>
+              </a:rPr>
+              <a:t>격자점별 멀티 앵커 박스</a:t>
+            </a:r>
+            <a:r>
+              <a:rPr lang="en-US" altLang="ko-KR" sz="1600" b="1" dirty="0">
+                <a:latin typeface="D2Coding" panose="020B0609020101020101" pitchFamily="49" charset="-127"/>
+                <a:ea typeface="D2Coding" panose="020B0609020101020101" pitchFamily="49" charset="-127"/>
+              </a:rPr>
+              <a:t>(Anchor Box)</a:t>
+            </a:r>
+          </a:p>
+          <a:p>
+            <a:pPr marL="800100" lvl="1" indent="-342900">
+              <a:lnSpc>
+                <a:spcPct val="150000"/>
+              </a:lnSpc>
+              <a:buFont typeface="+mj-lt"/>
+              <a:buAutoNum type="arabicPeriod"/>
+            </a:pPr>
+            <a:r>
+              <a:rPr lang="ko-KR" altLang="en-US" sz="1600" dirty="0">
+                <a:latin typeface="D2Coding" panose="020B0609020101020101" pitchFamily="49" charset="-127"/>
+                <a:ea typeface="D2Coding" panose="020B0609020101020101" pitchFamily="49" charset="-127"/>
+              </a:rPr>
+              <a:t>특징 </a:t>
+            </a:r>
+            <a:r>
+              <a:rPr lang="ko-KR" altLang="en-US" sz="1600" dirty="0" err="1">
+                <a:latin typeface="D2Coding" panose="020B0609020101020101" pitchFamily="49" charset="-127"/>
+                <a:ea typeface="D2Coding" panose="020B0609020101020101" pitchFamily="49" charset="-127"/>
+              </a:rPr>
+              <a:t>맵의</a:t>
+            </a:r>
+            <a:r>
+              <a:rPr lang="ko-KR" altLang="en-US" sz="1600" dirty="0">
+                <a:latin typeface="D2Coding" panose="020B0609020101020101" pitchFamily="49" charset="-127"/>
+                <a:ea typeface="D2Coding" panose="020B0609020101020101" pitchFamily="49" charset="-127"/>
+              </a:rPr>
+              <a:t> 각 격자마다 다양한 크기와 비율을 가진 </a:t>
+            </a:r>
+            <a:r>
+              <a:rPr lang="ko-KR" altLang="en-US" sz="1600" b="1" dirty="0">
+                <a:latin typeface="D2Coding" panose="020B0609020101020101" pitchFamily="49" charset="-127"/>
+                <a:ea typeface="D2Coding" panose="020B0609020101020101" pitchFamily="49" charset="-127"/>
+              </a:rPr>
+              <a:t>가상의 창인 </a:t>
+            </a:r>
+            <a:r>
+              <a:rPr lang="en-US" altLang="ko-KR" sz="1600" b="1" dirty="0">
+                <a:latin typeface="D2Coding" panose="020B0609020101020101" pitchFamily="49" charset="-127"/>
+                <a:ea typeface="D2Coding" panose="020B0609020101020101" pitchFamily="49" charset="-127"/>
+              </a:rPr>
+              <a:t>'</a:t>
+            </a:r>
+            <a:r>
+              <a:rPr lang="ko-KR" altLang="en-US" sz="1600" b="1" dirty="0">
+                <a:latin typeface="D2Coding" panose="020B0609020101020101" pitchFamily="49" charset="-127"/>
+                <a:ea typeface="D2Coding" panose="020B0609020101020101" pitchFamily="49" charset="-127"/>
+              </a:rPr>
+              <a:t>앵커 박스</a:t>
+            </a:r>
+            <a:r>
+              <a:rPr lang="en-US" altLang="ko-KR" sz="1600" b="1" dirty="0">
+                <a:latin typeface="D2Coding" panose="020B0609020101020101" pitchFamily="49" charset="-127"/>
+                <a:ea typeface="D2Coding" panose="020B0609020101020101" pitchFamily="49" charset="-127"/>
+              </a:rPr>
+              <a:t>'</a:t>
+            </a:r>
+            <a:r>
+              <a:rPr lang="ko-KR" altLang="en-US" sz="1600" b="1" dirty="0">
+                <a:latin typeface="D2Coding" panose="020B0609020101020101" pitchFamily="49" charset="-127"/>
+                <a:ea typeface="D2Coding" panose="020B0609020101020101" pitchFamily="49" charset="-127"/>
+              </a:rPr>
+              <a:t>들을 미리 정의하여 </a:t>
+            </a:r>
+            <a:r>
+              <a:rPr lang="ko-KR" altLang="en-US" sz="1600" dirty="0">
+                <a:latin typeface="D2Coding" panose="020B0609020101020101" pitchFamily="49" charset="-127"/>
+                <a:ea typeface="D2Coding" panose="020B0609020101020101" pitchFamily="49" charset="-127"/>
+              </a:rPr>
+              <a:t>이를 통해 단일 격자점에서도 서로 다른 형태의 다양한 물체 후보군을 동시에 훑고 탐색</a:t>
+            </a:r>
+            <a:endParaRPr lang="en-US" altLang="ko-KR" sz="1600" dirty="0">
+              <a:latin typeface="D2Coding" panose="020B0609020101020101" pitchFamily="49" charset="-127"/>
+              <a:ea typeface="D2Coding" panose="020B0609020101020101" pitchFamily="49" charset="-127"/>
+            </a:endParaRPr>
+          </a:p>
+          <a:p>
+            <a:pPr marL="800100" lvl="1" indent="-342900">
+              <a:lnSpc>
+                <a:spcPct val="150000"/>
+              </a:lnSpc>
+              <a:buFont typeface="+mj-lt"/>
+              <a:buAutoNum type="arabicPeriod"/>
+            </a:pPr>
+            <a:endParaRPr lang="en-US" altLang="ko-KR" sz="1600" dirty="0">
+              <a:latin typeface="D2Coding" panose="020B0609020101020101" pitchFamily="49" charset="-127"/>
+              <a:ea typeface="D2Coding" panose="020B0609020101020101" pitchFamily="49" charset="-127"/>
+            </a:endParaRPr>
+          </a:p>
+          <a:p>
+            <a:pPr marL="342900" indent="-342900">
+              <a:lnSpc>
+                <a:spcPct val="150000"/>
+              </a:lnSpc>
+              <a:buFont typeface="+mj-lt"/>
+              <a:buAutoNum type="arabicPeriod"/>
+            </a:pPr>
+            <a:r>
+              <a:rPr lang="ko-KR" altLang="en-US" sz="1600" b="1" dirty="0" err="1">
+                <a:latin typeface="D2Coding" panose="020B0609020101020101" pitchFamily="49" charset="-127"/>
+                <a:ea typeface="D2Coding" panose="020B0609020101020101" pitchFamily="49" charset="-127"/>
+              </a:rPr>
+              <a:t>멀티태스크</a:t>
+            </a:r>
+            <a:r>
+              <a:rPr lang="ko-KR" altLang="en-US" sz="1600" b="1" dirty="0">
+                <a:latin typeface="D2Coding" panose="020B0609020101020101" pitchFamily="49" charset="-127"/>
+                <a:ea typeface="D2Coding" panose="020B0609020101020101" pitchFamily="49" charset="-127"/>
+              </a:rPr>
+              <a:t> 학습</a:t>
+            </a:r>
+            <a:r>
+              <a:rPr lang="en-US" altLang="ko-KR" sz="1600" b="1" dirty="0">
+                <a:latin typeface="D2Coding" panose="020B0609020101020101" pitchFamily="49" charset="-127"/>
+                <a:ea typeface="D2Coding" panose="020B0609020101020101" pitchFamily="49" charset="-127"/>
+              </a:rPr>
+              <a:t>: </a:t>
+            </a:r>
+            <a:r>
+              <a:rPr lang="ko-KR" altLang="en-US" sz="1600" b="1" dirty="0">
+                <a:latin typeface="D2Coding" panose="020B0609020101020101" pitchFamily="49" charset="-127"/>
+                <a:ea typeface="D2Coding" panose="020B0609020101020101" pitchFamily="49" charset="-127"/>
+              </a:rPr>
+              <a:t>분류</a:t>
+            </a:r>
+            <a:r>
+              <a:rPr lang="en-US" altLang="ko-KR" sz="1600" b="1" dirty="0">
+                <a:latin typeface="D2Coding" panose="020B0609020101020101" pitchFamily="49" charset="-127"/>
+                <a:ea typeface="D2Coding" panose="020B0609020101020101" pitchFamily="49" charset="-127"/>
+              </a:rPr>
+              <a:t>(Classification)</a:t>
+            </a:r>
+            <a:r>
+              <a:rPr lang="ko-KR" altLang="en-US" sz="1600" b="1" dirty="0">
+                <a:latin typeface="D2Coding" panose="020B0609020101020101" pitchFamily="49" charset="-127"/>
+                <a:ea typeface="D2Coding" panose="020B0609020101020101" pitchFamily="49" charset="-127"/>
+              </a:rPr>
+              <a:t>와 회귀</a:t>
+            </a:r>
+            <a:r>
+              <a:rPr lang="en-US" altLang="ko-KR" sz="1600" b="1" dirty="0">
+                <a:latin typeface="D2Coding" panose="020B0609020101020101" pitchFamily="49" charset="-127"/>
+                <a:ea typeface="D2Coding" panose="020B0609020101020101" pitchFamily="49" charset="-127"/>
+              </a:rPr>
+              <a:t>(Regression)</a:t>
+            </a:r>
+            <a:r>
+              <a:rPr lang="ko-KR" altLang="en-US" sz="1600" b="1" dirty="0">
+                <a:latin typeface="D2Coding" panose="020B0609020101020101" pitchFamily="49" charset="-127"/>
+                <a:ea typeface="D2Coding" panose="020B0609020101020101" pitchFamily="49" charset="-127"/>
+              </a:rPr>
+              <a:t>의 결합</a:t>
+            </a:r>
+          </a:p>
+          <a:p>
+            <a:pPr marL="800100" lvl="1" indent="-342900">
+              <a:lnSpc>
+                <a:spcPct val="150000"/>
+              </a:lnSpc>
+              <a:buFont typeface="+mj-lt"/>
+              <a:buAutoNum type="arabicPeriod"/>
+            </a:pPr>
+            <a:r>
+              <a:rPr lang="ko-KR" altLang="en-US" sz="1600" dirty="0">
+                <a:latin typeface="D2Coding" panose="020B0609020101020101" pitchFamily="49" charset="-127"/>
+                <a:ea typeface="D2Coding" panose="020B0609020101020101" pitchFamily="49" charset="-127"/>
+              </a:rPr>
+              <a:t>앵커 박스가 지나갈 때</a:t>
+            </a:r>
+            <a:r>
+              <a:rPr lang="en-US" altLang="ko-KR" sz="1600" dirty="0">
+                <a:latin typeface="D2Coding" panose="020B0609020101020101" pitchFamily="49" charset="-127"/>
+                <a:ea typeface="D2Coding" panose="020B0609020101020101" pitchFamily="49" charset="-127"/>
+              </a:rPr>
+              <a:t>, </a:t>
+            </a:r>
+            <a:r>
+              <a:rPr lang="ko-KR" altLang="en-US" sz="1600" dirty="0" err="1">
+                <a:latin typeface="D2Coding" panose="020B0609020101020101" pitchFamily="49" charset="-127"/>
+                <a:ea typeface="D2Coding" panose="020B0609020101020101" pitchFamily="49" charset="-127"/>
+              </a:rPr>
+              <a:t>합성곱</a:t>
+            </a:r>
+            <a:r>
+              <a:rPr lang="ko-KR" altLang="en-US" sz="1600" dirty="0">
+                <a:latin typeface="D2Coding" panose="020B0609020101020101" pitchFamily="49" charset="-127"/>
+                <a:ea typeface="D2Coding" panose="020B0609020101020101" pitchFamily="49" charset="-127"/>
+              </a:rPr>
+              <a:t> 연산을 통해 두 가지 정밀 작업을 동시에 수행</a:t>
+            </a:r>
+            <a:endParaRPr lang="en-US" altLang="ko-KR" sz="1600" dirty="0">
+              <a:latin typeface="D2Coding" panose="020B0609020101020101" pitchFamily="49" charset="-127"/>
+              <a:ea typeface="D2Coding" panose="020B0609020101020101" pitchFamily="49" charset="-127"/>
+            </a:endParaRPr>
+          </a:p>
+          <a:p>
+            <a:pPr marL="800100" lvl="1" indent="-342900">
+              <a:lnSpc>
+                <a:spcPct val="150000"/>
+              </a:lnSpc>
+              <a:buFont typeface="+mj-lt"/>
+              <a:buAutoNum type="arabicPeriod"/>
+            </a:pPr>
+            <a:r>
+              <a:rPr lang="ko-KR" altLang="en-US" sz="1600" b="1" dirty="0">
+                <a:latin typeface="D2Coding" panose="020B0609020101020101" pitchFamily="49" charset="-127"/>
+                <a:ea typeface="D2Coding" panose="020B0609020101020101" pitchFamily="49" charset="-127"/>
+              </a:rPr>
+              <a:t>분류</a:t>
+            </a:r>
+            <a:r>
+              <a:rPr lang="en-US" altLang="ko-KR" sz="1600" b="1" dirty="0">
+                <a:latin typeface="D2Coding" panose="020B0609020101020101" pitchFamily="49" charset="-127"/>
+                <a:ea typeface="D2Coding" panose="020B0609020101020101" pitchFamily="49" charset="-127"/>
+              </a:rPr>
+              <a:t>:</a:t>
+            </a:r>
+            <a:r>
+              <a:rPr lang="ko-KR" altLang="en-US" sz="1600" dirty="0">
+                <a:latin typeface="D2Coding" panose="020B0609020101020101" pitchFamily="49" charset="-127"/>
+                <a:ea typeface="D2Coding" panose="020B0609020101020101" pitchFamily="49" charset="-127"/>
+              </a:rPr>
+              <a:t> 해당 앵커 박스 내에 </a:t>
+            </a:r>
+            <a:r>
+              <a:rPr lang="en-US" altLang="ko-KR" sz="1600" dirty="0">
+                <a:latin typeface="D2Coding" panose="020B0609020101020101" pitchFamily="49" charset="-127"/>
+                <a:ea typeface="D2Coding" panose="020B0609020101020101" pitchFamily="49" charset="-127"/>
+              </a:rPr>
+              <a:t>"</a:t>
+            </a:r>
+            <a:r>
+              <a:rPr lang="ko-KR" altLang="en-US" sz="1600" dirty="0">
+                <a:latin typeface="D2Coding" panose="020B0609020101020101" pitchFamily="49" charset="-127"/>
+                <a:ea typeface="D2Coding" panose="020B0609020101020101" pitchFamily="49" charset="-127"/>
+              </a:rPr>
+              <a:t>물체가 존재하는지</a:t>
+            </a:r>
+            <a:r>
+              <a:rPr lang="en-US" altLang="ko-KR" sz="1600" dirty="0">
+                <a:latin typeface="D2Coding" panose="020B0609020101020101" pitchFamily="49" charset="-127"/>
+                <a:ea typeface="D2Coding" panose="020B0609020101020101" pitchFamily="49" charset="-127"/>
+              </a:rPr>
+              <a:t>(</a:t>
+            </a:r>
+            <a:r>
+              <a:rPr lang="ko-KR" altLang="en-US" sz="1600" dirty="0">
+                <a:latin typeface="D2Coding" panose="020B0609020101020101" pitchFamily="49" charset="-127"/>
+                <a:ea typeface="D2Coding" panose="020B0609020101020101" pitchFamily="49" charset="-127"/>
+              </a:rPr>
+              <a:t>또는 어떤 클래스인지</a:t>
+            </a:r>
+            <a:r>
+              <a:rPr lang="en-US" altLang="ko-KR" sz="1600" dirty="0">
+                <a:latin typeface="D2Coding" panose="020B0609020101020101" pitchFamily="49" charset="-127"/>
+                <a:ea typeface="D2Coding" panose="020B0609020101020101" pitchFamily="49" charset="-127"/>
+              </a:rPr>
+              <a:t>)" </a:t>
+            </a:r>
+            <a:r>
+              <a:rPr lang="ko-KR" altLang="en-US" sz="1600" dirty="0">
+                <a:latin typeface="D2Coding" panose="020B0609020101020101" pitchFamily="49" charset="-127"/>
+                <a:ea typeface="D2Coding" panose="020B0609020101020101" pitchFamily="49" charset="-127"/>
+              </a:rPr>
+              <a:t>확률을 예측</a:t>
+            </a:r>
+            <a:endParaRPr lang="en-US" altLang="ko-KR" sz="1600" dirty="0">
+              <a:latin typeface="D2Coding" panose="020B0609020101020101" pitchFamily="49" charset="-127"/>
+              <a:ea typeface="D2Coding" panose="020B0609020101020101" pitchFamily="49" charset="-127"/>
+            </a:endParaRPr>
+          </a:p>
+          <a:p>
+            <a:pPr marL="800100" lvl="1" indent="-342900">
+              <a:lnSpc>
+                <a:spcPct val="150000"/>
+              </a:lnSpc>
+              <a:buFont typeface="+mj-lt"/>
+              <a:buAutoNum type="arabicPeriod"/>
+            </a:pPr>
+            <a:r>
+              <a:rPr lang="ko-KR" altLang="en-US" sz="1600" b="1" dirty="0">
+                <a:latin typeface="D2Coding" panose="020B0609020101020101" pitchFamily="49" charset="-127"/>
+                <a:ea typeface="D2Coding" panose="020B0609020101020101" pitchFamily="49" charset="-127"/>
+              </a:rPr>
+              <a:t>회귀</a:t>
+            </a:r>
+            <a:r>
+              <a:rPr lang="en-US" altLang="ko-KR" sz="1600" b="1" dirty="0">
+                <a:latin typeface="D2Coding" panose="020B0609020101020101" pitchFamily="49" charset="-127"/>
+                <a:ea typeface="D2Coding" panose="020B0609020101020101" pitchFamily="49" charset="-127"/>
+              </a:rPr>
+              <a:t>:</a:t>
+            </a:r>
+            <a:r>
+              <a:rPr lang="ko-KR" altLang="en-US" sz="1600" dirty="0">
+                <a:latin typeface="D2Coding" panose="020B0609020101020101" pitchFamily="49" charset="-127"/>
+                <a:ea typeface="D2Coding" panose="020B0609020101020101" pitchFamily="49" charset="-127"/>
+              </a:rPr>
+              <a:t> 앵커 박스의 위치와 크기를 실제 물체의 경계선에 딱 맞게 미세 조정하는 </a:t>
+            </a:r>
+            <a:r>
+              <a:rPr lang="ko-KR" altLang="en-US" sz="1600" dirty="0" err="1">
+                <a:latin typeface="D2Coding" panose="020B0609020101020101" pitchFamily="49" charset="-127"/>
+                <a:ea typeface="D2Coding" panose="020B0609020101020101" pitchFamily="49" charset="-127"/>
+              </a:rPr>
+              <a:t>오차값</a:t>
+            </a:r>
+            <a:r>
+              <a:rPr lang="en-US" altLang="ko-KR" sz="1600" dirty="0">
+                <a:latin typeface="D2Coding" panose="020B0609020101020101" pitchFamily="49" charset="-127"/>
+                <a:ea typeface="D2Coding" panose="020B0609020101020101" pitchFamily="49" charset="-127"/>
+              </a:rPr>
+              <a:t>(</a:t>
+            </a:r>
+            <a:r>
+              <a:rPr lang="en-US" altLang="ko-KR" sz="1600" dirty="0" err="1">
+                <a:latin typeface="D2Coding" panose="020B0609020101020101" pitchFamily="49" charset="-127"/>
+                <a:ea typeface="D2Coding" panose="020B0609020101020101" pitchFamily="49" charset="-127"/>
+              </a:rPr>
+              <a:t>Δx,Δy,Δw,Δh</a:t>
+            </a:r>
+            <a:r>
+              <a:rPr lang="en-US" altLang="ko-KR" sz="1600" dirty="0">
+                <a:latin typeface="D2Coding" panose="020B0609020101020101" pitchFamily="49" charset="-127"/>
+                <a:ea typeface="D2Coding" panose="020B0609020101020101" pitchFamily="49" charset="-127"/>
+              </a:rPr>
+              <a:t>) </a:t>
+            </a:r>
+            <a:r>
+              <a:rPr lang="ko-KR" altLang="en-US" sz="1600" dirty="0" err="1">
+                <a:latin typeface="D2Coding" panose="020B0609020101020101" pitchFamily="49" charset="-127"/>
+                <a:ea typeface="D2Coding" panose="020B0609020101020101" pitchFamily="49" charset="-127"/>
+              </a:rPr>
+              <a:t>게산</a:t>
+            </a:r>
+            <a:endParaRPr lang="en-US" altLang="ko-KR" sz="1600" dirty="0">
               <a:latin typeface="D2Coding" panose="020B0609020101020101" pitchFamily="49" charset="-127"/>
               <a:ea typeface="D2Coding" panose="020B0609020101020101" pitchFamily="49" charset="-127"/>
             </a:endParaRPr>
@@ -22713,7 +25423,7 @@
           <p:cNvPr id="6" name="제목 1">
             <a:extLst>
               <a:ext uri="{FF2B5EF4-FFF2-40B4-BE49-F238E27FC236}">
-                <a16:creationId xmlns:a16="http://schemas.microsoft.com/office/drawing/2014/main" id="{60B4B1F8-2BD4-DC3C-8D06-46C224D7D958}"/>
+                <a16:creationId xmlns:a16="http://schemas.microsoft.com/office/drawing/2014/main" id="{6D9EBA5D-FD2E-C1B8-3DF0-D7EB79A5EF6C}"/>
               </a:ext>
             </a:extLst>
           </p:cNvPr>
@@ -22724,8 +25434,8 @@
         </p:nvSpPr>
         <p:spPr>
           <a:xfrm>
-            <a:off x="7031196" y="647700"/>
-            <a:ext cx="4629755" cy="600722"/>
+            <a:off x="5848350" y="647700"/>
+            <a:ext cx="5812601" cy="600722"/>
           </a:xfrm>
           <a:prstGeom prst="rect">
             <a:avLst/>
@@ -22763,7 +25473,7 @@
                 <a:ea typeface="D2Coding" panose="020B0609020101020101" pitchFamily="49" charset="-127"/>
                 <a:cs typeface="Segoe UI Light" panose="020B0502040204020203" pitchFamily="34" charset="0"/>
               </a:rPr>
-              <a:t>6. </a:t>
+              <a:t>Convolutional</a:t>
             </a:r>
             <a:r>
               <a:rPr lang="ko-KR" altLang="en-US" sz="2000" cap="none" dirty="0">
@@ -22771,1717 +25481,53 @@
                 <a:ea typeface="D2Coding" panose="020B0609020101020101" pitchFamily="49" charset="-127"/>
                 <a:cs typeface="Segoe UI Light" panose="020B0502040204020203" pitchFamily="34" charset="0"/>
               </a:rPr>
-              <a:t>예측 결과 행렬</a:t>
-            </a:r>
-          </a:p>
-        </p:txBody>
-      </p:sp>
-      <p:graphicFrame>
-        <p:nvGraphicFramePr>
-          <p:cNvPr id="16" name="표 15">
-            <a:extLst>
-              <a:ext uri="{FF2B5EF4-FFF2-40B4-BE49-F238E27FC236}">
-                <a16:creationId xmlns:a16="http://schemas.microsoft.com/office/drawing/2014/main" id="{F347C981-92AA-3BDF-EC34-00E01ECF6E01}"/>
-              </a:ext>
-            </a:extLst>
-          </p:cNvPr>
-          <p:cNvGraphicFramePr>
-            <a:graphicFrameLocks noGrp="1"/>
-          </p:cNvGraphicFramePr>
-          <p:nvPr>
-            <p:extLst>
-              <p:ext uri="{D42A27DB-BD31-4B8C-83A1-F6EECF244321}">
-                <p14:modId xmlns:p14="http://schemas.microsoft.com/office/powerpoint/2010/main" val="1825974799"/>
-              </p:ext>
-            </p:extLst>
-          </p:nvPr>
-        </p:nvGraphicFramePr>
-        <p:xfrm>
-          <a:off x="742947" y="2831598"/>
-          <a:ext cx="3790953" cy="3204663"/>
-        </p:xfrm>
-        <a:graphic>
-          <a:graphicData uri="http://schemas.openxmlformats.org/drawingml/2006/table">
-            <a:tbl>
-              <a:tblPr firstRow="1" bandRow="1">
-                <a:tableStyleId>{5940675A-B579-460E-94D1-54222C63F5DA}</a:tableStyleId>
-              </a:tblPr>
-              <a:tblGrid>
-                <a:gridCol w="1263651">
-                  <a:extLst>
-                    <a:ext uri="{9D8B030D-6E8A-4147-A177-3AD203B41FA5}">
-                      <a16:colId xmlns:a16="http://schemas.microsoft.com/office/drawing/2014/main" val="1961843274"/>
-                    </a:ext>
-                  </a:extLst>
-                </a:gridCol>
-                <a:gridCol w="1263651">
-                  <a:extLst>
-                    <a:ext uri="{9D8B030D-6E8A-4147-A177-3AD203B41FA5}">
-                      <a16:colId xmlns:a16="http://schemas.microsoft.com/office/drawing/2014/main" val="2923400843"/>
-                    </a:ext>
-                  </a:extLst>
-                </a:gridCol>
-                <a:gridCol w="1263651">
-                  <a:extLst>
-                    <a:ext uri="{9D8B030D-6E8A-4147-A177-3AD203B41FA5}">
-                      <a16:colId xmlns:a16="http://schemas.microsoft.com/office/drawing/2014/main" val="2951067763"/>
-                    </a:ext>
-                  </a:extLst>
-                </a:gridCol>
-              </a:tblGrid>
-              <a:tr h="1068221">
-                <a:tc>
-                  <a:txBody>
-                    <a:bodyPr/>
-                    <a:lstStyle/>
-                    <a:p>
-                      <a:pPr latinLnBrk="1"/>
-                      <a:r>
-                        <a:rPr lang="en-US" altLang="ko-KR" sz="1400" dirty="0">
-                          <a:solidFill>
-                            <a:schemeClr val="bg1">
-                              <a:lumMod val="50000"/>
-                            </a:schemeClr>
-                          </a:solidFill>
-                        </a:rPr>
-                        <a:t>[0,0,0,0,</a:t>
-                      </a:r>
-                    </a:p>
-                    <a:p>
-                      <a:pPr latinLnBrk="1"/>
-                      <a:r>
-                        <a:rPr lang="en-US" altLang="ko-KR" sz="1400" dirty="0">
-                          <a:solidFill>
-                            <a:schemeClr val="bg1">
-                              <a:lumMod val="50000"/>
-                            </a:schemeClr>
-                          </a:solidFill>
-                        </a:rPr>
-                        <a:t>0,0,0,0,</a:t>
-                      </a:r>
-                    </a:p>
-                    <a:p>
-                      <a:pPr latinLnBrk="1"/>
-                      <a:r>
-                        <a:rPr lang="en-US" altLang="ko-KR" sz="1400" dirty="0">
-                          <a:solidFill>
-                            <a:schemeClr val="bg1">
-                              <a:lumMod val="50000"/>
-                            </a:schemeClr>
-                          </a:solidFill>
-                        </a:rPr>
-                        <a:t>0,0,0,0]</a:t>
-                      </a:r>
-                      <a:endParaRPr lang="ko-KR" altLang="en-US" sz="1400" dirty="0">
-                        <a:solidFill>
-                          <a:schemeClr val="bg1">
-                            <a:lumMod val="50000"/>
-                          </a:schemeClr>
-                        </a:solidFill>
-                      </a:endParaRPr>
-                    </a:p>
-                  </a:txBody>
-                  <a:tcPr marL="86797" marR="86797" marT="43397" marB="43397"/>
-                </a:tc>
-                <a:tc>
-                  <a:txBody>
-                    <a:bodyPr/>
-                    <a:lstStyle/>
-                    <a:p>
-                      <a:pPr marL="0" marR="0" lvl="0" indent="0" algn="l" defTabSz="914400" rtl="0" eaLnBrk="1" fontAlgn="auto" latinLnBrk="1" hangingPunct="1">
-                        <a:lnSpc>
-                          <a:spcPct val="100000"/>
-                        </a:lnSpc>
-                        <a:spcBef>
-                          <a:spcPts val="0"/>
-                        </a:spcBef>
-                        <a:spcAft>
-                          <a:spcPts val="0"/>
-                        </a:spcAft>
-                        <a:buClrTx/>
-                        <a:buSzTx/>
-                        <a:buFontTx/>
-                        <a:buNone/>
-                        <a:tabLst/>
-                        <a:defRPr/>
-                      </a:pPr>
-                      <a:r>
-                        <a:rPr kumimoji="0" lang="en-US" altLang="ko-KR" sz="1400" b="0" i="0" u="none" strike="noStrike" kern="1200" cap="none" spc="0" normalizeH="0" baseline="0" noProof="0" dirty="0">
-                          <a:ln>
-                            <a:noFill/>
-                          </a:ln>
-                          <a:solidFill>
-                            <a:schemeClr val="bg1">
-                              <a:lumMod val="50000"/>
-                            </a:schemeClr>
-                          </a:solidFill>
-                          <a:effectLst/>
-                          <a:uLnTx/>
-                          <a:uFillTx/>
-                          <a:latin typeface="Segoe UI"/>
-                          <a:ea typeface="+mn-ea"/>
-                          <a:cs typeface="+mn-cs"/>
-                        </a:rPr>
-                        <a:t>[0,0,0,0,</a:t>
-                      </a:r>
-                    </a:p>
-                    <a:p>
-                      <a:pPr marL="0" marR="0" lvl="0" indent="0" algn="l" defTabSz="914400" rtl="0" eaLnBrk="1" fontAlgn="auto" latinLnBrk="1" hangingPunct="1">
-                        <a:lnSpc>
-                          <a:spcPct val="100000"/>
-                        </a:lnSpc>
-                        <a:spcBef>
-                          <a:spcPts val="0"/>
-                        </a:spcBef>
-                        <a:spcAft>
-                          <a:spcPts val="0"/>
-                        </a:spcAft>
-                        <a:buClrTx/>
-                        <a:buSzTx/>
-                        <a:buFontTx/>
-                        <a:buNone/>
-                        <a:tabLst/>
-                        <a:defRPr/>
-                      </a:pPr>
-                      <a:r>
-                        <a:rPr kumimoji="0" lang="en-US" altLang="ko-KR" sz="1400" b="0" i="0" u="none" strike="noStrike" kern="1200" cap="none" spc="0" normalizeH="0" baseline="0" noProof="0" dirty="0">
-                          <a:ln>
-                            <a:noFill/>
-                          </a:ln>
-                          <a:solidFill>
-                            <a:schemeClr val="bg1">
-                              <a:lumMod val="50000"/>
-                            </a:schemeClr>
-                          </a:solidFill>
-                          <a:effectLst/>
-                          <a:uLnTx/>
-                          <a:uFillTx/>
-                          <a:latin typeface="Segoe UI"/>
-                          <a:ea typeface="+mn-ea"/>
-                          <a:cs typeface="+mn-cs"/>
-                        </a:rPr>
-                        <a:t>0,0,0,0,</a:t>
-                      </a:r>
-                    </a:p>
-                    <a:p>
-                      <a:pPr marL="0" marR="0" lvl="0" indent="0" algn="l" defTabSz="914400" rtl="0" eaLnBrk="1" fontAlgn="auto" latinLnBrk="1" hangingPunct="1">
-                        <a:lnSpc>
-                          <a:spcPct val="100000"/>
-                        </a:lnSpc>
-                        <a:spcBef>
-                          <a:spcPts val="0"/>
-                        </a:spcBef>
-                        <a:spcAft>
-                          <a:spcPts val="0"/>
-                        </a:spcAft>
-                        <a:buClrTx/>
-                        <a:buSzTx/>
-                        <a:buFontTx/>
-                        <a:buNone/>
-                        <a:tabLst/>
-                        <a:defRPr/>
-                      </a:pPr>
-                      <a:r>
-                        <a:rPr kumimoji="0" lang="en-US" altLang="ko-KR" sz="1400" b="0" i="0" u="none" strike="noStrike" kern="1200" cap="none" spc="0" normalizeH="0" baseline="0" noProof="0" dirty="0">
-                          <a:ln>
-                            <a:noFill/>
-                          </a:ln>
-                          <a:solidFill>
-                            <a:schemeClr val="bg1">
-                              <a:lumMod val="50000"/>
-                            </a:schemeClr>
-                          </a:solidFill>
-                          <a:effectLst/>
-                          <a:uLnTx/>
-                          <a:uFillTx/>
-                          <a:latin typeface="Segoe UI"/>
-                          <a:ea typeface="+mn-ea"/>
-                          <a:cs typeface="+mn-cs"/>
-                        </a:rPr>
-                        <a:t>0,0,0,0]</a:t>
-                      </a:r>
-                      <a:endParaRPr kumimoji="0" lang="ko-KR" altLang="en-US" sz="1400" b="0" i="0" u="none" strike="noStrike" kern="1200" cap="none" spc="0" normalizeH="0" baseline="0" noProof="0" dirty="0">
-                        <a:ln>
-                          <a:noFill/>
-                        </a:ln>
-                        <a:solidFill>
-                          <a:schemeClr val="bg1">
-                            <a:lumMod val="50000"/>
-                          </a:schemeClr>
-                        </a:solidFill>
-                        <a:effectLst/>
-                        <a:uLnTx/>
-                        <a:uFillTx/>
-                        <a:latin typeface="Segoe UI"/>
-                        <a:ea typeface="+mn-ea"/>
-                        <a:cs typeface="+mn-cs"/>
-                      </a:endParaRPr>
-                    </a:p>
-                  </a:txBody>
-                  <a:tcPr marL="86797" marR="86797" marT="43397" marB="43397"/>
-                </a:tc>
-                <a:tc>
-                  <a:txBody>
-                    <a:bodyPr/>
-                    <a:lstStyle/>
-                    <a:p>
-                      <a:pPr marL="0" marR="0" lvl="0" indent="0" algn="l" defTabSz="914400" rtl="0" eaLnBrk="1" fontAlgn="auto" latinLnBrk="1" hangingPunct="1">
-                        <a:lnSpc>
-                          <a:spcPct val="100000"/>
-                        </a:lnSpc>
-                        <a:spcBef>
-                          <a:spcPts val="0"/>
-                        </a:spcBef>
-                        <a:spcAft>
-                          <a:spcPts val="0"/>
-                        </a:spcAft>
-                        <a:buClrTx/>
-                        <a:buSzTx/>
-                        <a:buFontTx/>
-                        <a:buNone/>
-                        <a:tabLst/>
-                        <a:defRPr/>
-                      </a:pPr>
-                      <a:r>
-                        <a:rPr kumimoji="0" lang="en-US" altLang="ko-KR" sz="1400" b="0" i="0" u="none" strike="noStrike" kern="1200" cap="none" spc="0" normalizeH="0" baseline="0" noProof="0">
-                          <a:ln>
-                            <a:noFill/>
-                          </a:ln>
-                          <a:solidFill>
-                            <a:schemeClr val="bg1">
-                              <a:lumMod val="50000"/>
-                            </a:schemeClr>
-                          </a:solidFill>
-                          <a:effectLst/>
-                          <a:uLnTx/>
-                          <a:uFillTx/>
-                          <a:latin typeface="Segoe UI"/>
-                          <a:ea typeface="+mn-ea"/>
-                          <a:cs typeface="+mn-cs"/>
-                        </a:rPr>
-                        <a:t>[0,0,0,0,</a:t>
-                      </a:r>
-                    </a:p>
-                    <a:p>
-                      <a:pPr marL="0" marR="0" lvl="0" indent="0" algn="l" defTabSz="914400" rtl="0" eaLnBrk="1" fontAlgn="auto" latinLnBrk="1" hangingPunct="1">
-                        <a:lnSpc>
-                          <a:spcPct val="100000"/>
-                        </a:lnSpc>
-                        <a:spcBef>
-                          <a:spcPts val="0"/>
-                        </a:spcBef>
-                        <a:spcAft>
-                          <a:spcPts val="0"/>
-                        </a:spcAft>
-                        <a:buClrTx/>
-                        <a:buSzTx/>
-                        <a:buFontTx/>
-                        <a:buNone/>
-                        <a:tabLst/>
-                        <a:defRPr/>
-                      </a:pPr>
-                      <a:r>
-                        <a:rPr kumimoji="0" lang="en-US" altLang="ko-KR" sz="1400" b="0" i="0" u="none" strike="noStrike" kern="1200" cap="none" spc="0" normalizeH="0" baseline="0" noProof="0">
-                          <a:ln>
-                            <a:noFill/>
-                          </a:ln>
-                          <a:solidFill>
-                            <a:schemeClr val="bg1">
-                              <a:lumMod val="50000"/>
-                            </a:schemeClr>
-                          </a:solidFill>
-                          <a:effectLst/>
-                          <a:uLnTx/>
-                          <a:uFillTx/>
-                          <a:latin typeface="Segoe UI"/>
-                          <a:ea typeface="+mn-ea"/>
-                          <a:cs typeface="+mn-cs"/>
-                        </a:rPr>
-                        <a:t>0,0,0,0,</a:t>
-                      </a:r>
-                    </a:p>
-                    <a:p>
-                      <a:pPr marL="0" marR="0" lvl="0" indent="0" algn="l" defTabSz="914400" rtl="0" eaLnBrk="1" fontAlgn="auto" latinLnBrk="1" hangingPunct="1">
-                        <a:lnSpc>
-                          <a:spcPct val="100000"/>
-                        </a:lnSpc>
-                        <a:spcBef>
-                          <a:spcPts val="0"/>
-                        </a:spcBef>
-                        <a:spcAft>
-                          <a:spcPts val="0"/>
-                        </a:spcAft>
-                        <a:buClrTx/>
-                        <a:buSzTx/>
-                        <a:buFontTx/>
-                        <a:buNone/>
-                        <a:tabLst/>
-                        <a:defRPr/>
-                      </a:pPr>
-                      <a:r>
-                        <a:rPr kumimoji="0" lang="en-US" altLang="ko-KR" sz="1400" b="0" i="0" u="none" strike="noStrike" kern="1200" cap="none" spc="0" normalizeH="0" baseline="0" noProof="0">
-                          <a:ln>
-                            <a:noFill/>
-                          </a:ln>
-                          <a:solidFill>
-                            <a:schemeClr val="bg1">
-                              <a:lumMod val="50000"/>
-                            </a:schemeClr>
-                          </a:solidFill>
-                          <a:effectLst/>
-                          <a:uLnTx/>
-                          <a:uFillTx/>
-                          <a:latin typeface="Segoe UI"/>
-                          <a:ea typeface="+mn-ea"/>
-                          <a:cs typeface="+mn-cs"/>
-                        </a:rPr>
-                        <a:t>0,0,0,0]</a:t>
-                      </a:r>
-                      <a:endParaRPr kumimoji="0" lang="ko-KR" altLang="en-US" sz="1400" b="0" i="0" u="none" strike="noStrike" kern="1200" cap="none" spc="0" normalizeH="0" baseline="0" noProof="0" dirty="0">
-                        <a:ln>
-                          <a:noFill/>
-                        </a:ln>
-                        <a:solidFill>
-                          <a:schemeClr val="bg1">
-                            <a:lumMod val="50000"/>
-                          </a:schemeClr>
-                        </a:solidFill>
-                        <a:effectLst/>
-                        <a:uLnTx/>
-                        <a:uFillTx/>
-                        <a:latin typeface="Segoe UI"/>
-                        <a:ea typeface="+mn-ea"/>
-                        <a:cs typeface="+mn-cs"/>
-                      </a:endParaRPr>
-                    </a:p>
-                  </a:txBody>
-                  <a:tcPr marL="86797" marR="86797" marT="43397" marB="43397"/>
-                </a:tc>
-                <a:extLst>
-                  <a:ext uri="{0D108BD9-81ED-4DB2-BD59-A6C34878D82A}">
-                    <a16:rowId xmlns:a16="http://schemas.microsoft.com/office/drawing/2014/main" val="844891742"/>
-                  </a:ext>
-                </a:extLst>
-              </a:tr>
-              <a:tr h="1068221">
-                <a:tc>
-                  <a:txBody>
-                    <a:bodyPr/>
-                    <a:lstStyle/>
-                    <a:p>
-                      <a:pPr marL="0" marR="0" lvl="0" indent="0" algn="l" defTabSz="914400" rtl="0" eaLnBrk="1" fontAlgn="auto" latinLnBrk="1" hangingPunct="1">
-                        <a:lnSpc>
-                          <a:spcPct val="100000"/>
-                        </a:lnSpc>
-                        <a:spcBef>
-                          <a:spcPts val="0"/>
-                        </a:spcBef>
-                        <a:spcAft>
-                          <a:spcPts val="0"/>
-                        </a:spcAft>
-                        <a:buClrTx/>
-                        <a:buSzTx/>
-                        <a:buFontTx/>
-                        <a:buNone/>
-                        <a:tabLst/>
-                        <a:defRPr/>
-                      </a:pPr>
-                      <a:r>
-                        <a:rPr kumimoji="0" lang="en-US" altLang="ko-KR" sz="1400" b="0" i="0" u="none" strike="noStrike" kern="1200" cap="none" spc="0" normalizeH="0" baseline="0" noProof="0">
-                          <a:ln>
-                            <a:noFill/>
-                          </a:ln>
-                          <a:solidFill>
-                            <a:schemeClr val="bg1">
-                              <a:lumMod val="50000"/>
-                            </a:schemeClr>
-                          </a:solidFill>
-                          <a:effectLst/>
-                          <a:uLnTx/>
-                          <a:uFillTx/>
-                          <a:latin typeface="Segoe UI"/>
-                          <a:ea typeface="+mn-ea"/>
-                          <a:cs typeface="+mn-cs"/>
-                        </a:rPr>
-                        <a:t>[0,0,0,0,</a:t>
-                      </a:r>
-                    </a:p>
-                    <a:p>
-                      <a:pPr marL="0" marR="0" lvl="0" indent="0" algn="l" defTabSz="914400" rtl="0" eaLnBrk="1" fontAlgn="auto" latinLnBrk="1" hangingPunct="1">
-                        <a:lnSpc>
-                          <a:spcPct val="100000"/>
-                        </a:lnSpc>
-                        <a:spcBef>
-                          <a:spcPts val="0"/>
-                        </a:spcBef>
-                        <a:spcAft>
-                          <a:spcPts val="0"/>
-                        </a:spcAft>
-                        <a:buClrTx/>
-                        <a:buSzTx/>
-                        <a:buFontTx/>
-                        <a:buNone/>
-                        <a:tabLst/>
-                        <a:defRPr/>
-                      </a:pPr>
-                      <a:r>
-                        <a:rPr kumimoji="0" lang="en-US" altLang="ko-KR" sz="1400" b="0" i="0" u="none" strike="noStrike" kern="1200" cap="none" spc="0" normalizeH="0" baseline="0" noProof="0">
-                          <a:ln>
-                            <a:noFill/>
-                          </a:ln>
-                          <a:solidFill>
-                            <a:schemeClr val="bg1">
-                              <a:lumMod val="50000"/>
-                            </a:schemeClr>
-                          </a:solidFill>
-                          <a:effectLst/>
-                          <a:uLnTx/>
-                          <a:uFillTx/>
-                          <a:latin typeface="Segoe UI"/>
-                          <a:ea typeface="+mn-ea"/>
-                          <a:cs typeface="+mn-cs"/>
-                        </a:rPr>
-                        <a:t>0,0,0,0,</a:t>
-                      </a:r>
-                    </a:p>
-                    <a:p>
-                      <a:pPr marL="0" marR="0" lvl="0" indent="0" algn="l" defTabSz="914400" rtl="0" eaLnBrk="1" fontAlgn="auto" latinLnBrk="1" hangingPunct="1">
-                        <a:lnSpc>
-                          <a:spcPct val="100000"/>
-                        </a:lnSpc>
-                        <a:spcBef>
-                          <a:spcPts val="0"/>
-                        </a:spcBef>
-                        <a:spcAft>
-                          <a:spcPts val="0"/>
-                        </a:spcAft>
-                        <a:buClrTx/>
-                        <a:buSzTx/>
-                        <a:buFontTx/>
-                        <a:buNone/>
-                        <a:tabLst/>
-                        <a:defRPr/>
-                      </a:pPr>
-                      <a:r>
-                        <a:rPr kumimoji="0" lang="en-US" altLang="ko-KR" sz="1400" b="0" i="0" u="none" strike="noStrike" kern="1200" cap="none" spc="0" normalizeH="0" baseline="0" noProof="0">
-                          <a:ln>
-                            <a:noFill/>
-                          </a:ln>
-                          <a:solidFill>
-                            <a:schemeClr val="bg1">
-                              <a:lumMod val="50000"/>
-                            </a:schemeClr>
-                          </a:solidFill>
-                          <a:effectLst/>
-                          <a:uLnTx/>
-                          <a:uFillTx/>
-                          <a:latin typeface="Segoe UI"/>
-                          <a:ea typeface="+mn-ea"/>
-                          <a:cs typeface="+mn-cs"/>
-                        </a:rPr>
-                        <a:t>0,0,0,0]</a:t>
-                      </a:r>
-                      <a:endParaRPr kumimoji="0" lang="ko-KR" altLang="en-US" sz="1400" b="0" i="0" u="none" strike="noStrike" kern="1200" cap="none" spc="0" normalizeH="0" baseline="0" noProof="0" dirty="0">
-                        <a:ln>
-                          <a:noFill/>
-                        </a:ln>
-                        <a:solidFill>
-                          <a:schemeClr val="bg1">
-                            <a:lumMod val="50000"/>
-                          </a:schemeClr>
-                        </a:solidFill>
-                        <a:effectLst/>
-                        <a:uLnTx/>
-                        <a:uFillTx/>
-                        <a:latin typeface="Segoe UI"/>
-                        <a:ea typeface="+mn-ea"/>
-                        <a:cs typeface="+mn-cs"/>
-                      </a:endParaRPr>
-                    </a:p>
-                  </a:txBody>
-                  <a:tcPr marL="86797" marR="86797" marT="43397" marB="43397"/>
-                </a:tc>
-                <a:tc>
-                  <a:txBody>
-                    <a:bodyPr/>
-                    <a:lstStyle/>
-                    <a:p>
-                      <a:pPr marL="0" marR="0" lvl="0" indent="0" algn="l" defTabSz="914400" rtl="0" eaLnBrk="1" fontAlgn="auto" latinLnBrk="1" hangingPunct="1">
-                        <a:lnSpc>
-                          <a:spcPct val="100000"/>
-                        </a:lnSpc>
-                        <a:spcBef>
-                          <a:spcPts val="0"/>
-                        </a:spcBef>
-                        <a:spcAft>
-                          <a:spcPts val="0"/>
-                        </a:spcAft>
-                        <a:buClrTx/>
-                        <a:buSzTx/>
-                        <a:buFontTx/>
-                        <a:buNone/>
-                        <a:tabLst/>
-                        <a:defRPr/>
-                      </a:pPr>
-                      <a:r>
-                        <a:rPr kumimoji="0" lang="en-US" altLang="ko-KR" sz="1400" b="0" i="0" u="none" strike="noStrike" kern="1200" cap="none" spc="0" normalizeH="0" baseline="0" noProof="0" dirty="0">
-                          <a:ln>
-                            <a:noFill/>
-                          </a:ln>
-                          <a:solidFill>
-                            <a:schemeClr val="bg1">
-                              <a:lumMod val="50000"/>
-                            </a:schemeClr>
-                          </a:solidFill>
-                          <a:effectLst/>
-                          <a:uLnTx/>
-                          <a:uFillTx/>
-                          <a:latin typeface="Segoe UI"/>
-                          <a:ea typeface="+mn-ea"/>
-                          <a:cs typeface="+mn-cs"/>
-                        </a:rPr>
-                        <a:t>[0,0,0,0,</a:t>
-                      </a:r>
-                    </a:p>
-                    <a:p>
-                      <a:pPr marL="0" marR="0" lvl="0" indent="0" algn="l" defTabSz="914400" rtl="0" eaLnBrk="1" fontAlgn="auto" latinLnBrk="1" hangingPunct="1">
-                        <a:lnSpc>
-                          <a:spcPct val="100000"/>
-                        </a:lnSpc>
-                        <a:spcBef>
-                          <a:spcPts val="0"/>
-                        </a:spcBef>
-                        <a:spcAft>
-                          <a:spcPts val="0"/>
-                        </a:spcAft>
-                        <a:buClrTx/>
-                        <a:buSzTx/>
-                        <a:buFontTx/>
-                        <a:buNone/>
-                        <a:tabLst/>
-                        <a:defRPr/>
-                      </a:pPr>
-                      <a:r>
-                        <a:rPr kumimoji="0" lang="en-US" altLang="ko-KR" sz="1400" b="0" i="0" u="none" strike="noStrike" kern="1200" cap="none" spc="0" normalizeH="0" baseline="0" noProof="0" dirty="0">
-                          <a:ln>
-                            <a:noFill/>
-                          </a:ln>
-                          <a:solidFill>
-                            <a:schemeClr val="bg1">
-                              <a:lumMod val="50000"/>
-                            </a:schemeClr>
-                          </a:solidFill>
-                          <a:effectLst/>
-                          <a:uLnTx/>
-                          <a:uFillTx/>
-                          <a:latin typeface="Segoe UI"/>
-                          <a:ea typeface="+mn-ea"/>
-                          <a:cs typeface="+mn-cs"/>
-                        </a:rPr>
-                        <a:t>0,0,0,0,</a:t>
-                      </a:r>
-                    </a:p>
-                    <a:p>
-                      <a:pPr marL="0" marR="0" lvl="0" indent="0" algn="l" defTabSz="914400" rtl="0" eaLnBrk="1" fontAlgn="auto" latinLnBrk="1" hangingPunct="1">
-                        <a:lnSpc>
-                          <a:spcPct val="100000"/>
-                        </a:lnSpc>
-                        <a:spcBef>
-                          <a:spcPts val="0"/>
-                        </a:spcBef>
-                        <a:spcAft>
-                          <a:spcPts val="0"/>
-                        </a:spcAft>
-                        <a:buClrTx/>
-                        <a:buSzTx/>
-                        <a:buFontTx/>
-                        <a:buNone/>
-                        <a:tabLst/>
-                        <a:defRPr/>
-                      </a:pPr>
-                      <a:r>
-                        <a:rPr kumimoji="0" lang="en-US" altLang="ko-KR" sz="1400" b="0" i="0" u="none" strike="noStrike" kern="1200" cap="none" spc="0" normalizeH="0" baseline="0" noProof="0" dirty="0">
-                          <a:ln>
-                            <a:noFill/>
-                          </a:ln>
-                          <a:solidFill>
-                            <a:schemeClr val="bg1">
-                              <a:lumMod val="50000"/>
-                            </a:schemeClr>
-                          </a:solidFill>
-                          <a:effectLst/>
-                          <a:uLnTx/>
-                          <a:uFillTx/>
-                          <a:latin typeface="Segoe UI"/>
-                          <a:ea typeface="+mn-ea"/>
-                          <a:cs typeface="+mn-cs"/>
-                        </a:rPr>
-                        <a:t>0,0,0,0]</a:t>
-                      </a:r>
-                      <a:endParaRPr kumimoji="0" lang="ko-KR" altLang="en-US" sz="1400" b="0" i="0" u="none" strike="noStrike" kern="1200" cap="none" spc="0" normalizeH="0" baseline="0" noProof="0" dirty="0">
-                        <a:ln>
-                          <a:noFill/>
-                        </a:ln>
-                        <a:solidFill>
-                          <a:schemeClr val="bg1">
-                            <a:lumMod val="50000"/>
-                          </a:schemeClr>
-                        </a:solidFill>
-                        <a:effectLst/>
-                        <a:uLnTx/>
-                        <a:uFillTx/>
-                        <a:latin typeface="Segoe UI"/>
-                        <a:ea typeface="+mn-ea"/>
-                        <a:cs typeface="+mn-cs"/>
-                      </a:endParaRPr>
-                    </a:p>
-                  </a:txBody>
-                  <a:tcPr marL="86797" marR="86797" marT="43397" marB="43397"/>
-                </a:tc>
-                <a:tc>
-                  <a:txBody>
-                    <a:bodyPr/>
-                    <a:lstStyle/>
-                    <a:p>
-                      <a:pPr marL="0" marR="0" lvl="0" indent="0" algn="l" defTabSz="914400" rtl="0" eaLnBrk="1" fontAlgn="auto" latinLnBrk="1" hangingPunct="1">
-                        <a:lnSpc>
-                          <a:spcPct val="100000"/>
-                        </a:lnSpc>
-                        <a:spcBef>
-                          <a:spcPts val="0"/>
-                        </a:spcBef>
-                        <a:spcAft>
-                          <a:spcPts val="0"/>
-                        </a:spcAft>
-                        <a:buClrTx/>
-                        <a:buSzTx/>
-                        <a:buFontTx/>
-                        <a:buNone/>
-                        <a:tabLst/>
-                        <a:defRPr/>
-                      </a:pPr>
-                      <a:r>
-                        <a:rPr kumimoji="0" lang="en-US" altLang="ko-KR" sz="1400" b="0" i="0" u="none" strike="noStrike" kern="1200" cap="none" spc="0" normalizeH="0" baseline="0" noProof="0" dirty="0">
-                          <a:ln>
-                            <a:noFill/>
-                          </a:ln>
-                          <a:solidFill>
-                            <a:schemeClr val="bg1">
-                              <a:lumMod val="50000"/>
-                            </a:schemeClr>
-                          </a:solidFill>
-                          <a:effectLst/>
-                          <a:uLnTx/>
-                          <a:uFillTx/>
-                          <a:latin typeface="Segoe UI"/>
-                          <a:ea typeface="+mn-ea"/>
-                          <a:cs typeface="+mn-cs"/>
-                        </a:rPr>
-                        <a:t>[0,0,0,0,</a:t>
-                      </a:r>
-                    </a:p>
-                    <a:p>
-                      <a:pPr marL="0" marR="0" lvl="0" indent="0" algn="l" defTabSz="914400" rtl="0" eaLnBrk="1" fontAlgn="auto" latinLnBrk="1" hangingPunct="1">
-                        <a:lnSpc>
-                          <a:spcPct val="100000"/>
-                        </a:lnSpc>
-                        <a:spcBef>
-                          <a:spcPts val="0"/>
-                        </a:spcBef>
-                        <a:spcAft>
-                          <a:spcPts val="0"/>
-                        </a:spcAft>
-                        <a:buClrTx/>
-                        <a:buSzTx/>
-                        <a:buFontTx/>
-                        <a:buNone/>
-                        <a:tabLst/>
-                        <a:defRPr/>
-                      </a:pPr>
-                      <a:r>
-                        <a:rPr kumimoji="0" lang="en-US" altLang="ko-KR" sz="1400" b="0" i="0" u="none" strike="noStrike" kern="1200" cap="none" spc="0" normalizeH="0" baseline="0" noProof="0" dirty="0">
-                          <a:ln>
-                            <a:noFill/>
-                          </a:ln>
-                          <a:solidFill>
-                            <a:schemeClr val="bg1">
-                              <a:lumMod val="50000"/>
-                            </a:schemeClr>
-                          </a:solidFill>
-                          <a:effectLst/>
-                          <a:uLnTx/>
-                          <a:uFillTx/>
-                          <a:latin typeface="Segoe UI"/>
-                          <a:ea typeface="+mn-ea"/>
-                          <a:cs typeface="+mn-cs"/>
-                        </a:rPr>
-                        <a:t>0,0,0,0,</a:t>
-                      </a:r>
-                    </a:p>
-                    <a:p>
-                      <a:pPr marL="0" marR="0" lvl="0" indent="0" algn="l" defTabSz="914400" rtl="0" eaLnBrk="1" fontAlgn="auto" latinLnBrk="1" hangingPunct="1">
-                        <a:lnSpc>
-                          <a:spcPct val="100000"/>
-                        </a:lnSpc>
-                        <a:spcBef>
-                          <a:spcPts val="0"/>
-                        </a:spcBef>
-                        <a:spcAft>
-                          <a:spcPts val="0"/>
-                        </a:spcAft>
-                        <a:buClrTx/>
-                        <a:buSzTx/>
-                        <a:buFontTx/>
-                        <a:buNone/>
-                        <a:tabLst/>
-                        <a:defRPr/>
-                      </a:pPr>
-                      <a:r>
-                        <a:rPr kumimoji="0" lang="en-US" altLang="ko-KR" sz="1400" b="0" i="0" u="none" strike="noStrike" kern="1200" cap="none" spc="0" normalizeH="0" baseline="0" noProof="0" dirty="0">
-                          <a:ln>
-                            <a:noFill/>
-                          </a:ln>
-                          <a:solidFill>
-                            <a:schemeClr val="bg1">
-                              <a:lumMod val="50000"/>
-                            </a:schemeClr>
-                          </a:solidFill>
-                          <a:effectLst/>
-                          <a:uLnTx/>
-                          <a:uFillTx/>
-                          <a:latin typeface="Segoe UI"/>
-                          <a:ea typeface="+mn-ea"/>
-                          <a:cs typeface="+mn-cs"/>
-                        </a:rPr>
-                        <a:t>0,0,0,0]</a:t>
-                      </a:r>
-                      <a:endParaRPr kumimoji="0" lang="ko-KR" altLang="en-US" sz="1400" b="0" i="0" u="none" strike="noStrike" kern="1200" cap="none" spc="0" normalizeH="0" baseline="0" noProof="0" dirty="0">
-                        <a:ln>
-                          <a:noFill/>
-                        </a:ln>
-                        <a:solidFill>
-                          <a:schemeClr val="bg1">
-                            <a:lumMod val="50000"/>
-                          </a:schemeClr>
-                        </a:solidFill>
-                        <a:effectLst/>
-                        <a:uLnTx/>
-                        <a:uFillTx/>
-                        <a:latin typeface="Segoe UI"/>
-                        <a:ea typeface="+mn-ea"/>
-                        <a:cs typeface="+mn-cs"/>
-                      </a:endParaRPr>
-                    </a:p>
-                  </a:txBody>
-                  <a:tcPr marL="86797" marR="86797" marT="43397" marB="43397"/>
-                </a:tc>
-                <a:extLst>
-                  <a:ext uri="{0D108BD9-81ED-4DB2-BD59-A6C34878D82A}">
-                    <a16:rowId xmlns:a16="http://schemas.microsoft.com/office/drawing/2014/main" val="4097710734"/>
-                  </a:ext>
-                </a:extLst>
-              </a:tr>
-              <a:tr h="1068221">
-                <a:tc>
-                  <a:txBody>
-                    <a:bodyPr/>
-                    <a:lstStyle/>
-                    <a:p>
-                      <a:pPr marL="0" marR="0" lvl="0" indent="0" algn="l" defTabSz="914400" rtl="0" eaLnBrk="1" fontAlgn="auto" latinLnBrk="1" hangingPunct="1">
-                        <a:lnSpc>
-                          <a:spcPct val="100000"/>
-                        </a:lnSpc>
-                        <a:spcBef>
-                          <a:spcPts val="0"/>
-                        </a:spcBef>
-                        <a:spcAft>
-                          <a:spcPts val="0"/>
-                        </a:spcAft>
-                        <a:buClrTx/>
-                        <a:buSzTx/>
-                        <a:buFontTx/>
-                        <a:buNone/>
-                        <a:tabLst/>
-                        <a:defRPr/>
-                      </a:pPr>
-                      <a:r>
-                        <a:rPr kumimoji="0" lang="en-US" altLang="ko-KR" sz="1400" b="0" i="0" u="none" strike="noStrike" kern="1200" cap="none" spc="0" normalizeH="0" baseline="0" noProof="0" dirty="0">
-                          <a:ln>
-                            <a:noFill/>
-                          </a:ln>
-                          <a:solidFill>
-                            <a:schemeClr val="bg1">
-                              <a:lumMod val="50000"/>
-                            </a:schemeClr>
-                          </a:solidFill>
-                          <a:effectLst/>
-                          <a:uLnTx/>
-                          <a:uFillTx/>
-                          <a:latin typeface="Segoe UI"/>
-                          <a:ea typeface="+mn-ea"/>
-                          <a:cs typeface="+mn-cs"/>
-                        </a:rPr>
-                        <a:t>[0,0,0,0,</a:t>
-                      </a:r>
-                    </a:p>
-                    <a:p>
-                      <a:pPr marL="0" marR="0" lvl="0" indent="0" algn="l" defTabSz="914400" rtl="0" eaLnBrk="1" fontAlgn="auto" latinLnBrk="1" hangingPunct="1">
-                        <a:lnSpc>
-                          <a:spcPct val="100000"/>
-                        </a:lnSpc>
-                        <a:spcBef>
-                          <a:spcPts val="0"/>
-                        </a:spcBef>
-                        <a:spcAft>
-                          <a:spcPts val="0"/>
-                        </a:spcAft>
-                        <a:buClrTx/>
-                        <a:buSzTx/>
-                        <a:buFontTx/>
-                        <a:buNone/>
-                        <a:tabLst/>
-                        <a:defRPr/>
-                      </a:pPr>
-                      <a:r>
-                        <a:rPr kumimoji="0" lang="en-US" altLang="ko-KR" sz="1400" b="0" i="0" u="none" strike="noStrike" kern="1200" cap="none" spc="0" normalizeH="0" baseline="0" noProof="0" dirty="0">
-                          <a:ln>
-                            <a:noFill/>
-                          </a:ln>
-                          <a:solidFill>
-                            <a:schemeClr val="bg1">
-                              <a:lumMod val="50000"/>
-                            </a:schemeClr>
-                          </a:solidFill>
-                          <a:effectLst/>
-                          <a:uLnTx/>
-                          <a:uFillTx/>
-                          <a:latin typeface="Segoe UI"/>
-                          <a:ea typeface="+mn-ea"/>
-                          <a:cs typeface="+mn-cs"/>
-                        </a:rPr>
-                        <a:t>0,0,0,0,</a:t>
-                      </a:r>
-                    </a:p>
-                    <a:p>
-                      <a:pPr marL="0" marR="0" lvl="0" indent="0" algn="l" defTabSz="914400" rtl="0" eaLnBrk="1" fontAlgn="auto" latinLnBrk="1" hangingPunct="1">
-                        <a:lnSpc>
-                          <a:spcPct val="100000"/>
-                        </a:lnSpc>
-                        <a:spcBef>
-                          <a:spcPts val="0"/>
-                        </a:spcBef>
-                        <a:spcAft>
-                          <a:spcPts val="0"/>
-                        </a:spcAft>
-                        <a:buClrTx/>
-                        <a:buSzTx/>
-                        <a:buFontTx/>
-                        <a:buNone/>
-                        <a:tabLst/>
-                        <a:defRPr/>
-                      </a:pPr>
-                      <a:r>
-                        <a:rPr kumimoji="0" lang="en-US" altLang="ko-KR" sz="1400" b="0" i="0" u="none" strike="noStrike" kern="1200" cap="none" spc="0" normalizeH="0" baseline="0" noProof="0" dirty="0">
-                          <a:ln>
-                            <a:noFill/>
-                          </a:ln>
-                          <a:solidFill>
-                            <a:schemeClr val="bg1">
-                              <a:lumMod val="50000"/>
-                            </a:schemeClr>
-                          </a:solidFill>
-                          <a:effectLst/>
-                          <a:uLnTx/>
-                          <a:uFillTx/>
-                          <a:latin typeface="Segoe UI"/>
-                          <a:ea typeface="+mn-ea"/>
-                          <a:cs typeface="+mn-cs"/>
-                        </a:rPr>
-                        <a:t>0,0,0,0]</a:t>
-                      </a:r>
-                      <a:endParaRPr kumimoji="0" lang="ko-KR" altLang="en-US" sz="1400" b="0" i="0" u="none" strike="noStrike" kern="1200" cap="none" spc="0" normalizeH="0" baseline="0" noProof="0" dirty="0">
-                        <a:ln>
-                          <a:noFill/>
-                        </a:ln>
-                        <a:solidFill>
-                          <a:schemeClr val="bg1">
-                            <a:lumMod val="50000"/>
-                          </a:schemeClr>
-                        </a:solidFill>
-                        <a:effectLst/>
-                        <a:uLnTx/>
-                        <a:uFillTx/>
-                        <a:latin typeface="Segoe UI"/>
-                        <a:ea typeface="+mn-ea"/>
-                        <a:cs typeface="+mn-cs"/>
-                      </a:endParaRPr>
-                    </a:p>
-                  </a:txBody>
-                  <a:tcPr marL="86797" marR="86797" marT="43397" marB="43397"/>
-                </a:tc>
-                <a:tc>
-                  <a:txBody>
-                    <a:bodyPr/>
-                    <a:lstStyle/>
-                    <a:p>
-                      <a:pPr latinLnBrk="1"/>
-                      <a:r>
-                        <a:rPr lang="en-US" altLang="ko-KR" sz="1400" dirty="0">
-                          <a:solidFill>
-                            <a:schemeClr val="bg1">
-                              <a:lumMod val="50000"/>
-                            </a:schemeClr>
-                          </a:solidFill>
-                        </a:rPr>
-                        <a:t>[0,0,0,0,</a:t>
-                      </a:r>
-                    </a:p>
-                    <a:p>
-                      <a:pPr latinLnBrk="1"/>
-                      <a:r>
-                        <a:rPr lang="en-US" altLang="ko-KR" sz="1400" dirty="0">
-                          <a:solidFill>
-                            <a:schemeClr val="bg1">
-                              <a:lumMod val="50000"/>
-                            </a:schemeClr>
-                          </a:solidFill>
-                        </a:rPr>
-                        <a:t>0,0,0,0,</a:t>
-                      </a:r>
-                    </a:p>
-                    <a:p>
-                      <a:pPr latinLnBrk="1"/>
-                      <a:r>
-                        <a:rPr lang="en-US" altLang="ko-KR" sz="1400" dirty="0">
-                          <a:solidFill>
-                            <a:schemeClr val="bg1">
-                              <a:lumMod val="50000"/>
-                            </a:schemeClr>
-                          </a:solidFill>
-                        </a:rPr>
-                        <a:t>0,0,0,0]</a:t>
-                      </a:r>
-                      <a:endParaRPr lang="ko-KR" altLang="en-US" sz="1400" dirty="0">
-                        <a:solidFill>
-                          <a:schemeClr val="bg1">
-                            <a:lumMod val="50000"/>
-                          </a:schemeClr>
-                        </a:solidFill>
-                      </a:endParaRPr>
-                    </a:p>
-                    <a:p>
-                      <a:pPr marL="0" marR="0" lvl="0" indent="0" algn="l" defTabSz="914400" rtl="0" eaLnBrk="1" fontAlgn="auto" latinLnBrk="1" hangingPunct="1">
-                        <a:lnSpc>
-                          <a:spcPct val="100000"/>
-                        </a:lnSpc>
-                        <a:spcBef>
-                          <a:spcPts val="0"/>
-                        </a:spcBef>
-                        <a:spcAft>
-                          <a:spcPts val="0"/>
-                        </a:spcAft>
-                        <a:buClrTx/>
-                        <a:buSzTx/>
-                        <a:buFontTx/>
-                        <a:buNone/>
-                        <a:tabLst/>
-                        <a:defRPr/>
-                      </a:pPr>
-                      <a:endParaRPr kumimoji="0" lang="ko-KR" altLang="en-US" sz="1400" b="0" i="0" u="none" strike="noStrike" kern="1200" cap="none" spc="0" normalizeH="0" baseline="0" noProof="0" dirty="0">
-                        <a:ln>
-                          <a:noFill/>
-                        </a:ln>
-                        <a:solidFill>
-                          <a:schemeClr val="bg1">
-                            <a:lumMod val="50000"/>
-                          </a:schemeClr>
-                        </a:solidFill>
-                        <a:effectLst/>
-                        <a:uLnTx/>
-                        <a:uFillTx/>
-                        <a:latin typeface="Segoe UI"/>
-                        <a:ea typeface="+mn-ea"/>
-                        <a:cs typeface="+mn-cs"/>
-                      </a:endParaRPr>
-                    </a:p>
-                  </a:txBody>
-                  <a:tcPr marL="86797" marR="86797" marT="43397" marB="43397"/>
-                </a:tc>
-                <a:tc>
-                  <a:txBody>
-                    <a:bodyPr/>
-                    <a:lstStyle/>
-                    <a:p>
-                      <a:pPr marL="0" marR="0" lvl="0" indent="0" algn="l" defTabSz="914400" rtl="0" eaLnBrk="1" fontAlgn="auto" latinLnBrk="1" hangingPunct="1">
-                        <a:lnSpc>
-                          <a:spcPct val="100000"/>
-                        </a:lnSpc>
-                        <a:spcBef>
-                          <a:spcPts val="0"/>
-                        </a:spcBef>
-                        <a:spcAft>
-                          <a:spcPts val="0"/>
-                        </a:spcAft>
-                        <a:buClrTx/>
-                        <a:buSzTx/>
-                        <a:buFontTx/>
-                        <a:buNone/>
-                        <a:tabLst/>
-                        <a:defRPr/>
-                      </a:pPr>
-                      <a:endParaRPr kumimoji="0" lang="ko-KR" altLang="en-US" sz="1400" b="0" i="0" u="none" strike="noStrike" kern="1200" cap="none" spc="0" normalizeH="0" baseline="0" noProof="0" dirty="0">
-                        <a:ln>
-                          <a:noFill/>
-                        </a:ln>
-                        <a:solidFill>
-                          <a:srgbClr val="0070C0"/>
-                        </a:solidFill>
-                        <a:effectLst/>
-                        <a:uLnTx/>
-                        <a:uFillTx/>
-                        <a:latin typeface="Segoe UI"/>
-                        <a:ea typeface="+mn-ea"/>
-                        <a:cs typeface="+mn-cs"/>
-                      </a:endParaRPr>
-                    </a:p>
-                  </a:txBody>
-                  <a:tcPr marL="86797" marR="86797" marT="43397" marB="43397"/>
-                </a:tc>
-                <a:extLst>
-                  <a:ext uri="{0D108BD9-81ED-4DB2-BD59-A6C34878D82A}">
-                    <a16:rowId xmlns:a16="http://schemas.microsoft.com/office/drawing/2014/main" val="3232772719"/>
-                  </a:ext>
-                </a:extLst>
-              </a:tr>
-            </a:tbl>
-          </a:graphicData>
-        </a:graphic>
-      </p:graphicFrame>
-      <p:pic>
-        <p:nvPicPr>
-          <p:cNvPr id="17" name="그래픽 16" descr="트럭">
-            <a:extLst>
-              <a:ext uri="{FF2B5EF4-FFF2-40B4-BE49-F238E27FC236}">
-                <a16:creationId xmlns:a16="http://schemas.microsoft.com/office/drawing/2014/main" id="{67DAE3B8-38BA-9DF2-0C8C-6B0E375406CE}"/>
-              </a:ext>
-            </a:extLst>
-          </p:cNvPr>
-          <p:cNvPicPr>
-            <a:picLocks noChangeAspect="1"/>
-          </p:cNvPicPr>
-          <p:nvPr/>
-        </p:nvPicPr>
-        <p:blipFill>
-          <a:blip r:embed="rId2">
-            <a:extLst>
-              <a:ext uri="{96DAC541-7B7A-43D3-8B79-37D633B846F1}">
-                <asvg:svgBlip xmlns:asvg="http://schemas.microsoft.com/office/drawing/2016/SVG/main" r:embed="rId3"/>
-              </a:ext>
-            </a:extLst>
-          </a:blip>
-          <a:stretch>
-            <a:fillRect/>
-          </a:stretch>
-        </p:blipFill>
-        <p:spPr>
-          <a:xfrm>
-            <a:off x="3361094" y="5055370"/>
-            <a:ext cx="1047565" cy="1047565"/>
-          </a:xfrm>
-          <a:prstGeom prst="rect">
-            <a:avLst/>
-          </a:prstGeom>
-        </p:spPr>
-      </p:pic>
-      <p:grpSp>
-        <p:nvGrpSpPr>
-          <p:cNvPr id="24" name="그룹 23">
-            <a:extLst>
-              <a:ext uri="{FF2B5EF4-FFF2-40B4-BE49-F238E27FC236}">
-                <a16:creationId xmlns:a16="http://schemas.microsoft.com/office/drawing/2014/main" id="{7A71C663-CECD-3C91-0E31-D92F6C2969EB}"/>
-              </a:ext>
-            </a:extLst>
-          </p:cNvPr>
-          <p:cNvGrpSpPr/>
-          <p:nvPr/>
-        </p:nvGrpSpPr>
-        <p:grpSpPr>
-          <a:xfrm>
-            <a:off x="4734108" y="5293299"/>
-            <a:ext cx="6463832" cy="632558"/>
-            <a:chOff x="4146500" y="2118065"/>
-            <a:chExt cx="7553595" cy="739204"/>
-          </a:xfrm>
-        </p:grpSpPr>
-        <p:pic>
-          <p:nvPicPr>
-            <p:cNvPr id="21" name="그림 20">
-              <a:extLst>
-                <a:ext uri="{FF2B5EF4-FFF2-40B4-BE49-F238E27FC236}">
-                  <a16:creationId xmlns:a16="http://schemas.microsoft.com/office/drawing/2014/main" id="{7C3878D2-1CF4-FCEB-FFB0-1845386CEE16}"/>
-                </a:ext>
-              </a:extLst>
-            </p:cNvPr>
-            <p:cNvPicPr>
-              <a:picLocks noChangeAspect="1"/>
-            </p:cNvPicPr>
-            <p:nvPr/>
-          </p:nvPicPr>
-          <p:blipFill>
-            <a:blip r:embed="rId4"/>
-            <a:stretch>
-              <a:fillRect/>
-            </a:stretch>
-          </p:blipFill>
-          <p:spPr>
-            <a:xfrm>
-              <a:off x="4146500" y="2140327"/>
-              <a:ext cx="6501224" cy="712564"/>
-            </a:xfrm>
-            <a:prstGeom prst="rect">
-              <a:avLst/>
-            </a:prstGeom>
-          </p:spPr>
-        </p:pic>
-        <p:pic>
-          <p:nvPicPr>
-            <p:cNvPr id="23" name="그림 22">
-              <a:extLst>
-                <a:ext uri="{FF2B5EF4-FFF2-40B4-BE49-F238E27FC236}">
-                  <a16:creationId xmlns:a16="http://schemas.microsoft.com/office/drawing/2014/main" id="{DC9335D3-2E15-C112-E230-E722EF653BED}"/>
-                </a:ext>
-              </a:extLst>
-            </p:cNvPr>
-            <p:cNvPicPr>
-              <a:picLocks noChangeAspect="1"/>
-            </p:cNvPicPr>
-            <p:nvPr/>
-          </p:nvPicPr>
-          <p:blipFill>
-            <a:blip r:embed="rId5"/>
-            <a:stretch>
-              <a:fillRect/>
-            </a:stretch>
-          </p:blipFill>
-          <p:spPr>
-            <a:xfrm>
-              <a:off x="10634771" y="2118065"/>
-              <a:ext cx="1065324" cy="739204"/>
-            </a:xfrm>
-            <a:prstGeom prst="rect">
-              <a:avLst/>
-            </a:prstGeom>
-          </p:spPr>
-        </p:pic>
-      </p:grpSp>
-      <p:sp>
-        <p:nvSpPr>
-          <p:cNvPr id="30" name="TextBox 29">
-            <a:extLst>
-              <a:ext uri="{FF2B5EF4-FFF2-40B4-BE49-F238E27FC236}">
-                <a16:creationId xmlns:a16="http://schemas.microsoft.com/office/drawing/2014/main" id="{911B19B7-5598-F929-A03D-F603088DA936}"/>
-              </a:ext>
-            </a:extLst>
-          </p:cNvPr>
-          <p:cNvSpPr txBox="1"/>
-          <p:nvPr/>
-        </p:nvSpPr>
-        <p:spPr>
-          <a:xfrm>
-            <a:off x="4898973" y="2772867"/>
-            <a:ext cx="6817381" cy="2062103"/>
-          </a:xfrm>
-          <a:prstGeom prst="rect">
-            <a:avLst/>
-          </a:prstGeom>
-          <a:noFill/>
-        </p:spPr>
-        <p:txBody>
-          <a:bodyPr wrap="square">
-            <a:spAutoFit/>
-          </a:bodyPr>
-          <a:lstStyle/>
-          <a:p>
-            <a:pPr marL="285750" indent="-285750" rtl="0">
-              <a:buFont typeface="Wingdings" panose="05000000000000000000" pitchFamily="2" charset="2"/>
-              <a:buChar char="§"/>
-            </a:pPr>
-            <a:r>
-              <a:rPr lang="en-US" altLang="ko-KR" sz="1600" dirty="0">
-                <a:effectLst/>
-                <a:latin typeface="D2Coding" panose="020B0609020101020101" pitchFamily="49" charset="-127"/>
-                <a:ea typeface="D2Coding" panose="020B0609020101020101" pitchFamily="49" charset="-127"/>
-              </a:rPr>
-              <a:t>Tensor[3, 3, :]</a:t>
-            </a:r>
-            <a:r>
-              <a:rPr lang="ko-KR" altLang="en-US" sz="1600" dirty="0">
-                <a:effectLst/>
-                <a:latin typeface="D2Coding" panose="020B0609020101020101" pitchFamily="49" charset="-127"/>
-                <a:ea typeface="D2Coding" panose="020B0609020101020101" pitchFamily="49" charset="-127"/>
-              </a:rPr>
-              <a:t>은 </a:t>
-            </a:r>
-            <a:r>
-              <a:rPr lang="en-US" altLang="ko-KR" sz="1600" dirty="0">
-                <a:effectLst/>
-                <a:latin typeface="D2Coding" panose="020B0609020101020101" pitchFamily="49" charset="-127"/>
-                <a:ea typeface="D2Coding" panose="020B0609020101020101" pitchFamily="49" charset="-127"/>
-              </a:rPr>
-              <a:t>3×3 </a:t>
-            </a:r>
-            <a:r>
-              <a:rPr lang="ko-KR" altLang="en-US" sz="1600" dirty="0" err="1">
-                <a:effectLst/>
-                <a:latin typeface="D2Coding" panose="020B0609020101020101" pitchFamily="49" charset="-127"/>
-                <a:ea typeface="D2Coding" panose="020B0609020101020101" pitchFamily="49" charset="-127"/>
-              </a:rPr>
-              <a:t>격자판</a:t>
-            </a:r>
-            <a:r>
-              <a:rPr lang="ko-KR" altLang="en-US" sz="1600" dirty="0">
-                <a:effectLst/>
-                <a:latin typeface="D2Coding" panose="020B0609020101020101" pitchFamily="49" charset="-127"/>
-                <a:ea typeface="D2Coding" panose="020B0609020101020101" pitchFamily="49" charset="-127"/>
-              </a:rPr>
-              <a:t> 중에서 트럭은 우측 하단 방문을 열면 </a:t>
-            </a:r>
-            <a:r>
-              <a:rPr lang="en-US" altLang="ko-KR" sz="1600" dirty="0">
-                <a:effectLst/>
-                <a:latin typeface="D2Coding" panose="020B0609020101020101" pitchFamily="49" charset="-127"/>
-                <a:ea typeface="D2Coding" panose="020B0609020101020101" pitchFamily="49" charset="-127"/>
-              </a:rPr>
-              <a:t>12</a:t>
-            </a:r>
-            <a:r>
-              <a:rPr lang="ko-KR" altLang="en-US" sz="1600" dirty="0">
-                <a:effectLst/>
-                <a:latin typeface="D2Coding" panose="020B0609020101020101" pitchFamily="49" charset="-127"/>
-                <a:ea typeface="D2Coding" panose="020B0609020101020101" pitchFamily="49" charset="-127"/>
-              </a:rPr>
-              <a:t>개의 숫자가 들어있는데</a:t>
-            </a:r>
-            <a:r>
-              <a:rPr lang="en-US" altLang="ko-KR" sz="1600" dirty="0">
-                <a:effectLst/>
-                <a:latin typeface="D2Coding" panose="020B0609020101020101" pitchFamily="49" charset="-127"/>
-                <a:ea typeface="D2Coding" panose="020B0609020101020101" pitchFamily="49" charset="-127"/>
-              </a:rPr>
-              <a:t>, </a:t>
-            </a:r>
-            <a:r>
-              <a:rPr lang="ko-KR" altLang="en-US" sz="1600" dirty="0">
-                <a:effectLst/>
-                <a:latin typeface="D2Coding" panose="020B0609020101020101" pitchFamily="49" charset="-127"/>
-                <a:ea typeface="D2Coding" panose="020B0609020101020101" pitchFamily="49" charset="-127"/>
-              </a:rPr>
-              <a:t>그 숫자들이 각각 </a:t>
-            </a:r>
-            <a:r>
-              <a:rPr lang="en-US" altLang="ko-KR" sz="1600" dirty="0">
-                <a:effectLst/>
-                <a:latin typeface="D2Coding" panose="020B0609020101020101" pitchFamily="49" charset="-127"/>
-                <a:ea typeface="D2Coding" panose="020B0609020101020101" pitchFamily="49" charset="-127"/>
-              </a:rPr>
-              <a:t>'</a:t>
-            </a:r>
-            <a:r>
-              <a:rPr lang="ko-KR" altLang="en-US" sz="1600" dirty="0">
-                <a:effectLst/>
-                <a:latin typeface="D2Coding" panose="020B0609020101020101" pitchFamily="49" charset="-127"/>
-                <a:ea typeface="D2Coding" panose="020B0609020101020101" pitchFamily="49" charset="-127"/>
-              </a:rPr>
-              <a:t>가로 상자 정보 </a:t>
-            </a:r>
-            <a:r>
-              <a:rPr lang="en-US" altLang="ko-KR" sz="1600" dirty="0">
-                <a:effectLst/>
-                <a:latin typeface="D2Coding" panose="020B0609020101020101" pitchFamily="49" charset="-127"/>
-                <a:ea typeface="D2Coding" panose="020B0609020101020101" pitchFamily="49" charset="-127"/>
-              </a:rPr>
-              <a:t>5</a:t>
-            </a:r>
-            <a:r>
-              <a:rPr lang="ko-KR" altLang="en-US" sz="1600" dirty="0">
-                <a:effectLst/>
-                <a:latin typeface="D2Coding" panose="020B0609020101020101" pitchFamily="49" charset="-127"/>
-                <a:ea typeface="D2Coding" panose="020B0609020101020101" pitchFamily="49" charset="-127"/>
-              </a:rPr>
-              <a:t>개</a:t>
-            </a:r>
-            <a:r>
-              <a:rPr lang="en-US" altLang="ko-KR" sz="1600" dirty="0">
-                <a:effectLst/>
-                <a:latin typeface="D2Coding" panose="020B0609020101020101" pitchFamily="49" charset="-127"/>
-                <a:ea typeface="D2Coding" panose="020B0609020101020101" pitchFamily="49" charset="-127"/>
-              </a:rPr>
-              <a:t>', '</a:t>
-            </a:r>
-            <a:r>
-              <a:rPr lang="ko-KR" altLang="en-US" sz="1600" dirty="0">
-                <a:effectLst/>
-                <a:latin typeface="D2Coding" panose="020B0609020101020101" pitchFamily="49" charset="-127"/>
-                <a:ea typeface="D2Coding" panose="020B0609020101020101" pitchFamily="49" charset="-127"/>
-              </a:rPr>
-              <a:t>세로 상자 정보 </a:t>
-            </a:r>
-            <a:r>
-              <a:rPr lang="en-US" altLang="ko-KR" sz="1600" dirty="0">
-                <a:effectLst/>
-                <a:latin typeface="D2Coding" panose="020B0609020101020101" pitchFamily="49" charset="-127"/>
-                <a:ea typeface="D2Coding" panose="020B0609020101020101" pitchFamily="49" charset="-127"/>
-              </a:rPr>
-              <a:t>5</a:t>
-            </a:r>
-            <a:r>
-              <a:rPr lang="ko-KR" altLang="en-US" sz="1600" dirty="0">
-                <a:effectLst/>
-                <a:latin typeface="D2Coding" panose="020B0609020101020101" pitchFamily="49" charset="-127"/>
-                <a:ea typeface="D2Coding" panose="020B0609020101020101" pitchFamily="49" charset="-127"/>
-              </a:rPr>
-              <a:t>개</a:t>
-            </a:r>
-            <a:r>
-              <a:rPr lang="en-US" altLang="ko-KR" sz="1600" dirty="0">
-                <a:effectLst/>
-                <a:latin typeface="D2Coding" panose="020B0609020101020101" pitchFamily="49" charset="-127"/>
-                <a:ea typeface="D2Coding" panose="020B0609020101020101" pitchFamily="49" charset="-127"/>
-              </a:rPr>
-              <a:t>', '</a:t>
-            </a:r>
-            <a:r>
-              <a:rPr lang="ko-KR" altLang="en-US" sz="1600" dirty="0">
-                <a:effectLst/>
-                <a:latin typeface="D2Coding" panose="020B0609020101020101" pitchFamily="49" charset="-127"/>
-                <a:ea typeface="D2Coding" panose="020B0609020101020101" pitchFamily="49" charset="-127"/>
-              </a:rPr>
-              <a:t>이게 비행기인지 자동차인지 알려주는 정체 정보 </a:t>
-            </a:r>
-            <a:r>
-              <a:rPr lang="en-US" altLang="ko-KR" sz="1600" dirty="0">
-                <a:effectLst/>
-                <a:latin typeface="D2Coding" panose="020B0609020101020101" pitchFamily="49" charset="-127"/>
-                <a:ea typeface="D2Coding" panose="020B0609020101020101" pitchFamily="49" charset="-127"/>
-              </a:rPr>
-              <a:t>2</a:t>
-            </a:r>
-            <a:r>
-              <a:rPr lang="ko-KR" altLang="en-US" sz="1600" dirty="0">
-                <a:effectLst/>
-                <a:latin typeface="D2Coding" panose="020B0609020101020101" pitchFamily="49" charset="-127"/>
-                <a:ea typeface="D2Coding" panose="020B0609020101020101" pitchFamily="49" charset="-127"/>
-              </a:rPr>
-              <a:t>개</a:t>
-            </a:r>
-            <a:r>
-              <a:rPr lang="en-US" altLang="ko-KR" sz="1600" dirty="0">
-                <a:effectLst/>
-                <a:latin typeface="D2Coding" panose="020B0609020101020101" pitchFamily="49" charset="-127"/>
-                <a:ea typeface="D2Coding" panose="020B0609020101020101" pitchFamily="49" charset="-127"/>
-              </a:rPr>
-              <a:t>’</a:t>
-            </a:r>
-            <a:r>
-              <a:rPr lang="ko-KR" altLang="en-US" sz="1600" dirty="0">
-                <a:effectLst/>
-                <a:latin typeface="D2Coding" panose="020B0609020101020101" pitchFamily="49" charset="-127"/>
-                <a:ea typeface="D2Coding" panose="020B0609020101020101" pitchFamily="49" charset="-127"/>
-              </a:rPr>
-              <a:t>를 보여줌</a:t>
-            </a:r>
-            <a:endParaRPr lang="en-US" altLang="ko-KR" sz="1600" dirty="0">
-              <a:latin typeface="D2Coding" panose="020B0609020101020101" pitchFamily="49" charset="-127"/>
-              <a:ea typeface="D2Coding" panose="020B0609020101020101" pitchFamily="49" charset="-127"/>
-            </a:endParaRPr>
-          </a:p>
-          <a:p>
-            <a:pPr marL="285750" indent="-285750" rtl="0">
-              <a:buFont typeface="Wingdings" panose="05000000000000000000" pitchFamily="2" charset="2"/>
-              <a:buChar char="§"/>
-            </a:pPr>
-            <a:endParaRPr lang="en-US" altLang="ko-KR" sz="1600" dirty="0">
-              <a:effectLst/>
-              <a:latin typeface="D2Coding" panose="020B0609020101020101" pitchFamily="49" charset="-127"/>
-              <a:ea typeface="D2Coding" panose="020B0609020101020101" pitchFamily="49" charset="-127"/>
-            </a:endParaRPr>
-          </a:p>
-          <a:p>
-            <a:pPr marL="285750" indent="-285750" rtl="0">
-              <a:buFont typeface="Wingdings" panose="05000000000000000000" pitchFamily="2" charset="2"/>
-              <a:buChar char="§"/>
-            </a:pPr>
-            <a:r>
-              <a:rPr lang="en-US" altLang="ko-KR" sz="1600" dirty="0">
-                <a:effectLst/>
-                <a:latin typeface="D2Coding" panose="020B0609020101020101" pitchFamily="49" charset="-127"/>
-                <a:ea typeface="D2Coding" panose="020B0609020101020101" pitchFamily="49" charset="-127"/>
-              </a:rPr>
-              <a:t>YOLO</a:t>
-            </a:r>
-            <a:r>
-              <a:rPr lang="ko-KR" altLang="en-US" sz="1600" dirty="0">
-                <a:effectLst/>
-                <a:latin typeface="D2Coding" panose="020B0609020101020101" pitchFamily="49" charset="-127"/>
-                <a:ea typeface="D2Coding" panose="020B0609020101020101" pitchFamily="49" charset="-127"/>
-              </a:rPr>
-              <a:t>는 이 </a:t>
-            </a:r>
-            <a:r>
-              <a:rPr lang="en-US" altLang="ko-KR" sz="1600" dirty="0">
-                <a:effectLst/>
-                <a:latin typeface="D2Coding" panose="020B0609020101020101" pitchFamily="49" charset="-127"/>
-                <a:ea typeface="D2Coding" panose="020B0609020101020101" pitchFamily="49" charset="-127"/>
-              </a:rPr>
-              <a:t>12</a:t>
-            </a:r>
-            <a:r>
-              <a:rPr lang="ko-KR" altLang="en-US" sz="1600" dirty="0">
-                <a:effectLst/>
-                <a:latin typeface="D2Coding" panose="020B0609020101020101" pitchFamily="49" charset="-127"/>
-                <a:ea typeface="D2Coding" panose="020B0609020101020101" pitchFamily="49" charset="-127"/>
-              </a:rPr>
-              <a:t>개의 숫자를 보고 </a:t>
-            </a:r>
-            <a:r>
-              <a:rPr lang="en-US" altLang="ko-KR" sz="1600" dirty="0">
-                <a:effectLst/>
-                <a:latin typeface="D2Coding" panose="020B0609020101020101" pitchFamily="49" charset="-127"/>
-                <a:ea typeface="D2Coding" panose="020B0609020101020101" pitchFamily="49" charset="-127"/>
-              </a:rPr>
-              <a:t>'</a:t>
-            </a:r>
-            <a:r>
-              <a:rPr lang="ko-KR" altLang="en-US" sz="1600" dirty="0">
-                <a:effectLst/>
-                <a:latin typeface="D2Coding" panose="020B0609020101020101" pitchFamily="49" charset="-127"/>
-                <a:ea typeface="D2Coding" panose="020B0609020101020101" pitchFamily="49" charset="-127"/>
-              </a:rPr>
-              <a:t>아</a:t>
-            </a:r>
-            <a:r>
-              <a:rPr lang="en-US" altLang="ko-KR" sz="1600" dirty="0">
-                <a:effectLst/>
-                <a:latin typeface="D2Coding" panose="020B0609020101020101" pitchFamily="49" charset="-127"/>
-                <a:ea typeface="D2Coding" panose="020B0609020101020101" pitchFamily="49" charset="-127"/>
-              </a:rPr>
-              <a:t>! 3</a:t>
-            </a:r>
-            <a:r>
-              <a:rPr lang="ko-KR" altLang="en-US" sz="1600" dirty="0">
-                <a:effectLst/>
-                <a:latin typeface="D2Coding" panose="020B0609020101020101" pitchFamily="49" charset="-127"/>
-                <a:ea typeface="D2Coding" panose="020B0609020101020101" pitchFamily="49" charset="-127"/>
-              </a:rPr>
-              <a:t>행 </a:t>
-            </a:r>
-            <a:r>
-              <a:rPr lang="en-US" altLang="ko-KR" sz="1600" dirty="0">
-                <a:effectLst/>
-                <a:latin typeface="D2Coding" panose="020B0609020101020101" pitchFamily="49" charset="-127"/>
-                <a:ea typeface="D2Coding" panose="020B0609020101020101" pitchFamily="49" charset="-127"/>
-              </a:rPr>
-              <a:t>3</a:t>
-            </a:r>
-            <a:r>
-              <a:rPr lang="ko-KR" altLang="en-US" sz="1600" dirty="0">
-                <a:effectLst/>
-                <a:latin typeface="D2Coding" panose="020B0609020101020101" pitchFamily="49" charset="-127"/>
-                <a:ea typeface="D2Coding" panose="020B0609020101020101" pitchFamily="49" charset="-127"/>
-              </a:rPr>
-              <a:t>열에 </a:t>
-            </a:r>
-            <a:r>
-              <a:rPr lang="en-US" altLang="ko-KR" sz="1600" dirty="0">
-                <a:effectLst/>
-                <a:latin typeface="D2Coding" panose="020B0609020101020101" pitchFamily="49" charset="-127"/>
-                <a:ea typeface="D2Coding" panose="020B0609020101020101" pitchFamily="49" charset="-127"/>
-              </a:rPr>
-              <a:t>88%</a:t>
-            </a:r>
-            <a:r>
-              <a:rPr lang="ko-KR" altLang="en-US" sz="1600" dirty="0" err="1">
-                <a:effectLst/>
-                <a:latin typeface="D2Coding" panose="020B0609020101020101" pitchFamily="49" charset="-127"/>
-                <a:ea typeface="D2Coding" panose="020B0609020101020101" pitchFamily="49" charset="-127"/>
-              </a:rPr>
-              <a:t>짜리</a:t>
-            </a:r>
-            <a:r>
-              <a:rPr lang="ko-KR" altLang="en-US" sz="1600" dirty="0">
-                <a:effectLst/>
-                <a:latin typeface="D2Coding" panose="020B0609020101020101" pitchFamily="49" charset="-127"/>
-                <a:ea typeface="D2Coding" panose="020B0609020101020101" pitchFamily="49" charset="-127"/>
-              </a:rPr>
-              <a:t> 가로 상자를 치고</a:t>
-            </a:r>
-            <a:r>
-              <a:rPr lang="en-US" altLang="ko-KR" sz="1600" dirty="0">
-                <a:effectLst/>
-                <a:latin typeface="D2Coding" panose="020B0609020101020101" pitchFamily="49" charset="-127"/>
-                <a:ea typeface="D2Coding" panose="020B0609020101020101" pitchFamily="49" charset="-127"/>
-              </a:rPr>
-              <a:t>, </a:t>
-            </a:r>
-            <a:r>
-              <a:rPr lang="ko-KR" altLang="en-US" sz="1600" dirty="0">
-                <a:effectLst/>
-                <a:latin typeface="D2Coding" panose="020B0609020101020101" pitchFamily="49" charset="-127"/>
-                <a:ea typeface="D2Coding" panose="020B0609020101020101" pitchFamily="49" charset="-127"/>
-              </a:rPr>
-              <a:t>정체는 자동차라고 </a:t>
-            </a:r>
-            <a:r>
-              <a:rPr lang="ko-KR" altLang="en-US" sz="1600" dirty="0" err="1">
-                <a:effectLst/>
-                <a:latin typeface="D2Coding" panose="020B0609020101020101" pitchFamily="49" charset="-127"/>
-                <a:ea typeface="D2Coding" panose="020B0609020101020101" pitchFamily="49" charset="-127"/>
-              </a:rPr>
-              <a:t>띄워야겠구나</a:t>
-            </a:r>
-            <a:r>
-              <a:rPr lang="en-US" altLang="ko-KR" sz="1600" dirty="0">
-                <a:effectLst/>
-                <a:latin typeface="D2Coding" panose="020B0609020101020101" pitchFamily="49" charset="-127"/>
-                <a:ea typeface="D2Coding" panose="020B0609020101020101" pitchFamily="49" charset="-127"/>
-              </a:rPr>
-              <a:t>!' </a:t>
-            </a:r>
-            <a:r>
-              <a:rPr lang="ko-KR" altLang="en-US" sz="1600" dirty="0">
-                <a:effectLst/>
-                <a:latin typeface="D2Coding" panose="020B0609020101020101" pitchFamily="49" charset="-127"/>
-                <a:ea typeface="D2Coding" panose="020B0609020101020101" pitchFamily="49" charset="-127"/>
-              </a:rPr>
-              <a:t>하고 최종 화면을 </a:t>
-            </a:r>
-            <a:r>
-              <a:rPr lang="ko-KR" altLang="en-US" sz="1600" dirty="0">
-                <a:latin typeface="D2Coding" panose="020B0609020101020101" pitchFamily="49" charset="-127"/>
-                <a:ea typeface="D2Coding" panose="020B0609020101020101" pitchFamily="49" charset="-127"/>
-              </a:rPr>
-              <a:t>그려서 예측</a:t>
-            </a:r>
-            <a:endParaRPr lang="en-US" altLang="ko-KR" sz="1600" dirty="0">
-              <a:effectLst/>
-              <a:latin typeface="D2Coding" panose="020B0609020101020101" pitchFamily="49" charset="-127"/>
-              <a:ea typeface="D2Coding" panose="020B0609020101020101" pitchFamily="49" charset="-127"/>
-            </a:endParaRPr>
+              <a:t> </a:t>
+            </a:r>
+            <a:r>
+              <a:rPr lang="en-US" altLang="ko-KR" sz="2000" cap="none" dirty="0">
+                <a:latin typeface="D2Coding" panose="020B0609020101020101" pitchFamily="49" charset="-127"/>
+                <a:ea typeface="D2Coding" panose="020B0609020101020101" pitchFamily="49" charset="-127"/>
+                <a:cs typeface="Segoe UI Light" panose="020B0502040204020203" pitchFamily="34" charset="0"/>
+              </a:rPr>
+              <a:t>Implementation</a:t>
+            </a:r>
+            <a:r>
+              <a:rPr lang="ko-KR" altLang="en-US" sz="2000" cap="none" dirty="0">
+                <a:latin typeface="D2Coding" panose="020B0609020101020101" pitchFamily="49" charset="-127"/>
+                <a:ea typeface="D2Coding" panose="020B0609020101020101" pitchFamily="49" charset="-127"/>
+                <a:cs typeface="Segoe UI Light" panose="020B0502040204020203" pitchFamily="34" charset="0"/>
+              </a:rPr>
+              <a:t> </a:t>
+            </a:r>
+            <a:r>
+              <a:rPr lang="en-US" altLang="ko-KR" sz="2000" cap="none" dirty="0">
+                <a:latin typeface="D2Coding" panose="020B0609020101020101" pitchFamily="49" charset="-127"/>
+                <a:ea typeface="D2Coding" panose="020B0609020101020101" pitchFamily="49" charset="-127"/>
+                <a:cs typeface="Segoe UI Light" panose="020B0502040204020203" pitchFamily="34" charset="0"/>
+              </a:rPr>
+              <a:t>Sliding Windows</a:t>
+            </a:r>
+            <a:r>
+              <a:rPr lang="ko-KR" altLang="en-US" sz="2000" cap="none" dirty="0">
+                <a:latin typeface="D2Coding" panose="020B0609020101020101" pitchFamily="49" charset="-127"/>
+                <a:ea typeface="D2Coding" panose="020B0609020101020101" pitchFamily="49" charset="-127"/>
+                <a:cs typeface="Segoe UI Light" panose="020B0502040204020203" pitchFamily="34" charset="0"/>
+              </a:rPr>
+              <a:t> </a:t>
+            </a:r>
           </a:p>
         </p:txBody>
       </p:sp>
     </p:spTree>
     <p:extLst>
       <p:ext uri="{BB962C8B-B14F-4D97-AF65-F5344CB8AC3E}">
-        <p14:creationId xmlns:p14="http://schemas.microsoft.com/office/powerpoint/2010/main" val="3607778234"/>
+        <p14:creationId xmlns:p14="http://schemas.microsoft.com/office/powerpoint/2010/main" val="1494493590"/>
       </p:ext>
     </p:extLst>
   </p:cSld>
   <p:clrMapOvr>
     <a:masterClrMapping/>
   </p:clrMapOvr>
-  <p:timing>
-    <p:tnLst>
-      <p:par>
-        <p:cTn id="1" dur="indefinite" restart="never" nodeType="tmRoot">
-          <p:childTnLst>
-            <p:seq concurrent="1" nextAc="seek">
-              <p:cTn id="2" dur="indefinite" nodeType="mainSeq">
-                <p:childTnLst>
-                  <p:par>
-                    <p:cTn id="3" fill="hold">
-                      <p:stCondLst>
-                        <p:cond delay="indefinite"/>
-                      </p:stCondLst>
-                      <p:childTnLst>
-                        <p:par>
-                          <p:cTn id="4" fill="hold">
-                            <p:stCondLst>
-                              <p:cond delay="0"/>
-                            </p:stCondLst>
-                            <p:childTnLst>
-                              <p:par>
-                                <p:cTn id="5" presetID="1" presetClass="entr" presetSubtype="0" fill="hold" nodeType="clickEffect">
-                                  <p:stCondLst>
-                                    <p:cond delay="0"/>
-                                  </p:stCondLst>
-                                  <p:childTnLst>
-                                    <p:set>
-                                      <p:cBhvr>
-                                        <p:cTn id="6" dur="1" fill="hold">
-                                          <p:stCondLst>
-                                            <p:cond delay="0"/>
-                                          </p:stCondLst>
-                                        </p:cTn>
-                                        <p:tgtEl>
-                                          <p:spTgt spid="16"/>
-                                        </p:tgtEl>
-                                        <p:attrNameLst>
-                                          <p:attrName>style.visibility</p:attrName>
-                                        </p:attrNameLst>
-                                      </p:cBhvr>
-                                      <p:to>
-                                        <p:strVal val="visible"/>
-                                      </p:to>
-                                    </p:set>
-                                  </p:childTnLst>
-                                </p:cTn>
-                              </p:par>
-                              <p:par>
-                                <p:cTn id="7" presetID="1" presetClass="entr" presetSubtype="0" fill="hold" nodeType="withEffect">
-                                  <p:stCondLst>
-                                    <p:cond delay="0"/>
-                                  </p:stCondLst>
-                                  <p:childTnLst>
-                                    <p:set>
-                                      <p:cBhvr>
-                                        <p:cTn id="8" dur="1" fill="hold">
-                                          <p:stCondLst>
-                                            <p:cond delay="0"/>
-                                          </p:stCondLst>
-                                        </p:cTn>
-                                        <p:tgtEl>
-                                          <p:spTgt spid="17"/>
-                                        </p:tgtEl>
-                                        <p:attrNameLst>
-                                          <p:attrName>style.visibility</p:attrName>
-                                        </p:attrNameLst>
-                                      </p:cBhvr>
-                                      <p:to>
-                                        <p:strVal val="visible"/>
-                                      </p:to>
-                                    </p:set>
-                                  </p:childTnLst>
-                                </p:cTn>
-                              </p:par>
-                            </p:childTnLst>
-                          </p:cTn>
-                        </p:par>
-                      </p:childTnLst>
-                    </p:cTn>
-                  </p:par>
-                </p:childTnLst>
-              </p:cTn>
-              <p:prevCondLst>
-                <p:cond evt="onPrev" delay="0">
-                  <p:tgtEl>
-                    <p:sldTgt/>
-                  </p:tgtEl>
-                </p:cond>
-              </p:prevCondLst>
-              <p:nextCondLst>
-                <p:cond evt="onNext" delay="0">
-                  <p:tgtEl>
-                    <p:sldTgt/>
-                  </p:tgtEl>
-                </p:cond>
-              </p:nextCondLst>
-            </p:seq>
-          </p:childTnLst>
-        </p:cTn>
-      </p:par>
-    </p:tnLst>
-  </p:timing>
 </p:sld>
 </file>
 

--- a/CNN/Object detection_YOLO.pptx
+++ b/CNN/Object detection_YOLO.pptx
@@ -5,10 +5,10 @@
     <p:sldMasterId id="2147483660" r:id="rId1"/>
   </p:sldMasterIdLst>
   <p:notesMasterIdLst>
-    <p:notesMasterId r:id="rId21"/>
+    <p:notesMasterId r:id="rId22"/>
   </p:notesMasterIdLst>
   <p:handoutMasterIdLst>
-    <p:handoutMasterId r:id="rId22"/>
+    <p:handoutMasterId r:id="rId23"/>
   </p:handoutMasterIdLst>
   <p:sldIdLst>
     <p:sldId id="256" r:id="rId2"/>
@@ -28,8 +28,9 @@
     <p:sldId id="1132" r:id="rId16"/>
     <p:sldId id="1122" r:id="rId17"/>
     <p:sldId id="1137" r:id="rId18"/>
-    <p:sldId id="1138" r:id="rId19"/>
-    <p:sldId id="1123" r:id="rId20"/>
+    <p:sldId id="1141" r:id="rId19"/>
+    <p:sldId id="1138" r:id="rId20"/>
+    <p:sldId id="1123" r:id="rId21"/>
   </p:sldIdLst>
   <p:sldSz cx="12192000" cy="6858000"/>
   <p:notesSz cx="6858000" cy="9144000"/>
@@ -157,6 +158,7 @@
             <p14:sldId id="1132"/>
             <p14:sldId id="1122"/>
             <p14:sldId id="1137"/>
+            <p14:sldId id="1141"/>
             <p14:sldId id="1138"/>
             <p14:sldId id="1123"/>
           </p14:sldIdLst>
@@ -9805,6 +9807,475 @@
         </p:nvSpPr>
         <p:spPr>
           <a:xfrm>
+            <a:off x="571802" y="1474989"/>
+            <a:ext cx="4114498" cy="4629794"/>
+          </a:xfrm>
+          <a:prstGeom prst="rect">
+            <a:avLst/>
+          </a:prstGeom>
+          <a:noFill/>
+        </p:spPr>
+        <p:txBody>
+          <a:bodyPr wrap="square">
+            <a:spAutoFit/>
+          </a:bodyPr>
+          <a:lstStyle/>
+          <a:p>
+            <a:pPr>
+              <a:lnSpc>
+                <a:spcPct val="150000"/>
+              </a:lnSpc>
+            </a:pPr>
+            <a:r>
+              <a:rPr lang="ko-KR" altLang="en-US" dirty="0">
+                <a:latin typeface="D2Coding" panose="020B0609020101020101" pitchFamily="49" charset="-127"/>
+                <a:ea typeface="D2Coding" panose="020B0609020101020101" pitchFamily="49" charset="-127"/>
+              </a:rPr>
+              <a:t>앵커 박스의 크기</a:t>
+            </a:r>
+            <a:r>
+              <a:rPr lang="en-US" altLang="ko-KR" dirty="0">
+                <a:latin typeface="D2Coding" panose="020B0609020101020101" pitchFamily="49" charset="-127"/>
+                <a:ea typeface="D2Coding" panose="020B0609020101020101" pitchFamily="49" charset="-127"/>
+              </a:rPr>
+              <a:t>(Scale)</a:t>
+            </a:r>
+            <a:r>
+              <a:rPr lang="ko-KR" altLang="en-US" dirty="0">
+                <a:latin typeface="D2Coding" panose="020B0609020101020101" pitchFamily="49" charset="-127"/>
+                <a:ea typeface="D2Coding" panose="020B0609020101020101" pitchFamily="49" charset="-127"/>
+              </a:rPr>
+              <a:t>와 비율</a:t>
+            </a:r>
+            <a:r>
+              <a:rPr lang="en-US" altLang="ko-KR" dirty="0">
+                <a:latin typeface="D2Coding" panose="020B0609020101020101" pitchFamily="49" charset="-127"/>
+                <a:ea typeface="D2Coding" panose="020B0609020101020101" pitchFamily="49" charset="-127"/>
+              </a:rPr>
+              <a:t>(Aspect Ratio)</a:t>
+            </a:r>
+            <a:r>
+              <a:rPr lang="ko-KR" altLang="en-US" dirty="0">
+                <a:latin typeface="D2Coding" panose="020B0609020101020101" pitchFamily="49" charset="-127"/>
+                <a:ea typeface="D2Coding" panose="020B0609020101020101" pitchFamily="49" charset="-127"/>
+              </a:rPr>
+              <a:t>을 사전에 세팅</a:t>
+            </a:r>
+            <a:r>
+              <a:rPr lang="en-US" altLang="ko-KR" dirty="0">
+                <a:latin typeface="D2Coding" panose="020B0609020101020101" pitchFamily="49" charset="-127"/>
+                <a:ea typeface="D2Coding" panose="020B0609020101020101" pitchFamily="49" charset="-127"/>
+              </a:rPr>
+              <a:t>(</a:t>
+            </a:r>
+            <a:r>
+              <a:rPr lang="ko-KR" altLang="en-US" dirty="0">
+                <a:latin typeface="D2Coding" panose="020B0609020101020101" pitchFamily="49" charset="-127"/>
+                <a:ea typeface="D2Coding" panose="020B0609020101020101" pitchFamily="49" charset="-127"/>
+              </a:rPr>
+              <a:t>직관이나 </a:t>
+            </a:r>
+            <a:r>
+              <a:rPr lang="en-US" altLang="ko-KR" dirty="0">
+                <a:latin typeface="D2Coding" panose="020B0609020101020101" pitchFamily="49" charset="-127"/>
+                <a:ea typeface="D2Coding" panose="020B0609020101020101" pitchFamily="49" charset="-127"/>
+              </a:rPr>
+              <a:t>K-Means Clustering)</a:t>
+            </a:r>
+          </a:p>
+          <a:p>
+            <a:pPr>
+              <a:lnSpc>
+                <a:spcPct val="150000"/>
+              </a:lnSpc>
+            </a:pPr>
+            <a:endParaRPr lang="en-US" altLang="ko-KR" dirty="0">
+              <a:latin typeface="D2Coding" panose="020B0609020101020101" pitchFamily="49" charset="-127"/>
+              <a:ea typeface="D2Coding" panose="020B0609020101020101" pitchFamily="49" charset="-127"/>
+            </a:endParaRPr>
+          </a:p>
+          <a:p>
+            <a:pPr>
+              <a:lnSpc>
+                <a:spcPct val="150000"/>
+              </a:lnSpc>
+            </a:pPr>
+            <a:r>
+              <a:rPr lang="ko-KR" altLang="en-US" sz="1400" dirty="0">
+                <a:latin typeface="D2Coding" panose="020B0609020101020101" pitchFamily="49" charset="-127"/>
+                <a:ea typeface="D2Coding" panose="020B0609020101020101" pitchFamily="49" charset="-127"/>
+              </a:rPr>
+              <a:t> </a:t>
+            </a:r>
+            <a:r>
+              <a:rPr lang="en-US" altLang="ko-KR" sz="1400" dirty="0">
+                <a:latin typeface="D2Coding" panose="020B0609020101020101" pitchFamily="49" charset="-127"/>
+                <a:ea typeface="D2Coding" panose="020B0609020101020101" pitchFamily="49" charset="-127"/>
+                <a:sym typeface="Wingdings" panose="05000000000000000000" pitchFamily="2" charset="2"/>
+              </a:rPr>
+              <a:t> </a:t>
+            </a:r>
+            <a:r>
+              <a:rPr lang="ko-KR" altLang="en-US" sz="1400" dirty="0">
+                <a:latin typeface="D2Coding" panose="020B0609020101020101" pitchFamily="49" charset="-127"/>
+                <a:ea typeface="D2Coding" panose="020B0609020101020101" pitchFamily="49" charset="-127"/>
+              </a:rPr>
+              <a:t>아무리 미리 잘 </a:t>
+            </a:r>
+            <a:r>
+              <a:rPr lang="ko-KR" altLang="en-US" sz="1400" dirty="0" err="1">
+                <a:latin typeface="D2Coding" panose="020B0609020101020101" pitchFamily="49" charset="-127"/>
+                <a:ea typeface="D2Coding" panose="020B0609020101020101" pitchFamily="49" charset="-127"/>
+              </a:rPr>
+              <a:t>정해둬도</a:t>
+            </a:r>
+            <a:r>
+              <a:rPr lang="en-US" altLang="ko-KR" sz="1400" dirty="0">
+                <a:latin typeface="D2Coding" panose="020B0609020101020101" pitchFamily="49" charset="-127"/>
+                <a:ea typeface="D2Coding" panose="020B0609020101020101" pitchFamily="49" charset="-127"/>
+              </a:rPr>
+              <a:t>, </a:t>
+            </a:r>
+            <a:r>
+              <a:rPr lang="ko-KR" altLang="en-US" sz="1400" dirty="0">
+                <a:latin typeface="D2Coding" panose="020B0609020101020101" pitchFamily="49" charset="-127"/>
+                <a:ea typeface="D2Coding" panose="020B0609020101020101" pitchFamily="49" charset="-127"/>
+              </a:rPr>
+              <a:t>세상 모든 물체의 크기에 딱 맞아떨어지는 앵커 박스를 만드는 것은 불가능</a:t>
+            </a:r>
+            <a:r>
+              <a:rPr lang="en-US" altLang="ko-KR" sz="1400" dirty="0">
+                <a:latin typeface="D2Coding" panose="020B0609020101020101" pitchFamily="49" charset="-127"/>
+                <a:ea typeface="D2Coding" panose="020B0609020101020101" pitchFamily="49" charset="-127"/>
+              </a:rPr>
+              <a:t>, '</a:t>
+            </a:r>
+            <a:r>
+              <a:rPr lang="ko-KR" altLang="en-US" sz="1400" dirty="0">
+                <a:latin typeface="D2Coding" panose="020B0609020101020101" pitchFamily="49" charset="-127"/>
+                <a:ea typeface="D2Coding" panose="020B0609020101020101" pitchFamily="49" charset="-127"/>
+              </a:rPr>
+              <a:t>회귀</a:t>
+            </a:r>
+            <a:r>
+              <a:rPr lang="en-US" altLang="ko-KR" sz="1400" dirty="0">
+                <a:latin typeface="D2Coding" panose="020B0609020101020101" pitchFamily="49" charset="-127"/>
+                <a:ea typeface="D2Coding" panose="020B0609020101020101" pitchFamily="49" charset="-127"/>
+              </a:rPr>
+              <a:t>(Regression) </a:t>
+            </a:r>
+            <a:r>
+              <a:rPr lang="ko-KR" altLang="en-US" sz="1400" dirty="0">
+                <a:latin typeface="D2Coding" panose="020B0609020101020101" pitchFamily="49" charset="-127"/>
+                <a:ea typeface="D2Coding" panose="020B0609020101020101" pitchFamily="49" charset="-127"/>
+              </a:rPr>
+              <a:t>연산</a:t>
+            </a:r>
+            <a:r>
+              <a:rPr lang="en-US" altLang="ko-KR" sz="1400" dirty="0">
+                <a:latin typeface="D2Coding" panose="020B0609020101020101" pitchFamily="49" charset="-127"/>
+                <a:ea typeface="D2Coding" panose="020B0609020101020101" pitchFamily="49" charset="-127"/>
+              </a:rPr>
+              <a:t>'</a:t>
+            </a:r>
+            <a:r>
+              <a:rPr lang="ko-KR" altLang="en-US" sz="1400" dirty="0">
+                <a:latin typeface="D2Coding" panose="020B0609020101020101" pitchFamily="49" charset="-127"/>
+                <a:ea typeface="D2Coding" panose="020B0609020101020101" pitchFamily="49" charset="-127"/>
+              </a:rPr>
+              <a:t>을 함께 사용하여</a:t>
+            </a:r>
+            <a:r>
+              <a:rPr lang="en-US" altLang="ko-KR" sz="1400" dirty="0">
+                <a:latin typeface="D2Coding" panose="020B0609020101020101" pitchFamily="49" charset="-127"/>
+                <a:ea typeface="D2Coding" panose="020B0609020101020101" pitchFamily="49" charset="-127"/>
+              </a:rPr>
+              <a:t> </a:t>
+            </a:r>
+            <a:r>
+              <a:rPr lang="ko-KR" altLang="en-US" sz="1400" dirty="0" err="1">
+                <a:latin typeface="D2Coding" panose="020B0609020101020101" pitchFamily="49" charset="-127"/>
+                <a:ea typeface="D2Coding" panose="020B0609020101020101" pitchFamily="49" charset="-127"/>
+              </a:rPr>
+              <a:t>사잔에</a:t>
+            </a:r>
+            <a:r>
+              <a:rPr lang="ko-KR" altLang="en-US" sz="1400" dirty="0">
+                <a:latin typeface="D2Coding" panose="020B0609020101020101" pitchFamily="49" charset="-127"/>
+                <a:ea typeface="D2Coding" panose="020B0609020101020101" pitchFamily="49" charset="-127"/>
+              </a:rPr>
+              <a:t> 정한 앵커 박스는 </a:t>
+            </a:r>
+            <a:r>
+              <a:rPr lang="en-US" altLang="ko-KR" sz="1400" dirty="0">
+                <a:latin typeface="D2Coding" panose="020B0609020101020101" pitchFamily="49" charset="-127"/>
+                <a:ea typeface="D2Coding" panose="020B0609020101020101" pitchFamily="49" charset="-127"/>
+              </a:rPr>
+              <a:t>＇</a:t>
+            </a:r>
+            <a:r>
+              <a:rPr lang="ko-KR" altLang="en-US" sz="1400" dirty="0">
+                <a:latin typeface="D2Coding" panose="020B0609020101020101" pitchFamily="49" charset="-127"/>
+                <a:ea typeface="D2Coding" panose="020B0609020101020101" pitchFamily="49" charset="-127"/>
+              </a:rPr>
+              <a:t>가장 근접한 출발선</a:t>
+            </a:r>
+            <a:r>
+              <a:rPr lang="en-US" altLang="ko-KR" sz="1400" dirty="0">
+                <a:latin typeface="D2Coding" panose="020B0609020101020101" pitchFamily="49" charset="-127"/>
+                <a:ea typeface="D2Coding" panose="020B0609020101020101" pitchFamily="49" charset="-127"/>
+              </a:rPr>
+              <a:t>＇</a:t>
+            </a:r>
+            <a:r>
+              <a:rPr lang="ko-KR" altLang="en-US" sz="1400" dirty="0">
+                <a:latin typeface="D2Coding" panose="020B0609020101020101" pitchFamily="49" charset="-127"/>
+                <a:ea typeface="D2Coding" panose="020B0609020101020101" pitchFamily="49" charset="-127"/>
+              </a:rPr>
+              <a:t>일 뿐이고</a:t>
+            </a:r>
+            <a:r>
+              <a:rPr lang="en-US" altLang="ko-KR" sz="1400" dirty="0">
+                <a:latin typeface="D2Coding" panose="020B0609020101020101" pitchFamily="49" charset="-127"/>
+                <a:ea typeface="D2Coding" panose="020B0609020101020101" pitchFamily="49" charset="-127"/>
+              </a:rPr>
+              <a:t>, </a:t>
+            </a:r>
+            <a:r>
+              <a:rPr lang="ko-KR" altLang="en-US" sz="1400" dirty="0">
+                <a:latin typeface="D2Coding" panose="020B0609020101020101" pitchFamily="49" charset="-127"/>
+                <a:ea typeface="D2Coding" panose="020B0609020101020101" pitchFamily="49" charset="-127"/>
+              </a:rPr>
+              <a:t>모델은 연산을 통해 그 고정된 틀을 실제 물체 크기에 맞게 수 밀리미터 단위로 미세하게 늘리거나 줄여서</a:t>
+            </a:r>
+            <a:r>
+              <a:rPr lang="en-US" altLang="ko-KR" sz="1400" dirty="0">
+                <a:latin typeface="D2Coding" panose="020B0609020101020101" pitchFamily="49" charset="-127"/>
+                <a:ea typeface="D2Coding" panose="020B0609020101020101" pitchFamily="49" charset="-127"/>
+              </a:rPr>
+              <a:t>(Delta </a:t>
+            </a:r>
+            <a:r>
+              <a:rPr lang="ko-KR" altLang="en-US" sz="1400" dirty="0">
+                <a:latin typeface="D2Coding" panose="020B0609020101020101" pitchFamily="49" charset="-127"/>
+                <a:ea typeface="D2Coding" panose="020B0609020101020101" pitchFamily="49" charset="-127"/>
+              </a:rPr>
+              <a:t>값 조정</a:t>
+            </a:r>
+            <a:r>
+              <a:rPr lang="en-US" altLang="ko-KR" sz="1400" dirty="0">
+                <a:latin typeface="D2Coding" panose="020B0609020101020101" pitchFamily="49" charset="-127"/>
+                <a:ea typeface="D2Coding" panose="020B0609020101020101" pitchFamily="49" charset="-127"/>
+              </a:rPr>
+              <a:t>)</a:t>
+            </a:r>
+            <a:r>
+              <a:rPr lang="ko-KR" altLang="en-US" sz="1400" dirty="0">
+                <a:latin typeface="D2Coding" panose="020B0609020101020101" pitchFamily="49" charset="-127"/>
+                <a:ea typeface="D2Coding" panose="020B0609020101020101" pitchFamily="49" charset="-127"/>
+              </a:rPr>
+              <a:t> 최종 정답을 찾게 됨</a:t>
+            </a:r>
+          </a:p>
+        </p:txBody>
+      </p:sp>
+      <p:pic>
+        <p:nvPicPr>
+          <p:cNvPr id="3074" name="Picture 2">
+            <a:extLst>
+              <a:ext uri="{FF2B5EF4-FFF2-40B4-BE49-F238E27FC236}">
+                <a16:creationId xmlns:a16="http://schemas.microsoft.com/office/drawing/2014/main" id="{1D8A8416-2307-93DC-863B-ABA03779E54E}"/>
+              </a:ext>
+            </a:extLst>
+          </p:cNvPr>
+          <p:cNvPicPr>
+            <a:picLocks noChangeAspect="1" noChangeArrowheads="1"/>
+          </p:cNvPicPr>
+          <p:nvPr/>
+        </p:nvPicPr>
+        <p:blipFill>
+          <a:blip r:embed="rId2">
+            <a:extLst>
+              <a:ext uri="{28A0092B-C50C-407E-A947-70E740481C1C}">
+                <a14:useLocalDpi xmlns:a14="http://schemas.microsoft.com/office/drawing/2010/main" val="0"/>
+              </a:ext>
+            </a:extLst>
+          </a:blip>
+          <a:srcRect/>
+          <a:stretch>
+            <a:fillRect/>
+          </a:stretch>
+        </p:blipFill>
+        <p:spPr bwMode="auto">
+          <a:xfrm>
+            <a:off x="4877402" y="1474989"/>
+            <a:ext cx="6742796" cy="4411461"/>
+          </a:xfrm>
+          <a:prstGeom prst="rect">
+            <a:avLst/>
+          </a:prstGeom>
+          <a:noFill/>
+          <a:extLst>
+            <a:ext uri="{909E8E84-426E-40DD-AFC4-6F175D3DCCD1}">
+              <a14:hiddenFill xmlns:a14="http://schemas.microsoft.com/office/drawing/2010/main">
+                <a:solidFill>
+                  <a:srgbClr val="FFFFFF"/>
+                </a:solidFill>
+              </a14:hiddenFill>
+            </a:ext>
+          </a:extLst>
+        </p:spPr>
+      </p:pic>
+    </p:spTree>
+    <p:extLst>
+      <p:ext uri="{BB962C8B-B14F-4D97-AF65-F5344CB8AC3E}">
+        <p14:creationId xmlns:p14="http://schemas.microsoft.com/office/powerpoint/2010/main" val="523673028"/>
+      </p:ext>
+    </p:extLst>
+  </p:cSld>
+  <p:clrMapOvr>
+    <a:masterClrMapping/>
+  </p:clrMapOvr>
+</p:sld>
+</file>
+
+<file path=ppt/slides/slide18.xml><?xml version="1.0" encoding="utf-8"?>
+<p:sld xmlns:a="http://schemas.openxmlformats.org/drawingml/2006/main" xmlns:r="http://schemas.openxmlformats.org/officeDocument/2006/relationships" xmlns:p="http://schemas.openxmlformats.org/presentationml/2006/main">
+  <p:cSld>
+    <p:spTree>
+      <p:nvGrpSpPr>
+        <p:cNvPr id="1" name="">
+          <a:extLst>
+            <a:ext uri="{FF2B5EF4-FFF2-40B4-BE49-F238E27FC236}">
+              <a16:creationId xmlns:a16="http://schemas.microsoft.com/office/drawing/2014/main" id="{04C2FD4B-C40F-5DED-FACC-738F5BC8AC83}"/>
+            </a:ext>
+          </a:extLst>
+        </p:cNvPr>
+        <p:cNvGrpSpPr/>
+        <p:nvPr/>
+      </p:nvGrpSpPr>
+      <p:grpSpPr>
+        <a:xfrm>
+          <a:off x="0" y="0"/>
+          <a:ext cx="0" cy="0"/>
+          <a:chOff x="0" y="0"/>
+          <a:chExt cx="0" cy="0"/>
+        </a:xfrm>
+      </p:grpSpPr>
+      <p:sp>
+        <p:nvSpPr>
+          <p:cNvPr id="4" name="슬라이드 번호 개체 틀 3">
+            <a:extLst>
+              <a:ext uri="{FF2B5EF4-FFF2-40B4-BE49-F238E27FC236}">
+                <a16:creationId xmlns:a16="http://schemas.microsoft.com/office/drawing/2014/main" id="{F3832F23-9FCA-4B9A-2560-8A63A374C9D7}"/>
+              </a:ext>
+            </a:extLst>
+          </p:cNvPr>
+          <p:cNvSpPr>
+            <a:spLocks noGrp="1"/>
+          </p:cNvSpPr>
+          <p:nvPr>
+            <p:ph type="sldNum" sz="quarter" idx="12"/>
+          </p:nvPr>
+        </p:nvSpPr>
+        <p:spPr>
+          <a:xfrm>
+            <a:off x="10514011" y="6036261"/>
+            <a:ext cx="753545" cy="365125"/>
+          </a:xfrm>
+        </p:spPr>
+        <p:txBody>
+          <a:bodyPr/>
+          <a:lstStyle/>
+          <a:p>
+            <a:fld id="{D57F1E4F-1CFF-5643-939E-217C01CDF565}" type="slidenum">
+              <a:rPr lang="en-US" smtClean="0"/>
+              <a:pPr/>
+              <a:t>18</a:t>
+            </a:fld>
+            <a:endParaRPr lang="en-US" dirty="0"/>
+          </a:p>
+        </p:txBody>
+      </p:sp>
+      <p:sp>
+        <p:nvSpPr>
+          <p:cNvPr id="3" name="제목 1">
+            <a:extLst>
+              <a:ext uri="{FF2B5EF4-FFF2-40B4-BE49-F238E27FC236}">
+                <a16:creationId xmlns:a16="http://schemas.microsoft.com/office/drawing/2014/main" id="{1BF66FF0-2CED-6E91-18B9-C638E564E5D6}"/>
+              </a:ext>
+            </a:extLst>
+          </p:cNvPr>
+          <p:cNvSpPr txBox="1">
+            <a:spLocks/>
+          </p:cNvSpPr>
+          <p:nvPr/>
+        </p:nvSpPr>
+        <p:spPr>
+          <a:xfrm>
+            <a:off x="475645" y="481983"/>
+            <a:ext cx="10353762" cy="766439"/>
+          </a:xfrm>
+          <a:prstGeom prst="rect">
+            <a:avLst/>
+          </a:prstGeom>
+        </p:spPr>
+        <p:txBody>
+          <a:bodyPr vert="horz" lIns="91440" tIns="45720" rIns="91440" bIns="45720" rtlCol="0" anchor="ctr">
+            <a:normAutofit/>
+          </a:bodyPr>
+          <a:lstStyle>
+            <a:lvl1pPr algn="ctr" defTabSz="914400" rtl="0" eaLnBrk="1" latinLnBrk="1" hangingPunct="1">
+              <a:lnSpc>
+                <a:spcPct val="90000"/>
+              </a:lnSpc>
+              <a:spcBef>
+                <a:spcPct val="0"/>
+              </a:spcBef>
+              <a:buNone/>
+              <a:defRPr sz="3200" kern="1200" cap="all" baseline="0">
+                <a:solidFill>
+                  <a:schemeClr val="tx1"/>
+                </a:solidFill>
+                <a:effectLst/>
+                <a:latin typeface="Batang" panose="02030600000101010101" pitchFamily="18" charset="-127"/>
+                <a:ea typeface="Batang" panose="02030600000101010101" pitchFamily="18" charset="-127"/>
+                <a:cs typeface="+mj-cs"/>
+              </a:defRPr>
+            </a:lvl1pPr>
+          </a:lstStyle>
+          <a:p>
+            <a:pPr algn="l"/>
+            <a:r>
+              <a:rPr lang="en-US" altLang="ko-KR" sz="2800" cap="none" dirty="0">
+                <a:latin typeface="D2Coding" panose="020B0609020101020101" pitchFamily="49" charset="-127"/>
+                <a:ea typeface="D2Coding" panose="020B0609020101020101" pitchFamily="49" charset="-127"/>
+                <a:cs typeface="Segoe UI Light" panose="020B0502040204020203" pitchFamily="34" charset="0"/>
+              </a:rPr>
+              <a:t>YOLO</a:t>
+            </a:r>
+            <a:endParaRPr lang="ko-KR" altLang="en-US" sz="2800" cap="none" dirty="0">
+              <a:latin typeface="D2Coding" panose="020B0609020101020101" pitchFamily="49" charset="-127"/>
+              <a:ea typeface="D2Coding" panose="020B0609020101020101" pitchFamily="49" charset="-127"/>
+              <a:cs typeface="Segoe UI Light" panose="020B0502040204020203" pitchFamily="34" charset="0"/>
+            </a:endParaRPr>
+          </a:p>
+        </p:txBody>
+      </p:sp>
+      <p:sp>
+        <p:nvSpPr>
+          <p:cNvPr id="11" name="TextBox 10">
+            <a:extLst>
+              <a:ext uri="{FF2B5EF4-FFF2-40B4-BE49-F238E27FC236}">
+                <a16:creationId xmlns:a16="http://schemas.microsoft.com/office/drawing/2014/main" id="{6DE2C951-CE28-AD38-D2E1-8D7B612630DF}"/>
+              </a:ext>
+            </a:extLst>
+          </p:cNvPr>
+          <p:cNvSpPr txBox="1"/>
+          <p:nvPr/>
+        </p:nvSpPr>
+        <p:spPr>
+          <a:xfrm>
             <a:off x="571802" y="1248422"/>
             <a:ext cx="11144553" cy="880819"/>
           </a:xfrm>
@@ -9906,7 +10377,7 @@
           <p:cNvPr id="6" name="제목 1">
             <a:extLst>
               <a:ext uri="{FF2B5EF4-FFF2-40B4-BE49-F238E27FC236}">
-                <a16:creationId xmlns:a16="http://schemas.microsoft.com/office/drawing/2014/main" id="{3D9F3631-9490-A675-864C-33CEA1F143A9}"/>
+                <a16:creationId xmlns:a16="http://schemas.microsoft.com/office/drawing/2014/main" id="{6197DD21-36FC-BEFC-CCFD-BFB183647A41}"/>
               </a:ext>
             </a:extLst>
           </p:cNvPr>
@@ -9974,20 +10445,14 @@
           <p:cNvPr id="10" name="표 9">
             <a:extLst>
               <a:ext uri="{FF2B5EF4-FFF2-40B4-BE49-F238E27FC236}">
-                <a16:creationId xmlns:a16="http://schemas.microsoft.com/office/drawing/2014/main" id="{C5DEAD37-CB18-E69A-24A6-CAD4CBE65C7D}"/>
+                <a16:creationId xmlns:a16="http://schemas.microsoft.com/office/drawing/2014/main" id="{3DCB820B-BD35-5B2F-05F9-6DC922453C99}"/>
               </a:ext>
             </a:extLst>
           </p:cNvPr>
           <p:cNvGraphicFramePr>
             <a:graphicFrameLocks noGrp="1"/>
           </p:cNvGraphicFramePr>
-          <p:nvPr>
-            <p:extLst>
-              <p:ext uri="{D42A27DB-BD31-4B8C-83A1-F6EECF244321}">
-                <p14:modId xmlns:p14="http://schemas.microsoft.com/office/powerpoint/2010/main" val="4106436136"/>
-              </p:ext>
-            </p:extLst>
-          </p:nvPr>
+          <p:nvPr/>
         </p:nvGraphicFramePr>
         <p:xfrm>
           <a:off x="2057397" y="3376294"/>
@@ -11347,7 +11812,7 @@
           <p:cNvPr id="13" name="TextBox 12">
             <a:extLst>
               <a:ext uri="{FF2B5EF4-FFF2-40B4-BE49-F238E27FC236}">
-                <a16:creationId xmlns:a16="http://schemas.microsoft.com/office/drawing/2014/main" id="{34E218BB-5B43-136C-C46E-06F7CC275FF8}"/>
+                <a16:creationId xmlns:a16="http://schemas.microsoft.com/office/drawing/2014/main" id="{8F266889-2574-6C8D-498E-2954A5F89700}"/>
               </a:ext>
             </a:extLst>
           </p:cNvPr>
@@ -11415,7 +11880,7 @@
           <p:cNvPr id="5" name="그래픽 4" descr="트럭">
             <a:extLst>
               <a:ext uri="{FF2B5EF4-FFF2-40B4-BE49-F238E27FC236}">
-                <a16:creationId xmlns:a16="http://schemas.microsoft.com/office/drawing/2014/main" id="{48EDE1C5-CEFC-1658-7E5F-7FEF49E7CF3A}"/>
+                <a16:creationId xmlns:a16="http://schemas.microsoft.com/office/drawing/2014/main" id="{F025B43B-39F6-6D9F-17C5-629B2610F7F4}"/>
               </a:ext>
             </a:extLst>
           </p:cNvPr>
@@ -11451,7 +11916,7 @@
           <p:cNvPr id="17" name="곱하기 기호 16">
             <a:extLst>
               <a:ext uri="{FF2B5EF4-FFF2-40B4-BE49-F238E27FC236}">
-                <a16:creationId xmlns:a16="http://schemas.microsoft.com/office/drawing/2014/main" id="{FE7C3A32-47C6-96EA-D059-FE24F727CDCB}"/>
+                <a16:creationId xmlns:a16="http://schemas.microsoft.com/office/drawing/2014/main" id="{9AFFF238-2574-8DAA-15D2-6C011A6C67C6}"/>
               </a:ext>
             </a:extLst>
           </p:cNvPr>
@@ -11500,20 +11965,14 @@
           <p:cNvPr id="18" name="표 17">
             <a:extLst>
               <a:ext uri="{FF2B5EF4-FFF2-40B4-BE49-F238E27FC236}">
-                <a16:creationId xmlns:a16="http://schemas.microsoft.com/office/drawing/2014/main" id="{2F596DFF-0164-42DC-220E-AAB9EB436D40}"/>
+                <a16:creationId xmlns:a16="http://schemas.microsoft.com/office/drawing/2014/main" id="{DE1976F9-25E4-2257-A627-A4E3CBC2C1B7}"/>
               </a:ext>
             </a:extLst>
           </p:cNvPr>
           <p:cNvGraphicFramePr>
             <a:graphicFrameLocks noGrp="1"/>
           </p:cNvGraphicFramePr>
-          <p:nvPr>
-            <p:extLst>
-              <p:ext uri="{D42A27DB-BD31-4B8C-83A1-F6EECF244321}">
-                <p14:modId xmlns:p14="http://schemas.microsoft.com/office/powerpoint/2010/main" val="4092064144"/>
-              </p:ext>
-            </p:extLst>
-          </p:nvPr>
+          <p:nvPr/>
         </p:nvGraphicFramePr>
         <p:xfrm>
           <a:off x="5819773" y="3376294"/>
@@ -12873,7 +13332,7 @@
           <p:cNvPr id="19" name="그래픽 18" descr="트럭">
             <a:extLst>
               <a:ext uri="{FF2B5EF4-FFF2-40B4-BE49-F238E27FC236}">
-                <a16:creationId xmlns:a16="http://schemas.microsoft.com/office/drawing/2014/main" id="{853C999D-303D-FCA5-93A8-2A6A2289B371}"/>
+                <a16:creationId xmlns:a16="http://schemas.microsoft.com/office/drawing/2014/main" id="{F3413E7F-C0BD-A5C4-97D1-5D0E8C6A3489}"/>
               </a:ext>
             </a:extLst>
           </p:cNvPr>
@@ -12909,7 +13368,7 @@
           <p:cNvPr id="20" name="곱하기 기호 19">
             <a:extLst>
               <a:ext uri="{FF2B5EF4-FFF2-40B4-BE49-F238E27FC236}">
-                <a16:creationId xmlns:a16="http://schemas.microsoft.com/office/drawing/2014/main" id="{FAF47D6F-2F45-F6E7-F7A6-8E9D078D4226}"/>
+                <a16:creationId xmlns:a16="http://schemas.microsoft.com/office/drawing/2014/main" id="{EC2A791D-5EAC-8DC6-3401-265698CA4966}"/>
               </a:ext>
             </a:extLst>
           </p:cNvPr>
@@ -12958,7 +13417,7 @@
           <p:cNvPr id="21" name="TextBox 20">
             <a:extLst>
               <a:ext uri="{FF2B5EF4-FFF2-40B4-BE49-F238E27FC236}">
-                <a16:creationId xmlns:a16="http://schemas.microsoft.com/office/drawing/2014/main" id="{6FCFE11D-65D8-184D-264F-F9BF72C2754B}"/>
+                <a16:creationId xmlns:a16="http://schemas.microsoft.com/office/drawing/2014/main" id="{F784ABF0-D5CF-8FAB-691A-53A0DA4AA826}"/>
               </a:ext>
             </a:extLst>
           </p:cNvPr>
@@ -12998,7 +13457,7 @@
           <p:cNvPr id="23" name="TextBox 22">
             <a:extLst>
               <a:ext uri="{FF2B5EF4-FFF2-40B4-BE49-F238E27FC236}">
-                <a16:creationId xmlns:a16="http://schemas.microsoft.com/office/drawing/2014/main" id="{D8325E59-1279-0762-4595-DB5CED3F8FA8}"/>
+                <a16:creationId xmlns:a16="http://schemas.microsoft.com/office/drawing/2014/main" id="{4E8ED8A2-C278-A78F-8F42-80C8604E01C5}"/>
               </a:ext>
             </a:extLst>
           </p:cNvPr>
@@ -13070,7 +13529,7 @@
     </p:spTree>
     <p:extLst>
       <p:ext uri="{BB962C8B-B14F-4D97-AF65-F5344CB8AC3E}">
-        <p14:creationId xmlns:p14="http://schemas.microsoft.com/office/powerpoint/2010/main" val="523673028"/>
+        <p14:creationId xmlns:p14="http://schemas.microsoft.com/office/powerpoint/2010/main" val="2583079102"/>
       </p:ext>
     </p:extLst>
   </p:cSld>
@@ -13258,7 +13717,7 @@
 </p:sld>
 </file>
 
-<file path=ppt/slides/slide18.xml><?xml version="1.0" encoding="utf-8"?>
+<file path=ppt/slides/slide19.xml><?xml version="1.0" encoding="utf-8"?>
 <p:sld xmlns:a="http://schemas.openxmlformats.org/drawingml/2006/main" xmlns:r="http://schemas.openxmlformats.org/officeDocument/2006/relationships" xmlns:p="http://schemas.openxmlformats.org/presentationml/2006/main">
   <p:cSld>
     <p:spTree>
@@ -13310,7 +13769,7 @@
             <a:fld id="{D57F1E4F-1CFF-5643-939E-217C01CDF565}" type="slidenum">
               <a:rPr lang="en-US" smtClean="0"/>
               <a:pPr/>
-              <a:t>18</a:t>
+              <a:t>19</a:t>
             </a:fld>
             <a:endParaRPr lang="en-US" dirty="0"/>
           </a:p>
@@ -16002,187 +16461,6 @@
     <p:extLst>
       <p:ext uri="{BB962C8B-B14F-4D97-AF65-F5344CB8AC3E}">
         <p14:creationId xmlns:p14="http://schemas.microsoft.com/office/powerpoint/2010/main" val="3293832986"/>
-      </p:ext>
-    </p:extLst>
-  </p:cSld>
-  <p:clrMapOvr>
-    <a:masterClrMapping/>
-  </p:clrMapOvr>
-</p:sld>
-</file>
-
-<file path=ppt/slides/slide19.xml><?xml version="1.0" encoding="utf-8"?>
-<p:sld xmlns:a="http://schemas.openxmlformats.org/drawingml/2006/main" xmlns:r="http://schemas.openxmlformats.org/officeDocument/2006/relationships" xmlns:p="http://schemas.openxmlformats.org/presentationml/2006/main">
-  <p:cSld>
-    <p:spTree>
-      <p:nvGrpSpPr>
-        <p:cNvPr id="1" name="">
-          <a:extLst>
-            <a:ext uri="{FF2B5EF4-FFF2-40B4-BE49-F238E27FC236}">
-              <a16:creationId xmlns:a16="http://schemas.microsoft.com/office/drawing/2014/main" id="{F104C44D-F297-6601-F332-F8D92566EC1A}"/>
-            </a:ext>
-          </a:extLst>
-        </p:cNvPr>
-        <p:cNvGrpSpPr/>
-        <p:nvPr/>
-      </p:nvGrpSpPr>
-      <p:grpSpPr>
-        <a:xfrm>
-          <a:off x="0" y="0"/>
-          <a:ext cx="0" cy="0"/>
-          <a:chOff x="0" y="0"/>
-          <a:chExt cx="0" cy="0"/>
-        </a:xfrm>
-      </p:grpSpPr>
-      <p:sp>
-        <p:nvSpPr>
-          <p:cNvPr id="4" name="슬라이드 번호 개체 틀 3">
-            <a:extLst>
-              <a:ext uri="{FF2B5EF4-FFF2-40B4-BE49-F238E27FC236}">
-                <a16:creationId xmlns:a16="http://schemas.microsoft.com/office/drawing/2014/main" id="{C2FC0956-2267-AA70-ECAA-20AC1CE3B992}"/>
-              </a:ext>
-            </a:extLst>
-          </p:cNvPr>
-          <p:cNvSpPr>
-            <a:spLocks noGrp="1"/>
-          </p:cNvSpPr>
-          <p:nvPr>
-            <p:ph type="sldNum" sz="quarter" idx="12"/>
-          </p:nvPr>
-        </p:nvSpPr>
-        <p:spPr>
-          <a:xfrm>
-            <a:off x="10514011" y="6036261"/>
-            <a:ext cx="753545" cy="365125"/>
-          </a:xfrm>
-        </p:spPr>
-        <p:txBody>
-          <a:bodyPr/>
-          <a:lstStyle/>
-          <a:p>
-            <a:fld id="{D57F1E4F-1CFF-5643-939E-217C01CDF565}" type="slidenum">
-              <a:rPr lang="en-US" smtClean="0"/>
-              <a:pPr/>
-              <a:t>19</a:t>
-            </a:fld>
-            <a:endParaRPr lang="en-US" dirty="0"/>
-          </a:p>
-        </p:txBody>
-      </p:sp>
-      <p:sp>
-        <p:nvSpPr>
-          <p:cNvPr id="3" name="제목 1">
-            <a:extLst>
-              <a:ext uri="{FF2B5EF4-FFF2-40B4-BE49-F238E27FC236}">
-                <a16:creationId xmlns:a16="http://schemas.microsoft.com/office/drawing/2014/main" id="{9F4A44E6-D3E3-3C22-7F65-FB46DBF44792}"/>
-              </a:ext>
-            </a:extLst>
-          </p:cNvPr>
-          <p:cNvSpPr txBox="1">
-            <a:spLocks/>
-          </p:cNvSpPr>
-          <p:nvPr/>
-        </p:nvSpPr>
-        <p:spPr>
-          <a:xfrm>
-            <a:off x="475645" y="481983"/>
-            <a:ext cx="10353762" cy="766439"/>
-          </a:xfrm>
-          <a:prstGeom prst="rect">
-            <a:avLst/>
-          </a:prstGeom>
-        </p:spPr>
-        <p:txBody>
-          <a:bodyPr vert="horz" lIns="91440" tIns="45720" rIns="91440" bIns="45720" rtlCol="0" anchor="ctr">
-            <a:normAutofit/>
-          </a:bodyPr>
-          <a:lstStyle>
-            <a:lvl1pPr algn="ctr" defTabSz="914400" rtl="0" eaLnBrk="1" latinLnBrk="1" hangingPunct="1">
-              <a:lnSpc>
-                <a:spcPct val="90000"/>
-              </a:lnSpc>
-              <a:spcBef>
-                <a:spcPct val="0"/>
-              </a:spcBef>
-              <a:buNone/>
-              <a:defRPr sz="3200" kern="1200" cap="all" baseline="0">
-                <a:solidFill>
-                  <a:schemeClr val="tx1"/>
-                </a:solidFill>
-                <a:effectLst/>
-                <a:latin typeface="Batang" panose="02030600000101010101" pitchFamily="18" charset="-127"/>
-                <a:ea typeface="Batang" panose="02030600000101010101" pitchFamily="18" charset="-127"/>
-                <a:cs typeface="+mj-cs"/>
-              </a:defRPr>
-            </a:lvl1pPr>
-          </a:lstStyle>
-          <a:p>
-            <a:pPr algn="l"/>
-            <a:r>
-              <a:rPr lang="en-US" altLang="ko-KR" sz="2800" cap="none" dirty="0">
-                <a:latin typeface="D2Coding" panose="020B0609020101020101" pitchFamily="49" charset="-127"/>
-                <a:ea typeface="D2Coding" panose="020B0609020101020101" pitchFamily="49" charset="-127"/>
-                <a:cs typeface="Segoe UI Light" panose="020B0502040204020203" pitchFamily="34" charset="0"/>
-              </a:rPr>
-              <a:t>YOLO: </a:t>
-            </a:r>
-            <a:r>
-              <a:rPr lang="en-US" altLang="ko-KR" sz="2800" cap="none" dirty="0">
-                <a:latin typeface="D2Coding" panose="020B0609020101020101" pitchFamily="49" charset="-127"/>
-                <a:ea typeface="D2Coding" panose="020B0609020101020101" pitchFamily="49" charset="-127"/>
-                <a:cs typeface="Segoe UI Light" panose="020B0502040204020203" pitchFamily="34" charset="0"/>
-                <a:hlinkClick r:id="rId2">
-                  <a:extLst>
-                    <a:ext uri="{A12FA001-AC4F-418D-AE19-62706E023703}">
-                      <ahyp:hlinkClr xmlns:ahyp="http://schemas.microsoft.com/office/drawing/2018/hyperlinkcolor" val="tx"/>
-                    </a:ext>
-                  </a:extLst>
-                </a:hlinkClick>
-              </a:rPr>
-              <a:t>What is YOLO algorithm?</a:t>
-            </a:r>
-            <a:endParaRPr lang="ko-KR" altLang="en-US" sz="2800" cap="none" dirty="0">
-              <a:latin typeface="D2Coding" panose="020B0609020101020101" pitchFamily="49" charset="-127"/>
-              <a:ea typeface="D2Coding" panose="020B0609020101020101" pitchFamily="49" charset="-127"/>
-              <a:cs typeface="Segoe UI Light" panose="020B0502040204020203" pitchFamily="34" charset="0"/>
-            </a:endParaRPr>
-          </a:p>
-        </p:txBody>
-      </p:sp>
-      <p:pic>
-        <p:nvPicPr>
-          <p:cNvPr id="5" name="그림 4">
-            <a:extLst>
-              <a:ext uri="{FF2B5EF4-FFF2-40B4-BE49-F238E27FC236}">
-                <a16:creationId xmlns:a16="http://schemas.microsoft.com/office/drawing/2014/main" id="{42EE9355-BCE3-59B9-FB09-0D84B020EFD1}"/>
-              </a:ext>
-            </a:extLst>
-          </p:cNvPr>
-          <p:cNvPicPr>
-            <a:picLocks noChangeAspect="1"/>
-          </p:cNvPicPr>
-          <p:nvPr/>
-        </p:nvPicPr>
-        <p:blipFill>
-          <a:blip r:embed="rId3"/>
-          <a:stretch>
-            <a:fillRect/>
-          </a:stretch>
-        </p:blipFill>
-        <p:spPr>
-          <a:xfrm>
-            <a:off x="1582724" y="1483553"/>
-            <a:ext cx="7635902" cy="4892464"/>
-          </a:xfrm>
-          <a:prstGeom prst="rect">
-            <a:avLst/>
-          </a:prstGeom>
-        </p:spPr>
-      </p:pic>
-    </p:spTree>
-    <p:extLst>
-      <p:ext uri="{BB962C8B-B14F-4D97-AF65-F5344CB8AC3E}">
-        <p14:creationId xmlns:p14="http://schemas.microsoft.com/office/powerpoint/2010/main" val="1427543698"/>
       </p:ext>
     </p:extLst>
   </p:cSld>
@@ -17637,6 +17915,187 @@
 </p:sld>
 </file>
 
+<file path=ppt/slides/slide20.xml><?xml version="1.0" encoding="utf-8"?>
+<p:sld xmlns:a="http://schemas.openxmlformats.org/drawingml/2006/main" xmlns:r="http://schemas.openxmlformats.org/officeDocument/2006/relationships" xmlns:p="http://schemas.openxmlformats.org/presentationml/2006/main">
+  <p:cSld>
+    <p:spTree>
+      <p:nvGrpSpPr>
+        <p:cNvPr id="1" name="">
+          <a:extLst>
+            <a:ext uri="{FF2B5EF4-FFF2-40B4-BE49-F238E27FC236}">
+              <a16:creationId xmlns:a16="http://schemas.microsoft.com/office/drawing/2014/main" id="{F104C44D-F297-6601-F332-F8D92566EC1A}"/>
+            </a:ext>
+          </a:extLst>
+        </p:cNvPr>
+        <p:cNvGrpSpPr/>
+        <p:nvPr/>
+      </p:nvGrpSpPr>
+      <p:grpSpPr>
+        <a:xfrm>
+          <a:off x="0" y="0"/>
+          <a:ext cx="0" cy="0"/>
+          <a:chOff x="0" y="0"/>
+          <a:chExt cx="0" cy="0"/>
+        </a:xfrm>
+      </p:grpSpPr>
+      <p:sp>
+        <p:nvSpPr>
+          <p:cNvPr id="4" name="슬라이드 번호 개체 틀 3">
+            <a:extLst>
+              <a:ext uri="{FF2B5EF4-FFF2-40B4-BE49-F238E27FC236}">
+                <a16:creationId xmlns:a16="http://schemas.microsoft.com/office/drawing/2014/main" id="{C2FC0956-2267-AA70-ECAA-20AC1CE3B992}"/>
+              </a:ext>
+            </a:extLst>
+          </p:cNvPr>
+          <p:cNvSpPr>
+            <a:spLocks noGrp="1"/>
+          </p:cNvSpPr>
+          <p:nvPr>
+            <p:ph type="sldNum" sz="quarter" idx="12"/>
+          </p:nvPr>
+        </p:nvSpPr>
+        <p:spPr>
+          <a:xfrm>
+            <a:off x="10514011" y="6036261"/>
+            <a:ext cx="753545" cy="365125"/>
+          </a:xfrm>
+        </p:spPr>
+        <p:txBody>
+          <a:bodyPr/>
+          <a:lstStyle/>
+          <a:p>
+            <a:fld id="{D57F1E4F-1CFF-5643-939E-217C01CDF565}" type="slidenum">
+              <a:rPr lang="en-US" smtClean="0"/>
+              <a:pPr/>
+              <a:t>20</a:t>
+            </a:fld>
+            <a:endParaRPr lang="en-US" dirty="0"/>
+          </a:p>
+        </p:txBody>
+      </p:sp>
+      <p:sp>
+        <p:nvSpPr>
+          <p:cNvPr id="3" name="제목 1">
+            <a:extLst>
+              <a:ext uri="{FF2B5EF4-FFF2-40B4-BE49-F238E27FC236}">
+                <a16:creationId xmlns:a16="http://schemas.microsoft.com/office/drawing/2014/main" id="{9F4A44E6-D3E3-3C22-7F65-FB46DBF44792}"/>
+              </a:ext>
+            </a:extLst>
+          </p:cNvPr>
+          <p:cNvSpPr txBox="1">
+            <a:spLocks/>
+          </p:cNvSpPr>
+          <p:nvPr/>
+        </p:nvSpPr>
+        <p:spPr>
+          <a:xfrm>
+            <a:off x="475645" y="481983"/>
+            <a:ext cx="10353762" cy="766439"/>
+          </a:xfrm>
+          <a:prstGeom prst="rect">
+            <a:avLst/>
+          </a:prstGeom>
+        </p:spPr>
+        <p:txBody>
+          <a:bodyPr vert="horz" lIns="91440" tIns="45720" rIns="91440" bIns="45720" rtlCol="0" anchor="ctr">
+            <a:normAutofit/>
+          </a:bodyPr>
+          <a:lstStyle>
+            <a:lvl1pPr algn="ctr" defTabSz="914400" rtl="0" eaLnBrk="1" latinLnBrk="1" hangingPunct="1">
+              <a:lnSpc>
+                <a:spcPct val="90000"/>
+              </a:lnSpc>
+              <a:spcBef>
+                <a:spcPct val="0"/>
+              </a:spcBef>
+              <a:buNone/>
+              <a:defRPr sz="3200" kern="1200" cap="all" baseline="0">
+                <a:solidFill>
+                  <a:schemeClr val="tx1"/>
+                </a:solidFill>
+                <a:effectLst/>
+                <a:latin typeface="Batang" panose="02030600000101010101" pitchFamily="18" charset="-127"/>
+                <a:ea typeface="Batang" panose="02030600000101010101" pitchFamily="18" charset="-127"/>
+                <a:cs typeface="+mj-cs"/>
+              </a:defRPr>
+            </a:lvl1pPr>
+          </a:lstStyle>
+          <a:p>
+            <a:pPr algn="l"/>
+            <a:r>
+              <a:rPr lang="en-US" altLang="ko-KR" sz="2800" cap="none" dirty="0">
+                <a:latin typeface="D2Coding" panose="020B0609020101020101" pitchFamily="49" charset="-127"/>
+                <a:ea typeface="D2Coding" panose="020B0609020101020101" pitchFamily="49" charset="-127"/>
+                <a:cs typeface="Segoe UI Light" panose="020B0502040204020203" pitchFamily="34" charset="0"/>
+              </a:rPr>
+              <a:t>YOLO: </a:t>
+            </a:r>
+            <a:r>
+              <a:rPr lang="en-US" altLang="ko-KR" sz="2800" cap="none" dirty="0">
+                <a:latin typeface="D2Coding" panose="020B0609020101020101" pitchFamily="49" charset="-127"/>
+                <a:ea typeface="D2Coding" panose="020B0609020101020101" pitchFamily="49" charset="-127"/>
+                <a:cs typeface="Segoe UI Light" panose="020B0502040204020203" pitchFamily="34" charset="0"/>
+                <a:hlinkClick r:id="rId2">
+                  <a:extLst>
+                    <a:ext uri="{A12FA001-AC4F-418D-AE19-62706E023703}">
+                      <ahyp:hlinkClr xmlns:ahyp="http://schemas.microsoft.com/office/drawing/2018/hyperlinkcolor" val="tx"/>
+                    </a:ext>
+                  </a:extLst>
+                </a:hlinkClick>
+              </a:rPr>
+              <a:t>What is YOLO algorithm?</a:t>
+            </a:r>
+            <a:endParaRPr lang="ko-KR" altLang="en-US" sz="2800" cap="none" dirty="0">
+              <a:latin typeface="D2Coding" panose="020B0609020101020101" pitchFamily="49" charset="-127"/>
+              <a:ea typeface="D2Coding" panose="020B0609020101020101" pitchFamily="49" charset="-127"/>
+              <a:cs typeface="Segoe UI Light" panose="020B0502040204020203" pitchFamily="34" charset="0"/>
+            </a:endParaRPr>
+          </a:p>
+        </p:txBody>
+      </p:sp>
+      <p:pic>
+        <p:nvPicPr>
+          <p:cNvPr id="5" name="그림 4">
+            <a:extLst>
+              <a:ext uri="{FF2B5EF4-FFF2-40B4-BE49-F238E27FC236}">
+                <a16:creationId xmlns:a16="http://schemas.microsoft.com/office/drawing/2014/main" id="{42EE9355-BCE3-59B9-FB09-0D84B020EFD1}"/>
+              </a:ext>
+            </a:extLst>
+          </p:cNvPr>
+          <p:cNvPicPr>
+            <a:picLocks noChangeAspect="1"/>
+          </p:cNvPicPr>
+          <p:nvPr/>
+        </p:nvPicPr>
+        <p:blipFill>
+          <a:blip r:embed="rId3"/>
+          <a:stretch>
+            <a:fillRect/>
+          </a:stretch>
+        </p:blipFill>
+        <p:spPr>
+          <a:xfrm>
+            <a:off x="1582724" y="1483553"/>
+            <a:ext cx="7635902" cy="4892464"/>
+          </a:xfrm>
+          <a:prstGeom prst="rect">
+            <a:avLst/>
+          </a:prstGeom>
+        </p:spPr>
+      </p:pic>
+    </p:spTree>
+    <p:extLst>
+      <p:ext uri="{BB962C8B-B14F-4D97-AF65-F5344CB8AC3E}">
+        <p14:creationId xmlns:p14="http://schemas.microsoft.com/office/powerpoint/2010/main" val="1427543698"/>
+      </p:ext>
+    </p:extLst>
+  </p:cSld>
+  <p:clrMapOvr>
+    <a:masterClrMapping/>
+  </p:clrMapOvr>
+</p:sld>
+</file>
+
 <file path=ppt/slides/slide3.xml><?xml version="1.0" encoding="utf-8"?>
 <p:sld xmlns:a="http://schemas.openxmlformats.org/drawingml/2006/main" xmlns:r="http://schemas.openxmlformats.org/officeDocument/2006/relationships" xmlns:p="http://schemas.openxmlformats.org/presentationml/2006/main">
   <p:cSld>
@@ -24625,7 +25084,7 @@
         </p:nvSpPr>
         <p:spPr>
           <a:xfrm>
-            <a:off x="4181475" y="6311384"/>
+            <a:off x="4248150" y="6311384"/>
             <a:ext cx="2981325" cy="307777"/>
           </a:xfrm>
           <a:prstGeom prst="rect">
